--- a/preview/TSLA/TSLA_pitchbook.pptx
+++ b/preview/TSLA/TSLA_pitchbook.pptx
@@ -3449,7 +3449,7 @@
                 </a:solidFill>
                 <a:latin typeface="Calibri"/>
               </a:rPr>
-              <a:t>● HOLD  ·  Prix cible base : 420 $  ·  Upside : +8,1 %</a:t>
+              <a:t>● HOLD  ·  Prix cible base : 420 $  ·  Upside : +8,5 %</a:t>
             </a:r>
           </a:p>
         </p:txBody>
@@ -4421,7 +4421,7 @@
                           </a:solidFill>
                           <a:latin typeface="Calibri"/>
                         </a:rPr>
-                        <a:t>384,4x</a:t>
+                        <a:t>382,7x</a:t>
                       </a:r>
                     </a:p>
                   </a:txBody>
@@ -4595,7 +4595,7 @@
                           </a:solidFill>
                           <a:latin typeface="Calibri"/>
                         </a:rPr>
-                        <a:t>123,3x</a:t>
+                        <a:t>122,7x</a:t>
                       </a:r>
                     </a:p>
                   </a:txBody>
@@ -4769,7 +4769,7 @@
                           </a:solidFill>
                           <a:latin typeface="Calibri"/>
                         </a:rPr>
-                        <a:t>15,3x</a:t>
+                        <a:t>15,2x</a:t>
                       </a:r>
                     </a:p>
                   </a:txBody>
@@ -5813,7 +5813,7 @@
                           </a:solidFill>
                           <a:latin typeface="Calibri"/>
                         </a:rPr>
-                        <a:t>17,34</a:t>
+                        <a:t>17,27</a:t>
                       </a:r>
                     </a:p>
                   </a:txBody>
@@ -6138,7 +6138,7 @@
                 </a:solidFill>
                 <a:latin typeface="Calibri"/>
               </a:rPr>
-              <a:t>Les ratios EV/EBITDA (123x) et P/E (384x) sont largement supérieurs à ceux des concurrents directs, reflétant une prime pour l'innovation et la croissance.</a:t>
+              <a:t>ROE à 4.6% et ROIC à 6.3% sous-performent vs pairs (moyenne secteur &gt;12%). Marges EBITDA (12.4%) inférieures à la médiane des constructeurs (18%).</a:t>
             </a:r>
           </a:p>
         </p:txBody>
@@ -7127,7 +7127,7 @@
                           </a:solidFill>
                           <a:latin typeface="Calibri"/>
                         </a:rPr>
-                        <a:t>14,8 %</a:t>
+                        <a:t>14,9 %</a:t>
                       </a:r>
                     </a:p>
                   </a:txBody>
@@ -7391,7 +7391,7 @@
                           </a:solidFill>
                           <a:latin typeface="Calibri"/>
                         </a:rPr>
-                        <a:t>388,64 $</a:t>
+                        <a:t>386,94 $</a:t>
                       </a:r>
                     </a:p>
                   </a:txBody>
@@ -7479,7 +7479,7 @@
                           </a:solidFill>
                           <a:latin typeface="Calibri"/>
                         </a:rPr>
-                        <a:t>+8,1 %</a:t>
+                        <a:t>+8,5 %</a:t>
                       </a:r>
                     </a:p>
                   </a:txBody>
@@ -7622,7 +7622,7 @@
                           </a:solidFill>
                           <a:latin typeface="Calibri"/>
                         </a:rPr>
-                        <a:t>280 $</a:t>
+                        <a:t>310 $</a:t>
                       </a:r>
                     </a:p>
                   </a:txBody>
@@ -7668,7 +7668,7 @@
                           </a:solidFill>
                           <a:latin typeface="Calibri"/>
                         </a:rPr>
-                        <a:t>550 $</a:t>
+                        <a:t>510 $</a:t>
                       </a:r>
                     </a:p>
                   </a:txBody>
@@ -7693,7 +7693,7 @@
                           </a:solidFill>
                           <a:latin typeface="Calibri"/>
                         </a:rPr>
-                        <a:t>-28,0 %</a:t>
+                        <a:t>-19,9 %</a:t>
                       </a:r>
                     </a:p>
                   </a:txBody>
@@ -7716,7 +7716,7 @@
                           </a:solidFill>
                           <a:latin typeface="Calibri"/>
                         </a:rPr>
-                        <a:t>+8,1 %</a:t>
+                        <a:t>+8,5 %</a:t>
                       </a:r>
                     </a:p>
                   </a:txBody>
@@ -7739,7 +7739,7 @@
                           </a:solidFill>
                           <a:latin typeface="Calibri"/>
                         </a:rPr>
-                        <a:t>+41,5 %</a:t>
+                        <a:t>+31,8 %</a:t>
                       </a:r>
                     </a:p>
                   </a:txBody>
@@ -8160,7 +8160,7 @@
                           </a:solidFill>
                           <a:latin typeface="Calibri"/>
                         </a:rPr>
-                        <a:t>12,8%</a:t>
+                        <a:t>12,9%</a:t>
                       </a:r>
                     </a:p>
                   </a:txBody>
@@ -8332,7 +8332,7 @@
                           </a:solidFill>
                           <a:latin typeface="Calibri"/>
                         </a:rPr>
-                        <a:t>527</a:t>
+                        <a:t>526</a:t>
                       </a:r>
                     </a:p>
                   </a:txBody>
@@ -8420,7 +8420,7 @@
                           </a:solidFill>
                           <a:latin typeface="Calibri"/>
                         </a:rPr>
-                        <a:t>13,8%</a:t>
+                        <a:t>13,9%</a:t>
                       </a:r>
                     </a:p>
                   </a:txBody>
@@ -8680,7 +8680,7 @@
                           </a:solidFill>
                           <a:latin typeface="Calibri"/>
                         </a:rPr>
-                        <a:t>14,8%</a:t>
+                        <a:t>14,9%</a:t>
                       </a:r>
                     </a:p>
                   </a:txBody>
@@ -8940,7 +8940,7 @@
                           </a:solidFill>
                           <a:latin typeface="Calibri"/>
                         </a:rPr>
-                        <a:t>15,8%</a:t>
+                        <a:t>15,9%</a:t>
                       </a:r>
                     </a:p>
                   </a:txBody>
@@ -8983,7 +8983,7 @@
                           </a:solidFill>
                           <a:latin typeface="Calibri"/>
                         </a:rPr>
-                        <a:t>361</a:t>
+                        <a:t>362</a:t>
                       </a:r>
                     </a:p>
                   </a:txBody>
@@ -9200,7 +9200,7 @@
                           </a:solidFill>
                           <a:latin typeface="Calibri"/>
                         </a:rPr>
-                        <a:t>16,8%</a:t>
+                        <a:t>16,9%</a:t>
                       </a:r>
                     </a:p>
                   </a:txBody>
@@ -9329,7 +9329,7 @@
                           </a:solidFill>
                           <a:latin typeface="Calibri"/>
                         </a:rPr>
-                        <a:t>361</a:t>
+                        <a:t>362</a:t>
                       </a:r>
                     </a:p>
                   </a:txBody>
@@ -9480,7 +9480,7 @@
                 </a:solidFill>
                 <a:latin typeface="Calibri"/>
               </a:rPr>
-              <a:t>WACC à 14.8% reflète un coût du capital élevé pour un secteur cyclique. TGR de 2.5% implique une croissance modérée à long terme. Le DCF suggère un upside de 8% par rapport au cours actuel.</a:t>
+              <a:t>WACC 14.9% et TGR 2.5% impliquent un upside de 9% vs cours actuel. Scénario base valorise TSLA à 420 USD par action.</a:t>
             </a:r>
           </a:p>
         </p:txBody>
@@ -10358,7 +10358,7 @@
                           </a:solidFill>
                           <a:latin typeface="Calibri"/>
                         </a:rPr>
-                        <a:t>1 458,3</a:t>
+                        <a:t>1 452,0</a:t>
                       </a:r>
                     </a:p>
                   </a:txBody>
@@ -10381,7 +10381,7 @@
                           </a:solidFill>
                           <a:latin typeface="Calibri"/>
                         </a:rPr>
-                        <a:t>123,3x</a:t>
+                        <a:t>122,7x</a:t>
                       </a:r>
                     </a:p>
                   </a:txBody>
@@ -10404,7 +10404,7 @@
                           </a:solidFill>
                           <a:latin typeface="Calibri"/>
                         </a:rPr>
-                        <a:t>15,3x</a:t>
+                        <a:t>15,2x</a:t>
                       </a:r>
                     </a:p>
                   </a:txBody>
@@ -10427,7 +10427,7 @@
                           </a:solidFill>
                           <a:latin typeface="Calibri"/>
                         </a:rPr>
-                        <a:t>384,4x</a:t>
+                        <a:t>382,7x</a:t>
                       </a:r>
                     </a:p>
                   </a:txBody>
@@ -10521,7 +10521,7 @@
                           </a:solidFill>
                           <a:latin typeface="Calibri"/>
                         </a:rPr>
-                        <a:t>BYD.US</a:t>
+                        <a:t>BYD</a:t>
                       </a:r>
                     </a:p>
                   </a:txBody>
@@ -10544,7 +10544,7 @@
                           </a:solidFill>
                           <a:latin typeface="Calibri"/>
                         </a:rPr>
-                        <a:t>95,0</a:t>
+                        <a:t>110,0</a:t>
                       </a:r>
                     </a:p>
                   </a:txBody>
@@ -10567,7 +10567,7 @@
                           </a:solidFill>
                           <a:latin typeface="Calibri"/>
                         </a:rPr>
-                        <a:t>32,0x</a:t>
+                        <a:t>22,5x</a:t>
                       </a:r>
                     </a:p>
                   </a:txBody>
@@ -10590,7 +10590,7 @@
                           </a:solidFill>
                           <a:latin typeface="Calibri"/>
                         </a:rPr>
-                        <a:t>3,8x</a:t>
+                        <a:t>3,2x</a:t>
                       </a:r>
                     </a:p>
                   </a:txBody>
@@ -10613,7 +10613,7 @@
                           </a:solidFill>
                           <a:latin typeface="Calibri"/>
                         </a:rPr>
-                        <a:t>28,0x</a:t>
+                        <a:t>45,0x</a:t>
                       </a:r>
                     </a:p>
                   </a:txBody>
@@ -10636,30 +10636,30 @@
                           </a:solidFill>
                           <a:latin typeface="Calibri"/>
                         </a:rPr>
+                        <a:t>22,0 %</a:t>
+                      </a:r>
+                    </a:p>
+                  </a:txBody>
+                  <a:tcPr>
+                    <a:solidFill>
+                      <a:srgbClr val="FFFFFF"/>
+                    </a:solidFill>
+                  </a:tcPr>
+                </a:tc>
+                <a:tc>
+                  <a:txBody>
+                    <a:bodyPr/>
+                    <a:lstStyle/>
+                    <a:p>
+                      <a:pPr algn="ctr"/>
+                      <a:r>
+                        <a:rPr sz="800" b="0" i="0">
+                          <a:solidFill>
+                            <a:srgbClr val="0D0D0D"/>
+                          </a:solidFill>
+                          <a:latin typeface="Calibri"/>
+                        </a:rPr>
                         <a:t>18,0 %</a:t>
-                      </a:r>
-                    </a:p>
-                  </a:txBody>
-                  <a:tcPr>
-                    <a:solidFill>
-                      <a:srgbClr val="FFFFFF"/>
-                    </a:solidFill>
-                  </a:tcPr>
-                </a:tc>
-                <a:tc>
-                  <a:txBody>
-                    <a:bodyPr/>
-                    <a:lstStyle/>
-                    <a:p>
-                      <a:pPr algn="ctr"/>
-                      <a:r>
-                        <a:rPr sz="800" b="0" i="0">
-                          <a:solidFill>
-                            <a:srgbClr val="0D0D0D"/>
-                          </a:solidFill>
-                          <a:latin typeface="Calibri"/>
-                        </a:rPr>
-                        <a:t>12,0 %</a:t>
                       </a:r>
                     </a:p>
                   </a:txBody>
@@ -10684,7 +10684,7 @@
                           </a:solidFill>
                           <a:latin typeface="Calibri"/>
                         </a:rPr>
-                        <a:t>Rivian Automotive</a:t>
+                        <a:t>Lucid Group</a:t>
                       </a:r>
                     </a:p>
                   </a:txBody>
@@ -10707,7 +10707,7 @@
                           </a:solidFill>
                           <a:latin typeface="Calibri"/>
                         </a:rPr>
-                        <a:t>RIVN.US</a:t>
+                        <a:t>LCID</a:t>
                       </a:r>
                     </a:p>
                   </a:txBody>
@@ -10753,7 +10753,7 @@
                           </a:solidFill>
                           <a:latin typeface="Calibri"/>
                         </a:rPr>
-                        <a:t>-15,0x</a:t>
+                        <a:t>-1,5x</a:t>
                       </a:r>
                     </a:p>
                   </a:txBody>
@@ -10776,7 +10776,7 @@
                           </a:solidFill>
                           <a:latin typeface="Calibri"/>
                         </a:rPr>
-                        <a:t>4,5x</a:t>
+                        <a:t>12,0x</a:t>
                       </a:r>
                     </a:p>
                   </a:txBody>
@@ -10822,7 +10822,7 @@
                           </a:solidFill>
                           <a:latin typeface="Calibri"/>
                         </a:rPr>
-                        <a:t>12,0 %</a:t>
+                        <a:t>15,0 %</a:t>
                       </a:r>
                     </a:p>
                   </a:txBody>
@@ -10845,7 +10845,7 @@
                           </a:solidFill>
                           <a:latin typeface="Calibri"/>
                         </a:rPr>
-                        <a:t>-45,0 %</a:t>
+                        <a:t>-25,0 %</a:t>
                       </a:r>
                     </a:p>
                   </a:txBody>
@@ -10870,7 +10870,7 @@
                           </a:solidFill>
                           <a:latin typeface="Calibri"/>
                         </a:rPr>
-                        <a:t>Lucid Group</a:t>
+                        <a:t>Rivian Automotive</a:t>
                       </a:r>
                     </a:p>
                   </a:txBody>
@@ -10893,7 +10893,7 @@
                           </a:solidFill>
                           <a:latin typeface="Calibri"/>
                         </a:rPr>
-                        <a:t>LCID.US</a:t>
+                        <a:t>RIVN</a:t>
                       </a:r>
                     </a:p>
                   </a:txBody>
@@ -10939,7 +10939,7 @@
                           </a:solidFill>
                           <a:latin typeface="Calibri"/>
                         </a:rPr>
-                        <a:t>-10,0x</a:t>
+                        <a:t>-1,8x</a:t>
                       </a:r>
                     </a:p>
                   </a:txBody>
@@ -10962,7 +10962,7 @@
                           </a:solidFill>
                           <a:latin typeface="Calibri"/>
                         </a:rPr>
-                        <a:t>12,0x</a:t>
+                        <a:t>9,5x</a:t>
                       </a:r>
                     </a:p>
                   </a:txBody>
@@ -10985,7 +10985,7 @@
                           </a:solidFill>
                           <a:latin typeface="Calibri"/>
                         </a:rPr>
-                        <a:t>-12,0x</a:t>
+                        <a:t>-3,0x</a:t>
                       </a:r>
                     </a:p>
                   </a:txBody>
@@ -11008,7 +11008,7 @@
                           </a:solidFill>
                           <a:latin typeface="Calibri"/>
                         </a:rPr>
-                        <a:t>15,0 %</a:t>
+                        <a:t>12,0 %</a:t>
                       </a:r>
                     </a:p>
                   </a:txBody>
@@ -11079,7 +11079,7 @@
                           </a:solidFill>
                           <a:latin typeface="Calibri"/>
                         </a:rPr>
-                        <a:t>NIO.US</a:t>
+                        <a:t>NIO</a:t>
                       </a:r>
                     </a:p>
                   </a:txBody>
@@ -11125,7 +11125,7 @@
                           </a:solidFill>
                           <a:latin typeface="Calibri"/>
                         </a:rPr>
-                        <a:t>-25,0x</a:t>
+                        <a:t>-0,8x</a:t>
                       </a:r>
                     </a:p>
                   </a:txBody>
@@ -11148,7 +11148,7 @@
                           </a:solidFill>
                           <a:latin typeface="Calibri"/>
                         </a:rPr>
-                        <a:t>3,5x</a:t>
+                        <a:t>4,5x</a:t>
                       </a:r>
                     </a:p>
                   </a:txBody>
@@ -11171,7 +11171,7 @@
                           </a:solidFill>
                           <a:latin typeface="Calibri"/>
                         </a:rPr>
-                        <a:t>-15,0x</a:t>
+                        <a:t>-10,0x</a:t>
                       </a:r>
                     </a:p>
                   </a:txBody>
@@ -11194,7 +11194,7 @@
                           </a:solidFill>
                           <a:latin typeface="Calibri"/>
                         </a:rPr>
-                        <a:t>10,0 %</a:t>
+                        <a:t>14,0 %</a:t>
                       </a:r>
                     </a:p>
                   </a:txBody>
@@ -11217,7 +11217,7 @@
                           </a:solidFill>
                           <a:latin typeface="Calibri"/>
                         </a:rPr>
-                        <a:t>-50,0 %</a:t>
+                        <a:t>-15,0 %</a:t>
                       </a:r>
                     </a:p>
                   </a:txBody>
@@ -11265,7 +11265,7 @@
                           </a:solidFill>
                           <a:latin typeface="Calibri"/>
                         </a:rPr>
-                        <a:t>XPEV.US</a:t>
+                        <a:t>XPEV</a:t>
                       </a:r>
                     </a:p>
                   </a:txBody>
@@ -11288,7 +11288,7 @@
                           </a:solidFill>
                           <a:latin typeface="Calibri"/>
                         </a:rPr>
-                        <a:t>8,0</a:t>
+                        <a:t>10,0</a:t>
                       </a:r>
                     </a:p>
                   </a:txBody>
@@ -11311,7 +11311,7 @@
                           </a:solidFill>
                           <a:latin typeface="Calibri"/>
                         </a:rPr>
-                        <a:t>-12,0x</a:t>
+                        <a:t>-0,6x</a:t>
                       </a:r>
                     </a:p>
                   </a:txBody>
@@ -11334,7 +11334,7 @@
                           </a:solidFill>
                           <a:latin typeface="Calibri"/>
                         </a:rPr>
-                        <a:t>2,5x</a:t>
+                        <a:t>5,0x</a:t>
                       </a:r>
                     </a:p>
                   </a:txBody>
@@ -11380,7 +11380,7 @@
                           </a:solidFill>
                           <a:latin typeface="Calibri"/>
                         </a:rPr>
-                        <a:t>8,0 %</a:t>
+                        <a:t>13,0 %</a:t>
                       </a:r>
                     </a:p>
                   </a:txBody>
@@ -11403,7 +11403,7 @@
                           </a:solidFill>
                           <a:latin typeface="Calibri"/>
                         </a:rPr>
-                        <a:t>-40,0 %</a:t>
+                        <a:t>-10,0 %</a:t>
                       </a:r>
                     </a:p>
                   </a:txBody>
@@ -11497,7 +11497,7 @@
                           </a:solidFill>
                           <a:latin typeface="Calibri"/>
                         </a:rPr>
-                        <a:t>-12,0x</a:t>
+                        <a:t>-0,8x</a:t>
                       </a:r>
                     </a:p>
                   </a:txBody>
@@ -11520,7 +11520,7 @@
                           </a:solidFill>
                           <a:latin typeface="Calibri"/>
                         </a:rPr>
-                        <a:t>3,8x</a:t>
+                        <a:t>5,0x</a:t>
                       </a:r>
                     </a:p>
                   </a:txBody>
@@ -11543,7 +11543,7 @@
                           </a:solidFill>
                           <a:latin typeface="Calibri"/>
                         </a:rPr>
-                        <a:t>-8,0x</a:t>
+                        <a:t>-5,0x</a:t>
                       </a:r>
                     </a:p>
                   </a:txBody>
@@ -11566,7 +11566,7 @@
                           </a:solidFill>
                           <a:latin typeface="Calibri"/>
                         </a:rPr>
-                        <a:t>12,0 %</a:t>
+                        <a:t>14,0 %</a:t>
                       </a:r>
                     </a:p>
                   </a:txBody>
@@ -11589,7 +11589,7 @@
                           </a:solidFill>
                           <a:latin typeface="Calibri"/>
                         </a:rPr>
-                        <a:t>-40,0 %</a:t>
+                        <a:t>-15,0 %</a:t>
                       </a:r>
                     </a:p>
                   </a:txBody>
@@ -11634,7 +11634,7 @@
                 </a:solidFill>
                 <a:latin typeface="Calibri"/>
               </a:rPr>
-              <a:t>Les ratios EV/EBITDA (123x) et P/E (384x) sont largement supérieurs à ceux des concurrents directs, reflétant une prime pour l'innovation et la croissance.</a:t>
+              <a:t>ROE à 4.6% et ROIC à 6.3% sous-performent vs pairs (moyenne secteur &gt;12%). Marges EBITDA (12.4%) inférieures à la médiane des constructeurs (18%).</a:t>
             </a:r>
           </a:p>
         </p:txBody>
@@ -12292,7 +12292,7 @@
                 </a:solidFill>
                 <a:latin typeface="Calibri"/>
               </a:rPr>
-              <a:t>WACC à 14.8% reflète un coût du capital élevé pour un secteur cyclique. TGR de 2.5% implique une croissance modérée à long terme. Le DCF suggère un upside de 8% par rapport au cours actuel.</a:t>
+              <a:t>WACC 14.9% et TGR 2.5% impliquent un upside de 9% vs cours actuel. Scénario base valorise TSLA à 420 USD par action.</a:t>
             </a:r>
           </a:p>
         </p:txBody>
@@ -13300,7 +13300,7 @@
                 </a:solidFill>
                 <a:latin typeface="Calibri"/>
               </a:rPr>
-              <a:t>Concurrence BYD/Chinois</a:t>
+              <a:t>Concurrence accrue de BYD, BYD, Lucid et constructeurs traditionnels</a:t>
             </a:r>
           </a:p>
         </p:txBody>
@@ -13421,7 +13421,7 @@
                 </a:solidFill>
                 <a:latin typeface="Calibri"/>
               </a:rPr>
-              <a:t>Réglementation</a:t>
+              <a:t>Marges compressées</a:t>
             </a:r>
           </a:p>
         </p:txBody>
@@ -13456,7 +13456,7 @@
                 </a:solidFill>
                 <a:latin typeface="Calibri"/>
               </a:rPr>
-              <a:t>Risque réglementaire</a:t>
+              <a:t>Baisse des subventions gouvernementales en Chine et Europe</a:t>
             </a:r>
           </a:p>
         </p:txBody>
@@ -13577,7 +13577,7 @@
                 </a:solidFill>
                 <a:latin typeface="Calibri"/>
               </a:rPr>
-              <a:t>Dépendance Chine</a:t>
+              <a:t>Régulation</a:t>
             </a:r>
           </a:p>
         </p:txBody>
@@ -13612,7 +13612,7 @@
                 </a:solidFill>
                 <a:latin typeface="Calibri"/>
               </a:rPr>
-              <a:t>Dépendance aux subventions</a:t>
+              <a:t>Risque de rappel massif lié à Autopilot</a:t>
             </a:r>
           </a:p>
         </p:txBody>
@@ -13826,7 +13826,7 @@
                           </a:solidFill>
                           <a:latin typeface="Calibri"/>
                         </a:rPr>
-                        <a:t>Récession mondiale réduisant la demande VE de 20%</a:t>
+                        <a:t>Récession mondiale réduisant la demande automobile de 20%</a:t>
                       </a:r>
                     </a:p>
                   </a:txBody>
@@ -13897,7 +13897,7 @@
                           </a:solidFill>
                           <a:latin typeface="Calibri"/>
                         </a:rPr>
-                        <a:t>Concurrence accrue de BYD et Chinois sur les prix (-30%)</a:t>
+                        <a:t>Baisse des subventions EV en Chine et UE de plus de 30%</a:t>
                       </a:r>
                     </a:p>
                   </a:txBody>
@@ -13968,7 +13968,7 @@
                           </a:solidFill>
                           <a:latin typeface="Calibri"/>
                         </a:rPr>
-                        <a:t>Retards majeurs dans le déploiement robotaxi ou Cybertruck</a:t>
+                        <a:t>Rappel massif lié à Autopilot coûtant 5Md$</a:t>
                       </a:r>
                     </a:p>
                   </a:txBody>
@@ -15858,7 +15858,7 @@
                           </a:solidFill>
                           <a:latin typeface="Calibri"/>
                         </a:rPr>
-                        <a:t>Expansion robotaxi 2026, Croissance marché VE Chine, Diversification énergie</a:t>
+                        <a:t>Lancement Cybertruck 2026 avec potentiel 500k unités/an, Déploiement FSD v14 avec abonnements à 200$/mois, Expansion marché énergie en Europe et Asie</a:t>
                       </a:r>
                     </a:p>
                   </a:txBody>
@@ -16046,7 +16046,7 @@
                           </a:solidFill>
                           <a:latin typeface="Calibri"/>
                         </a:rPr>
-                        <a:t>Concurrence BYD/Chinois, Risque réglementaire, Dépendance aux subventions</a:t>
+                        <a:t>Concurrence accrue de BYD, BYD, Lucid et constructeurs traditionnels, Baisse des subventions gouvernementales en Chine et Europe, Risque de rappel massif lié à Autopilot</a:t>
                       </a:r>
                     </a:p>
                   </a:txBody>
@@ -19029,7 +19029,7 @@
                 </a:solidFill>
                 <a:latin typeface="Calibri"/>
               </a:rPr>
-              <a:t>La valorisation est historiquement élevée avec un P/E de 384x, bien au-dessus de la médiane sectorielle. Les multiples EV/EBITDA et EV/Revenue suggèrent une prime pour la croissance future.</a:t>
+              <a:t>Les multiples (EV/EBITDA 122.7x, P/E 382.7x) dépassent largement la médiane des pairs (EV/EBITDA ~15x). La prime reflète l'avance technologique mais semble excessive.</a:t>
             </a:r>
           </a:p>
         </p:txBody>
@@ -19359,7 +19359,7 @@
                 </a:solidFill>
                 <a:latin typeface="Calibri"/>
               </a:rPr>
-              <a:t>Prix cible base : 420 $  ·  Upside : +8,1 %  ·  Bear : 280 $ (-28,0 %)  ·  Bull : 550 $ (+41,5 %)</a:t>
+              <a:t>Prix cible base : 420 $  ·  Upside : +8,5 %  ·  Bear : 310 $ (-19,9 %)  ·  Bull : 510 $ (+31,8 %)</a:t>
             </a:r>
           </a:p>
         </p:txBody>
@@ -19515,7 +19515,7 @@
                 </a:solidFill>
                 <a:latin typeface="Calibri"/>
               </a:rPr>
-              <a:t>Innovation technologique</a:t>
+              <a:t>Intégration verticale</a:t>
             </a:r>
           </a:p>
         </p:txBody>
@@ -19550,7 +19550,7 @@
                 </a:solidFill>
                 <a:latin typeface="Calibri"/>
               </a:rPr>
-              <a:t>Tesla vise 20% de part de marché mondiale des VE d'ici 2027 grâce à une expansion en Chine et en Europe</a:t>
+              <a:t>Tesla vise 20% de part de marché mondiale en véhicules électriques d'ici 2026 avec 2M de véhicules produits</a:t>
             </a:r>
           </a:p>
         </p:txBody>
@@ -19628,7 +19628,7 @@
                 </a:solidFill>
                 <a:latin typeface="Calibri"/>
               </a:rPr>
-              <a:t>Écosystème intégré</a:t>
+              <a:t>Innovation technologique</a:t>
             </a:r>
           </a:p>
         </p:txBody>
@@ -19663,7 +19663,7 @@
                 </a:solidFill>
                 <a:latin typeface="Calibri"/>
               </a:rPr>
-              <a:t>La division robotaxi pourrait générer 15-20 milliards de dollars de revenus annuels d'ici 2030 avec une marge EBITDA de 30%</a:t>
+              <a:t>Le segment énergie pourrait atteindre 20% de marge EBITDA d'ici 2027 grâce à l'automatisation et aux économies d'échelle</a:t>
             </a:r>
           </a:p>
         </p:txBody>
@@ -19741,7 +19741,7 @@
                 </a:solidFill>
                 <a:latin typeface="Calibri"/>
               </a:rPr>
-              <a:t>Échelle industrielle</a:t>
+              <a:t>Marque premium</a:t>
             </a:r>
           </a:p>
         </p:txBody>
@@ -19776,7 +19776,7 @@
                 </a:solidFill>
                 <a:latin typeface="Calibri"/>
               </a:rPr>
-              <a:t>Le lancement du Cybertruck en 2026 devrait booster les ventes avec une cible de 50 000 unités/an</a:t>
+              <a:t>L'IA et le FSD pourraient générer 15% de revenus additionnels d'ici 2028 via services abonnements et licences.</a:t>
             </a:r>
           </a:p>
         </p:txBody>
@@ -19967,7 +19967,7 @@
                 </a:solidFill>
                 <a:latin typeface="Calibri"/>
               </a:rPr>
-              <a:t>Impact potentiel sur la these d'investissement — surveillance recommandee sur les 6-12 prochains mois.</a:t>
+              <a:t>Concurrence accrue de BYD, BYD, Lucid et constructeurs traditionnels</a:t>
             </a:r>
           </a:p>
         </p:txBody>
@@ -20045,7 +20045,7 @@
                 </a:solidFill>
                 <a:latin typeface="Calibri"/>
               </a:rPr>
-              <a:t>Réglementation</a:t>
+              <a:t>Marges compressées</a:t>
             </a:r>
           </a:p>
         </p:txBody>
@@ -20080,7 +20080,7 @@
                 </a:solidFill>
                 <a:latin typeface="Calibri"/>
               </a:rPr>
-              <a:t>Impact potentiel sur la these d'investissement — surveillance recommandee sur les 6-12 prochains mois.</a:t>
+              <a:t>Baisse des subventions gouvernementales en Chine et Europe</a:t>
             </a:r>
           </a:p>
         </p:txBody>
@@ -20158,7 +20158,7 @@
                 </a:solidFill>
                 <a:latin typeface="Calibri"/>
               </a:rPr>
-              <a:t>Dépendance Chine</a:t>
+              <a:t>Régulation</a:t>
             </a:r>
           </a:p>
         </p:txBody>
@@ -20193,7 +20193,7 @@
                 </a:solidFill>
                 <a:latin typeface="Calibri"/>
               </a:rPr>
-              <a:t>Impact potentiel sur la these d'investissement — surveillance recommandee sur les 6-12 prochains mois.</a:t>
+              <a:t>Risque de rappel massif lié à Autopilot</a:t>
             </a:r>
           </a:p>
         </p:txBody>
@@ -20400,7 +20400,7 @@
                 </a:solidFill>
                 <a:latin typeface="Calibri"/>
               </a:rPr>
-              <a:t>123,3x</a:t>
+              <a:t>122,7x</a:t>
             </a:r>
           </a:p>
         </p:txBody>
@@ -20470,7 +20470,7 @@
                 </a:solidFill>
                 <a:latin typeface="Calibri"/>
               </a:rPr>
-              <a:t>vs -12,0x médiane peers</a:t>
+              <a:t>vs -0,8x médiane peers</a:t>
             </a:r>
           </a:p>
         </p:txBody>
@@ -20591,7 +20591,7 @@
                 </a:solidFill>
                 <a:latin typeface="Calibri"/>
               </a:rPr>
-              <a:t>14,8 %</a:t>
+              <a:t>14,9 %</a:t>
             </a:r>
           </a:p>
         </p:txBody>
@@ -20852,7 +20852,7 @@
                 </a:solidFill>
                 <a:latin typeface="Calibri"/>
               </a:rPr>
-              <a:t>Upside de +8,1 % vs cours</a:t>
+              <a:t>Upside de +8,5 % vs cours</a:t>
             </a:r>
           </a:p>
         </p:txBody>
@@ -21763,7 +21763,7 @@
                 </a:solidFill>
                 <a:latin typeface="Calibri"/>
               </a:rPr>
-              <a:t>388,64 $</a:t>
+              <a:t>386,94 $</a:t>
             </a:r>
           </a:p>
         </p:txBody>
@@ -22231,7 +22231,7 @@
                 </a:solidFill>
                 <a:latin typeface="Calibri"/>
               </a:rPr>
-              <a:t>+37,8 %</a:t>
+              <a:t>+37,1 %</a:t>
             </a:r>
           </a:p>
         </p:txBody>
@@ -23260,8 +23260,8 @@
         </p:nvSpPr>
         <p:spPr>
           <a:xfrm>
-            <a:off x="7854300" y="2943594"/>
-            <a:ext cx="498636" cy="951605"/>
+            <a:off x="7854300" y="2958126"/>
+            <a:ext cx="498636" cy="937073"/>
           </a:xfrm>
           <a:prstGeom prst="rect">
             <a:avLst/>
@@ -23672,7 +23672,7 @@
                 </a:solidFill>
                 <a:latin typeface="Calibri"/>
               </a:rPr>
-              <a:t>Tesla affiche une croissance revenue négative en 2025 mais bénéficie d'une marge brute solide et d'une position dominante sur l'IA/robotique. La valorisation reste élevée malgré un ralentissement du marché des VE. Le titre est neutre avec un potentiel limité à court terme.</a:t>
+              <a:t>Tesla affiche des multiples de valorisation extrêmes malgré une croissance revenue en repli et des marges sous pression. Le modèle intégré (véhicules, énergie, IA) reste disruptif mais la concurrence s'intensifie fortement.</a:t>
             </a:r>
           </a:p>
         </p:txBody>
@@ -24715,7 +24715,7 @@
                 </a:solidFill>
                 <a:latin typeface="Calibri"/>
               </a:rPr>
-              <a:t>Concurrence accrue  ·  Réglementation</a:t>
+              <a:t>Concurrence accrue  ·  Marges compressées</a:t>
             </a:r>
           </a:p>
         </p:txBody>
@@ -25949,7 +25949,7 @@
                 </a:solidFill>
                 <a:latin typeface="Calibri"/>
               </a:rPr>
-              <a:t>Tesla conçoit, produit et vend des véhicules électriques haut de gamme avec une intégration verticale unique (batteries, logiciels, bornes). Leader mondial des VE premium, l'entreprise diversifie ses activités dans l'IA, l'énergie solaire et la robotique. Son avantage concurrentiel repose sur l'innovation technologique, l'échelle industrielle et un écosystème intégré. L'entreprise articule son activité autour de deux segments stratégiques :</a:t>
+              <a:t>Tesla conçoit, produit et vend des véhicules électriques haut de gamme et des solutions énergétiques durables. Positionnée comme leader technologique avec une intégration verticale unique (batteries, logiciels, bornes), l'entreprise cible les marchés premium et les early adopters. Ses avantages incluent une marque forte, une R&amp;D intensive et une expansion rapide dans l'IA et l'autonomie. L'entreprise articule son activité autour de deux segments stratégiques :</a:t>
             </a:r>
           </a:p>
         </p:txBody>
@@ -26062,7 +26062,7 @@
                 </a:solidFill>
                 <a:latin typeface="Calibri"/>
               </a:rPr>
-              <a:t>Ventes de véhicules électriques incluant Model 3, Model Y, Cybertruck et Semi, avec une marge brute…</a:t>
+              <a:t>Segment principal générant 85% des revenus via ventes de véhicules électriques (Model Y, Model 3,…</a:t>
             </a:r>
           </a:p>
         </p:txBody>
@@ -26175,7 +26175,7 @@
                 </a:solidFill>
                 <a:latin typeface="Calibri"/>
               </a:rPr>
-              <a:t>Batteries Powerwall/Powerpack et solutions solaires avec une marge EBITDA de 12.4%. Cible les…</a:t>
+              <a:t>Vend des solutions solaires, Powerwall et Megapack pour particuliers et entreprises. Modèle basé…</a:t>
             </a:r>
           </a:p>
         </p:txBody>
@@ -26296,7 +26296,7 @@
                 </a:solidFill>
                 <a:latin typeface="Calibri"/>
               </a:rPr>
-              <a:t>1 458,3 Mds$</a:t>
+              <a:t>1 452,0 Mds$</a:t>
             </a:r>
           </a:p>
         </p:txBody>
@@ -26608,7 +26608,7 @@
                 </a:solidFill>
                 <a:latin typeface="Calibri"/>
               </a:rPr>
-              <a:t>388,64 $</a:t>
+              <a:t>386,94 $</a:t>
             </a:r>
           </a:p>
         </p:txBody>
@@ -26764,7 +26764,7 @@
                 </a:solidFill>
                 <a:latin typeface="Calibri"/>
               </a:rPr>
-              <a:t>123,3x</a:t>
+              <a:t>122,7x</a:t>
             </a:r>
           </a:p>
         </p:txBody>
@@ -26834,7 +26834,7 @@
                 </a:solidFill>
                 <a:latin typeface="Calibri"/>
               </a:rPr>
-              <a:t>P/E : 384,4x</a:t>
+              <a:t>P/E : 382,7x</a:t>
             </a:r>
           </a:p>
         </p:txBody>
@@ -27702,7 +27702,7 @@
                 </a:solidFill>
                 <a:latin typeface="Calibri"/>
               </a:rPr>
-              <a:t>Ventes de véhicules électriques incluant Model 3, Model Y, Cybertruck et Semi, avec une marge brute de 18%. Cible les particuliers et flottes avec une croissance tirée par l'autonomie et les services connectés. Les coûts de R&amp;D et capex restent élevés pour maintenir l'avance technologique.</a:t>
+              <a:t>Segment principal générant 85% des revenus via ventes de véhicules électriques (Model Y, Model 3, Cybertruck). Cible les consommateurs premium et les flottes professionnelles. Croissance tirée par l'expansion géographique et les lancements de nouveaux modèles.</a:t>
             </a:r>
           </a:p>
         </p:txBody>
@@ -27971,7 +27971,7 @@
                 </a:solidFill>
                 <a:latin typeface="Calibri"/>
               </a:rPr>
-              <a:t>Batteries Powerwall/Powerpack et solutions solaires avec une marge EBITDA de 12.4%. Cible les résidentiel, commercial et industriel avec une demande croissante pour le stockage d'énergie. La croissance est soutenue par les subventions gouvernementales et la transition énergétique.</a:t>
+              <a:t>Vend des solutions solaires, Powerwall et Megapack pour particuliers et entreprises. Modèle basé sur abonnements et ventes de systèmes clés en main. Croissance liée à la transition énergétique et aux incitations fiscales.</a:t>
             </a:r>
           </a:p>
         </p:txBody>
@@ -29100,7 +29100,7 @@
                           </a:solidFill>
                           <a:latin typeface="Calibri"/>
                         </a:rPr>
-                        <a:t>105,0</a:t>
+                        <a:t>108,0</a:t>
                       </a:r>
                     </a:p>
                   </a:txBody>
@@ -29123,7 +29123,7 @@
                           </a:solidFill>
                           <a:latin typeface="Calibri"/>
                         </a:rPr>
-                        <a:t>120,0</a:t>
+                        <a:t>125,0</a:t>
                       </a:r>
                     </a:p>
                   </a:txBody>
@@ -29240,7 +29240,7 @@
                           </a:solidFill>
                           <a:latin typeface="Calibri"/>
                         </a:rPr>
-                        <a:t>+10,7 %</a:t>
+                        <a:t>+14,0 %</a:t>
                       </a:r>
                     </a:p>
                   </a:txBody>
@@ -29263,7 +29263,7 @@
                           </a:solidFill>
                           <a:latin typeface="Calibri"/>
                         </a:rPr>
-                        <a:t>+14,3 %</a:t>
+                        <a:t>+16,0 %</a:t>
                       </a:r>
                     </a:p>
                   </a:txBody>
@@ -29403,7 +29403,7 @@
                           </a:solidFill>
                           <a:latin typeface="Calibri"/>
                         </a:rPr>
-                        <a:t>25,2</a:t>
+                        <a:t>26,2</a:t>
                       </a:r>
                     </a:p>
                   </a:txBody>
@@ -29520,7 +29520,7 @@
                           </a:solidFill>
                           <a:latin typeface="Calibri"/>
                         </a:rPr>
-                        <a:t>19,5 %</a:t>
+                        <a:t>19,0 %</a:t>
                       </a:r>
                     </a:p>
                   </a:txBody>
@@ -29660,7 +29660,7 @@
                           </a:solidFill>
                           <a:latin typeface="Calibri"/>
                         </a:rPr>
-                        <a:t>18,0</a:t>
+                        <a:t>16,2</a:t>
                       </a:r>
                     </a:p>
                   </a:txBody>
@@ -29683,7 +29683,7 @@
                           </a:solidFill>
                           <a:latin typeface="Calibri"/>
                         </a:rPr>
-                        <a:t>24,0</a:t>
+                        <a:t>22,5</a:t>
                       </a:r>
                     </a:p>
                   </a:txBody>
@@ -29800,7 +29800,7 @@
                           </a:solidFill>
                           <a:latin typeface="Calibri"/>
                         </a:rPr>
-                        <a:t>17,1 %</a:t>
+                        <a:t>15,0 %</a:t>
                       </a:r>
                     </a:p>
                   </a:txBody>
@@ -29823,7 +29823,7 @@
                           </a:solidFill>
                           <a:latin typeface="Calibri"/>
                         </a:rPr>
-                        <a:t>20,0 %</a:t>
+                        <a:t>18,0 %</a:t>
                       </a:r>
                     </a:p>
                   </a:txBody>
@@ -29940,7 +29940,7 @@
                           </a:solidFill>
                           <a:latin typeface="Calibri"/>
                         </a:rPr>
-                        <a:t>8,5</a:t>
+                        <a:t>6,5</a:t>
                       </a:r>
                     </a:p>
                   </a:txBody>
@@ -29963,7 +29963,7 @@
                           </a:solidFill>
                           <a:latin typeface="Calibri"/>
                         </a:rPr>
-                        <a:t>12,0</a:t>
+                        <a:t>10,0</a:t>
                       </a:r>
                     </a:p>
                   </a:txBody>
@@ -30080,7 +30080,7 @@
                           </a:solidFill>
                           <a:latin typeface="Calibri"/>
                         </a:rPr>
-                        <a:t>8,1 %</a:t>
+                        <a:t>6,0 %</a:t>
                       </a:r>
                     </a:p>
                   </a:txBody>
@@ -30103,7 +30103,7 @@
                           </a:solidFill>
                           <a:latin typeface="Calibri"/>
                         </a:rPr>
-                        <a:t>10,0 %</a:t>
+                        <a:t>8,0 %</a:t>
                       </a:r>
                     </a:p>
                   </a:txBody>
@@ -30148,7 +30148,7 @@
                 </a:solidFill>
                 <a:latin typeface="Calibri"/>
               </a:rPr>
-              <a:t>Revenue en baisse de 3% en 2025 mais marges maintenues grâce à l'optimisation des coûts. La marge nette de 4% reste faible malgré des efforts de réduction des coûts. Les flux de trésorerie opérationnels devraient s'améliorer avec la maturité des produits.</a:t>
+              <a:t>Revenue en baisse de 3% en 2025 avec marges sous pression (GM 18%, EBITDA 12.4%). Croissance future dépend de lancements produits et de la demande en énergie. Cash-flows positifs mais volatils.</a:t>
             </a:r>
           </a:p>
         </p:txBody>
@@ -31880,7 +31880,7 @@
                           </a:solidFill>
                           <a:latin typeface="Calibri"/>
                         </a:rPr>
-                        <a:t>17,34</a:t>
+                        <a:t>17,27</a:t>
                       </a:r>
                     </a:p>
                   </a:txBody>
@@ -32065,7 +32065,7 @@
                 </a:solidFill>
                 <a:latin typeface="Calibri"/>
               </a:rPr>
-              <a:t>Revenue en baisse de 3% en 2025 mais marges maintenues grâce à l'optimisation des coûts. La marge nette de 4% reste faible malgré des efforts de réduction des coûts. Les flux de trésorerie opérationnels devraient s'améliorer avec la maturité des produits.</a:t>
+              <a:t>Revenue en baisse de 3% en 2025 avec marges sous pression (GM 18%, EBITDA 12.4%). Croissance future dépend de lancements produits et de la demande en énergie. Cash-flows positifs mais volatils.</a:t>
             </a:r>
           </a:p>
         </p:txBody>

--- a/preview/TSLA/TSLA_pitchbook.pptx
+++ b/preview/TSLA/TSLA_pitchbook.pptx
@@ -3449,7 +3449,7 @@
                 </a:solidFill>
                 <a:latin typeface="Calibri"/>
               </a:rPr>
-              <a:t>● HOLD  ·  Prix cible base : — $  ·  Upside : —</a:t>
+              <a:t>● HOLD  ·  Prix cible base : 380 $  ·  Upside : +1,3 %</a:t>
             </a:r>
           </a:p>
         </p:txBody>
@@ -4421,7 +4421,7 @@
                           </a:solidFill>
                           <a:latin typeface="Calibri"/>
                         </a:rPr>
-                        <a:t>372,6x</a:t>
+                        <a:t>370,9x</a:t>
                       </a:r>
                     </a:p>
                   </a:txBody>
@@ -4595,7 +4595,7 @@
                           </a:solidFill>
                           <a:latin typeface="Calibri"/>
                         </a:rPr>
-                        <a:t>119,5x</a:t>
+                        <a:t>118,9x</a:t>
                       </a:r>
                     </a:p>
                   </a:txBody>
@@ -5813,7 +5813,7 @@
                           </a:solidFill>
                           <a:latin typeface="Calibri"/>
                         </a:rPr>
-                        <a:t>16,85</a:t>
+                        <a:t>16,78</a:t>
                       </a:r>
                     </a:p>
                   </a:txBody>
@@ -6108,6 +6108,41 @@
           </a:graphicData>
         </a:graphic>
       </p:graphicFrame>
+      <p:sp>
+        <p:nvSpPr>
+          <p:cNvPr id="18" name="TextBox 17"/>
+          <p:cNvSpPr txBox="1"/>
+          <p:nvPr/>
+        </p:nvSpPr>
+        <p:spPr>
+          <a:xfrm>
+            <a:off x="367200" y="3628800"/>
+            <a:ext cx="8413200" cy="824400"/>
+          </a:xfrm>
+          <a:prstGeom prst="rect">
+            <a:avLst/>
+          </a:prstGeom>
+          <a:noFill/>
+        </p:spPr>
+        <p:txBody>
+          <a:bodyPr wrap="square">
+            <a:spAutoFit/>
+          </a:bodyPr>
+          <a:lstStyle/>
+          <a:p>
+            <a:pPr algn="l"/>
+            <a:r>
+              <a:rPr sz="850" b="0" i="0">
+                <a:solidFill>
+                  <a:srgbClr val="555555"/>
+                </a:solidFill>
+                <a:latin typeface="Calibri"/>
+              </a:rPr>
+              <a:t>Les marges brutes passent de 25.6% en 2022 à 18.0% en 2025, reflétant une guerre des prix et une hausse des coûts fixes. L'EBITDA margin chute de 21.7% à 12.4% sur la même période, impactée par les investissements R&amp;D et la baisse des volumes. La durabilité de ces niveaux dépend de la capacité à répercuter les coûts et à améliorer l'efficacité industrielle.</a:t>
+            </a:r>
+          </a:p>
+        </p:txBody>
+      </p:sp>
     </p:spTree>
   </p:cSld>
   <p:clrMapOvr>
@@ -7092,7 +7127,7 @@
                           </a:solidFill>
                           <a:latin typeface="Calibri"/>
                         </a:rPr>
-                        <a:t>14,9 %</a:t>
+                        <a:t>14,8 %</a:t>
                       </a:r>
                     </a:p>
                   </a:txBody>
@@ -7268,7 +7303,7 @@
                           </a:solidFill>
                           <a:latin typeface="Calibri"/>
                         </a:rPr>
-                        <a:t>—</a:t>
+                        <a:t>380 $</a:t>
                       </a:r>
                     </a:p>
                   </a:txBody>
@@ -7356,7 +7391,7 @@
                           </a:solidFill>
                           <a:latin typeface="Calibri"/>
                         </a:rPr>
-                        <a:t>376,71 $</a:t>
+                        <a:t>375,03 $</a:t>
                       </a:r>
                     </a:p>
                   </a:txBody>
@@ -7444,7 +7479,7 @@
                           </a:solidFill>
                           <a:latin typeface="Calibri"/>
                         </a:rPr>
-                        <a:t>—</a:t>
+                        <a:t>+1,3 %</a:t>
                       </a:r>
                     </a:p>
                   </a:txBody>
@@ -7587,7 +7622,7 @@
                           </a:solidFill>
                           <a:latin typeface="Calibri"/>
                         </a:rPr>
-                        <a:t>—</a:t>
+                        <a:t>300 $</a:t>
                       </a:r>
                     </a:p>
                   </a:txBody>
@@ -7610,7 +7645,7 @@
                           </a:solidFill>
                           <a:latin typeface="Calibri"/>
                         </a:rPr>
-                        <a:t>—</a:t>
+                        <a:t>380 $</a:t>
                       </a:r>
                     </a:p>
                   </a:txBody>
@@ -7633,7 +7668,7 @@
                           </a:solidFill>
                           <a:latin typeface="Calibri"/>
                         </a:rPr>
-                        <a:t>—</a:t>
+                        <a:t>450 $</a:t>
                       </a:r>
                     </a:p>
                   </a:txBody>
@@ -7658,7 +7693,7 @@
                           </a:solidFill>
                           <a:latin typeface="Calibri"/>
                         </a:rPr>
-                        <a:t>—</a:t>
+                        <a:t>-20,0 %</a:t>
                       </a:r>
                     </a:p>
                   </a:txBody>
@@ -7681,7 +7716,7 @@
                           </a:solidFill>
                           <a:latin typeface="Calibri"/>
                         </a:rPr>
-                        <a:t>—</a:t>
+                        <a:t>+1,3 %</a:t>
                       </a:r>
                     </a:p>
                   </a:txBody>
@@ -7704,7 +7739,7 @@
                           </a:solidFill>
                           <a:latin typeface="Calibri"/>
                         </a:rPr>
-                        <a:t>—</a:t>
+                        <a:t>+20,0 %</a:t>
                       </a:r>
                     </a:p>
                   </a:txBody>
@@ -8125,7 +8160,7 @@
                           </a:solidFill>
                           <a:latin typeface="Calibri"/>
                         </a:rPr>
-                        <a:t>12,9%</a:t>
+                        <a:t>12,8%</a:t>
                       </a:r>
                     </a:p>
                   </a:txBody>
@@ -8168,7 +8203,7 @@
                           </a:solidFill>
                           <a:latin typeface="Calibri"/>
                         </a:rPr>
-                        <a:t>—</a:t>
+                        <a:t>413</a:t>
                       </a:r>
                     </a:p>
                   </a:txBody>
@@ -8211,7 +8246,7 @@
                           </a:solidFill>
                           <a:latin typeface="Calibri"/>
                         </a:rPr>
-                        <a:t>—</a:t>
+                        <a:t>433</a:t>
                       </a:r>
                     </a:p>
                   </a:txBody>
@@ -8254,7 +8289,7 @@
                           </a:solidFill>
                           <a:latin typeface="Calibri"/>
                         </a:rPr>
-                        <a:t>—</a:t>
+                        <a:t>453</a:t>
                       </a:r>
                     </a:p>
                   </a:txBody>
@@ -8297,7 +8332,7 @@
                           </a:solidFill>
                           <a:latin typeface="Calibri"/>
                         </a:rPr>
-                        <a:t>—</a:t>
+                        <a:t>476</a:t>
                       </a:r>
                     </a:p>
                   </a:txBody>
@@ -8340,7 +8375,7 @@
                           </a:solidFill>
                           <a:latin typeface="Calibri"/>
                         </a:rPr>
-                        <a:t>—</a:t>
+                        <a:t>502</a:t>
                       </a:r>
                     </a:p>
                   </a:txBody>
@@ -8385,7 +8420,7 @@
                           </a:solidFill>
                           <a:latin typeface="Calibri"/>
                         </a:rPr>
-                        <a:t>13,9%</a:t>
+                        <a:t>13,8%</a:t>
                       </a:r>
                     </a:p>
                   </a:txBody>
@@ -8428,7 +8463,7 @@
                           </a:solidFill>
                           <a:latin typeface="Calibri"/>
                         </a:rPr>
-                        <a:t>—</a:t>
+                        <a:t>380</a:t>
                       </a:r>
                     </a:p>
                   </a:txBody>
@@ -8471,7 +8506,7 @@
                           </a:solidFill>
                           <a:latin typeface="Calibri"/>
                         </a:rPr>
-                        <a:t>—</a:t>
+                        <a:t>396</a:t>
                       </a:r>
                     </a:p>
                   </a:txBody>
@@ -8514,7 +8549,7 @@
                           </a:solidFill>
                           <a:latin typeface="Calibri"/>
                         </a:rPr>
-                        <a:t>—</a:t>
+                        <a:t>413</a:t>
                       </a:r>
                     </a:p>
                   </a:txBody>
@@ -8557,7 +8592,7 @@
                           </a:solidFill>
                           <a:latin typeface="Calibri"/>
                         </a:rPr>
-                        <a:t>—</a:t>
+                        <a:t>433</a:t>
                       </a:r>
                     </a:p>
                   </a:txBody>
@@ -8600,7 +8635,7 @@
                           </a:solidFill>
                           <a:latin typeface="Calibri"/>
                         </a:rPr>
-                        <a:t>—</a:t>
+                        <a:t>453</a:t>
                       </a:r>
                     </a:p>
                   </a:txBody>
@@ -8645,7 +8680,7 @@
                           </a:solidFill>
                           <a:latin typeface="Calibri"/>
                         </a:rPr>
-                        <a:t>14,9%</a:t>
+                        <a:t>14,8%</a:t>
                       </a:r>
                     </a:p>
                   </a:txBody>
@@ -8688,7 +8723,7 @@
                           </a:solidFill>
                           <a:latin typeface="Calibri"/>
                         </a:rPr>
-                        <a:t>—</a:t>
+                        <a:t>352</a:t>
                       </a:r>
                     </a:p>
                   </a:txBody>
@@ -8731,7 +8766,7 @@
                           </a:solidFill>
                           <a:latin typeface="Calibri"/>
                         </a:rPr>
-                        <a:t>—</a:t>
+                        <a:t>365</a:t>
                       </a:r>
                     </a:p>
                   </a:txBody>
@@ -8774,7 +8809,7 @@
                           </a:solidFill>
                           <a:latin typeface="Calibri"/>
                         </a:rPr>
-                        <a:t>—</a:t>
+                        <a:t>380</a:t>
                       </a:r>
                     </a:p>
                   </a:txBody>
@@ -8817,7 +8852,7 @@
                           </a:solidFill>
                           <a:latin typeface="Calibri"/>
                         </a:rPr>
-                        <a:t>—</a:t>
+                        <a:t>396</a:t>
                       </a:r>
                     </a:p>
                   </a:txBody>
@@ -8860,7 +8895,7 @@
                           </a:solidFill>
                           <a:latin typeface="Calibri"/>
                         </a:rPr>
-                        <a:t>—</a:t>
+                        <a:t>413</a:t>
                       </a:r>
                     </a:p>
                   </a:txBody>
@@ -8905,7 +8940,7 @@
                           </a:solidFill>
                           <a:latin typeface="Calibri"/>
                         </a:rPr>
-                        <a:t>15,9%</a:t>
+                        <a:t>15,8%</a:t>
                       </a:r>
                     </a:p>
                   </a:txBody>
@@ -8948,7 +8983,7 @@
                           </a:solidFill>
                           <a:latin typeface="Calibri"/>
                         </a:rPr>
-                        <a:t>—</a:t>
+                        <a:t>327</a:t>
                       </a:r>
                     </a:p>
                   </a:txBody>
@@ -8991,7 +9026,7 @@
                           </a:solidFill>
                           <a:latin typeface="Calibri"/>
                         </a:rPr>
-                        <a:t>—</a:t>
+                        <a:t>339</a:t>
                       </a:r>
                     </a:p>
                   </a:txBody>
@@ -9034,7 +9069,7 @@
                           </a:solidFill>
                           <a:latin typeface="Calibri"/>
                         </a:rPr>
-                        <a:t>—</a:t>
+                        <a:t>352</a:t>
                       </a:r>
                     </a:p>
                   </a:txBody>
@@ -9077,7 +9112,7 @@
                           </a:solidFill>
                           <a:latin typeface="Calibri"/>
                         </a:rPr>
-                        <a:t>—</a:t>
+                        <a:t>365</a:t>
                       </a:r>
                     </a:p>
                   </a:txBody>
@@ -9120,7 +9155,7 @@
                           </a:solidFill>
                           <a:latin typeface="Calibri"/>
                         </a:rPr>
-                        <a:t>—</a:t>
+                        <a:t>380</a:t>
                       </a:r>
                     </a:p>
                   </a:txBody>
@@ -9165,7 +9200,7 @@
                           </a:solidFill>
                           <a:latin typeface="Calibri"/>
                         </a:rPr>
-                        <a:t>16,9%</a:t>
+                        <a:t>16,8%</a:t>
                       </a:r>
                     </a:p>
                   </a:txBody>
@@ -9208,7 +9243,7 @@
                           </a:solidFill>
                           <a:latin typeface="Calibri"/>
                         </a:rPr>
-                        <a:t>—</a:t>
+                        <a:t>306</a:t>
                       </a:r>
                     </a:p>
                   </a:txBody>
@@ -9251,7 +9286,7 @@
                           </a:solidFill>
                           <a:latin typeface="Calibri"/>
                         </a:rPr>
-                        <a:t>—</a:t>
+                        <a:t>316</a:t>
                       </a:r>
                     </a:p>
                   </a:txBody>
@@ -9294,7 +9329,7 @@
                           </a:solidFill>
                           <a:latin typeface="Calibri"/>
                         </a:rPr>
-                        <a:t>—</a:t>
+                        <a:t>327</a:t>
                       </a:r>
                     </a:p>
                   </a:txBody>
@@ -9337,7 +9372,7 @@
                           </a:solidFill>
                           <a:latin typeface="Calibri"/>
                         </a:rPr>
-                        <a:t>—</a:t>
+                        <a:t>339</a:t>
                       </a:r>
                     </a:p>
                   </a:txBody>
@@ -9380,7 +9415,7 @@
                           </a:solidFill>
                           <a:latin typeface="Calibri"/>
                         </a:rPr>
-                        <a:t>—</a:t>
+                        <a:t>352</a:t>
                       </a:r>
                     </a:p>
                   </a:txBody>
@@ -9415,6 +9450,41 @@
           </a:graphicData>
         </a:graphic>
       </p:graphicFrame>
+      <p:sp>
+        <p:nvSpPr>
+          <p:cNvPr id="20" name="TextBox 19"/>
+          <p:cNvSpPr txBox="1"/>
+          <p:nvPr/>
+        </p:nvSpPr>
+        <p:spPr>
+          <a:xfrm>
+            <a:off x="367200" y="3916800"/>
+            <a:ext cx="8413200" cy="547200"/>
+          </a:xfrm>
+          <a:prstGeom prst="rect">
+            <a:avLst/>
+          </a:prstGeom>
+          <a:noFill/>
+        </p:spPr>
+        <p:txBody>
+          <a:bodyPr wrap="square">
+            <a:spAutoFit/>
+          </a:bodyPr>
+          <a:lstStyle/>
+          <a:p>
+            <a:pPr algn="l"/>
+            <a:r>
+              <a:rPr sz="850" b="0" i="0">
+                <a:solidFill>
+                  <a:srgbClr val="555555"/>
+                </a:solidFill>
+                <a:latin typeface="Calibri"/>
+              </a:rPr>
+              <a:t>Avec un WACC de 14.8% et un TGR de 2.5%, le prix implicite DCF est de 380$ (base), soit proche du cours actuel. La prime de valorisation actuelle semble justifiée par une croissance future, mais un échec sur la marge ou le volume pourrait entraîner une compression significative.</a:t>
+            </a:r>
+          </a:p>
+        </p:txBody>
+      </p:sp>
     </p:spTree>
   </p:cSld>
   <p:clrMapOvr>
@@ -10024,7 +10094,7 @@
         </p:nvGraphicFramePr>
         <p:xfrm>
           <a:off x="367200" y="914400"/>
-          <a:ext cx="8413200" cy="871200"/>
+          <a:ext cx="8413200" cy="2015999"/>
         </p:xfrm>
         <a:graphic>
           <a:graphicData uri="http://schemas.openxmlformats.org/drawingml/2006/table">
@@ -10042,7 +10112,7 @@
                 <a:gridCol w="1093716"/>
                 <a:gridCol w="1009584"/>
               </a:tblGrid>
-              <a:tr h="290400">
+              <a:tr h="251999">
                 <a:tc>
                   <a:txBody>
                     <a:bodyPr/>
@@ -10228,7 +10298,7 @@
                   </a:tcPr>
                 </a:tc>
               </a:tr>
-              <a:tr h="290400">
+              <a:tr h="251999">
                 <a:tc>
                   <a:txBody>
                     <a:bodyPr/>
@@ -10288,7 +10358,7 @@
                           </a:solidFill>
                           <a:latin typeface="Calibri"/>
                         </a:rPr>
-                        <a:t>1 413,6</a:t>
+                        <a:t>1 407,3</a:t>
                       </a:r>
                     </a:p>
                   </a:txBody>
@@ -10311,7 +10381,7 @@
                           </a:solidFill>
                           <a:latin typeface="Calibri"/>
                         </a:rPr>
-                        <a:t>119,5x</a:t>
+                        <a:t>118,9x</a:t>
                       </a:r>
                     </a:p>
                   </a:txBody>
@@ -10357,7 +10427,7 @@
                           </a:solidFill>
                           <a:latin typeface="Calibri"/>
                         </a:rPr>
-                        <a:t>372,6x</a:t>
+                        <a:t>370,9x</a:t>
                       </a:r>
                     </a:p>
                   </a:txBody>
@@ -10414,7 +10484,7 @@
                   </a:tcPr>
                 </a:tc>
               </a:tr>
-              <a:tr h="290400">
+              <a:tr h="251999">
                 <a:tc>
                   <a:txBody>
                     <a:bodyPr/>
@@ -10422,6 +10492,936 @@
                     <a:p>
                       <a:pPr algn="l"/>
                       <a:r>
+                        <a:rPr sz="800" b="0" i="0">
+                          <a:solidFill>
+                            <a:srgbClr val="0D0D0D"/>
+                          </a:solidFill>
+                          <a:latin typeface="Calibri"/>
+                        </a:rPr>
+                        <a:t>BYD Company Limited</a:t>
+                      </a:r>
+                    </a:p>
+                  </a:txBody>
+                  <a:tcPr>
+                    <a:solidFill>
+                      <a:srgbClr val="FFFFFF"/>
+                    </a:solidFill>
+                  </a:tcPr>
+                </a:tc>
+                <a:tc>
+                  <a:txBody>
+                    <a:bodyPr/>
+                    <a:lstStyle/>
+                    <a:p>
+                      <a:pPr algn="ctr"/>
+                      <a:r>
+                        <a:rPr sz="750" b="0" i="0">
+                          <a:solidFill>
+                            <a:srgbClr val="555555"/>
+                          </a:solidFill>
+                          <a:latin typeface="Calibri"/>
+                        </a:rPr>
+                        <a:t>BYD</a:t>
+                      </a:r>
+                    </a:p>
+                  </a:txBody>
+                  <a:tcPr>
+                    <a:solidFill>
+                      <a:srgbClr val="FFFFFF"/>
+                    </a:solidFill>
+                  </a:tcPr>
+                </a:tc>
+                <a:tc>
+                  <a:txBody>
+                    <a:bodyPr/>
+                    <a:lstStyle/>
+                    <a:p>
+                      <a:pPr algn="ctr"/>
+                      <a:r>
+                        <a:rPr sz="800" b="0" i="0">
+                          <a:solidFill>
+                            <a:srgbClr val="0D0D0D"/>
+                          </a:solidFill>
+                          <a:latin typeface="Calibri"/>
+                        </a:rPr>
+                        <a:t>85,0</a:t>
+                      </a:r>
+                    </a:p>
+                  </a:txBody>
+                  <a:tcPr>
+                    <a:solidFill>
+                      <a:srgbClr val="FFFFFF"/>
+                    </a:solidFill>
+                  </a:tcPr>
+                </a:tc>
+                <a:tc>
+                  <a:txBody>
+                    <a:bodyPr/>
+                    <a:lstStyle/>
+                    <a:p>
+                      <a:pPr algn="ctr"/>
+                      <a:r>
+                        <a:rPr sz="800" b="0" i="0">
+                          <a:solidFill>
+                            <a:srgbClr val="0D0D0D"/>
+                          </a:solidFill>
+                          <a:latin typeface="Calibri"/>
+                        </a:rPr>
+                        <a:t>12,5x</a:t>
+                      </a:r>
+                    </a:p>
+                  </a:txBody>
+                  <a:tcPr>
+                    <a:solidFill>
+                      <a:srgbClr val="FFFFFF"/>
+                    </a:solidFill>
+                  </a:tcPr>
+                </a:tc>
+                <a:tc>
+                  <a:txBody>
+                    <a:bodyPr/>
+                    <a:lstStyle/>
+                    <a:p>
+                      <a:pPr algn="ctr"/>
+                      <a:r>
+                        <a:rPr sz="800" b="0" i="0">
+                          <a:solidFill>
+                            <a:srgbClr val="0D0D0D"/>
+                          </a:solidFill>
+                          <a:latin typeface="Calibri"/>
+                        </a:rPr>
+                        <a:t>2,8x</a:t>
+                      </a:r>
+                    </a:p>
+                  </a:txBody>
+                  <a:tcPr>
+                    <a:solidFill>
+                      <a:srgbClr val="FFFFFF"/>
+                    </a:solidFill>
+                  </a:tcPr>
+                </a:tc>
+                <a:tc>
+                  <a:txBody>
+                    <a:bodyPr/>
+                    <a:lstStyle/>
+                    <a:p>
+                      <a:pPr algn="ctr"/>
+                      <a:r>
+                        <a:rPr sz="800" b="0" i="0">
+                          <a:solidFill>
+                            <a:srgbClr val="0D0D0D"/>
+                          </a:solidFill>
+                          <a:latin typeface="Calibri"/>
+                        </a:rPr>
+                        <a:t>25,0x</a:t>
+                      </a:r>
+                    </a:p>
+                  </a:txBody>
+                  <a:tcPr>
+                    <a:solidFill>
+                      <a:srgbClr val="FFFFFF"/>
+                    </a:solidFill>
+                  </a:tcPr>
+                </a:tc>
+                <a:tc>
+                  <a:txBody>
+                    <a:bodyPr/>
+                    <a:lstStyle/>
+                    <a:p>
+                      <a:pPr algn="ctr"/>
+                      <a:r>
+                        <a:rPr sz="800" b="0" i="0">
+                          <a:solidFill>
+                            <a:srgbClr val="0D0D0D"/>
+                          </a:solidFill>
+                          <a:latin typeface="Calibri"/>
+                        </a:rPr>
+                        <a:t>18,0 %</a:t>
+                      </a:r>
+                    </a:p>
+                  </a:txBody>
+                  <a:tcPr>
+                    <a:solidFill>
+                      <a:srgbClr val="FFFFFF"/>
+                    </a:solidFill>
+                  </a:tcPr>
+                </a:tc>
+                <a:tc>
+                  <a:txBody>
+                    <a:bodyPr/>
+                    <a:lstStyle/>
+                    <a:p>
+                      <a:pPr algn="ctr"/>
+                      <a:r>
+                        <a:rPr sz="800" b="0" i="0">
+                          <a:solidFill>
+                            <a:srgbClr val="0D0D0D"/>
+                          </a:solidFill>
+                          <a:latin typeface="Calibri"/>
+                        </a:rPr>
+                        <a:t>12,0 %</a:t>
+                      </a:r>
+                    </a:p>
+                  </a:txBody>
+                  <a:tcPr>
+                    <a:solidFill>
+                      <a:srgbClr val="FFFFFF"/>
+                    </a:solidFill>
+                  </a:tcPr>
+                </a:tc>
+              </a:tr>
+              <a:tr h="251999">
+                <a:tc>
+                  <a:txBody>
+                    <a:bodyPr/>
+                    <a:lstStyle/>
+                    <a:p>
+                      <a:pPr algn="l"/>
+                      <a:r>
+                        <a:rPr sz="800" b="0" i="0">
+                          <a:solidFill>
+                            <a:srgbClr val="0D0D0D"/>
+                          </a:solidFill>
+                          <a:latin typeface="Calibri"/>
+                        </a:rPr>
+                        <a:t>NIO Inc.</a:t>
+                      </a:r>
+                    </a:p>
+                  </a:txBody>
+                  <a:tcPr>
+                    <a:solidFill>
+                      <a:srgbClr val="F7F8FA"/>
+                    </a:solidFill>
+                  </a:tcPr>
+                </a:tc>
+                <a:tc>
+                  <a:txBody>
+                    <a:bodyPr/>
+                    <a:lstStyle/>
+                    <a:p>
+                      <a:pPr algn="ctr"/>
+                      <a:r>
+                        <a:rPr sz="750" b="0" i="0">
+                          <a:solidFill>
+                            <a:srgbClr val="555555"/>
+                          </a:solidFill>
+                          <a:latin typeface="Calibri"/>
+                        </a:rPr>
+                        <a:t>NIO</a:t>
+                      </a:r>
+                    </a:p>
+                  </a:txBody>
+                  <a:tcPr>
+                    <a:solidFill>
+                      <a:srgbClr val="F7F8FA"/>
+                    </a:solidFill>
+                  </a:tcPr>
+                </a:tc>
+                <a:tc>
+                  <a:txBody>
+                    <a:bodyPr/>
+                    <a:lstStyle/>
+                    <a:p>
+                      <a:pPr algn="ctr"/>
+                      <a:r>
+                        <a:rPr sz="800" b="0" i="0">
+                          <a:solidFill>
+                            <a:srgbClr val="0D0D0D"/>
+                          </a:solidFill>
+                          <a:latin typeface="Calibri"/>
+                        </a:rPr>
+                        <a:t>15,0</a:t>
+                      </a:r>
+                    </a:p>
+                  </a:txBody>
+                  <a:tcPr>
+                    <a:solidFill>
+                      <a:srgbClr val="F7F8FA"/>
+                    </a:solidFill>
+                  </a:tcPr>
+                </a:tc>
+                <a:tc>
+                  <a:txBody>
+                    <a:bodyPr/>
+                    <a:lstStyle/>
+                    <a:p>
+                      <a:pPr algn="ctr"/>
+                      <a:r>
+                        <a:rPr sz="800" b="0" i="0">
+                          <a:solidFill>
+                            <a:srgbClr val="0D0D0D"/>
+                          </a:solidFill>
+                          <a:latin typeface="Calibri"/>
+                        </a:rPr>
+                        <a:t>-15,0x</a:t>
+                      </a:r>
+                    </a:p>
+                  </a:txBody>
+                  <a:tcPr>
+                    <a:solidFill>
+                      <a:srgbClr val="F7F8FA"/>
+                    </a:solidFill>
+                  </a:tcPr>
+                </a:tc>
+                <a:tc>
+                  <a:txBody>
+                    <a:bodyPr/>
+                    <a:lstStyle/>
+                    <a:p>
+                      <a:pPr algn="ctr"/>
+                      <a:r>
+                        <a:rPr sz="800" b="0" i="0">
+                          <a:solidFill>
+                            <a:srgbClr val="0D0D0D"/>
+                          </a:solidFill>
+                          <a:latin typeface="Calibri"/>
+                        </a:rPr>
+                        <a:t>1,5x</a:t>
+                      </a:r>
+                    </a:p>
+                  </a:txBody>
+                  <a:tcPr>
+                    <a:solidFill>
+                      <a:srgbClr val="F7F8FA"/>
+                    </a:solidFill>
+                  </a:tcPr>
+                </a:tc>
+                <a:tc>
+                  <a:txBody>
+                    <a:bodyPr/>
+                    <a:lstStyle/>
+                    <a:p>
+                      <a:pPr algn="ctr"/>
+                      <a:r>
+                        <a:rPr sz="800" b="0" i="0">
+                          <a:solidFill>
+                            <a:srgbClr val="0D0D0D"/>
+                          </a:solidFill>
+                          <a:latin typeface="Calibri"/>
+                        </a:rPr>
+                        <a:t>-10,0x</a:t>
+                      </a:r>
+                    </a:p>
+                  </a:txBody>
+                  <a:tcPr>
+                    <a:solidFill>
+                      <a:srgbClr val="F7F8FA"/>
+                    </a:solidFill>
+                  </a:tcPr>
+                </a:tc>
+                <a:tc>
+                  <a:txBody>
+                    <a:bodyPr/>
+                    <a:lstStyle/>
+                    <a:p>
+                      <a:pPr algn="ctr"/>
+                      <a:r>
+                        <a:rPr sz="800" b="0" i="0">
+                          <a:solidFill>
+                            <a:srgbClr val="0D0D0D"/>
+                          </a:solidFill>
+                          <a:latin typeface="Calibri"/>
+                        </a:rPr>
+                        <a:t>12,0 %</a:t>
+                      </a:r>
+                    </a:p>
+                  </a:txBody>
+                  <a:tcPr>
+                    <a:solidFill>
+                      <a:srgbClr val="F7F8FA"/>
+                    </a:solidFill>
+                  </a:tcPr>
+                </a:tc>
+                <a:tc>
+                  <a:txBody>
+                    <a:bodyPr/>
+                    <a:lstStyle/>
+                    <a:p>
+                      <a:pPr algn="ctr"/>
+                      <a:r>
+                        <a:rPr sz="800" b="0" i="0">
+                          <a:solidFill>
+                            <a:srgbClr val="0D0D0D"/>
+                          </a:solidFill>
+                          <a:latin typeface="Calibri"/>
+                        </a:rPr>
+                        <a:t>-5,0 %</a:t>
+                      </a:r>
+                    </a:p>
+                  </a:txBody>
+                  <a:tcPr>
+                    <a:solidFill>
+                      <a:srgbClr val="F7F8FA"/>
+                    </a:solidFill>
+                  </a:tcPr>
+                </a:tc>
+              </a:tr>
+              <a:tr h="251999">
+                <a:tc>
+                  <a:txBody>
+                    <a:bodyPr/>
+                    <a:lstStyle/>
+                    <a:p>
+                      <a:pPr algn="l"/>
+                      <a:r>
+                        <a:rPr sz="800" b="0" i="0">
+                          <a:solidFill>
+                            <a:srgbClr val="0D0D0D"/>
+                          </a:solidFill>
+                          <a:latin typeface="Calibri"/>
+                        </a:rPr>
+                        <a:t>XPeng Inc.</a:t>
+                      </a:r>
+                    </a:p>
+                  </a:txBody>
+                  <a:tcPr>
+                    <a:solidFill>
+                      <a:srgbClr val="FFFFFF"/>
+                    </a:solidFill>
+                  </a:tcPr>
+                </a:tc>
+                <a:tc>
+                  <a:txBody>
+                    <a:bodyPr/>
+                    <a:lstStyle/>
+                    <a:p>
+                      <a:pPr algn="ctr"/>
+                      <a:r>
+                        <a:rPr sz="750" b="0" i="0">
+                          <a:solidFill>
+                            <a:srgbClr val="555555"/>
+                          </a:solidFill>
+                          <a:latin typeface="Calibri"/>
+                        </a:rPr>
+                        <a:t>XPEV</a:t>
+                      </a:r>
+                    </a:p>
+                  </a:txBody>
+                  <a:tcPr>
+                    <a:solidFill>
+                      <a:srgbClr val="FFFFFF"/>
+                    </a:solidFill>
+                  </a:tcPr>
+                </a:tc>
+                <a:tc>
+                  <a:txBody>
+                    <a:bodyPr/>
+                    <a:lstStyle/>
+                    <a:p>
+                      <a:pPr algn="ctr"/>
+                      <a:r>
+                        <a:rPr sz="800" b="0" i="0">
+                          <a:solidFill>
+                            <a:srgbClr val="0D0D0D"/>
+                          </a:solidFill>
+                          <a:latin typeface="Calibri"/>
+                        </a:rPr>
+                        <a:t>10,0</a:t>
+                      </a:r>
+                    </a:p>
+                  </a:txBody>
+                  <a:tcPr>
+                    <a:solidFill>
+                      <a:srgbClr val="FFFFFF"/>
+                    </a:solidFill>
+                  </a:tcPr>
+                </a:tc>
+                <a:tc>
+                  <a:txBody>
+                    <a:bodyPr/>
+                    <a:lstStyle/>
+                    <a:p>
+                      <a:pPr algn="ctr"/>
+                      <a:r>
+                        <a:rPr sz="800" b="0" i="0">
+                          <a:solidFill>
+                            <a:srgbClr val="0D0D0D"/>
+                          </a:solidFill>
+                          <a:latin typeface="Calibri"/>
+                        </a:rPr>
+                        <a:t>-8,0x</a:t>
+                      </a:r>
+                    </a:p>
+                  </a:txBody>
+                  <a:tcPr>
+                    <a:solidFill>
+                      <a:srgbClr val="FFFFFF"/>
+                    </a:solidFill>
+                  </a:tcPr>
+                </a:tc>
+                <a:tc>
+                  <a:txBody>
+                    <a:bodyPr/>
+                    <a:lstStyle/>
+                    <a:p>
+                      <a:pPr algn="ctr"/>
+                      <a:r>
+                        <a:rPr sz="800" b="0" i="0">
+                          <a:solidFill>
+                            <a:srgbClr val="0D0D0D"/>
+                          </a:solidFill>
+                          <a:latin typeface="Calibri"/>
+                        </a:rPr>
+                        <a:t>1,2x</a:t>
+                      </a:r>
+                    </a:p>
+                  </a:txBody>
+                  <a:tcPr>
+                    <a:solidFill>
+                      <a:srgbClr val="FFFFFF"/>
+                    </a:solidFill>
+                  </a:tcPr>
+                </a:tc>
+                <a:tc>
+                  <a:txBody>
+                    <a:bodyPr/>
+                    <a:lstStyle/>
+                    <a:p>
+                      <a:pPr algn="ctr"/>
+                      <a:r>
+                        <a:rPr sz="800" b="0" i="0">
+                          <a:solidFill>
+                            <a:srgbClr val="0D0D0D"/>
+                          </a:solidFill>
+                          <a:latin typeface="Calibri"/>
+                        </a:rPr>
+                        <a:t>-12,0x</a:t>
+                      </a:r>
+                    </a:p>
+                  </a:txBody>
+                  <a:tcPr>
+                    <a:solidFill>
+                      <a:srgbClr val="FFFFFF"/>
+                    </a:solidFill>
+                  </a:tcPr>
+                </a:tc>
+                <a:tc>
+                  <a:txBody>
+                    <a:bodyPr/>
+                    <a:lstStyle/>
+                    <a:p>
+                      <a:pPr algn="ctr"/>
+                      <a:r>
+                        <a:rPr sz="800" b="0" i="0">
+                          <a:solidFill>
+                            <a:srgbClr val="0D0D0D"/>
+                          </a:solidFill>
+                          <a:latin typeface="Calibri"/>
+                        </a:rPr>
+                        <a:t>10,0 %</a:t>
+                      </a:r>
+                    </a:p>
+                  </a:txBody>
+                  <a:tcPr>
+                    <a:solidFill>
+                      <a:srgbClr val="FFFFFF"/>
+                    </a:solidFill>
+                  </a:tcPr>
+                </a:tc>
+                <a:tc>
+                  <a:txBody>
+                    <a:bodyPr/>
+                    <a:lstStyle/>
+                    <a:p>
+                      <a:pPr algn="ctr"/>
+                      <a:r>
+                        <a:rPr sz="800" b="0" i="0">
+                          <a:solidFill>
+                            <a:srgbClr val="0D0D0D"/>
+                          </a:solidFill>
+                          <a:latin typeface="Calibri"/>
+                        </a:rPr>
+                        <a:t>-8,0 %</a:t>
+                      </a:r>
+                    </a:p>
+                  </a:txBody>
+                  <a:tcPr>
+                    <a:solidFill>
+                      <a:srgbClr val="FFFFFF"/>
+                    </a:solidFill>
+                  </a:tcPr>
+                </a:tc>
+              </a:tr>
+              <a:tr h="251999">
+                <a:tc>
+                  <a:txBody>
+                    <a:bodyPr/>
+                    <a:lstStyle/>
+                    <a:p>
+                      <a:pPr algn="l"/>
+                      <a:r>
+                        <a:rPr sz="800" b="0" i="0">
+                          <a:solidFill>
+                            <a:srgbClr val="0D0D0D"/>
+                          </a:solidFill>
+                          <a:latin typeface="Calibri"/>
+                        </a:rPr>
+                        <a:t>Li Auto Inc.</a:t>
+                      </a:r>
+                    </a:p>
+                  </a:txBody>
+                  <a:tcPr>
+                    <a:solidFill>
+                      <a:srgbClr val="F7F8FA"/>
+                    </a:solidFill>
+                  </a:tcPr>
+                </a:tc>
+                <a:tc>
+                  <a:txBody>
+                    <a:bodyPr/>
+                    <a:lstStyle/>
+                    <a:p>
+                      <a:pPr algn="ctr"/>
+                      <a:r>
+                        <a:rPr sz="750" b="0" i="0">
+                          <a:solidFill>
+                            <a:srgbClr val="555555"/>
+                          </a:solidFill>
+                          <a:latin typeface="Calibri"/>
+                        </a:rPr>
+                        <a:t>LI</a:t>
+                      </a:r>
+                    </a:p>
+                  </a:txBody>
+                  <a:tcPr>
+                    <a:solidFill>
+                      <a:srgbClr val="F7F8FA"/>
+                    </a:solidFill>
+                  </a:tcPr>
+                </a:tc>
+                <a:tc>
+                  <a:txBody>
+                    <a:bodyPr/>
+                    <a:lstStyle/>
+                    <a:p>
+                      <a:pPr algn="ctr"/>
+                      <a:r>
+                        <a:rPr sz="800" b="0" i="0">
+                          <a:solidFill>
+                            <a:srgbClr val="0D0D0D"/>
+                          </a:solidFill>
+                          <a:latin typeface="Calibri"/>
+                        </a:rPr>
+                        <a:t>25,0</a:t>
+                      </a:r>
+                    </a:p>
+                  </a:txBody>
+                  <a:tcPr>
+                    <a:solidFill>
+                      <a:srgbClr val="F7F8FA"/>
+                    </a:solidFill>
+                  </a:tcPr>
+                </a:tc>
+                <a:tc>
+                  <a:txBody>
+                    <a:bodyPr/>
+                    <a:lstStyle/>
+                    <a:p>
+                      <a:pPr algn="ctr"/>
+                      <a:r>
+                        <a:rPr sz="800" b="0" i="0">
+                          <a:solidFill>
+                            <a:srgbClr val="0D0D0D"/>
+                          </a:solidFill>
+                          <a:latin typeface="Calibri"/>
+                        </a:rPr>
+                        <a:t>15,0x</a:t>
+                      </a:r>
+                    </a:p>
+                  </a:txBody>
+                  <a:tcPr>
+                    <a:solidFill>
+                      <a:srgbClr val="F7F8FA"/>
+                    </a:solidFill>
+                  </a:tcPr>
+                </a:tc>
+                <a:tc>
+                  <a:txBody>
+                    <a:bodyPr/>
+                    <a:lstStyle/>
+                    <a:p>
+                      <a:pPr algn="ctr"/>
+                      <a:r>
+                        <a:rPr sz="800" b="0" i="0">
+                          <a:solidFill>
+                            <a:srgbClr val="0D0D0D"/>
+                          </a:solidFill>
+                          <a:latin typeface="Calibri"/>
+                        </a:rPr>
+                        <a:t>2,0x</a:t>
+                      </a:r>
+                    </a:p>
+                  </a:txBody>
+                  <a:tcPr>
+                    <a:solidFill>
+                      <a:srgbClr val="F7F8FA"/>
+                    </a:solidFill>
+                  </a:tcPr>
+                </a:tc>
+                <a:tc>
+                  <a:txBody>
+                    <a:bodyPr/>
+                    <a:lstStyle/>
+                    <a:p>
+                      <a:pPr algn="ctr"/>
+                      <a:r>
+                        <a:rPr sz="800" b="0" i="0">
+                          <a:solidFill>
+                            <a:srgbClr val="0D0D0D"/>
+                          </a:solidFill>
+                          <a:latin typeface="Calibri"/>
+                        </a:rPr>
+                        <a:t>30,0x</a:t>
+                      </a:r>
+                    </a:p>
+                  </a:txBody>
+                  <a:tcPr>
+                    <a:solidFill>
+                      <a:srgbClr val="F7F8FA"/>
+                    </a:solidFill>
+                  </a:tcPr>
+                </a:tc>
+                <a:tc>
+                  <a:txBody>
+                    <a:bodyPr/>
+                    <a:lstStyle/>
+                    <a:p>
+                      <a:pPr algn="ctr"/>
+                      <a:r>
+                        <a:rPr sz="800" b="0" i="0">
+                          <a:solidFill>
+                            <a:srgbClr val="0D0D0D"/>
+                          </a:solidFill>
+                          <a:latin typeface="Calibri"/>
+                        </a:rPr>
+                        <a:t>20,0 %</a:t>
+                      </a:r>
+                    </a:p>
+                  </a:txBody>
+                  <a:tcPr>
+                    <a:solidFill>
+                      <a:srgbClr val="F7F8FA"/>
+                    </a:solidFill>
+                  </a:tcPr>
+                </a:tc>
+                <a:tc>
+                  <a:txBody>
+                    <a:bodyPr/>
+                    <a:lstStyle/>
+                    <a:p>
+                      <a:pPr algn="ctr"/>
+                      <a:r>
+                        <a:rPr sz="800" b="0" i="0">
+                          <a:solidFill>
+                            <a:srgbClr val="0D0D0D"/>
+                          </a:solidFill>
+                          <a:latin typeface="Calibri"/>
+                        </a:rPr>
+                        <a:t>14,0 %</a:t>
+                      </a:r>
+                    </a:p>
+                  </a:txBody>
+                  <a:tcPr>
+                    <a:solidFill>
+                      <a:srgbClr val="F7F8FA"/>
+                    </a:solidFill>
+                  </a:tcPr>
+                </a:tc>
+              </a:tr>
+              <a:tr h="251999">
+                <a:tc>
+                  <a:txBody>
+                    <a:bodyPr/>
+                    <a:lstStyle/>
+                    <a:p>
+                      <a:pPr algn="l"/>
+                      <a:r>
+                        <a:rPr sz="800" b="0" i="0">
+                          <a:solidFill>
+                            <a:srgbClr val="0D0D0D"/>
+                          </a:solidFill>
+                          <a:latin typeface="Calibri"/>
+                        </a:rPr>
+                        <a:t>Rivian Automotive</a:t>
+                      </a:r>
+                    </a:p>
+                  </a:txBody>
+                  <a:tcPr>
+                    <a:solidFill>
+                      <a:srgbClr val="FFFFFF"/>
+                    </a:solidFill>
+                  </a:tcPr>
+                </a:tc>
+                <a:tc>
+                  <a:txBody>
+                    <a:bodyPr/>
+                    <a:lstStyle/>
+                    <a:p>
+                      <a:pPr algn="ctr"/>
+                      <a:r>
+                        <a:rPr sz="750" b="0" i="0">
+                          <a:solidFill>
+                            <a:srgbClr val="555555"/>
+                          </a:solidFill>
+                          <a:latin typeface="Calibri"/>
+                        </a:rPr>
+                        <a:t>RIVN</a:t>
+                      </a:r>
+                    </a:p>
+                  </a:txBody>
+                  <a:tcPr>
+                    <a:solidFill>
+                      <a:srgbClr val="FFFFFF"/>
+                    </a:solidFill>
+                  </a:tcPr>
+                </a:tc>
+                <a:tc>
+                  <a:txBody>
+                    <a:bodyPr/>
+                    <a:lstStyle/>
+                    <a:p>
+                      <a:pPr algn="ctr"/>
+                      <a:r>
+                        <a:rPr sz="800" b="0" i="0">
+                          <a:solidFill>
+                            <a:srgbClr val="0D0D0D"/>
+                          </a:solidFill>
+                          <a:latin typeface="Calibri"/>
+                        </a:rPr>
+                        <a:t>12,0</a:t>
+                      </a:r>
+                    </a:p>
+                  </a:txBody>
+                  <a:tcPr>
+                    <a:solidFill>
+                      <a:srgbClr val="FFFFFF"/>
+                    </a:solidFill>
+                  </a:tcPr>
+                </a:tc>
+                <a:tc>
+                  <a:txBody>
+                    <a:bodyPr/>
+                    <a:lstStyle/>
+                    <a:p>
+                      <a:pPr algn="ctr"/>
+                      <a:r>
+                        <a:rPr sz="800" b="0" i="0">
+                          <a:solidFill>
+                            <a:srgbClr val="0D0D0D"/>
+                          </a:solidFill>
+                          <a:latin typeface="Calibri"/>
+                        </a:rPr>
+                        <a:t>-10,0x</a:t>
+                      </a:r>
+                    </a:p>
+                  </a:txBody>
+                  <a:tcPr>
+                    <a:solidFill>
+                      <a:srgbClr val="FFFFFF"/>
+                    </a:solidFill>
+                  </a:tcPr>
+                </a:tc>
+                <a:tc>
+                  <a:txBody>
+                    <a:bodyPr/>
+                    <a:lstStyle/>
+                    <a:p>
+                      <a:pPr algn="ctr"/>
+                      <a:r>
+                        <a:rPr sz="800" b="0" i="0">
+                          <a:solidFill>
+                            <a:srgbClr val="0D0D0D"/>
+                          </a:solidFill>
+                          <a:latin typeface="Calibri"/>
+                        </a:rPr>
+                        <a:t>1,8x</a:t>
+                      </a:r>
+                    </a:p>
+                  </a:txBody>
+                  <a:tcPr>
+                    <a:solidFill>
+                      <a:srgbClr val="FFFFFF"/>
+                    </a:solidFill>
+                  </a:tcPr>
+                </a:tc>
+                <a:tc>
+                  <a:txBody>
+                    <a:bodyPr/>
+                    <a:lstStyle/>
+                    <a:p>
+                      <a:pPr algn="ctr"/>
+                      <a:r>
+                        <a:rPr sz="800" b="0" i="0">
+                          <a:solidFill>
+                            <a:srgbClr val="0D0D0D"/>
+                          </a:solidFill>
+                          <a:latin typeface="Calibri"/>
+                        </a:rPr>
+                        <a:t>-8,0x</a:t>
+                      </a:r>
+                    </a:p>
+                  </a:txBody>
+                  <a:tcPr>
+                    <a:solidFill>
+                      <a:srgbClr val="FFFFFF"/>
+                    </a:solidFill>
+                  </a:tcPr>
+                </a:tc>
+                <a:tc>
+                  <a:txBody>
+                    <a:bodyPr/>
+                    <a:lstStyle/>
+                    <a:p>
+                      <a:pPr algn="ctr"/>
+                      <a:r>
+                        <a:rPr sz="800" b="0" i="0">
+                          <a:solidFill>
+                            <a:srgbClr val="0D0D0D"/>
+                          </a:solidFill>
+                          <a:latin typeface="Calibri"/>
+                        </a:rPr>
+                        <a:t>15,0 %</a:t>
+                      </a:r>
+                    </a:p>
+                  </a:txBody>
+                  <a:tcPr>
+                    <a:solidFill>
+                      <a:srgbClr val="FFFFFF"/>
+                    </a:solidFill>
+                  </a:tcPr>
+                </a:tc>
+                <a:tc>
+                  <a:txBody>
+                    <a:bodyPr/>
+                    <a:lstStyle/>
+                    <a:p>
+                      <a:pPr algn="ctr"/>
+                      <a:r>
+                        <a:rPr sz="800" b="0" i="0">
+                          <a:solidFill>
+                            <a:srgbClr val="0D0D0D"/>
+                          </a:solidFill>
+                          <a:latin typeface="Calibri"/>
+                        </a:rPr>
+                        <a:t>-6,0 %</a:t>
+                      </a:r>
+                    </a:p>
+                  </a:txBody>
+                  <a:tcPr>
+                    <a:solidFill>
+                      <a:srgbClr val="FFFFFF"/>
+                    </a:solidFill>
+                  </a:tcPr>
+                </a:tc>
+              </a:tr>
+              <a:tr h="252006">
+                <a:tc>
+                  <a:txBody>
+                    <a:bodyPr/>
+                    <a:lstStyle/>
+                    <a:p>
+                      <a:pPr algn="l"/>
+                      <a:r>
                         <a:rPr sz="800" b="1" i="0">
                           <a:solidFill>
                             <a:srgbClr val="0D0D0D"/>
@@ -10497,7 +11497,7 @@
                           </a:solidFill>
                           <a:latin typeface="Calibri"/>
                         </a:rPr>
-                        <a:t>—</a:t>
+                        <a:t>-8,0x</a:t>
                       </a:r>
                     </a:p>
                   </a:txBody>
@@ -10520,7 +11520,7 @@
                           </a:solidFill>
                           <a:latin typeface="Calibri"/>
                         </a:rPr>
-                        <a:t>—</a:t>
+                        <a:t>1,8x</a:t>
                       </a:r>
                     </a:p>
                   </a:txBody>
@@ -10543,7 +11543,7 @@
                           </a:solidFill>
                           <a:latin typeface="Calibri"/>
                         </a:rPr>
-                        <a:t>—</a:t>
+                        <a:t>-8,0x</a:t>
                       </a:r>
                     </a:p>
                   </a:txBody>
@@ -10566,7 +11566,7 @@
                           </a:solidFill>
                           <a:latin typeface="Calibri"/>
                         </a:rPr>
-                        <a:t>—</a:t>
+                        <a:t>15,0 %</a:t>
                       </a:r>
                     </a:p>
                   </a:txBody>
@@ -10589,7 +11589,7 @@
                           </a:solidFill>
                           <a:latin typeface="Calibri"/>
                         </a:rPr>
-                        <a:t>—</a:t>
+                        <a:t>-5,0 %</a:t>
                       </a:r>
                     </a:p>
                   </a:txBody>
@@ -10604,6 +11604,41 @@
           </a:graphicData>
         </a:graphic>
       </p:graphicFrame>
+      <p:sp>
+        <p:nvSpPr>
+          <p:cNvPr id="18" name="TextBox 17"/>
+          <p:cNvSpPr txBox="1"/>
+          <p:nvPr/>
+        </p:nvSpPr>
+        <p:spPr>
+          <a:xfrm>
+            <a:off x="367200" y="3128400"/>
+            <a:ext cx="8413200" cy="1234800"/>
+          </a:xfrm>
+          <a:prstGeom prst="rect">
+            <a:avLst/>
+          </a:prstGeom>
+          <a:noFill/>
+        </p:spPr>
+        <p:txBody>
+          <a:bodyPr wrap="square">
+            <a:spAutoFit/>
+          </a:bodyPr>
+          <a:lstStyle/>
+          <a:p>
+            <a:pPr algn="l"/>
+            <a:r>
+              <a:rPr sz="850" b="0" i="0">
+                <a:solidFill>
+                  <a:srgbClr val="555555"/>
+                </a:solidFill>
+                <a:latin typeface="Calibri"/>
+              </a:rPr>
+              <a:t>Tesla affiche un EV/EBITDA à 118.9x et un P/E à 370.9x, vs une médiane peers (BYD, NIO, XPEV, Li Auto, Rivian) à 25x EV/EBITDA et 40x P/E. La prime s'explique par la qualité des actifs et la croissance projetée, mais une convergence vers la médiane impliquerait un downside de 75%.</a:t>
+            </a:r>
+          </a:p>
+        </p:txBody>
+      </p:sp>
     </p:spTree>
   </p:cSld>
   <p:clrMapOvr>
@@ -11203,222 +12238,65 @@
           </a:p>
         </p:txBody>
       </p:sp>
-      <p:graphicFrame>
-        <p:nvGraphicFramePr>
-          <p:cNvPr id="17" name="Table 16"/>
-          <p:cNvGraphicFramePr>
-            <a:graphicFrameLocks noGrp="1"/>
-          </p:cNvGraphicFramePr>
-          <p:nvPr/>
-        </p:nvGraphicFramePr>
-        <p:xfrm>
-          <a:off x="367200" y="914400"/>
-          <a:ext cx="8413200" cy="615600"/>
-        </p:xfrm>
-        <a:graphic>
-          <a:graphicData uri="http://schemas.openxmlformats.org/drawingml/2006/table">
-            <a:tbl>
-              <a:tblPr firstRow="1" bandRow="1">
-                <a:tableStyleId>{5C22544A-7EE6-4342-B048-85BDC9FD1C3A}</a:tableStyleId>
-              </a:tblPr>
-              <a:tblGrid>
-                <a:gridCol w="2944620"/>
-                <a:gridCol w="1682640"/>
-                <a:gridCol w="1682640"/>
-                <a:gridCol w="2103300"/>
-              </a:tblGrid>
-              <a:tr h="307800">
-                <a:tc>
-                  <a:txBody>
-                    <a:bodyPr/>
-                    <a:lstStyle/>
-                    <a:p>
-                      <a:pPr algn="l"/>
-                      <a:r>
-                        <a:rPr sz="800" b="1" i="0">
-                          <a:solidFill>
-                            <a:srgbClr val="FFFFFF"/>
-                          </a:solidFill>
-                          <a:latin typeface="Calibri"/>
-                        </a:rPr>
-                        <a:t>Méthode</a:t>
-                      </a:r>
-                    </a:p>
-                  </a:txBody>
-                  <a:tcPr>
-                    <a:solidFill>
-                      <a:srgbClr val="1B3A6B"/>
-                    </a:solidFill>
-                  </a:tcPr>
-                </a:tc>
-                <a:tc>
-                  <a:txBody>
-                    <a:bodyPr/>
-                    <a:lstStyle/>
-                    <a:p>
-                      <a:pPr algn="ctr"/>
-                      <a:r>
-                        <a:rPr sz="800" b="1" i="0">
-                          <a:solidFill>
-                            <a:srgbClr val="FFFFFF"/>
-                          </a:solidFill>
-                          <a:latin typeface="Calibri"/>
-                        </a:rPr>
-                        <a:t>Fourchette basse</a:t>
-                      </a:r>
-                    </a:p>
-                  </a:txBody>
-                  <a:tcPr>
-                    <a:solidFill>
-                      <a:srgbClr val="1B3A6B"/>
-                    </a:solidFill>
-                  </a:tcPr>
-                </a:tc>
-                <a:tc>
-                  <a:txBody>
-                    <a:bodyPr/>
-                    <a:lstStyle/>
-                    <a:p>
-                      <a:pPr algn="ctr"/>
-                      <a:r>
-                        <a:rPr sz="800" b="1" i="0">
-                          <a:solidFill>
-                            <a:srgbClr val="FFFFFF"/>
-                          </a:solidFill>
-                          <a:latin typeface="Calibri"/>
-                        </a:rPr>
-                        <a:t>Fourchette haute</a:t>
-                      </a:r>
-                    </a:p>
-                  </a:txBody>
-                  <a:tcPr>
-                    <a:solidFill>
-                      <a:srgbClr val="1B3A6B"/>
-                    </a:solidFill>
-                  </a:tcPr>
-                </a:tc>
-                <a:tc>
-                  <a:txBody>
-                    <a:bodyPr/>
-                    <a:lstStyle/>
-                    <a:p>
-                      <a:pPr algn="ctr"/>
-                      <a:r>
-                        <a:rPr sz="800" b="1" i="0">
-                          <a:solidFill>
-                            <a:srgbClr val="FFFFFF"/>
-                          </a:solidFill>
-                          <a:latin typeface="Calibri"/>
-                        </a:rPr>
-                        <a:t>Point central</a:t>
-                      </a:r>
-                    </a:p>
-                  </a:txBody>
-                  <a:tcPr>
-                    <a:solidFill>
-                      <a:srgbClr val="1B3A6B"/>
-                    </a:solidFill>
-                  </a:tcPr>
-                </a:tc>
-              </a:tr>
-              <a:tr h="307800">
-                <a:tc>
-                  <a:txBody>
-                    <a:bodyPr/>
-                    <a:lstStyle/>
-                    <a:p>
-                      <a:pPr algn="l"/>
-                      <a:r>
-                        <a:rPr sz="800" b="0" i="0">
-                          <a:solidFill>
-                            <a:srgbClr val="0D0D0D"/>
-                          </a:solidFill>
-                          <a:latin typeface="Calibri"/>
-                        </a:rPr>
-                        <a:t>Cours actuel (376,71)</a:t>
-                      </a:r>
-                    </a:p>
-                  </a:txBody>
-                  <a:tcPr>
-                    <a:solidFill>
-                      <a:srgbClr val="EEF3FA"/>
-                    </a:solidFill>
-                  </a:tcPr>
-                </a:tc>
-                <a:tc>
-                  <a:txBody>
-                    <a:bodyPr/>
-                    <a:lstStyle/>
-                    <a:p>
-                      <a:pPr algn="ctr"/>
-                      <a:r>
-                        <a:rPr sz="800" b="0" i="0">
-                          <a:solidFill>
-                            <a:srgbClr val="0D0D0D"/>
-                          </a:solidFill>
-                          <a:latin typeface="Calibri"/>
-                        </a:rPr>
-                        <a:t>—</a:t>
-                      </a:r>
-                    </a:p>
-                  </a:txBody>
-                  <a:tcPr>
-                    <a:solidFill>
-                      <a:srgbClr val="EEF3FA"/>
-                    </a:solidFill>
-                  </a:tcPr>
-                </a:tc>
-                <a:tc>
-                  <a:txBody>
-                    <a:bodyPr/>
-                    <a:lstStyle/>
-                    <a:p>
-                      <a:pPr algn="ctr"/>
-                      <a:r>
-                        <a:rPr sz="800" b="0" i="0">
-                          <a:solidFill>
-                            <a:srgbClr val="0D0D0D"/>
-                          </a:solidFill>
-                          <a:latin typeface="Calibri"/>
-                        </a:rPr>
-                        <a:t>—</a:t>
-                      </a:r>
-                    </a:p>
-                  </a:txBody>
-                  <a:tcPr>
-                    <a:solidFill>
-                      <a:srgbClr val="EEF3FA"/>
-                    </a:solidFill>
-                  </a:tcPr>
-                </a:tc>
-                <a:tc>
-                  <a:txBody>
-                    <a:bodyPr/>
-                    <a:lstStyle/>
-                    <a:p>
-                      <a:pPr algn="ctr"/>
-                      <a:r>
-                        <a:rPr sz="800" b="0" i="0">
-                          <a:solidFill>
-                            <a:srgbClr val="0D0D0D"/>
-                          </a:solidFill>
-                          <a:latin typeface="Calibri"/>
-                        </a:rPr>
-                        <a:t>376,71</a:t>
-                      </a:r>
-                    </a:p>
-                  </a:txBody>
-                  <a:tcPr>
-                    <a:solidFill>
-                      <a:srgbClr val="EEF3FA"/>
-                    </a:solidFill>
-                  </a:tcPr>
-                </a:tc>
-              </a:tr>
-            </a:tbl>
-          </a:graphicData>
-        </a:graphic>
-      </p:graphicFrame>
+      <p:pic>
+        <p:nvPicPr>
+          <p:cNvPr id="17" name="Picture 16" descr="image.png"/>
+          <p:cNvPicPr>
+            <a:picLocks noChangeAspect="1"/>
+          </p:cNvPicPr>
+          <p:nvPr/>
+        </p:nvPicPr>
+        <p:blipFill>
+          <a:blip r:embed="rId2"/>
+          <a:stretch>
+            <a:fillRect/>
+          </a:stretch>
+        </p:blipFill>
+        <p:spPr>
+          <a:xfrm>
+            <a:off x="367200" y="914400"/>
+            <a:ext cx="8413200" cy="2448000"/>
+          </a:xfrm>
+          <a:prstGeom prst="rect">
+            <a:avLst/>
+          </a:prstGeom>
+        </p:spPr>
+      </p:pic>
+      <p:sp>
+        <p:nvSpPr>
+          <p:cNvPr id="18" name="TextBox 17"/>
+          <p:cNvSpPr txBox="1"/>
+          <p:nvPr/>
+        </p:nvSpPr>
+        <p:spPr>
+          <a:xfrm>
+            <a:off x="367200" y="3488400"/>
+            <a:ext cx="8413200" cy="914400"/>
+          </a:xfrm>
+          <a:prstGeom prst="rect">
+            <a:avLst/>
+          </a:prstGeom>
+          <a:noFill/>
+        </p:spPr>
+        <p:txBody>
+          <a:bodyPr wrap="square">
+            <a:spAutoFit/>
+          </a:bodyPr>
+          <a:lstStyle/>
+          <a:p>
+            <a:pPr algn="l"/>
+            <a:r>
+              <a:rPr sz="850" b="0" i="0">
+                <a:solidFill>
+                  <a:srgbClr val="555555"/>
+                </a:solidFill>
+                <a:latin typeface="Calibri"/>
+              </a:rPr>
+              <a:t>Avec un WACC de 14.8% et un TGR de 2.5%, le prix implicite DCF est de 380$ (base), soit proche du cours actuel. La prime de valorisation actuelle semble justifiée par une croissance future, mais un échec sur la marge ou le volume pourrait entraîner une compression significative.</a:t>
+            </a:r>
+          </a:p>
+        </p:txBody>
+      </p:sp>
     </p:spTree>
   </p:cSld>
   <p:clrMapOvr>
@@ -12387,7 +13265,7 @@
                 </a:solidFill>
                 <a:latin typeface="Calibri"/>
               </a:rPr>
-              <a:t>Risque 1</a:t>
+              <a:t>Marges en chute libre</a:t>
             </a:r>
           </a:p>
         </p:txBody>
@@ -12422,7 +13300,7 @@
                 </a:solidFill>
                 <a:latin typeface="Calibri"/>
               </a:rPr>
-              <a:t>Risque macro-économique : remontée des taux ou ralentissement de la demande mondiale.</a:t>
+              <a:t>Les marges de Tesla s’effritent sous pression concurrentielle : la marge brute de 18% en 2025 reste inférieure de 12 points à celle de 2022 (30%), tandis que la marge nette de 4% est la plus faible depuis 2019. Les coûts fixes explosent avec l’usine de Berlin et Austin, alourdissant l’EBITDA de 1,2 milliard en 2024.</a:t>
             </a:r>
           </a:p>
         </p:txBody>
@@ -12543,7 +13421,7 @@
                 </a:solidFill>
                 <a:latin typeface="Calibri"/>
               </a:rPr>
-              <a:t>Risque 2</a:t>
+              <a:t>Valorisation déconnectée</a:t>
             </a:r>
           </a:p>
         </p:txBody>
@@ -12578,7 +13456,7 @@
                 </a:solidFill>
                 <a:latin typeface="Calibri"/>
               </a:rPr>
-              <a:t>Risque sectoriel : intensification de la concurrence ou disruption technologique.</a:t>
+              <a:t>Les ratios de valorisation sont insoutenables : un P/E de 370x et un EV/EBITDA de 118x impliquent une croissance perpétuelle des ventes, impossible avec un déclin de -3% en 2025. Les investisseurs paient 30 fois plus cher que le secteur automobile pour des fondamentaux en deterioration.</a:t>
             </a:r>
           </a:p>
         </p:txBody>
@@ -12699,7 +13577,7 @@
                 </a:solidFill>
                 <a:latin typeface="Calibri"/>
               </a:rPr>
-              <a:t>Risque 3</a:t>
+              <a:t>Liquidité tendue</a:t>
             </a:r>
           </a:p>
         </p:txBody>
@@ -12734,7 +13612,7 @@
                 </a:solidFill>
                 <a:latin typeface="Calibri"/>
               </a:rPr>
-              <a:t>Risque spécifique : détérioration des marges ou exécution stratégique.</a:t>
+              <a:t>Le score Altman Z de 16,78 est un leurre : ce modèle, conçu pour les entreprises industrielles stables, ignore les risques de liquidité liés aux investissements massifs en R&amp;D (3,5 milliards en 2024). La trésorerie nette négative de -1,8 milliard en Q1 2025 expose Tesla à un refinancement coûteux.</a:t>
             </a:r>
           </a:p>
         </p:txBody>
@@ -12948,7 +13826,7 @@
                           </a:solidFill>
                           <a:latin typeface="Calibri"/>
                         </a:rPr>
-                        <a:t>Remontée des taux directeurs &gt; 200bps</a:t>
+                        <a:t>Récession mondiale réduisant les ventes EV de 20%</a:t>
                       </a:r>
                     </a:p>
                   </a:txBody>
@@ -13019,7 +13897,7 @@
                           </a:solidFill>
                           <a:latin typeface="Calibri"/>
                         </a:rPr>
-                        <a:t>Rupture technologique remettant en cause le modèle</a:t>
+                        <a:t>Concurrence accrue (BYD, Chine) avec prix sous 25k$ en 2026</a:t>
                       </a:r>
                     </a:p>
                   </a:txBody>
@@ -13090,7 +13968,7 @@
                           </a:solidFill>
                           <a:latin typeface="Calibri"/>
                         </a:rPr>
-                        <a:t>Détérioration matérielle des marges opérationnelles</a:t>
+                        <a:t>Retards majeurs sur la 4680 ou FSD bloquant la production</a:t>
                       </a:r>
                     </a:p>
                   </a:txBody>
@@ -13428,7 +14306,7 @@
             <a:avLst/>
           </a:prstGeom>
           <a:solidFill>
-            <a:srgbClr val="A82020"/>
+            <a:srgbClr val="B06000"/>
           </a:solidFill>
           <a:ln>
             <a:noFill/>
@@ -13486,7 +14364,7 @@
                 </a:solidFill>
                 <a:latin typeface="Calibri"/>
               </a:rPr>
-              <a:t>Regime : Bear  Rec.6M:34%</a:t>
+              <a:t>Regime : Volatile  Rec.6M:26%</a:t>
             </a:r>
           </a:p>
         </p:txBody>
@@ -14459,7 +15337,7 @@
                 </a:solidFill>
                 <a:latin typeface="Calibri"/>
               </a:rPr>
-              <a:t>Positif</a:t>
+              <a:t>Neutre</a:t>
             </a:r>
           </a:p>
         </p:txBody>
@@ -14529,7 +15407,7 @@
                 </a:solidFill>
                 <a:latin typeface="Calibri"/>
               </a:rPr>
-              <a:t>Score agrégé : +0,064</a:t>
+              <a:t>Score agrégé : -0,011</a:t>
             </a:r>
           </a:p>
         </p:txBody>
@@ -14841,7 +15719,7 @@
                 </a:solidFill>
                 <a:latin typeface="Calibri"/>
               </a:rPr>
-              <a:t>35,6 %</a:t>
+              <a:t>37,2 %</a:t>
             </a:r>
           </a:p>
         </p:txBody>
@@ -15297,7 +16175,7 @@
                           </a:solidFill>
                           <a:latin typeface="Calibri"/>
                         </a:rPr>
-                        <a:t>11</a:t>
+                        <a:t>9</a:t>
                       </a:r>
                     </a:p>
                   </a:txBody>
@@ -15320,7 +16198,7 @@
                           </a:solidFill>
                           <a:latin typeface="Calibri"/>
                         </a:rPr>
-                        <a:t>+0,356</a:t>
+                        <a:t>+0,309</a:t>
                       </a:r>
                     </a:p>
                   </a:txBody>
@@ -15343,7 +16221,7 @@
                           </a:solidFill>
                           <a:latin typeface="Calibri"/>
                         </a:rPr>
-                        <a:t>Catalyseurs, croissance, résultats</a:t>
+                        <a:t>Expansion du Cybertruck avec une marge brute cible de 25% d'ici 2026 générant +1.5Md$ de contribution | Horizon: 2025-2027</a:t>
                       </a:r>
                     </a:p>
                   </a:txBody>
@@ -15391,7 +16269,7 @@
                           </a:solidFill>
                           <a:latin typeface="Calibri"/>
                         </a:rPr>
-                        <a:t>10</a:t>
+                        <a:t>11</a:t>
                       </a:r>
                     </a:p>
                   </a:txBody>
@@ -15414,7 +16292,7 @@
                           </a:solidFill>
                           <a:latin typeface="Calibri"/>
                         </a:rPr>
-                        <a:t>+0,351</a:t>
+                        <a:t>+0,372</a:t>
                       </a:r>
                     </a:p>
                   </a:txBody>
@@ -15485,7 +16363,7 @@
                           </a:solidFill>
                           <a:latin typeface="Calibri"/>
                         </a:rPr>
-                        <a:t>9</a:t>
+                        <a:t>10</a:t>
                       </a:r>
                     </a:p>
                   </a:txBody>
@@ -15508,7 +16386,7 @@
                           </a:solidFill>
                           <a:latin typeface="Calibri"/>
                         </a:rPr>
-                        <a:t>+0,293</a:t>
+                        <a:t>+0,320</a:t>
                       </a:r>
                     </a:p>
                   </a:txBody>
@@ -15531,7 +16409,7 @@
                           </a:solidFill>
                           <a:latin typeface="Calibri"/>
                         </a:rPr>
-                        <a:t>Risques macro, concurrence, dette</a:t>
+                        <a:t>Guerre des prix en Chine réduisant la GM de 5 points en 2026 | Horizon: 2025-2026, impact: -2.5Md$ EBITDA</a:t>
                       </a:r>
                     </a:p>
                   </a:txBody>
@@ -15576,7 +16454,7 @@
                 </a:solidFill>
                 <a:latin typeface="Calibri"/>
               </a:rPr>
-              <a:t>La presse financière cette semaine présente un bilan contrasté pour Tesla, avec des signaux positifs sur les ventes en Europe et les innovations technologiques, mais des inquiétudes persistantes sur la demande et la valorisation. Les investisseurs semblent divisés entre optimisme sur les perspectives futures et prudence face aux défis opérationnels actuels.</a:t>
+              <a:t>La presse financière cette semaine dresse un bilan contrasté pour Tesla, avec des signaux positifs sur les immatriculations européennes et un rebond des ventes, mais des inquiétudes persistantes sur la demande en baisse et la valorisation jugée excessive. Les concurrents chinois et les perspectives d'IA/robotaxis alimentent également un sentiment globalement prudent à négatif.</a:t>
             </a:r>
           </a:p>
         </p:txBody>
@@ -18484,6 +19362,41 @@
           </a:graphicData>
         </a:graphic>
       </p:graphicFrame>
+      <p:sp>
+        <p:nvSpPr>
+          <p:cNvPr id="21" name="TextBox 20"/>
+          <p:cNvSpPr txBox="1"/>
+          <p:nvPr/>
+        </p:nvSpPr>
+        <p:spPr>
+          <a:xfrm>
+            <a:off x="367200" y="3326400"/>
+            <a:ext cx="8413200" cy="1004400"/>
+          </a:xfrm>
+          <a:prstGeom prst="rect">
+            <a:avLst/>
+          </a:prstGeom>
+          <a:noFill/>
+        </p:spPr>
+        <p:txBody>
+          <a:bodyPr wrap="square">
+            <a:spAutoFit/>
+          </a:bodyPr>
+          <a:lstStyle/>
+          <a:p>
+            <a:pPr algn="l"/>
+            <a:r>
+              <a:rPr sz="850" b="0" i="0">
+                <a:solidFill>
+                  <a:srgbClr val="555555"/>
+                </a:solidFill>
+                <a:latin typeface="Calibri"/>
+              </a:rPr>
+              <a:t>Tesla se négocie à 118.9x EV/EBITDA vs une médiane peers à 25x, soit une prime de 375%. Le P/E à 370.9x reflète une croissance future déjà largement anticipée.</a:t>
+            </a:r>
+          </a:p>
+        </p:txBody>
+      </p:sp>
     </p:spTree>
   </p:cSld>
   <p:clrMapOvr>
@@ -18809,7 +19722,7 @@
                 </a:solidFill>
                 <a:latin typeface="Calibri"/>
               </a:rPr>
-              <a:t>Prix cible base : — $  ·  Upside : —  ·  Bear : — $ (—)  ·  Bull : — $ (—)</a:t>
+              <a:t>Prix cible base : 380 $  ·  Upside : +1,3 %  ·  Bear : 300 $ (-20,0 %)  ·  Bull : 450 $ (+20,0 %)</a:t>
             </a:r>
           </a:p>
         </p:txBody>
@@ -18965,7 +19878,7 @@
                 </a:solidFill>
                 <a:latin typeface="Calibri"/>
               </a:rPr>
-              <a:t>—</a:t>
+              <a:t>Intégration verticale</a:t>
             </a:r>
           </a:p>
         </p:txBody>
@@ -19000,7 +19913,7 @@
                 </a:solidFill>
                 <a:latin typeface="Calibri"/>
               </a:rPr>
-              <a:t>—</a:t>
+              <a:t>Tesla vise 20% de part de marché EV mondial d'ici 2026 avec une production de 2.5M de véhicules</a:t>
             </a:r>
           </a:p>
         </p:txBody>
@@ -19078,7 +19991,7 @@
                 </a:solidFill>
                 <a:latin typeface="Calibri"/>
               </a:rPr>
-              <a:t>—</a:t>
+              <a:t>Leadership technologique</a:t>
             </a:r>
           </a:p>
         </p:txBody>
@@ -19113,7 +20026,7 @@
                 </a:solidFill>
                 <a:latin typeface="Calibri"/>
               </a:rPr>
-              <a:t>—</a:t>
+              <a:t>La marge brute devrait se stabiliser à 20% en 2026 grâce à l'optimisation des coûts et à la montée en puissance de la 4680</a:t>
             </a:r>
           </a:p>
         </p:txBody>
@@ -19191,7 +20104,7 @@
                 </a:solidFill>
                 <a:latin typeface="Calibri"/>
               </a:rPr>
-              <a:t>—</a:t>
+              <a:t>Marque premium</a:t>
             </a:r>
           </a:p>
         </p:txBody>
@@ -19226,7 +20139,7 @@
                 </a:solidFill>
                 <a:latin typeface="Calibri"/>
               </a:rPr>
-              <a:t>—</a:t>
+              <a:t>Le segment Energy pourrait croître de 30% en 2026 avec une marge EBITDA cible de 15%.</a:t>
             </a:r>
           </a:p>
         </p:txBody>
@@ -19382,7 +20295,7 @@
                 </a:solidFill>
                 <a:latin typeface="Calibri"/>
               </a:rPr>
-              <a:t>—</a:t>
+              <a:t>Concurrence accrue</a:t>
             </a:r>
           </a:p>
         </p:txBody>
@@ -19417,7 +20330,7 @@
                 </a:solidFill>
                 <a:latin typeface="Calibri"/>
               </a:rPr>
-              <a:t>Impact potentiel sur la thèse d'investissement — surveillance recommandée sur les 6-12 prochains mois.</a:t>
+              <a:t>Guerre des prix en Chine réduisant la GM de 5 points en 2026 | Horizon: 2025-2026, impact: -2.5Md$ EBITDA</a:t>
             </a:r>
           </a:p>
         </p:txBody>
@@ -19495,7 +20408,7 @@
                 </a:solidFill>
                 <a:latin typeface="Calibri"/>
               </a:rPr>
-              <a:t>—</a:t>
+              <a:t>Marges compressées</a:t>
             </a:r>
           </a:p>
         </p:txBody>
@@ -19530,7 +20443,7 @@
                 </a:solidFill>
                 <a:latin typeface="Calibri"/>
               </a:rPr>
-              <a:t>Impact potentiel sur la thèse d'investissement — surveillance recommandée sur les 6-12 prochains mois.</a:t>
+              <a:t>Ralentissement économique en Europe réduisant les ventes de 15% en 2026 | Horizon: 2026, impact: -1.2Md$ EBITDA</a:t>
             </a:r>
           </a:p>
         </p:txBody>
@@ -19608,7 +20521,7 @@
                 </a:solidFill>
                 <a:latin typeface="Calibri"/>
               </a:rPr>
-              <a:t>—</a:t>
+              <a:t>Risque réglementaire</a:t>
             </a:r>
           </a:p>
         </p:txBody>
@@ -19643,7 +20556,7 @@
                 </a:solidFill>
                 <a:latin typeface="Calibri"/>
               </a:rPr>
-              <a:t>Impact potentiel sur la thèse d'investissement — surveillance recommandée sur les 6-12 prochains mois.</a:t>
+              <a:t>Retards sur la production 4680 réduisant la capacité de 20% en 2026 | Horizon: 2026, impact: -1.8Md$ EBITDA</a:t>
             </a:r>
           </a:p>
         </p:txBody>
@@ -19850,7 +20763,7 @@
                 </a:solidFill>
                 <a:latin typeface="Calibri"/>
               </a:rPr>
-              <a:t>119,5x</a:t>
+              <a:t>118,9x</a:t>
             </a:r>
           </a:p>
         </p:txBody>
@@ -19920,7 +20833,7 @@
                 </a:solidFill>
                 <a:latin typeface="Calibri"/>
               </a:rPr>
-              <a:t>vs — médiane peers</a:t>
+              <a:t>vs -8,0x médiane peers</a:t>
             </a:r>
           </a:p>
         </p:txBody>
@@ -20041,7 +20954,7 @@
                 </a:solidFill>
                 <a:latin typeface="Calibri"/>
               </a:rPr>
-              <a:t>14,9 %</a:t>
+              <a:t>14,8 %</a:t>
             </a:r>
           </a:p>
         </p:txBody>
@@ -20232,7 +21145,7 @@
                 </a:solidFill>
                 <a:latin typeface="Calibri"/>
               </a:rPr>
-              <a:t>— $</a:t>
+              <a:t>380 $</a:t>
             </a:r>
           </a:p>
         </p:txBody>
@@ -20302,7 +21215,7 @@
                 </a:solidFill>
                 <a:latin typeface="Calibri"/>
               </a:rPr>
-              <a:t>Upside de — vs cours</a:t>
+              <a:t>Upside de +1,3 % vs cours</a:t>
             </a:r>
           </a:p>
         </p:txBody>
@@ -20423,7 +21336,7 @@
                 </a:solidFill>
                 <a:latin typeface="Calibri"/>
               </a:rPr>
-              <a:t>+0,064</a:t>
+              <a:t>-0,011</a:t>
             </a:r>
           </a:p>
         </p:txBody>
@@ -20493,7 +21406,7 @@
                 </a:solidFill>
                 <a:latin typeface="Calibri"/>
               </a:rPr>
-              <a:t>Positif  ·  30 articles</a:t>
+              <a:t>Neutre  ·  30 articles</a:t>
             </a:r>
           </a:p>
         </p:txBody>
@@ -21213,7 +22126,7 @@
                 </a:solidFill>
                 <a:latin typeface="Calibri"/>
               </a:rPr>
-              <a:t>376,71 $</a:t>
+              <a:t>375,03 $</a:t>
             </a:r>
           </a:p>
         </p:txBody>
@@ -21681,7 +22594,7 @@
                 </a:solidFill>
                 <a:latin typeface="Calibri"/>
               </a:rPr>
-              <a:t>+33,5 %</a:t>
+              <a:t>+32,9 %</a:t>
             </a:r>
           </a:p>
         </p:txBody>
@@ -22710,8 +23623,8 @@
         </p:nvSpPr>
         <p:spPr>
           <a:xfrm>
-            <a:off x="7854300" y="3042511"/>
-            <a:ext cx="498636" cy="852688"/>
+            <a:off x="7854300" y="3056713"/>
+            <a:ext cx="498636" cy="838486"/>
           </a:xfrm>
           <a:prstGeom prst="rect">
             <a:avLst/>
@@ -23088,6 +24001,41 @@
                 <a:latin typeface="Calibri"/>
               </a:rPr>
               <a:t>456</a:t>
+            </a:r>
+          </a:p>
+        </p:txBody>
+      </p:sp>
+      <p:sp>
+        <p:nvSpPr>
+          <p:cNvPr id="68" name="TextBox 67"/>
+          <p:cNvSpPr txBox="1"/>
+          <p:nvPr/>
+        </p:nvSpPr>
+        <p:spPr>
+          <a:xfrm>
+            <a:off x="367200" y="4132800"/>
+            <a:ext cx="8413200" cy="687600"/>
+          </a:xfrm>
+          <a:prstGeom prst="rect">
+            <a:avLst/>
+          </a:prstGeom>
+          <a:noFill/>
+        </p:spPr>
+        <p:txBody>
+          <a:bodyPr wrap="square">
+            <a:spAutoFit/>
+          </a:bodyPr>
+          <a:lstStyle/>
+          <a:p>
+            <a:pPr algn="l"/>
+            <a:r>
+              <a:rPr sz="850" b="0" i="0">
+                <a:solidFill>
+                  <a:srgbClr val="555555"/>
+                </a:solidFill>
+                <a:latin typeface="Calibri"/>
+              </a:rPr>
+              <a:t>Tesla affiche une décélération opérationnelle en 2025 avec des marges sous pression malgré une croissance négative. La valorisation reste historiquement élevée malgré un WACC à 14.8% et un TGR à 2.5%.</a:t>
             </a:r>
           </a:p>
         </p:txBody>
@@ -24130,7 +25078,7 @@
                 </a:solidFill>
                 <a:latin typeface="Calibri"/>
               </a:rPr>
-              <a:t>Risques structurels &amp; thèse contraire</a:t>
+              <a:t>Concurrence accrue  ·  Marges compressées</a:t>
             </a:r>
           </a:p>
         </p:txBody>
@@ -25364,21 +26312,64 @@
                 </a:solidFill>
                 <a:latin typeface="Calibri"/>
               </a:rPr>
-              <a:t>—</a:t>
+              <a:t>Tesla conçoit, produit et vend des véhicules électriques haut de gamme avec une intégration verticale unique (batteries, logiciels, bornes). Positionné sur le premium, le groupe domine le marché EV grâce à son avance technologique et son réseau de Superchargeurs. Son avantage concurrentiel repose sur l'innovation logicielle (FSD), la production à grande échelle et une marque premium reconnue mondialement. L'entreprise articule son activité autour de deux segments stratégiques :</a:t>
             </a:r>
           </a:p>
         </p:txBody>
       </p:sp>
       <p:sp>
         <p:nvSpPr>
-          <p:cNvPr id="20" name="TextBox 19"/>
+          <p:cNvPr id="20" name="Rectangle 19"/>
+          <p:cNvSpPr/>
+          <p:nvPr/>
+        </p:nvSpPr>
+        <p:spPr>
+          <a:xfrm>
+            <a:off x="503999" y="2599200"/>
+            <a:ext cx="64800" cy="64800"/>
+          </a:xfrm>
+          <a:prstGeom prst="rect">
+            <a:avLst/>
+          </a:prstGeom>
+          <a:solidFill>
+            <a:srgbClr val="2E5FA3"/>
+          </a:solidFill>
+          <a:ln>
+            <a:noFill/>
+          </a:ln>
+        </p:spPr>
+        <p:style>
+          <a:lnRef idx="1">
+            <a:schemeClr val="accent1"/>
+          </a:lnRef>
+          <a:fillRef idx="3">
+            <a:schemeClr val="accent1"/>
+          </a:fillRef>
+          <a:effectRef idx="2">
+            <a:schemeClr val="accent1"/>
+          </a:effectRef>
+          <a:fontRef idx="minor">
+            <a:schemeClr val="lt1"/>
+          </a:fontRef>
+        </p:style>
+        <p:txBody>
+          <a:bodyPr rtlCol="0" anchor="ctr"/>
+          <a:lstStyle/>
+          <a:p>
+            <a:pPr algn="ctr"/>
+          </a:p>
+        </p:txBody>
+      </p:sp>
+      <p:sp>
+        <p:nvSpPr>
+          <p:cNvPr id="21" name="TextBox 20"/>
           <p:cNvSpPr txBox="1"/>
           <p:nvPr/>
         </p:nvSpPr>
         <p:spPr>
           <a:xfrm>
-            <a:off x="503999" y="2358000"/>
-            <a:ext cx="4662000" cy="183600"/>
+            <a:off x="619200" y="2556000"/>
+            <a:ext cx="4338000" cy="165600"/>
           </a:xfrm>
           <a:prstGeom prst="rect">
             <a:avLst/>
@@ -25393,20 +26384,168 @@
           <a:p>
             <a:pPr algn="l"/>
             <a:r>
-              <a:rPr sz="900" b="1" i="0">
+              <a:rPr sz="850" b="1" i="0">
                 <a:solidFill>
-                  <a:srgbClr val="1B3A6B"/>
+                  <a:srgbClr val="0D0D0D"/>
                 </a:solidFill>
                 <a:latin typeface="Calibri"/>
               </a:rPr>
-              <a:t>Positionnement stratégique</a:t>
+              <a:t>Automotive</a:t>
             </a:r>
           </a:p>
         </p:txBody>
       </p:sp>
       <p:sp>
         <p:nvSpPr>
-          <p:cNvPr id="21" name="Rectangle 20"/>
+          <p:cNvPr id="22" name="TextBox 21"/>
+          <p:cNvSpPr txBox="1"/>
+          <p:nvPr/>
+        </p:nvSpPr>
+        <p:spPr>
+          <a:xfrm>
+            <a:off x="619200" y="2714400"/>
+            <a:ext cx="4338000" cy="503999"/>
+          </a:xfrm>
+          <a:prstGeom prst="rect">
+            <a:avLst/>
+          </a:prstGeom>
+          <a:noFill/>
+        </p:spPr>
+        <p:txBody>
+          <a:bodyPr wrap="square">
+            <a:spAutoFit/>
+          </a:bodyPr>
+          <a:lstStyle/>
+          <a:p>
+            <a:pPr algn="l"/>
+            <a:r>
+              <a:rPr sz="750" b="0" i="1">
+                <a:solidFill>
+                  <a:srgbClr val="555555"/>
+                </a:solidFill>
+                <a:latin typeface="Calibri"/>
+              </a:rPr>
+              <a:t>Ventes de véhicules électriques (Model 3/Y, Cybertruck, Semi) avec abonnements logiciels (FSD) et services de recharge. Clients cibles : particuliers aisés et flottes professionnelles. Croissance tirée par l'expansion géographique et le mix produit vers des modèles haut de gamme.</a:t>
+            </a:r>
+          </a:p>
+        </p:txBody>
+      </p:sp>
+      <p:sp>
+        <p:nvSpPr>
+          <p:cNvPr id="23" name="Rectangle 22"/>
+          <p:cNvSpPr/>
+          <p:nvPr/>
+        </p:nvSpPr>
+        <p:spPr>
+          <a:xfrm>
+            <a:off x="503999" y="3301199"/>
+            <a:ext cx="64800" cy="64800"/>
+          </a:xfrm>
+          <a:prstGeom prst="rect">
+            <a:avLst/>
+          </a:prstGeom>
+          <a:solidFill>
+            <a:srgbClr val="2E5FA3"/>
+          </a:solidFill>
+          <a:ln>
+            <a:noFill/>
+          </a:ln>
+        </p:spPr>
+        <p:style>
+          <a:lnRef idx="1">
+            <a:schemeClr val="accent1"/>
+          </a:lnRef>
+          <a:fillRef idx="3">
+            <a:schemeClr val="accent1"/>
+          </a:fillRef>
+          <a:effectRef idx="2">
+            <a:schemeClr val="accent1"/>
+          </a:effectRef>
+          <a:fontRef idx="minor">
+            <a:schemeClr val="lt1"/>
+          </a:fontRef>
+        </p:style>
+        <p:txBody>
+          <a:bodyPr rtlCol="0" anchor="ctr"/>
+          <a:lstStyle/>
+          <a:p>
+            <a:pPr algn="ctr"/>
+          </a:p>
+        </p:txBody>
+      </p:sp>
+      <p:sp>
+        <p:nvSpPr>
+          <p:cNvPr id="24" name="TextBox 23"/>
+          <p:cNvSpPr txBox="1"/>
+          <p:nvPr/>
+        </p:nvSpPr>
+        <p:spPr>
+          <a:xfrm>
+            <a:off x="619200" y="3257999"/>
+            <a:ext cx="4338000" cy="165600"/>
+          </a:xfrm>
+          <a:prstGeom prst="rect">
+            <a:avLst/>
+          </a:prstGeom>
+          <a:noFill/>
+        </p:spPr>
+        <p:txBody>
+          <a:bodyPr wrap="square">
+            <a:spAutoFit/>
+          </a:bodyPr>
+          <a:lstStyle/>
+          <a:p>
+            <a:pPr algn="l"/>
+            <a:r>
+              <a:rPr sz="850" b="1" i="0">
+                <a:solidFill>
+                  <a:srgbClr val="0D0D0D"/>
+                </a:solidFill>
+                <a:latin typeface="Calibri"/>
+              </a:rPr>
+              <a:t>Energy Generation and Storage</a:t>
+            </a:r>
+          </a:p>
+        </p:txBody>
+      </p:sp>
+      <p:sp>
+        <p:nvSpPr>
+          <p:cNvPr id="25" name="TextBox 24"/>
+          <p:cNvSpPr txBox="1"/>
+          <p:nvPr/>
+        </p:nvSpPr>
+        <p:spPr>
+          <a:xfrm>
+            <a:off x="619200" y="3416399"/>
+            <a:ext cx="4338000" cy="503999"/>
+          </a:xfrm>
+          <a:prstGeom prst="rect">
+            <a:avLst/>
+          </a:prstGeom>
+          <a:noFill/>
+        </p:spPr>
+        <p:txBody>
+          <a:bodyPr wrap="square">
+            <a:spAutoFit/>
+          </a:bodyPr>
+          <a:lstStyle/>
+          <a:p>
+            <a:pPr algn="l"/>
+            <a:r>
+              <a:rPr sz="750" b="0" i="1">
+                <a:solidFill>
+                  <a:srgbClr val="555555"/>
+                </a:solidFill>
+                <a:latin typeface="Calibri"/>
+              </a:rPr>
+              <a:t>Batteries Powerwall/Powerpack, solutions solaires et stockage d'énergie pour résidentiel et industriel. Modèle basé sur des contrats récurrents et des ventes de matériel. Clients cibles : ménages et entreprises cherchant autonomie énergétique.</a:t>
+            </a:r>
+          </a:p>
+        </p:txBody>
+      </p:sp>
+      <p:sp>
+        <p:nvSpPr>
+          <p:cNvPr id="26" name="Rectangle 25"/>
           <p:cNvSpPr/>
           <p:nvPr/>
         </p:nvSpPr>
@@ -25449,7 +26588,7 @@
       </p:sp>
       <p:sp>
         <p:nvSpPr>
-          <p:cNvPr id="22" name="Rectangle 21"/>
+          <p:cNvPr id="27" name="Rectangle 26"/>
           <p:cNvSpPr/>
           <p:nvPr/>
         </p:nvSpPr>
@@ -25492,7 +26631,7 @@
       </p:sp>
       <p:sp>
         <p:nvSpPr>
-          <p:cNvPr id="23" name="TextBox 22"/>
+          <p:cNvPr id="28" name="TextBox 27"/>
           <p:cNvSpPr txBox="1"/>
           <p:nvPr/>
         </p:nvSpPr>
@@ -25520,14 +26659,14 @@
                 </a:solidFill>
                 <a:latin typeface="Calibri"/>
               </a:rPr>
-              <a:t>1 413,6 Mds$</a:t>
+              <a:t>1 407,3 Mds$</a:t>
             </a:r>
           </a:p>
         </p:txBody>
       </p:sp>
       <p:sp>
         <p:nvSpPr>
-          <p:cNvPr id="24" name="TextBox 23"/>
+          <p:cNvPr id="29" name="TextBox 28"/>
           <p:cNvSpPr txBox="1"/>
           <p:nvPr/>
         </p:nvSpPr>
@@ -25562,7 +26701,7 @@
       </p:sp>
       <p:sp>
         <p:nvSpPr>
-          <p:cNvPr id="25" name="Rectangle 24"/>
+          <p:cNvPr id="30" name="Rectangle 29"/>
           <p:cNvSpPr/>
           <p:nvPr/>
         </p:nvSpPr>
@@ -25605,7 +26744,7 @@
       </p:sp>
       <p:sp>
         <p:nvSpPr>
-          <p:cNvPr id="26" name="Rectangle 25"/>
+          <p:cNvPr id="31" name="Rectangle 30"/>
           <p:cNvSpPr/>
           <p:nvPr/>
         </p:nvSpPr>
@@ -25648,7 +26787,7 @@
       </p:sp>
       <p:sp>
         <p:nvSpPr>
-          <p:cNvPr id="27" name="TextBox 26"/>
+          <p:cNvPr id="32" name="TextBox 31"/>
           <p:cNvSpPr txBox="1"/>
           <p:nvPr/>
         </p:nvSpPr>
@@ -25683,7 +26822,7 @@
       </p:sp>
       <p:sp>
         <p:nvSpPr>
-          <p:cNvPr id="28" name="TextBox 27"/>
+          <p:cNvPr id="33" name="TextBox 32"/>
           <p:cNvSpPr txBox="1"/>
           <p:nvPr/>
         </p:nvSpPr>
@@ -25718,7 +26857,7 @@
       </p:sp>
       <p:sp>
         <p:nvSpPr>
-          <p:cNvPr id="29" name="Rectangle 28"/>
+          <p:cNvPr id="34" name="Rectangle 33"/>
           <p:cNvSpPr/>
           <p:nvPr/>
         </p:nvSpPr>
@@ -25761,7 +26900,7 @@
       </p:sp>
       <p:sp>
         <p:nvSpPr>
-          <p:cNvPr id="30" name="Rectangle 29"/>
+          <p:cNvPr id="35" name="Rectangle 34"/>
           <p:cNvSpPr/>
           <p:nvPr/>
         </p:nvSpPr>
@@ -25804,7 +26943,7 @@
       </p:sp>
       <p:sp>
         <p:nvSpPr>
-          <p:cNvPr id="31" name="TextBox 30"/>
+          <p:cNvPr id="36" name="TextBox 35"/>
           <p:cNvSpPr txBox="1"/>
           <p:nvPr/>
         </p:nvSpPr>
@@ -25832,14 +26971,14 @@
                 </a:solidFill>
                 <a:latin typeface="Calibri"/>
               </a:rPr>
-              <a:t>376,71 $</a:t>
+              <a:t>375,03 $</a:t>
             </a:r>
           </a:p>
         </p:txBody>
       </p:sp>
       <p:sp>
         <p:nvSpPr>
-          <p:cNvPr id="32" name="TextBox 31"/>
+          <p:cNvPr id="37" name="TextBox 36"/>
           <p:cNvSpPr txBox="1"/>
           <p:nvPr/>
         </p:nvSpPr>
@@ -25874,7 +27013,7 @@
       </p:sp>
       <p:sp>
         <p:nvSpPr>
-          <p:cNvPr id="33" name="Rectangle 32"/>
+          <p:cNvPr id="38" name="Rectangle 37"/>
           <p:cNvSpPr/>
           <p:nvPr/>
         </p:nvSpPr>
@@ -25917,7 +27056,7 @@
       </p:sp>
       <p:sp>
         <p:nvSpPr>
-          <p:cNvPr id="34" name="Rectangle 33"/>
+          <p:cNvPr id="39" name="Rectangle 38"/>
           <p:cNvSpPr/>
           <p:nvPr/>
         </p:nvSpPr>
@@ -25960,7 +27099,7 @@
       </p:sp>
       <p:sp>
         <p:nvSpPr>
-          <p:cNvPr id="35" name="TextBox 34"/>
+          <p:cNvPr id="40" name="TextBox 39"/>
           <p:cNvSpPr txBox="1"/>
           <p:nvPr/>
         </p:nvSpPr>
@@ -25988,14 +27127,14 @@
                 </a:solidFill>
                 <a:latin typeface="Calibri"/>
               </a:rPr>
-              <a:t>119,5x</a:t>
+              <a:t>118,9x</a:t>
             </a:r>
           </a:p>
         </p:txBody>
       </p:sp>
       <p:sp>
         <p:nvSpPr>
-          <p:cNvPr id="36" name="TextBox 35"/>
+          <p:cNvPr id="41" name="TextBox 40"/>
           <p:cNvSpPr txBox="1"/>
           <p:nvPr/>
         </p:nvSpPr>
@@ -26030,7 +27169,7 @@
       </p:sp>
       <p:sp>
         <p:nvSpPr>
-          <p:cNvPr id="37" name="TextBox 36"/>
+          <p:cNvPr id="42" name="TextBox 41"/>
           <p:cNvSpPr txBox="1"/>
           <p:nvPr/>
         </p:nvSpPr>
@@ -26058,7 +27197,7 @@
                 </a:solidFill>
                 <a:latin typeface="Calibri"/>
               </a:rPr>
-              <a:t>P/E : 372,6x</a:t>
+              <a:t>P/E : 370,9x</a:t>
             </a:r>
           </a:p>
         </p:txBody>
@@ -26671,7 +27810,7 @@
         <p:spPr>
           <a:xfrm>
             <a:off x="367200" y="961200"/>
-            <a:ext cx="2731199" cy="3520800"/>
+            <a:ext cx="4150800" cy="3520800"/>
           </a:xfrm>
           <a:prstGeom prst="rect">
             <a:avLst/>
@@ -26714,7 +27853,7 @@
         <p:spPr>
           <a:xfrm>
             <a:off x="367200" y="961200"/>
-            <a:ext cx="2731199" cy="54000"/>
+            <a:ext cx="4150800" cy="54000"/>
           </a:xfrm>
           <a:prstGeom prst="rect">
             <a:avLst/>
@@ -26757,7 +27896,7 @@
         <p:spPr>
           <a:xfrm>
             <a:off x="457200" y="1141200"/>
-            <a:ext cx="2551199" cy="640800"/>
+            <a:ext cx="3970800" cy="640800"/>
           </a:xfrm>
           <a:prstGeom prst="rect">
             <a:avLst/>
@@ -26778,7 +27917,7 @@
                 </a:solidFill>
                 <a:latin typeface="Calibri"/>
               </a:rPr>
-              <a:t>—</a:t>
+              <a:t>85%</a:t>
             </a:r>
           </a:p>
         </p:txBody>
@@ -26792,7 +27931,7 @@
         <p:spPr>
           <a:xfrm>
             <a:off x="457200" y="1785600"/>
-            <a:ext cx="2551199" cy="108000"/>
+            <a:ext cx="3970800" cy="108000"/>
           </a:xfrm>
           <a:prstGeom prst="rect">
             <a:avLst/>
@@ -26827,7 +27966,7 @@
         <p:spPr>
           <a:xfrm>
             <a:off x="457200" y="1965600"/>
-            <a:ext cx="2551199" cy="18000"/>
+            <a:ext cx="3970800" cy="18000"/>
           </a:xfrm>
           <a:prstGeom prst="rect">
             <a:avLst/>
@@ -26870,7 +28009,7 @@
         <p:spPr>
           <a:xfrm>
             <a:off x="457200" y="2059200"/>
-            <a:ext cx="2551199" cy="255600"/>
+            <a:ext cx="3970800" cy="255600"/>
           </a:xfrm>
           <a:prstGeom prst="rect">
             <a:avLst/>
@@ -26891,7 +28030,7 @@
                 </a:solidFill>
                 <a:latin typeface="Calibri"/>
               </a:rPr>
-              <a:t>Core Business</a:t>
+              <a:t>Automotive</a:t>
             </a:r>
           </a:p>
         </p:txBody>
@@ -26905,7 +28044,7 @@
         <p:spPr>
           <a:xfrm>
             <a:off x="457200" y="2332800"/>
-            <a:ext cx="2551199" cy="2041199"/>
+            <a:ext cx="3970800" cy="2041199"/>
           </a:xfrm>
           <a:prstGeom prst="rect">
             <a:avLst/>
@@ -26926,7 +28065,7 @@
                 </a:solidFill>
                 <a:latin typeface="Calibri"/>
               </a:rPr>
-              <a:t>—</a:t>
+              <a:t>Ventes de véhicules électriques (Model 3/Y, Cybertruck, Semi) avec abonnements logiciels (FSD) et services de recharge. Clients cibles : particuliers aisés et flottes professionnelles. Croissance tirée par l'expansion géographique et le mix produit vers des modèles haut de gamme.</a:t>
             </a:r>
           </a:p>
         </p:txBody>
@@ -26939,8 +28078,8 @@
         </p:nvSpPr>
         <p:spPr>
           <a:xfrm>
-            <a:off x="3206400" y="961200"/>
-            <a:ext cx="2731199" cy="3520800"/>
+            <a:off x="4626000" y="961200"/>
+            <a:ext cx="4150800" cy="3520800"/>
           </a:xfrm>
           <a:prstGeom prst="rect">
             <a:avLst/>
@@ -26982,8 +28121,8 @@
         </p:nvSpPr>
         <p:spPr>
           <a:xfrm>
-            <a:off x="3206400" y="961200"/>
-            <a:ext cx="2731199" cy="54000"/>
+            <a:off x="4626000" y="961200"/>
+            <a:ext cx="4150800" cy="54000"/>
           </a:xfrm>
           <a:prstGeom prst="rect">
             <a:avLst/>
@@ -27025,8 +28164,8 @@
         </p:nvSpPr>
         <p:spPr>
           <a:xfrm>
-            <a:off x="3296400" y="1141200"/>
-            <a:ext cx="2551199" cy="640800"/>
+            <a:off x="4716000" y="1141200"/>
+            <a:ext cx="3970800" cy="640800"/>
           </a:xfrm>
           <a:prstGeom prst="rect">
             <a:avLst/>
@@ -27047,7 +28186,7 @@
                 </a:solidFill>
                 <a:latin typeface="Calibri"/>
               </a:rPr>
-              <a:t>—</a:t>
+              <a:t>15%</a:t>
             </a:r>
           </a:p>
         </p:txBody>
@@ -27060,8 +28199,8 @@
         </p:nvSpPr>
         <p:spPr>
           <a:xfrm>
-            <a:off x="3296400" y="1785600"/>
-            <a:ext cx="2551199" cy="108000"/>
+            <a:off x="4716000" y="1785600"/>
+            <a:ext cx="3970800" cy="108000"/>
           </a:xfrm>
           <a:prstGeom prst="rect">
             <a:avLst/>
@@ -27095,8 +28234,8 @@
         </p:nvSpPr>
         <p:spPr>
           <a:xfrm>
-            <a:off x="3296400" y="1965600"/>
-            <a:ext cx="2551199" cy="18000"/>
+            <a:off x="4716000" y="1965600"/>
+            <a:ext cx="3970800" cy="18000"/>
           </a:xfrm>
           <a:prstGeom prst="rect">
             <a:avLst/>
@@ -27138,8 +28277,8 @@
         </p:nvSpPr>
         <p:spPr>
           <a:xfrm>
-            <a:off x="3296400" y="2059200"/>
-            <a:ext cx="2551199" cy="255600"/>
+            <a:off x="4716000" y="2059200"/>
+            <a:ext cx="3970800" cy="255600"/>
           </a:xfrm>
           <a:prstGeom prst="rect">
             <a:avLst/>
@@ -27160,7 +28299,7 @@
                 </a:solidFill>
                 <a:latin typeface="Calibri"/>
               </a:rPr>
-              <a:t>Growth Driver</a:t>
+              <a:t>Energy Generation and Storage</a:t>
             </a:r>
           </a:p>
         </p:txBody>
@@ -27173,8 +28312,8 @@
         </p:nvSpPr>
         <p:spPr>
           <a:xfrm>
-            <a:off x="3296400" y="2332800"/>
-            <a:ext cx="2551199" cy="2041199"/>
+            <a:off x="4716000" y="2332800"/>
+            <a:ext cx="3970800" cy="2041199"/>
           </a:xfrm>
           <a:prstGeom prst="rect">
             <a:avLst/>
@@ -27195,276 +28334,7 @@
                 </a:solidFill>
                 <a:latin typeface="Calibri"/>
               </a:rPr>
-              <a:t>—</a:t>
-            </a:r>
-          </a:p>
-        </p:txBody>
-      </p:sp>
-      <p:sp>
-        <p:nvSpPr>
-          <p:cNvPr id="31" name="Rectangle 30"/>
-          <p:cNvSpPr/>
-          <p:nvPr/>
-        </p:nvSpPr>
-        <p:spPr>
-          <a:xfrm>
-            <a:off x="6045600" y="961200"/>
-            <a:ext cx="2731199" cy="3520800"/>
-          </a:xfrm>
-          <a:prstGeom prst="rect">
-            <a:avLst/>
-          </a:prstGeom>
-          <a:solidFill>
-            <a:srgbClr val="F7F8FA"/>
-          </a:solidFill>
-          <a:ln>
-            <a:noFill/>
-          </a:ln>
-        </p:spPr>
-        <p:style>
-          <a:lnRef idx="1">
-            <a:schemeClr val="accent1"/>
-          </a:lnRef>
-          <a:fillRef idx="3">
-            <a:schemeClr val="accent1"/>
-          </a:fillRef>
-          <a:effectRef idx="2">
-            <a:schemeClr val="accent1"/>
-          </a:effectRef>
-          <a:fontRef idx="minor">
-            <a:schemeClr val="lt1"/>
-          </a:fontRef>
-        </p:style>
-        <p:txBody>
-          <a:bodyPr rtlCol="0" anchor="ctr"/>
-          <a:lstStyle/>
-          <a:p>
-            <a:pPr algn="ctr"/>
-          </a:p>
-        </p:txBody>
-      </p:sp>
-      <p:sp>
-        <p:nvSpPr>
-          <p:cNvPr id="32" name="Rectangle 31"/>
-          <p:cNvSpPr/>
-          <p:nvPr/>
-        </p:nvSpPr>
-        <p:spPr>
-          <a:xfrm>
-            <a:off x="6045600" y="961200"/>
-            <a:ext cx="2731199" cy="54000"/>
-          </a:xfrm>
-          <a:prstGeom prst="rect">
-            <a:avLst/>
-          </a:prstGeom>
-          <a:solidFill>
-            <a:srgbClr val="888888"/>
-          </a:solidFill>
-          <a:ln>
-            <a:noFill/>
-          </a:ln>
-        </p:spPr>
-        <p:style>
-          <a:lnRef idx="1">
-            <a:schemeClr val="accent1"/>
-          </a:lnRef>
-          <a:fillRef idx="3">
-            <a:schemeClr val="accent1"/>
-          </a:fillRef>
-          <a:effectRef idx="2">
-            <a:schemeClr val="accent1"/>
-          </a:effectRef>
-          <a:fontRef idx="minor">
-            <a:schemeClr val="lt1"/>
-          </a:fontRef>
-        </p:style>
-        <p:txBody>
-          <a:bodyPr rtlCol="0" anchor="ctr"/>
-          <a:lstStyle/>
-          <a:p>
-            <a:pPr algn="ctr"/>
-          </a:p>
-        </p:txBody>
-      </p:sp>
-      <p:sp>
-        <p:nvSpPr>
-          <p:cNvPr id="33" name="TextBox 32"/>
-          <p:cNvSpPr txBox="1"/>
-          <p:nvPr/>
-        </p:nvSpPr>
-        <p:spPr>
-          <a:xfrm>
-            <a:off x="6135600" y="1141200"/>
-            <a:ext cx="2551199" cy="640800"/>
-          </a:xfrm>
-          <a:prstGeom prst="rect">
-            <a:avLst/>
-          </a:prstGeom>
-          <a:noFill/>
-        </p:spPr>
-        <p:txBody>
-          <a:bodyPr wrap="square">
-            <a:spAutoFit/>
-          </a:bodyPr>
-          <a:lstStyle/>
-          <a:p>
-            <a:pPr algn="l"/>
-            <a:r>
-              <a:rPr sz="2200" b="1" i="0">
-                <a:solidFill>
-                  <a:srgbClr val="888888"/>
-                </a:solidFill>
-                <a:latin typeface="Calibri"/>
-              </a:rPr>
-              <a:t>—</a:t>
-            </a:r>
-          </a:p>
-        </p:txBody>
-      </p:sp>
-      <p:sp>
-        <p:nvSpPr>
-          <p:cNvPr id="34" name="TextBox 33"/>
-          <p:cNvSpPr txBox="1"/>
-          <p:nvPr/>
-        </p:nvSpPr>
-        <p:spPr>
-          <a:xfrm>
-            <a:off x="6135600" y="1785600"/>
-            <a:ext cx="2551199" cy="108000"/>
-          </a:xfrm>
-          <a:prstGeom prst="rect">
-            <a:avLst/>
-          </a:prstGeom>
-          <a:noFill/>
-        </p:spPr>
-        <p:txBody>
-          <a:bodyPr wrap="square">
-            <a:spAutoFit/>
-          </a:bodyPr>
-          <a:lstStyle/>
-          <a:p>
-            <a:pPr algn="l"/>
-            <a:r>
-              <a:rPr sz="900" b="0" i="0">
-                <a:solidFill>
-                  <a:srgbClr val="555555"/>
-                </a:solidFill>
-                <a:latin typeface="Calibri"/>
-              </a:rPr>
-              <a:t>du CA</a:t>
-            </a:r>
-          </a:p>
-        </p:txBody>
-      </p:sp>
-      <p:sp>
-        <p:nvSpPr>
-          <p:cNvPr id="35" name="Rectangle 34"/>
-          <p:cNvSpPr/>
-          <p:nvPr/>
-        </p:nvSpPr>
-        <p:spPr>
-          <a:xfrm>
-            <a:off x="6135600" y="1965600"/>
-            <a:ext cx="2551199" cy="18000"/>
-          </a:xfrm>
-          <a:prstGeom prst="rect">
-            <a:avLst/>
-          </a:prstGeom>
-          <a:solidFill>
-            <a:srgbClr val="888888"/>
-          </a:solidFill>
-          <a:ln>
-            <a:noFill/>
-          </a:ln>
-        </p:spPr>
-        <p:style>
-          <a:lnRef idx="1">
-            <a:schemeClr val="accent1"/>
-          </a:lnRef>
-          <a:fillRef idx="3">
-            <a:schemeClr val="accent1"/>
-          </a:fillRef>
-          <a:effectRef idx="2">
-            <a:schemeClr val="accent1"/>
-          </a:effectRef>
-          <a:fontRef idx="minor">
-            <a:schemeClr val="lt1"/>
-          </a:fontRef>
-        </p:style>
-        <p:txBody>
-          <a:bodyPr rtlCol="0" anchor="ctr"/>
-          <a:lstStyle/>
-          <a:p>
-            <a:pPr algn="ctr"/>
-          </a:p>
-        </p:txBody>
-      </p:sp>
-      <p:sp>
-        <p:nvSpPr>
-          <p:cNvPr id="36" name="TextBox 35"/>
-          <p:cNvSpPr txBox="1"/>
-          <p:nvPr/>
-        </p:nvSpPr>
-        <p:spPr>
-          <a:xfrm>
-            <a:off x="6135600" y="2059200"/>
-            <a:ext cx="2551199" cy="255600"/>
-          </a:xfrm>
-          <a:prstGeom prst="rect">
-            <a:avLst/>
-          </a:prstGeom>
-          <a:noFill/>
-        </p:spPr>
-        <p:txBody>
-          <a:bodyPr wrap="square">
-            <a:spAutoFit/>
-          </a:bodyPr>
-          <a:lstStyle/>
-          <a:p>
-            <a:pPr algn="l"/>
-            <a:r>
-              <a:rPr sz="1000" b="1" i="0">
-                <a:solidFill>
-                  <a:srgbClr val="1B3A6B"/>
-                </a:solidFill>
-                <a:latin typeface="Calibri"/>
-              </a:rPr>
-              <a:t>International</a:t>
-            </a:r>
-          </a:p>
-        </p:txBody>
-      </p:sp>
-      <p:sp>
-        <p:nvSpPr>
-          <p:cNvPr id="37" name="TextBox 36"/>
-          <p:cNvSpPr txBox="1"/>
-          <p:nvPr/>
-        </p:nvSpPr>
-        <p:spPr>
-          <a:xfrm>
-            <a:off x="6135600" y="2332800"/>
-            <a:ext cx="2551199" cy="2041199"/>
-          </a:xfrm>
-          <a:prstGeom prst="rect">
-            <a:avLst/>
-          </a:prstGeom>
-          <a:noFill/>
-        </p:spPr>
-        <p:txBody>
-          <a:bodyPr wrap="square">
-            <a:spAutoFit/>
-          </a:bodyPr>
-          <a:lstStyle/>
-          <a:p>
-            <a:pPr algn="l"/>
-            <a:r>
-              <a:rPr sz="800" b="0" i="0">
-                <a:solidFill>
-                  <a:srgbClr val="555555"/>
-                </a:solidFill>
-                <a:latin typeface="Calibri"/>
-              </a:rPr>
-              <a:t>—</a:t>
+              <a:t>Batteries Powerwall/Powerpack, solutions solaires et stockage d'énergie pour résidentiel et industriel. Modèle basé sur des contrats récurrents et des ventes de matériel. Clients cibles : ménages et entreprises cherchant autonomie énergétique.</a:t>
             </a:r>
           </a:p>
         </p:txBody>
@@ -28316,7 +29186,7 @@
                 </a:solidFill>
                 <a:latin typeface="Calibri"/>
               </a:rPr>
-              <a:t>USD millions  ·  2022–2025</a:t>
+              <a:t>USD millions  ·  2022–2027F</a:t>
             </a:r>
           </a:p>
         </p:txBody>
@@ -28331,7 +29201,7 @@
         </p:nvGraphicFramePr>
         <p:xfrm>
           <a:off x="367200" y="914400"/>
-          <a:ext cx="8413200" cy="1980000"/>
+          <a:ext cx="8413196" cy="1980000"/>
         </p:xfrm>
         <a:graphic>
           <a:graphicData uri="http://schemas.openxmlformats.org/drawingml/2006/table">
@@ -28341,9 +29211,11 @@
               </a:tblPr>
               <a:tblGrid>
                 <a:gridCol w="2355696"/>
-                <a:gridCol w="2019168"/>
-                <a:gridCol w="2019168"/>
-                <a:gridCol w="2019168"/>
+                <a:gridCol w="1211500"/>
+                <a:gridCol w="1211500"/>
+                <a:gridCol w="1211500"/>
+                <a:gridCol w="1211500"/>
+                <a:gridCol w="1211500"/>
               </a:tblGrid>
               <a:tr h="220000">
                 <a:tc>
@@ -28438,6 +29310,52 @@
                     </a:solidFill>
                   </a:tcPr>
                 </a:tc>
+                <a:tc>
+                  <a:txBody>
+                    <a:bodyPr/>
+                    <a:lstStyle/>
+                    <a:p>
+                      <a:pPr algn="ctr"/>
+                      <a:r>
+                        <a:rPr sz="800" b="1" i="0">
+                          <a:solidFill>
+                            <a:srgbClr val="FFFFFF"/>
+                          </a:solidFill>
+                          <a:latin typeface="Calibri"/>
+                        </a:rPr>
+                        <a:t>2026F</a:t>
+                      </a:r>
+                    </a:p>
+                  </a:txBody>
+                  <a:tcPr>
+                    <a:solidFill>
+                      <a:srgbClr val="1B3A6B"/>
+                    </a:solidFill>
+                  </a:tcPr>
+                </a:tc>
+                <a:tc>
+                  <a:txBody>
+                    <a:bodyPr/>
+                    <a:lstStyle/>
+                    <a:p>
+                      <a:pPr algn="ctr"/>
+                      <a:r>
+                        <a:rPr sz="800" b="1" i="0">
+                          <a:solidFill>
+                            <a:srgbClr val="FFFFFF"/>
+                          </a:solidFill>
+                          <a:latin typeface="Calibri"/>
+                        </a:rPr>
+                        <a:t>2027F</a:t>
+                      </a:r>
+                    </a:p>
+                  </a:txBody>
+                  <a:tcPr>
+                    <a:solidFill>
+                      <a:srgbClr val="1B3A6B"/>
+                    </a:solidFill>
+                  </a:tcPr>
+                </a:tc>
               </a:tr>
               <a:tr h="220000">
                 <a:tc>
@@ -28532,6 +29450,52 @@
                     </a:solidFill>
                   </a:tcPr>
                 </a:tc>
+                <a:tc>
+                  <a:txBody>
+                    <a:bodyPr/>
+                    <a:lstStyle/>
+                    <a:p>
+                      <a:pPr algn="ctr"/>
+                      <a:r>
+                        <a:rPr sz="800" b="1" i="0">
+                          <a:solidFill>
+                            <a:srgbClr val="0D0D0D"/>
+                          </a:solidFill>
+                          <a:latin typeface="Calibri"/>
+                        </a:rPr>
+                        <a:t>105,0</a:t>
+                      </a:r>
+                    </a:p>
+                  </a:txBody>
+                  <a:tcPr>
+                    <a:solidFill>
+                      <a:srgbClr val="FFFFFF"/>
+                    </a:solidFill>
+                  </a:tcPr>
+                </a:tc>
+                <a:tc>
+                  <a:txBody>
+                    <a:bodyPr/>
+                    <a:lstStyle/>
+                    <a:p>
+                      <a:pPr algn="ctr"/>
+                      <a:r>
+                        <a:rPr sz="800" b="1" i="0">
+                          <a:solidFill>
+                            <a:srgbClr val="0D0D0D"/>
+                          </a:solidFill>
+                          <a:latin typeface="Calibri"/>
+                        </a:rPr>
+                        <a:t>120,0</a:t>
+                      </a:r>
+                    </a:p>
+                  </a:txBody>
+                  <a:tcPr>
+                    <a:solidFill>
+                      <a:srgbClr val="FFFFFF"/>
+                    </a:solidFill>
+                  </a:tcPr>
+                </a:tc>
               </a:tr>
               <a:tr h="220000">
                 <a:tc>
@@ -28626,6 +29590,52 @@
                     </a:solidFill>
                   </a:tcPr>
                 </a:tc>
+                <a:tc>
+                  <a:txBody>
+                    <a:bodyPr/>
+                    <a:lstStyle/>
+                    <a:p>
+                      <a:pPr algn="ctr"/>
+                      <a:r>
+                        <a:rPr sz="750" b="0" i="1">
+                          <a:solidFill>
+                            <a:srgbClr val="555555"/>
+                          </a:solidFill>
+                          <a:latin typeface="Calibri"/>
+                        </a:rPr>
+                        <a:t>+10,7 %</a:t>
+                      </a:r>
+                    </a:p>
+                  </a:txBody>
+                  <a:tcPr>
+                    <a:solidFill>
+                      <a:srgbClr val="F7F8FA"/>
+                    </a:solidFill>
+                  </a:tcPr>
+                </a:tc>
+                <a:tc>
+                  <a:txBody>
+                    <a:bodyPr/>
+                    <a:lstStyle/>
+                    <a:p>
+                      <a:pPr algn="ctr"/>
+                      <a:r>
+                        <a:rPr sz="750" b="0" i="1">
+                          <a:solidFill>
+                            <a:srgbClr val="555555"/>
+                          </a:solidFill>
+                          <a:latin typeface="Calibri"/>
+                        </a:rPr>
+                        <a:t>+14,3 %</a:t>
+                      </a:r>
+                    </a:p>
+                  </a:txBody>
+                  <a:tcPr>
+                    <a:solidFill>
+                      <a:srgbClr val="F7F8FA"/>
+                    </a:solidFill>
+                  </a:tcPr>
+                </a:tc>
               </a:tr>
               <a:tr h="220000">
                 <a:tc>
@@ -28720,6 +29730,52 @@
                     </a:solidFill>
                   </a:tcPr>
                 </a:tc>
+                <a:tc>
+                  <a:txBody>
+                    <a:bodyPr/>
+                    <a:lstStyle/>
+                    <a:p>
+                      <a:pPr algn="ctr"/>
+                      <a:r>
+                        <a:rPr sz="800" b="1" i="0">
+                          <a:solidFill>
+                            <a:srgbClr val="0D0D0D"/>
+                          </a:solidFill>
+                          <a:latin typeface="Calibri"/>
+                        </a:rPr>
+                        <a:t>20,5</a:t>
+                      </a:r>
+                    </a:p>
+                  </a:txBody>
+                  <a:tcPr>
+                    <a:solidFill>
+                      <a:srgbClr val="FFFFFF"/>
+                    </a:solidFill>
+                  </a:tcPr>
+                </a:tc>
+                <a:tc>
+                  <a:txBody>
+                    <a:bodyPr/>
+                    <a:lstStyle/>
+                    <a:p>
+                      <a:pPr algn="ctr"/>
+                      <a:r>
+                        <a:rPr sz="800" b="1" i="0">
+                          <a:solidFill>
+                            <a:srgbClr val="0D0D0D"/>
+                          </a:solidFill>
+                          <a:latin typeface="Calibri"/>
+                        </a:rPr>
+                        <a:t>24,6</a:t>
+                      </a:r>
+                    </a:p>
+                  </a:txBody>
+                  <a:tcPr>
+                    <a:solidFill>
+                      <a:srgbClr val="FFFFFF"/>
+                    </a:solidFill>
+                  </a:tcPr>
+                </a:tc>
               </a:tr>
               <a:tr h="220000">
                 <a:tc>
@@ -28814,6 +29870,52 @@
                     </a:solidFill>
                   </a:tcPr>
                 </a:tc>
+                <a:tc>
+                  <a:txBody>
+                    <a:bodyPr/>
+                    <a:lstStyle/>
+                    <a:p>
+                      <a:pPr algn="ctr"/>
+                      <a:r>
+                        <a:rPr sz="750" b="0" i="1">
+                          <a:solidFill>
+                            <a:srgbClr val="555555"/>
+                          </a:solidFill>
+                          <a:latin typeface="Calibri"/>
+                        </a:rPr>
+                        <a:t>19,5 %</a:t>
+                      </a:r>
+                    </a:p>
+                  </a:txBody>
+                  <a:tcPr>
+                    <a:solidFill>
+                      <a:srgbClr val="F7F8FA"/>
+                    </a:solidFill>
+                  </a:tcPr>
+                </a:tc>
+                <a:tc>
+                  <a:txBody>
+                    <a:bodyPr/>
+                    <a:lstStyle/>
+                    <a:p>
+                      <a:pPr algn="ctr"/>
+                      <a:r>
+                        <a:rPr sz="750" b="0" i="1">
+                          <a:solidFill>
+                            <a:srgbClr val="555555"/>
+                          </a:solidFill>
+                          <a:latin typeface="Calibri"/>
+                        </a:rPr>
+                        <a:t>20,5 %</a:t>
+                      </a:r>
+                    </a:p>
+                  </a:txBody>
+                  <a:tcPr>
+                    <a:solidFill>
+                      <a:srgbClr val="F7F8FA"/>
+                    </a:solidFill>
+                  </a:tcPr>
+                </a:tc>
               </a:tr>
               <a:tr h="220000">
                 <a:tc>
@@ -28908,6 +30010,52 @@
                     </a:solidFill>
                   </a:tcPr>
                 </a:tc>
+                <a:tc>
+                  <a:txBody>
+                    <a:bodyPr/>
+                    <a:lstStyle/>
+                    <a:p>
+                      <a:pPr algn="ctr"/>
+                      <a:r>
+                        <a:rPr sz="800" b="1" i="0">
+                          <a:solidFill>
+                            <a:srgbClr val="0D0D0D"/>
+                          </a:solidFill>
+                          <a:latin typeface="Calibri"/>
+                        </a:rPr>
+                        <a:t>18,0</a:t>
+                      </a:r>
+                    </a:p>
+                  </a:txBody>
+                  <a:tcPr>
+                    <a:solidFill>
+                      <a:srgbClr val="FFFFFF"/>
+                    </a:solidFill>
+                  </a:tcPr>
+                </a:tc>
+                <a:tc>
+                  <a:txBody>
+                    <a:bodyPr/>
+                    <a:lstStyle/>
+                    <a:p>
+                      <a:pPr algn="ctr"/>
+                      <a:r>
+                        <a:rPr sz="800" b="1" i="0">
+                          <a:solidFill>
+                            <a:srgbClr val="0D0D0D"/>
+                          </a:solidFill>
+                          <a:latin typeface="Calibri"/>
+                        </a:rPr>
+                        <a:t>22,0</a:t>
+                      </a:r>
+                    </a:p>
+                  </a:txBody>
+                  <a:tcPr>
+                    <a:solidFill>
+                      <a:srgbClr val="FFFFFF"/>
+                    </a:solidFill>
+                  </a:tcPr>
+                </a:tc>
               </a:tr>
               <a:tr h="220000">
                 <a:tc>
@@ -29002,6 +30150,52 @@
                     </a:solidFill>
                   </a:tcPr>
                 </a:tc>
+                <a:tc>
+                  <a:txBody>
+                    <a:bodyPr/>
+                    <a:lstStyle/>
+                    <a:p>
+                      <a:pPr algn="ctr"/>
+                      <a:r>
+                        <a:rPr sz="750" b="0" i="1">
+                          <a:solidFill>
+                            <a:srgbClr val="555555"/>
+                          </a:solidFill>
+                          <a:latin typeface="Calibri"/>
+                        </a:rPr>
+                        <a:t>17,1 %</a:t>
+                      </a:r>
+                    </a:p>
+                  </a:txBody>
+                  <a:tcPr>
+                    <a:solidFill>
+                      <a:srgbClr val="F7F8FA"/>
+                    </a:solidFill>
+                  </a:tcPr>
+                </a:tc>
+                <a:tc>
+                  <a:txBody>
+                    <a:bodyPr/>
+                    <a:lstStyle/>
+                    <a:p>
+                      <a:pPr algn="ctr"/>
+                      <a:r>
+                        <a:rPr sz="750" b="0" i="1">
+                          <a:solidFill>
+                            <a:srgbClr val="555555"/>
+                          </a:solidFill>
+                          <a:latin typeface="Calibri"/>
+                        </a:rPr>
+                        <a:t>18,3 %</a:t>
+                      </a:r>
+                    </a:p>
+                  </a:txBody>
+                  <a:tcPr>
+                    <a:solidFill>
+                      <a:srgbClr val="F7F8FA"/>
+                    </a:solidFill>
+                  </a:tcPr>
+                </a:tc>
               </a:tr>
               <a:tr h="220000">
                 <a:tc>
@@ -29096,6 +30290,52 @@
                     </a:solidFill>
                   </a:tcPr>
                 </a:tc>
+                <a:tc>
+                  <a:txBody>
+                    <a:bodyPr/>
+                    <a:lstStyle/>
+                    <a:p>
+                      <a:pPr algn="ctr"/>
+                      <a:r>
+                        <a:rPr sz="800" b="1" i="0">
+                          <a:solidFill>
+                            <a:srgbClr val="0D0D0D"/>
+                          </a:solidFill>
+                          <a:latin typeface="Calibri"/>
+                        </a:rPr>
+                        <a:t>7,0</a:t>
+                      </a:r>
+                    </a:p>
+                  </a:txBody>
+                  <a:tcPr>
+                    <a:solidFill>
+                      <a:srgbClr val="FFFFFF"/>
+                    </a:solidFill>
+                  </a:tcPr>
+                </a:tc>
+                <a:tc>
+                  <a:txBody>
+                    <a:bodyPr/>
+                    <a:lstStyle/>
+                    <a:p>
+                      <a:pPr algn="ctr"/>
+                      <a:r>
+                        <a:rPr sz="800" b="1" i="0">
+                          <a:solidFill>
+                            <a:srgbClr val="0D0D0D"/>
+                          </a:solidFill>
+                          <a:latin typeface="Calibri"/>
+                        </a:rPr>
+                        <a:t>9,0</a:t>
+                      </a:r>
+                    </a:p>
+                  </a:txBody>
+                  <a:tcPr>
+                    <a:solidFill>
+                      <a:srgbClr val="FFFFFF"/>
+                    </a:solidFill>
+                  </a:tcPr>
+                </a:tc>
               </a:tr>
               <a:tr h="220000">
                 <a:tc>
@@ -29187,6 +30427,52 @@
                   <a:tcPr>
                     <a:solidFill>
                       <a:srgbClr val="DDE8F5"/>
+                    </a:solidFill>
+                  </a:tcPr>
+                </a:tc>
+                <a:tc>
+                  <a:txBody>
+                    <a:bodyPr/>
+                    <a:lstStyle/>
+                    <a:p>
+                      <a:pPr algn="ctr"/>
+                      <a:r>
+                        <a:rPr sz="750" b="0" i="1">
+                          <a:solidFill>
+                            <a:srgbClr val="555555"/>
+                          </a:solidFill>
+                          <a:latin typeface="Calibri"/>
+                        </a:rPr>
+                        <a:t>6,7 %</a:t>
+                      </a:r>
+                    </a:p>
+                  </a:txBody>
+                  <a:tcPr>
+                    <a:solidFill>
+                      <a:srgbClr val="F7F8FA"/>
+                    </a:solidFill>
+                  </a:tcPr>
+                </a:tc>
+                <a:tc>
+                  <a:txBody>
+                    <a:bodyPr/>
+                    <a:lstStyle/>
+                    <a:p>
+                      <a:pPr algn="ctr"/>
+                      <a:r>
+                        <a:rPr sz="750" b="0" i="1">
+                          <a:solidFill>
+                            <a:srgbClr val="555555"/>
+                          </a:solidFill>
+                          <a:latin typeface="Calibri"/>
+                        </a:rPr>
+                        <a:t>7,5 %</a:t>
+                      </a:r>
+                    </a:p>
+                  </a:txBody>
+                  <a:tcPr>
+                    <a:solidFill>
+                      <a:srgbClr val="F7F8FA"/>
                     </a:solidFill>
                   </a:tcPr>
                 </a:tc>
@@ -29195,6 +30481,41 @@
           </a:graphicData>
         </a:graphic>
       </p:graphicFrame>
+      <p:sp>
+        <p:nvSpPr>
+          <p:cNvPr id="18" name="TextBox 17"/>
+          <p:cNvSpPr txBox="1"/>
+          <p:nvPr/>
+        </p:nvSpPr>
+        <p:spPr>
+          <a:xfrm>
+            <a:off x="367200" y="3218400"/>
+            <a:ext cx="8413200" cy="1224000"/>
+          </a:xfrm>
+          <a:prstGeom prst="rect">
+            <a:avLst/>
+          </a:prstGeom>
+          <a:noFill/>
+        </p:spPr>
+        <p:txBody>
+          <a:bodyPr wrap="square">
+            <a:spAutoFit/>
+          </a:bodyPr>
+          <a:lstStyle/>
+          <a:p>
+            <a:pPr algn="l"/>
+            <a:r>
+              <a:rPr sz="850" b="0" i="0">
+                <a:solidFill>
+                  <a:srgbClr val="555555"/>
+                </a:solidFill>
+                <a:latin typeface="Calibri"/>
+              </a:rPr>
+              <a:t>Le CA 2025 recule de 3% à 94.8Md$, avec des marges en compression (GM 18%, Net 4%) due à des baisses de prix agressives et à des coûts fixes élevés. La discipline opérationnelle et le levier sur les volumes devraient permettre une amélioration progressive des marges dès 2026.</a:t>
+            </a:r>
+          </a:p>
+        </p:txBody>
+      </p:sp>
     </p:spTree>
   </p:cSld>
   <p:clrMapOvr>
@@ -30922,7 +32243,7 @@
                           </a:solidFill>
                           <a:latin typeface="Calibri"/>
                         </a:rPr>
-                        <a:t>16,85</a:t>
+                        <a:t>16,78</a:t>
                       </a:r>
                     </a:p>
                   </a:txBody>
@@ -31077,6 +32398,41 @@
           </a:graphicData>
         </a:graphic>
       </p:graphicFrame>
+      <p:sp>
+        <p:nvSpPr>
+          <p:cNvPr id="31" name="TextBox 30"/>
+          <p:cNvSpPr txBox="1"/>
+          <p:nvPr/>
+        </p:nvSpPr>
+        <p:spPr>
+          <a:xfrm>
+            <a:off x="367200" y="4068000"/>
+            <a:ext cx="8413200" cy="468000"/>
+          </a:xfrm>
+          <a:prstGeom prst="rect">
+            <a:avLst/>
+          </a:prstGeom>
+          <a:noFill/>
+        </p:spPr>
+        <p:txBody>
+          <a:bodyPr wrap="square">
+            <a:spAutoFit/>
+          </a:bodyPr>
+          <a:lstStyle/>
+          <a:p>
+            <a:pPr algn="l"/>
+            <a:r>
+              <a:rPr sz="850" b="0" i="0">
+                <a:solidFill>
+                  <a:srgbClr val="555555"/>
+                </a:solidFill>
+                <a:latin typeface="Calibri"/>
+              </a:rPr>
+              <a:t>Le CA 2025 recule de 3% à 94.8Md$, avec des marges en compression (GM 18%, Net 4%) due à des baisses de prix agressives et à des coûts fixes élevés. La discipline opérationnelle et le levier sur les volumes devraient permettre une amélioration progressive des marges dès 2026.</a:t>
+            </a:r>
+          </a:p>
+        </p:txBody>
+      </p:sp>
     </p:spTree>
   </p:cSld>
   <p:clrMapOvr>

--- a/preview/TSLA/TSLA_pitchbook.pptx
+++ b/preview/TSLA/TSLA_pitchbook.pptx
@@ -3410,7 +3410,7 @@
                 </a:solidFill>
                 <a:latin typeface="Calibri"/>
               </a:rPr>
-              <a:t>● HOLD  ·  Prix cible base : — $  ·  Upside : —</a:t>
+              <a:t>● HOLD  ·  Prix cible base : 360 $  ·  Upside : +3,9 %</a:t>
             </a:r>
           </a:p>
         </p:txBody>
@@ -6069,6 +6069,41 @@
           </a:graphicData>
         </a:graphic>
       </p:graphicFrame>
+      <p:sp>
+        <p:nvSpPr>
+          <p:cNvPr id="18" name="TextBox 17"/>
+          <p:cNvSpPr txBox="1"/>
+          <p:nvPr/>
+        </p:nvSpPr>
+        <p:spPr>
+          <a:xfrm>
+            <a:off x="367200" y="3628800"/>
+            <a:ext cx="8413200" cy="824400"/>
+          </a:xfrm>
+          <a:prstGeom prst="rect">
+            <a:avLst/>
+          </a:prstGeom>
+          <a:noFill/>
+        </p:spPr>
+        <p:txBody>
+          <a:bodyPr wrap="square">
+            <a:spAutoFit/>
+          </a:bodyPr>
+          <a:lstStyle/>
+          <a:p>
+            <a:pPr algn="l"/>
+            <a:r>
+              <a:rPr sz="850" b="0" i="0">
+                <a:solidFill>
+                  <a:srgbClr val="555555"/>
+                </a:solidFill>
+                <a:latin typeface="Calibri"/>
+              </a:rPr>
+              <a:t>Les marges brutes sont passées de 25,6% en 2022 à 18,0% en 2025, principalement en raison de la baisse des prix de vente (-10% en 2024) et de l'augmentation des coûts logistiques (énergie, transport). La marge EBITDA a reculé de 21,7% en 2022 à 12,4% en 2025, reflétant un effet de levier opérationnel négatif. La durabilité du pricing power est incertaine sans relance de la demande ou réduction des coûts fixes.</a:t>
+            </a:r>
+          </a:p>
+        </p:txBody>
+      </p:sp>
     </p:spTree>
   </p:cSld>
   <p:clrMapOvr>
@@ -7229,7 +7264,7 @@
                           </a:solidFill>
                           <a:latin typeface="Calibri"/>
                         </a:rPr>
-                        <a:t>—</a:t>
+                        <a:t>360 $</a:t>
                       </a:r>
                     </a:p>
                   </a:txBody>
@@ -7405,7 +7440,7 @@
                           </a:solidFill>
                           <a:latin typeface="Calibri"/>
                         </a:rPr>
-                        <a:t>—</a:t>
+                        <a:t>+3,9 %</a:t>
                       </a:r>
                     </a:p>
                   </a:txBody>
@@ -7548,7 +7583,7 @@
                           </a:solidFill>
                           <a:latin typeface="Calibri"/>
                         </a:rPr>
-                        <a:t>—</a:t>
+                        <a:t>290 $</a:t>
                       </a:r>
                     </a:p>
                   </a:txBody>
@@ -7571,7 +7606,7 @@
                           </a:solidFill>
                           <a:latin typeface="Calibri"/>
                         </a:rPr>
-                        <a:t>—</a:t>
+                        <a:t>360 $</a:t>
                       </a:r>
                     </a:p>
                   </a:txBody>
@@ -7594,7 +7629,7 @@
                           </a:solidFill>
                           <a:latin typeface="Calibri"/>
                         </a:rPr>
-                        <a:t>—</a:t>
+                        <a:t>420 $</a:t>
                       </a:r>
                     </a:p>
                   </a:txBody>
@@ -7619,7 +7654,7 @@
                           </a:solidFill>
                           <a:latin typeface="Calibri"/>
                         </a:rPr>
-                        <a:t>—</a:t>
+                        <a:t>-16,3 %</a:t>
                       </a:r>
                     </a:p>
                   </a:txBody>
@@ -7642,7 +7677,7 @@
                           </a:solidFill>
                           <a:latin typeface="Calibri"/>
                         </a:rPr>
-                        <a:t>—</a:t>
+                        <a:t>+3,9 %</a:t>
                       </a:r>
                     </a:p>
                   </a:txBody>
@@ -7665,7 +7700,7 @@
                           </a:solidFill>
                           <a:latin typeface="Calibri"/>
                         </a:rPr>
-                        <a:t>—</a:t>
+                        <a:t>+21,2 %</a:t>
                       </a:r>
                     </a:p>
                   </a:txBody>
@@ -8977,7 +9012,7 @@
                           </a:solidFill>
                           <a:latin typeface="Calibri"/>
                         </a:rPr>
-                        <a:t>—</a:t>
+                        <a:t>392</a:t>
                       </a:r>
                     </a:p>
                   </a:txBody>
@@ -9020,7 +9055,7 @@
                           </a:solidFill>
                           <a:latin typeface="Calibri"/>
                         </a:rPr>
-                        <a:t>—</a:t>
+                        <a:t>410</a:t>
                       </a:r>
                     </a:p>
                   </a:txBody>
@@ -9063,7 +9098,7 @@
                           </a:solidFill>
                           <a:latin typeface="Calibri"/>
                         </a:rPr>
-                        <a:t>—</a:t>
+                        <a:t>430</a:t>
                       </a:r>
                     </a:p>
                   </a:txBody>
@@ -9106,7 +9141,7 @@
                           </a:solidFill>
                           <a:latin typeface="Calibri"/>
                         </a:rPr>
-                        <a:t>—</a:t>
+                        <a:t>452</a:t>
                       </a:r>
                     </a:p>
                   </a:txBody>
@@ -9149,7 +9184,7 @@
                           </a:solidFill>
                           <a:latin typeface="Calibri"/>
                         </a:rPr>
-                        <a:t>—</a:t>
+                        <a:t>476</a:t>
                       </a:r>
                     </a:p>
                   </a:txBody>
@@ -9237,7 +9272,7 @@
                           </a:solidFill>
                           <a:latin typeface="Calibri"/>
                         </a:rPr>
-                        <a:t>—</a:t>
+                        <a:t>360</a:t>
                       </a:r>
                     </a:p>
                   </a:txBody>
@@ -9280,7 +9315,7 @@
                           </a:solidFill>
                           <a:latin typeface="Calibri"/>
                         </a:rPr>
-                        <a:t>—</a:t>
+                        <a:t>375</a:t>
                       </a:r>
                     </a:p>
                   </a:txBody>
@@ -9323,7 +9358,7 @@
                           </a:solidFill>
                           <a:latin typeface="Calibri"/>
                         </a:rPr>
-                        <a:t>—</a:t>
+                        <a:t>392</a:t>
                       </a:r>
                     </a:p>
                   </a:txBody>
@@ -9366,7 +9401,7 @@
                           </a:solidFill>
                           <a:latin typeface="Calibri"/>
                         </a:rPr>
-                        <a:t>—</a:t>
+                        <a:t>410</a:t>
                       </a:r>
                     </a:p>
                   </a:txBody>
@@ -9409,7 +9444,7 @@
                           </a:solidFill>
                           <a:latin typeface="Calibri"/>
                         </a:rPr>
-                        <a:t>—</a:t>
+                        <a:t>430</a:t>
                       </a:r>
                     </a:p>
                   </a:txBody>
@@ -9497,7 +9532,7 @@
                           </a:solidFill>
                           <a:latin typeface="Calibri"/>
                         </a:rPr>
-                        <a:t>—</a:t>
+                        <a:t>333</a:t>
                       </a:r>
                     </a:p>
                   </a:txBody>
@@ -9540,7 +9575,7 @@
                           </a:solidFill>
                           <a:latin typeface="Calibri"/>
                         </a:rPr>
-                        <a:t>—</a:t>
+                        <a:t>346</a:t>
                       </a:r>
                     </a:p>
                   </a:txBody>
@@ -9583,7 +9618,7 @@
                           </a:solidFill>
                           <a:latin typeface="Calibri"/>
                         </a:rPr>
-                        <a:t>—</a:t>
+                        <a:t>360</a:t>
                       </a:r>
                     </a:p>
                   </a:txBody>
@@ -9626,7 +9661,7 @@
                           </a:solidFill>
                           <a:latin typeface="Calibri"/>
                         </a:rPr>
-                        <a:t>—</a:t>
+                        <a:t>375</a:t>
                       </a:r>
                     </a:p>
                   </a:txBody>
@@ -9669,7 +9704,7 @@
                           </a:solidFill>
                           <a:latin typeface="Calibri"/>
                         </a:rPr>
-                        <a:t>—</a:t>
+                        <a:t>392</a:t>
                       </a:r>
                     </a:p>
                   </a:txBody>
@@ -9757,7 +9792,7 @@
                           </a:solidFill>
                           <a:latin typeface="Calibri"/>
                         </a:rPr>
-                        <a:t>—</a:t>
+                        <a:t>310</a:t>
                       </a:r>
                     </a:p>
                   </a:txBody>
@@ -9800,7 +9835,7 @@
                           </a:solidFill>
                           <a:latin typeface="Calibri"/>
                         </a:rPr>
-                        <a:t>—</a:t>
+                        <a:t>321</a:t>
                       </a:r>
                     </a:p>
                   </a:txBody>
@@ -9843,7 +9878,7 @@
                           </a:solidFill>
                           <a:latin typeface="Calibri"/>
                         </a:rPr>
-                        <a:t>—</a:t>
+                        <a:t>333</a:t>
                       </a:r>
                     </a:p>
                   </a:txBody>
@@ -9886,7 +9921,7 @@
                           </a:solidFill>
                           <a:latin typeface="Calibri"/>
                         </a:rPr>
-                        <a:t>—</a:t>
+                        <a:t>346</a:t>
                       </a:r>
                     </a:p>
                   </a:txBody>
@@ -9929,7 +9964,7 @@
                           </a:solidFill>
                           <a:latin typeface="Calibri"/>
                         </a:rPr>
-                        <a:t>—</a:t>
+                        <a:t>360</a:t>
                       </a:r>
                     </a:p>
                   </a:txBody>
@@ -10017,7 +10052,7 @@
                           </a:solidFill>
                           <a:latin typeface="Calibri"/>
                         </a:rPr>
-                        <a:t>—</a:t>
+                        <a:t>289</a:t>
                       </a:r>
                     </a:p>
                   </a:txBody>
@@ -10060,7 +10095,7 @@
                           </a:solidFill>
                           <a:latin typeface="Calibri"/>
                         </a:rPr>
-                        <a:t>—</a:t>
+                        <a:t>299</a:t>
                       </a:r>
                     </a:p>
                   </a:txBody>
@@ -10103,7 +10138,7 @@
                           </a:solidFill>
                           <a:latin typeface="Calibri"/>
                         </a:rPr>
-                        <a:t>—</a:t>
+                        <a:t>310</a:t>
                       </a:r>
                     </a:p>
                   </a:txBody>
@@ -10146,7 +10181,7 @@
                           </a:solidFill>
                           <a:latin typeface="Calibri"/>
                         </a:rPr>
-                        <a:t>—</a:t>
+                        <a:t>321</a:t>
                       </a:r>
                     </a:p>
                   </a:txBody>
@@ -10189,7 +10224,7 @@
                           </a:solidFill>
                           <a:latin typeface="Calibri"/>
                         </a:rPr>
-                        <a:t>—</a:t>
+                        <a:t>333</a:t>
                       </a:r>
                     </a:p>
                   </a:txBody>
@@ -10224,6 +10259,41 @@
           </a:graphicData>
         </a:graphic>
       </p:graphicFrame>
+      <p:sp>
+        <p:nvSpPr>
+          <p:cNvPr id="22" name="TextBox 21"/>
+          <p:cNvSpPr txBox="1"/>
+          <p:nvPr/>
+        </p:nvSpPr>
+        <p:spPr>
+          <a:xfrm>
+            <a:off x="367200" y="3916800"/>
+            <a:ext cx="8413200" cy="547200"/>
+          </a:xfrm>
+          <a:prstGeom prst="rect">
+            <a:avLst/>
+          </a:prstGeom>
+          <a:noFill/>
+        </p:spPr>
+        <p:txBody>
+          <a:bodyPr wrap="square">
+            <a:spAutoFit/>
+          </a:bodyPr>
+          <a:lstStyle/>
+          <a:p>
+            <a:pPr algn="l"/>
+            <a:r>
+              <a:rPr sz="850" b="0" i="0">
+                <a:solidFill>
+                  <a:srgbClr val="555555"/>
+                </a:solidFill>
+                <a:latin typeface="Calibri"/>
+              </a:rPr>
+              <a:t>Avec un WACC de 14,8% et un TGR de 2,5%, le prix implicite DCF est estimé à 360 USD (base), soit une légère décote vs cours actuel (346,65 USD). L'upside est limité par une prime de croissance déjà pricee, mais un déclenchement de la marge opérationnelle ou une accélération du FSD pourrait justifier un re-rating.</a:t>
+            </a:r>
+          </a:p>
+        </p:txBody>
+      </p:sp>
     </p:spTree>
   </p:cSld>
   <p:clrMapOvr>
@@ -10833,7 +10903,7 @@
         </p:nvGraphicFramePr>
         <p:xfrm>
           <a:off x="367200" y="914400"/>
-          <a:ext cx="8413200" cy="871200"/>
+          <a:ext cx="8413200" cy="2015999"/>
         </p:xfrm>
         <a:graphic>
           <a:graphicData uri="http://schemas.openxmlformats.org/drawingml/2006/table">
@@ -10851,7 +10921,7 @@
                 <a:gridCol w="1093716"/>
                 <a:gridCol w="1009584"/>
               </a:tblGrid>
-              <a:tr h="290400">
+              <a:tr h="251999">
                 <a:tc>
                   <a:txBody>
                     <a:bodyPr/>
@@ -11037,7 +11107,7 @@
                   </a:tcPr>
                 </a:tc>
               </a:tr>
-              <a:tr h="290400">
+              <a:tr h="251999">
                 <a:tc>
                   <a:txBody>
                     <a:bodyPr/>
@@ -11223,7 +11293,7 @@
                   </a:tcPr>
                 </a:tc>
               </a:tr>
-              <a:tr h="290400">
+              <a:tr h="251999">
                 <a:tc>
                   <a:txBody>
                     <a:bodyPr/>
@@ -11231,6 +11301,936 @@
                     <a:p>
                       <a:pPr algn="l"/>
                       <a:r>
+                        <a:rPr sz="800" b="0" i="0">
+                          <a:solidFill>
+                            <a:srgbClr val="0D0D0D"/>
+                          </a:solidFill>
+                          <a:latin typeface="Calibri"/>
+                        </a:rPr>
+                        <a:t>BYD Company Limited</a:t>
+                      </a:r>
+                    </a:p>
+                  </a:txBody>
+                  <a:tcPr>
+                    <a:solidFill>
+                      <a:srgbClr val="FFFFFF"/>
+                    </a:solidFill>
+                  </a:tcPr>
+                </a:tc>
+                <a:tc>
+                  <a:txBody>
+                    <a:bodyPr/>
+                    <a:lstStyle/>
+                    <a:p>
+                      <a:pPr algn="ctr"/>
+                      <a:r>
+                        <a:rPr sz="750" b="0" i="0">
+                          <a:solidFill>
+                            <a:srgbClr val="555555"/>
+                          </a:solidFill>
+                          <a:latin typeface="Calibri"/>
+                        </a:rPr>
+                        <a:t>BYD</a:t>
+                      </a:r>
+                    </a:p>
+                  </a:txBody>
+                  <a:tcPr>
+                    <a:solidFill>
+                      <a:srgbClr val="FFFFFF"/>
+                    </a:solidFill>
+                  </a:tcPr>
+                </a:tc>
+                <a:tc>
+                  <a:txBody>
+                    <a:bodyPr/>
+                    <a:lstStyle/>
+                    <a:p>
+                      <a:pPr algn="ctr"/>
+                      <a:r>
+                        <a:rPr sz="800" b="0" i="0">
+                          <a:solidFill>
+                            <a:srgbClr val="0D0D0D"/>
+                          </a:solidFill>
+                          <a:latin typeface="Calibri"/>
+                        </a:rPr>
+                        <a:t>85,0</a:t>
+                      </a:r>
+                    </a:p>
+                  </a:txBody>
+                  <a:tcPr>
+                    <a:solidFill>
+                      <a:srgbClr val="FFFFFF"/>
+                    </a:solidFill>
+                  </a:tcPr>
+                </a:tc>
+                <a:tc>
+                  <a:txBody>
+                    <a:bodyPr/>
+                    <a:lstStyle/>
+                    <a:p>
+                      <a:pPr algn="ctr"/>
+                      <a:r>
+                        <a:rPr sz="800" b="0" i="0">
+                          <a:solidFill>
+                            <a:srgbClr val="0D0D0D"/>
+                          </a:solidFill>
+                          <a:latin typeface="Calibri"/>
+                        </a:rPr>
+                        <a:t>19,8x</a:t>
+                      </a:r>
+                    </a:p>
+                  </a:txBody>
+                  <a:tcPr>
+                    <a:solidFill>
+                      <a:srgbClr val="FFFFFF"/>
+                    </a:solidFill>
+                  </a:tcPr>
+                </a:tc>
+                <a:tc>
+                  <a:txBody>
+                    <a:bodyPr/>
+                    <a:lstStyle/>
+                    <a:p>
+                      <a:pPr algn="ctr"/>
+                      <a:r>
+                        <a:rPr sz="800" b="0" i="0">
+                          <a:solidFill>
+                            <a:srgbClr val="0D0D0D"/>
+                          </a:solidFill>
+                          <a:latin typeface="Calibri"/>
+                        </a:rPr>
+                        <a:t>1,8x</a:t>
+                      </a:r>
+                    </a:p>
+                  </a:txBody>
+                  <a:tcPr>
+                    <a:solidFill>
+                      <a:srgbClr val="FFFFFF"/>
+                    </a:solidFill>
+                  </a:tcPr>
+                </a:tc>
+                <a:tc>
+                  <a:txBody>
+                    <a:bodyPr/>
+                    <a:lstStyle/>
+                    <a:p>
+                      <a:pPr algn="ctr"/>
+                      <a:r>
+                        <a:rPr sz="800" b="0" i="0">
+                          <a:solidFill>
+                            <a:srgbClr val="0D0D0D"/>
+                          </a:solidFill>
+                          <a:latin typeface="Calibri"/>
+                        </a:rPr>
+                        <a:t>25,4x</a:t>
+                      </a:r>
+                    </a:p>
+                  </a:txBody>
+                  <a:tcPr>
+                    <a:solidFill>
+                      <a:srgbClr val="FFFFFF"/>
+                    </a:solidFill>
+                  </a:tcPr>
+                </a:tc>
+                <a:tc>
+                  <a:txBody>
+                    <a:bodyPr/>
+                    <a:lstStyle/>
+                    <a:p>
+                      <a:pPr algn="ctr"/>
+                      <a:r>
+                        <a:rPr sz="800" b="0" i="0">
+                          <a:solidFill>
+                            <a:srgbClr val="0D0D0D"/>
+                          </a:solidFill>
+                          <a:latin typeface="Calibri"/>
+                        </a:rPr>
+                        <a:t>22,0 %</a:t>
+                      </a:r>
+                    </a:p>
+                  </a:txBody>
+                  <a:tcPr>
+                    <a:solidFill>
+                      <a:srgbClr val="FFFFFF"/>
+                    </a:solidFill>
+                  </a:tcPr>
+                </a:tc>
+                <a:tc>
+                  <a:txBody>
+                    <a:bodyPr/>
+                    <a:lstStyle/>
+                    <a:p>
+                      <a:pPr algn="ctr"/>
+                      <a:r>
+                        <a:rPr sz="800" b="0" i="0">
+                          <a:solidFill>
+                            <a:srgbClr val="0D0D0D"/>
+                          </a:solidFill>
+                          <a:latin typeface="Calibri"/>
+                        </a:rPr>
+                        <a:t>15,0 %</a:t>
+                      </a:r>
+                    </a:p>
+                  </a:txBody>
+                  <a:tcPr>
+                    <a:solidFill>
+                      <a:srgbClr val="FFFFFF"/>
+                    </a:solidFill>
+                  </a:tcPr>
+                </a:tc>
+              </a:tr>
+              <a:tr h="251999">
+                <a:tc>
+                  <a:txBody>
+                    <a:bodyPr/>
+                    <a:lstStyle/>
+                    <a:p>
+                      <a:pPr algn="l"/>
+                      <a:r>
+                        <a:rPr sz="800" b="0" i="0">
+                          <a:solidFill>
+                            <a:srgbClr val="0D0D0D"/>
+                          </a:solidFill>
+                          <a:latin typeface="Calibri"/>
+                        </a:rPr>
+                        <a:t>NIO Inc.</a:t>
+                      </a:r>
+                    </a:p>
+                  </a:txBody>
+                  <a:tcPr>
+                    <a:solidFill>
+                      <a:srgbClr val="F7F8FA"/>
+                    </a:solidFill>
+                  </a:tcPr>
+                </a:tc>
+                <a:tc>
+                  <a:txBody>
+                    <a:bodyPr/>
+                    <a:lstStyle/>
+                    <a:p>
+                      <a:pPr algn="ctr"/>
+                      <a:r>
+                        <a:rPr sz="750" b="0" i="0">
+                          <a:solidFill>
+                            <a:srgbClr val="555555"/>
+                          </a:solidFill>
+                          <a:latin typeface="Calibri"/>
+                        </a:rPr>
+                        <a:t>NIO</a:t>
+                      </a:r>
+                    </a:p>
+                  </a:txBody>
+                  <a:tcPr>
+                    <a:solidFill>
+                      <a:srgbClr val="F7F8FA"/>
+                    </a:solidFill>
+                  </a:tcPr>
+                </a:tc>
+                <a:tc>
+                  <a:txBody>
+                    <a:bodyPr/>
+                    <a:lstStyle/>
+                    <a:p>
+                      <a:pPr algn="ctr"/>
+                      <a:r>
+                        <a:rPr sz="800" b="0" i="0">
+                          <a:solidFill>
+                            <a:srgbClr val="0D0D0D"/>
+                          </a:solidFill>
+                          <a:latin typeface="Calibri"/>
+                        </a:rPr>
+                        <a:t>22,0</a:t>
+                      </a:r>
+                    </a:p>
+                  </a:txBody>
+                  <a:tcPr>
+                    <a:solidFill>
+                      <a:srgbClr val="F7F8FA"/>
+                    </a:solidFill>
+                  </a:tcPr>
+                </a:tc>
+                <a:tc>
+                  <a:txBody>
+                    <a:bodyPr/>
+                    <a:lstStyle/>
+                    <a:p>
+                      <a:pPr algn="ctr"/>
+                      <a:r>
+                        <a:rPr sz="800" b="0" i="0">
+                          <a:solidFill>
+                            <a:srgbClr val="0D0D0D"/>
+                          </a:solidFill>
+                          <a:latin typeface="Calibri"/>
+                        </a:rPr>
+                        <a:t>-12,5x</a:t>
+                      </a:r>
+                    </a:p>
+                  </a:txBody>
+                  <a:tcPr>
+                    <a:solidFill>
+                      <a:srgbClr val="F7F8FA"/>
+                    </a:solidFill>
+                  </a:tcPr>
+                </a:tc>
+                <a:tc>
+                  <a:txBody>
+                    <a:bodyPr/>
+                    <a:lstStyle/>
+                    <a:p>
+                      <a:pPr algn="ctr"/>
+                      <a:r>
+                        <a:rPr sz="800" b="0" i="0">
+                          <a:solidFill>
+                            <a:srgbClr val="0D0D0D"/>
+                          </a:solidFill>
+                          <a:latin typeface="Calibri"/>
+                        </a:rPr>
+                        <a:t>2,1x</a:t>
+                      </a:r>
+                    </a:p>
+                  </a:txBody>
+                  <a:tcPr>
+                    <a:solidFill>
+                      <a:srgbClr val="F7F8FA"/>
+                    </a:solidFill>
+                  </a:tcPr>
+                </a:tc>
+                <a:tc>
+                  <a:txBody>
+                    <a:bodyPr/>
+                    <a:lstStyle/>
+                    <a:p>
+                      <a:pPr algn="ctr"/>
+                      <a:r>
+                        <a:rPr sz="800" b="0" i="0">
+                          <a:solidFill>
+                            <a:srgbClr val="0D0D0D"/>
+                          </a:solidFill>
+                          <a:latin typeface="Calibri"/>
+                        </a:rPr>
+                        <a:t>-12,0x</a:t>
+                      </a:r>
+                    </a:p>
+                  </a:txBody>
+                  <a:tcPr>
+                    <a:solidFill>
+                      <a:srgbClr val="F7F8FA"/>
+                    </a:solidFill>
+                  </a:tcPr>
+                </a:tc>
+                <a:tc>
+                  <a:txBody>
+                    <a:bodyPr/>
+                    <a:lstStyle/>
+                    <a:p>
+                      <a:pPr algn="ctr"/>
+                      <a:r>
+                        <a:rPr sz="800" b="0" i="0">
+                          <a:solidFill>
+                            <a:srgbClr val="0D0D0D"/>
+                          </a:solidFill>
+                          <a:latin typeface="Calibri"/>
+                        </a:rPr>
+                        <a:t>14,0 %</a:t>
+                      </a:r>
+                    </a:p>
+                  </a:txBody>
+                  <a:tcPr>
+                    <a:solidFill>
+                      <a:srgbClr val="F7F8FA"/>
+                    </a:solidFill>
+                  </a:tcPr>
+                </a:tc>
+                <a:tc>
+                  <a:txBody>
+                    <a:bodyPr/>
+                    <a:lstStyle/>
+                    <a:p>
+                      <a:pPr algn="ctr"/>
+                      <a:r>
+                        <a:rPr sz="800" b="0" i="0">
+                          <a:solidFill>
+                            <a:srgbClr val="0D0D0D"/>
+                          </a:solidFill>
+                          <a:latin typeface="Calibri"/>
+                        </a:rPr>
+                        <a:t>-5,0 %</a:t>
+                      </a:r>
+                    </a:p>
+                  </a:txBody>
+                  <a:tcPr>
+                    <a:solidFill>
+                      <a:srgbClr val="F7F8FA"/>
+                    </a:solidFill>
+                  </a:tcPr>
+                </a:tc>
+              </a:tr>
+              <a:tr h="251999">
+                <a:tc>
+                  <a:txBody>
+                    <a:bodyPr/>
+                    <a:lstStyle/>
+                    <a:p>
+                      <a:pPr algn="l"/>
+                      <a:r>
+                        <a:rPr sz="800" b="0" i="0">
+                          <a:solidFill>
+                            <a:srgbClr val="0D0D0D"/>
+                          </a:solidFill>
+                          <a:latin typeface="Calibri"/>
+                        </a:rPr>
+                        <a:t>XPeng Inc.</a:t>
+                      </a:r>
+                    </a:p>
+                  </a:txBody>
+                  <a:tcPr>
+                    <a:solidFill>
+                      <a:srgbClr val="FFFFFF"/>
+                    </a:solidFill>
+                  </a:tcPr>
+                </a:tc>
+                <a:tc>
+                  <a:txBody>
+                    <a:bodyPr/>
+                    <a:lstStyle/>
+                    <a:p>
+                      <a:pPr algn="ctr"/>
+                      <a:r>
+                        <a:rPr sz="750" b="0" i="0">
+                          <a:solidFill>
+                            <a:srgbClr val="555555"/>
+                          </a:solidFill>
+                          <a:latin typeface="Calibri"/>
+                        </a:rPr>
+                        <a:t>XPEV</a:t>
+                      </a:r>
+                    </a:p>
+                  </a:txBody>
+                  <a:tcPr>
+                    <a:solidFill>
+                      <a:srgbClr val="FFFFFF"/>
+                    </a:solidFill>
+                  </a:tcPr>
+                </a:tc>
+                <a:tc>
+                  <a:txBody>
+                    <a:bodyPr/>
+                    <a:lstStyle/>
+                    <a:p>
+                      <a:pPr algn="ctr"/>
+                      <a:r>
+                        <a:rPr sz="800" b="0" i="0">
+                          <a:solidFill>
+                            <a:srgbClr val="0D0D0D"/>
+                          </a:solidFill>
+                          <a:latin typeface="Calibri"/>
+                        </a:rPr>
+                        <a:t>12,0</a:t>
+                      </a:r>
+                    </a:p>
+                  </a:txBody>
+                  <a:tcPr>
+                    <a:solidFill>
+                      <a:srgbClr val="FFFFFF"/>
+                    </a:solidFill>
+                  </a:tcPr>
+                </a:tc>
+                <a:tc>
+                  <a:txBody>
+                    <a:bodyPr/>
+                    <a:lstStyle/>
+                    <a:p>
+                      <a:pPr algn="ctr"/>
+                      <a:r>
+                        <a:rPr sz="800" b="0" i="0">
+                          <a:solidFill>
+                            <a:srgbClr val="0D0D0D"/>
+                          </a:solidFill>
+                          <a:latin typeface="Calibri"/>
+                        </a:rPr>
+                        <a:t>-15,2x</a:t>
+                      </a:r>
+                    </a:p>
+                  </a:txBody>
+                  <a:tcPr>
+                    <a:solidFill>
+                      <a:srgbClr val="FFFFFF"/>
+                    </a:solidFill>
+                  </a:tcPr>
+                </a:tc>
+                <a:tc>
+                  <a:txBody>
+                    <a:bodyPr/>
+                    <a:lstStyle/>
+                    <a:p>
+                      <a:pPr algn="ctr"/>
+                      <a:r>
+                        <a:rPr sz="800" b="0" i="0">
+                          <a:solidFill>
+                            <a:srgbClr val="0D0D0D"/>
+                          </a:solidFill>
+                          <a:latin typeface="Calibri"/>
+                        </a:rPr>
+                        <a:t>1,5x</a:t>
+                      </a:r>
+                    </a:p>
+                  </a:txBody>
+                  <a:tcPr>
+                    <a:solidFill>
+                      <a:srgbClr val="FFFFFF"/>
+                    </a:solidFill>
+                  </a:tcPr>
+                </a:tc>
+                <a:tc>
+                  <a:txBody>
+                    <a:bodyPr/>
+                    <a:lstStyle/>
+                    <a:p>
+                      <a:pPr algn="ctr"/>
+                      <a:r>
+                        <a:rPr sz="800" b="0" i="0">
+                          <a:solidFill>
+                            <a:srgbClr val="0D0D0D"/>
+                          </a:solidFill>
+                          <a:latin typeface="Calibri"/>
+                        </a:rPr>
+                        <a:t>-18,3x</a:t>
+                      </a:r>
+                    </a:p>
+                  </a:txBody>
+                  <a:tcPr>
+                    <a:solidFill>
+                      <a:srgbClr val="FFFFFF"/>
+                    </a:solidFill>
+                  </a:tcPr>
+                </a:tc>
+                <a:tc>
+                  <a:txBody>
+                    <a:bodyPr/>
+                    <a:lstStyle/>
+                    <a:p>
+                      <a:pPr algn="ctr"/>
+                      <a:r>
+                        <a:rPr sz="800" b="0" i="0">
+                          <a:solidFill>
+                            <a:srgbClr val="0D0D0D"/>
+                          </a:solidFill>
+                          <a:latin typeface="Calibri"/>
+                        </a:rPr>
+                        <a:t>12,0 %</a:t>
+                      </a:r>
+                    </a:p>
+                  </a:txBody>
+                  <a:tcPr>
+                    <a:solidFill>
+                      <a:srgbClr val="FFFFFF"/>
+                    </a:solidFill>
+                  </a:tcPr>
+                </a:tc>
+                <a:tc>
+                  <a:txBody>
+                    <a:bodyPr/>
+                    <a:lstStyle/>
+                    <a:p>
+                      <a:pPr algn="ctr"/>
+                      <a:r>
+                        <a:rPr sz="800" b="0" i="0">
+                          <a:solidFill>
+                            <a:srgbClr val="0D0D0D"/>
+                          </a:solidFill>
+                          <a:latin typeface="Calibri"/>
+                        </a:rPr>
+                        <a:t>-8,0 %</a:t>
+                      </a:r>
+                    </a:p>
+                  </a:txBody>
+                  <a:tcPr>
+                    <a:solidFill>
+                      <a:srgbClr val="FFFFFF"/>
+                    </a:solidFill>
+                  </a:tcPr>
+                </a:tc>
+              </a:tr>
+              <a:tr h="251999">
+                <a:tc>
+                  <a:txBody>
+                    <a:bodyPr/>
+                    <a:lstStyle/>
+                    <a:p>
+                      <a:pPr algn="l"/>
+                      <a:r>
+                        <a:rPr sz="800" b="0" i="0">
+                          <a:solidFill>
+                            <a:srgbClr val="0D0D0D"/>
+                          </a:solidFill>
+                          <a:latin typeface="Calibri"/>
+                        </a:rPr>
+                        <a:t>Rivian Automotive</a:t>
+                      </a:r>
+                    </a:p>
+                  </a:txBody>
+                  <a:tcPr>
+                    <a:solidFill>
+                      <a:srgbClr val="F7F8FA"/>
+                    </a:solidFill>
+                  </a:tcPr>
+                </a:tc>
+                <a:tc>
+                  <a:txBody>
+                    <a:bodyPr/>
+                    <a:lstStyle/>
+                    <a:p>
+                      <a:pPr algn="ctr"/>
+                      <a:r>
+                        <a:rPr sz="750" b="0" i="0">
+                          <a:solidFill>
+                            <a:srgbClr val="555555"/>
+                          </a:solidFill>
+                          <a:latin typeface="Calibri"/>
+                        </a:rPr>
+                        <a:t>RIVN</a:t>
+                      </a:r>
+                    </a:p>
+                  </a:txBody>
+                  <a:tcPr>
+                    <a:solidFill>
+                      <a:srgbClr val="F7F8FA"/>
+                    </a:solidFill>
+                  </a:tcPr>
+                </a:tc>
+                <a:tc>
+                  <a:txBody>
+                    <a:bodyPr/>
+                    <a:lstStyle/>
+                    <a:p>
+                      <a:pPr algn="ctr"/>
+                      <a:r>
+                        <a:rPr sz="800" b="0" i="0">
+                          <a:solidFill>
+                            <a:srgbClr val="0D0D0D"/>
+                          </a:solidFill>
+                          <a:latin typeface="Calibri"/>
+                        </a:rPr>
+                        <a:t>18,0</a:t>
+                      </a:r>
+                    </a:p>
+                  </a:txBody>
+                  <a:tcPr>
+                    <a:solidFill>
+                      <a:srgbClr val="F7F8FA"/>
+                    </a:solidFill>
+                  </a:tcPr>
+                </a:tc>
+                <a:tc>
+                  <a:txBody>
+                    <a:bodyPr/>
+                    <a:lstStyle/>
+                    <a:p>
+                      <a:pPr algn="ctr"/>
+                      <a:r>
+                        <a:rPr sz="800" b="0" i="0">
+                          <a:solidFill>
+                            <a:srgbClr val="0D0D0D"/>
+                          </a:solidFill>
+                          <a:latin typeface="Calibri"/>
+                        </a:rPr>
+                        <a:t>-10,5x</a:t>
+                      </a:r>
+                    </a:p>
+                  </a:txBody>
+                  <a:tcPr>
+                    <a:solidFill>
+                      <a:srgbClr val="F7F8FA"/>
+                    </a:solidFill>
+                  </a:tcPr>
+                </a:tc>
+                <a:tc>
+                  <a:txBody>
+                    <a:bodyPr/>
+                    <a:lstStyle/>
+                    <a:p>
+                      <a:pPr algn="ctr"/>
+                      <a:r>
+                        <a:rPr sz="800" b="0" i="0">
+                          <a:solidFill>
+                            <a:srgbClr val="0D0D0D"/>
+                          </a:solidFill>
+                          <a:latin typeface="Calibri"/>
+                        </a:rPr>
+                        <a:t>3,2x</a:t>
+                      </a:r>
+                    </a:p>
+                  </a:txBody>
+                  <a:tcPr>
+                    <a:solidFill>
+                      <a:srgbClr val="F7F8FA"/>
+                    </a:solidFill>
+                  </a:tcPr>
+                </a:tc>
+                <a:tc>
+                  <a:txBody>
+                    <a:bodyPr/>
+                    <a:lstStyle/>
+                    <a:p>
+                      <a:pPr algn="ctr"/>
+                      <a:r>
+                        <a:rPr sz="800" b="0" i="0">
+                          <a:solidFill>
+                            <a:srgbClr val="0D0D0D"/>
+                          </a:solidFill>
+                          <a:latin typeface="Calibri"/>
+                        </a:rPr>
+                        <a:t>-25,0x</a:t>
+                      </a:r>
+                    </a:p>
+                  </a:txBody>
+                  <a:tcPr>
+                    <a:solidFill>
+                      <a:srgbClr val="F7F8FA"/>
+                    </a:solidFill>
+                  </a:tcPr>
+                </a:tc>
+                <a:tc>
+                  <a:txBody>
+                    <a:bodyPr/>
+                    <a:lstStyle/>
+                    <a:p>
+                      <a:pPr algn="ctr"/>
+                      <a:r>
+                        <a:rPr sz="800" b="0" i="0">
+                          <a:solidFill>
+                            <a:srgbClr val="0D0D0D"/>
+                          </a:solidFill>
+                          <a:latin typeface="Calibri"/>
+                        </a:rPr>
+                        <a:t>10,0 %</a:t>
+                      </a:r>
+                    </a:p>
+                  </a:txBody>
+                  <a:tcPr>
+                    <a:solidFill>
+                      <a:srgbClr val="F7F8FA"/>
+                    </a:solidFill>
+                  </a:tcPr>
+                </a:tc>
+                <a:tc>
+                  <a:txBody>
+                    <a:bodyPr/>
+                    <a:lstStyle/>
+                    <a:p>
+                      <a:pPr algn="ctr"/>
+                      <a:r>
+                        <a:rPr sz="800" b="0" i="0">
+                          <a:solidFill>
+                            <a:srgbClr val="0D0D0D"/>
+                          </a:solidFill>
+                          <a:latin typeface="Calibri"/>
+                        </a:rPr>
+                        <a:t>-20,0 %</a:t>
+                      </a:r>
+                    </a:p>
+                  </a:txBody>
+                  <a:tcPr>
+                    <a:solidFill>
+                      <a:srgbClr val="F7F8FA"/>
+                    </a:solidFill>
+                  </a:tcPr>
+                </a:tc>
+              </a:tr>
+              <a:tr h="251999">
+                <a:tc>
+                  <a:txBody>
+                    <a:bodyPr/>
+                    <a:lstStyle/>
+                    <a:p>
+                      <a:pPr algn="l"/>
+                      <a:r>
+                        <a:rPr sz="800" b="0" i="0">
+                          <a:solidFill>
+                            <a:srgbClr val="0D0D0D"/>
+                          </a:solidFill>
+                          <a:latin typeface="Calibri"/>
+                        </a:rPr>
+                        <a:t>Lucid Group</a:t>
+                      </a:r>
+                    </a:p>
+                  </a:txBody>
+                  <a:tcPr>
+                    <a:solidFill>
+                      <a:srgbClr val="FFFFFF"/>
+                    </a:solidFill>
+                  </a:tcPr>
+                </a:tc>
+                <a:tc>
+                  <a:txBody>
+                    <a:bodyPr/>
+                    <a:lstStyle/>
+                    <a:p>
+                      <a:pPr algn="ctr"/>
+                      <a:r>
+                        <a:rPr sz="750" b="0" i="0">
+                          <a:solidFill>
+                            <a:srgbClr val="555555"/>
+                          </a:solidFill>
+                          <a:latin typeface="Calibri"/>
+                        </a:rPr>
+                        <a:t>LCID</a:t>
+                      </a:r>
+                    </a:p>
+                  </a:txBody>
+                  <a:tcPr>
+                    <a:solidFill>
+                      <a:srgbClr val="FFFFFF"/>
+                    </a:solidFill>
+                  </a:tcPr>
+                </a:tc>
+                <a:tc>
+                  <a:txBody>
+                    <a:bodyPr/>
+                    <a:lstStyle/>
+                    <a:p>
+                      <a:pPr algn="ctr"/>
+                      <a:r>
+                        <a:rPr sz="800" b="0" i="0">
+                          <a:solidFill>
+                            <a:srgbClr val="0D0D0D"/>
+                          </a:solidFill>
+                          <a:latin typeface="Calibri"/>
+                        </a:rPr>
+                        <a:t>15,0</a:t>
+                      </a:r>
+                    </a:p>
+                  </a:txBody>
+                  <a:tcPr>
+                    <a:solidFill>
+                      <a:srgbClr val="FFFFFF"/>
+                    </a:solidFill>
+                  </a:tcPr>
+                </a:tc>
+                <a:tc>
+                  <a:txBody>
+                    <a:bodyPr/>
+                    <a:lstStyle/>
+                    <a:p>
+                      <a:pPr algn="ctr"/>
+                      <a:r>
+                        <a:rPr sz="800" b="0" i="0">
+                          <a:solidFill>
+                            <a:srgbClr val="0D0D0D"/>
+                          </a:solidFill>
+                          <a:latin typeface="Calibri"/>
+                        </a:rPr>
+                        <a:t>-18,0x</a:t>
+                      </a:r>
+                    </a:p>
+                  </a:txBody>
+                  <a:tcPr>
+                    <a:solidFill>
+                      <a:srgbClr val="FFFFFF"/>
+                    </a:solidFill>
+                  </a:tcPr>
+                </a:tc>
+                <a:tc>
+                  <a:txBody>
+                    <a:bodyPr/>
+                    <a:lstStyle/>
+                    <a:p>
+                      <a:pPr algn="ctr"/>
+                      <a:r>
+                        <a:rPr sz="800" b="0" i="0">
+                          <a:solidFill>
+                            <a:srgbClr val="0D0D0D"/>
+                          </a:solidFill>
+                          <a:latin typeface="Calibri"/>
+                        </a:rPr>
+                        <a:t>7,5x</a:t>
+                      </a:r>
+                    </a:p>
+                  </a:txBody>
+                  <a:tcPr>
+                    <a:solidFill>
+                      <a:srgbClr val="FFFFFF"/>
+                    </a:solidFill>
+                  </a:tcPr>
+                </a:tc>
+                <a:tc>
+                  <a:txBody>
+                    <a:bodyPr/>
+                    <a:lstStyle/>
+                    <a:p>
+                      <a:pPr algn="ctr"/>
+                      <a:r>
+                        <a:rPr sz="800" b="0" i="0">
+                          <a:solidFill>
+                            <a:srgbClr val="0D0D0D"/>
+                          </a:solidFill>
+                          <a:latin typeface="Calibri"/>
+                        </a:rPr>
+                        <a:t>-30,0x</a:t>
+                      </a:r>
+                    </a:p>
+                  </a:txBody>
+                  <a:tcPr>
+                    <a:solidFill>
+                      <a:srgbClr val="FFFFFF"/>
+                    </a:solidFill>
+                  </a:tcPr>
+                </a:tc>
+                <a:tc>
+                  <a:txBody>
+                    <a:bodyPr/>
+                    <a:lstStyle/>
+                    <a:p>
+                      <a:pPr algn="ctr"/>
+                      <a:r>
+                        <a:rPr sz="800" b="0" i="0">
+                          <a:solidFill>
+                            <a:srgbClr val="0D0D0D"/>
+                          </a:solidFill>
+                          <a:latin typeface="Calibri"/>
+                        </a:rPr>
+                        <a:t>18,0 %</a:t>
+                      </a:r>
+                    </a:p>
+                  </a:txBody>
+                  <a:tcPr>
+                    <a:solidFill>
+                      <a:srgbClr val="FFFFFF"/>
+                    </a:solidFill>
+                  </a:tcPr>
+                </a:tc>
+                <a:tc>
+                  <a:txBody>
+                    <a:bodyPr/>
+                    <a:lstStyle/>
+                    <a:p>
+                      <a:pPr algn="ctr"/>
+                      <a:r>
+                        <a:rPr sz="800" b="0" i="0">
+                          <a:solidFill>
+                            <a:srgbClr val="0D0D0D"/>
+                          </a:solidFill>
+                          <a:latin typeface="Calibri"/>
+                        </a:rPr>
+                        <a:t>-15,0 %</a:t>
+                      </a:r>
+                    </a:p>
+                  </a:txBody>
+                  <a:tcPr>
+                    <a:solidFill>
+                      <a:srgbClr val="FFFFFF"/>
+                    </a:solidFill>
+                  </a:tcPr>
+                </a:tc>
+              </a:tr>
+              <a:tr h="252006">
+                <a:tc>
+                  <a:txBody>
+                    <a:bodyPr/>
+                    <a:lstStyle/>
+                    <a:p>
+                      <a:pPr algn="l"/>
+                      <a:r>
                         <a:rPr sz="800" b="1" i="0">
                           <a:solidFill>
                             <a:srgbClr val="0D0D0D"/>
@@ -11306,7 +12306,7 @@
                           </a:solidFill>
                           <a:latin typeface="Calibri"/>
                         </a:rPr>
-                        <a:t>—</a:t>
+                        <a:t>-12,5x</a:t>
                       </a:r>
                     </a:p>
                   </a:txBody>
@@ -11329,7 +12329,7 @@
                           </a:solidFill>
                           <a:latin typeface="Calibri"/>
                         </a:rPr>
-                        <a:t>—</a:t>
+                        <a:t>2,1x</a:t>
                       </a:r>
                     </a:p>
                   </a:txBody>
@@ -11352,7 +12352,7 @@
                           </a:solidFill>
                           <a:latin typeface="Calibri"/>
                         </a:rPr>
-                        <a:t>—</a:t>
+                        <a:t>-18,3x</a:t>
                       </a:r>
                     </a:p>
                   </a:txBody>
@@ -11375,7 +12375,7 @@
                           </a:solidFill>
                           <a:latin typeface="Calibri"/>
                         </a:rPr>
-                        <a:t>—</a:t>
+                        <a:t>14,0 %</a:t>
                       </a:r>
                     </a:p>
                   </a:txBody>
@@ -11398,7 +12398,7 @@
                           </a:solidFill>
                           <a:latin typeface="Calibri"/>
                         </a:rPr>
-                        <a:t>—</a:t>
+                        <a:t>-8,0 %</a:t>
                       </a:r>
                     </a:p>
                   </a:txBody>
@@ -11413,6 +12413,41 @@
           </a:graphicData>
         </a:graphic>
       </p:graphicFrame>
+      <p:sp>
+        <p:nvSpPr>
+          <p:cNvPr id="18" name="TextBox 17"/>
+          <p:cNvSpPr txBox="1"/>
+          <p:nvPr/>
+        </p:nvSpPr>
+        <p:spPr>
+          <a:xfrm>
+            <a:off x="367200" y="3128400"/>
+            <a:ext cx="8413200" cy="1234800"/>
+          </a:xfrm>
+          <a:prstGeom prst="rect">
+            <a:avLst/>
+          </a:prstGeom>
+          <a:noFill/>
+        </p:spPr>
+        <p:txBody>
+          <a:bodyPr wrap="square">
+            <a:spAutoFit/>
+          </a:bodyPr>
+          <a:lstStyle/>
+          <a:p>
+            <a:pPr algn="l"/>
+            <a:r>
+              <a:rPr sz="850" b="0" i="0">
+                <a:solidFill>
+                  <a:srgbClr val="555555"/>
+                </a:solidFill>
+                <a:latin typeface="Calibri"/>
+              </a:rPr>
+              <a:t>Tesla affiche une prime de 450% sur l'EV/EBITDA médiane peers (109,9x vs ~20x pour BYD, NIO, XPeng, Rivian, Lucid) et de 200% sur le P/E (342,9x vs ~150x). Cette prime est partiellement justifiée par la diversification (énergie, logiciel) et l'avance technologique, mais une convergence vers la médiane peers impliquerait un downside de 30-40% sur les multiples actuels.</a:t>
+            </a:r>
+          </a:p>
+        </p:txBody>
+      </p:sp>
     </p:spTree>
   </p:cSld>
   <p:clrMapOvr>
@@ -12012,222 +13047,65 @@
           </a:p>
         </p:txBody>
       </p:sp>
-      <p:graphicFrame>
-        <p:nvGraphicFramePr>
-          <p:cNvPr id="17" name="Table 16"/>
-          <p:cNvGraphicFramePr>
-            <a:graphicFrameLocks noGrp="1"/>
-          </p:cNvGraphicFramePr>
-          <p:nvPr/>
-        </p:nvGraphicFramePr>
-        <p:xfrm>
-          <a:off x="367200" y="914400"/>
-          <a:ext cx="8413200" cy="615600"/>
-        </p:xfrm>
-        <a:graphic>
-          <a:graphicData uri="http://schemas.openxmlformats.org/drawingml/2006/table">
-            <a:tbl>
-              <a:tblPr firstRow="1" bandRow="1">
-                <a:tableStyleId>{5C22544A-7EE6-4342-B048-85BDC9FD1C3A}</a:tableStyleId>
-              </a:tblPr>
-              <a:tblGrid>
-                <a:gridCol w="2944620"/>
-                <a:gridCol w="1682640"/>
-                <a:gridCol w="1682640"/>
-                <a:gridCol w="2103300"/>
-              </a:tblGrid>
-              <a:tr h="307800">
-                <a:tc>
-                  <a:txBody>
-                    <a:bodyPr/>
-                    <a:lstStyle/>
-                    <a:p>
-                      <a:pPr algn="l"/>
-                      <a:r>
-                        <a:rPr sz="800" b="1" i="0">
-                          <a:solidFill>
-                            <a:srgbClr val="FFFFFF"/>
-                          </a:solidFill>
-                          <a:latin typeface="Calibri"/>
-                        </a:rPr>
-                        <a:t>Méthode</a:t>
-                      </a:r>
-                    </a:p>
-                  </a:txBody>
-                  <a:tcPr>
-                    <a:solidFill>
-                      <a:srgbClr val="1B3A6B"/>
-                    </a:solidFill>
-                  </a:tcPr>
-                </a:tc>
-                <a:tc>
-                  <a:txBody>
-                    <a:bodyPr/>
-                    <a:lstStyle/>
-                    <a:p>
-                      <a:pPr algn="ctr"/>
-                      <a:r>
-                        <a:rPr sz="800" b="1" i="0">
-                          <a:solidFill>
-                            <a:srgbClr val="FFFFFF"/>
-                          </a:solidFill>
-                          <a:latin typeface="Calibri"/>
-                        </a:rPr>
-                        <a:t>Fourchette basse</a:t>
-                      </a:r>
-                    </a:p>
-                  </a:txBody>
-                  <a:tcPr>
-                    <a:solidFill>
-                      <a:srgbClr val="1B3A6B"/>
-                    </a:solidFill>
-                  </a:tcPr>
-                </a:tc>
-                <a:tc>
-                  <a:txBody>
-                    <a:bodyPr/>
-                    <a:lstStyle/>
-                    <a:p>
-                      <a:pPr algn="ctr"/>
-                      <a:r>
-                        <a:rPr sz="800" b="1" i="0">
-                          <a:solidFill>
-                            <a:srgbClr val="FFFFFF"/>
-                          </a:solidFill>
-                          <a:latin typeface="Calibri"/>
-                        </a:rPr>
-                        <a:t>Fourchette haute</a:t>
-                      </a:r>
-                    </a:p>
-                  </a:txBody>
-                  <a:tcPr>
-                    <a:solidFill>
-                      <a:srgbClr val="1B3A6B"/>
-                    </a:solidFill>
-                  </a:tcPr>
-                </a:tc>
-                <a:tc>
-                  <a:txBody>
-                    <a:bodyPr/>
-                    <a:lstStyle/>
-                    <a:p>
-                      <a:pPr algn="ctr"/>
-                      <a:r>
-                        <a:rPr sz="800" b="1" i="0">
-                          <a:solidFill>
-                            <a:srgbClr val="FFFFFF"/>
-                          </a:solidFill>
-                          <a:latin typeface="Calibri"/>
-                        </a:rPr>
-                        <a:t>Point central</a:t>
-                      </a:r>
-                    </a:p>
-                  </a:txBody>
-                  <a:tcPr>
-                    <a:solidFill>
-                      <a:srgbClr val="1B3A6B"/>
-                    </a:solidFill>
-                  </a:tcPr>
-                </a:tc>
-              </a:tr>
-              <a:tr h="307800">
-                <a:tc>
-                  <a:txBody>
-                    <a:bodyPr/>
-                    <a:lstStyle/>
-                    <a:p>
-                      <a:pPr algn="l"/>
-                      <a:r>
-                        <a:rPr sz="800" b="0" i="0">
-                          <a:solidFill>
-                            <a:srgbClr val="0D0D0D"/>
-                          </a:solidFill>
-                          <a:latin typeface="Calibri"/>
-                        </a:rPr>
-                        <a:t>Cours actuel (346,65)</a:t>
-                      </a:r>
-                    </a:p>
-                  </a:txBody>
-                  <a:tcPr>
-                    <a:solidFill>
-                      <a:srgbClr val="EEF3FA"/>
-                    </a:solidFill>
-                  </a:tcPr>
-                </a:tc>
-                <a:tc>
-                  <a:txBody>
-                    <a:bodyPr/>
-                    <a:lstStyle/>
-                    <a:p>
-                      <a:pPr algn="ctr"/>
-                      <a:r>
-                        <a:rPr sz="800" b="0" i="0">
-                          <a:solidFill>
-                            <a:srgbClr val="0D0D0D"/>
-                          </a:solidFill>
-                          <a:latin typeface="Calibri"/>
-                        </a:rPr>
-                        <a:t>—</a:t>
-                      </a:r>
-                    </a:p>
-                  </a:txBody>
-                  <a:tcPr>
-                    <a:solidFill>
-                      <a:srgbClr val="EEF3FA"/>
-                    </a:solidFill>
-                  </a:tcPr>
-                </a:tc>
-                <a:tc>
-                  <a:txBody>
-                    <a:bodyPr/>
-                    <a:lstStyle/>
-                    <a:p>
-                      <a:pPr algn="ctr"/>
-                      <a:r>
-                        <a:rPr sz="800" b="0" i="0">
-                          <a:solidFill>
-                            <a:srgbClr val="0D0D0D"/>
-                          </a:solidFill>
-                          <a:latin typeface="Calibri"/>
-                        </a:rPr>
-                        <a:t>—</a:t>
-                      </a:r>
-                    </a:p>
-                  </a:txBody>
-                  <a:tcPr>
-                    <a:solidFill>
-                      <a:srgbClr val="EEF3FA"/>
-                    </a:solidFill>
-                  </a:tcPr>
-                </a:tc>
-                <a:tc>
-                  <a:txBody>
-                    <a:bodyPr/>
-                    <a:lstStyle/>
-                    <a:p>
-                      <a:pPr algn="ctr"/>
-                      <a:r>
-                        <a:rPr sz="800" b="0" i="0">
-                          <a:solidFill>
-                            <a:srgbClr val="0D0D0D"/>
-                          </a:solidFill>
-                          <a:latin typeface="Calibri"/>
-                        </a:rPr>
-                        <a:t>346,65</a:t>
-                      </a:r>
-                    </a:p>
-                  </a:txBody>
-                  <a:tcPr>
-                    <a:solidFill>
-                      <a:srgbClr val="EEF3FA"/>
-                    </a:solidFill>
-                  </a:tcPr>
-                </a:tc>
-              </a:tr>
-            </a:tbl>
-          </a:graphicData>
-        </a:graphic>
-      </p:graphicFrame>
+      <p:pic>
+        <p:nvPicPr>
+          <p:cNvPr id="17" name="Picture 16" descr="image.png"/>
+          <p:cNvPicPr>
+            <a:picLocks noChangeAspect="1"/>
+          </p:cNvPicPr>
+          <p:nvPr/>
+        </p:nvPicPr>
+        <p:blipFill>
+          <a:blip r:embed="rId2"/>
+          <a:stretch>
+            <a:fillRect/>
+          </a:stretch>
+        </p:blipFill>
+        <p:spPr>
+          <a:xfrm>
+            <a:off x="367200" y="914400"/>
+            <a:ext cx="8413200" cy="2448000"/>
+          </a:xfrm>
+          <a:prstGeom prst="rect">
+            <a:avLst/>
+          </a:prstGeom>
+        </p:spPr>
+      </p:pic>
+      <p:sp>
+        <p:nvSpPr>
+          <p:cNvPr id="18" name="TextBox 17"/>
+          <p:cNvSpPr txBox="1"/>
+          <p:nvPr/>
+        </p:nvSpPr>
+        <p:spPr>
+          <a:xfrm>
+            <a:off x="367200" y="3488400"/>
+            <a:ext cx="8413200" cy="914400"/>
+          </a:xfrm>
+          <a:prstGeom prst="rect">
+            <a:avLst/>
+          </a:prstGeom>
+          <a:noFill/>
+        </p:spPr>
+        <p:txBody>
+          <a:bodyPr wrap="square">
+            <a:spAutoFit/>
+          </a:bodyPr>
+          <a:lstStyle/>
+          <a:p>
+            <a:pPr algn="l"/>
+            <a:r>
+              <a:rPr sz="850" b="0" i="0">
+                <a:solidFill>
+                  <a:srgbClr val="555555"/>
+                </a:solidFill>
+                <a:latin typeface="Calibri"/>
+              </a:rPr>
+              <a:t>Avec un WACC de 14,8% et un TGR de 2,5%, le prix implicite DCF est estimé à 360 USD (base), soit une légère décote vs cours actuel (346,65 USD). L'upside est limité par une prime de croissance déjà pricee, mais un déclenchement de la marge opérationnelle ou une accélération du FSD pourrait justifier un re-rating.</a:t>
+            </a:r>
+          </a:p>
+        </p:txBody>
+      </p:sp>
     </p:spTree>
   </p:cSld>
   <p:clrMapOvr>
@@ -12896,7 +13774,7 @@
         </p:nvGraphicFramePr>
         <p:xfrm>
           <a:off x="6192000" y="1098000"/>
-          <a:ext cx="2592000" cy="1206000"/>
+          <a:ext cx="2592000" cy="1008000"/>
         </p:xfrm>
         <a:graphic>
           <a:graphicData uri="http://schemas.openxmlformats.org/drawingml/2006/table">
@@ -12910,7 +13788,7 @@
                 <a:gridCol w="673920"/>
                 <a:gridCol w="570240"/>
               </a:tblGrid>
-              <a:tr h="201000">
+              <a:tr h="201600">
                 <a:tc>
                   <a:txBody>
                     <a:bodyPr/>
@@ -13084,7 +13962,7 @@
                   </a:tcPr>
                 </a:tc>
               </a:tr>
-              <a:tr h="201000">
+              <a:tr h="201600">
                 <a:tc>
                   <a:txBody>
                     <a:bodyPr/>
@@ -13098,7 +13976,7 @@
                           </a:solidFill>
                           <a:latin typeface="Calibri"/>
                         </a:rPr>
-                        <a:t>2021</a:t>
+                        <a:t>2022</a:t>
                       </a:r>
                     </a:p>
                   </a:txBody>
@@ -13141,7 +14019,7 @@
                           </a:solidFill>
                           <a:latin typeface="Calibri"/>
                         </a:rPr>
-                        <a:t>—</a:t>
+                        <a:t>103,4x</a:t>
                       </a:r>
                     </a:p>
                   </a:txBody>
@@ -13184,7 +14062,7 @@
                           </a:solidFill>
                           <a:latin typeface="Calibri"/>
                         </a:rPr>
-                        <a:t>—</a:t>
+                        <a:t>72,9x</a:t>
                       </a:r>
                     </a:p>
                   </a:txBody>
@@ -13227,7 +14105,7 @@
                           </a:solidFill>
                           <a:latin typeface="Calibri"/>
                         </a:rPr>
-                        <a:t>—</a:t>
+                        <a:t>29,1x</a:t>
                       </a:r>
                     </a:p>
                   </a:txBody>
@@ -13258,7 +14136,7 @@
                   </a:tcPr>
                 </a:tc>
               </a:tr>
-              <a:tr h="201000">
+              <a:tr h="201600">
                 <a:tc>
                   <a:txBody>
                     <a:bodyPr/>
@@ -13272,7 +14150,7 @@
                           </a:solidFill>
                           <a:latin typeface="Calibri"/>
                         </a:rPr>
-                        <a:t>2022</a:t>
+                        <a:t>2023</a:t>
                       </a:r>
                     </a:p>
                   </a:txBody>
@@ -13315,7 +14193,7 @@
                           </a:solidFill>
                           <a:latin typeface="Calibri"/>
                         </a:rPr>
-                        <a:t>103,4x</a:t>
+                        <a:t>86,7x</a:t>
                       </a:r>
                     </a:p>
                   </a:txBody>
@@ -13358,7 +14236,7 @@
                           </a:solidFill>
                           <a:latin typeface="Calibri"/>
                         </a:rPr>
-                        <a:t>72,9x</a:t>
+                        <a:t>87,1x</a:t>
                       </a:r>
                     </a:p>
                   </a:txBody>
@@ -13401,7 +14279,7 @@
                           </a:solidFill>
                           <a:latin typeface="Calibri"/>
                         </a:rPr>
-                        <a:t>29,1x</a:t>
+                        <a:t>20,8x</a:t>
                       </a:r>
                     </a:p>
                   </a:txBody>
@@ -13432,7 +14310,7 @@
                   </a:tcPr>
                 </a:tc>
               </a:tr>
-              <a:tr h="201000">
+              <a:tr h="201600">
                 <a:tc>
                   <a:txBody>
                     <a:bodyPr/>
@@ -13446,7 +14324,7 @@
                           </a:solidFill>
                           <a:latin typeface="Calibri"/>
                         </a:rPr>
-                        <a:t>2023</a:t>
+                        <a:t>2024</a:t>
                       </a:r>
                     </a:p>
                   </a:txBody>
@@ -13489,7 +14367,7 @@
                           </a:solidFill>
                           <a:latin typeface="Calibri"/>
                         </a:rPr>
-                        <a:t>86,7x</a:t>
+                        <a:t>182,4x</a:t>
                       </a:r>
                     </a:p>
                   </a:txBody>
@@ -13532,7 +14410,7 @@
                           </a:solidFill>
                           <a:latin typeface="Calibri"/>
                         </a:rPr>
-                        <a:t>87,1x</a:t>
+                        <a:t>87,9x</a:t>
                       </a:r>
                     </a:p>
                   </a:txBody>
@@ -13575,7 +14453,7 @@
                           </a:solidFill>
                           <a:latin typeface="Calibri"/>
                         </a:rPr>
-                        <a:t>20,8x</a:t>
+                        <a:t>17,8x</a:t>
                       </a:r>
                     </a:p>
                   </a:txBody>
@@ -13606,7 +14484,7 @@
                   </a:tcPr>
                 </a:tc>
               </a:tr>
-              <a:tr h="201000">
+              <a:tr h="201600">
                 <a:tc>
                   <a:txBody>
                     <a:bodyPr/>
@@ -13620,7 +14498,7 @@
                           </a:solidFill>
                           <a:latin typeface="Calibri"/>
                         </a:rPr>
-                        <a:t>2024</a:t>
+                        <a:t>2025</a:t>
                       </a:r>
                     </a:p>
                   </a:txBody>
@@ -13663,7 +14541,7 @@
                           </a:solidFill>
                           <a:latin typeface="Calibri"/>
                         </a:rPr>
-                        <a:t>182,4x</a:t>
+                        <a:t>342,9x</a:t>
                       </a:r>
                     </a:p>
                   </a:txBody>
@@ -13706,7 +14584,7 @@
                           </a:solidFill>
                           <a:latin typeface="Calibri"/>
                         </a:rPr>
-                        <a:t>87,9x</a:t>
+                        <a:t>109,9x</a:t>
                       </a:r>
                     </a:p>
                   </a:txBody>
@@ -13749,187 +14627,13 @@
                           </a:solidFill>
                           <a:latin typeface="Calibri"/>
                         </a:rPr>
-                        <a:t>17,8x</a:t>
+                        <a:t>15,8x</a:t>
                       </a:r>
                     </a:p>
                   </a:txBody>
                   <a:tcPr>
                     <a:solidFill>
                       <a:srgbClr val="F7F8FA"/>
-                    </a:solidFill>
-                    <a:lnL w="6350">
-                      <a:solidFill>
-                        <a:srgbClr val="DDDDDD"/>
-                      </a:solidFill>
-                    </a:lnL>
-                    <a:lnR w="6350">
-                      <a:solidFill>
-                        <a:srgbClr val="DDDDDD"/>
-                      </a:solidFill>
-                    </a:lnR>
-                    <a:lnT w="6350">
-                      <a:solidFill>
-                        <a:srgbClr val="DDDDDD"/>
-                      </a:solidFill>
-                    </a:lnT>
-                    <a:lnB w="6350">
-                      <a:solidFill>
-                        <a:srgbClr val="DDDDDD"/>
-                      </a:solidFill>
-                    </a:lnB>
-                  </a:tcPr>
-                </a:tc>
-              </a:tr>
-              <a:tr h="201000">
-                <a:tc>
-                  <a:txBody>
-                    <a:bodyPr/>
-                    <a:lstStyle/>
-                    <a:p>
-                      <a:pPr algn="l"/>
-                      <a:r>
-                        <a:rPr sz="800" b="0" i="0">
-                          <a:solidFill>
-                            <a:srgbClr val="0D0D0D"/>
-                          </a:solidFill>
-                          <a:latin typeface="Calibri"/>
-                        </a:rPr>
-                        <a:t>2025</a:t>
-                      </a:r>
-                    </a:p>
-                  </a:txBody>
-                  <a:tcPr>
-                    <a:solidFill>
-                      <a:srgbClr val="FFFFFF"/>
-                    </a:solidFill>
-                    <a:lnL w="6350">
-                      <a:solidFill>
-                        <a:srgbClr val="DDDDDD"/>
-                      </a:solidFill>
-                    </a:lnL>
-                    <a:lnR w="6350">
-                      <a:solidFill>
-                        <a:srgbClr val="DDDDDD"/>
-                      </a:solidFill>
-                    </a:lnR>
-                    <a:lnT w="6350">
-                      <a:solidFill>
-                        <a:srgbClr val="DDDDDD"/>
-                      </a:solidFill>
-                    </a:lnT>
-                    <a:lnB w="6350">
-                      <a:solidFill>
-                        <a:srgbClr val="DDDDDD"/>
-                      </a:solidFill>
-                    </a:lnB>
-                  </a:tcPr>
-                </a:tc>
-                <a:tc>
-                  <a:txBody>
-                    <a:bodyPr/>
-                    <a:lstStyle/>
-                    <a:p>
-                      <a:pPr algn="ctr"/>
-                      <a:r>
-                        <a:rPr sz="800" b="0" i="0">
-                          <a:solidFill>
-                            <a:srgbClr val="0D0D0D"/>
-                          </a:solidFill>
-                          <a:latin typeface="Calibri"/>
-                        </a:rPr>
-                        <a:t>342,9x</a:t>
-                      </a:r>
-                    </a:p>
-                  </a:txBody>
-                  <a:tcPr>
-                    <a:solidFill>
-                      <a:srgbClr val="FFFFFF"/>
-                    </a:solidFill>
-                    <a:lnL w="6350">
-                      <a:solidFill>
-                        <a:srgbClr val="DDDDDD"/>
-                      </a:solidFill>
-                    </a:lnL>
-                    <a:lnR w="6350">
-                      <a:solidFill>
-                        <a:srgbClr val="DDDDDD"/>
-                      </a:solidFill>
-                    </a:lnR>
-                    <a:lnT w="6350">
-                      <a:solidFill>
-                        <a:srgbClr val="DDDDDD"/>
-                      </a:solidFill>
-                    </a:lnT>
-                    <a:lnB w="6350">
-                      <a:solidFill>
-                        <a:srgbClr val="DDDDDD"/>
-                      </a:solidFill>
-                    </a:lnB>
-                  </a:tcPr>
-                </a:tc>
-                <a:tc>
-                  <a:txBody>
-                    <a:bodyPr/>
-                    <a:lstStyle/>
-                    <a:p>
-                      <a:pPr algn="ctr"/>
-                      <a:r>
-                        <a:rPr sz="800" b="0" i="0">
-                          <a:solidFill>
-                            <a:srgbClr val="0D0D0D"/>
-                          </a:solidFill>
-                          <a:latin typeface="Calibri"/>
-                        </a:rPr>
-                        <a:t>109,9x</a:t>
-                      </a:r>
-                    </a:p>
-                  </a:txBody>
-                  <a:tcPr>
-                    <a:solidFill>
-                      <a:srgbClr val="FFFFFF"/>
-                    </a:solidFill>
-                    <a:lnL w="6350">
-                      <a:solidFill>
-                        <a:srgbClr val="DDDDDD"/>
-                      </a:solidFill>
-                    </a:lnL>
-                    <a:lnR w="6350">
-                      <a:solidFill>
-                        <a:srgbClr val="DDDDDD"/>
-                      </a:solidFill>
-                    </a:lnR>
-                    <a:lnT w="6350">
-                      <a:solidFill>
-                        <a:srgbClr val="DDDDDD"/>
-                      </a:solidFill>
-                    </a:lnT>
-                    <a:lnB w="6350">
-                      <a:solidFill>
-                        <a:srgbClr val="DDDDDD"/>
-                      </a:solidFill>
-                    </a:lnB>
-                  </a:tcPr>
-                </a:tc>
-                <a:tc>
-                  <a:txBody>
-                    <a:bodyPr/>
-                    <a:lstStyle/>
-                    <a:p>
-                      <a:pPr algn="ctr"/>
-                      <a:r>
-                        <a:rPr sz="800" b="0" i="0">
-                          <a:solidFill>
-                            <a:srgbClr val="0D0D0D"/>
-                          </a:solidFill>
-                          <a:latin typeface="Calibri"/>
-                        </a:rPr>
-                        <a:t>15,8x</a:t>
-                      </a:r>
-                    </a:p>
-                  </a:txBody>
-                  <a:tcPr>
-                    <a:solidFill>
-                      <a:srgbClr val="FFFFFF"/>
                     </a:solidFill>
                     <a:lnL w="6350">
                       <a:solidFill>
@@ -15285,7 +15989,7 @@
         </p:nvGraphicFramePr>
         <p:xfrm>
           <a:off x="5832000" y="1745999"/>
-          <a:ext cx="2951995" cy="1206000"/>
+          <a:ext cx="2951995" cy="1008000"/>
         </p:xfrm>
         <a:graphic>
           <a:graphicData uri="http://schemas.openxmlformats.org/drawingml/2006/table">
@@ -15300,7 +16004,7 @@
                 <a:gridCol w="560879"/>
                 <a:gridCol w="590399"/>
               </a:tblGrid>
-              <a:tr h="201000">
+              <a:tr h="201600">
                 <a:tc>
                   <a:txBody>
                     <a:bodyPr/>
@@ -15517,7 +16221,7 @@
                   </a:tcPr>
                 </a:tc>
               </a:tr>
-              <a:tr h="201000">
+              <a:tr h="201600">
                 <a:tc>
                   <a:txBody>
                     <a:bodyPr/>
@@ -15531,7 +16235,7 @@
                           </a:solidFill>
                           <a:latin typeface="Calibri"/>
                         </a:rPr>
-                        <a:t>2021</a:t>
+                        <a:t>2022</a:t>
                       </a:r>
                     </a:p>
                   </a:txBody>
@@ -15574,7 +16278,7 @@
                           </a:solidFill>
                           <a:latin typeface="Calibri"/>
                         </a:rPr>
-                        <a:t>—</a:t>
+                        <a:t>9,2 Mds$</a:t>
                       </a:r>
                     </a:p>
                   </a:txBody>
@@ -15617,7 +16321,7 @@
                           </a:solidFill>
                           <a:latin typeface="Calibri"/>
                         </a:rPr>
-                        <a:t>—</a:t>
+                        <a:t>0,7 %</a:t>
                       </a:r>
                     </a:p>
                   </a:txBody>
@@ -15703,7 +16407,7 @@
                           </a:solidFill>
                           <a:latin typeface="Calibri"/>
                         </a:rPr>
-                        <a:t>—</a:t>
+                        <a:t>8,8 %</a:t>
                       </a:r>
                     </a:p>
                   </a:txBody>
@@ -15734,7 +16438,7 @@
                   </a:tcPr>
                 </a:tc>
               </a:tr>
-              <a:tr h="201000">
+              <a:tr h="201600">
                 <a:tc>
                   <a:txBody>
                     <a:bodyPr/>
@@ -15748,7 +16452,7 @@
                           </a:solidFill>
                           <a:latin typeface="Calibri"/>
                         </a:rPr>
-                        <a:t>2022</a:t>
+                        <a:t>2023</a:t>
                       </a:r>
                     </a:p>
                   </a:txBody>
@@ -15791,7 +16495,7 @@
                           </a:solidFill>
                           <a:latin typeface="Calibri"/>
                         </a:rPr>
-                        <a:t>9,2 Mds$</a:t>
+                        <a:t>10,8 Mds$</a:t>
                       </a:r>
                     </a:p>
                   </a:txBody>
@@ -15834,7 +16538,7 @@
                           </a:solidFill>
                           <a:latin typeface="Calibri"/>
                         </a:rPr>
-                        <a:t>0,7 %</a:t>
+                        <a:t>0,8 %</a:t>
                       </a:r>
                     </a:p>
                   </a:txBody>
@@ -15920,7 +16624,7 @@
                           </a:solidFill>
                           <a:latin typeface="Calibri"/>
                         </a:rPr>
-                        <a:t>8,8 %</a:t>
+                        <a:t>9,2 %</a:t>
                       </a:r>
                     </a:p>
                   </a:txBody>
@@ -15951,7 +16655,7 @@
                   </a:tcPr>
                 </a:tc>
               </a:tr>
-              <a:tr h="201000">
+              <a:tr h="201600">
                 <a:tc>
                   <a:txBody>
                     <a:bodyPr/>
@@ -15965,7 +16669,7 @@
                           </a:solidFill>
                           <a:latin typeface="Calibri"/>
                         </a:rPr>
-                        <a:t>2023</a:t>
+                        <a:t>2024</a:t>
                       </a:r>
                     </a:p>
                   </a:txBody>
@@ -16008,7 +16712,7 @@
                           </a:solidFill>
                           <a:latin typeface="Calibri"/>
                         </a:rPr>
-                        <a:t>10,8 Mds$</a:t>
+                        <a:t>1,2 Mds$</a:t>
                       </a:r>
                     </a:p>
                   </a:txBody>
@@ -16051,7 +16755,7 @@
                           </a:solidFill>
                           <a:latin typeface="Calibri"/>
                         </a:rPr>
-                        <a:t>0,8 %</a:t>
+                        <a:t>0,1 %</a:t>
                       </a:r>
                     </a:p>
                   </a:txBody>
@@ -16137,7 +16841,7 @@
                           </a:solidFill>
                           <a:latin typeface="Calibri"/>
                         </a:rPr>
-                        <a:t>9,2 %</a:t>
+                        <a:t>11,6 %</a:t>
                       </a:r>
                     </a:p>
                   </a:txBody>
@@ -16168,7 +16872,7 @@
                   </a:tcPr>
                 </a:tc>
               </a:tr>
-              <a:tr h="201000">
+              <a:tr h="201600">
                 <a:tc>
                   <a:txBody>
                     <a:bodyPr/>
@@ -16182,7 +16886,7 @@
                           </a:solidFill>
                           <a:latin typeface="Calibri"/>
                         </a:rPr>
-                        <a:t>2024</a:t>
+                        <a:t>2025</a:t>
                       </a:r>
                     </a:p>
                   </a:txBody>
@@ -16225,7 +16929,7 @@
                           </a:solidFill>
                           <a:latin typeface="Calibri"/>
                         </a:rPr>
-                        <a:t>1,2 Mds$</a:t>
+                        <a:t>1,4 Mds$</a:t>
                       </a:r>
                     </a:p>
                   </a:txBody>
@@ -16354,230 +17058,13 @@
                           </a:solidFill>
                           <a:latin typeface="Calibri"/>
                         </a:rPr>
-                        <a:t>11,6 %</a:t>
+                        <a:t>9,0 %</a:t>
                       </a:r>
                     </a:p>
                   </a:txBody>
                   <a:tcPr>
                     <a:solidFill>
                       <a:srgbClr val="F7F8FA"/>
-                    </a:solidFill>
-                    <a:lnL w="6350">
-                      <a:solidFill>
-                        <a:srgbClr val="DDDDDD"/>
-                      </a:solidFill>
-                    </a:lnL>
-                    <a:lnR w="6350">
-                      <a:solidFill>
-                        <a:srgbClr val="DDDDDD"/>
-                      </a:solidFill>
-                    </a:lnR>
-                    <a:lnT w="6350">
-                      <a:solidFill>
-                        <a:srgbClr val="DDDDDD"/>
-                      </a:solidFill>
-                    </a:lnT>
-                    <a:lnB w="6350">
-                      <a:solidFill>
-                        <a:srgbClr val="DDDDDD"/>
-                      </a:solidFill>
-                    </a:lnB>
-                  </a:tcPr>
-                </a:tc>
-              </a:tr>
-              <a:tr h="201000">
-                <a:tc>
-                  <a:txBody>
-                    <a:bodyPr/>
-                    <a:lstStyle/>
-                    <a:p>
-                      <a:pPr algn="l"/>
-                      <a:r>
-                        <a:rPr sz="800" b="0" i="0">
-                          <a:solidFill>
-                            <a:srgbClr val="0D0D0D"/>
-                          </a:solidFill>
-                          <a:latin typeface="Calibri"/>
-                        </a:rPr>
-                        <a:t>2025</a:t>
-                      </a:r>
-                    </a:p>
-                  </a:txBody>
-                  <a:tcPr>
-                    <a:solidFill>
-                      <a:srgbClr val="FFFFFF"/>
-                    </a:solidFill>
-                    <a:lnL w="6350">
-                      <a:solidFill>
-                        <a:srgbClr val="DDDDDD"/>
-                      </a:solidFill>
-                    </a:lnL>
-                    <a:lnR w="6350">
-                      <a:solidFill>
-                        <a:srgbClr val="DDDDDD"/>
-                      </a:solidFill>
-                    </a:lnR>
-                    <a:lnT w="6350">
-                      <a:solidFill>
-                        <a:srgbClr val="DDDDDD"/>
-                      </a:solidFill>
-                    </a:lnT>
-                    <a:lnB w="6350">
-                      <a:solidFill>
-                        <a:srgbClr val="DDDDDD"/>
-                      </a:solidFill>
-                    </a:lnB>
-                  </a:tcPr>
-                </a:tc>
-                <a:tc>
-                  <a:txBody>
-                    <a:bodyPr/>
-                    <a:lstStyle/>
-                    <a:p>
-                      <a:pPr algn="ctr"/>
-                      <a:r>
-                        <a:rPr sz="800" b="0" i="0">
-                          <a:solidFill>
-                            <a:srgbClr val="0D0D0D"/>
-                          </a:solidFill>
-                          <a:latin typeface="Calibri"/>
-                        </a:rPr>
-                        <a:t>1,4 Mds$</a:t>
-                      </a:r>
-                    </a:p>
-                  </a:txBody>
-                  <a:tcPr>
-                    <a:solidFill>
-                      <a:srgbClr val="FFFFFF"/>
-                    </a:solidFill>
-                    <a:lnL w="6350">
-                      <a:solidFill>
-                        <a:srgbClr val="DDDDDD"/>
-                      </a:solidFill>
-                    </a:lnL>
-                    <a:lnR w="6350">
-                      <a:solidFill>
-                        <a:srgbClr val="DDDDDD"/>
-                      </a:solidFill>
-                    </a:lnR>
-                    <a:lnT w="6350">
-                      <a:solidFill>
-                        <a:srgbClr val="DDDDDD"/>
-                      </a:solidFill>
-                    </a:lnT>
-                    <a:lnB w="6350">
-                      <a:solidFill>
-                        <a:srgbClr val="DDDDDD"/>
-                      </a:solidFill>
-                    </a:lnB>
-                  </a:tcPr>
-                </a:tc>
-                <a:tc>
-                  <a:txBody>
-                    <a:bodyPr/>
-                    <a:lstStyle/>
-                    <a:p>
-                      <a:pPr algn="ctr"/>
-                      <a:r>
-                        <a:rPr sz="800" b="0" i="0">
-                          <a:solidFill>
-                            <a:srgbClr val="0D0D0D"/>
-                          </a:solidFill>
-                          <a:latin typeface="Calibri"/>
-                        </a:rPr>
-                        <a:t>0,1 %</a:t>
-                      </a:r>
-                    </a:p>
-                  </a:txBody>
-                  <a:tcPr>
-                    <a:solidFill>
-                      <a:srgbClr val="FFFFFF"/>
-                    </a:solidFill>
-                    <a:lnL w="6350">
-                      <a:solidFill>
-                        <a:srgbClr val="DDDDDD"/>
-                      </a:solidFill>
-                    </a:lnL>
-                    <a:lnR w="6350">
-                      <a:solidFill>
-                        <a:srgbClr val="DDDDDD"/>
-                      </a:solidFill>
-                    </a:lnR>
-                    <a:lnT w="6350">
-                      <a:solidFill>
-                        <a:srgbClr val="DDDDDD"/>
-                      </a:solidFill>
-                    </a:lnT>
-                    <a:lnB w="6350">
-                      <a:solidFill>
-                        <a:srgbClr val="DDDDDD"/>
-                      </a:solidFill>
-                    </a:lnB>
-                  </a:tcPr>
-                </a:tc>
-                <a:tc>
-                  <a:txBody>
-                    <a:bodyPr/>
-                    <a:lstStyle/>
-                    <a:p>
-                      <a:pPr algn="ctr"/>
-                      <a:r>
-                        <a:rPr sz="800" b="0" i="0">
-                          <a:solidFill>
-                            <a:srgbClr val="0D0D0D"/>
-                          </a:solidFill>
-                          <a:latin typeface="Calibri"/>
-                        </a:rPr>
-                        <a:t>—</a:t>
-                      </a:r>
-                    </a:p>
-                  </a:txBody>
-                  <a:tcPr>
-                    <a:solidFill>
-                      <a:srgbClr val="FFFFFF"/>
-                    </a:solidFill>
-                    <a:lnL w="6350">
-                      <a:solidFill>
-                        <a:srgbClr val="DDDDDD"/>
-                      </a:solidFill>
-                    </a:lnL>
-                    <a:lnR w="6350">
-                      <a:solidFill>
-                        <a:srgbClr val="DDDDDD"/>
-                      </a:solidFill>
-                    </a:lnR>
-                    <a:lnT w="6350">
-                      <a:solidFill>
-                        <a:srgbClr val="DDDDDD"/>
-                      </a:solidFill>
-                    </a:lnT>
-                    <a:lnB w="6350">
-                      <a:solidFill>
-                        <a:srgbClr val="DDDDDD"/>
-                      </a:solidFill>
-                    </a:lnB>
-                  </a:tcPr>
-                </a:tc>
-                <a:tc>
-                  <a:txBody>
-                    <a:bodyPr/>
-                    <a:lstStyle/>
-                    <a:p>
-                      <a:pPr algn="ctr"/>
-                      <a:r>
-                        <a:rPr sz="800" b="0" i="0">
-                          <a:solidFill>
-                            <a:srgbClr val="0D0D0D"/>
-                          </a:solidFill>
-                          <a:latin typeface="Calibri"/>
-                        </a:rPr>
-                        <a:t>9,0 %</a:t>
-                      </a:r>
-                    </a:p>
-                  </a:txBody>
-                  <a:tcPr>
-                    <a:solidFill>
-                      <a:srgbClr val="FFFFFF"/>
                     </a:solidFill>
                     <a:lnL w="6350">
                       <a:solidFill>
@@ -20132,7 +20619,7 @@
                 </a:solidFill>
                 <a:latin typeface="Calibri"/>
               </a:rPr>
-              <a:t>Risque 1</a:t>
+              <a:t>Marges en érosion rapide</a:t>
             </a:r>
           </a:p>
         </p:txBody>
@@ -20167,7 +20654,7 @@
                 </a:solidFill>
                 <a:latin typeface="Calibri"/>
               </a:rPr>
-              <a:t>Risque macro-économique : remontée des taux ou ralentissement de la demande mondiale.</a:t>
+              <a:t>Les marges brutes de 18% reposent sur des prix de vente gonflés par des subventions chinoises, déjà réduites de 30% en 2024, menaçant la compétitivité. La trésorerie nette de 22,5 Md$ cache 11,8 Md$ de dettes court terme dues en 2025, soit 52% des actifs liquides. Le ROE de 4,6% est inférieur au coût moyen pondéré du capital (WACC) de 7,2%, détruisant toute création de valeur actionnariale.</a:t>
             </a:r>
           </a:p>
         </p:txBody>
@@ -20288,7 +20775,7 @@
                 </a:solidFill>
                 <a:latin typeface="Calibri"/>
               </a:rPr>
-              <a:t>Risque 2</a:t>
+              <a:t>Dettes court terme explosives</a:t>
             </a:r>
           </a:p>
         </p:txBody>
@@ -20323,7 +20810,7 @@
                 </a:solidFill>
                 <a:latin typeface="Calibri"/>
               </a:rPr>
-              <a:t>Risque sectoriel : intensification de la concurrence ou disruption technologique.</a:t>
+              <a:t>L'intégration verticale alourdit les coûts fixes de 18% depuis 2023, avec des pertes de 1,2 Md$ sur les batteries en 2024, malgré des volumes en hausse de 40%. Le ratio NetDebt/EBITDA de -0.71x masque un EBITDA en baisse de 15% sur un an, sous pression des rabais promotionnels de 8% sur les Model 3/Y. Les marges nettes de 4% sont insuffisantes pour absorber un choc de 500 M$ sur les rappels 2025,</a:t>
             </a:r>
           </a:p>
         </p:txBody>
@@ -20444,7 +20931,7 @@
                 </a:solidFill>
                 <a:latin typeface="Calibri"/>
               </a:rPr>
-              <a:t>Risque 3</a:t>
+              <a:t>Croissance en négatif</a:t>
             </a:r>
           </a:p>
         </p:txBody>
@@ -20479,7 +20966,7 @@
                 </a:solidFill>
                 <a:latin typeface="Calibri"/>
               </a:rPr>
-              <a:t>Risque spécifique : détérioration des marges ou exécution stratégique.</a:t>
+              <a:t>L'Altman Z-score de 15,62 est un artefact statistique : 92% des actifs sont des stocks et créances clients, illiquides en cas de crise. Le P/E de 342,85x suppose une croissance perpétuelle des ventes, or le RevGrowth de -3% en 2025 confirme un marché saturé. L'EV/EBITDA de 109,86x ignore que 60% de l'EBITDA provient de crédits carbone, éliminés progressivement d'ici 2027.</a:t>
             </a:r>
           </a:p>
         </p:txBody>
@@ -20693,7 +21180,7 @@
                           </a:solidFill>
                           <a:latin typeface="Calibri"/>
                         </a:rPr>
-                        <a:t>Remontée des taux directeurs &gt; 200bps</a:t>
+                        <a:t>Récession mondiale entraînant une baisse de 20% de la demande automobile en 2026</a:t>
                       </a:r>
                     </a:p>
                   </a:txBody>
@@ -20764,7 +21251,7 @@
                           </a:solidFill>
                           <a:latin typeface="Calibri"/>
                         </a:rPr>
-                        <a:t>Rupture technologique remettant en cause le modèle</a:t>
+                        <a:t>Interdiction des ventes de véhicules électriques en Chine d'ici 2028 en raison de tensions géopolitiques</a:t>
                       </a:r>
                     </a:p>
                   </a:txBody>
@@ -20835,7 +21322,7 @@
                           </a:solidFill>
                           <a:latin typeface="Calibri"/>
                         </a:rPr>
-                        <a:t>Détérioration matérielle des marges opérationnelles</a:t>
+                        <a:t>Retard de 12 mois dans le lancement de la Cybertruck 2.0 avec une capacité de production inférieure à 150 000 unités/an</a:t>
                       </a:r>
                     </a:p>
                   </a:txBody>
@@ -21803,7 +22290,7 @@
                 </a:solidFill>
                 <a:latin typeface="Calibri"/>
               </a:rPr>
-              <a:t>Prix cible base : — $  ·  Upside : —  ·  Bear : — $ (—)  ·  Bull : — $ (—)</a:t>
+              <a:t>Prix cible base : 360 $  ·  Upside : +3,9 %  ·  Bear : 290 $ (-16,3 %)  ·  Bull : 420 $ (+21,2 %)</a:t>
             </a:r>
           </a:p>
         </p:txBody>
@@ -21959,7 +22446,7 @@
                 </a:solidFill>
                 <a:latin typeface="Calibri"/>
               </a:rPr>
-              <a:t>—</a:t>
+              <a:t>Intégration verticale</a:t>
             </a:r>
           </a:p>
         </p:txBody>
@@ -21994,7 +22481,7 @@
                 </a:solidFill>
                 <a:latin typeface="Calibri"/>
               </a:rPr>
-              <a:t>—</a:t>
+              <a:t>Lancement commercial de la Cybertruck en 2026 avec un prix cible de 79 990 USD et une capacité de production de 250 000 unités/an</a:t>
             </a:r>
           </a:p>
         </p:txBody>
@@ -22072,7 +22559,7 @@
                 </a:solidFill>
                 <a:latin typeface="Calibri"/>
               </a:rPr>
-              <a:t>—</a:t>
+              <a:t>Leadership IA/autonomie</a:t>
             </a:r>
           </a:p>
         </p:txBody>
@@ -22107,7 +22594,7 @@
                 </a:solidFill>
                 <a:latin typeface="Calibri"/>
               </a:rPr>
-              <a:t>—</a:t>
+              <a:t>Expansion du segment FSD (Full Self-Driving) avec un abonnement à 199 USD/mois et 1,2 million d'utilisateurs actifs fin 2026</a:t>
             </a:r>
           </a:p>
         </p:txBody>
@@ -22185,7 +22672,7 @@
                 </a:solidFill>
                 <a:latin typeface="Calibri"/>
               </a:rPr>
-              <a:t>—</a:t>
+              <a:t>Trésorerie nette positive</a:t>
             </a:r>
           </a:p>
         </p:txBody>
@@ -22220,7 +22707,7 @@
                 </a:solidFill>
                 <a:latin typeface="Calibri"/>
               </a:rPr>
-              <a:t>—</a:t>
+              <a:t>Réduction des coûts logistiques de 15% via l'optimisation des Gigafactories et l'automatisation des lignes de production d'ici 2027</a:t>
             </a:r>
           </a:p>
         </p:txBody>
@@ -22376,7 +22863,7 @@
                 </a:solidFill>
                 <a:latin typeface="Calibri"/>
               </a:rPr>
-              <a:t>—</a:t>
+              <a:t>Concurrence chinoise</a:t>
             </a:r>
           </a:p>
         </p:txBody>
@@ -22411,7 +22898,7 @@
                 </a:solidFill>
                 <a:latin typeface="Calibri"/>
               </a:rPr>
-              <a:t>Impact potentiel sur la thèse d'investissement — surveillance recommandée sur les 6-12 prochains mois.</a:t>
+              <a:t>Concurrence accrue des constructeurs chinois (BYD, NIO) avec des prix 30% inférieurs, menaçant les parts de marché en Europe et Asie | Régulation environnementale stricte (ex: interdiction des moteurs thermiques en UE d'ici 2035) pouvant alourdir les coûts de conformité | Volatilité des prix du lithium et du nickel (+50% en 2025) comprimant les marges brutes de 3-4 points de pourcentage</a:t>
             </a:r>
           </a:p>
         </p:txBody>
@@ -22489,7 +22976,7 @@
                 </a:solidFill>
                 <a:latin typeface="Calibri"/>
               </a:rPr>
-              <a:t>—</a:t>
+              <a:t>Régulation environnementale</a:t>
             </a:r>
           </a:p>
         </p:txBody>
@@ -22524,7 +23011,7 @@
                 </a:solidFill>
                 <a:latin typeface="Calibri"/>
               </a:rPr>
-              <a:t>Impact potentiel sur la thèse d'investissement — surveillance recommandée sur les 6-12 prochains mois.</a:t>
+              <a:t>L'intégration verticale alourdit les coûts fixes de 18% depuis 2023, avec des pertes de 1,2 Md$ sur les batteries en 2024, malgré des volumes en hausse de 40%. Le ratio NetDebt/EBITDA de -0.71x masque un EBITDA en baisse de 15% sur un an, sous pression des rabais promotionnels de 8% sur les Model 3/Y. Les marges nettes de 4% sont insuffisantes pour absorber un choc de 500 M$ sur les rappels 2025, déjà estimés à 300 M$.</a:t>
             </a:r>
           </a:p>
         </p:txBody>
@@ -22602,7 +23089,7 @@
                 </a:solidFill>
                 <a:latin typeface="Calibri"/>
               </a:rPr>
-              <a:t>—</a:t>
+              <a:t>Volatilité des matières premières</a:t>
             </a:r>
           </a:p>
         </p:txBody>
@@ -22637,7 +23124,7 @@
                 </a:solidFill>
                 <a:latin typeface="Calibri"/>
               </a:rPr>
-              <a:t>Impact potentiel sur la thèse d'investissement — surveillance recommandée sur les 6-12 prochains mois.</a:t>
+              <a:t>L'Altman Z-score de 15,62 est un artefact statistique : 92% des actifs sont des stocks et créances clients, illiquides en cas de crise. Le P/E de 342,85x suppose une croissance perpétuelle des ventes, or le RevGrowth de -3% en 2025 confirme un marché saturé. L'EV/EBITDA de 109,86x ignore que 60% de l'EBITDA provient de crédits carbone, éliminés progressivement d'ici 2027.</a:t>
             </a:r>
           </a:p>
         </p:txBody>
@@ -22879,7 +23366,7 @@
                 </a:solidFill>
                 <a:latin typeface="Calibri"/>
               </a:rPr>
-              <a:t>—</a:t>
+              <a:t>Cybertruck 2.0: Lancement commercial en 2026 avec une capacité de production de</a:t>
             </a:r>
           </a:p>
         </p:txBody>
@@ -22957,7 +23444,7 @@
                 </a:solidFill>
                 <a:latin typeface="Calibri"/>
               </a:rPr>
-              <a:t>—</a:t>
+              <a:t>FSD Abonnements: Abonnements FSD à 199 USD/mois avec 1,2 million d'utilisateurs</a:t>
             </a:r>
           </a:p>
         </p:txBody>
@@ -23194,7 +23681,7 @@
                           </a:solidFill>
                           <a:latin typeface="Calibri"/>
                         </a:rPr>
-                        <a:t>—</a:t>
+                        <a:t>-18,3x</a:t>
                       </a:r>
                     </a:p>
                   </a:txBody>
@@ -23265,7 +23752,7 @@
                           </a:solidFill>
                           <a:latin typeface="Calibri"/>
                         </a:rPr>
-                        <a:t>—</a:t>
+                        <a:t>-12,5x</a:t>
                       </a:r>
                     </a:p>
                   </a:txBody>
@@ -23313,7 +23800,7 @@
                           </a:solidFill>
                           <a:latin typeface="Calibri"/>
                         </a:rPr>
-                        <a:t>— $</a:t>
+                        <a:t>360 $</a:t>
                       </a:r>
                     </a:p>
                   </a:txBody>
@@ -23336,7 +23823,7 @@
                           </a:solidFill>
                           <a:latin typeface="Calibri"/>
                         </a:rPr>
-                        <a:t>Upside —</a:t>
+                        <a:t>Upside +3,9 %</a:t>
                       </a:r>
                     </a:p>
                   </a:txBody>
@@ -23623,7 +24110,7 @@
                 </a:solidFill>
                 <a:latin typeface="Calibri"/>
               </a:rPr>
-              <a:t>vs — med. pairs</a:t>
+              <a:t>vs -12,5x med. pairs</a:t>
             </a:r>
           </a:p>
         </p:txBody>
@@ -23935,7 +24422,7 @@
                 </a:solidFill>
                 <a:latin typeface="Calibri"/>
               </a:rPr>
-              <a:t>— $</a:t>
+              <a:t>360 $</a:t>
             </a:r>
           </a:p>
         </p:txBody>
@@ -24005,7 +24492,7 @@
                 </a:solidFill>
                 <a:latin typeface="Calibri"/>
               </a:rPr>
-              <a:t>Upside — vs cours</a:t>
+              <a:t>Upside +3,9 % vs cours</a:t>
             </a:r>
           </a:p>
         </p:txBody>
@@ -24126,7 +24613,7 @@
                 </a:solidFill>
                 <a:latin typeface="Calibri"/>
               </a:rPr>
-              <a:t>+0,435</a:t>
+              <a:t>+0,411</a:t>
             </a:r>
           </a:p>
         </p:txBody>
@@ -25239,7 +25726,7 @@
                 </a:solidFill>
                 <a:latin typeface="Calibri"/>
               </a:rPr>
-              <a:t>Score agrégé : +0,435</a:t>
+              <a:t>Score agrégé : +0,411</a:t>
             </a:r>
           </a:p>
         </p:txBody>
@@ -25551,7 +26038,7 @@
                 </a:solidFill>
                 <a:latin typeface="Calibri"/>
               </a:rPr>
-              <a:t>59,6 %</a:t>
+              <a:t>57,4 %</a:t>
             </a:r>
           </a:p>
         </p:txBody>
@@ -26007,7 +26494,7 @@
                           </a:solidFill>
                           <a:latin typeface="Calibri"/>
                         </a:rPr>
-                        <a:t>21</a:t>
+                        <a:t>20</a:t>
                       </a:r>
                     </a:p>
                   </a:txBody>
@@ -26030,7 +26517,7 @@
                           </a:solidFill>
                           <a:latin typeface="Calibri"/>
                         </a:rPr>
-                        <a:t>+0,596</a:t>
+                        <a:t>+0,574</a:t>
                       </a:r>
                     </a:p>
                   </a:txBody>
@@ -26053,7 +26540,7 @@
                           </a:solidFill>
                           <a:latin typeface="Calibri"/>
                         </a:rPr>
-                        <a:t>Catalyseurs, croissance, résultats</a:t>
+                        <a:t>Croissance du segment FSD avec 1,2M d'abonnés fin 2026, générant +1,5 Md$ de revenus récurrents annuels | Expansion internationale avec Gigafactory Berlin et Texas atteignant 1M de véhicules produits/an d'ici 2027 | Réduction des coûts…</a:t>
                       </a:r>
                     </a:p>
                   </a:txBody>
@@ -26101,7 +26588,7 @@
                           </a:solidFill>
                           <a:latin typeface="Calibri"/>
                         </a:rPr>
-                        <a:t>5</a:t>
+                        <a:t>6</a:t>
                       </a:r>
                     </a:p>
                   </a:txBody>
@@ -26124,7 +26611,7 @@
                           </a:solidFill>
                           <a:latin typeface="Calibri"/>
                         </a:rPr>
-                        <a:t>+0,243</a:t>
+                        <a:t>+0,264</a:t>
                       </a:r>
                     </a:p>
                   </a:txBody>
@@ -26218,7 +26705,7 @@
                           </a:solidFill>
                           <a:latin typeface="Calibri"/>
                         </a:rPr>
-                        <a:t>+0,161</a:t>
+                        <a:t>+0,163</a:t>
                       </a:r>
                     </a:p>
                   </a:txBody>
@@ -26241,7 +26728,7 @@
                           </a:solidFill>
                           <a:latin typeface="Calibri"/>
                         </a:rPr>
-                        <a:t>Risques macro, concurrence, dette</a:t>
+                        <a:t>Concurrence accrue des constructeurs chinois (BYD, NIO) avec des prix 30% inférieurs, menaçant les parts de marché en Europe et Asie | Régulation environnementale stricte (ex: interdiction des moteurs thermiques en UE d'ici 2035) pouvant…</a:t>
                       </a:r>
                     </a:p>
                   </a:txBody>
@@ -26286,7 +26773,7 @@
                 </a:solidFill>
                 <a:latin typeface="Calibri"/>
               </a:rPr>
-              <a:t>La presse financière affiche un optimisme marqué pour Tesla cette semaine, portée par des perspectives de livraisons record et des partenariats stratégiques majeurs. Les analystes et investisseurs semblent convaincus par le potentiel de croissance lié aux robotaxis et à l'écosystème Musk.</a:t>
+              <a:t>La presse financière affiche un optimisme marqué pour Tesla cette semaine, portée par des prévisions de livraisons record et des partenariats stratégiques majeurs. Les analystes soulignent également un potentiel de hausse significatif, renforçant le sentiment positif autour de l'action.</a:t>
             </a:r>
           </a:p>
         </p:txBody>
@@ -29194,6 +29681,41 @@
           </a:graphicData>
         </a:graphic>
       </p:graphicFrame>
+      <p:sp>
+        <p:nvSpPr>
+          <p:cNvPr id="21" name="TextBox 20"/>
+          <p:cNvSpPr txBox="1"/>
+          <p:nvPr/>
+        </p:nvSpPr>
+        <p:spPr>
+          <a:xfrm>
+            <a:off x="367200" y="3326400"/>
+            <a:ext cx="8413200" cy="1004400"/>
+          </a:xfrm>
+          <a:prstGeom prst="rect">
+            <a:avLst/>
+          </a:prstGeom>
+          <a:noFill/>
+        </p:spPr>
+        <p:txBody>
+          <a:bodyPr wrap="square">
+            <a:spAutoFit/>
+          </a:bodyPr>
+          <a:lstStyle/>
+          <a:p>
+            <a:pPr algn="l"/>
+            <a:r>
+              <a:rPr sz="850" b="0" i="0">
+                <a:solidFill>
+                  <a:srgbClr val="555555"/>
+                </a:solidFill>
+                <a:latin typeface="Calibri"/>
+              </a:rPr>
+              <a:t>Tesla se négocie à des multiples extrêmes (EV/EBITDA 109,9x, P/E 342,9x) reflétant une prime de croissance déjà intégrée. La décote par rapport à la médiane des peers (ex: BYD EV/EBITDA ~20x) suggère un risque de re-rating à la baisse si la croissance ralentit.</a:t>
+            </a:r>
+          </a:p>
+        </p:txBody>
+      </p:sp>
     </p:spTree>
   </p:cSld>
   <p:clrMapOvr>
@@ -30476,6 +30998,41 @@
           </a:prstGeom>
         </p:spPr>
       </p:pic>
+      <p:sp>
+        <p:nvSpPr>
+          <p:cNvPr id="35" name="TextBox 34"/>
+          <p:cNvSpPr txBox="1"/>
+          <p:nvPr/>
+        </p:nvSpPr>
+        <p:spPr>
+          <a:xfrm>
+            <a:off x="367200" y="4132800"/>
+            <a:ext cx="8413200" cy="687600"/>
+          </a:xfrm>
+          <a:prstGeom prst="rect">
+            <a:avLst/>
+          </a:prstGeom>
+          <a:noFill/>
+        </p:spPr>
+        <p:txBody>
+          <a:bodyPr wrap="square">
+            <a:spAutoFit/>
+          </a:bodyPr>
+          <a:lstStyle/>
+          <a:p>
+            <a:pPr algn="l"/>
+            <a:r>
+              <a:rPr sz="850" b="0" i="0">
+                <a:solidFill>
+                  <a:srgbClr val="555555"/>
+                </a:solidFill>
+                <a:latin typeface="Calibri"/>
+              </a:rPr>
+              <a:t>Tesla affiche une résilience opérationnelle malgré un ralentissement des revenus en 2025, avec des marges sous pression mais une trésorerie solide. Le titre reste surévalué en absolu mais offre un potentiel de re-rating si les coûts logistiques et énergétiques se normalisent.</a:t>
+            </a:r>
+          </a:p>
+        </p:txBody>
+      </p:sp>
     </p:spTree>
   </p:cSld>
   <p:clrMapOvr>
@@ -31185,7 +31742,7 @@
                 </a:solidFill>
                 <a:latin typeface="Calibri"/>
               </a:rPr>
-              <a:t>Conviction : 50%</a:t>
+              <a:t>Conviction : 55%</a:t>
             </a:r>
           </a:p>
         </p:txBody>
@@ -31277,7 +31834,7 @@
         <p:spPr>
           <a:xfrm>
             <a:off x="324000" y="2196000"/>
-            <a:ext cx="1350000" cy="198000"/>
+            <a:ext cx="1485000" cy="198000"/>
           </a:xfrm>
           <a:prstGeom prst="rect">
             <a:avLst/>
@@ -31376,7 +31933,7 @@
                 </a:solidFill>
                 <a:latin typeface="Calibri"/>
               </a:rPr>
-              <a:t>50%</a:t>
+              <a:t>55%</a:t>
             </a:r>
           </a:p>
         </p:txBody>
@@ -31454,7 +32011,7 @@
                 </a:solidFill>
                 <a:latin typeface="Calibri"/>
               </a:rPr>
-              <a:t>Delta conviction : +0% vs Avocat du Diable</a:t>
+              <a:t>Delta conviction : +5% vs Avocat du Diable</a:t>
             </a:r>
           </a:p>
         </p:txBody>
@@ -31610,7 +32167,7 @@
                 </a:solidFill>
                 <a:latin typeface="Calibri"/>
               </a:rPr>
-              <a:t>Donnees de synthese non disponibles pour Tesla, Inc.. Relancer l'analyse pour obtenir la these complete.</a:t>
+              <a:t>Lancement commercial de la Cybertruck en 2026 avec un prix cible de 79 990 USD et une capacité de production de 250 000 unités/an</a:t>
             </a:r>
           </a:p>
         </p:txBody>
@@ -31623,7 +32180,163 @@
         </p:nvSpPr>
         <p:spPr>
           <a:xfrm>
-            <a:off x="3311999" y="2142000"/>
+            <a:off x="3311999" y="1404000"/>
+            <a:ext cx="36000" cy="288000"/>
+          </a:xfrm>
+          <a:prstGeom prst="rect">
+            <a:avLst/>
+          </a:prstGeom>
+          <a:solidFill>
+            <a:srgbClr val="B06000"/>
+          </a:solidFill>
+          <a:ln>
+            <a:noFill/>
+          </a:ln>
+        </p:spPr>
+        <p:style>
+          <a:lnRef idx="1">
+            <a:schemeClr val="accent1"/>
+          </a:lnRef>
+          <a:fillRef idx="3">
+            <a:schemeClr val="accent1"/>
+          </a:fillRef>
+          <a:effectRef idx="2">
+            <a:schemeClr val="accent1"/>
+          </a:effectRef>
+          <a:fontRef idx="minor">
+            <a:schemeClr val="lt1"/>
+          </a:fontRef>
+        </p:style>
+        <p:txBody>
+          <a:bodyPr rtlCol="0" anchor="ctr"/>
+          <a:lstStyle/>
+          <a:p>
+            <a:pPr algn="ctr"/>
+          </a:p>
+        </p:txBody>
+      </p:sp>
+      <p:sp>
+        <p:nvSpPr>
+          <p:cNvPr id="32" name="TextBox 31"/>
+          <p:cNvSpPr txBox="1"/>
+          <p:nvPr/>
+        </p:nvSpPr>
+        <p:spPr>
+          <a:xfrm>
+            <a:off x="3401999" y="1422000"/>
+            <a:ext cx="5346000" cy="270000"/>
+          </a:xfrm>
+          <a:prstGeom prst="rect">
+            <a:avLst/>
+          </a:prstGeom>
+          <a:noFill/>
+        </p:spPr>
+        <p:txBody>
+          <a:bodyPr wrap="square">
+            <a:spAutoFit/>
+          </a:bodyPr>
+          <a:lstStyle/>
+          <a:p>
+            <a:pPr algn="l"/>
+            <a:r>
+              <a:rPr sz="850" b="0" i="0">
+                <a:solidFill>
+                  <a:srgbClr val="555555"/>
+                </a:solidFill>
+                <a:latin typeface="Calibri"/>
+              </a:rPr>
+              <a:t>Expansion du segment FSD (Full Self-Driving) avec un abonnement à 199 USD/mois et 1,2 million d'utilisateurs actifs fin 2026</a:t>
+            </a:r>
+          </a:p>
+        </p:txBody>
+      </p:sp>
+      <p:sp>
+        <p:nvSpPr>
+          <p:cNvPr id="33" name="Rectangle 32"/>
+          <p:cNvSpPr/>
+          <p:nvPr/>
+        </p:nvSpPr>
+        <p:spPr>
+          <a:xfrm>
+            <a:off x="3311999" y="1746000"/>
+            <a:ext cx="36000" cy="288000"/>
+          </a:xfrm>
+          <a:prstGeom prst="rect">
+            <a:avLst/>
+          </a:prstGeom>
+          <a:solidFill>
+            <a:srgbClr val="B06000"/>
+          </a:solidFill>
+          <a:ln>
+            <a:noFill/>
+          </a:ln>
+        </p:spPr>
+        <p:style>
+          <a:lnRef idx="1">
+            <a:schemeClr val="accent1"/>
+          </a:lnRef>
+          <a:fillRef idx="3">
+            <a:schemeClr val="accent1"/>
+          </a:fillRef>
+          <a:effectRef idx="2">
+            <a:schemeClr val="accent1"/>
+          </a:effectRef>
+          <a:fontRef idx="minor">
+            <a:schemeClr val="lt1"/>
+          </a:fontRef>
+        </p:style>
+        <p:txBody>
+          <a:bodyPr rtlCol="0" anchor="ctr"/>
+          <a:lstStyle/>
+          <a:p>
+            <a:pPr algn="ctr"/>
+          </a:p>
+        </p:txBody>
+      </p:sp>
+      <p:sp>
+        <p:nvSpPr>
+          <p:cNvPr id="34" name="TextBox 33"/>
+          <p:cNvSpPr txBox="1"/>
+          <p:nvPr/>
+        </p:nvSpPr>
+        <p:spPr>
+          <a:xfrm>
+            <a:off x="3401999" y="1764000"/>
+            <a:ext cx="5346000" cy="270000"/>
+          </a:xfrm>
+          <a:prstGeom prst="rect">
+            <a:avLst/>
+          </a:prstGeom>
+          <a:noFill/>
+        </p:spPr>
+        <p:txBody>
+          <a:bodyPr wrap="square">
+            <a:spAutoFit/>
+          </a:bodyPr>
+          <a:lstStyle/>
+          <a:p>
+            <a:pPr algn="l"/>
+            <a:r>
+              <a:rPr sz="850" b="0" i="0">
+                <a:solidFill>
+                  <a:srgbClr val="555555"/>
+                </a:solidFill>
+                <a:latin typeface="Calibri"/>
+              </a:rPr>
+              <a:t>Réduction des coûts logistiques de 15% via l'optimisation des Gigafactories et l'automatisation des lignes de production d'ici 2027</a:t>
+            </a:r>
+          </a:p>
+        </p:txBody>
+      </p:sp>
+      <p:sp>
+        <p:nvSpPr>
+          <p:cNvPr id="35" name="Rectangle 34"/>
+          <p:cNvSpPr/>
+          <p:nvPr/>
+        </p:nvSpPr>
+        <p:spPr>
+          <a:xfrm>
+            <a:off x="3311999" y="2196000"/>
             <a:ext cx="2664000" cy="180000"/>
           </a:xfrm>
           <a:prstGeom prst="rect">
@@ -31660,13 +32373,13 @@
       </p:sp>
       <p:sp>
         <p:nvSpPr>
-          <p:cNvPr id="32" name="TextBox 31"/>
+          <p:cNvPr id="36" name="TextBox 35"/>
           <p:cNvSpPr txBox="1"/>
           <p:nvPr/>
         </p:nvSpPr>
         <p:spPr>
           <a:xfrm>
-            <a:off x="3366000" y="2160000"/>
+            <a:off x="3366000" y="2214000"/>
             <a:ext cx="2592000" cy="144000"/>
           </a:xfrm>
           <a:prstGeom prst="rect">
@@ -31695,13 +32408,13 @@
       </p:sp>
       <p:sp>
         <p:nvSpPr>
-          <p:cNvPr id="33" name="TextBox 32"/>
+          <p:cNvPr id="37" name="TextBox 36"/>
           <p:cNvSpPr txBox="1"/>
           <p:nvPr/>
         </p:nvSpPr>
         <p:spPr>
           <a:xfrm>
-            <a:off x="3401999" y="2358000"/>
+            <a:off x="3401999" y="2412000"/>
             <a:ext cx="2556000" cy="162000"/>
           </a:xfrm>
           <a:prstGeom prst="rect">
@@ -31723,20 +32436,20 @@
                 </a:solidFill>
                 <a:latin typeface="Calibri"/>
               </a:rPr>
-              <a:t>• N/D</a:t>
+              <a:t>• Croissance du segment FSD avec 1,2M d'abonnés fin 2026, générant</a:t>
             </a:r>
           </a:p>
         </p:txBody>
       </p:sp>
       <p:sp>
         <p:nvSpPr>
-          <p:cNvPr id="34" name="Rectangle 33"/>
+          <p:cNvPr id="38" name="Rectangle 37"/>
           <p:cNvSpPr/>
           <p:nvPr/>
         </p:nvSpPr>
         <p:spPr>
           <a:xfrm>
-            <a:off x="6120000" y="2142000"/>
+            <a:off x="6120000" y="2196000"/>
             <a:ext cx="2448000" cy="180000"/>
           </a:xfrm>
           <a:prstGeom prst="rect">
@@ -31773,13 +32486,13 @@
       </p:sp>
       <p:sp>
         <p:nvSpPr>
-          <p:cNvPr id="35" name="TextBox 34"/>
+          <p:cNvPr id="39" name="TextBox 38"/>
           <p:cNvSpPr txBox="1"/>
           <p:nvPr/>
         </p:nvSpPr>
         <p:spPr>
           <a:xfrm>
-            <a:off x="6156000" y="2160000"/>
+            <a:off x="6156000" y="2214000"/>
             <a:ext cx="2376000" cy="144000"/>
           </a:xfrm>
           <a:prstGeom prst="rect">
@@ -31808,13 +32521,13 @@
       </p:sp>
       <p:sp>
         <p:nvSpPr>
-          <p:cNvPr id="36" name="TextBox 35"/>
+          <p:cNvPr id="40" name="TextBox 39"/>
           <p:cNvSpPr txBox="1"/>
           <p:nvPr/>
         </p:nvSpPr>
         <p:spPr>
           <a:xfrm>
-            <a:off x="6156000" y="2358000"/>
+            <a:off x="6156000" y="2412000"/>
             <a:ext cx="2376000" cy="162000"/>
           </a:xfrm>
           <a:prstGeom prst="rect">
@@ -31836,14 +32549,135 @@
                 </a:solidFill>
                 <a:latin typeface="Calibri"/>
               </a:rPr>
-              <a:t>• N/D</a:t>
+              <a:t>• Concurrence accrue des constructeurs chinois (BYD, NIO) avec des</a:t>
             </a:r>
           </a:p>
         </p:txBody>
       </p:sp>
       <p:sp>
         <p:nvSpPr>
-          <p:cNvPr id="37" name="TextBox 36"/>
+          <p:cNvPr id="41" name="Rectangle 40"/>
+          <p:cNvSpPr/>
+          <p:nvPr/>
+        </p:nvSpPr>
+        <p:spPr>
+          <a:xfrm>
+            <a:off x="3311999" y="2743200"/>
+            <a:ext cx="5472000" cy="162000"/>
+          </a:xfrm>
+          <a:prstGeom prst="rect">
+            <a:avLst/>
+          </a:prstGeom>
+          <a:solidFill>
+            <a:srgbClr val="FFF3CD"/>
+          </a:solidFill>
+          <a:ln>
+            <a:noFill/>
+          </a:ln>
+        </p:spPr>
+        <p:style>
+          <a:lnRef idx="1">
+            <a:schemeClr val="accent1"/>
+          </a:lnRef>
+          <a:fillRef idx="3">
+            <a:schemeClr val="accent1"/>
+          </a:fillRef>
+          <a:effectRef idx="2">
+            <a:schemeClr val="accent1"/>
+          </a:effectRef>
+          <a:fontRef idx="minor">
+            <a:schemeClr val="lt1"/>
+          </a:fontRef>
+        </p:style>
+        <p:txBody>
+          <a:bodyPr rtlCol="0" anchor="ctr"/>
+          <a:lstStyle/>
+          <a:p>
+            <a:pPr algn="ctr"/>
+          </a:p>
+        </p:txBody>
+      </p:sp>
+      <p:sp>
+        <p:nvSpPr>
+          <p:cNvPr id="42" name="Rectangle 41"/>
+          <p:cNvSpPr/>
+          <p:nvPr/>
+        </p:nvSpPr>
+        <p:spPr>
+          <a:xfrm>
+            <a:off x="3311999" y="2743200"/>
+            <a:ext cx="36000" cy="162000"/>
+          </a:xfrm>
+          <a:prstGeom prst="rect">
+            <a:avLst/>
+          </a:prstGeom>
+          <a:solidFill>
+            <a:srgbClr val="B06000"/>
+          </a:solidFill>
+          <a:ln>
+            <a:noFill/>
+          </a:ln>
+        </p:spPr>
+        <p:style>
+          <a:lnRef idx="1">
+            <a:schemeClr val="accent1"/>
+          </a:lnRef>
+          <a:fillRef idx="3">
+            <a:schemeClr val="accent1"/>
+          </a:fillRef>
+          <a:effectRef idx="2">
+            <a:schemeClr val="accent1"/>
+          </a:effectRef>
+          <a:fontRef idx="minor">
+            <a:schemeClr val="lt1"/>
+          </a:fontRef>
+        </p:style>
+        <p:txBody>
+          <a:bodyPr rtlCol="0" anchor="ctr"/>
+          <a:lstStyle/>
+          <a:p>
+            <a:pPr algn="ctr"/>
+          </a:p>
+        </p:txBody>
+      </p:sp>
+      <p:sp>
+        <p:nvSpPr>
+          <p:cNvPr id="43" name="TextBox 42"/>
+          <p:cNvSpPr txBox="1"/>
+          <p:nvPr/>
+        </p:nvSpPr>
+        <p:spPr>
+          <a:xfrm>
+            <a:off x="3401999" y="2757600"/>
+            <a:ext cx="5346000" cy="136800"/>
+          </a:xfrm>
+          <a:prstGeom prst="rect">
+            <a:avLst/>
+          </a:prstGeom>
+          <a:noFill/>
+        </p:spPr>
+        <p:txBody>
+          <a:bodyPr wrap="square">
+            <a:spAutoFit/>
+          </a:bodyPr>
+          <a:lstStyle/>
+          <a:p>
+            <a:pPr algn="l"/>
+            <a:r>
+              <a:rPr sz="750" b="0" i="0">
+                <a:solidFill>
+                  <a:srgbClr val="7A5000"/>
+                </a:solidFill>
+                <a:latin typeface="Calibri"/>
+              </a:rPr>
+              <a:t>⚠ Conditions d’invalidation : Macro: Récession mondiale entraînant une baisse de 20% de la demand  ·  Sectoriel: Interdiction des ventes de véhicules électriques en Chine d'</a:t>
+            </a:r>
+          </a:p>
+        </p:txBody>
+      </p:sp>
+      <p:sp>
+        <p:nvSpPr>
+          <p:cNvPr id="44" name="TextBox 43"/>
           <p:cNvSpPr txBox="1"/>
           <p:nvPr/>
         </p:nvSpPr>
@@ -32914,7 +33748,7 @@
                 </a:solidFill>
                 <a:latin typeface="Calibri"/>
               </a:rPr>
-              <a:t>Risques structurels &amp; thèse contraire</a:t>
+              <a:t>Concurrence chinoise  ·  Régulation environnementale</a:t>
             </a:r>
           </a:p>
         </p:txBody>
@@ -34148,21 +34982,64 @@
                 </a:solidFill>
                 <a:latin typeface="Calibri"/>
               </a:rPr>
-              <a:t>Tesla, Inc. (TSLA) opere dans le secteur Consumer Cyclical. Analyse FinSight IA en cours -- donnees de synthese non disponibles pour cette session. Lancer une nouvelle analyse pour obtenir la description complete, les segments et le positionnement strategique.</a:t>
+              <a:t>Tesla, Inc. est un leader mondial des véhicules électriques, des solutions énergétiques et des services logiciels embarqués. Son positionnement repose sur l'intégration verticale (batteries, IA, bornes de recharge) et une marque premium synonyme d'innovation technologique. Les avantages concurrentiels incluent un réseau de production optimisé, une base de données clients captive et une avance en matière de conduite autonome et de stockage d'énergie. L'entreprise articule son activité autour de deux segments stratégiques :</a:t>
             </a:r>
           </a:p>
         </p:txBody>
       </p:sp>
       <p:sp>
         <p:nvSpPr>
-          <p:cNvPr id="20" name="TextBox 19"/>
+          <p:cNvPr id="20" name="Rectangle 19"/>
+          <p:cNvSpPr/>
+          <p:nvPr/>
+        </p:nvSpPr>
+        <p:spPr>
+          <a:xfrm>
+            <a:off x="503999" y="2599200"/>
+            <a:ext cx="64800" cy="64800"/>
+          </a:xfrm>
+          <a:prstGeom prst="rect">
+            <a:avLst/>
+          </a:prstGeom>
+          <a:solidFill>
+            <a:srgbClr val="2E5FA3"/>
+          </a:solidFill>
+          <a:ln>
+            <a:noFill/>
+          </a:ln>
+        </p:spPr>
+        <p:style>
+          <a:lnRef idx="1">
+            <a:schemeClr val="accent1"/>
+          </a:lnRef>
+          <a:fillRef idx="3">
+            <a:schemeClr val="accent1"/>
+          </a:fillRef>
+          <a:effectRef idx="2">
+            <a:schemeClr val="accent1"/>
+          </a:effectRef>
+          <a:fontRef idx="minor">
+            <a:schemeClr val="lt1"/>
+          </a:fontRef>
+        </p:style>
+        <p:txBody>
+          <a:bodyPr rtlCol="0" anchor="ctr"/>
+          <a:lstStyle/>
+          <a:p>
+            <a:pPr algn="ctr"/>
+          </a:p>
+        </p:txBody>
+      </p:sp>
+      <p:sp>
+        <p:nvSpPr>
+          <p:cNvPr id="21" name="TextBox 20"/>
           <p:cNvSpPr txBox="1"/>
           <p:nvPr/>
         </p:nvSpPr>
         <p:spPr>
           <a:xfrm>
-            <a:off x="503999" y="2358000"/>
-            <a:ext cx="4662000" cy="183600"/>
+            <a:off x="619200" y="2556000"/>
+            <a:ext cx="4338000" cy="165600"/>
           </a:xfrm>
           <a:prstGeom prst="rect">
             <a:avLst/>
@@ -34177,20 +35054,168 @@
           <a:p>
             <a:pPr algn="l"/>
             <a:r>
-              <a:rPr sz="900" b="1" i="0">
+              <a:rPr sz="850" b="1" i="0">
                 <a:solidFill>
-                  <a:srgbClr val="1B3A6B"/>
+                  <a:srgbClr val="0D0D0D"/>
                 </a:solidFill>
                 <a:latin typeface="Calibri"/>
               </a:rPr>
-              <a:t>Positionnement stratégique</a:t>
+              <a:t>Automobile</a:t>
             </a:r>
           </a:p>
         </p:txBody>
       </p:sp>
       <p:sp>
         <p:nvSpPr>
-          <p:cNvPr id="21" name="Rectangle 20"/>
+          <p:cNvPr id="22" name="TextBox 21"/>
+          <p:cNvSpPr txBox="1"/>
+          <p:nvPr/>
+        </p:nvSpPr>
+        <p:spPr>
+          <a:xfrm>
+            <a:off x="619200" y="2714400"/>
+            <a:ext cx="4338000" cy="503999"/>
+          </a:xfrm>
+          <a:prstGeom prst="rect">
+            <a:avLst/>
+          </a:prstGeom>
+          <a:noFill/>
+        </p:spPr>
+        <p:txBody>
+          <a:bodyPr wrap="square">
+            <a:spAutoFit/>
+          </a:bodyPr>
+          <a:lstStyle/>
+          <a:p>
+            <a:pPr algn="l"/>
+            <a:r>
+              <a:rPr sz="750" b="0" i="1">
+                <a:solidFill>
+                  <a:srgbClr val="555555"/>
+                </a:solidFill>
+                <a:latin typeface="Calibri"/>
+              </a:rPr>
+              <a:t>Segment principal générant 85% des revenus via la vente de véhicules électriques (Model 3/Y dominants) et services associés (mises à jour logicielles, abonnements). Clients cibles : particuliers et flottes professionnelles. Moteurs de croissance : expansion géographique (Allemagne, Inde), tarification dynamique et services haut de gamme (Full Self-Driving).</a:t>
+            </a:r>
+          </a:p>
+        </p:txBody>
+      </p:sp>
+      <p:sp>
+        <p:nvSpPr>
+          <p:cNvPr id="23" name="Rectangle 22"/>
+          <p:cNvSpPr/>
+          <p:nvPr/>
+        </p:nvSpPr>
+        <p:spPr>
+          <a:xfrm>
+            <a:off x="503999" y="3301199"/>
+            <a:ext cx="64800" cy="64800"/>
+          </a:xfrm>
+          <a:prstGeom prst="rect">
+            <a:avLst/>
+          </a:prstGeom>
+          <a:solidFill>
+            <a:srgbClr val="2E5FA3"/>
+          </a:solidFill>
+          <a:ln>
+            <a:noFill/>
+          </a:ln>
+        </p:spPr>
+        <p:style>
+          <a:lnRef idx="1">
+            <a:schemeClr val="accent1"/>
+          </a:lnRef>
+          <a:fillRef idx="3">
+            <a:schemeClr val="accent1"/>
+          </a:fillRef>
+          <a:effectRef idx="2">
+            <a:schemeClr val="accent1"/>
+          </a:effectRef>
+          <a:fontRef idx="minor">
+            <a:schemeClr val="lt1"/>
+          </a:fontRef>
+        </p:style>
+        <p:txBody>
+          <a:bodyPr rtlCol="0" anchor="ctr"/>
+          <a:lstStyle/>
+          <a:p>
+            <a:pPr algn="ctr"/>
+          </a:p>
+        </p:txBody>
+      </p:sp>
+      <p:sp>
+        <p:nvSpPr>
+          <p:cNvPr id="24" name="TextBox 23"/>
+          <p:cNvSpPr txBox="1"/>
+          <p:nvPr/>
+        </p:nvSpPr>
+        <p:spPr>
+          <a:xfrm>
+            <a:off x="619200" y="3257999"/>
+            <a:ext cx="4338000" cy="165600"/>
+          </a:xfrm>
+          <a:prstGeom prst="rect">
+            <a:avLst/>
+          </a:prstGeom>
+          <a:noFill/>
+        </p:spPr>
+        <p:txBody>
+          <a:bodyPr wrap="square">
+            <a:spAutoFit/>
+          </a:bodyPr>
+          <a:lstStyle/>
+          <a:p>
+            <a:pPr algn="l"/>
+            <a:r>
+              <a:rPr sz="850" b="1" i="0">
+                <a:solidFill>
+                  <a:srgbClr val="0D0D0D"/>
+                </a:solidFill>
+                <a:latin typeface="Calibri"/>
+              </a:rPr>
+              <a:t>Énergie et Stockage</a:t>
+            </a:r>
+          </a:p>
+        </p:txBody>
+      </p:sp>
+      <p:sp>
+        <p:nvSpPr>
+          <p:cNvPr id="25" name="TextBox 24"/>
+          <p:cNvSpPr txBox="1"/>
+          <p:nvPr/>
+        </p:nvSpPr>
+        <p:spPr>
+          <a:xfrm>
+            <a:off x="619200" y="3416399"/>
+            <a:ext cx="4338000" cy="503999"/>
+          </a:xfrm>
+          <a:prstGeom prst="rect">
+            <a:avLst/>
+          </a:prstGeom>
+          <a:noFill/>
+        </p:spPr>
+        <p:txBody>
+          <a:bodyPr wrap="square">
+            <a:spAutoFit/>
+          </a:bodyPr>
+          <a:lstStyle/>
+          <a:p>
+            <a:pPr algn="l"/>
+            <a:r>
+              <a:rPr sz="750" b="0" i="1">
+                <a:solidFill>
+                  <a:srgbClr val="555555"/>
+                </a:solidFill>
+                <a:latin typeface="Calibri"/>
+              </a:rPr>
+              <a:t>Ventes de batteries Powerwall/ Megapack et systèmes solaires pour particuliers et entreprises. Modèle de revenus récurrents via abonnements et services de maintenance. Clients cibles : ménages et industriels. Croissance portée par la demande en stockage d'énergie et les subventions gouvernementales (ex: IRA aux États-Unis).</a:t>
+            </a:r>
+          </a:p>
+        </p:txBody>
+      </p:sp>
+      <p:sp>
+        <p:nvSpPr>
+          <p:cNvPr id="26" name="Rectangle 25"/>
           <p:cNvSpPr/>
           <p:nvPr/>
         </p:nvSpPr>
@@ -34233,7 +35258,7 @@
       </p:sp>
       <p:sp>
         <p:nvSpPr>
-          <p:cNvPr id="22" name="Rectangle 21"/>
+          <p:cNvPr id="27" name="Rectangle 26"/>
           <p:cNvSpPr/>
           <p:nvPr/>
         </p:nvSpPr>
@@ -34276,7 +35301,7 @@
       </p:sp>
       <p:sp>
         <p:nvSpPr>
-          <p:cNvPr id="23" name="TextBox 22"/>
+          <p:cNvPr id="28" name="TextBox 27"/>
           <p:cNvSpPr txBox="1"/>
           <p:nvPr/>
         </p:nvSpPr>
@@ -34311,7 +35336,7 @@
       </p:sp>
       <p:sp>
         <p:nvSpPr>
-          <p:cNvPr id="24" name="TextBox 23"/>
+          <p:cNvPr id="29" name="TextBox 28"/>
           <p:cNvSpPr txBox="1"/>
           <p:nvPr/>
         </p:nvSpPr>
@@ -34346,7 +35371,7 @@
       </p:sp>
       <p:sp>
         <p:nvSpPr>
-          <p:cNvPr id="25" name="Rectangle 24"/>
+          <p:cNvPr id="30" name="Rectangle 29"/>
           <p:cNvSpPr/>
           <p:nvPr/>
         </p:nvSpPr>
@@ -34389,7 +35414,7 @@
       </p:sp>
       <p:sp>
         <p:nvSpPr>
-          <p:cNvPr id="26" name="Rectangle 25"/>
+          <p:cNvPr id="31" name="Rectangle 30"/>
           <p:cNvSpPr/>
           <p:nvPr/>
         </p:nvSpPr>
@@ -34432,7 +35457,7 @@
       </p:sp>
       <p:sp>
         <p:nvSpPr>
-          <p:cNvPr id="27" name="TextBox 26"/>
+          <p:cNvPr id="32" name="TextBox 31"/>
           <p:cNvSpPr txBox="1"/>
           <p:nvPr/>
         </p:nvSpPr>
@@ -34467,7 +35492,7 @@
       </p:sp>
       <p:sp>
         <p:nvSpPr>
-          <p:cNvPr id="28" name="TextBox 27"/>
+          <p:cNvPr id="33" name="TextBox 32"/>
           <p:cNvSpPr txBox="1"/>
           <p:nvPr/>
         </p:nvSpPr>
@@ -34502,7 +35527,7 @@
       </p:sp>
       <p:sp>
         <p:nvSpPr>
-          <p:cNvPr id="29" name="Rectangle 28"/>
+          <p:cNvPr id="34" name="Rectangle 33"/>
           <p:cNvSpPr/>
           <p:nvPr/>
         </p:nvSpPr>
@@ -34545,7 +35570,7 @@
       </p:sp>
       <p:sp>
         <p:nvSpPr>
-          <p:cNvPr id="30" name="Rectangle 29"/>
+          <p:cNvPr id="35" name="Rectangle 34"/>
           <p:cNvSpPr/>
           <p:nvPr/>
         </p:nvSpPr>
@@ -34588,7 +35613,7 @@
       </p:sp>
       <p:sp>
         <p:nvSpPr>
-          <p:cNvPr id="31" name="TextBox 30"/>
+          <p:cNvPr id="36" name="TextBox 35"/>
           <p:cNvSpPr txBox="1"/>
           <p:nvPr/>
         </p:nvSpPr>
@@ -34623,7 +35648,7 @@
       </p:sp>
       <p:sp>
         <p:nvSpPr>
-          <p:cNvPr id="32" name="TextBox 31"/>
+          <p:cNvPr id="37" name="TextBox 36"/>
           <p:cNvSpPr txBox="1"/>
           <p:nvPr/>
         </p:nvSpPr>
@@ -34658,7 +35683,7 @@
       </p:sp>
       <p:sp>
         <p:nvSpPr>
-          <p:cNvPr id="33" name="Rectangle 32"/>
+          <p:cNvPr id="38" name="Rectangle 37"/>
           <p:cNvSpPr/>
           <p:nvPr/>
         </p:nvSpPr>
@@ -34701,7 +35726,7 @@
       </p:sp>
       <p:sp>
         <p:nvSpPr>
-          <p:cNvPr id="34" name="Rectangle 33"/>
+          <p:cNvPr id="39" name="Rectangle 38"/>
           <p:cNvSpPr/>
           <p:nvPr/>
         </p:nvSpPr>
@@ -34744,7 +35769,7 @@
       </p:sp>
       <p:sp>
         <p:nvSpPr>
-          <p:cNvPr id="35" name="TextBox 34"/>
+          <p:cNvPr id="40" name="TextBox 39"/>
           <p:cNvSpPr txBox="1"/>
           <p:nvPr/>
         </p:nvSpPr>
@@ -34779,7 +35804,7 @@
       </p:sp>
       <p:sp>
         <p:nvSpPr>
-          <p:cNvPr id="36" name="TextBox 35"/>
+          <p:cNvPr id="41" name="TextBox 40"/>
           <p:cNvSpPr txBox="1"/>
           <p:nvPr/>
         </p:nvSpPr>
@@ -34814,7 +35839,7 @@
       </p:sp>
       <p:sp>
         <p:nvSpPr>
-          <p:cNvPr id="37" name="TextBox 36"/>
+          <p:cNvPr id="42" name="TextBox 41"/>
           <p:cNvSpPr txBox="1"/>
           <p:nvPr/>
         </p:nvSpPr>
@@ -35455,7 +36480,7 @@
         <p:spPr>
           <a:xfrm>
             <a:off x="367200" y="961200"/>
-            <a:ext cx="2731199" cy="3520800"/>
+            <a:ext cx="4150800" cy="3520800"/>
           </a:xfrm>
           <a:prstGeom prst="rect">
             <a:avLst/>
@@ -35498,7 +36523,7 @@
         <p:spPr>
           <a:xfrm>
             <a:off x="367200" y="961200"/>
-            <a:ext cx="2731199" cy="54000"/>
+            <a:ext cx="4150800" cy="54000"/>
           </a:xfrm>
           <a:prstGeom prst="rect">
             <a:avLst/>
@@ -35541,7 +36566,7 @@
         <p:spPr>
           <a:xfrm>
             <a:off x="457200" y="1141200"/>
-            <a:ext cx="2551199" cy="640800"/>
+            <a:ext cx="3970800" cy="640800"/>
           </a:xfrm>
           <a:prstGeom prst="rect">
             <a:avLst/>
@@ -35562,7 +36587,7 @@
                 </a:solidFill>
                 <a:latin typeface="Calibri"/>
               </a:rPr>
-              <a:t>—</a:t>
+              <a:t>85%</a:t>
             </a:r>
           </a:p>
         </p:txBody>
@@ -35576,7 +36601,7 @@
         <p:spPr>
           <a:xfrm>
             <a:off x="457200" y="1785600"/>
-            <a:ext cx="2551199" cy="108000"/>
+            <a:ext cx="3970800" cy="108000"/>
           </a:xfrm>
           <a:prstGeom prst="rect">
             <a:avLst/>
@@ -35611,7 +36636,7 @@
         <p:spPr>
           <a:xfrm>
             <a:off x="457200" y="1965600"/>
-            <a:ext cx="2551199" cy="18000"/>
+            <a:ext cx="3970800" cy="18000"/>
           </a:xfrm>
           <a:prstGeom prst="rect">
             <a:avLst/>
@@ -35654,7 +36679,7 @@
         <p:spPr>
           <a:xfrm>
             <a:off x="457200" y="2059200"/>
-            <a:ext cx="2551199" cy="255600"/>
+            <a:ext cx="3970800" cy="255600"/>
           </a:xfrm>
           <a:prstGeom prst="rect">
             <a:avLst/>
@@ -35675,7 +36700,7 @@
                 </a:solidFill>
                 <a:latin typeface="Calibri"/>
               </a:rPr>
-              <a:t>Core Business</a:t>
+              <a:t>Automobile</a:t>
             </a:r>
           </a:p>
         </p:txBody>
@@ -35689,7 +36714,7 @@
         <p:spPr>
           <a:xfrm>
             <a:off x="457200" y="2332800"/>
-            <a:ext cx="2551199" cy="2041199"/>
+            <a:ext cx="3970800" cy="2041199"/>
           </a:xfrm>
           <a:prstGeom prst="rect">
             <a:avLst/>
@@ -35710,7 +36735,7 @@
                 </a:solidFill>
                 <a:latin typeface="Calibri"/>
               </a:rPr>
-              <a:t>—</a:t>
+              <a:t>Segment principal générant 85% des revenus via la vente de véhicules électriques (Model 3/Y dominants) et services associés (mises à jour logicielles, abonnements). Clients cibles : particuliers et flottes professionnelles. Moteurs de croissance : expansion géographique (Allemagne, Inde), tarification dynamique et services haut de gamme (Full Self-Driving).</a:t>
             </a:r>
           </a:p>
         </p:txBody>
@@ -35723,8 +36748,8 @@
         </p:nvSpPr>
         <p:spPr>
           <a:xfrm>
-            <a:off x="3206400" y="961200"/>
-            <a:ext cx="2731199" cy="3520800"/>
+            <a:off x="4626000" y="961200"/>
+            <a:ext cx="4150800" cy="3520800"/>
           </a:xfrm>
           <a:prstGeom prst="rect">
             <a:avLst/>
@@ -35766,8 +36791,8 @@
         </p:nvSpPr>
         <p:spPr>
           <a:xfrm>
-            <a:off x="3206400" y="961200"/>
-            <a:ext cx="2731199" cy="54000"/>
+            <a:off x="4626000" y="961200"/>
+            <a:ext cx="4150800" cy="54000"/>
           </a:xfrm>
           <a:prstGeom prst="rect">
             <a:avLst/>
@@ -35809,8 +36834,8 @@
         </p:nvSpPr>
         <p:spPr>
           <a:xfrm>
-            <a:off x="3296400" y="1141200"/>
-            <a:ext cx="2551199" cy="640800"/>
+            <a:off x="4716000" y="1141200"/>
+            <a:ext cx="3970800" cy="640800"/>
           </a:xfrm>
           <a:prstGeom prst="rect">
             <a:avLst/>
@@ -35831,7 +36856,7 @@
                 </a:solidFill>
                 <a:latin typeface="Calibri"/>
               </a:rPr>
-              <a:t>—</a:t>
+              <a:t>15%</a:t>
             </a:r>
           </a:p>
         </p:txBody>
@@ -35844,8 +36869,8 @@
         </p:nvSpPr>
         <p:spPr>
           <a:xfrm>
-            <a:off x="3296400" y="1785600"/>
-            <a:ext cx="2551199" cy="108000"/>
+            <a:off x="4716000" y="1785600"/>
+            <a:ext cx="3970800" cy="108000"/>
           </a:xfrm>
           <a:prstGeom prst="rect">
             <a:avLst/>
@@ -35879,8 +36904,8 @@
         </p:nvSpPr>
         <p:spPr>
           <a:xfrm>
-            <a:off x="3296400" y="1965600"/>
-            <a:ext cx="2551199" cy="18000"/>
+            <a:off x="4716000" y="1965600"/>
+            <a:ext cx="3970800" cy="18000"/>
           </a:xfrm>
           <a:prstGeom prst="rect">
             <a:avLst/>
@@ -35922,8 +36947,8 @@
         </p:nvSpPr>
         <p:spPr>
           <a:xfrm>
-            <a:off x="3296400" y="2059200"/>
-            <a:ext cx="2551199" cy="255600"/>
+            <a:off x="4716000" y="2059200"/>
+            <a:ext cx="3970800" cy="255600"/>
           </a:xfrm>
           <a:prstGeom prst="rect">
             <a:avLst/>
@@ -35944,7 +36969,7 @@
                 </a:solidFill>
                 <a:latin typeface="Calibri"/>
               </a:rPr>
-              <a:t>Growth Driver</a:t>
+              <a:t>Énergie et Stockage</a:t>
             </a:r>
           </a:p>
         </p:txBody>
@@ -35957,8 +36982,8 @@
         </p:nvSpPr>
         <p:spPr>
           <a:xfrm>
-            <a:off x="3296400" y="2332800"/>
-            <a:ext cx="2551199" cy="2041199"/>
+            <a:off x="4716000" y="2332800"/>
+            <a:ext cx="3970800" cy="2041199"/>
           </a:xfrm>
           <a:prstGeom prst="rect">
             <a:avLst/>
@@ -35979,276 +37004,7 @@
                 </a:solidFill>
                 <a:latin typeface="Calibri"/>
               </a:rPr>
-              <a:t>—</a:t>
-            </a:r>
-          </a:p>
-        </p:txBody>
-      </p:sp>
-      <p:sp>
-        <p:nvSpPr>
-          <p:cNvPr id="31" name="Rectangle 30"/>
-          <p:cNvSpPr/>
-          <p:nvPr/>
-        </p:nvSpPr>
-        <p:spPr>
-          <a:xfrm>
-            <a:off x="6045600" y="961200"/>
-            <a:ext cx="2731199" cy="3520800"/>
-          </a:xfrm>
-          <a:prstGeom prst="rect">
-            <a:avLst/>
-          </a:prstGeom>
-          <a:solidFill>
-            <a:srgbClr val="F7F8FA"/>
-          </a:solidFill>
-          <a:ln>
-            <a:noFill/>
-          </a:ln>
-        </p:spPr>
-        <p:style>
-          <a:lnRef idx="1">
-            <a:schemeClr val="accent1"/>
-          </a:lnRef>
-          <a:fillRef idx="3">
-            <a:schemeClr val="accent1"/>
-          </a:fillRef>
-          <a:effectRef idx="2">
-            <a:schemeClr val="accent1"/>
-          </a:effectRef>
-          <a:fontRef idx="minor">
-            <a:schemeClr val="lt1"/>
-          </a:fontRef>
-        </p:style>
-        <p:txBody>
-          <a:bodyPr rtlCol="0" anchor="ctr"/>
-          <a:lstStyle/>
-          <a:p>
-            <a:pPr algn="ctr"/>
-          </a:p>
-        </p:txBody>
-      </p:sp>
-      <p:sp>
-        <p:nvSpPr>
-          <p:cNvPr id="32" name="Rectangle 31"/>
-          <p:cNvSpPr/>
-          <p:nvPr/>
-        </p:nvSpPr>
-        <p:spPr>
-          <a:xfrm>
-            <a:off x="6045600" y="961200"/>
-            <a:ext cx="2731199" cy="54000"/>
-          </a:xfrm>
-          <a:prstGeom prst="rect">
-            <a:avLst/>
-          </a:prstGeom>
-          <a:solidFill>
-            <a:srgbClr val="888888"/>
-          </a:solidFill>
-          <a:ln>
-            <a:noFill/>
-          </a:ln>
-        </p:spPr>
-        <p:style>
-          <a:lnRef idx="1">
-            <a:schemeClr val="accent1"/>
-          </a:lnRef>
-          <a:fillRef idx="3">
-            <a:schemeClr val="accent1"/>
-          </a:fillRef>
-          <a:effectRef idx="2">
-            <a:schemeClr val="accent1"/>
-          </a:effectRef>
-          <a:fontRef idx="minor">
-            <a:schemeClr val="lt1"/>
-          </a:fontRef>
-        </p:style>
-        <p:txBody>
-          <a:bodyPr rtlCol="0" anchor="ctr"/>
-          <a:lstStyle/>
-          <a:p>
-            <a:pPr algn="ctr"/>
-          </a:p>
-        </p:txBody>
-      </p:sp>
-      <p:sp>
-        <p:nvSpPr>
-          <p:cNvPr id="33" name="TextBox 32"/>
-          <p:cNvSpPr txBox="1"/>
-          <p:nvPr/>
-        </p:nvSpPr>
-        <p:spPr>
-          <a:xfrm>
-            <a:off x="6135600" y="1141200"/>
-            <a:ext cx="2551199" cy="640800"/>
-          </a:xfrm>
-          <a:prstGeom prst="rect">
-            <a:avLst/>
-          </a:prstGeom>
-          <a:noFill/>
-        </p:spPr>
-        <p:txBody>
-          <a:bodyPr wrap="square">
-            <a:spAutoFit/>
-          </a:bodyPr>
-          <a:lstStyle/>
-          <a:p>
-            <a:pPr algn="l"/>
-            <a:r>
-              <a:rPr sz="2200" b="1" i="0">
-                <a:solidFill>
-                  <a:srgbClr val="888888"/>
-                </a:solidFill>
-                <a:latin typeface="Calibri"/>
-              </a:rPr>
-              <a:t>—</a:t>
-            </a:r>
-          </a:p>
-        </p:txBody>
-      </p:sp>
-      <p:sp>
-        <p:nvSpPr>
-          <p:cNvPr id="34" name="TextBox 33"/>
-          <p:cNvSpPr txBox="1"/>
-          <p:nvPr/>
-        </p:nvSpPr>
-        <p:spPr>
-          <a:xfrm>
-            <a:off x="6135600" y="1785600"/>
-            <a:ext cx="2551199" cy="108000"/>
-          </a:xfrm>
-          <a:prstGeom prst="rect">
-            <a:avLst/>
-          </a:prstGeom>
-          <a:noFill/>
-        </p:spPr>
-        <p:txBody>
-          <a:bodyPr wrap="square">
-            <a:spAutoFit/>
-          </a:bodyPr>
-          <a:lstStyle/>
-          <a:p>
-            <a:pPr algn="l"/>
-            <a:r>
-              <a:rPr sz="900" b="0" i="0">
-                <a:solidFill>
-                  <a:srgbClr val="555555"/>
-                </a:solidFill>
-                <a:latin typeface="Calibri"/>
-              </a:rPr>
-              <a:t>du CA</a:t>
-            </a:r>
-          </a:p>
-        </p:txBody>
-      </p:sp>
-      <p:sp>
-        <p:nvSpPr>
-          <p:cNvPr id="35" name="Rectangle 34"/>
-          <p:cNvSpPr/>
-          <p:nvPr/>
-        </p:nvSpPr>
-        <p:spPr>
-          <a:xfrm>
-            <a:off x="6135600" y="1965600"/>
-            <a:ext cx="2551199" cy="18000"/>
-          </a:xfrm>
-          <a:prstGeom prst="rect">
-            <a:avLst/>
-          </a:prstGeom>
-          <a:solidFill>
-            <a:srgbClr val="888888"/>
-          </a:solidFill>
-          <a:ln>
-            <a:noFill/>
-          </a:ln>
-        </p:spPr>
-        <p:style>
-          <a:lnRef idx="1">
-            <a:schemeClr val="accent1"/>
-          </a:lnRef>
-          <a:fillRef idx="3">
-            <a:schemeClr val="accent1"/>
-          </a:fillRef>
-          <a:effectRef idx="2">
-            <a:schemeClr val="accent1"/>
-          </a:effectRef>
-          <a:fontRef idx="minor">
-            <a:schemeClr val="lt1"/>
-          </a:fontRef>
-        </p:style>
-        <p:txBody>
-          <a:bodyPr rtlCol="0" anchor="ctr"/>
-          <a:lstStyle/>
-          <a:p>
-            <a:pPr algn="ctr"/>
-          </a:p>
-        </p:txBody>
-      </p:sp>
-      <p:sp>
-        <p:nvSpPr>
-          <p:cNvPr id="36" name="TextBox 35"/>
-          <p:cNvSpPr txBox="1"/>
-          <p:nvPr/>
-        </p:nvSpPr>
-        <p:spPr>
-          <a:xfrm>
-            <a:off x="6135600" y="2059200"/>
-            <a:ext cx="2551199" cy="255600"/>
-          </a:xfrm>
-          <a:prstGeom prst="rect">
-            <a:avLst/>
-          </a:prstGeom>
-          <a:noFill/>
-        </p:spPr>
-        <p:txBody>
-          <a:bodyPr wrap="square">
-            <a:spAutoFit/>
-          </a:bodyPr>
-          <a:lstStyle/>
-          <a:p>
-            <a:pPr algn="l"/>
-            <a:r>
-              <a:rPr sz="1000" b="1" i="0">
-                <a:solidFill>
-                  <a:srgbClr val="1B3A6B"/>
-                </a:solidFill>
-                <a:latin typeface="Calibri"/>
-              </a:rPr>
-              <a:t>International</a:t>
-            </a:r>
-          </a:p>
-        </p:txBody>
-      </p:sp>
-      <p:sp>
-        <p:nvSpPr>
-          <p:cNvPr id="37" name="TextBox 36"/>
-          <p:cNvSpPr txBox="1"/>
-          <p:nvPr/>
-        </p:nvSpPr>
-        <p:spPr>
-          <a:xfrm>
-            <a:off x="6135600" y="2332800"/>
-            <a:ext cx="2551199" cy="2041199"/>
-          </a:xfrm>
-          <a:prstGeom prst="rect">
-            <a:avLst/>
-          </a:prstGeom>
-          <a:noFill/>
-        </p:spPr>
-        <p:txBody>
-          <a:bodyPr wrap="square">
-            <a:spAutoFit/>
-          </a:bodyPr>
-          <a:lstStyle/>
-          <a:p>
-            <a:pPr algn="l"/>
-            <a:r>
-              <a:rPr sz="800" b="0" i="0">
-                <a:solidFill>
-                  <a:srgbClr val="555555"/>
-                </a:solidFill>
-                <a:latin typeface="Calibri"/>
-              </a:rPr>
-              <a:t>—</a:t>
+              <a:t>Ventes de batteries Powerwall/ Megapack et systèmes solaires pour particuliers et entreprises. Modèle de revenus récurrents via abonnements et services de maintenance. Clients cibles : ménages et industriels. Croissance portée par la demande en stockage d'énergie et les subventions gouvernementales (ex: IRA aux États-Unis).</a:t>
             </a:r>
           </a:p>
         </p:txBody>
@@ -37100,7 +37856,7 @@
                 </a:solidFill>
                 <a:latin typeface="Calibri"/>
               </a:rPr>
-              <a:t>USD millions  ·  2022–2025</a:t>
+              <a:t>USD millions  ·  2022–2027F</a:t>
             </a:r>
           </a:p>
         </p:txBody>
@@ -37115,7 +37871,7 @@
         </p:nvGraphicFramePr>
         <p:xfrm>
           <a:off x="367200" y="914400"/>
-          <a:ext cx="8413200" cy="1980000"/>
+          <a:ext cx="8413196" cy="1980000"/>
         </p:xfrm>
         <a:graphic>
           <a:graphicData uri="http://schemas.openxmlformats.org/drawingml/2006/table">
@@ -37125,9 +37881,11 @@
               </a:tblPr>
               <a:tblGrid>
                 <a:gridCol w="2355696"/>
-                <a:gridCol w="2019168"/>
-                <a:gridCol w="2019168"/>
-                <a:gridCol w="2019168"/>
+                <a:gridCol w="1211500"/>
+                <a:gridCol w="1211500"/>
+                <a:gridCol w="1211500"/>
+                <a:gridCol w="1211500"/>
+                <a:gridCol w="1211500"/>
               </a:tblGrid>
               <a:tr h="220000">
                 <a:tc>
@@ -37222,6 +37980,52 @@
                     </a:solidFill>
                   </a:tcPr>
                 </a:tc>
+                <a:tc>
+                  <a:txBody>
+                    <a:bodyPr/>
+                    <a:lstStyle/>
+                    <a:p>
+                      <a:pPr algn="ctr"/>
+                      <a:r>
+                        <a:rPr sz="800" b="1" i="0">
+                          <a:solidFill>
+                            <a:srgbClr val="FFFFFF"/>
+                          </a:solidFill>
+                          <a:latin typeface="Calibri"/>
+                        </a:rPr>
+                        <a:t>2026F</a:t>
+                      </a:r>
+                    </a:p>
+                  </a:txBody>
+                  <a:tcPr>
+                    <a:solidFill>
+                      <a:srgbClr val="1B3A6B"/>
+                    </a:solidFill>
+                  </a:tcPr>
+                </a:tc>
+                <a:tc>
+                  <a:txBody>
+                    <a:bodyPr/>
+                    <a:lstStyle/>
+                    <a:p>
+                      <a:pPr algn="ctr"/>
+                      <a:r>
+                        <a:rPr sz="800" b="1" i="0">
+                          <a:solidFill>
+                            <a:srgbClr val="FFFFFF"/>
+                          </a:solidFill>
+                          <a:latin typeface="Calibri"/>
+                        </a:rPr>
+                        <a:t>2027F</a:t>
+                      </a:r>
+                    </a:p>
+                  </a:txBody>
+                  <a:tcPr>
+                    <a:solidFill>
+                      <a:srgbClr val="1B3A6B"/>
+                    </a:solidFill>
+                  </a:tcPr>
+                </a:tc>
               </a:tr>
               <a:tr h="220000">
                 <a:tc>
@@ -37316,6 +38120,52 @@
                     </a:solidFill>
                   </a:tcPr>
                 </a:tc>
+                <a:tc>
+                  <a:txBody>
+                    <a:bodyPr/>
+                    <a:lstStyle/>
+                    <a:p>
+                      <a:pPr algn="ctr"/>
+                      <a:r>
+                        <a:rPr sz="800" b="1" i="0">
+                          <a:solidFill>
+                            <a:srgbClr val="0D0D0D"/>
+                          </a:solidFill>
+                          <a:latin typeface="Calibri"/>
+                        </a:rPr>
+                        <a:t>102,0</a:t>
+                      </a:r>
+                    </a:p>
+                  </a:txBody>
+                  <a:tcPr>
+                    <a:solidFill>
+                      <a:srgbClr val="FFFFFF"/>
+                    </a:solidFill>
+                  </a:tcPr>
+                </a:tc>
+                <a:tc>
+                  <a:txBody>
+                    <a:bodyPr/>
+                    <a:lstStyle/>
+                    <a:p>
+                      <a:pPr algn="ctr"/>
+                      <a:r>
+                        <a:rPr sz="800" b="1" i="0">
+                          <a:solidFill>
+                            <a:srgbClr val="0D0D0D"/>
+                          </a:solidFill>
+                          <a:latin typeface="Calibri"/>
+                        </a:rPr>
+                        <a:t>115,0</a:t>
+                      </a:r>
+                    </a:p>
+                  </a:txBody>
+                  <a:tcPr>
+                    <a:solidFill>
+                      <a:srgbClr val="FFFFFF"/>
+                    </a:solidFill>
+                  </a:tcPr>
+                </a:tc>
               </a:tr>
               <a:tr h="220000">
                 <a:tc>
@@ -37410,6 +38260,52 @@
                     </a:solidFill>
                   </a:tcPr>
                 </a:tc>
+                <a:tc>
+                  <a:txBody>
+                    <a:bodyPr/>
+                    <a:lstStyle/>
+                    <a:p>
+                      <a:pPr algn="ctr"/>
+                      <a:r>
+                        <a:rPr sz="750" b="0" i="1">
+                          <a:solidFill>
+                            <a:srgbClr val="555555"/>
+                          </a:solidFill>
+                          <a:latin typeface="Calibri"/>
+                        </a:rPr>
+                        <a:t>+780,0 %</a:t>
+                      </a:r>
+                    </a:p>
+                  </a:txBody>
+                  <a:tcPr>
+                    <a:solidFill>
+                      <a:srgbClr val="F7F8FA"/>
+                    </a:solidFill>
+                  </a:tcPr>
+                </a:tc>
+                <a:tc>
+                  <a:txBody>
+                    <a:bodyPr/>
+                    <a:lstStyle/>
+                    <a:p>
+                      <a:pPr algn="ctr"/>
+                      <a:r>
+                        <a:rPr sz="750" b="0" i="1">
+                          <a:solidFill>
+                            <a:srgbClr val="555555"/>
+                          </a:solidFill>
+                          <a:latin typeface="Calibri"/>
+                        </a:rPr>
+                        <a:t>+1270,0 %</a:t>
+                      </a:r>
+                    </a:p>
+                  </a:txBody>
+                  <a:tcPr>
+                    <a:solidFill>
+                      <a:srgbClr val="F7F8FA"/>
+                    </a:solidFill>
+                  </a:tcPr>
+                </a:tc>
               </a:tr>
               <a:tr h="220000">
                 <a:tc>
@@ -37504,6 +38400,52 @@
                     </a:solidFill>
                   </a:tcPr>
                 </a:tc>
+                <a:tc>
+                  <a:txBody>
+                    <a:bodyPr/>
+                    <a:lstStyle/>
+                    <a:p>
+                      <a:pPr algn="ctr"/>
+                      <a:r>
+                        <a:rPr sz="800" b="1" i="0">
+                          <a:solidFill>
+                            <a:srgbClr val="0D0D0D"/>
+                          </a:solidFill>
+                          <a:latin typeface="Calibri"/>
+                        </a:rPr>
+                        <a:t>1 989,0</a:t>
+                      </a:r>
+                    </a:p>
+                  </a:txBody>
+                  <a:tcPr>
+                    <a:solidFill>
+                      <a:srgbClr val="FFFFFF"/>
+                    </a:solidFill>
+                  </a:tcPr>
+                </a:tc>
+                <a:tc>
+                  <a:txBody>
+                    <a:bodyPr/>
+                    <a:lstStyle/>
+                    <a:p>
+                      <a:pPr algn="ctr"/>
+                      <a:r>
+                        <a:rPr sz="800" b="1" i="0">
+                          <a:solidFill>
+                            <a:srgbClr val="0D0D0D"/>
+                          </a:solidFill>
+                          <a:latin typeface="Calibri"/>
+                        </a:rPr>
+                        <a:t>2 415,0</a:t>
+                      </a:r>
+                    </a:p>
+                  </a:txBody>
+                  <a:tcPr>
+                    <a:solidFill>
+                      <a:srgbClr val="FFFFFF"/>
+                    </a:solidFill>
+                  </a:tcPr>
+                </a:tc>
               </a:tr>
               <a:tr h="220000">
                 <a:tc>
@@ -37598,6 +38540,52 @@
                     </a:solidFill>
                   </a:tcPr>
                 </a:tc>
+                <a:tc>
+                  <a:txBody>
+                    <a:bodyPr/>
+                    <a:lstStyle/>
+                    <a:p>
+                      <a:pPr algn="ctr"/>
+                      <a:r>
+                        <a:rPr sz="750" b="0" i="1">
+                          <a:solidFill>
+                            <a:srgbClr val="555555"/>
+                          </a:solidFill>
+                          <a:latin typeface="Calibri"/>
+                        </a:rPr>
+                        <a:t>1950,0 %</a:t>
+                      </a:r>
+                    </a:p>
+                  </a:txBody>
+                  <a:tcPr>
+                    <a:solidFill>
+                      <a:srgbClr val="F7F8FA"/>
+                    </a:solidFill>
+                  </a:tcPr>
+                </a:tc>
+                <a:tc>
+                  <a:txBody>
+                    <a:bodyPr/>
+                    <a:lstStyle/>
+                    <a:p>
+                      <a:pPr algn="ctr"/>
+                      <a:r>
+                        <a:rPr sz="750" b="0" i="1">
+                          <a:solidFill>
+                            <a:srgbClr val="555555"/>
+                          </a:solidFill>
+                          <a:latin typeface="Calibri"/>
+                        </a:rPr>
+                        <a:t>2100,0 %</a:t>
+                      </a:r>
+                    </a:p>
+                  </a:txBody>
+                  <a:tcPr>
+                    <a:solidFill>
+                      <a:srgbClr val="F7F8FA"/>
+                    </a:solidFill>
+                  </a:tcPr>
+                </a:tc>
               </a:tr>
               <a:tr h="220000">
                 <a:tc>
@@ -37692,6 +38680,52 @@
                     </a:solidFill>
                   </a:tcPr>
                 </a:tc>
+                <a:tc>
+                  <a:txBody>
+                    <a:bodyPr/>
+                    <a:lstStyle/>
+                    <a:p>
+                      <a:pPr algn="ctr"/>
+                      <a:r>
+                        <a:rPr sz="800" b="1" i="0">
+                          <a:solidFill>
+                            <a:srgbClr val="0D0D0D"/>
+                          </a:solidFill>
+                          <a:latin typeface="Calibri"/>
+                        </a:rPr>
+                        <a:t>18,0</a:t>
+                      </a:r>
+                    </a:p>
+                  </a:txBody>
+                  <a:tcPr>
+                    <a:solidFill>
+                      <a:srgbClr val="FFFFFF"/>
+                    </a:solidFill>
+                  </a:tcPr>
+                </a:tc>
+                <a:tc>
+                  <a:txBody>
+                    <a:bodyPr/>
+                    <a:lstStyle/>
+                    <a:p>
+                      <a:pPr algn="ctr"/>
+                      <a:r>
+                        <a:rPr sz="800" b="1" i="0">
+                          <a:solidFill>
+                            <a:srgbClr val="0D0D0D"/>
+                          </a:solidFill>
+                          <a:latin typeface="Calibri"/>
+                        </a:rPr>
+                        <a:t>24,0</a:t>
+                      </a:r>
+                    </a:p>
+                  </a:txBody>
+                  <a:tcPr>
+                    <a:solidFill>
+                      <a:srgbClr val="FFFFFF"/>
+                    </a:solidFill>
+                  </a:tcPr>
+                </a:tc>
               </a:tr>
               <a:tr h="220000">
                 <a:tc>
@@ -37786,6 +38820,52 @@
                     </a:solidFill>
                   </a:tcPr>
                 </a:tc>
+                <a:tc>
+                  <a:txBody>
+                    <a:bodyPr/>
+                    <a:lstStyle/>
+                    <a:p>
+                      <a:pPr algn="ctr"/>
+                      <a:r>
+                        <a:rPr sz="750" b="0" i="1">
+                          <a:solidFill>
+                            <a:srgbClr val="555555"/>
+                          </a:solidFill>
+                          <a:latin typeface="Calibri"/>
+                        </a:rPr>
+                        <a:t>1760,0 %</a:t>
+                      </a:r>
+                    </a:p>
+                  </a:txBody>
+                  <a:tcPr>
+                    <a:solidFill>
+                      <a:srgbClr val="F7F8FA"/>
+                    </a:solidFill>
+                  </a:tcPr>
+                </a:tc>
+                <a:tc>
+                  <a:txBody>
+                    <a:bodyPr/>
+                    <a:lstStyle/>
+                    <a:p>
+                      <a:pPr algn="ctr"/>
+                      <a:r>
+                        <a:rPr sz="750" b="0" i="1">
+                          <a:solidFill>
+                            <a:srgbClr val="555555"/>
+                          </a:solidFill>
+                          <a:latin typeface="Calibri"/>
+                        </a:rPr>
+                        <a:t>2090,0 %</a:t>
+                      </a:r>
+                    </a:p>
+                  </a:txBody>
+                  <a:tcPr>
+                    <a:solidFill>
+                      <a:srgbClr val="F7F8FA"/>
+                    </a:solidFill>
+                  </a:tcPr>
+                </a:tc>
               </a:tr>
               <a:tr h="220000">
                 <a:tc>
@@ -37880,6 +38960,52 @@
                     </a:solidFill>
                   </a:tcPr>
                 </a:tc>
+                <a:tc>
+                  <a:txBody>
+                    <a:bodyPr/>
+                    <a:lstStyle/>
+                    <a:p>
+                      <a:pPr algn="ctr"/>
+                      <a:r>
+                        <a:rPr sz="800" b="1" i="0">
+                          <a:solidFill>
+                            <a:srgbClr val="0D0D0D"/>
+                          </a:solidFill>
+                          <a:latin typeface="Calibri"/>
+                        </a:rPr>
+                        <a:t>7,5</a:t>
+                      </a:r>
+                    </a:p>
+                  </a:txBody>
+                  <a:tcPr>
+                    <a:solidFill>
+                      <a:srgbClr val="FFFFFF"/>
+                    </a:solidFill>
+                  </a:tcPr>
+                </a:tc>
+                <a:tc>
+                  <a:txBody>
+                    <a:bodyPr/>
+                    <a:lstStyle/>
+                    <a:p>
+                      <a:pPr algn="ctr"/>
+                      <a:r>
+                        <a:rPr sz="800" b="1" i="0">
+                          <a:solidFill>
+                            <a:srgbClr val="0D0D0D"/>
+                          </a:solidFill>
+                          <a:latin typeface="Calibri"/>
+                        </a:rPr>
+                        <a:t>11,0</a:t>
+                      </a:r>
+                    </a:p>
+                  </a:txBody>
+                  <a:tcPr>
+                    <a:solidFill>
+                      <a:srgbClr val="FFFFFF"/>
+                    </a:solidFill>
+                  </a:tcPr>
+                </a:tc>
               </a:tr>
               <a:tr h="220000">
                 <a:tc>
@@ -37971,6 +39097,52 @@
                   <a:tcPr>
                     <a:solidFill>
                       <a:srgbClr val="DDE8F5"/>
+                    </a:solidFill>
+                  </a:tcPr>
+                </a:tc>
+                <a:tc>
+                  <a:txBody>
+                    <a:bodyPr/>
+                    <a:lstStyle/>
+                    <a:p>
+                      <a:pPr algn="ctr"/>
+                      <a:r>
+                        <a:rPr sz="750" b="0" i="1">
+                          <a:solidFill>
+                            <a:srgbClr val="555555"/>
+                          </a:solidFill>
+                          <a:latin typeface="Calibri"/>
+                        </a:rPr>
+                        <a:t>740,0 %</a:t>
+                      </a:r>
+                    </a:p>
+                  </a:txBody>
+                  <a:tcPr>
+                    <a:solidFill>
+                      <a:srgbClr val="F7F8FA"/>
+                    </a:solidFill>
+                  </a:tcPr>
+                </a:tc>
+                <a:tc>
+                  <a:txBody>
+                    <a:bodyPr/>
+                    <a:lstStyle/>
+                    <a:p>
+                      <a:pPr algn="ctr"/>
+                      <a:r>
+                        <a:rPr sz="750" b="0" i="1">
+                          <a:solidFill>
+                            <a:srgbClr val="555555"/>
+                          </a:solidFill>
+                          <a:latin typeface="Calibri"/>
+                        </a:rPr>
+                        <a:t>960,0 %</a:t>
+                      </a:r>
+                    </a:p>
+                  </a:txBody>
+                  <a:tcPr>
+                    <a:solidFill>
+                      <a:srgbClr val="F7F8FA"/>
                     </a:solidFill>
                   </a:tcPr>
                 </a:tc>
@@ -37979,6 +39151,41 @@
           </a:graphicData>
         </a:graphic>
       </p:graphicFrame>
+      <p:sp>
+        <p:nvSpPr>
+          <p:cNvPr id="18" name="TextBox 17"/>
+          <p:cNvSpPr txBox="1"/>
+          <p:nvPr/>
+        </p:nvSpPr>
+        <p:spPr>
+          <a:xfrm>
+            <a:off x="367200" y="3218400"/>
+            <a:ext cx="8413200" cy="1224000"/>
+          </a:xfrm>
+          <a:prstGeom prst="rect">
+            <a:avLst/>
+          </a:prstGeom>
+          <a:noFill/>
+        </p:spPr>
+        <p:txBody>
+          <a:bodyPr wrap="square">
+            <a:spAutoFit/>
+          </a:bodyPr>
+          <a:lstStyle/>
+          <a:p>
+            <a:pPr algn="l"/>
+            <a:r>
+              <a:rPr sz="850" b="0" i="0">
+                <a:solidFill>
+                  <a:srgbClr val="555555"/>
+                </a:solidFill>
+                <a:latin typeface="Calibri"/>
+              </a:rPr>
+              <a:t>Le CA 2025 atteint 94,8 Md$ (-3% YoY), avec une marge brute de 18,0% stable mais une marge nette chutant à 4,0% en raison de pressions sur les prix (baisse des prix de vente de -10% en 2024) et de coûts fixes élevés (Capex 8,5 Md$). La trésorerie nette de -0,7x EBITDA et un ratio de couverture des intérêts à 16,6x assurent une flexibilité financière malgré la compression des marges.</a:t>
+            </a:r>
+          </a:p>
+        </p:txBody>
+      </p:sp>
     </p:spTree>
   </p:cSld>
   <p:clrMapOvr>
@@ -39861,6 +41068,41 @@
           </a:graphicData>
         </a:graphic>
       </p:graphicFrame>
+      <p:sp>
+        <p:nvSpPr>
+          <p:cNvPr id="31" name="TextBox 30"/>
+          <p:cNvSpPr txBox="1"/>
+          <p:nvPr/>
+        </p:nvSpPr>
+        <p:spPr>
+          <a:xfrm>
+            <a:off x="367200" y="4068000"/>
+            <a:ext cx="8413200" cy="468000"/>
+          </a:xfrm>
+          <a:prstGeom prst="rect">
+            <a:avLst/>
+          </a:prstGeom>
+          <a:noFill/>
+        </p:spPr>
+        <p:txBody>
+          <a:bodyPr wrap="square">
+            <a:spAutoFit/>
+          </a:bodyPr>
+          <a:lstStyle/>
+          <a:p>
+            <a:pPr algn="l"/>
+            <a:r>
+              <a:rPr sz="850" b="0" i="0">
+                <a:solidFill>
+                  <a:srgbClr val="555555"/>
+                </a:solidFill>
+                <a:latin typeface="Calibri"/>
+              </a:rPr>
+              <a:t>Le CA 2025 atteint 94,8 Md$ (-3% YoY), avec une marge brute de 18,0% stable mais une marge nette chutant à 4,0% en raison de pressions sur les prix (baisse des prix de vente de -10% en 2024) et de coûts fixes élevés (Capex 8,5 Md$). La trésorerie nette de -0,7x EBITDA et un ratio de couverture des intérêts à 16,6x assurent une flexibilité financière malgré la compression des marges.</a:t>
+            </a:r>
+          </a:p>
+        </p:txBody>
+      </p:sp>
     </p:spTree>
   </p:cSld>
   <p:clrMapOvr>

--- a/preview/TSLA/TSLA_pitchbook.pptx
+++ b/preview/TSLA/TSLA_pitchbook.pptx
@@ -6071,14 +6071,100 @@
       </p:graphicFrame>
       <p:sp>
         <p:nvSpPr>
-          <p:cNvPr id="18" name="TextBox 17"/>
-          <p:cNvSpPr txBox="1"/>
+          <p:cNvPr id="18" name="Rectangle 17"/>
+          <p:cNvSpPr/>
           <p:nvPr/>
         </p:nvSpPr>
         <p:spPr>
           <a:xfrm>
             <a:off x="367200" y="3628800"/>
             <a:ext cx="8413200" cy="824400"/>
+          </a:xfrm>
+          <a:prstGeom prst="rect">
+            <a:avLst/>
+          </a:prstGeom>
+          <a:solidFill>
+            <a:srgbClr val="F5F7FA"/>
+          </a:solidFill>
+          <a:ln>
+            <a:noFill/>
+          </a:ln>
+        </p:spPr>
+        <p:style>
+          <a:lnRef idx="1">
+            <a:schemeClr val="accent1"/>
+          </a:lnRef>
+          <a:fillRef idx="3">
+            <a:schemeClr val="accent1"/>
+          </a:fillRef>
+          <a:effectRef idx="2">
+            <a:schemeClr val="accent1"/>
+          </a:effectRef>
+          <a:fontRef idx="minor">
+            <a:schemeClr val="lt1"/>
+          </a:fontRef>
+        </p:style>
+        <p:txBody>
+          <a:bodyPr rtlCol="0" anchor="ctr"/>
+          <a:lstStyle/>
+          <a:p>
+            <a:pPr algn="ctr"/>
+          </a:p>
+        </p:txBody>
+      </p:sp>
+      <p:sp>
+        <p:nvSpPr>
+          <p:cNvPr id="19" name="Rectangle 18"/>
+          <p:cNvSpPr/>
+          <p:nvPr/>
+        </p:nvSpPr>
+        <p:spPr>
+          <a:xfrm>
+            <a:off x="367200" y="3628800"/>
+            <a:ext cx="79200" cy="824400"/>
+          </a:xfrm>
+          <a:prstGeom prst="rect">
+            <a:avLst/>
+          </a:prstGeom>
+          <a:solidFill>
+            <a:srgbClr val="2E5FA3"/>
+          </a:solidFill>
+          <a:ln>
+            <a:noFill/>
+          </a:ln>
+        </p:spPr>
+        <p:style>
+          <a:lnRef idx="1">
+            <a:schemeClr val="accent1"/>
+          </a:lnRef>
+          <a:fillRef idx="3">
+            <a:schemeClr val="accent1"/>
+          </a:fillRef>
+          <a:effectRef idx="2">
+            <a:schemeClr val="accent1"/>
+          </a:effectRef>
+          <a:fontRef idx="minor">
+            <a:schemeClr val="lt1"/>
+          </a:fontRef>
+        </p:style>
+        <p:txBody>
+          <a:bodyPr rtlCol="0" anchor="ctr"/>
+          <a:lstStyle/>
+          <a:p>
+            <a:pPr algn="ctr"/>
+          </a:p>
+        </p:txBody>
+      </p:sp>
+      <p:sp>
+        <p:nvSpPr>
+          <p:cNvPr id="20" name="TextBox 19"/>
+          <p:cNvSpPr txBox="1"/>
+          <p:nvPr/>
+        </p:nvSpPr>
+        <p:spPr>
+          <a:xfrm>
+            <a:off x="475200" y="3657600"/>
+            <a:ext cx="8298000" cy="788400"/>
           </a:xfrm>
           <a:prstGeom prst="rect">
             <a:avLst/>
@@ -6099,7 +6185,7 @@
                 </a:solidFill>
                 <a:latin typeface="Calibri"/>
               </a:rPr>
-              <a:t>Les marges brutes sont passées de 25,6% en 2022 à 18,0% en 2025, principalement en raison de la baisse des prix de vente (-10% en 2024) et de l'augmentation des coûts logistiques (énergie, transport). La marge EBITDA a reculé de 21,7% en 2022 à 12,4% en 2025, reflétant un effet de levier opérationnel négatif. La durabilité du pricing power est incertaine sans relance de la demande ou réduction des coûts fixes.</a:t>
+              <a:t>La marge EBITDA chute de 21,7% en 2022 à 12,4% en 2025, reflétant une inflation des coûts (salaires, matières premières) et une concurrence accrue sur les prix. Le mix produit (baisse des Model 3/Y à marge plus faible) aggrave la pression. La durabilité du pricing power est incertaine sans relance de la demande premium ou innovation produit majeure.</a:t>
             </a:r>
           </a:p>
         </p:txBody>
@@ -7583,7 +7669,7 @@
                           </a:solidFill>
                           <a:latin typeface="Calibri"/>
                         </a:rPr>
-                        <a:t>290 $</a:t>
+                        <a:t>280 $</a:t>
                       </a:r>
                     </a:p>
                   </a:txBody>
@@ -7654,7 +7740,7 @@
                           </a:solidFill>
                           <a:latin typeface="Calibri"/>
                         </a:rPr>
-                        <a:t>-16,3 %</a:t>
+                        <a:t>-19,2 %</a:t>
                       </a:r>
                     </a:p>
                   </a:txBody>
@@ -10261,14 +10347,100 @@
       </p:graphicFrame>
       <p:sp>
         <p:nvSpPr>
-          <p:cNvPr id="22" name="TextBox 21"/>
-          <p:cNvSpPr txBox="1"/>
+          <p:cNvPr id="22" name="Rectangle 21"/>
+          <p:cNvSpPr/>
           <p:nvPr/>
         </p:nvSpPr>
         <p:spPr>
           <a:xfrm>
             <a:off x="367200" y="3916800"/>
             <a:ext cx="8413200" cy="547200"/>
+          </a:xfrm>
+          <a:prstGeom prst="rect">
+            <a:avLst/>
+          </a:prstGeom>
+          <a:solidFill>
+            <a:srgbClr val="F5F7FA"/>
+          </a:solidFill>
+          <a:ln>
+            <a:noFill/>
+          </a:ln>
+        </p:spPr>
+        <p:style>
+          <a:lnRef idx="1">
+            <a:schemeClr val="accent1"/>
+          </a:lnRef>
+          <a:fillRef idx="3">
+            <a:schemeClr val="accent1"/>
+          </a:fillRef>
+          <a:effectRef idx="2">
+            <a:schemeClr val="accent1"/>
+          </a:effectRef>
+          <a:fontRef idx="minor">
+            <a:schemeClr val="lt1"/>
+          </a:fontRef>
+        </p:style>
+        <p:txBody>
+          <a:bodyPr rtlCol="0" anchor="ctr"/>
+          <a:lstStyle/>
+          <a:p>
+            <a:pPr algn="ctr"/>
+          </a:p>
+        </p:txBody>
+      </p:sp>
+      <p:sp>
+        <p:nvSpPr>
+          <p:cNvPr id="23" name="Rectangle 22"/>
+          <p:cNvSpPr/>
+          <p:nvPr/>
+        </p:nvSpPr>
+        <p:spPr>
+          <a:xfrm>
+            <a:off x="367200" y="3916800"/>
+            <a:ext cx="79200" cy="547200"/>
+          </a:xfrm>
+          <a:prstGeom prst="rect">
+            <a:avLst/>
+          </a:prstGeom>
+          <a:solidFill>
+            <a:srgbClr val="2E5FA3"/>
+          </a:solidFill>
+          <a:ln>
+            <a:noFill/>
+          </a:ln>
+        </p:spPr>
+        <p:style>
+          <a:lnRef idx="1">
+            <a:schemeClr val="accent1"/>
+          </a:lnRef>
+          <a:fillRef idx="3">
+            <a:schemeClr val="accent1"/>
+          </a:fillRef>
+          <a:effectRef idx="2">
+            <a:schemeClr val="accent1"/>
+          </a:effectRef>
+          <a:fontRef idx="minor">
+            <a:schemeClr val="lt1"/>
+          </a:fontRef>
+        </p:style>
+        <p:txBody>
+          <a:bodyPr rtlCol="0" anchor="ctr"/>
+          <a:lstStyle/>
+          <a:p>
+            <a:pPr algn="ctr"/>
+          </a:p>
+        </p:txBody>
+      </p:sp>
+      <p:sp>
+        <p:nvSpPr>
+          <p:cNvPr id="24" name="TextBox 23"/>
+          <p:cNvSpPr txBox="1"/>
+          <p:nvPr/>
+        </p:nvSpPr>
+        <p:spPr>
+          <a:xfrm>
+            <a:off x="475200" y="3945600"/>
+            <a:ext cx="8298000" cy="511200"/>
           </a:xfrm>
           <a:prstGeom prst="rect">
             <a:avLst/>
@@ -10289,7 +10461,7 @@
                 </a:solidFill>
                 <a:latin typeface="Calibri"/>
               </a:rPr>
-              <a:t>Avec un WACC de 14,8% et un TGR de 2,5%, le prix implicite DCF est estimé à 360 USD (base), soit une légère décote vs cours actuel (346,65 USD). L'upside est limité par une prime de croissance déjà pricee, mais un déclenchement de la marge opérationnelle ou une accélération du FSD pourrait justifier un re-rating.</a:t>
+              <a:t>Avec un WACC de 14,8% et un TGR de 2,5%, le prix implicite DCF est de 360 USD (vs cours 346,65 USD), suggérant une légère sous-valorisation. L'upside dépend de la réalisation des catalyseurs (Robotaxi, énergie) et de la reprise des marges.</a:t>
             </a:r>
           </a:p>
         </p:txBody>
@@ -11307,7 +11479,7 @@
                           </a:solidFill>
                           <a:latin typeface="Calibri"/>
                         </a:rPr>
-                        <a:t>BYD Company Limited</a:t>
+                        <a:t>BYD Company</a:t>
                       </a:r>
                     </a:p>
                   </a:txBody>
@@ -11330,7 +11502,7 @@
                           </a:solidFill>
                           <a:latin typeface="Calibri"/>
                         </a:rPr>
-                        <a:t>BYD</a:t>
+                        <a:t>BYD.US</a:t>
                       </a:r>
                     </a:p>
                   </a:txBody>
@@ -11353,7 +11525,7 @@
                           </a:solidFill>
                           <a:latin typeface="Calibri"/>
                         </a:rPr>
-                        <a:t>85,0</a:t>
+                        <a:t>95,0</a:t>
                       </a:r>
                     </a:p>
                   </a:txBody>
@@ -11376,7 +11548,7 @@
                           </a:solidFill>
                           <a:latin typeface="Calibri"/>
                         </a:rPr>
-                        <a:t>19,8x</a:t>
+                        <a:t>12,5x</a:t>
                       </a:r>
                     </a:p>
                   </a:txBody>
@@ -11399,7 +11571,7 @@
                           </a:solidFill>
                           <a:latin typeface="Calibri"/>
                         </a:rPr>
-                        <a:t>1,8x</a:t>
+                        <a:t>2,1x</a:t>
                       </a:r>
                     </a:p>
                   </a:txBody>
@@ -11422,7 +11594,7 @@
                           </a:solidFill>
                           <a:latin typeface="Calibri"/>
                         </a:rPr>
-                        <a:t>25,4x</a:t>
+                        <a:t>35,0x</a:t>
                       </a:r>
                     </a:p>
                   </a:txBody>
@@ -11445,7 +11617,7 @@
                           </a:solidFill>
                           <a:latin typeface="Calibri"/>
                         </a:rPr>
-                        <a:t>22,0 %</a:t>
+                        <a:t>18,0 %</a:t>
                       </a:r>
                     </a:p>
                   </a:txBody>
@@ -11493,7 +11665,7 @@
                           </a:solidFill>
                           <a:latin typeface="Calibri"/>
                         </a:rPr>
-                        <a:t>NIO Inc.</a:t>
+                        <a:t>NIO Inc</a:t>
                       </a:r>
                     </a:p>
                   </a:txBody>
@@ -11516,7 +11688,7 @@
                           </a:solidFill>
                           <a:latin typeface="Calibri"/>
                         </a:rPr>
-                        <a:t>NIO</a:t>
+                        <a:t>NIO.US</a:t>
                       </a:r>
                     </a:p>
                   </a:txBody>
@@ -11539,7 +11711,7 @@
                           </a:solidFill>
                           <a:latin typeface="Calibri"/>
                         </a:rPr>
-                        <a:t>22,0</a:t>
+                        <a:t>35,0</a:t>
                       </a:r>
                     </a:p>
                   </a:txBody>
@@ -11562,7 +11734,7 @@
                           </a:solidFill>
                           <a:latin typeface="Calibri"/>
                         </a:rPr>
-                        <a:t>-12,5x</a:t>
+                        <a:t>-15,0x</a:t>
                       </a:r>
                     </a:p>
                   </a:txBody>
@@ -11585,7 +11757,7 @@
                           </a:solidFill>
                           <a:latin typeface="Calibri"/>
                         </a:rPr>
-                        <a:t>2,1x</a:t>
+                        <a:t>2,8x</a:t>
                       </a:r>
                     </a:p>
                   </a:txBody>
@@ -11631,7 +11803,7 @@
                           </a:solidFill>
                           <a:latin typeface="Calibri"/>
                         </a:rPr>
-                        <a:t>14,0 %</a:t>
+                        <a:t>12,0 %</a:t>
                       </a:r>
                     </a:p>
                   </a:txBody>
@@ -11679,7 +11851,7 @@
                           </a:solidFill>
                           <a:latin typeface="Calibri"/>
                         </a:rPr>
-                        <a:t>XPeng Inc.</a:t>
+                        <a:t>Rivian Automotive</a:t>
                       </a:r>
                     </a:p>
                   </a:txBody>
@@ -11702,7 +11874,7 @@
                           </a:solidFill>
                           <a:latin typeface="Calibri"/>
                         </a:rPr>
-                        <a:t>XPEV</a:t>
+                        <a:t>RIVN.US</a:t>
                       </a:r>
                     </a:p>
                   </a:txBody>
@@ -11725,7 +11897,7 @@
                           </a:solidFill>
                           <a:latin typeface="Calibri"/>
                         </a:rPr>
-                        <a:t>12,0</a:t>
+                        <a:t>18,0</a:t>
                       </a:r>
                     </a:p>
                   </a:txBody>
@@ -11748,7 +11920,7 @@
                           </a:solidFill>
                           <a:latin typeface="Calibri"/>
                         </a:rPr>
-                        <a:t>-15,2x</a:t>
+                        <a:t>-4,5x</a:t>
                       </a:r>
                     </a:p>
                   </a:txBody>
@@ -11771,7 +11943,7 @@
                           </a:solidFill>
                           <a:latin typeface="Calibri"/>
                         </a:rPr>
-                        <a:t>1,5x</a:t>
+                        <a:t>2,5x</a:t>
                       </a:r>
                     </a:p>
                   </a:txBody>
@@ -11794,7 +11966,7 @@
                           </a:solidFill>
                           <a:latin typeface="Calibri"/>
                         </a:rPr>
-                        <a:t>-18,3x</a:t>
+                        <a:t>-8,0x</a:t>
                       </a:r>
                     </a:p>
                   </a:txBody>
@@ -11817,7 +11989,7 @@
                           </a:solidFill>
                           <a:latin typeface="Calibri"/>
                         </a:rPr>
-                        <a:t>12,0 %</a:t>
+                        <a:t>15,0 %</a:t>
                       </a:r>
                     </a:p>
                   </a:txBody>
@@ -11840,7 +12012,7 @@
                           </a:solidFill>
                           <a:latin typeface="Calibri"/>
                         </a:rPr>
-                        <a:t>-8,0 %</a:t>
+                        <a:t>-20,0 %</a:t>
                       </a:r>
                     </a:p>
                   </a:txBody>
@@ -11865,7 +12037,7 @@
                           </a:solidFill>
                           <a:latin typeface="Calibri"/>
                         </a:rPr>
-                        <a:t>Rivian Automotive</a:t>
+                        <a:t>Lucid Group</a:t>
                       </a:r>
                     </a:p>
                   </a:txBody>
@@ -11888,7 +12060,7 @@
                           </a:solidFill>
                           <a:latin typeface="Calibri"/>
                         </a:rPr>
-                        <a:t>RIVN</a:t>
+                        <a:t>LCID.US</a:t>
                       </a:r>
                     </a:p>
                   </a:txBody>
@@ -11911,7 +12083,7 @@
                           </a:solidFill>
                           <a:latin typeface="Calibri"/>
                         </a:rPr>
-                        <a:t>18,0</a:t>
+                        <a:t>12,0</a:t>
                       </a:r>
                     </a:p>
                   </a:txBody>
@@ -11934,7 +12106,7 @@
                           </a:solidFill>
                           <a:latin typeface="Calibri"/>
                         </a:rPr>
-                        <a:t>-10,5x</a:t>
+                        <a:t>-10,0x</a:t>
                       </a:r>
                     </a:p>
                   </a:txBody>
@@ -11980,7 +12152,7 @@
                           </a:solidFill>
                           <a:latin typeface="Calibri"/>
                         </a:rPr>
-                        <a:t>-25,0x</a:t>
+                        <a:t>-15,0x</a:t>
                       </a:r>
                     </a:p>
                   </a:txBody>
@@ -12003,7 +12175,7 @@
                           </a:solidFill>
                           <a:latin typeface="Calibri"/>
                         </a:rPr>
-                        <a:t>10,0 %</a:t>
+                        <a:t>20,0 %</a:t>
                       </a:r>
                     </a:p>
                   </a:txBody>
@@ -12026,7 +12198,7 @@
                           </a:solidFill>
                           <a:latin typeface="Calibri"/>
                         </a:rPr>
-                        <a:t>-20,0 %</a:t>
+                        <a:t>-15,0 %</a:t>
                       </a:r>
                     </a:p>
                   </a:txBody>
@@ -12051,7 +12223,7 @@
                           </a:solidFill>
                           <a:latin typeface="Calibri"/>
                         </a:rPr>
-                        <a:t>Lucid Group</a:t>
+                        <a:t>XPeng Inc</a:t>
                       </a:r>
                     </a:p>
                   </a:txBody>
@@ -12074,7 +12246,7 @@
                           </a:solidFill>
                           <a:latin typeface="Calibri"/>
                         </a:rPr>
-                        <a:t>LCID</a:t>
+                        <a:t>XPEV.US</a:t>
                       </a:r>
                     </a:p>
                   </a:txBody>
@@ -12097,7 +12269,7 @@
                           </a:solidFill>
                           <a:latin typeface="Calibri"/>
                         </a:rPr>
-                        <a:t>15,0</a:t>
+                        <a:t>8,0</a:t>
                       </a:r>
                     </a:p>
                   </a:txBody>
@@ -12120,7 +12292,7 @@
                           </a:solidFill>
                           <a:latin typeface="Calibri"/>
                         </a:rPr>
-                        <a:t>-18,0x</a:t>
+                        <a:t>-8,0x</a:t>
                       </a:r>
                     </a:p>
                   </a:txBody>
@@ -12143,7 +12315,7 @@
                           </a:solidFill>
                           <a:latin typeface="Calibri"/>
                         </a:rPr>
-                        <a:t>7,5x</a:t>
+                        <a:t>1,5x</a:t>
                       </a:r>
                     </a:p>
                   </a:txBody>
@@ -12166,7 +12338,7 @@
                           </a:solidFill>
                           <a:latin typeface="Calibri"/>
                         </a:rPr>
-                        <a:t>-30,0x</a:t>
+                        <a:t>-10,0x</a:t>
                       </a:r>
                     </a:p>
                   </a:txBody>
@@ -12189,7 +12361,7 @@
                           </a:solidFill>
                           <a:latin typeface="Calibri"/>
                         </a:rPr>
-                        <a:t>18,0 %</a:t>
+                        <a:t>10,0 %</a:t>
                       </a:r>
                     </a:p>
                   </a:txBody>
@@ -12212,7 +12384,7 @@
                           </a:solidFill>
                           <a:latin typeface="Calibri"/>
                         </a:rPr>
-                        <a:t>-15,0 %</a:t>
+                        <a:t>-25,0 %</a:t>
                       </a:r>
                     </a:p>
                   </a:txBody>
@@ -12306,7 +12478,7 @@
                           </a:solidFill>
                           <a:latin typeface="Calibri"/>
                         </a:rPr>
-                        <a:t>-12,5x</a:t>
+                        <a:t>-8,0x</a:t>
                       </a:r>
                     </a:p>
                   </a:txBody>
@@ -12329,7 +12501,7 @@
                           </a:solidFill>
                           <a:latin typeface="Calibri"/>
                         </a:rPr>
-                        <a:t>2,1x</a:t>
+                        <a:t>2,5x</a:t>
                       </a:r>
                     </a:p>
                   </a:txBody>
@@ -12352,7 +12524,7 @@
                           </a:solidFill>
                           <a:latin typeface="Calibri"/>
                         </a:rPr>
-                        <a:t>-18,3x</a:t>
+                        <a:t>-10,0x</a:t>
                       </a:r>
                     </a:p>
                   </a:txBody>
@@ -12375,7 +12547,7 @@
                           </a:solidFill>
                           <a:latin typeface="Calibri"/>
                         </a:rPr>
-                        <a:t>14,0 %</a:t>
+                        <a:t>15,0 %</a:t>
                       </a:r>
                     </a:p>
                   </a:txBody>
@@ -12398,7 +12570,7 @@
                           </a:solidFill>
                           <a:latin typeface="Calibri"/>
                         </a:rPr>
-                        <a:t>-8,0 %</a:t>
+                        <a:t>-15,0 %</a:t>
                       </a:r>
                     </a:p>
                   </a:txBody>
@@ -12415,14 +12587,100 @@
       </p:graphicFrame>
       <p:sp>
         <p:nvSpPr>
-          <p:cNvPr id="18" name="TextBox 17"/>
-          <p:cNvSpPr txBox="1"/>
+          <p:cNvPr id="18" name="Rectangle 17"/>
+          <p:cNvSpPr/>
           <p:nvPr/>
         </p:nvSpPr>
         <p:spPr>
           <a:xfrm>
             <a:off x="367200" y="3128400"/>
             <a:ext cx="8413200" cy="1234800"/>
+          </a:xfrm>
+          <a:prstGeom prst="rect">
+            <a:avLst/>
+          </a:prstGeom>
+          <a:solidFill>
+            <a:srgbClr val="F5F7FA"/>
+          </a:solidFill>
+          <a:ln>
+            <a:noFill/>
+          </a:ln>
+        </p:spPr>
+        <p:style>
+          <a:lnRef idx="1">
+            <a:schemeClr val="accent1"/>
+          </a:lnRef>
+          <a:fillRef idx="3">
+            <a:schemeClr val="accent1"/>
+          </a:fillRef>
+          <a:effectRef idx="2">
+            <a:schemeClr val="accent1"/>
+          </a:effectRef>
+          <a:fontRef idx="minor">
+            <a:schemeClr val="lt1"/>
+          </a:fontRef>
+        </p:style>
+        <p:txBody>
+          <a:bodyPr rtlCol="0" anchor="ctr"/>
+          <a:lstStyle/>
+          <a:p>
+            <a:pPr algn="ctr"/>
+          </a:p>
+        </p:txBody>
+      </p:sp>
+      <p:sp>
+        <p:nvSpPr>
+          <p:cNvPr id="19" name="Rectangle 18"/>
+          <p:cNvSpPr/>
+          <p:nvPr/>
+        </p:nvSpPr>
+        <p:spPr>
+          <a:xfrm>
+            <a:off x="367200" y="3128400"/>
+            <a:ext cx="79200" cy="1234800"/>
+          </a:xfrm>
+          <a:prstGeom prst="rect">
+            <a:avLst/>
+          </a:prstGeom>
+          <a:solidFill>
+            <a:srgbClr val="2E5FA3"/>
+          </a:solidFill>
+          <a:ln>
+            <a:noFill/>
+          </a:ln>
+        </p:spPr>
+        <p:style>
+          <a:lnRef idx="1">
+            <a:schemeClr val="accent1"/>
+          </a:lnRef>
+          <a:fillRef idx="3">
+            <a:schemeClr val="accent1"/>
+          </a:fillRef>
+          <a:effectRef idx="2">
+            <a:schemeClr val="accent1"/>
+          </a:effectRef>
+          <a:fontRef idx="minor">
+            <a:schemeClr val="lt1"/>
+          </a:fontRef>
+        </p:style>
+        <p:txBody>
+          <a:bodyPr rtlCol="0" anchor="ctr"/>
+          <a:lstStyle/>
+          <a:p>
+            <a:pPr algn="ctr"/>
+          </a:p>
+        </p:txBody>
+      </p:sp>
+      <p:sp>
+        <p:nvSpPr>
+          <p:cNvPr id="20" name="TextBox 19"/>
+          <p:cNvSpPr txBox="1"/>
+          <p:nvPr/>
+        </p:nvSpPr>
+        <p:spPr>
+          <a:xfrm>
+            <a:off x="475200" y="3157200"/>
+            <a:ext cx="8298000" cy="1198800"/>
           </a:xfrm>
           <a:prstGeom prst="rect">
             <a:avLst/>
@@ -12443,7 +12701,7 @@
                 </a:solidFill>
                 <a:latin typeface="Calibri"/>
               </a:rPr>
-              <a:t>Tesla affiche une prime de 450% sur l'EV/EBITDA médiane peers (109,9x vs ~20x pour BYD, NIO, XPeng, Rivian, Lucid) et de 200% sur le P/E (342,9x vs ~150x). Cette prime est partiellement justifiée par la diversification (énergie, logiciel) et l'avance technologique, mais une convergence vers la médiane peers impliquerait un downside de 30-40% sur les multiples actuels.</a:t>
+              <a:t>Tesla affiche un EV/EBITDA de 109,9x (vs médiane peers 15x) et un P/E de 342,9x (vs médiane 25x), soit une prime de 630% et 1270% respectivement. Cette prime est justifiée par sa croissance supérieure et son écosystème intégré, mais une convergence vers la médiane peers impliquerait un downside de 85%.</a:t>
             </a:r>
           </a:p>
         </p:txBody>
@@ -13073,14 +13331,100 @@
       </p:pic>
       <p:sp>
         <p:nvSpPr>
-          <p:cNvPr id="18" name="TextBox 17"/>
-          <p:cNvSpPr txBox="1"/>
+          <p:cNvPr id="18" name="Rectangle 17"/>
+          <p:cNvSpPr/>
           <p:nvPr/>
         </p:nvSpPr>
         <p:spPr>
           <a:xfrm>
             <a:off x="367200" y="3488400"/>
             <a:ext cx="8413200" cy="914400"/>
+          </a:xfrm>
+          <a:prstGeom prst="rect">
+            <a:avLst/>
+          </a:prstGeom>
+          <a:solidFill>
+            <a:srgbClr val="F5F7FA"/>
+          </a:solidFill>
+          <a:ln>
+            <a:noFill/>
+          </a:ln>
+        </p:spPr>
+        <p:style>
+          <a:lnRef idx="1">
+            <a:schemeClr val="accent1"/>
+          </a:lnRef>
+          <a:fillRef idx="3">
+            <a:schemeClr val="accent1"/>
+          </a:fillRef>
+          <a:effectRef idx="2">
+            <a:schemeClr val="accent1"/>
+          </a:effectRef>
+          <a:fontRef idx="minor">
+            <a:schemeClr val="lt1"/>
+          </a:fontRef>
+        </p:style>
+        <p:txBody>
+          <a:bodyPr rtlCol="0" anchor="ctr"/>
+          <a:lstStyle/>
+          <a:p>
+            <a:pPr algn="ctr"/>
+          </a:p>
+        </p:txBody>
+      </p:sp>
+      <p:sp>
+        <p:nvSpPr>
+          <p:cNvPr id="19" name="Rectangle 18"/>
+          <p:cNvSpPr/>
+          <p:nvPr/>
+        </p:nvSpPr>
+        <p:spPr>
+          <a:xfrm>
+            <a:off x="367200" y="3488400"/>
+            <a:ext cx="79200" cy="914400"/>
+          </a:xfrm>
+          <a:prstGeom prst="rect">
+            <a:avLst/>
+          </a:prstGeom>
+          <a:solidFill>
+            <a:srgbClr val="2E5FA3"/>
+          </a:solidFill>
+          <a:ln>
+            <a:noFill/>
+          </a:ln>
+        </p:spPr>
+        <p:style>
+          <a:lnRef idx="1">
+            <a:schemeClr val="accent1"/>
+          </a:lnRef>
+          <a:fillRef idx="3">
+            <a:schemeClr val="accent1"/>
+          </a:fillRef>
+          <a:effectRef idx="2">
+            <a:schemeClr val="accent1"/>
+          </a:effectRef>
+          <a:fontRef idx="minor">
+            <a:schemeClr val="lt1"/>
+          </a:fontRef>
+        </p:style>
+        <p:txBody>
+          <a:bodyPr rtlCol="0" anchor="ctr"/>
+          <a:lstStyle/>
+          <a:p>
+            <a:pPr algn="ctr"/>
+          </a:p>
+        </p:txBody>
+      </p:sp>
+      <p:sp>
+        <p:nvSpPr>
+          <p:cNvPr id="20" name="TextBox 19"/>
+          <p:cNvSpPr txBox="1"/>
+          <p:nvPr/>
+        </p:nvSpPr>
+        <p:spPr>
+          <a:xfrm>
+            <a:off x="475200" y="3517200"/>
+            <a:ext cx="8298000" cy="878400"/>
           </a:xfrm>
           <a:prstGeom prst="rect">
             <a:avLst/>
@@ -13101,7 +13445,7 @@
                 </a:solidFill>
                 <a:latin typeface="Calibri"/>
               </a:rPr>
-              <a:t>Avec un WACC de 14,8% et un TGR de 2,5%, le prix implicite DCF est estimé à 360 USD (base), soit une légère décote vs cours actuel (346,65 USD). L'upside est limité par une prime de croissance déjà pricee, mais un déclenchement de la marge opérationnelle ou une accélération du FSD pourrait justifier un re-rating.</a:t>
+              <a:t>Avec un WACC de 14,8% et un TGR de 2,5%, le prix implicite DCF est de 360 USD (vs cours 346,65 USD), suggérant une légère sous-valorisation. L'upside dépend de la réalisation des catalyseurs (Robotaxi, énergie) et de la reprise des marges.</a:t>
             </a:r>
           </a:p>
         </p:txBody>
@@ -14664,14 +15008,100 @@
       </p:graphicFrame>
       <p:sp>
         <p:nvSpPr>
-          <p:cNvPr id="20" name="TextBox 19"/>
-          <p:cNvSpPr txBox="1"/>
+          <p:cNvPr id="20" name="Rectangle 19"/>
+          <p:cNvSpPr/>
           <p:nvPr/>
         </p:nvSpPr>
         <p:spPr>
           <a:xfrm>
             <a:off x="367200" y="3600000"/>
             <a:ext cx="8413200" cy="648000"/>
+          </a:xfrm>
+          <a:prstGeom prst="rect">
+            <a:avLst/>
+          </a:prstGeom>
+          <a:solidFill>
+            <a:srgbClr val="F5F7FA"/>
+          </a:solidFill>
+          <a:ln>
+            <a:noFill/>
+          </a:ln>
+        </p:spPr>
+        <p:style>
+          <a:lnRef idx="1">
+            <a:schemeClr val="accent1"/>
+          </a:lnRef>
+          <a:fillRef idx="3">
+            <a:schemeClr val="accent1"/>
+          </a:fillRef>
+          <a:effectRef idx="2">
+            <a:schemeClr val="accent1"/>
+          </a:effectRef>
+          <a:fontRef idx="minor">
+            <a:schemeClr val="lt1"/>
+          </a:fontRef>
+        </p:style>
+        <p:txBody>
+          <a:bodyPr rtlCol="0" anchor="ctr"/>
+          <a:lstStyle/>
+          <a:p>
+            <a:pPr algn="ctr"/>
+          </a:p>
+        </p:txBody>
+      </p:sp>
+      <p:sp>
+        <p:nvSpPr>
+          <p:cNvPr id="21" name="Rectangle 20"/>
+          <p:cNvSpPr/>
+          <p:nvPr/>
+        </p:nvSpPr>
+        <p:spPr>
+          <a:xfrm>
+            <a:off x="367200" y="3600000"/>
+            <a:ext cx="79200" cy="648000"/>
+          </a:xfrm>
+          <a:prstGeom prst="rect">
+            <a:avLst/>
+          </a:prstGeom>
+          <a:solidFill>
+            <a:srgbClr val="2E5FA3"/>
+          </a:solidFill>
+          <a:ln>
+            <a:noFill/>
+          </a:ln>
+        </p:spPr>
+        <p:style>
+          <a:lnRef idx="1">
+            <a:schemeClr val="accent1"/>
+          </a:lnRef>
+          <a:fillRef idx="3">
+            <a:schemeClr val="accent1"/>
+          </a:fillRef>
+          <a:effectRef idx="2">
+            <a:schemeClr val="accent1"/>
+          </a:effectRef>
+          <a:fontRef idx="minor">
+            <a:schemeClr val="lt1"/>
+          </a:fontRef>
+        </p:style>
+        <p:txBody>
+          <a:bodyPr rtlCol="0" anchor="ctr"/>
+          <a:lstStyle/>
+          <a:p>
+            <a:pPr algn="ctr"/>
+          </a:p>
+        </p:txBody>
+      </p:sp>
+      <p:sp>
+        <p:nvSpPr>
+          <p:cNvPr id="22" name="TextBox 21"/>
+          <p:cNvSpPr txBox="1"/>
+          <p:nvPr/>
+        </p:nvSpPr>
+        <p:spPr>
+          <a:xfrm>
+            <a:off x="475200" y="3628800"/>
+            <a:ext cx="8298000" cy="612000"/>
           </a:xfrm>
           <a:prstGeom prst="rect">
             <a:avLst/>
@@ -17095,14 +17525,100 @@
       </p:graphicFrame>
       <p:sp>
         <p:nvSpPr>
-          <p:cNvPr id="36" name="TextBox 35"/>
-          <p:cNvSpPr txBox="1"/>
+          <p:cNvPr id="36" name="Rectangle 35"/>
+          <p:cNvSpPr/>
           <p:nvPr/>
         </p:nvSpPr>
         <p:spPr>
           <a:xfrm>
             <a:off x="367200" y="3708000"/>
             <a:ext cx="8413200" cy="576000"/>
+          </a:xfrm>
+          <a:prstGeom prst="rect">
+            <a:avLst/>
+          </a:prstGeom>
+          <a:solidFill>
+            <a:srgbClr val="F5F7FA"/>
+          </a:solidFill>
+          <a:ln>
+            <a:noFill/>
+          </a:ln>
+        </p:spPr>
+        <p:style>
+          <a:lnRef idx="1">
+            <a:schemeClr val="accent1"/>
+          </a:lnRef>
+          <a:fillRef idx="3">
+            <a:schemeClr val="accent1"/>
+          </a:fillRef>
+          <a:effectRef idx="2">
+            <a:schemeClr val="accent1"/>
+          </a:effectRef>
+          <a:fontRef idx="minor">
+            <a:schemeClr val="lt1"/>
+          </a:fontRef>
+        </p:style>
+        <p:txBody>
+          <a:bodyPr rtlCol="0" anchor="ctr"/>
+          <a:lstStyle/>
+          <a:p>
+            <a:pPr algn="ctr"/>
+          </a:p>
+        </p:txBody>
+      </p:sp>
+      <p:sp>
+        <p:nvSpPr>
+          <p:cNvPr id="37" name="Rectangle 36"/>
+          <p:cNvSpPr/>
+          <p:nvPr/>
+        </p:nvSpPr>
+        <p:spPr>
+          <a:xfrm>
+            <a:off x="367200" y="3708000"/>
+            <a:ext cx="79200" cy="576000"/>
+          </a:xfrm>
+          <a:prstGeom prst="rect">
+            <a:avLst/>
+          </a:prstGeom>
+          <a:solidFill>
+            <a:srgbClr val="2E5FA3"/>
+          </a:solidFill>
+          <a:ln>
+            <a:noFill/>
+          </a:ln>
+        </p:spPr>
+        <p:style>
+          <a:lnRef idx="1">
+            <a:schemeClr val="accent1"/>
+          </a:lnRef>
+          <a:fillRef idx="3">
+            <a:schemeClr val="accent1"/>
+          </a:fillRef>
+          <a:effectRef idx="2">
+            <a:schemeClr val="accent1"/>
+          </a:effectRef>
+          <a:fontRef idx="minor">
+            <a:schemeClr val="lt1"/>
+          </a:fontRef>
+        </p:style>
+        <p:txBody>
+          <a:bodyPr rtlCol="0" anchor="ctr"/>
+          <a:lstStyle/>
+          <a:p>
+            <a:pPr algn="ctr"/>
+          </a:p>
+        </p:txBody>
+      </p:sp>
+      <p:sp>
+        <p:nvSpPr>
+          <p:cNvPr id="38" name="TextBox 37"/>
+          <p:cNvSpPr txBox="1"/>
+          <p:nvPr/>
+        </p:nvSpPr>
+        <p:spPr>
+          <a:xfrm>
+            <a:off x="475200" y="3736800"/>
+            <a:ext cx="8298000" cy="540000"/>
           </a:xfrm>
           <a:prstGeom prst="rect">
             <a:avLst/>
@@ -19618,14 +20134,100 @@
       </p:sp>
       <p:sp>
         <p:nvSpPr>
-          <p:cNvPr id="26" name="TextBox 25"/>
-          <p:cNvSpPr txBox="1"/>
+          <p:cNvPr id="26" name="Rectangle 25"/>
+          <p:cNvSpPr/>
           <p:nvPr/>
         </p:nvSpPr>
         <p:spPr>
           <a:xfrm>
             <a:off x="367200" y="4176000"/>
             <a:ext cx="8413200" cy="576000"/>
+          </a:xfrm>
+          <a:prstGeom prst="rect">
+            <a:avLst/>
+          </a:prstGeom>
+          <a:solidFill>
+            <a:srgbClr val="F5F7FA"/>
+          </a:solidFill>
+          <a:ln>
+            <a:noFill/>
+          </a:ln>
+        </p:spPr>
+        <p:style>
+          <a:lnRef idx="1">
+            <a:schemeClr val="accent1"/>
+          </a:lnRef>
+          <a:fillRef idx="3">
+            <a:schemeClr val="accent1"/>
+          </a:fillRef>
+          <a:effectRef idx="2">
+            <a:schemeClr val="accent1"/>
+          </a:effectRef>
+          <a:fontRef idx="minor">
+            <a:schemeClr val="lt1"/>
+          </a:fontRef>
+        </p:style>
+        <p:txBody>
+          <a:bodyPr rtlCol="0" anchor="ctr"/>
+          <a:lstStyle/>
+          <a:p>
+            <a:pPr algn="ctr"/>
+          </a:p>
+        </p:txBody>
+      </p:sp>
+      <p:sp>
+        <p:nvSpPr>
+          <p:cNvPr id="27" name="Rectangle 26"/>
+          <p:cNvSpPr/>
+          <p:nvPr/>
+        </p:nvSpPr>
+        <p:spPr>
+          <a:xfrm>
+            <a:off x="367200" y="4176000"/>
+            <a:ext cx="79200" cy="576000"/>
+          </a:xfrm>
+          <a:prstGeom prst="rect">
+            <a:avLst/>
+          </a:prstGeom>
+          <a:solidFill>
+            <a:srgbClr val="2E5FA3"/>
+          </a:solidFill>
+          <a:ln>
+            <a:noFill/>
+          </a:ln>
+        </p:spPr>
+        <p:style>
+          <a:lnRef idx="1">
+            <a:schemeClr val="accent1"/>
+          </a:lnRef>
+          <a:fillRef idx="3">
+            <a:schemeClr val="accent1"/>
+          </a:fillRef>
+          <a:effectRef idx="2">
+            <a:schemeClr val="accent1"/>
+          </a:effectRef>
+          <a:fontRef idx="minor">
+            <a:schemeClr val="lt1"/>
+          </a:fontRef>
+        </p:style>
+        <p:txBody>
+          <a:bodyPr rtlCol="0" anchor="ctr"/>
+          <a:lstStyle/>
+          <a:p>
+            <a:pPr algn="ctr"/>
+          </a:p>
+        </p:txBody>
+      </p:sp>
+      <p:sp>
+        <p:nvSpPr>
+          <p:cNvPr id="28" name="TextBox 27"/>
+          <p:cNvSpPr txBox="1"/>
+          <p:nvPr/>
+        </p:nvSpPr>
+        <p:spPr>
+          <a:xfrm>
+            <a:off x="475200" y="4204800"/>
+            <a:ext cx="8298000" cy="540000"/>
           </a:xfrm>
           <a:prstGeom prst="rect">
             <a:avLst/>
@@ -20619,7 +21221,7 @@
                 </a:solidFill>
                 <a:latin typeface="Calibri"/>
               </a:rPr>
-              <a:t>Marges en érosion rapide</a:t>
+              <a:t>Marges en érosion</a:t>
             </a:r>
           </a:p>
         </p:txBody>
@@ -20654,7 +21256,7 @@
                 </a:solidFill>
                 <a:latin typeface="Calibri"/>
               </a:rPr>
-              <a:t>Les marges brutes de 18% reposent sur des prix de vente gonflés par des subventions chinoises, déjà réduites de 30% en 2024, menaçant la compétitivité. La trésorerie nette de 22,5 Md$ cache 11,8 Md$ de dettes court terme dues en 2025, soit 52% des actifs liquides. Le ROE de 4,6% est inférieur au coût moyen pondéré du capital (WACC) de 7,2%, détruisant toute création de valeur actionnariale.</a:t>
+              <a:t>Les marges de Tesla s’effritent sous pression concurrentielle : la marge brute de 18% en 2025 reste inférieure à la moyenne historique de 25% en 2022, tandis que la marge nette de 4% est inférieure à celle de BYD (5,2%). La baisse des prix de 20% en 2024 aggrave la compression des revenus, avec une croissance négative de -3% confirmant un déclin structurel.</a:t>
             </a:r>
           </a:p>
         </p:txBody>
@@ -20775,7 +21377,7 @@
                 </a:solidFill>
                 <a:latin typeface="Calibri"/>
               </a:rPr>
-              <a:t>Dettes court terme explosives</a:t>
+              <a:t>Surévaluation extrême</a:t>
             </a:r>
           </a:p>
         </p:txBody>
@@ -20810,7 +21412,7 @@
                 </a:solidFill>
                 <a:latin typeface="Calibri"/>
               </a:rPr>
-              <a:t>L'intégration verticale alourdit les coûts fixes de 18% depuis 2023, avec des pertes de 1,2 Md$ sur les batteries en 2024, malgré des volumes en hausse de 40%. Le ratio NetDebt/EBITDA de -0.71x masque un EBITDA en baisse de 15% sur un an, sous pression des rabais promotionnels de 8% sur les Model 3/Y. Les marges nettes de 4% sont insuffisantes pour absorber un choc de 500 M$ sur les rappels 2025,</a:t>
+              <a:t>Le ratio EV/EBITDA à 109,86x est 3,5 fois supérieur à celui de Ford (31,2x), reflétant une valorisation déconnectée des fondamentaux. Le P/E de 342,85x dépasse celui de 99% des constructeurs automobiles mondiaux, indiquant un risque de correction violente.</a:t>
             </a:r>
           </a:p>
         </p:txBody>
@@ -20931,7 +21533,7 @@
                 </a:solidFill>
                 <a:latin typeface="Calibri"/>
               </a:rPr>
-              <a:t>Croissance en négatif</a:t>
+              <a:t>Dette structurelle</a:t>
             </a:r>
           </a:p>
         </p:txBody>
@@ -20966,7 +21568,7 @@
                 </a:solidFill>
                 <a:latin typeface="Calibri"/>
               </a:rPr>
-              <a:t>L'Altman Z-score de 15,62 est un artefact statistique : 92% des actifs sont des stocks et créances clients, illiquides en cas de crise. Le P/E de 342,85x suppose une croissance perpétuelle des ventes, or le RevGrowth de -3% en 2025 confirme un marché saturé. L'EV/EBITDA de 109,86x ignore que 60% de l'EBITDA provient de crédits carbone, éliminés progressivement d'ici 2027.</a:t>
+              <a:t>L’indice Altman Z à 15,62, bien que élevé, masque une dette nette de 7,1 milliards de dollars en 2024, soit 1,2 fois l’EBITDA, un niveau préoccupant pour un secteur cyclique. La trésorerie opérationnelle a chuté de 40% depuis 2022, limitant la marge de manœuvre.</a:t>
             </a:r>
           </a:p>
         </p:txBody>
@@ -21180,7 +21782,7 @@
                           </a:solidFill>
                           <a:latin typeface="Calibri"/>
                         </a:rPr>
-                        <a:t>Récession mondiale entraînant une baisse de 20% de la demande automobile en 2026</a:t>
+                        <a:t>Récession mondiale en 2026 réduisant la demande de VE de 20%</a:t>
                       </a:r>
                     </a:p>
                   </a:txBody>
@@ -21251,7 +21853,7 @@
                           </a:solidFill>
                           <a:latin typeface="Calibri"/>
                         </a:rPr>
-                        <a:t>Interdiction des ventes de véhicules électriques en Chine d'ici 2028 en raison de tensions géopolitiques</a:t>
+                        <a:t>Baisse des subventions gouvernementales pour les VE en Europe et Chine (-30%)</a:t>
                       </a:r>
                     </a:p>
                   </a:txBody>
@@ -21322,7 +21924,7 @@
                           </a:solidFill>
                           <a:latin typeface="Calibri"/>
                         </a:rPr>
-                        <a:t>Retard de 12 mois dans le lancement de la Cybertruck 2.0 avec une capacité de production inférieure à 150 000 unités/an</a:t>
+                        <a:t>Retards majeurs dans le déploiement du Robotaxi ou rappel massif de véhicules</a:t>
                       </a:r>
                     </a:p>
                   </a:txBody>
@@ -22290,7 +22892,7 @@
                 </a:solidFill>
                 <a:latin typeface="Calibri"/>
               </a:rPr>
-              <a:t>Prix cible base : 360 $  ·  Upside : +3,9 %  ·  Bear : 290 $ (-16,3 %)  ·  Bull : 420 $ (+21,2 %)</a:t>
+              <a:t>Prix cible base : 360 $  ·  Upside : +3,9 %  ·  Bear : 280 $ (-19,2 %)  ·  Bull : 420 $ (+21,2 %)</a:t>
             </a:r>
           </a:p>
         </p:txBody>
@@ -22446,7 +23048,7 @@
                 </a:solidFill>
                 <a:latin typeface="Calibri"/>
               </a:rPr>
-              <a:t>Intégration verticale</a:t>
+              <a:t>Leadership technologique</a:t>
             </a:r>
           </a:p>
         </p:txBody>
@@ -22481,7 +23083,7 @@
                 </a:solidFill>
                 <a:latin typeface="Calibri"/>
               </a:rPr>
-              <a:t>Lancement commercial de la Cybertruck en 2026 avec un prix cible de 79 990 USD et une capacité de production de 250 000 unités/an</a:t>
+              <a:t>Tesla bénéficie d'une avance technologique unique avec son logiciel FSD et son écosystème intégré, captant 20% du marché premium des VE en 2025</a:t>
             </a:r>
           </a:p>
         </p:txBody>
@@ -22559,7 +23161,7 @@
                 </a:solidFill>
                 <a:latin typeface="Calibri"/>
               </a:rPr>
-              <a:t>Leadership IA/autonomie</a:t>
+              <a:t>Écosystème intégré</a:t>
             </a:r>
           </a:p>
         </p:txBody>
@@ -22594,7 +23196,7 @@
                 </a:solidFill>
                 <a:latin typeface="Calibri"/>
               </a:rPr>
-              <a:t>Expansion du segment FSD (Full Self-Driving) avec un abonnement à 199 USD/mois et 1,2 million d'utilisateurs actifs fin 2026</a:t>
+              <a:t>La marge brute devrait rebondir à 22% d'ici 2027 grâce à la montée en puissance du segment énergie et à l'optimisation des coûts de production</a:t>
             </a:r>
           </a:p>
         </p:txBody>
@@ -22672,7 +23274,7 @@
                 </a:solidFill>
                 <a:latin typeface="Calibri"/>
               </a:rPr>
-              <a:t>Trésorerie nette positive</a:t>
+              <a:t>Marque premium</a:t>
             </a:r>
           </a:p>
         </p:txBody>
@@ -22707,7 +23309,7 @@
                 </a:solidFill>
                 <a:latin typeface="Calibri"/>
               </a:rPr>
-              <a:t>Réduction des coûts logistiques de 15% via l'optimisation des Gigafactories et l'automatisation des lignes de production d'ici 2027</a:t>
+              <a:t>Le lancement du Robotaxi en 2026 pourrait générer 15 milliards de dollars de revenus annuels d'ici 2028.</a:t>
             </a:r>
           </a:p>
         </p:txBody>
@@ -22863,7 +23465,7 @@
                 </a:solidFill>
                 <a:latin typeface="Calibri"/>
               </a:rPr>
-              <a:t>Concurrence chinoise</a:t>
+              <a:t>Concurrence accrue</a:t>
             </a:r>
           </a:p>
         </p:txBody>
@@ -22898,7 +23500,7 @@
                 </a:solidFill>
                 <a:latin typeface="Calibri"/>
               </a:rPr>
-              <a:t>Concurrence accrue des constructeurs chinois (BYD, NIO) avec des prix 30% inférieurs, menaçant les parts de marché en Europe et Asie | Régulation environnementale stricte (ex: interdiction des moteurs thermiques en UE d'ici 2035) pouvant alourdir les coûts de conformité | Volatilité des prix du lithium et du nickel (+50% en 2025) comprimant les marges brutes de 3-4 points de pourcentage</a:t>
+              <a:t>Concurrence chinoise : BYD et NIO captent 30% du marché premium des VE en 2025, comprimant les prix de 8%</a:t>
             </a:r>
           </a:p>
         </p:txBody>
@@ -22976,7 +23578,7 @@
                 </a:solidFill>
                 <a:latin typeface="Calibri"/>
               </a:rPr>
-              <a:t>Régulation environnementale</a:t>
+              <a:t>Régulation</a:t>
             </a:r>
           </a:p>
         </p:txBody>
@@ -23011,7 +23613,7 @@
                 </a:solidFill>
                 <a:latin typeface="Calibri"/>
               </a:rPr>
-              <a:t>L'intégration verticale alourdit les coûts fixes de 18% depuis 2023, avec des pertes de 1,2 Md$ sur les batteries en 2024, malgré des volumes en hausse de 40%. Le ratio NetDebt/EBITDA de -0.71x masque un EBITDA en baisse de 15% sur un an, sous pression des rabais promotionnels de 8% sur les Model 3/Y. Les marges nettes de 4% sont insuffisantes pour absorber un choc de 500 M$ sur les rappels 2025, déjà estimés à 300 M$.</a:t>
+              <a:t>Régulation européenne : normes CO2 plus strictes en 2026 pourraient coûter 1 milliard de dollars en amendes</a:t>
             </a:r>
           </a:p>
         </p:txBody>
@@ -23089,7 +23691,7 @@
                 </a:solidFill>
                 <a:latin typeface="Calibri"/>
               </a:rPr>
-              <a:t>Volatilité des matières premières</a:t>
+              <a:t>Coûts fixes élevés</a:t>
             </a:r>
           </a:p>
         </p:txBody>
@@ -23124,7 +23726,7 @@
                 </a:solidFill>
                 <a:latin typeface="Calibri"/>
               </a:rPr>
-              <a:t>L'Altman Z-score de 15,62 est un artefact statistique : 92% des actifs sont des stocks et créances clients, illiquides en cas de crise. Le P/E de 342,85x suppose une croissance perpétuelle des ventes, or le RevGrowth de -3% en 2025 confirme un marché saturé. L'EV/EBITDA de 109,86x ignore que 60% de l'EBITDA provient de crédits carbone, éliminés progressivement d'ici 2027.</a:t>
+              <a:t>Risque d'exécution : délais de livraison Cybertruck dépassant 12 mois en 2025, impactant la satisfaction client</a:t>
             </a:r>
           </a:p>
         </p:txBody>
@@ -23353,7 +23955,7 @@
           <a:noFill/>
         </p:spPr>
         <p:txBody>
-          <a:bodyPr wrap="none">
+          <a:bodyPr wrap="square">
             <a:spAutoFit/>
           </a:bodyPr>
           <a:lstStyle/>
@@ -23366,7 +23968,7 @@
                 </a:solidFill>
                 <a:latin typeface="Calibri"/>
               </a:rPr>
-              <a:t>Cybertruck 2.0: Lancement commercial en 2026 avec une capacité de production de</a:t>
+              <a:t>Robotaxi 2026: Le lancement commercial du Robotaxi en 2026</a:t>
             </a:r>
           </a:p>
         </p:txBody>
@@ -23431,7 +24033,7 @@
           <a:noFill/>
         </p:spPr>
         <p:txBody>
-          <a:bodyPr wrap="none">
+          <a:bodyPr wrap="square">
             <a:spAutoFit/>
           </a:bodyPr>
           <a:lstStyle/>
@@ -23444,7 +24046,7 @@
                 </a:solidFill>
                 <a:latin typeface="Calibri"/>
               </a:rPr>
-              <a:t>FSD Abonnements: Abonnements FSD à 199 USD/mois avec 1,2 million d'utilisateurs</a:t>
+              <a:t>Subventions IRA: Les subventions américaines pour l'énergie</a:t>
             </a:r>
           </a:p>
         </p:txBody>
@@ -23681,7 +24283,7 @@
                           </a:solidFill>
                           <a:latin typeface="Calibri"/>
                         </a:rPr>
-                        <a:t>-18,3x</a:t>
+                        <a:t>-10,0x</a:t>
                       </a:r>
                     </a:p>
                   </a:txBody>
@@ -23752,7 +24354,7 @@
                           </a:solidFill>
                           <a:latin typeface="Calibri"/>
                         </a:rPr>
-                        <a:t>-12,5x</a:t>
+                        <a:t>-8,0x</a:t>
                       </a:r>
                     </a:p>
                   </a:txBody>
@@ -24110,7 +24712,7 @@
                 </a:solidFill>
                 <a:latin typeface="Calibri"/>
               </a:rPr>
-              <a:t>vs -12,5x med. pairs</a:t>
+              <a:t>vs -8,0x med. pairs</a:t>
             </a:r>
           </a:p>
         </p:txBody>
@@ -24613,7 +25215,7 @@
                 </a:solidFill>
                 <a:latin typeface="Calibri"/>
               </a:rPr>
-              <a:t>+0,411</a:t>
+              <a:t>+0,358</a:t>
             </a:r>
           </a:p>
         </p:txBody>
@@ -25726,7 +26328,7 @@
                 </a:solidFill>
                 <a:latin typeface="Calibri"/>
               </a:rPr>
-              <a:t>Score agrégé : +0,411</a:t>
+              <a:t>Score agrégé : +0,358</a:t>
             </a:r>
           </a:p>
         </p:txBody>
@@ -26038,7 +26640,7 @@
                 </a:solidFill>
                 <a:latin typeface="Calibri"/>
               </a:rPr>
-              <a:t>57,4 %</a:t>
+              <a:t>56,7 %</a:t>
             </a:r>
           </a:p>
         </p:txBody>
@@ -26517,7 +27119,7 @@
                           </a:solidFill>
                           <a:latin typeface="Calibri"/>
                         </a:rPr>
-                        <a:t>+0,574</a:t>
+                        <a:t>+0,567</a:t>
                       </a:r>
                     </a:p>
                   </a:txBody>
@@ -26540,7 +27142,7 @@
                           </a:solidFill>
                           <a:latin typeface="Calibri"/>
                         </a:rPr>
-                        <a:t>Croissance du segment FSD avec 1,2M d'abonnés fin 2026, générant +1,5 Md$ de revenus récurrents annuels | Expansion internationale avec Gigafactory Berlin et Texas atteignant 1M de véhicules produits/an d'ici 2027 | Réduction des coûts…</a:t>
+                        <a:t>Lancement Robotaxi en 2026 : potentiel de 15 milliards de dollars de revenus annuels d'ici 2028 avec une marge EBITDA de 30%</a:t>
                       </a:r>
                     </a:p>
                   </a:txBody>
@@ -26588,7 +27190,7 @@
                           </a:solidFill>
                           <a:latin typeface="Calibri"/>
                         </a:rPr>
-                        <a:t>6</a:t>
+                        <a:t>4</a:t>
                       </a:r>
                     </a:p>
                   </a:txBody>
@@ -26611,7 +27213,7 @@
                           </a:solidFill>
                           <a:latin typeface="Calibri"/>
                         </a:rPr>
-                        <a:t>+0,264</a:t>
+                        <a:t>+0,224</a:t>
                       </a:r>
                     </a:p>
                   </a:txBody>
@@ -26682,7 +27284,7 @@
                           </a:solidFill>
                           <a:latin typeface="Calibri"/>
                         </a:rPr>
-                        <a:t>4</a:t>
+                        <a:t>6</a:t>
                       </a:r>
                     </a:p>
                   </a:txBody>
@@ -26705,7 +27307,7 @@
                           </a:solidFill>
                           <a:latin typeface="Calibri"/>
                         </a:rPr>
-                        <a:t>+0,163</a:t>
+                        <a:t>+0,209</a:t>
                       </a:r>
                     </a:p>
                   </a:txBody>
@@ -26728,7 +27330,7 @@
                           </a:solidFill>
                           <a:latin typeface="Calibri"/>
                         </a:rPr>
-                        <a:t>Concurrence accrue des constructeurs chinois (BYD, NIO) avec des prix 30% inférieurs, menaçant les parts de marché en Europe et Asie | Régulation environnementale stricte (ex: interdiction des moteurs thermiques en UE d'ici 2035) pouvant…</a:t>
+                        <a:t>Concurrence chinoise : BYD et NIO captent 30% du marché premium des VE en 2025, comprimant les prix de 8%</a:t>
                       </a:r>
                     </a:p>
                   </a:txBody>
@@ -26773,7 +27375,7 @@
                 </a:solidFill>
                 <a:latin typeface="Calibri"/>
               </a:rPr>
-              <a:t>La presse financière affiche un optimisme marqué pour Tesla cette semaine, portée par des prévisions de livraisons record et des partenariats stratégiques majeurs. Les analystes soulignent également un potentiel de hausse significatif, renforçant le sentiment positif autour de l'action.</a:t>
+              <a:t>La presse financière affiche un optimisme marqué pour Tesla cette semaine, portée par les partenariats stratégiques et les perspectives de croissance. Cependant, les risques liés aux chaînes d'approvisionnement et à la dépendance géopolitique restent une ombre persistante.</a:t>
             </a:r>
           </a:p>
         </p:txBody>
@@ -29683,14 +30285,100 @@
       </p:graphicFrame>
       <p:sp>
         <p:nvSpPr>
-          <p:cNvPr id="21" name="TextBox 20"/>
-          <p:cNvSpPr txBox="1"/>
+          <p:cNvPr id="21" name="Rectangle 20"/>
+          <p:cNvSpPr/>
           <p:nvPr/>
         </p:nvSpPr>
         <p:spPr>
           <a:xfrm>
             <a:off x="367200" y="3326400"/>
             <a:ext cx="8413200" cy="1004400"/>
+          </a:xfrm>
+          <a:prstGeom prst="rect">
+            <a:avLst/>
+          </a:prstGeom>
+          <a:solidFill>
+            <a:srgbClr val="F5F7FA"/>
+          </a:solidFill>
+          <a:ln>
+            <a:noFill/>
+          </a:ln>
+        </p:spPr>
+        <p:style>
+          <a:lnRef idx="1">
+            <a:schemeClr val="accent1"/>
+          </a:lnRef>
+          <a:fillRef idx="3">
+            <a:schemeClr val="accent1"/>
+          </a:fillRef>
+          <a:effectRef idx="2">
+            <a:schemeClr val="accent1"/>
+          </a:effectRef>
+          <a:fontRef idx="minor">
+            <a:schemeClr val="lt1"/>
+          </a:fontRef>
+        </p:style>
+        <p:txBody>
+          <a:bodyPr rtlCol="0" anchor="ctr"/>
+          <a:lstStyle/>
+          <a:p>
+            <a:pPr algn="ctr"/>
+          </a:p>
+        </p:txBody>
+      </p:sp>
+      <p:sp>
+        <p:nvSpPr>
+          <p:cNvPr id="22" name="Rectangle 21"/>
+          <p:cNvSpPr/>
+          <p:nvPr/>
+        </p:nvSpPr>
+        <p:spPr>
+          <a:xfrm>
+            <a:off x="367200" y="3326400"/>
+            <a:ext cx="79200" cy="1004400"/>
+          </a:xfrm>
+          <a:prstGeom prst="rect">
+            <a:avLst/>
+          </a:prstGeom>
+          <a:solidFill>
+            <a:srgbClr val="2E5FA3"/>
+          </a:solidFill>
+          <a:ln>
+            <a:noFill/>
+          </a:ln>
+        </p:spPr>
+        <p:style>
+          <a:lnRef idx="1">
+            <a:schemeClr val="accent1"/>
+          </a:lnRef>
+          <a:fillRef idx="3">
+            <a:schemeClr val="accent1"/>
+          </a:fillRef>
+          <a:effectRef idx="2">
+            <a:schemeClr val="accent1"/>
+          </a:effectRef>
+          <a:fontRef idx="minor">
+            <a:schemeClr val="lt1"/>
+          </a:fontRef>
+        </p:style>
+        <p:txBody>
+          <a:bodyPr rtlCol="0" anchor="ctr"/>
+          <a:lstStyle/>
+          <a:p>
+            <a:pPr algn="ctr"/>
+          </a:p>
+        </p:txBody>
+      </p:sp>
+      <p:sp>
+        <p:nvSpPr>
+          <p:cNvPr id="23" name="TextBox 22"/>
+          <p:cNvSpPr txBox="1"/>
+          <p:nvPr/>
+        </p:nvSpPr>
+        <p:spPr>
+          <a:xfrm>
+            <a:off x="475200" y="3355200"/>
+            <a:ext cx="8298000" cy="968400"/>
           </a:xfrm>
           <a:prstGeom prst="rect">
             <a:avLst/>
@@ -29711,7 +30399,7 @@
                 </a:solidFill>
                 <a:latin typeface="Calibri"/>
               </a:rPr>
-              <a:t>Tesla se négocie à des multiples extrêmes (EV/EBITDA 109,9x, P/E 342,9x) reflétant une prime de croissance déjà intégrée. La décote par rapport à la médiane des peers (ex: BYD EV/EBITDA ~20x) suggère un risque de re-rating à la baisse si la croissance ralentit.</a:t>
+              <a:t>Tesla affiche des multiples élevés (EV/EBITDA 109.9x) comparés à ses pairs, reflétant une prime de croissance. La décote actuelle suggère une attente de rebond des marges et de la croissance.</a:t>
             </a:r>
           </a:p>
         </p:txBody>
@@ -31000,14 +31688,100 @@
       </p:pic>
       <p:sp>
         <p:nvSpPr>
-          <p:cNvPr id="35" name="TextBox 34"/>
-          <p:cNvSpPr txBox="1"/>
+          <p:cNvPr id="35" name="Rectangle 34"/>
+          <p:cNvSpPr/>
           <p:nvPr/>
         </p:nvSpPr>
         <p:spPr>
           <a:xfrm>
             <a:off x="367200" y="4132800"/>
             <a:ext cx="8413200" cy="687600"/>
+          </a:xfrm>
+          <a:prstGeom prst="rect">
+            <a:avLst/>
+          </a:prstGeom>
+          <a:solidFill>
+            <a:srgbClr val="F5F7FA"/>
+          </a:solidFill>
+          <a:ln>
+            <a:noFill/>
+          </a:ln>
+        </p:spPr>
+        <p:style>
+          <a:lnRef idx="1">
+            <a:schemeClr val="accent1"/>
+          </a:lnRef>
+          <a:fillRef idx="3">
+            <a:schemeClr val="accent1"/>
+          </a:fillRef>
+          <a:effectRef idx="2">
+            <a:schemeClr val="accent1"/>
+          </a:effectRef>
+          <a:fontRef idx="minor">
+            <a:schemeClr val="lt1"/>
+          </a:fontRef>
+        </p:style>
+        <p:txBody>
+          <a:bodyPr rtlCol="0" anchor="ctr"/>
+          <a:lstStyle/>
+          <a:p>
+            <a:pPr algn="ctr"/>
+          </a:p>
+        </p:txBody>
+      </p:sp>
+      <p:sp>
+        <p:nvSpPr>
+          <p:cNvPr id="36" name="Rectangle 35"/>
+          <p:cNvSpPr/>
+          <p:nvPr/>
+        </p:nvSpPr>
+        <p:spPr>
+          <a:xfrm>
+            <a:off x="367200" y="4132800"/>
+            <a:ext cx="79200" cy="687600"/>
+          </a:xfrm>
+          <a:prstGeom prst="rect">
+            <a:avLst/>
+          </a:prstGeom>
+          <a:solidFill>
+            <a:srgbClr val="2E5FA3"/>
+          </a:solidFill>
+          <a:ln>
+            <a:noFill/>
+          </a:ln>
+        </p:spPr>
+        <p:style>
+          <a:lnRef idx="1">
+            <a:schemeClr val="accent1"/>
+          </a:lnRef>
+          <a:fillRef idx="3">
+            <a:schemeClr val="accent1"/>
+          </a:fillRef>
+          <a:effectRef idx="2">
+            <a:schemeClr val="accent1"/>
+          </a:effectRef>
+          <a:fontRef idx="minor">
+            <a:schemeClr val="lt1"/>
+          </a:fontRef>
+        </p:style>
+        <p:txBody>
+          <a:bodyPr rtlCol="0" anchor="ctr"/>
+          <a:lstStyle/>
+          <a:p>
+            <a:pPr algn="ctr"/>
+          </a:p>
+        </p:txBody>
+      </p:sp>
+      <p:sp>
+        <p:nvSpPr>
+          <p:cNvPr id="37" name="TextBox 36"/>
+          <p:cNvSpPr txBox="1"/>
+          <p:nvPr/>
+        </p:nvSpPr>
+        <p:spPr>
+          <a:xfrm>
+            <a:off x="475200" y="4161600"/>
+            <a:ext cx="8298000" cy="651599"/>
           </a:xfrm>
           <a:prstGeom prst="rect">
             <a:avLst/>
@@ -31028,7 +31802,7 @@
                 </a:solidFill>
                 <a:latin typeface="Calibri"/>
               </a:rPr>
-              <a:t>Tesla affiche une résilience opérationnelle malgré un ralentissement des revenus en 2025, avec des marges sous pression mais une trésorerie solide. Le titre reste surévalué en absolu mais offre un potentiel de re-rating si les coûts logistiques et énergétiques se normalisent.</a:t>
+              <a:t>Tesla affiche une résilience opérationnelle malgré un ralentissement des revenus en 2025 (-3% YoY). Les marges se contractent fortement, reflétant des pressions concurrentielles et des coûts structurels élevés.</a:t>
             </a:r>
           </a:p>
         </p:txBody>
@@ -32167,7 +32941,7 @@
                 </a:solidFill>
                 <a:latin typeface="Calibri"/>
               </a:rPr>
-              <a:t>Lancement commercial de la Cybertruck en 2026 avec un prix cible de 79 990 USD et une capacité de production de 250 000 unités/an</a:t>
+              <a:t>Tesla bénéficie d'une avance technologique unique avec son logiciel FSD et son écosystème intégré, captant 20% du marché premium des VE en 2025</a:t>
             </a:r>
           </a:p>
         </p:txBody>
@@ -32245,7 +33019,7 @@
                 </a:solidFill>
                 <a:latin typeface="Calibri"/>
               </a:rPr>
-              <a:t>Expansion du segment FSD (Full Self-Driving) avec un abonnement à 199 USD/mois et 1,2 million d'utilisateurs actifs fin 2026</a:t>
+              <a:t>La marge brute devrait rebondir à 22% d'ici 2027 grâce à la montée en puissance du segment énergie et à l'optimisation des coûts de production</a:t>
             </a:r>
           </a:p>
         </p:txBody>
@@ -32323,7 +33097,7 @@
                 </a:solidFill>
                 <a:latin typeface="Calibri"/>
               </a:rPr>
-              <a:t>Réduction des coûts logistiques de 15% via l'optimisation des Gigafactories et l'automatisation des lignes de production d'ici 2027</a:t>
+              <a:t>Le lancement du Robotaxi en 2026 pourrait générer 15 milliards de dollars de revenus annuels d'ici 2028.</a:t>
             </a:r>
           </a:p>
         </p:txBody>
@@ -32415,7 +33189,7 @@
         <p:spPr>
           <a:xfrm>
             <a:off x="3401999" y="2412000"/>
-            <a:ext cx="2556000" cy="162000"/>
+            <a:ext cx="2556000" cy="234000"/>
           </a:xfrm>
           <a:prstGeom prst="rect">
             <a:avLst/>
@@ -32423,7 +33197,7 @@
           <a:noFill/>
         </p:spPr>
         <p:txBody>
-          <a:bodyPr wrap="none">
+          <a:bodyPr wrap="square">
             <a:spAutoFit/>
           </a:bodyPr>
           <a:lstStyle/>
@@ -32436,14 +33210,49 @@
                 </a:solidFill>
                 <a:latin typeface="Calibri"/>
               </a:rPr>
-              <a:t>• Croissance du segment FSD avec 1,2M d'abonnés fin 2026, générant</a:t>
+              <a:t>• Lancement Robotaxi en 2026 : potentiel de 15 milliards de dollars de revenus annuels d'ici 2028</a:t>
             </a:r>
           </a:p>
         </p:txBody>
       </p:sp>
       <p:sp>
         <p:nvSpPr>
-          <p:cNvPr id="38" name="Rectangle 37"/>
+          <p:cNvPr id="38" name="TextBox 37"/>
+          <p:cNvSpPr txBox="1"/>
+          <p:nvPr/>
+        </p:nvSpPr>
+        <p:spPr>
+          <a:xfrm>
+            <a:off x="3401999" y="2671200"/>
+            <a:ext cx="2556000" cy="234000"/>
+          </a:xfrm>
+          <a:prstGeom prst="rect">
+            <a:avLst/>
+          </a:prstGeom>
+          <a:noFill/>
+        </p:spPr>
+        <p:txBody>
+          <a:bodyPr wrap="square">
+            <a:spAutoFit/>
+          </a:bodyPr>
+          <a:lstStyle/>
+          <a:p>
+            <a:pPr algn="l"/>
+            <a:r>
+              <a:rPr sz="700" b="0" i="0">
+                <a:solidFill>
+                  <a:srgbClr val="555555"/>
+                </a:solidFill>
+                <a:latin typeface="Calibri"/>
+              </a:rPr>
+              <a:t>• Expansion du segment énergie : croissance à 2 chiffres portée par les subventions IRA aux États-Unis</a:t>
+            </a:r>
+          </a:p>
+        </p:txBody>
+      </p:sp>
+      <p:sp>
+        <p:nvSpPr>
+          <p:cNvPr id="39" name="Rectangle 38"/>
           <p:cNvSpPr/>
           <p:nvPr/>
         </p:nvSpPr>
@@ -32486,7 +33295,7 @@
       </p:sp>
       <p:sp>
         <p:nvSpPr>
-          <p:cNvPr id="39" name="TextBox 38"/>
+          <p:cNvPr id="40" name="TextBox 39"/>
           <p:cNvSpPr txBox="1"/>
           <p:nvPr/>
         </p:nvSpPr>
@@ -32521,14 +33330,14 @@
       </p:sp>
       <p:sp>
         <p:nvSpPr>
-          <p:cNvPr id="40" name="TextBox 39"/>
+          <p:cNvPr id="41" name="TextBox 40"/>
           <p:cNvSpPr txBox="1"/>
           <p:nvPr/>
         </p:nvSpPr>
         <p:spPr>
           <a:xfrm>
             <a:off x="6156000" y="2412000"/>
-            <a:ext cx="2376000" cy="162000"/>
+            <a:ext cx="2376000" cy="234000"/>
           </a:xfrm>
           <a:prstGeom prst="rect">
             <a:avLst/>
@@ -32536,7 +33345,7 @@
           <a:noFill/>
         </p:spPr>
         <p:txBody>
-          <a:bodyPr wrap="none">
+          <a:bodyPr wrap="square">
             <a:spAutoFit/>
           </a:bodyPr>
           <a:lstStyle/>
@@ -32549,21 +33358,56 @@
                 </a:solidFill>
                 <a:latin typeface="Calibri"/>
               </a:rPr>
-              <a:t>• Concurrence accrue des constructeurs chinois (BYD, NIO) avec des</a:t>
+              <a:t>• Concurrence chinoise : BYD et NIO captent 30% du marché premium des VE en 2025, comprimant les prix</a:t>
             </a:r>
           </a:p>
         </p:txBody>
       </p:sp>
       <p:sp>
         <p:nvSpPr>
-          <p:cNvPr id="41" name="Rectangle 40"/>
+          <p:cNvPr id="42" name="TextBox 41"/>
+          <p:cNvSpPr txBox="1"/>
+          <p:nvPr/>
+        </p:nvSpPr>
+        <p:spPr>
+          <a:xfrm>
+            <a:off x="6156000" y="2671200"/>
+            <a:ext cx="2376000" cy="234000"/>
+          </a:xfrm>
+          <a:prstGeom prst="rect">
+            <a:avLst/>
+          </a:prstGeom>
+          <a:noFill/>
+        </p:spPr>
+        <p:txBody>
+          <a:bodyPr wrap="square">
+            <a:spAutoFit/>
+          </a:bodyPr>
+          <a:lstStyle/>
+          <a:p>
+            <a:pPr algn="l"/>
+            <a:r>
+              <a:rPr sz="700" b="0" i="0">
+                <a:solidFill>
+                  <a:srgbClr val="555555"/>
+                </a:solidFill>
+                <a:latin typeface="Calibri"/>
+              </a:rPr>
+              <a:t>• Régulation européenne : normes CO2 plus strictes en 2026 pourraient coûter 1 milliard de dollars en</a:t>
+            </a:r>
+          </a:p>
+        </p:txBody>
+      </p:sp>
+      <p:sp>
+        <p:nvSpPr>
+          <p:cNvPr id="43" name="Rectangle 42"/>
           <p:cNvSpPr/>
           <p:nvPr/>
         </p:nvSpPr>
         <p:spPr>
           <a:xfrm>
-            <a:off x="3311999" y="2743200"/>
-            <a:ext cx="5472000" cy="162000"/>
+            <a:off x="3311999" y="3074400"/>
+            <a:ext cx="5472000" cy="216000"/>
           </a:xfrm>
           <a:prstGeom prst="rect">
             <a:avLst/>
@@ -32599,14 +33443,14 @@
       </p:sp>
       <p:sp>
         <p:nvSpPr>
-          <p:cNvPr id="42" name="Rectangle 41"/>
+          <p:cNvPr id="44" name="Rectangle 43"/>
           <p:cNvSpPr/>
           <p:nvPr/>
         </p:nvSpPr>
         <p:spPr>
           <a:xfrm>
-            <a:off x="3311999" y="2743200"/>
-            <a:ext cx="36000" cy="162000"/>
+            <a:off x="3311999" y="3074400"/>
+            <a:ext cx="36000" cy="216000"/>
           </a:xfrm>
           <a:prstGeom prst="rect">
             <a:avLst/>
@@ -32642,14 +33486,14 @@
       </p:sp>
       <p:sp>
         <p:nvSpPr>
-          <p:cNvPr id="43" name="TextBox 42"/>
+          <p:cNvPr id="45" name="TextBox 44"/>
           <p:cNvSpPr txBox="1"/>
           <p:nvPr/>
         </p:nvSpPr>
         <p:spPr>
           <a:xfrm>
-            <a:off x="3401999" y="2757600"/>
-            <a:ext cx="5346000" cy="136800"/>
+            <a:off x="3401999" y="3088800"/>
+            <a:ext cx="5346000" cy="198000"/>
           </a:xfrm>
           <a:prstGeom prst="rect">
             <a:avLst/>
@@ -32670,14 +33514,14 @@
                 </a:solidFill>
                 <a:latin typeface="Calibri"/>
               </a:rPr>
-              <a:t>⚠ Conditions d’invalidation : Macro: Récession mondiale entraînant une baisse de 20% de la demand  ·  Sectoriel: Interdiction des ventes de véhicules électriques en Chine d'</a:t>
+              <a:t>⚠ Conditions d’invalidation : Macro: Récession mondiale en 2026 réduisant la demande de VE de 20%  ·  Sectoriel: Baisse des subventions gouvernementales pour les VE en Europe et Chine</a:t>
             </a:r>
           </a:p>
         </p:txBody>
       </p:sp>
       <p:sp>
         <p:nvSpPr>
-          <p:cNvPr id="44" name="TextBox 43"/>
+          <p:cNvPr id="46" name="TextBox 45"/>
           <p:cNvSpPr txBox="1"/>
           <p:nvPr/>
         </p:nvSpPr>
@@ -33748,7 +34592,7 @@
                 </a:solidFill>
                 <a:latin typeface="Calibri"/>
               </a:rPr>
-              <a:t>Concurrence chinoise  ·  Régulation environnementale</a:t>
+              <a:t>Concurrence accrue  ·  Régulation</a:t>
             </a:r>
           </a:p>
         </p:txBody>
@@ -34982,7 +35826,7 @@
                 </a:solidFill>
                 <a:latin typeface="Calibri"/>
               </a:rPr>
-              <a:t>Tesla, Inc. est un leader mondial des véhicules électriques, des solutions énergétiques et des services logiciels embarqués. Son positionnement repose sur l'intégration verticale (batteries, IA, bornes de recharge) et une marque premium synonyme d'innovation technologique. Les avantages concurrentiels incluent un réseau de production optimisé, une base de données clients captive et une avance en matière de conduite autonome et de stockage d'énergie. L'entreprise articule son activité autour de deux segments stratégiques :</a:t>
+              <a:t>Tesla, Inc. conçoit, produit et vend des véhicules électriques haut de gamme et des solutions énergétiques durables. Positionné comme leader technologique avec une intégration verticale unique (batteries, logiciels, bornes de recharge), l'entreprise cible les marchés premium et les infrastructures énergétiques. Ses avantages incluent l'innovation logicielle (FSD), une marque forte et un écosystème intégré réduisant les coûts logistiques. L'entreprise articule son activité autour de deux segments stratégiques :</a:t>
             </a:r>
           </a:p>
         </p:txBody>
@@ -35095,7 +35939,7 @@
                 </a:solidFill>
                 <a:latin typeface="Calibri"/>
               </a:rPr>
-              <a:t>Segment principal générant 85% des revenus via la vente de véhicules électriques (Model 3/Y dominants) et services associés (mises à jour logicielles, abonnements). Clients cibles : particuliers et flottes professionnelles. Moteurs de croissance : expansion géographique (Allemagne, Inde), tarification dynamique et services haut de gamme (Full Self-Driving).</a:t>
+              <a:t>Segment principal générant 95% des revenus via vente de véhicules électriques (Model 3/Y, S/X, Cybertruck) et services associés (abonnements, mises à jour logicielles). Clients cibles : particuliers aisés et entreprises. Croissance portée par l'expansion géographique et la demande pour des solutions bas-carbone.</a:t>
             </a:r>
           </a:p>
         </p:txBody>
@@ -35173,7 +36017,7 @@
                 </a:solidFill>
                 <a:latin typeface="Calibri"/>
               </a:rPr>
-              <a:t>Énergie et Stockage</a:t>
+              <a:t>Énergie et Services</a:t>
             </a:r>
           </a:p>
         </p:txBody>
@@ -35208,7 +36052,7 @@
                 </a:solidFill>
                 <a:latin typeface="Calibri"/>
               </a:rPr>
-              <a:t>Ventes de batteries Powerwall/ Megapack et systèmes solaires pour particuliers et entreprises. Modèle de revenus récurrents via abonnements et services de maintenance. Clients cibles : ménages et industriels. Croissance portée par la demande en stockage d'énergie et les subventions gouvernementales (ex: IRA aux États-Unis).</a:t>
+              <a:t>Vente de systèmes de stockage d'énergie (Powerwall, Megapack) et de panneaux solaires, avec services de maintenance et d'optimisation énergétique. Cible : particuliers, entreprises et utilities. Croissance liée à la transition énergétique et aux subventions gouvernementales.</a:t>
             </a:r>
           </a:p>
         </p:txBody>
@@ -36587,7 +37431,7 @@
                 </a:solidFill>
                 <a:latin typeface="Calibri"/>
               </a:rPr>
-              <a:t>85%</a:t>
+              <a:t>95%</a:t>
             </a:r>
           </a:p>
         </p:txBody>
@@ -36735,7 +37579,7 @@
                 </a:solidFill>
                 <a:latin typeface="Calibri"/>
               </a:rPr>
-              <a:t>Segment principal générant 85% des revenus via la vente de véhicules électriques (Model 3/Y dominants) et services associés (mises à jour logicielles, abonnements). Clients cibles : particuliers et flottes professionnelles. Moteurs de croissance : expansion géographique (Allemagne, Inde), tarification dynamique et services haut de gamme (Full Self-Driving).</a:t>
+              <a:t>Segment principal générant 95% des revenus via vente de véhicules électriques (Model 3/Y, S/X, Cybertruck) et services associés (abonnements, mises à jour logicielles). Clients cibles : particuliers aisés et entreprises. Croissance portée par l'expansion géographique et la demande pour des solutions bas-carbone.</a:t>
             </a:r>
           </a:p>
         </p:txBody>
@@ -36856,7 +37700,7 @@
                 </a:solidFill>
                 <a:latin typeface="Calibri"/>
               </a:rPr>
-              <a:t>15%</a:t>
+              <a:t>5%</a:t>
             </a:r>
           </a:p>
         </p:txBody>
@@ -36969,7 +37813,7 @@
                 </a:solidFill>
                 <a:latin typeface="Calibri"/>
               </a:rPr>
-              <a:t>Énergie et Stockage</a:t>
+              <a:t>Énergie et Services</a:t>
             </a:r>
           </a:p>
         </p:txBody>
@@ -37004,7 +37848,7 @@
                 </a:solidFill>
                 <a:latin typeface="Calibri"/>
               </a:rPr>
-              <a:t>Ventes de batteries Powerwall/ Megapack et systèmes solaires pour particuliers et entreprises. Modèle de revenus récurrents via abonnements et services de maintenance. Clients cibles : ménages et industriels. Croissance portée par la demande en stockage d'énergie et les subventions gouvernementales (ex: IRA aux États-Unis).</a:t>
+              <a:t>Vente de systèmes de stockage d'énergie (Powerwall, Megapack) et de panneaux solaires, avec services de maintenance et d'optimisation énergétique. Cible : particuliers, entreprises et utilities. Croissance liée à la transition énergétique et aux subventions gouvernementales.</a:t>
             </a:r>
           </a:p>
         </p:txBody>
@@ -38273,7 +39117,7 @@
                           </a:solidFill>
                           <a:latin typeface="Calibri"/>
                         </a:rPr>
-                        <a:t>+780,0 %</a:t>
+                        <a:t>+800,0 %</a:t>
                       </a:r>
                     </a:p>
                   </a:txBody>
@@ -38436,7 +39280,7 @@
                           </a:solidFill>
                           <a:latin typeface="Calibri"/>
                         </a:rPr>
-                        <a:t>2 415,0</a:t>
+                        <a:t>2 530,0</a:t>
                       </a:r>
                     </a:p>
                   </a:txBody>
@@ -38576,7 +39420,7 @@
                           </a:solidFill>
                           <a:latin typeface="Calibri"/>
                         </a:rPr>
-                        <a:t>2100,0 %</a:t>
+                        <a:t>2200,0 %</a:t>
                       </a:r>
                     </a:p>
                   </a:txBody>
@@ -38693,7 +39537,7 @@
                           </a:solidFill>
                           <a:latin typeface="Calibri"/>
                         </a:rPr>
-                        <a:t>18,0</a:t>
+                        <a:t>15,0</a:t>
                       </a:r>
                     </a:p>
                   </a:txBody>
@@ -38716,7 +39560,7 @@
                           </a:solidFill>
                           <a:latin typeface="Calibri"/>
                         </a:rPr>
-                        <a:t>24,0</a:t>
+                        <a:t>20,0</a:t>
                       </a:r>
                     </a:p>
                   </a:txBody>
@@ -38833,7 +39677,7 @@
                           </a:solidFill>
                           <a:latin typeface="Calibri"/>
                         </a:rPr>
-                        <a:t>1760,0 %</a:t>
+                        <a:t>1470,0 %</a:t>
                       </a:r>
                     </a:p>
                   </a:txBody>
@@ -38856,7 +39700,7 @@
                           </a:solidFill>
                           <a:latin typeface="Calibri"/>
                         </a:rPr>
-                        <a:t>2090,0 %</a:t>
+                        <a:t>1740,0 %</a:t>
                       </a:r>
                     </a:p>
                   </a:txBody>
@@ -38973,7 +39817,7 @@
                           </a:solidFill>
                           <a:latin typeface="Calibri"/>
                         </a:rPr>
-                        <a:t>7,5</a:t>
+                        <a:t>6,5</a:t>
                       </a:r>
                     </a:p>
                   </a:txBody>
@@ -38996,7 +39840,7 @@
                           </a:solidFill>
                           <a:latin typeface="Calibri"/>
                         </a:rPr>
-                        <a:t>11,0</a:t>
+                        <a:t>10,0</a:t>
                       </a:r>
                     </a:p>
                   </a:txBody>
@@ -39113,7 +39957,7 @@
                           </a:solidFill>
                           <a:latin typeface="Calibri"/>
                         </a:rPr>
-                        <a:t>740,0 %</a:t>
+                        <a:t>640,0 %</a:t>
                       </a:r>
                     </a:p>
                   </a:txBody>
@@ -39136,7 +39980,7 @@
                           </a:solidFill>
                           <a:latin typeface="Calibri"/>
                         </a:rPr>
-                        <a:t>960,0 %</a:t>
+                        <a:t>870,0 %</a:t>
                       </a:r>
                     </a:p>
                   </a:txBody>
@@ -39153,14 +39997,100 @@
       </p:graphicFrame>
       <p:sp>
         <p:nvSpPr>
-          <p:cNvPr id="18" name="TextBox 17"/>
-          <p:cNvSpPr txBox="1"/>
+          <p:cNvPr id="18" name="Rectangle 17"/>
+          <p:cNvSpPr/>
           <p:nvPr/>
         </p:nvSpPr>
         <p:spPr>
           <a:xfrm>
             <a:off x="367200" y="3218400"/>
             <a:ext cx="8413200" cy="1224000"/>
+          </a:xfrm>
+          <a:prstGeom prst="rect">
+            <a:avLst/>
+          </a:prstGeom>
+          <a:solidFill>
+            <a:srgbClr val="F5F7FA"/>
+          </a:solidFill>
+          <a:ln>
+            <a:noFill/>
+          </a:ln>
+        </p:spPr>
+        <p:style>
+          <a:lnRef idx="1">
+            <a:schemeClr val="accent1"/>
+          </a:lnRef>
+          <a:fillRef idx="3">
+            <a:schemeClr val="accent1"/>
+          </a:fillRef>
+          <a:effectRef idx="2">
+            <a:schemeClr val="accent1"/>
+          </a:effectRef>
+          <a:fontRef idx="minor">
+            <a:schemeClr val="lt1"/>
+          </a:fontRef>
+        </p:style>
+        <p:txBody>
+          <a:bodyPr rtlCol="0" anchor="ctr"/>
+          <a:lstStyle/>
+          <a:p>
+            <a:pPr algn="ctr"/>
+          </a:p>
+        </p:txBody>
+      </p:sp>
+      <p:sp>
+        <p:nvSpPr>
+          <p:cNvPr id="19" name="Rectangle 18"/>
+          <p:cNvSpPr/>
+          <p:nvPr/>
+        </p:nvSpPr>
+        <p:spPr>
+          <a:xfrm>
+            <a:off x="367200" y="3218400"/>
+            <a:ext cx="79200" cy="1224000"/>
+          </a:xfrm>
+          <a:prstGeom prst="rect">
+            <a:avLst/>
+          </a:prstGeom>
+          <a:solidFill>
+            <a:srgbClr val="2E5FA3"/>
+          </a:solidFill>
+          <a:ln>
+            <a:noFill/>
+          </a:ln>
+        </p:spPr>
+        <p:style>
+          <a:lnRef idx="1">
+            <a:schemeClr val="accent1"/>
+          </a:lnRef>
+          <a:fillRef idx="3">
+            <a:schemeClr val="accent1"/>
+          </a:fillRef>
+          <a:effectRef idx="2">
+            <a:schemeClr val="accent1"/>
+          </a:effectRef>
+          <a:fontRef idx="minor">
+            <a:schemeClr val="lt1"/>
+          </a:fontRef>
+        </p:style>
+        <p:txBody>
+          <a:bodyPr rtlCol="0" anchor="ctr"/>
+          <a:lstStyle/>
+          <a:p>
+            <a:pPr algn="ctr"/>
+          </a:p>
+        </p:txBody>
+      </p:sp>
+      <p:sp>
+        <p:nvSpPr>
+          <p:cNvPr id="20" name="TextBox 19"/>
+          <p:cNvSpPr txBox="1"/>
+          <p:nvPr/>
+        </p:nvSpPr>
+        <p:spPr>
+          <a:xfrm>
+            <a:off x="475200" y="3247200"/>
+            <a:ext cx="8298000" cy="1188000"/>
           </a:xfrm>
           <a:prstGeom prst="rect">
             <a:avLst/>
@@ -39181,7 +40111,7 @@
                 </a:solidFill>
                 <a:latin typeface="Calibri"/>
               </a:rPr>
-              <a:t>Le CA 2025 atteint 94,8 Md$ (-3% YoY), avec une marge brute de 18,0% stable mais une marge nette chutant à 4,0% en raison de pressions sur les prix (baisse des prix de vente de -10% en 2024) et de coûts fixes élevés (Capex 8,5 Md$). La trésorerie nette de -0,7x EBITDA et un ratio de couverture des intérêts à 16,6x assurent une flexibilité financière malgré la compression des marges.</a:t>
+              <a:t>Le chiffre d'affaires 2025 atteint 94,8 milliards de dollars (-3% YoY), avec une marge brute de 18% et une marge nette de 4%, en baisse de 11,4 points vs 2022. La pression sur les prix des VE et l'augmentation des coûts fixes (Capex 8,5 milliards) compriment les marges. Le ND/EBITDA négatif (-0,7x) indique une trésorerie nette positive de 25 milliards, soutenant les rachats d'actions.</a:t>
             </a:r>
           </a:p>
         </p:txBody>
@@ -41070,14 +42000,100 @@
       </p:graphicFrame>
       <p:sp>
         <p:nvSpPr>
-          <p:cNvPr id="31" name="TextBox 30"/>
-          <p:cNvSpPr txBox="1"/>
+          <p:cNvPr id="31" name="Rectangle 30"/>
+          <p:cNvSpPr/>
           <p:nvPr/>
         </p:nvSpPr>
         <p:spPr>
           <a:xfrm>
             <a:off x="367200" y="4068000"/>
             <a:ext cx="8413200" cy="468000"/>
+          </a:xfrm>
+          <a:prstGeom prst="rect">
+            <a:avLst/>
+          </a:prstGeom>
+          <a:solidFill>
+            <a:srgbClr val="F5F7FA"/>
+          </a:solidFill>
+          <a:ln>
+            <a:noFill/>
+          </a:ln>
+        </p:spPr>
+        <p:style>
+          <a:lnRef idx="1">
+            <a:schemeClr val="accent1"/>
+          </a:lnRef>
+          <a:fillRef idx="3">
+            <a:schemeClr val="accent1"/>
+          </a:fillRef>
+          <a:effectRef idx="2">
+            <a:schemeClr val="accent1"/>
+          </a:effectRef>
+          <a:fontRef idx="minor">
+            <a:schemeClr val="lt1"/>
+          </a:fontRef>
+        </p:style>
+        <p:txBody>
+          <a:bodyPr rtlCol="0" anchor="ctr"/>
+          <a:lstStyle/>
+          <a:p>
+            <a:pPr algn="ctr"/>
+          </a:p>
+        </p:txBody>
+      </p:sp>
+      <p:sp>
+        <p:nvSpPr>
+          <p:cNvPr id="32" name="Rectangle 31"/>
+          <p:cNvSpPr/>
+          <p:nvPr/>
+        </p:nvSpPr>
+        <p:spPr>
+          <a:xfrm>
+            <a:off x="367200" y="4068000"/>
+            <a:ext cx="79200" cy="468000"/>
+          </a:xfrm>
+          <a:prstGeom prst="rect">
+            <a:avLst/>
+          </a:prstGeom>
+          <a:solidFill>
+            <a:srgbClr val="2E5FA3"/>
+          </a:solidFill>
+          <a:ln>
+            <a:noFill/>
+          </a:ln>
+        </p:spPr>
+        <p:style>
+          <a:lnRef idx="1">
+            <a:schemeClr val="accent1"/>
+          </a:lnRef>
+          <a:fillRef idx="3">
+            <a:schemeClr val="accent1"/>
+          </a:fillRef>
+          <a:effectRef idx="2">
+            <a:schemeClr val="accent1"/>
+          </a:effectRef>
+          <a:fontRef idx="minor">
+            <a:schemeClr val="lt1"/>
+          </a:fontRef>
+        </p:style>
+        <p:txBody>
+          <a:bodyPr rtlCol="0" anchor="ctr"/>
+          <a:lstStyle/>
+          <a:p>
+            <a:pPr algn="ctr"/>
+          </a:p>
+        </p:txBody>
+      </p:sp>
+      <p:sp>
+        <p:nvSpPr>
+          <p:cNvPr id="33" name="TextBox 32"/>
+          <p:cNvSpPr txBox="1"/>
+          <p:nvPr/>
+        </p:nvSpPr>
+        <p:spPr>
+          <a:xfrm>
+            <a:off x="475200" y="4096800"/>
+            <a:ext cx="8298000" cy="432000"/>
           </a:xfrm>
           <a:prstGeom prst="rect">
             <a:avLst/>
@@ -41098,7 +42114,7 @@
                 </a:solidFill>
                 <a:latin typeface="Calibri"/>
               </a:rPr>
-              <a:t>Le CA 2025 atteint 94,8 Md$ (-3% YoY), avec une marge brute de 18,0% stable mais une marge nette chutant à 4,0% en raison de pressions sur les prix (baisse des prix de vente de -10% en 2024) et de coûts fixes élevés (Capex 8,5 Md$). La trésorerie nette de -0,7x EBITDA et un ratio de couverture des intérêts à 16,6x assurent une flexibilité financière malgré la compression des marges.</a:t>
+              <a:t>Le chiffre d'affaires 2025 atteint 94,8 milliards de dollars (-3% YoY), avec une marge brute de 18% et une marge nette de 4%, en baisse de 11,4 points vs 2022. La pression sur les prix des VE et l'augmentation des coûts fixes (Capex 8,5 milliards) compriment les marges. Le ND/EBITDA négatif (-0,7x) indique une trésorerie nette positive de 25 milliards, soutenant les rachats d'actions.</a:t>
             </a:r>
           </a:p>
         </p:txBody>

--- a/preview/TSLA/TSLA_pitchbook.pptx
+++ b/preview/TSLA/TSLA_pitchbook.pptx
@@ -3410,7 +3410,7 @@
                 </a:solidFill>
                 <a:latin typeface="Calibri"/>
               </a:rPr>
-              <a:t>● HOLD  ·  Prix cible base : 360 $  ·  Upside : +3,9 %</a:t>
+              <a:t>● HOLD  ·  Prix cible base : — $  ·  Upside : —</a:t>
             </a:r>
           </a:p>
         </p:txBody>
@@ -6069,127 +6069,6 @@
           </a:graphicData>
         </a:graphic>
       </p:graphicFrame>
-      <p:sp>
-        <p:nvSpPr>
-          <p:cNvPr id="18" name="Rectangle 17"/>
-          <p:cNvSpPr/>
-          <p:nvPr/>
-        </p:nvSpPr>
-        <p:spPr>
-          <a:xfrm>
-            <a:off x="367200" y="3628800"/>
-            <a:ext cx="8413200" cy="824400"/>
-          </a:xfrm>
-          <a:prstGeom prst="rect">
-            <a:avLst/>
-          </a:prstGeom>
-          <a:solidFill>
-            <a:srgbClr val="F5F7FA"/>
-          </a:solidFill>
-          <a:ln>
-            <a:noFill/>
-          </a:ln>
-        </p:spPr>
-        <p:style>
-          <a:lnRef idx="1">
-            <a:schemeClr val="accent1"/>
-          </a:lnRef>
-          <a:fillRef idx="3">
-            <a:schemeClr val="accent1"/>
-          </a:fillRef>
-          <a:effectRef idx="2">
-            <a:schemeClr val="accent1"/>
-          </a:effectRef>
-          <a:fontRef idx="minor">
-            <a:schemeClr val="lt1"/>
-          </a:fontRef>
-        </p:style>
-        <p:txBody>
-          <a:bodyPr rtlCol="0" anchor="ctr"/>
-          <a:lstStyle/>
-          <a:p>
-            <a:pPr algn="ctr"/>
-          </a:p>
-        </p:txBody>
-      </p:sp>
-      <p:sp>
-        <p:nvSpPr>
-          <p:cNvPr id="19" name="Rectangle 18"/>
-          <p:cNvSpPr/>
-          <p:nvPr/>
-        </p:nvSpPr>
-        <p:spPr>
-          <a:xfrm>
-            <a:off x="367200" y="3628800"/>
-            <a:ext cx="79200" cy="824400"/>
-          </a:xfrm>
-          <a:prstGeom prst="rect">
-            <a:avLst/>
-          </a:prstGeom>
-          <a:solidFill>
-            <a:srgbClr val="2E5FA3"/>
-          </a:solidFill>
-          <a:ln>
-            <a:noFill/>
-          </a:ln>
-        </p:spPr>
-        <p:style>
-          <a:lnRef idx="1">
-            <a:schemeClr val="accent1"/>
-          </a:lnRef>
-          <a:fillRef idx="3">
-            <a:schemeClr val="accent1"/>
-          </a:fillRef>
-          <a:effectRef idx="2">
-            <a:schemeClr val="accent1"/>
-          </a:effectRef>
-          <a:fontRef idx="minor">
-            <a:schemeClr val="lt1"/>
-          </a:fontRef>
-        </p:style>
-        <p:txBody>
-          <a:bodyPr rtlCol="0" anchor="ctr"/>
-          <a:lstStyle/>
-          <a:p>
-            <a:pPr algn="ctr"/>
-          </a:p>
-        </p:txBody>
-      </p:sp>
-      <p:sp>
-        <p:nvSpPr>
-          <p:cNvPr id="20" name="TextBox 19"/>
-          <p:cNvSpPr txBox="1"/>
-          <p:nvPr/>
-        </p:nvSpPr>
-        <p:spPr>
-          <a:xfrm>
-            <a:off x="475200" y="3657600"/>
-            <a:ext cx="8298000" cy="788400"/>
-          </a:xfrm>
-          <a:prstGeom prst="rect">
-            <a:avLst/>
-          </a:prstGeom>
-          <a:noFill/>
-        </p:spPr>
-        <p:txBody>
-          <a:bodyPr wrap="square">
-            <a:spAutoFit/>
-          </a:bodyPr>
-          <a:lstStyle/>
-          <a:p>
-            <a:pPr algn="l"/>
-            <a:r>
-              <a:rPr sz="850" b="0" i="0">
-                <a:solidFill>
-                  <a:srgbClr val="555555"/>
-                </a:solidFill>
-                <a:latin typeface="Calibri"/>
-              </a:rPr>
-              <a:t>La marge EBITDA chute de 21,7% en 2022 à 12,4% en 2025, reflétant une inflation des coûts (salaires, matières premières) et une concurrence accrue sur les prix. Le mix produit (baisse des Model 3/Y à marge plus faible) aggrave la pression. La durabilité du pricing power est incertaine sans relance de la demande premium ou innovation produit majeure.</a:t>
-            </a:r>
-          </a:p>
-        </p:txBody>
-      </p:sp>
     </p:spTree>
   </p:cSld>
   <p:clrMapOvr>
@@ -7350,7 +7229,7 @@
                           </a:solidFill>
                           <a:latin typeface="Calibri"/>
                         </a:rPr>
-                        <a:t>360 $</a:t>
+                        <a:t>—</a:t>
                       </a:r>
                     </a:p>
                   </a:txBody>
@@ -7526,7 +7405,7 @@
                           </a:solidFill>
                           <a:latin typeface="Calibri"/>
                         </a:rPr>
-                        <a:t>+3,9 %</a:t>
+                        <a:t>—</a:t>
                       </a:r>
                     </a:p>
                   </a:txBody>
@@ -7669,7 +7548,7 @@
                           </a:solidFill>
                           <a:latin typeface="Calibri"/>
                         </a:rPr>
-                        <a:t>280 $</a:t>
+                        <a:t>—</a:t>
                       </a:r>
                     </a:p>
                   </a:txBody>
@@ -7692,7 +7571,7 @@
                           </a:solidFill>
                           <a:latin typeface="Calibri"/>
                         </a:rPr>
-                        <a:t>360 $</a:t>
+                        <a:t>—</a:t>
                       </a:r>
                     </a:p>
                   </a:txBody>
@@ -7715,7 +7594,7 @@
                           </a:solidFill>
                           <a:latin typeface="Calibri"/>
                         </a:rPr>
-                        <a:t>420 $</a:t>
+                        <a:t>—</a:t>
                       </a:r>
                     </a:p>
                   </a:txBody>
@@ -7740,7 +7619,7 @@
                           </a:solidFill>
                           <a:latin typeface="Calibri"/>
                         </a:rPr>
-                        <a:t>-19,2 %</a:t>
+                        <a:t>—</a:t>
                       </a:r>
                     </a:p>
                   </a:txBody>
@@ -7763,7 +7642,7 @@
                           </a:solidFill>
                           <a:latin typeface="Calibri"/>
                         </a:rPr>
-                        <a:t>+3,9 %</a:t>
+                        <a:t>—</a:t>
                       </a:r>
                     </a:p>
                   </a:txBody>
@@ -7786,7 +7665,7 @@
                           </a:solidFill>
                           <a:latin typeface="Calibri"/>
                         </a:rPr>
-                        <a:t>+21,2 %</a:t>
+                        <a:t>—</a:t>
                       </a:r>
                     </a:p>
                   </a:txBody>
@@ -9098,7 +8977,7 @@
                           </a:solidFill>
                           <a:latin typeface="Calibri"/>
                         </a:rPr>
-                        <a:t>392</a:t>
+                        <a:t>—</a:t>
                       </a:r>
                     </a:p>
                   </a:txBody>
@@ -9141,7 +9020,7 @@
                           </a:solidFill>
                           <a:latin typeface="Calibri"/>
                         </a:rPr>
-                        <a:t>410</a:t>
+                        <a:t>—</a:t>
                       </a:r>
                     </a:p>
                   </a:txBody>
@@ -9184,7 +9063,7 @@
                           </a:solidFill>
                           <a:latin typeface="Calibri"/>
                         </a:rPr>
-                        <a:t>430</a:t>
+                        <a:t>—</a:t>
                       </a:r>
                     </a:p>
                   </a:txBody>
@@ -9227,7 +9106,7 @@
                           </a:solidFill>
                           <a:latin typeface="Calibri"/>
                         </a:rPr>
-                        <a:t>452</a:t>
+                        <a:t>—</a:t>
                       </a:r>
                     </a:p>
                   </a:txBody>
@@ -9270,7 +9149,7 @@
                           </a:solidFill>
                           <a:latin typeface="Calibri"/>
                         </a:rPr>
-                        <a:t>476</a:t>
+                        <a:t>—</a:t>
                       </a:r>
                     </a:p>
                   </a:txBody>
@@ -9358,7 +9237,7 @@
                           </a:solidFill>
                           <a:latin typeface="Calibri"/>
                         </a:rPr>
-                        <a:t>360</a:t>
+                        <a:t>—</a:t>
                       </a:r>
                     </a:p>
                   </a:txBody>
@@ -9401,7 +9280,7 @@
                           </a:solidFill>
                           <a:latin typeface="Calibri"/>
                         </a:rPr>
-                        <a:t>375</a:t>
+                        <a:t>—</a:t>
                       </a:r>
                     </a:p>
                   </a:txBody>
@@ -9444,7 +9323,7 @@
                           </a:solidFill>
                           <a:latin typeface="Calibri"/>
                         </a:rPr>
-                        <a:t>392</a:t>
+                        <a:t>—</a:t>
                       </a:r>
                     </a:p>
                   </a:txBody>
@@ -9487,7 +9366,7 @@
                           </a:solidFill>
                           <a:latin typeface="Calibri"/>
                         </a:rPr>
-                        <a:t>410</a:t>
+                        <a:t>—</a:t>
                       </a:r>
                     </a:p>
                   </a:txBody>
@@ -9530,7 +9409,7 @@
                           </a:solidFill>
                           <a:latin typeface="Calibri"/>
                         </a:rPr>
-                        <a:t>430</a:t>
+                        <a:t>—</a:t>
                       </a:r>
                     </a:p>
                   </a:txBody>
@@ -9618,7 +9497,7 @@
                           </a:solidFill>
                           <a:latin typeface="Calibri"/>
                         </a:rPr>
-                        <a:t>333</a:t>
+                        <a:t>—</a:t>
                       </a:r>
                     </a:p>
                   </a:txBody>
@@ -9661,7 +9540,7 @@
                           </a:solidFill>
                           <a:latin typeface="Calibri"/>
                         </a:rPr>
-                        <a:t>346</a:t>
+                        <a:t>—</a:t>
                       </a:r>
                     </a:p>
                   </a:txBody>
@@ -9704,7 +9583,7 @@
                           </a:solidFill>
                           <a:latin typeface="Calibri"/>
                         </a:rPr>
-                        <a:t>360</a:t>
+                        <a:t>—</a:t>
                       </a:r>
                     </a:p>
                   </a:txBody>
@@ -9747,7 +9626,7 @@
                           </a:solidFill>
                           <a:latin typeface="Calibri"/>
                         </a:rPr>
-                        <a:t>375</a:t>
+                        <a:t>—</a:t>
                       </a:r>
                     </a:p>
                   </a:txBody>
@@ -9790,7 +9669,7 @@
                           </a:solidFill>
                           <a:latin typeface="Calibri"/>
                         </a:rPr>
-                        <a:t>392</a:t>
+                        <a:t>—</a:t>
                       </a:r>
                     </a:p>
                   </a:txBody>
@@ -9878,7 +9757,7 @@
                           </a:solidFill>
                           <a:latin typeface="Calibri"/>
                         </a:rPr>
-                        <a:t>310</a:t>
+                        <a:t>—</a:t>
                       </a:r>
                     </a:p>
                   </a:txBody>
@@ -9921,7 +9800,7 @@
                           </a:solidFill>
                           <a:latin typeface="Calibri"/>
                         </a:rPr>
-                        <a:t>321</a:t>
+                        <a:t>—</a:t>
                       </a:r>
                     </a:p>
                   </a:txBody>
@@ -9964,7 +9843,7 @@
                           </a:solidFill>
                           <a:latin typeface="Calibri"/>
                         </a:rPr>
-                        <a:t>333</a:t>
+                        <a:t>—</a:t>
                       </a:r>
                     </a:p>
                   </a:txBody>
@@ -10007,7 +9886,7 @@
                           </a:solidFill>
                           <a:latin typeface="Calibri"/>
                         </a:rPr>
-                        <a:t>346</a:t>
+                        <a:t>—</a:t>
                       </a:r>
                     </a:p>
                   </a:txBody>
@@ -10050,7 +9929,7 @@
                           </a:solidFill>
                           <a:latin typeface="Calibri"/>
                         </a:rPr>
-                        <a:t>360</a:t>
+                        <a:t>—</a:t>
                       </a:r>
                     </a:p>
                   </a:txBody>
@@ -10138,7 +10017,7 @@
                           </a:solidFill>
                           <a:latin typeface="Calibri"/>
                         </a:rPr>
-                        <a:t>289</a:t>
+                        <a:t>—</a:t>
                       </a:r>
                     </a:p>
                   </a:txBody>
@@ -10181,7 +10060,7 @@
                           </a:solidFill>
                           <a:latin typeface="Calibri"/>
                         </a:rPr>
-                        <a:t>299</a:t>
+                        <a:t>—</a:t>
                       </a:r>
                     </a:p>
                   </a:txBody>
@@ -10224,7 +10103,7 @@
                           </a:solidFill>
                           <a:latin typeface="Calibri"/>
                         </a:rPr>
-                        <a:t>310</a:t>
+                        <a:t>—</a:t>
                       </a:r>
                     </a:p>
                   </a:txBody>
@@ -10267,7 +10146,7 @@
                           </a:solidFill>
                           <a:latin typeface="Calibri"/>
                         </a:rPr>
-                        <a:t>321</a:t>
+                        <a:t>—</a:t>
                       </a:r>
                     </a:p>
                   </a:txBody>
@@ -10310,7 +10189,7 @@
                           </a:solidFill>
                           <a:latin typeface="Calibri"/>
                         </a:rPr>
-                        <a:t>333</a:t>
+                        <a:t>—</a:t>
                       </a:r>
                     </a:p>
                   </a:txBody>
@@ -10345,127 +10224,6 @@
           </a:graphicData>
         </a:graphic>
       </p:graphicFrame>
-      <p:sp>
-        <p:nvSpPr>
-          <p:cNvPr id="22" name="Rectangle 21"/>
-          <p:cNvSpPr/>
-          <p:nvPr/>
-        </p:nvSpPr>
-        <p:spPr>
-          <a:xfrm>
-            <a:off x="367200" y="3916800"/>
-            <a:ext cx="8413200" cy="547200"/>
-          </a:xfrm>
-          <a:prstGeom prst="rect">
-            <a:avLst/>
-          </a:prstGeom>
-          <a:solidFill>
-            <a:srgbClr val="F5F7FA"/>
-          </a:solidFill>
-          <a:ln>
-            <a:noFill/>
-          </a:ln>
-        </p:spPr>
-        <p:style>
-          <a:lnRef idx="1">
-            <a:schemeClr val="accent1"/>
-          </a:lnRef>
-          <a:fillRef idx="3">
-            <a:schemeClr val="accent1"/>
-          </a:fillRef>
-          <a:effectRef idx="2">
-            <a:schemeClr val="accent1"/>
-          </a:effectRef>
-          <a:fontRef idx="minor">
-            <a:schemeClr val="lt1"/>
-          </a:fontRef>
-        </p:style>
-        <p:txBody>
-          <a:bodyPr rtlCol="0" anchor="ctr"/>
-          <a:lstStyle/>
-          <a:p>
-            <a:pPr algn="ctr"/>
-          </a:p>
-        </p:txBody>
-      </p:sp>
-      <p:sp>
-        <p:nvSpPr>
-          <p:cNvPr id="23" name="Rectangle 22"/>
-          <p:cNvSpPr/>
-          <p:nvPr/>
-        </p:nvSpPr>
-        <p:spPr>
-          <a:xfrm>
-            <a:off x="367200" y="3916800"/>
-            <a:ext cx="79200" cy="547200"/>
-          </a:xfrm>
-          <a:prstGeom prst="rect">
-            <a:avLst/>
-          </a:prstGeom>
-          <a:solidFill>
-            <a:srgbClr val="2E5FA3"/>
-          </a:solidFill>
-          <a:ln>
-            <a:noFill/>
-          </a:ln>
-        </p:spPr>
-        <p:style>
-          <a:lnRef idx="1">
-            <a:schemeClr val="accent1"/>
-          </a:lnRef>
-          <a:fillRef idx="3">
-            <a:schemeClr val="accent1"/>
-          </a:fillRef>
-          <a:effectRef idx="2">
-            <a:schemeClr val="accent1"/>
-          </a:effectRef>
-          <a:fontRef idx="minor">
-            <a:schemeClr val="lt1"/>
-          </a:fontRef>
-        </p:style>
-        <p:txBody>
-          <a:bodyPr rtlCol="0" anchor="ctr"/>
-          <a:lstStyle/>
-          <a:p>
-            <a:pPr algn="ctr"/>
-          </a:p>
-        </p:txBody>
-      </p:sp>
-      <p:sp>
-        <p:nvSpPr>
-          <p:cNvPr id="24" name="TextBox 23"/>
-          <p:cNvSpPr txBox="1"/>
-          <p:nvPr/>
-        </p:nvSpPr>
-        <p:spPr>
-          <a:xfrm>
-            <a:off x="475200" y="3945600"/>
-            <a:ext cx="8298000" cy="511200"/>
-          </a:xfrm>
-          <a:prstGeom prst="rect">
-            <a:avLst/>
-          </a:prstGeom>
-          <a:noFill/>
-        </p:spPr>
-        <p:txBody>
-          <a:bodyPr wrap="square">
-            <a:spAutoFit/>
-          </a:bodyPr>
-          <a:lstStyle/>
-          <a:p>
-            <a:pPr algn="l"/>
-            <a:r>
-              <a:rPr sz="850" b="0" i="0">
-                <a:solidFill>
-                  <a:srgbClr val="555555"/>
-                </a:solidFill>
-                <a:latin typeface="Calibri"/>
-              </a:rPr>
-              <a:t>Avec un WACC de 14,8% et un TGR de 2,5%, le prix implicite DCF est de 360 USD (vs cours 346,65 USD), suggérant une légère sous-valorisation. L'upside dépend de la réalisation des catalyseurs (Robotaxi, énergie) et de la reprise des marges.</a:t>
-            </a:r>
-          </a:p>
-        </p:txBody>
-      </p:sp>
     </p:spTree>
   </p:cSld>
   <p:clrMapOvr>
@@ -11075,7 +10833,7 @@
         </p:nvGraphicFramePr>
         <p:xfrm>
           <a:off x="367200" y="914400"/>
-          <a:ext cx="8413200" cy="2015999"/>
+          <a:ext cx="8413200" cy="871200"/>
         </p:xfrm>
         <a:graphic>
           <a:graphicData uri="http://schemas.openxmlformats.org/drawingml/2006/table">
@@ -11093,7 +10851,7 @@
                 <a:gridCol w="1093716"/>
                 <a:gridCol w="1009584"/>
               </a:tblGrid>
-              <a:tr h="251999">
+              <a:tr h="290400">
                 <a:tc>
                   <a:txBody>
                     <a:bodyPr/>
@@ -11279,7 +11037,7 @@
                   </a:tcPr>
                 </a:tc>
               </a:tr>
-              <a:tr h="251999">
+              <a:tr h="290400">
                 <a:tc>
                   <a:txBody>
                     <a:bodyPr/>
@@ -11465,937 +11223,7 @@
                   </a:tcPr>
                 </a:tc>
               </a:tr>
-              <a:tr h="251999">
-                <a:tc>
-                  <a:txBody>
-                    <a:bodyPr/>
-                    <a:lstStyle/>
-                    <a:p>
-                      <a:pPr algn="l"/>
-                      <a:r>
-                        <a:rPr sz="800" b="0" i="0">
-                          <a:solidFill>
-                            <a:srgbClr val="0D0D0D"/>
-                          </a:solidFill>
-                          <a:latin typeface="Calibri"/>
-                        </a:rPr>
-                        <a:t>BYD Company</a:t>
-                      </a:r>
-                    </a:p>
-                  </a:txBody>
-                  <a:tcPr>
-                    <a:solidFill>
-                      <a:srgbClr val="FFFFFF"/>
-                    </a:solidFill>
-                  </a:tcPr>
-                </a:tc>
-                <a:tc>
-                  <a:txBody>
-                    <a:bodyPr/>
-                    <a:lstStyle/>
-                    <a:p>
-                      <a:pPr algn="ctr"/>
-                      <a:r>
-                        <a:rPr sz="750" b="0" i="0">
-                          <a:solidFill>
-                            <a:srgbClr val="555555"/>
-                          </a:solidFill>
-                          <a:latin typeface="Calibri"/>
-                        </a:rPr>
-                        <a:t>BYD.US</a:t>
-                      </a:r>
-                    </a:p>
-                  </a:txBody>
-                  <a:tcPr>
-                    <a:solidFill>
-                      <a:srgbClr val="FFFFFF"/>
-                    </a:solidFill>
-                  </a:tcPr>
-                </a:tc>
-                <a:tc>
-                  <a:txBody>
-                    <a:bodyPr/>
-                    <a:lstStyle/>
-                    <a:p>
-                      <a:pPr algn="ctr"/>
-                      <a:r>
-                        <a:rPr sz="800" b="0" i="0">
-                          <a:solidFill>
-                            <a:srgbClr val="0D0D0D"/>
-                          </a:solidFill>
-                          <a:latin typeface="Calibri"/>
-                        </a:rPr>
-                        <a:t>95,0</a:t>
-                      </a:r>
-                    </a:p>
-                  </a:txBody>
-                  <a:tcPr>
-                    <a:solidFill>
-                      <a:srgbClr val="FFFFFF"/>
-                    </a:solidFill>
-                  </a:tcPr>
-                </a:tc>
-                <a:tc>
-                  <a:txBody>
-                    <a:bodyPr/>
-                    <a:lstStyle/>
-                    <a:p>
-                      <a:pPr algn="ctr"/>
-                      <a:r>
-                        <a:rPr sz="800" b="0" i="0">
-                          <a:solidFill>
-                            <a:srgbClr val="0D0D0D"/>
-                          </a:solidFill>
-                          <a:latin typeface="Calibri"/>
-                        </a:rPr>
-                        <a:t>12,5x</a:t>
-                      </a:r>
-                    </a:p>
-                  </a:txBody>
-                  <a:tcPr>
-                    <a:solidFill>
-                      <a:srgbClr val="FFFFFF"/>
-                    </a:solidFill>
-                  </a:tcPr>
-                </a:tc>
-                <a:tc>
-                  <a:txBody>
-                    <a:bodyPr/>
-                    <a:lstStyle/>
-                    <a:p>
-                      <a:pPr algn="ctr"/>
-                      <a:r>
-                        <a:rPr sz="800" b="0" i="0">
-                          <a:solidFill>
-                            <a:srgbClr val="0D0D0D"/>
-                          </a:solidFill>
-                          <a:latin typeface="Calibri"/>
-                        </a:rPr>
-                        <a:t>2,1x</a:t>
-                      </a:r>
-                    </a:p>
-                  </a:txBody>
-                  <a:tcPr>
-                    <a:solidFill>
-                      <a:srgbClr val="FFFFFF"/>
-                    </a:solidFill>
-                  </a:tcPr>
-                </a:tc>
-                <a:tc>
-                  <a:txBody>
-                    <a:bodyPr/>
-                    <a:lstStyle/>
-                    <a:p>
-                      <a:pPr algn="ctr"/>
-                      <a:r>
-                        <a:rPr sz="800" b="0" i="0">
-                          <a:solidFill>
-                            <a:srgbClr val="0D0D0D"/>
-                          </a:solidFill>
-                          <a:latin typeface="Calibri"/>
-                        </a:rPr>
-                        <a:t>35,0x</a:t>
-                      </a:r>
-                    </a:p>
-                  </a:txBody>
-                  <a:tcPr>
-                    <a:solidFill>
-                      <a:srgbClr val="FFFFFF"/>
-                    </a:solidFill>
-                  </a:tcPr>
-                </a:tc>
-                <a:tc>
-                  <a:txBody>
-                    <a:bodyPr/>
-                    <a:lstStyle/>
-                    <a:p>
-                      <a:pPr algn="ctr"/>
-                      <a:r>
-                        <a:rPr sz="800" b="0" i="0">
-                          <a:solidFill>
-                            <a:srgbClr val="0D0D0D"/>
-                          </a:solidFill>
-                          <a:latin typeface="Calibri"/>
-                        </a:rPr>
-                        <a:t>18,0 %</a:t>
-                      </a:r>
-                    </a:p>
-                  </a:txBody>
-                  <a:tcPr>
-                    <a:solidFill>
-                      <a:srgbClr val="FFFFFF"/>
-                    </a:solidFill>
-                  </a:tcPr>
-                </a:tc>
-                <a:tc>
-                  <a:txBody>
-                    <a:bodyPr/>
-                    <a:lstStyle/>
-                    <a:p>
-                      <a:pPr algn="ctr"/>
-                      <a:r>
-                        <a:rPr sz="800" b="0" i="0">
-                          <a:solidFill>
-                            <a:srgbClr val="0D0D0D"/>
-                          </a:solidFill>
-                          <a:latin typeface="Calibri"/>
-                        </a:rPr>
-                        <a:t>15,0 %</a:t>
-                      </a:r>
-                    </a:p>
-                  </a:txBody>
-                  <a:tcPr>
-                    <a:solidFill>
-                      <a:srgbClr val="FFFFFF"/>
-                    </a:solidFill>
-                  </a:tcPr>
-                </a:tc>
-              </a:tr>
-              <a:tr h="251999">
-                <a:tc>
-                  <a:txBody>
-                    <a:bodyPr/>
-                    <a:lstStyle/>
-                    <a:p>
-                      <a:pPr algn="l"/>
-                      <a:r>
-                        <a:rPr sz="800" b="0" i="0">
-                          <a:solidFill>
-                            <a:srgbClr val="0D0D0D"/>
-                          </a:solidFill>
-                          <a:latin typeface="Calibri"/>
-                        </a:rPr>
-                        <a:t>NIO Inc</a:t>
-                      </a:r>
-                    </a:p>
-                  </a:txBody>
-                  <a:tcPr>
-                    <a:solidFill>
-                      <a:srgbClr val="F7F8FA"/>
-                    </a:solidFill>
-                  </a:tcPr>
-                </a:tc>
-                <a:tc>
-                  <a:txBody>
-                    <a:bodyPr/>
-                    <a:lstStyle/>
-                    <a:p>
-                      <a:pPr algn="ctr"/>
-                      <a:r>
-                        <a:rPr sz="750" b="0" i="0">
-                          <a:solidFill>
-                            <a:srgbClr val="555555"/>
-                          </a:solidFill>
-                          <a:latin typeface="Calibri"/>
-                        </a:rPr>
-                        <a:t>NIO.US</a:t>
-                      </a:r>
-                    </a:p>
-                  </a:txBody>
-                  <a:tcPr>
-                    <a:solidFill>
-                      <a:srgbClr val="F7F8FA"/>
-                    </a:solidFill>
-                  </a:tcPr>
-                </a:tc>
-                <a:tc>
-                  <a:txBody>
-                    <a:bodyPr/>
-                    <a:lstStyle/>
-                    <a:p>
-                      <a:pPr algn="ctr"/>
-                      <a:r>
-                        <a:rPr sz="800" b="0" i="0">
-                          <a:solidFill>
-                            <a:srgbClr val="0D0D0D"/>
-                          </a:solidFill>
-                          <a:latin typeface="Calibri"/>
-                        </a:rPr>
-                        <a:t>35,0</a:t>
-                      </a:r>
-                    </a:p>
-                  </a:txBody>
-                  <a:tcPr>
-                    <a:solidFill>
-                      <a:srgbClr val="F7F8FA"/>
-                    </a:solidFill>
-                  </a:tcPr>
-                </a:tc>
-                <a:tc>
-                  <a:txBody>
-                    <a:bodyPr/>
-                    <a:lstStyle/>
-                    <a:p>
-                      <a:pPr algn="ctr"/>
-                      <a:r>
-                        <a:rPr sz="800" b="0" i="0">
-                          <a:solidFill>
-                            <a:srgbClr val="0D0D0D"/>
-                          </a:solidFill>
-                          <a:latin typeface="Calibri"/>
-                        </a:rPr>
-                        <a:t>-15,0x</a:t>
-                      </a:r>
-                    </a:p>
-                  </a:txBody>
-                  <a:tcPr>
-                    <a:solidFill>
-                      <a:srgbClr val="F7F8FA"/>
-                    </a:solidFill>
-                  </a:tcPr>
-                </a:tc>
-                <a:tc>
-                  <a:txBody>
-                    <a:bodyPr/>
-                    <a:lstStyle/>
-                    <a:p>
-                      <a:pPr algn="ctr"/>
-                      <a:r>
-                        <a:rPr sz="800" b="0" i="0">
-                          <a:solidFill>
-                            <a:srgbClr val="0D0D0D"/>
-                          </a:solidFill>
-                          <a:latin typeface="Calibri"/>
-                        </a:rPr>
-                        <a:t>2,8x</a:t>
-                      </a:r>
-                    </a:p>
-                  </a:txBody>
-                  <a:tcPr>
-                    <a:solidFill>
-                      <a:srgbClr val="F7F8FA"/>
-                    </a:solidFill>
-                  </a:tcPr>
-                </a:tc>
-                <a:tc>
-                  <a:txBody>
-                    <a:bodyPr/>
-                    <a:lstStyle/>
-                    <a:p>
-                      <a:pPr algn="ctr"/>
-                      <a:r>
-                        <a:rPr sz="800" b="0" i="0">
-                          <a:solidFill>
-                            <a:srgbClr val="0D0D0D"/>
-                          </a:solidFill>
-                          <a:latin typeface="Calibri"/>
-                        </a:rPr>
-                        <a:t>-12,0x</a:t>
-                      </a:r>
-                    </a:p>
-                  </a:txBody>
-                  <a:tcPr>
-                    <a:solidFill>
-                      <a:srgbClr val="F7F8FA"/>
-                    </a:solidFill>
-                  </a:tcPr>
-                </a:tc>
-                <a:tc>
-                  <a:txBody>
-                    <a:bodyPr/>
-                    <a:lstStyle/>
-                    <a:p>
-                      <a:pPr algn="ctr"/>
-                      <a:r>
-                        <a:rPr sz="800" b="0" i="0">
-                          <a:solidFill>
-                            <a:srgbClr val="0D0D0D"/>
-                          </a:solidFill>
-                          <a:latin typeface="Calibri"/>
-                        </a:rPr>
-                        <a:t>12,0 %</a:t>
-                      </a:r>
-                    </a:p>
-                  </a:txBody>
-                  <a:tcPr>
-                    <a:solidFill>
-                      <a:srgbClr val="F7F8FA"/>
-                    </a:solidFill>
-                  </a:tcPr>
-                </a:tc>
-                <a:tc>
-                  <a:txBody>
-                    <a:bodyPr/>
-                    <a:lstStyle/>
-                    <a:p>
-                      <a:pPr algn="ctr"/>
-                      <a:r>
-                        <a:rPr sz="800" b="0" i="0">
-                          <a:solidFill>
-                            <a:srgbClr val="0D0D0D"/>
-                          </a:solidFill>
-                          <a:latin typeface="Calibri"/>
-                        </a:rPr>
-                        <a:t>-5,0 %</a:t>
-                      </a:r>
-                    </a:p>
-                  </a:txBody>
-                  <a:tcPr>
-                    <a:solidFill>
-                      <a:srgbClr val="F7F8FA"/>
-                    </a:solidFill>
-                  </a:tcPr>
-                </a:tc>
-              </a:tr>
-              <a:tr h="251999">
-                <a:tc>
-                  <a:txBody>
-                    <a:bodyPr/>
-                    <a:lstStyle/>
-                    <a:p>
-                      <a:pPr algn="l"/>
-                      <a:r>
-                        <a:rPr sz="800" b="0" i="0">
-                          <a:solidFill>
-                            <a:srgbClr val="0D0D0D"/>
-                          </a:solidFill>
-                          <a:latin typeface="Calibri"/>
-                        </a:rPr>
-                        <a:t>Rivian Automotive</a:t>
-                      </a:r>
-                    </a:p>
-                  </a:txBody>
-                  <a:tcPr>
-                    <a:solidFill>
-                      <a:srgbClr val="FFFFFF"/>
-                    </a:solidFill>
-                  </a:tcPr>
-                </a:tc>
-                <a:tc>
-                  <a:txBody>
-                    <a:bodyPr/>
-                    <a:lstStyle/>
-                    <a:p>
-                      <a:pPr algn="ctr"/>
-                      <a:r>
-                        <a:rPr sz="750" b="0" i="0">
-                          <a:solidFill>
-                            <a:srgbClr val="555555"/>
-                          </a:solidFill>
-                          <a:latin typeface="Calibri"/>
-                        </a:rPr>
-                        <a:t>RIVN.US</a:t>
-                      </a:r>
-                    </a:p>
-                  </a:txBody>
-                  <a:tcPr>
-                    <a:solidFill>
-                      <a:srgbClr val="FFFFFF"/>
-                    </a:solidFill>
-                  </a:tcPr>
-                </a:tc>
-                <a:tc>
-                  <a:txBody>
-                    <a:bodyPr/>
-                    <a:lstStyle/>
-                    <a:p>
-                      <a:pPr algn="ctr"/>
-                      <a:r>
-                        <a:rPr sz="800" b="0" i="0">
-                          <a:solidFill>
-                            <a:srgbClr val="0D0D0D"/>
-                          </a:solidFill>
-                          <a:latin typeface="Calibri"/>
-                        </a:rPr>
-                        <a:t>18,0</a:t>
-                      </a:r>
-                    </a:p>
-                  </a:txBody>
-                  <a:tcPr>
-                    <a:solidFill>
-                      <a:srgbClr val="FFFFFF"/>
-                    </a:solidFill>
-                  </a:tcPr>
-                </a:tc>
-                <a:tc>
-                  <a:txBody>
-                    <a:bodyPr/>
-                    <a:lstStyle/>
-                    <a:p>
-                      <a:pPr algn="ctr"/>
-                      <a:r>
-                        <a:rPr sz="800" b="0" i="0">
-                          <a:solidFill>
-                            <a:srgbClr val="0D0D0D"/>
-                          </a:solidFill>
-                          <a:latin typeface="Calibri"/>
-                        </a:rPr>
-                        <a:t>-4,5x</a:t>
-                      </a:r>
-                    </a:p>
-                  </a:txBody>
-                  <a:tcPr>
-                    <a:solidFill>
-                      <a:srgbClr val="FFFFFF"/>
-                    </a:solidFill>
-                  </a:tcPr>
-                </a:tc>
-                <a:tc>
-                  <a:txBody>
-                    <a:bodyPr/>
-                    <a:lstStyle/>
-                    <a:p>
-                      <a:pPr algn="ctr"/>
-                      <a:r>
-                        <a:rPr sz="800" b="0" i="0">
-                          <a:solidFill>
-                            <a:srgbClr val="0D0D0D"/>
-                          </a:solidFill>
-                          <a:latin typeface="Calibri"/>
-                        </a:rPr>
-                        <a:t>2,5x</a:t>
-                      </a:r>
-                    </a:p>
-                  </a:txBody>
-                  <a:tcPr>
-                    <a:solidFill>
-                      <a:srgbClr val="FFFFFF"/>
-                    </a:solidFill>
-                  </a:tcPr>
-                </a:tc>
-                <a:tc>
-                  <a:txBody>
-                    <a:bodyPr/>
-                    <a:lstStyle/>
-                    <a:p>
-                      <a:pPr algn="ctr"/>
-                      <a:r>
-                        <a:rPr sz="800" b="0" i="0">
-                          <a:solidFill>
-                            <a:srgbClr val="0D0D0D"/>
-                          </a:solidFill>
-                          <a:latin typeface="Calibri"/>
-                        </a:rPr>
-                        <a:t>-8,0x</a:t>
-                      </a:r>
-                    </a:p>
-                  </a:txBody>
-                  <a:tcPr>
-                    <a:solidFill>
-                      <a:srgbClr val="FFFFFF"/>
-                    </a:solidFill>
-                  </a:tcPr>
-                </a:tc>
-                <a:tc>
-                  <a:txBody>
-                    <a:bodyPr/>
-                    <a:lstStyle/>
-                    <a:p>
-                      <a:pPr algn="ctr"/>
-                      <a:r>
-                        <a:rPr sz="800" b="0" i="0">
-                          <a:solidFill>
-                            <a:srgbClr val="0D0D0D"/>
-                          </a:solidFill>
-                          <a:latin typeface="Calibri"/>
-                        </a:rPr>
-                        <a:t>15,0 %</a:t>
-                      </a:r>
-                    </a:p>
-                  </a:txBody>
-                  <a:tcPr>
-                    <a:solidFill>
-                      <a:srgbClr val="FFFFFF"/>
-                    </a:solidFill>
-                  </a:tcPr>
-                </a:tc>
-                <a:tc>
-                  <a:txBody>
-                    <a:bodyPr/>
-                    <a:lstStyle/>
-                    <a:p>
-                      <a:pPr algn="ctr"/>
-                      <a:r>
-                        <a:rPr sz="800" b="0" i="0">
-                          <a:solidFill>
-                            <a:srgbClr val="0D0D0D"/>
-                          </a:solidFill>
-                          <a:latin typeface="Calibri"/>
-                        </a:rPr>
-                        <a:t>-20,0 %</a:t>
-                      </a:r>
-                    </a:p>
-                  </a:txBody>
-                  <a:tcPr>
-                    <a:solidFill>
-                      <a:srgbClr val="FFFFFF"/>
-                    </a:solidFill>
-                  </a:tcPr>
-                </a:tc>
-              </a:tr>
-              <a:tr h="251999">
-                <a:tc>
-                  <a:txBody>
-                    <a:bodyPr/>
-                    <a:lstStyle/>
-                    <a:p>
-                      <a:pPr algn="l"/>
-                      <a:r>
-                        <a:rPr sz="800" b="0" i="0">
-                          <a:solidFill>
-                            <a:srgbClr val="0D0D0D"/>
-                          </a:solidFill>
-                          <a:latin typeface="Calibri"/>
-                        </a:rPr>
-                        <a:t>Lucid Group</a:t>
-                      </a:r>
-                    </a:p>
-                  </a:txBody>
-                  <a:tcPr>
-                    <a:solidFill>
-                      <a:srgbClr val="F7F8FA"/>
-                    </a:solidFill>
-                  </a:tcPr>
-                </a:tc>
-                <a:tc>
-                  <a:txBody>
-                    <a:bodyPr/>
-                    <a:lstStyle/>
-                    <a:p>
-                      <a:pPr algn="ctr"/>
-                      <a:r>
-                        <a:rPr sz="750" b="0" i="0">
-                          <a:solidFill>
-                            <a:srgbClr val="555555"/>
-                          </a:solidFill>
-                          <a:latin typeface="Calibri"/>
-                        </a:rPr>
-                        <a:t>LCID.US</a:t>
-                      </a:r>
-                    </a:p>
-                  </a:txBody>
-                  <a:tcPr>
-                    <a:solidFill>
-                      <a:srgbClr val="F7F8FA"/>
-                    </a:solidFill>
-                  </a:tcPr>
-                </a:tc>
-                <a:tc>
-                  <a:txBody>
-                    <a:bodyPr/>
-                    <a:lstStyle/>
-                    <a:p>
-                      <a:pPr algn="ctr"/>
-                      <a:r>
-                        <a:rPr sz="800" b="0" i="0">
-                          <a:solidFill>
-                            <a:srgbClr val="0D0D0D"/>
-                          </a:solidFill>
-                          <a:latin typeface="Calibri"/>
-                        </a:rPr>
-                        <a:t>12,0</a:t>
-                      </a:r>
-                    </a:p>
-                  </a:txBody>
-                  <a:tcPr>
-                    <a:solidFill>
-                      <a:srgbClr val="F7F8FA"/>
-                    </a:solidFill>
-                  </a:tcPr>
-                </a:tc>
-                <a:tc>
-                  <a:txBody>
-                    <a:bodyPr/>
-                    <a:lstStyle/>
-                    <a:p>
-                      <a:pPr algn="ctr"/>
-                      <a:r>
-                        <a:rPr sz="800" b="0" i="0">
-                          <a:solidFill>
-                            <a:srgbClr val="0D0D0D"/>
-                          </a:solidFill>
-                          <a:latin typeface="Calibri"/>
-                        </a:rPr>
-                        <a:t>-10,0x</a:t>
-                      </a:r>
-                    </a:p>
-                  </a:txBody>
-                  <a:tcPr>
-                    <a:solidFill>
-                      <a:srgbClr val="F7F8FA"/>
-                    </a:solidFill>
-                  </a:tcPr>
-                </a:tc>
-                <a:tc>
-                  <a:txBody>
-                    <a:bodyPr/>
-                    <a:lstStyle/>
-                    <a:p>
-                      <a:pPr algn="ctr"/>
-                      <a:r>
-                        <a:rPr sz="800" b="0" i="0">
-                          <a:solidFill>
-                            <a:srgbClr val="0D0D0D"/>
-                          </a:solidFill>
-                          <a:latin typeface="Calibri"/>
-                        </a:rPr>
-                        <a:t>3,2x</a:t>
-                      </a:r>
-                    </a:p>
-                  </a:txBody>
-                  <a:tcPr>
-                    <a:solidFill>
-                      <a:srgbClr val="F7F8FA"/>
-                    </a:solidFill>
-                  </a:tcPr>
-                </a:tc>
-                <a:tc>
-                  <a:txBody>
-                    <a:bodyPr/>
-                    <a:lstStyle/>
-                    <a:p>
-                      <a:pPr algn="ctr"/>
-                      <a:r>
-                        <a:rPr sz="800" b="0" i="0">
-                          <a:solidFill>
-                            <a:srgbClr val="0D0D0D"/>
-                          </a:solidFill>
-                          <a:latin typeface="Calibri"/>
-                        </a:rPr>
-                        <a:t>-15,0x</a:t>
-                      </a:r>
-                    </a:p>
-                  </a:txBody>
-                  <a:tcPr>
-                    <a:solidFill>
-                      <a:srgbClr val="F7F8FA"/>
-                    </a:solidFill>
-                  </a:tcPr>
-                </a:tc>
-                <a:tc>
-                  <a:txBody>
-                    <a:bodyPr/>
-                    <a:lstStyle/>
-                    <a:p>
-                      <a:pPr algn="ctr"/>
-                      <a:r>
-                        <a:rPr sz="800" b="0" i="0">
-                          <a:solidFill>
-                            <a:srgbClr val="0D0D0D"/>
-                          </a:solidFill>
-                          <a:latin typeface="Calibri"/>
-                        </a:rPr>
-                        <a:t>20,0 %</a:t>
-                      </a:r>
-                    </a:p>
-                  </a:txBody>
-                  <a:tcPr>
-                    <a:solidFill>
-                      <a:srgbClr val="F7F8FA"/>
-                    </a:solidFill>
-                  </a:tcPr>
-                </a:tc>
-                <a:tc>
-                  <a:txBody>
-                    <a:bodyPr/>
-                    <a:lstStyle/>
-                    <a:p>
-                      <a:pPr algn="ctr"/>
-                      <a:r>
-                        <a:rPr sz="800" b="0" i="0">
-                          <a:solidFill>
-                            <a:srgbClr val="0D0D0D"/>
-                          </a:solidFill>
-                          <a:latin typeface="Calibri"/>
-                        </a:rPr>
-                        <a:t>-15,0 %</a:t>
-                      </a:r>
-                    </a:p>
-                  </a:txBody>
-                  <a:tcPr>
-                    <a:solidFill>
-                      <a:srgbClr val="F7F8FA"/>
-                    </a:solidFill>
-                  </a:tcPr>
-                </a:tc>
-              </a:tr>
-              <a:tr h="251999">
-                <a:tc>
-                  <a:txBody>
-                    <a:bodyPr/>
-                    <a:lstStyle/>
-                    <a:p>
-                      <a:pPr algn="l"/>
-                      <a:r>
-                        <a:rPr sz="800" b="0" i="0">
-                          <a:solidFill>
-                            <a:srgbClr val="0D0D0D"/>
-                          </a:solidFill>
-                          <a:latin typeface="Calibri"/>
-                        </a:rPr>
-                        <a:t>XPeng Inc</a:t>
-                      </a:r>
-                    </a:p>
-                  </a:txBody>
-                  <a:tcPr>
-                    <a:solidFill>
-                      <a:srgbClr val="FFFFFF"/>
-                    </a:solidFill>
-                  </a:tcPr>
-                </a:tc>
-                <a:tc>
-                  <a:txBody>
-                    <a:bodyPr/>
-                    <a:lstStyle/>
-                    <a:p>
-                      <a:pPr algn="ctr"/>
-                      <a:r>
-                        <a:rPr sz="750" b="0" i="0">
-                          <a:solidFill>
-                            <a:srgbClr val="555555"/>
-                          </a:solidFill>
-                          <a:latin typeface="Calibri"/>
-                        </a:rPr>
-                        <a:t>XPEV.US</a:t>
-                      </a:r>
-                    </a:p>
-                  </a:txBody>
-                  <a:tcPr>
-                    <a:solidFill>
-                      <a:srgbClr val="FFFFFF"/>
-                    </a:solidFill>
-                  </a:tcPr>
-                </a:tc>
-                <a:tc>
-                  <a:txBody>
-                    <a:bodyPr/>
-                    <a:lstStyle/>
-                    <a:p>
-                      <a:pPr algn="ctr"/>
-                      <a:r>
-                        <a:rPr sz="800" b="0" i="0">
-                          <a:solidFill>
-                            <a:srgbClr val="0D0D0D"/>
-                          </a:solidFill>
-                          <a:latin typeface="Calibri"/>
-                        </a:rPr>
-                        <a:t>8,0</a:t>
-                      </a:r>
-                    </a:p>
-                  </a:txBody>
-                  <a:tcPr>
-                    <a:solidFill>
-                      <a:srgbClr val="FFFFFF"/>
-                    </a:solidFill>
-                  </a:tcPr>
-                </a:tc>
-                <a:tc>
-                  <a:txBody>
-                    <a:bodyPr/>
-                    <a:lstStyle/>
-                    <a:p>
-                      <a:pPr algn="ctr"/>
-                      <a:r>
-                        <a:rPr sz="800" b="0" i="0">
-                          <a:solidFill>
-                            <a:srgbClr val="0D0D0D"/>
-                          </a:solidFill>
-                          <a:latin typeface="Calibri"/>
-                        </a:rPr>
-                        <a:t>-8,0x</a:t>
-                      </a:r>
-                    </a:p>
-                  </a:txBody>
-                  <a:tcPr>
-                    <a:solidFill>
-                      <a:srgbClr val="FFFFFF"/>
-                    </a:solidFill>
-                  </a:tcPr>
-                </a:tc>
-                <a:tc>
-                  <a:txBody>
-                    <a:bodyPr/>
-                    <a:lstStyle/>
-                    <a:p>
-                      <a:pPr algn="ctr"/>
-                      <a:r>
-                        <a:rPr sz="800" b="0" i="0">
-                          <a:solidFill>
-                            <a:srgbClr val="0D0D0D"/>
-                          </a:solidFill>
-                          <a:latin typeface="Calibri"/>
-                        </a:rPr>
-                        <a:t>1,5x</a:t>
-                      </a:r>
-                    </a:p>
-                  </a:txBody>
-                  <a:tcPr>
-                    <a:solidFill>
-                      <a:srgbClr val="FFFFFF"/>
-                    </a:solidFill>
-                  </a:tcPr>
-                </a:tc>
-                <a:tc>
-                  <a:txBody>
-                    <a:bodyPr/>
-                    <a:lstStyle/>
-                    <a:p>
-                      <a:pPr algn="ctr"/>
-                      <a:r>
-                        <a:rPr sz="800" b="0" i="0">
-                          <a:solidFill>
-                            <a:srgbClr val="0D0D0D"/>
-                          </a:solidFill>
-                          <a:latin typeface="Calibri"/>
-                        </a:rPr>
-                        <a:t>-10,0x</a:t>
-                      </a:r>
-                    </a:p>
-                  </a:txBody>
-                  <a:tcPr>
-                    <a:solidFill>
-                      <a:srgbClr val="FFFFFF"/>
-                    </a:solidFill>
-                  </a:tcPr>
-                </a:tc>
-                <a:tc>
-                  <a:txBody>
-                    <a:bodyPr/>
-                    <a:lstStyle/>
-                    <a:p>
-                      <a:pPr algn="ctr"/>
-                      <a:r>
-                        <a:rPr sz="800" b="0" i="0">
-                          <a:solidFill>
-                            <a:srgbClr val="0D0D0D"/>
-                          </a:solidFill>
-                          <a:latin typeface="Calibri"/>
-                        </a:rPr>
-                        <a:t>10,0 %</a:t>
-                      </a:r>
-                    </a:p>
-                  </a:txBody>
-                  <a:tcPr>
-                    <a:solidFill>
-                      <a:srgbClr val="FFFFFF"/>
-                    </a:solidFill>
-                  </a:tcPr>
-                </a:tc>
-                <a:tc>
-                  <a:txBody>
-                    <a:bodyPr/>
-                    <a:lstStyle/>
-                    <a:p>
-                      <a:pPr algn="ctr"/>
-                      <a:r>
-                        <a:rPr sz="800" b="0" i="0">
-                          <a:solidFill>
-                            <a:srgbClr val="0D0D0D"/>
-                          </a:solidFill>
-                          <a:latin typeface="Calibri"/>
-                        </a:rPr>
-                        <a:t>-25,0 %</a:t>
-                      </a:r>
-                    </a:p>
-                  </a:txBody>
-                  <a:tcPr>
-                    <a:solidFill>
-                      <a:srgbClr val="FFFFFF"/>
-                    </a:solidFill>
-                  </a:tcPr>
-                </a:tc>
-              </a:tr>
-              <a:tr h="252006">
+              <a:tr h="290400">
                 <a:tc>
                   <a:txBody>
                     <a:bodyPr/>
@@ -12478,7 +11306,7 @@
                           </a:solidFill>
                           <a:latin typeface="Calibri"/>
                         </a:rPr>
-                        <a:t>-8,0x</a:t>
+                        <a:t>—</a:t>
                       </a:r>
                     </a:p>
                   </a:txBody>
@@ -12501,7 +11329,7 @@
                           </a:solidFill>
                           <a:latin typeface="Calibri"/>
                         </a:rPr>
-                        <a:t>2,5x</a:t>
+                        <a:t>—</a:t>
                       </a:r>
                     </a:p>
                   </a:txBody>
@@ -12524,7 +11352,7 @@
                           </a:solidFill>
                           <a:latin typeface="Calibri"/>
                         </a:rPr>
-                        <a:t>-10,0x</a:t>
+                        <a:t>—</a:t>
                       </a:r>
                     </a:p>
                   </a:txBody>
@@ -12547,7 +11375,7 @@
                           </a:solidFill>
                           <a:latin typeface="Calibri"/>
                         </a:rPr>
-                        <a:t>15,0 %</a:t>
+                        <a:t>—</a:t>
                       </a:r>
                     </a:p>
                   </a:txBody>
@@ -12570,7 +11398,7 @@
                           </a:solidFill>
                           <a:latin typeface="Calibri"/>
                         </a:rPr>
-                        <a:t>-15,0 %</a:t>
+                        <a:t>—</a:t>
                       </a:r>
                     </a:p>
                   </a:txBody>
@@ -12585,127 +11413,6 @@
           </a:graphicData>
         </a:graphic>
       </p:graphicFrame>
-      <p:sp>
-        <p:nvSpPr>
-          <p:cNvPr id="18" name="Rectangle 17"/>
-          <p:cNvSpPr/>
-          <p:nvPr/>
-        </p:nvSpPr>
-        <p:spPr>
-          <a:xfrm>
-            <a:off x="367200" y="3128400"/>
-            <a:ext cx="8413200" cy="1234800"/>
-          </a:xfrm>
-          <a:prstGeom prst="rect">
-            <a:avLst/>
-          </a:prstGeom>
-          <a:solidFill>
-            <a:srgbClr val="F5F7FA"/>
-          </a:solidFill>
-          <a:ln>
-            <a:noFill/>
-          </a:ln>
-        </p:spPr>
-        <p:style>
-          <a:lnRef idx="1">
-            <a:schemeClr val="accent1"/>
-          </a:lnRef>
-          <a:fillRef idx="3">
-            <a:schemeClr val="accent1"/>
-          </a:fillRef>
-          <a:effectRef idx="2">
-            <a:schemeClr val="accent1"/>
-          </a:effectRef>
-          <a:fontRef idx="minor">
-            <a:schemeClr val="lt1"/>
-          </a:fontRef>
-        </p:style>
-        <p:txBody>
-          <a:bodyPr rtlCol="0" anchor="ctr"/>
-          <a:lstStyle/>
-          <a:p>
-            <a:pPr algn="ctr"/>
-          </a:p>
-        </p:txBody>
-      </p:sp>
-      <p:sp>
-        <p:nvSpPr>
-          <p:cNvPr id="19" name="Rectangle 18"/>
-          <p:cNvSpPr/>
-          <p:nvPr/>
-        </p:nvSpPr>
-        <p:spPr>
-          <a:xfrm>
-            <a:off x="367200" y="3128400"/>
-            <a:ext cx="79200" cy="1234800"/>
-          </a:xfrm>
-          <a:prstGeom prst="rect">
-            <a:avLst/>
-          </a:prstGeom>
-          <a:solidFill>
-            <a:srgbClr val="2E5FA3"/>
-          </a:solidFill>
-          <a:ln>
-            <a:noFill/>
-          </a:ln>
-        </p:spPr>
-        <p:style>
-          <a:lnRef idx="1">
-            <a:schemeClr val="accent1"/>
-          </a:lnRef>
-          <a:fillRef idx="3">
-            <a:schemeClr val="accent1"/>
-          </a:fillRef>
-          <a:effectRef idx="2">
-            <a:schemeClr val="accent1"/>
-          </a:effectRef>
-          <a:fontRef idx="minor">
-            <a:schemeClr val="lt1"/>
-          </a:fontRef>
-        </p:style>
-        <p:txBody>
-          <a:bodyPr rtlCol="0" anchor="ctr"/>
-          <a:lstStyle/>
-          <a:p>
-            <a:pPr algn="ctr"/>
-          </a:p>
-        </p:txBody>
-      </p:sp>
-      <p:sp>
-        <p:nvSpPr>
-          <p:cNvPr id="20" name="TextBox 19"/>
-          <p:cNvSpPr txBox="1"/>
-          <p:nvPr/>
-        </p:nvSpPr>
-        <p:spPr>
-          <a:xfrm>
-            <a:off x="475200" y="3157200"/>
-            <a:ext cx="8298000" cy="1198800"/>
-          </a:xfrm>
-          <a:prstGeom prst="rect">
-            <a:avLst/>
-          </a:prstGeom>
-          <a:noFill/>
-        </p:spPr>
-        <p:txBody>
-          <a:bodyPr wrap="square">
-            <a:spAutoFit/>
-          </a:bodyPr>
-          <a:lstStyle/>
-          <a:p>
-            <a:pPr algn="l"/>
-            <a:r>
-              <a:rPr sz="850" b="0" i="0">
-                <a:solidFill>
-                  <a:srgbClr val="555555"/>
-                </a:solidFill>
-                <a:latin typeface="Calibri"/>
-              </a:rPr>
-              <a:t>Tesla affiche un EV/EBITDA de 109,9x (vs médiane peers 15x) et un P/E de 342,9x (vs médiane 25x), soit une prime de 630% et 1270% respectivement. Cette prime est justifiée par sa croissance supérieure et son écosystème intégré, mais une convergence vers la médiane peers impliquerait un downside de 85%.</a:t>
-            </a:r>
-          </a:p>
-        </p:txBody>
-      </p:sp>
     </p:spTree>
   </p:cSld>
   <p:clrMapOvr>
@@ -13305,151 +12012,222 @@
           </a:p>
         </p:txBody>
       </p:sp>
-      <p:pic>
-        <p:nvPicPr>
-          <p:cNvPr id="17" name="Picture 16" descr="image.png"/>
-          <p:cNvPicPr>
-            <a:picLocks noChangeAspect="1"/>
-          </p:cNvPicPr>
-          <p:nvPr/>
-        </p:nvPicPr>
-        <p:blipFill>
-          <a:blip r:embed="rId2"/>
-          <a:stretch>
-            <a:fillRect/>
-          </a:stretch>
-        </p:blipFill>
-        <p:spPr>
-          <a:xfrm>
-            <a:off x="367200" y="914400"/>
-            <a:ext cx="8413200" cy="2448000"/>
-          </a:xfrm>
-          <a:prstGeom prst="rect">
-            <a:avLst/>
-          </a:prstGeom>
-        </p:spPr>
-      </p:pic>
-      <p:sp>
-        <p:nvSpPr>
-          <p:cNvPr id="18" name="Rectangle 17"/>
-          <p:cNvSpPr/>
-          <p:nvPr/>
-        </p:nvSpPr>
-        <p:spPr>
-          <a:xfrm>
-            <a:off x="367200" y="3488400"/>
-            <a:ext cx="8413200" cy="914400"/>
-          </a:xfrm>
-          <a:prstGeom prst="rect">
-            <a:avLst/>
-          </a:prstGeom>
-          <a:solidFill>
-            <a:srgbClr val="F5F7FA"/>
-          </a:solidFill>
-          <a:ln>
-            <a:noFill/>
-          </a:ln>
-        </p:spPr>
-        <p:style>
-          <a:lnRef idx="1">
-            <a:schemeClr val="accent1"/>
-          </a:lnRef>
-          <a:fillRef idx="3">
-            <a:schemeClr val="accent1"/>
-          </a:fillRef>
-          <a:effectRef idx="2">
-            <a:schemeClr val="accent1"/>
-          </a:effectRef>
-          <a:fontRef idx="minor">
-            <a:schemeClr val="lt1"/>
-          </a:fontRef>
-        </p:style>
-        <p:txBody>
-          <a:bodyPr rtlCol="0" anchor="ctr"/>
-          <a:lstStyle/>
-          <a:p>
-            <a:pPr algn="ctr"/>
-          </a:p>
-        </p:txBody>
-      </p:sp>
-      <p:sp>
-        <p:nvSpPr>
-          <p:cNvPr id="19" name="Rectangle 18"/>
-          <p:cNvSpPr/>
-          <p:nvPr/>
-        </p:nvSpPr>
-        <p:spPr>
-          <a:xfrm>
-            <a:off x="367200" y="3488400"/>
-            <a:ext cx="79200" cy="914400"/>
-          </a:xfrm>
-          <a:prstGeom prst="rect">
-            <a:avLst/>
-          </a:prstGeom>
-          <a:solidFill>
-            <a:srgbClr val="2E5FA3"/>
-          </a:solidFill>
-          <a:ln>
-            <a:noFill/>
-          </a:ln>
-        </p:spPr>
-        <p:style>
-          <a:lnRef idx="1">
-            <a:schemeClr val="accent1"/>
-          </a:lnRef>
-          <a:fillRef idx="3">
-            <a:schemeClr val="accent1"/>
-          </a:fillRef>
-          <a:effectRef idx="2">
-            <a:schemeClr val="accent1"/>
-          </a:effectRef>
-          <a:fontRef idx="minor">
-            <a:schemeClr val="lt1"/>
-          </a:fontRef>
-        </p:style>
-        <p:txBody>
-          <a:bodyPr rtlCol="0" anchor="ctr"/>
-          <a:lstStyle/>
-          <a:p>
-            <a:pPr algn="ctr"/>
-          </a:p>
-        </p:txBody>
-      </p:sp>
-      <p:sp>
-        <p:nvSpPr>
-          <p:cNvPr id="20" name="TextBox 19"/>
-          <p:cNvSpPr txBox="1"/>
-          <p:nvPr/>
-        </p:nvSpPr>
-        <p:spPr>
-          <a:xfrm>
-            <a:off x="475200" y="3517200"/>
-            <a:ext cx="8298000" cy="878400"/>
-          </a:xfrm>
-          <a:prstGeom prst="rect">
-            <a:avLst/>
-          </a:prstGeom>
-          <a:noFill/>
-        </p:spPr>
-        <p:txBody>
-          <a:bodyPr wrap="square">
-            <a:spAutoFit/>
-          </a:bodyPr>
-          <a:lstStyle/>
-          <a:p>
-            <a:pPr algn="l"/>
-            <a:r>
-              <a:rPr sz="850" b="0" i="0">
-                <a:solidFill>
-                  <a:srgbClr val="555555"/>
-                </a:solidFill>
-                <a:latin typeface="Calibri"/>
-              </a:rPr>
-              <a:t>Avec un WACC de 14,8% et un TGR de 2,5%, le prix implicite DCF est de 360 USD (vs cours 346,65 USD), suggérant une légère sous-valorisation. L'upside dépend de la réalisation des catalyseurs (Robotaxi, énergie) et de la reprise des marges.</a:t>
-            </a:r>
-          </a:p>
-        </p:txBody>
-      </p:sp>
+      <p:graphicFrame>
+        <p:nvGraphicFramePr>
+          <p:cNvPr id="17" name="Table 16"/>
+          <p:cNvGraphicFramePr>
+            <a:graphicFrameLocks noGrp="1"/>
+          </p:cNvGraphicFramePr>
+          <p:nvPr/>
+        </p:nvGraphicFramePr>
+        <p:xfrm>
+          <a:off x="367200" y="914400"/>
+          <a:ext cx="8413200" cy="615600"/>
+        </p:xfrm>
+        <a:graphic>
+          <a:graphicData uri="http://schemas.openxmlformats.org/drawingml/2006/table">
+            <a:tbl>
+              <a:tblPr firstRow="1" bandRow="1">
+                <a:tableStyleId>{5C22544A-7EE6-4342-B048-85BDC9FD1C3A}</a:tableStyleId>
+              </a:tblPr>
+              <a:tblGrid>
+                <a:gridCol w="2944620"/>
+                <a:gridCol w="1682640"/>
+                <a:gridCol w="1682640"/>
+                <a:gridCol w="2103300"/>
+              </a:tblGrid>
+              <a:tr h="307800">
+                <a:tc>
+                  <a:txBody>
+                    <a:bodyPr/>
+                    <a:lstStyle/>
+                    <a:p>
+                      <a:pPr algn="l"/>
+                      <a:r>
+                        <a:rPr sz="800" b="1" i="0">
+                          <a:solidFill>
+                            <a:srgbClr val="FFFFFF"/>
+                          </a:solidFill>
+                          <a:latin typeface="Calibri"/>
+                        </a:rPr>
+                        <a:t>Méthode</a:t>
+                      </a:r>
+                    </a:p>
+                  </a:txBody>
+                  <a:tcPr>
+                    <a:solidFill>
+                      <a:srgbClr val="1B3A6B"/>
+                    </a:solidFill>
+                  </a:tcPr>
+                </a:tc>
+                <a:tc>
+                  <a:txBody>
+                    <a:bodyPr/>
+                    <a:lstStyle/>
+                    <a:p>
+                      <a:pPr algn="ctr"/>
+                      <a:r>
+                        <a:rPr sz="800" b="1" i="0">
+                          <a:solidFill>
+                            <a:srgbClr val="FFFFFF"/>
+                          </a:solidFill>
+                          <a:latin typeface="Calibri"/>
+                        </a:rPr>
+                        <a:t>Fourchette basse</a:t>
+                      </a:r>
+                    </a:p>
+                  </a:txBody>
+                  <a:tcPr>
+                    <a:solidFill>
+                      <a:srgbClr val="1B3A6B"/>
+                    </a:solidFill>
+                  </a:tcPr>
+                </a:tc>
+                <a:tc>
+                  <a:txBody>
+                    <a:bodyPr/>
+                    <a:lstStyle/>
+                    <a:p>
+                      <a:pPr algn="ctr"/>
+                      <a:r>
+                        <a:rPr sz="800" b="1" i="0">
+                          <a:solidFill>
+                            <a:srgbClr val="FFFFFF"/>
+                          </a:solidFill>
+                          <a:latin typeface="Calibri"/>
+                        </a:rPr>
+                        <a:t>Fourchette haute</a:t>
+                      </a:r>
+                    </a:p>
+                  </a:txBody>
+                  <a:tcPr>
+                    <a:solidFill>
+                      <a:srgbClr val="1B3A6B"/>
+                    </a:solidFill>
+                  </a:tcPr>
+                </a:tc>
+                <a:tc>
+                  <a:txBody>
+                    <a:bodyPr/>
+                    <a:lstStyle/>
+                    <a:p>
+                      <a:pPr algn="ctr"/>
+                      <a:r>
+                        <a:rPr sz="800" b="1" i="0">
+                          <a:solidFill>
+                            <a:srgbClr val="FFFFFF"/>
+                          </a:solidFill>
+                          <a:latin typeface="Calibri"/>
+                        </a:rPr>
+                        <a:t>Point central</a:t>
+                      </a:r>
+                    </a:p>
+                  </a:txBody>
+                  <a:tcPr>
+                    <a:solidFill>
+                      <a:srgbClr val="1B3A6B"/>
+                    </a:solidFill>
+                  </a:tcPr>
+                </a:tc>
+              </a:tr>
+              <a:tr h="307800">
+                <a:tc>
+                  <a:txBody>
+                    <a:bodyPr/>
+                    <a:lstStyle/>
+                    <a:p>
+                      <a:pPr algn="l"/>
+                      <a:r>
+                        <a:rPr sz="800" b="0" i="0">
+                          <a:solidFill>
+                            <a:srgbClr val="0D0D0D"/>
+                          </a:solidFill>
+                          <a:latin typeface="Calibri"/>
+                        </a:rPr>
+                        <a:t>Cours actuel (346,65)</a:t>
+                      </a:r>
+                    </a:p>
+                  </a:txBody>
+                  <a:tcPr>
+                    <a:solidFill>
+                      <a:srgbClr val="EEF3FA"/>
+                    </a:solidFill>
+                  </a:tcPr>
+                </a:tc>
+                <a:tc>
+                  <a:txBody>
+                    <a:bodyPr/>
+                    <a:lstStyle/>
+                    <a:p>
+                      <a:pPr algn="ctr"/>
+                      <a:r>
+                        <a:rPr sz="800" b="0" i="0">
+                          <a:solidFill>
+                            <a:srgbClr val="0D0D0D"/>
+                          </a:solidFill>
+                          <a:latin typeface="Calibri"/>
+                        </a:rPr>
+                        <a:t>—</a:t>
+                      </a:r>
+                    </a:p>
+                  </a:txBody>
+                  <a:tcPr>
+                    <a:solidFill>
+                      <a:srgbClr val="EEF3FA"/>
+                    </a:solidFill>
+                  </a:tcPr>
+                </a:tc>
+                <a:tc>
+                  <a:txBody>
+                    <a:bodyPr/>
+                    <a:lstStyle/>
+                    <a:p>
+                      <a:pPr algn="ctr"/>
+                      <a:r>
+                        <a:rPr sz="800" b="0" i="0">
+                          <a:solidFill>
+                            <a:srgbClr val="0D0D0D"/>
+                          </a:solidFill>
+                          <a:latin typeface="Calibri"/>
+                        </a:rPr>
+                        <a:t>—</a:t>
+                      </a:r>
+                    </a:p>
+                  </a:txBody>
+                  <a:tcPr>
+                    <a:solidFill>
+                      <a:srgbClr val="EEF3FA"/>
+                    </a:solidFill>
+                  </a:tcPr>
+                </a:tc>
+                <a:tc>
+                  <a:txBody>
+                    <a:bodyPr/>
+                    <a:lstStyle/>
+                    <a:p>
+                      <a:pPr algn="ctr"/>
+                      <a:r>
+                        <a:rPr sz="800" b="0" i="0">
+                          <a:solidFill>
+                            <a:srgbClr val="0D0D0D"/>
+                          </a:solidFill>
+                          <a:latin typeface="Calibri"/>
+                        </a:rPr>
+                        <a:t>346,65</a:t>
+                      </a:r>
+                    </a:p>
+                  </a:txBody>
+                  <a:tcPr>
+                    <a:solidFill>
+                      <a:srgbClr val="EEF3FA"/>
+                    </a:solidFill>
+                  </a:tcPr>
+                </a:tc>
+              </a:tr>
+            </a:tbl>
+          </a:graphicData>
+        </a:graphic>
+      </p:graphicFrame>
     </p:spTree>
   </p:cSld>
   <p:clrMapOvr>
@@ -21221,7 +19999,7 @@
                 </a:solidFill>
                 <a:latin typeface="Calibri"/>
               </a:rPr>
-              <a:t>Marges en érosion</a:t>
+              <a:t>Risque 1</a:t>
             </a:r>
           </a:p>
         </p:txBody>
@@ -21256,7 +20034,7 @@
                 </a:solidFill>
                 <a:latin typeface="Calibri"/>
               </a:rPr>
-              <a:t>Les marges de Tesla s’effritent sous pression concurrentielle : la marge brute de 18% en 2025 reste inférieure à la moyenne historique de 25% en 2022, tandis que la marge nette de 4% est inférieure à celle de BYD (5,2%). La baisse des prix de 20% en 2024 aggrave la compression des revenus, avec une croissance négative de -3% confirmant un déclin structurel.</a:t>
+              <a:t>Risque macro-économique : remontée des taux ou ralentissement de la demande mondiale.</a:t>
             </a:r>
           </a:p>
         </p:txBody>
@@ -21377,7 +20155,7 @@
                 </a:solidFill>
                 <a:latin typeface="Calibri"/>
               </a:rPr>
-              <a:t>Surévaluation extrême</a:t>
+              <a:t>Risque 2</a:t>
             </a:r>
           </a:p>
         </p:txBody>
@@ -21412,7 +20190,7 @@
                 </a:solidFill>
                 <a:latin typeface="Calibri"/>
               </a:rPr>
-              <a:t>Le ratio EV/EBITDA à 109,86x est 3,5 fois supérieur à celui de Ford (31,2x), reflétant une valorisation déconnectée des fondamentaux. Le P/E de 342,85x dépasse celui de 99% des constructeurs automobiles mondiaux, indiquant un risque de correction violente.</a:t>
+              <a:t>Risque sectoriel : intensification de la concurrence ou disruption technologique.</a:t>
             </a:r>
           </a:p>
         </p:txBody>
@@ -21533,7 +20311,7 @@
                 </a:solidFill>
                 <a:latin typeface="Calibri"/>
               </a:rPr>
-              <a:t>Dette structurelle</a:t>
+              <a:t>Risque 3</a:t>
             </a:r>
           </a:p>
         </p:txBody>
@@ -21568,7 +20346,7 @@
                 </a:solidFill>
                 <a:latin typeface="Calibri"/>
               </a:rPr>
-              <a:t>L’indice Altman Z à 15,62, bien que élevé, masque une dette nette de 7,1 milliards de dollars en 2024, soit 1,2 fois l’EBITDA, un niveau préoccupant pour un secteur cyclique. La trésorerie opérationnelle a chuté de 40% depuis 2022, limitant la marge de manœuvre.</a:t>
+              <a:t>Risque spécifique : détérioration des marges ou exécution stratégique.</a:t>
             </a:r>
           </a:p>
         </p:txBody>
@@ -21782,7 +20560,7 @@
                           </a:solidFill>
                           <a:latin typeface="Calibri"/>
                         </a:rPr>
-                        <a:t>Récession mondiale en 2026 réduisant la demande de VE de 20%</a:t>
+                        <a:t>Remontée des taux directeurs &gt; 200bps</a:t>
                       </a:r>
                     </a:p>
                   </a:txBody>
@@ -21853,7 +20631,7 @@
                           </a:solidFill>
                           <a:latin typeface="Calibri"/>
                         </a:rPr>
-                        <a:t>Baisse des subventions gouvernementales pour les VE en Europe et Chine (-30%)</a:t>
+                        <a:t>Rupture technologique remettant en cause le modèle</a:t>
                       </a:r>
                     </a:p>
                   </a:txBody>
@@ -21924,7 +20702,7 @@
                           </a:solidFill>
                           <a:latin typeface="Calibri"/>
                         </a:rPr>
-                        <a:t>Retards majeurs dans le déploiement du Robotaxi ou rappel massif de véhicules</a:t>
+                        <a:t>Détérioration matérielle des marges opérationnelles</a:t>
                       </a:r>
                     </a:p>
                   </a:txBody>
@@ -22892,7 +21670,7 @@
                 </a:solidFill>
                 <a:latin typeface="Calibri"/>
               </a:rPr>
-              <a:t>Prix cible base : 360 $  ·  Upside : +3,9 %  ·  Bear : 280 $ (-19,2 %)  ·  Bull : 420 $ (+21,2 %)</a:t>
+              <a:t>Prix cible base : — $  ·  Upside : —  ·  Bear : — $ (—)  ·  Bull : — $ (—)</a:t>
             </a:r>
           </a:p>
         </p:txBody>
@@ -23048,7 +21826,7 @@
                 </a:solidFill>
                 <a:latin typeface="Calibri"/>
               </a:rPr>
-              <a:t>Leadership technologique</a:t>
+              <a:t>—</a:t>
             </a:r>
           </a:p>
         </p:txBody>
@@ -23083,7 +21861,7 @@
                 </a:solidFill>
                 <a:latin typeface="Calibri"/>
               </a:rPr>
-              <a:t>Tesla bénéficie d'une avance technologique unique avec son logiciel FSD et son écosystème intégré, captant 20% du marché premium des VE en 2025</a:t>
+              <a:t>—</a:t>
             </a:r>
           </a:p>
         </p:txBody>
@@ -23161,7 +21939,7 @@
                 </a:solidFill>
                 <a:latin typeface="Calibri"/>
               </a:rPr>
-              <a:t>Écosystème intégré</a:t>
+              <a:t>—</a:t>
             </a:r>
           </a:p>
         </p:txBody>
@@ -23196,7 +21974,7 @@
                 </a:solidFill>
                 <a:latin typeface="Calibri"/>
               </a:rPr>
-              <a:t>La marge brute devrait rebondir à 22% d'ici 2027 grâce à la montée en puissance du segment énergie et à l'optimisation des coûts de production</a:t>
+              <a:t>—</a:t>
             </a:r>
           </a:p>
         </p:txBody>
@@ -23274,7 +22052,7 @@
                 </a:solidFill>
                 <a:latin typeface="Calibri"/>
               </a:rPr>
-              <a:t>Marque premium</a:t>
+              <a:t>—</a:t>
             </a:r>
           </a:p>
         </p:txBody>
@@ -23309,7 +22087,7 @@
                 </a:solidFill>
                 <a:latin typeface="Calibri"/>
               </a:rPr>
-              <a:t>Le lancement du Robotaxi en 2026 pourrait générer 15 milliards de dollars de revenus annuels d'ici 2028.</a:t>
+              <a:t>—</a:t>
             </a:r>
           </a:p>
         </p:txBody>
@@ -23465,7 +22243,7 @@
                 </a:solidFill>
                 <a:latin typeface="Calibri"/>
               </a:rPr>
-              <a:t>Concurrence accrue</a:t>
+              <a:t>—</a:t>
             </a:r>
           </a:p>
         </p:txBody>
@@ -23500,7 +22278,7 @@
                 </a:solidFill>
                 <a:latin typeface="Calibri"/>
               </a:rPr>
-              <a:t>Concurrence chinoise : BYD et NIO captent 30% du marché premium des VE en 2025, comprimant les prix de 8%</a:t>
+              <a:t>Impact potentiel sur la thèse d'investissement — surveillance recommandée sur les 6-12 prochains mois.</a:t>
             </a:r>
           </a:p>
         </p:txBody>
@@ -23578,7 +22356,7 @@
                 </a:solidFill>
                 <a:latin typeface="Calibri"/>
               </a:rPr>
-              <a:t>Régulation</a:t>
+              <a:t>—</a:t>
             </a:r>
           </a:p>
         </p:txBody>
@@ -23613,7 +22391,7 @@
                 </a:solidFill>
                 <a:latin typeface="Calibri"/>
               </a:rPr>
-              <a:t>Régulation européenne : normes CO2 plus strictes en 2026 pourraient coûter 1 milliard de dollars en amendes</a:t>
+              <a:t>Impact potentiel sur la thèse d'investissement — surveillance recommandée sur les 6-12 prochains mois.</a:t>
             </a:r>
           </a:p>
         </p:txBody>
@@ -23691,7 +22469,7 @@
                 </a:solidFill>
                 <a:latin typeface="Calibri"/>
               </a:rPr>
-              <a:t>Coûts fixes élevés</a:t>
+              <a:t>—</a:t>
             </a:r>
           </a:p>
         </p:txBody>
@@ -23726,7 +22504,7 @@
                 </a:solidFill>
                 <a:latin typeface="Calibri"/>
               </a:rPr>
-              <a:t>Risque d'exécution : délais de livraison Cybertruck dépassant 12 mois en 2025, impactant la satisfaction client</a:t>
+              <a:t>Impact potentiel sur la thèse d'investissement — surveillance recommandée sur les 6-12 prochains mois.</a:t>
             </a:r>
           </a:p>
         </p:txBody>
@@ -23968,7 +22746,7 @@
                 </a:solidFill>
                 <a:latin typeface="Calibri"/>
               </a:rPr>
-              <a:t>Robotaxi 2026: Le lancement commercial du Robotaxi en 2026</a:t>
+              <a:t>—</a:t>
             </a:r>
           </a:p>
         </p:txBody>
@@ -24046,7 +22824,7 @@
                 </a:solidFill>
                 <a:latin typeface="Calibri"/>
               </a:rPr>
-              <a:t>Subventions IRA: Les subventions américaines pour l'énergie</a:t>
+              <a:t>—</a:t>
             </a:r>
           </a:p>
         </p:txBody>
@@ -24283,7 +23061,7 @@
                           </a:solidFill>
                           <a:latin typeface="Calibri"/>
                         </a:rPr>
-                        <a:t>-10,0x</a:t>
+                        <a:t>—</a:t>
                       </a:r>
                     </a:p>
                   </a:txBody>
@@ -24354,7 +23132,7 @@
                           </a:solidFill>
                           <a:latin typeface="Calibri"/>
                         </a:rPr>
-                        <a:t>-8,0x</a:t>
+                        <a:t>—</a:t>
                       </a:r>
                     </a:p>
                   </a:txBody>
@@ -24402,7 +23180,7 @@
                           </a:solidFill>
                           <a:latin typeface="Calibri"/>
                         </a:rPr>
-                        <a:t>360 $</a:t>
+                        <a:t>— $</a:t>
                       </a:r>
                     </a:p>
                   </a:txBody>
@@ -24425,7 +23203,7 @@
                           </a:solidFill>
                           <a:latin typeface="Calibri"/>
                         </a:rPr>
-                        <a:t>Upside +3,9 %</a:t>
+                        <a:t>Upside —</a:t>
                       </a:r>
                     </a:p>
                   </a:txBody>
@@ -24712,7 +23490,7 @@
                 </a:solidFill>
                 <a:latin typeface="Calibri"/>
               </a:rPr>
-              <a:t>vs -8,0x med. pairs</a:t>
+              <a:t>vs — med. pairs</a:t>
             </a:r>
           </a:p>
         </p:txBody>
@@ -25024,7 +23802,7 @@
                 </a:solidFill>
                 <a:latin typeface="Calibri"/>
               </a:rPr>
-              <a:t>360 $</a:t>
+              <a:t>— $</a:t>
             </a:r>
           </a:p>
         </p:txBody>
@@ -25094,7 +23872,7 @@
                 </a:solidFill>
                 <a:latin typeface="Calibri"/>
               </a:rPr>
-              <a:t>Upside +3,9 % vs cours</a:t>
+              <a:t>Upside — vs cours</a:t>
             </a:r>
           </a:p>
         </p:txBody>
@@ -25215,7 +23993,7 @@
                 </a:solidFill>
                 <a:latin typeface="Calibri"/>
               </a:rPr>
-              <a:t>+0,358</a:t>
+              <a:t>+0,335</a:t>
             </a:r>
           </a:p>
         </p:txBody>
@@ -26328,7 +25106,7 @@
                 </a:solidFill>
                 <a:latin typeface="Calibri"/>
               </a:rPr>
-              <a:t>Score agrégé : +0,358</a:t>
+              <a:t>Score agrégé : +0,335</a:t>
             </a:r>
           </a:p>
         </p:txBody>
@@ -26640,7 +25418,7 @@
                 </a:solidFill>
                 <a:latin typeface="Calibri"/>
               </a:rPr>
-              <a:t>56,7 %</a:t>
+              <a:t>54,6 %</a:t>
             </a:r>
           </a:p>
         </p:txBody>
@@ -27096,7 +25874,7 @@
                           </a:solidFill>
                           <a:latin typeface="Calibri"/>
                         </a:rPr>
-                        <a:t>20</a:t>
+                        <a:t>19</a:t>
                       </a:r>
                     </a:p>
                   </a:txBody>
@@ -27119,7 +25897,7 @@
                           </a:solidFill>
                           <a:latin typeface="Calibri"/>
                         </a:rPr>
-                        <a:t>+0,567</a:t>
+                        <a:t>+0,546</a:t>
                       </a:r>
                     </a:p>
                   </a:txBody>
@@ -27142,7 +25920,7 @@
                           </a:solidFill>
                           <a:latin typeface="Calibri"/>
                         </a:rPr>
-                        <a:t>Lancement Robotaxi en 2026 : potentiel de 15 milliards de dollars de revenus annuels d'ici 2028 avec une marge EBITDA de 30%</a:t>
+                        <a:t>Catalyseurs, croissance, résultats</a:t>
                       </a:r>
                     </a:p>
                   </a:txBody>
@@ -27190,7 +25968,7 @@
                           </a:solidFill>
                           <a:latin typeface="Calibri"/>
                         </a:rPr>
-                        <a:t>4</a:t>
+                        <a:t>5</a:t>
                       </a:r>
                     </a:p>
                   </a:txBody>
@@ -27213,7 +25991,7 @@
                           </a:solidFill>
                           <a:latin typeface="Calibri"/>
                         </a:rPr>
-                        <a:t>+0,224</a:t>
+                        <a:t>+0,243</a:t>
                       </a:r>
                     </a:p>
                   </a:txBody>
@@ -27307,7 +26085,7 @@
                           </a:solidFill>
                           <a:latin typeface="Calibri"/>
                         </a:rPr>
-                        <a:t>+0,209</a:t>
+                        <a:t>+0,211</a:t>
                       </a:r>
                     </a:p>
                   </a:txBody>
@@ -27330,7 +26108,7 @@
                           </a:solidFill>
                           <a:latin typeface="Calibri"/>
                         </a:rPr>
-                        <a:t>Concurrence chinoise : BYD et NIO captent 30% du marché premium des VE en 2025, comprimant les prix de 8%</a:t>
+                        <a:t>Risques macro, concurrence, dette</a:t>
                       </a:r>
                     </a:p>
                   </a:txBody>
@@ -27375,7 +26153,7 @@
                 </a:solidFill>
                 <a:latin typeface="Calibri"/>
               </a:rPr>
-              <a:t>La presse financière affiche un optimisme marqué pour Tesla cette semaine, portée par les partenariats stratégiques et les perspectives de croissance. Cependant, les risques liés aux chaînes d'approvisionnement et à la dépendance géopolitique restent une ombre persistante.</a:t>
+              <a:t>La presse financière affiche un optimisme marqué pour Tesla cette semaine, portée par des partenariats stratégiques et des prévisions de livraisons record. Cependant, les tensions géopolitiques et les défis logistiques pèsent sur le sentiment global.</a:t>
             </a:r>
           </a:p>
         </p:txBody>
@@ -30283,127 +29061,6 @@
           </a:graphicData>
         </a:graphic>
       </p:graphicFrame>
-      <p:sp>
-        <p:nvSpPr>
-          <p:cNvPr id="21" name="Rectangle 20"/>
-          <p:cNvSpPr/>
-          <p:nvPr/>
-        </p:nvSpPr>
-        <p:spPr>
-          <a:xfrm>
-            <a:off x="367200" y="3326400"/>
-            <a:ext cx="8413200" cy="1004400"/>
-          </a:xfrm>
-          <a:prstGeom prst="rect">
-            <a:avLst/>
-          </a:prstGeom>
-          <a:solidFill>
-            <a:srgbClr val="F5F7FA"/>
-          </a:solidFill>
-          <a:ln>
-            <a:noFill/>
-          </a:ln>
-        </p:spPr>
-        <p:style>
-          <a:lnRef idx="1">
-            <a:schemeClr val="accent1"/>
-          </a:lnRef>
-          <a:fillRef idx="3">
-            <a:schemeClr val="accent1"/>
-          </a:fillRef>
-          <a:effectRef idx="2">
-            <a:schemeClr val="accent1"/>
-          </a:effectRef>
-          <a:fontRef idx="minor">
-            <a:schemeClr val="lt1"/>
-          </a:fontRef>
-        </p:style>
-        <p:txBody>
-          <a:bodyPr rtlCol="0" anchor="ctr"/>
-          <a:lstStyle/>
-          <a:p>
-            <a:pPr algn="ctr"/>
-          </a:p>
-        </p:txBody>
-      </p:sp>
-      <p:sp>
-        <p:nvSpPr>
-          <p:cNvPr id="22" name="Rectangle 21"/>
-          <p:cNvSpPr/>
-          <p:nvPr/>
-        </p:nvSpPr>
-        <p:spPr>
-          <a:xfrm>
-            <a:off x="367200" y="3326400"/>
-            <a:ext cx="79200" cy="1004400"/>
-          </a:xfrm>
-          <a:prstGeom prst="rect">
-            <a:avLst/>
-          </a:prstGeom>
-          <a:solidFill>
-            <a:srgbClr val="2E5FA3"/>
-          </a:solidFill>
-          <a:ln>
-            <a:noFill/>
-          </a:ln>
-        </p:spPr>
-        <p:style>
-          <a:lnRef idx="1">
-            <a:schemeClr val="accent1"/>
-          </a:lnRef>
-          <a:fillRef idx="3">
-            <a:schemeClr val="accent1"/>
-          </a:fillRef>
-          <a:effectRef idx="2">
-            <a:schemeClr val="accent1"/>
-          </a:effectRef>
-          <a:fontRef idx="minor">
-            <a:schemeClr val="lt1"/>
-          </a:fontRef>
-        </p:style>
-        <p:txBody>
-          <a:bodyPr rtlCol="0" anchor="ctr"/>
-          <a:lstStyle/>
-          <a:p>
-            <a:pPr algn="ctr"/>
-          </a:p>
-        </p:txBody>
-      </p:sp>
-      <p:sp>
-        <p:nvSpPr>
-          <p:cNvPr id="23" name="TextBox 22"/>
-          <p:cNvSpPr txBox="1"/>
-          <p:nvPr/>
-        </p:nvSpPr>
-        <p:spPr>
-          <a:xfrm>
-            <a:off x="475200" y="3355200"/>
-            <a:ext cx="8298000" cy="968400"/>
-          </a:xfrm>
-          <a:prstGeom prst="rect">
-            <a:avLst/>
-          </a:prstGeom>
-          <a:noFill/>
-        </p:spPr>
-        <p:txBody>
-          <a:bodyPr wrap="square">
-            <a:spAutoFit/>
-          </a:bodyPr>
-          <a:lstStyle/>
-          <a:p>
-            <a:pPr algn="l"/>
-            <a:r>
-              <a:rPr sz="850" b="0" i="0">
-                <a:solidFill>
-                  <a:srgbClr val="555555"/>
-                </a:solidFill>
-                <a:latin typeface="Calibri"/>
-              </a:rPr>
-              <a:t>Tesla affiche des multiples élevés (EV/EBITDA 109.9x) comparés à ses pairs, reflétant une prime de croissance. La décote actuelle suggère une attente de rebond des marges et de la croissance.</a:t>
-            </a:r>
-          </a:p>
-        </p:txBody>
-      </p:sp>
     </p:spTree>
   </p:cSld>
   <p:clrMapOvr>
@@ -31686,127 +30343,6 @@
           </a:prstGeom>
         </p:spPr>
       </p:pic>
-      <p:sp>
-        <p:nvSpPr>
-          <p:cNvPr id="35" name="Rectangle 34"/>
-          <p:cNvSpPr/>
-          <p:nvPr/>
-        </p:nvSpPr>
-        <p:spPr>
-          <a:xfrm>
-            <a:off x="367200" y="4132800"/>
-            <a:ext cx="8413200" cy="687600"/>
-          </a:xfrm>
-          <a:prstGeom prst="rect">
-            <a:avLst/>
-          </a:prstGeom>
-          <a:solidFill>
-            <a:srgbClr val="F5F7FA"/>
-          </a:solidFill>
-          <a:ln>
-            <a:noFill/>
-          </a:ln>
-        </p:spPr>
-        <p:style>
-          <a:lnRef idx="1">
-            <a:schemeClr val="accent1"/>
-          </a:lnRef>
-          <a:fillRef idx="3">
-            <a:schemeClr val="accent1"/>
-          </a:fillRef>
-          <a:effectRef idx="2">
-            <a:schemeClr val="accent1"/>
-          </a:effectRef>
-          <a:fontRef idx="minor">
-            <a:schemeClr val="lt1"/>
-          </a:fontRef>
-        </p:style>
-        <p:txBody>
-          <a:bodyPr rtlCol="0" anchor="ctr"/>
-          <a:lstStyle/>
-          <a:p>
-            <a:pPr algn="ctr"/>
-          </a:p>
-        </p:txBody>
-      </p:sp>
-      <p:sp>
-        <p:nvSpPr>
-          <p:cNvPr id="36" name="Rectangle 35"/>
-          <p:cNvSpPr/>
-          <p:nvPr/>
-        </p:nvSpPr>
-        <p:spPr>
-          <a:xfrm>
-            <a:off x="367200" y="4132800"/>
-            <a:ext cx="79200" cy="687600"/>
-          </a:xfrm>
-          <a:prstGeom prst="rect">
-            <a:avLst/>
-          </a:prstGeom>
-          <a:solidFill>
-            <a:srgbClr val="2E5FA3"/>
-          </a:solidFill>
-          <a:ln>
-            <a:noFill/>
-          </a:ln>
-        </p:spPr>
-        <p:style>
-          <a:lnRef idx="1">
-            <a:schemeClr val="accent1"/>
-          </a:lnRef>
-          <a:fillRef idx="3">
-            <a:schemeClr val="accent1"/>
-          </a:fillRef>
-          <a:effectRef idx="2">
-            <a:schemeClr val="accent1"/>
-          </a:effectRef>
-          <a:fontRef idx="minor">
-            <a:schemeClr val="lt1"/>
-          </a:fontRef>
-        </p:style>
-        <p:txBody>
-          <a:bodyPr rtlCol="0" anchor="ctr"/>
-          <a:lstStyle/>
-          <a:p>
-            <a:pPr algn="ctr"/>
-          </a:p>
-        </p:txBody>
-      </p:sp>
-      <p:sp>
-        <p:nvSpPr>
-          <p:cNvPr id="37" name="TextBox 36"/>
-          <p:cNvSpPr txBox="1"/>
-          <p:nvPr/>
-        </p:nvSpPr>
-        <p:spPr>
-          <a:xfrm>
-            <a:off x="475200" y="4161600"/>
-            <a:ext cx="8298000" cy="651599"/>
-          </a:xfrm>
-          <a:prstGeom prst="rect">
-            <a:avLst/>
-          </a:prstGeom>
-          <a:noFill/>
-        </p:spPr>
-        <p:txBody>
-          <a:bodyPr wrap="square">
-            <a:spAutoFit/>
-          </a:bodyPr>
-          <a:lstStyle/>
-          <a:p>
-            <a:pPr algn="l"/>
-            <a:r>
-              <a:rPr sz="850" b="0" i="0">
-                <a:solidFill>
-                  <a:srgbClr val="555555"/>
-                </a:solidFill>
-                <a:latin typeface="Calibri"/>
-              </a:rPr>
-              <a:t>Tesla affiche une résilience opérationnelle malgré un ralentissement des revenus en 2025 (-3% YoY). Les marges se contractent fortement, reflétant des pressions concurrentielles et des coûts structurels élevés.</a:t>
-            </a:r>
-          </a:p>
-        </p:txBody>
-      </p:sp>
     </p:spTree>
   </p:cSld>
   <p:clrMapOvr>
@@ -32516,7 +31052,7 @@
                 </a:solidFill>
                 <a:latin typeface="Calibri"/>
               </a:rPr>
-              <a:t>Conviction : 55%</a:t>
+              <a:t>Conviction : 50%</a:t>
             </a:r>
           </a:p>
         </p:txBody>
@@ -32608,7 +31144,7 @@
         <p:spPr>
           <a:xfrm>
             <a:off x="324000" y="2196000"/>
-            <a:ext cx="1485000" cy="198000"/>
+            <a:ext cx="1350000" cy="198000"/>
           </a:xfrm>
           <a:prstGeom prst="rect">
             <a:avLst/>
@@ -32679,42 +31215,7 @@
       </p:sp>
       <p:sp>
         <p:nvSpPr>
-          <p:cNvPr id="24" name="TextBox 23"/>
-          <p:cNvSpPr txBox="1"/>
-          <p:nvPr/>
-        </p:nvSpPr>
-        <p:spPr>
-          <a:xfrm>
-            <a:off x="3060000" y="2196000"/>
-            <a:ext cx="432000" cy="198000"/>
-          </a:xfrm>
-          <a:prstGeom prst="rect">
-            <a:avLst/>
-          </a:prstGeom>
-          <a:noFill/>
-        </p:spPr>
-        <p:txBody>
-          <a:bodyPr wrap="square">
-            <a:spAutoFit/>
-          </a:bodyPr>
-          <a:lstStyle/>
-          <a:p>
-            <a:pPr algn="l"/>
-            <a:r>
-              <a:rPr sz="1000" b="1" i="0">
-                <a:solidFill>
-                  <a:srgbClr val="1B3A6B"/>
-                </a:solidFill>
-                <a:latin typeface="Calibri"/>
-              </a:rPr>
-              <a:t>55%</a:t>
-            </a:r>
-          </a:p>
-        </p:txBody>
-      </p:sp>
-      <p:sp>
-        <p:nvSpPr>
-          <p:cNvPr id="25" name="Rectangle 24"/>
+          <p:cNvPr id="24" name="Rectangle 23"/>
           <p:cNvSpPr/>
           <p:nvPr/>
         </p:nvSpPr>
@@ -32757,7 +31258,7 @@
       </p:sp>
       <p:sp>
         <p:nvSpPr>
-          <p:cNvPr id="26" name="TextBox 25"/>
+          <p:cNvPr id="25" name="TextBox 24"/>
           <p:cNvSpPr txBox="1"/>
           <p:nvPr/>
         </p:nvSpPr>
@@ -32785,14 +31286,14 @@
                 </a:solidFill>
                 <a:latin typeface="Calibri"/>
               </a:rPr>
-              <a:t>Delta conviction : +5% vs Avocat du Diable</a:t>
+              <a:t>Delta conviction : +0% vs Avocat du Diable</a:t>
             </a:r>
           </a:p>
         </p:txBody>
       </p:sp>
       <p:sp>
         <p:nvSpPr>
-          <p:cNvPr id="27" name="Rectangle 26"/>
+          <p:cNvPr id="26" name="Rectangle 25"/>
           <p:cNvSpPr/>
           <p:nvPr/>
         </p:nvSpPr>
@@ -32835,7 +31336,7 @@
       </p:sp>
       <p:sp>
         <p:nvSpPr>
-          <p:cNvPr id="28" name="TextBox 27"/>
+          <p:cNvPr id="27" name="TextBox 26"/>
           <p:cNvSpPr txBox="1"/>
           <p:nvPr/>
         </p:nvSpPr>
@@ -32870,7 +31371,7 @@
       </p:sp>
       <p:sp>
         <p:nvSpPr>
-          <p:cNvPr id="29" name="Rectangle 28"/>
+          <p:cNvPr id="28" name="Rectangle 27"/>
           <p:cNvSpPr/>
           <p:nvPr/>
         </p:nvSpPr>
@@ -32913,7 +31414,7 @@
       </p:sp>
       <p:sp>
         <p:nvSpPr>
-          <p:cNvPr id="30" name="TextBox 29"/>
+          <p:cNvPr id="29" name="TextBox 28"/>
           <p:cNvSpPr txBox="1"/>
           <p:nvPr/>
         </p:nvSpPr>
@@ -32941,176 +31442,20 @@
                 </a:solidFill>
                 <a:latin typeface="Calibri"/>
               </a:rPr>
-              <a:t>Tesla bénéficie d'une avance technologique unique avec son logiciel FSD et son écosystème intégré, captant 20% du marché premium des VE en 2025</a:t>
+              <a:t>Donnees de synthese non disponibles pour Tesla, Inc.. Relancer l'analyse pour obtenir la these complete.</a:t>
             </a:r>
           </a:p>
         </p:txBody>
       </p:sp>
       <p:sp>
         <p:nvSpPr>
-          <p:cNvPr id="31" name="Rectangle 30"/>
+          <p:cNvPr id="30" name="Rectangle 29"/>
           <p:cNvSpPr/>
           <p:nvPr/>
         </p:nvSpPr>
         <p:spPr>
           <a:xfrm>
-            <a:off x="3311999" y="1404000"/>
-            <a:ext cx="36000" cy="288000"/>
-          </a:xfrm>
-          <a:prstGeom prst="rect">
-            <a:avLst/>
-          </a:prstGeom>
-          <a:solidFill>
-            <a:srgbClr val="B06000"/>
-          </a:solidFill>
-          <a:ln>
-            <a:noFill/>
-          </a:ln>
-        </p:spPr>
-        <p:style>
-          <a:lnRef idx="1">
-            <a:schemeClr val="accent1"/>
-          </a:lnRef>
-          <a:fillRef idx="3">
-            <a:schemeClr val="accent1"/>
-          </a:fillRef>
-          <a:effectRef idx="2">
-            <a:schemeClr val="accent1"/>
-          </a:effectRef>
-          <a:fontRef idx="minor">
-            <a:schemeClr val="lt1"/>
-          </a:fontRef>
-        </p:style>
-        <p:txBody>
-          <a:bodyPr rtlCol="0" anchor="ctr"/>
-          <a:lstStyle/>
-          <a:p>
-            <a:pPr algn="ctr"/>
-          </a:p>
-        </p:txBody>
-      </p:sp>
-      <p:sp>
-        <p:nvSpPr>
-          <p:cNvPr id="32" name="TextBox 31"/>
-          <p:cNvSpPr txBox="1"/>
-          <p:nvPr/>
-        </p:nvSpPr>
-        <p:spPr>
-          <a:xfrm>
-            <a:off x="3401999" y="1422000"/>
-            <a:ext cx="5346000" cy="270000"/>
-          </a:xfrm>
-          <a:prstGeom prst="rect">
-            <a:avLst/>
-          </a:prstGeom>
-          <a:noFill/>
-        </p:spPr>
-        <p:txBody>
-          <a:bodyPr wrap="square">
-            <a:spAutoFit/>
-          </a:bodyPr>
-          <a:lstStyle/>
-          <a:p>
-            <a:pPr algn="l"/>
-            <a:r>
-              <a:rPr sz="850" b="0" i="0">
-                <a:solidFill>
-                  <a:srgbClr val="555555"/>
-                </a:solidFill>
-                <a:latin typeface="Calibri"/>
-              </a:rPr>
-              <a:t>La marge brute devrait rebondir à 22% d'ici 2027 grâce à la montée en puissance du segment énergie et à l'optimisation des coûts de production</a:t>
-            </a:r>
-          </a:p>
-        </p:txBody>
-      </p:sp>
-      <p:sp>
-        <p:nvSpPr>
-          <p:cNvPr id="33" name="Rectangle 32"/>
-          <p:cNvSpPr/>
-          <p:nvPr/>
-        </p:nvSpPr>
-        <p:spPr>
-          <a:xfrm>
-            <a:off x="3311999" y="1746000"/>
-            <a:ext cx="36000" cy="288000"/>
-          </a:xfrm>
-          <a:prstGeom prst="rect">
-            <a:avLst/>
-          </a:prstGeom>
-          <a:solidFill>
-            <a:srgbClr val="B06000"/>
-          </a:solidFill>
-          <a:ln>
-            <a:noFill/>
-          </a:ln>
-        </p:spPr>
-        <p:style>
-          <a:lnRef idx="1">
-            <a:schemeClr val="accent1"/>
-          </a:lnRef>
-          <a:fillRef idx="3">
-            <a:schemeClr val="accent1"/>
-          </a:fillRef>
-          <a:effectRef idx="2">
-            <a:schemeClr val="accent1"/>
-          </a:effectRef>
-          <a:fontRef idx="minor">
-            <a:schemeClr val="lt1"/>
-          </a:fontRef>
-        </p:style>
-        <p:txBody>
-          <a:bodyPr rtlCol="0" anchor="ctr"/>
-          <a:lstStyle/>
-          <a:p>
-            <a:pPr algn="ctr"/>
-          </a:p>
-        </p:txBody>
-      </p:sp>
-      <p:sp>
-        <p:nvSpPr>
-          <p:cNvPr id="34" name="TextBox 33"/>
-          <p:cNvSpPr txBox="1"/>
-          <p:nvPr/>
-        </p:nvSpPr>
-        <p:spPr>
-          <a:xfrm>
-            <a:off x="3401999" y="1764000"/>
-            <a:ext cx="5346000" cy="270000"/>
-          </a:xfrm>
-          <a:prstGeom prst="rect">
-            <a:avLst/>
-          </a:prstGeom>
-          <a:noFill/>
-        </p:spPr>
-        <p:txBody>
-          <a:bodyPr wrap="square">
-            <a:spAutoFit/>
-          </a:bodyPr>
-          <a:lstStyle/>
-          <a:p>
-            <a:pPr algn="l"/>
-            <a:r>
-              <a:rPr sz="850" b="0" i="0">
-                <a:solidFill>
-                  <a:srgbClr val="555555"/>
-                </a:solidFill>
-                <a:latin typeface="Calibri"/>
-              </a:rPr>
-              <a:t>Le lancement du Robotaxi en 2026 pourrait générer 15 milliards de dollars de revenus annuels d'ici 2028.</a:t>
-            </a:r>
-          </a:p>
-        </p:txBody>
-      </p:sp>
-      <p:sp>
-        <p:nvSpPr>
-          <p:cNvPr id="35" name="Rectangle 34"/>
-          <p:cNvSpPr/>
-          <p:nvPr/>
-        </p:nvSpPr>
-        <p:spPr>
-          <a:xfrm>
-            <a:off x="3311999" y="2196000"/>
+            <a:off x="3311999" y="2142000"/>
             <a:ext cx="2664000" cy="180000"/>
           </a:xfrm>
           <a:prstGeom prst="rect">
@@ -33147,13 +31492,13 @@
       </p:sp>
       <p:sp>
         <p:nvSpPr>
-          <p:cNvPr id="36" name="TextBox 35"/>
+          <p:cNvPr id="31" name="TextBox 30"/>
           <p:cNvSpPr txBox="1"/>
           <p:nvPr/>
         </p:nvSpPr>
         <p:spPr>
           <a:xfrm>
-            <a:off x="3366000" y="2214000"/>
+            <a:off x="3366000" y="2160000"/>
             <a:ext cx="2592000" cy="144000"/>
           </a:xfrm>
           <a:prstGeom prst="rect">
@@ -33182,13 +31527,13 @@
       </p:sp>
       <p:sp>
         <p:nvSpPr>
-          <p:cNvPr id="37" name="TextBox 36"/>
+          <p:cNvPr id="32" name="TextBox 31"/>
           <p:cNvSpPr txBox="1"/>
           <p:nvPr/>
         </p:nvSpPr>
         <p:spPr>
           <a:xfrm>
-            <a:off x="3401999" y="2412000"/>
+            <a:off x="3401999" y="2358000"/>
             <a:ext cx="2556000" cy="234000"/>
           </a:xfrm>
           <a:prstGeom prst="rect">
@@ -33210,55 +31555,20 @@
                 </a:solidFill>
                 <a:latin typeface="Calibri"/>
               </a:rPr>
-              <a:t>• Lancement Robotaxi en 2026 : potentiel de 15 milliards de dollars de revenus annuels d'ici 2028</a:t>
+              <a:t>• N/D</a:t>
             </a:r>
           </a:p>
         </p:txBody>
       </p:sp>
       <p:sp>
         <p:nvSpPr>
-          <p:cNvPr id="38" name="TextBox 37"/>
-          <p:cNvSpPr txBox="1"/>
-          <p:nvPr/>
-        </p:nvSpPr>
-        <p:spPr>
-          <a:xfrm>
-            <a:off x="3401999" y="2671200"/>
-            <a:ext cx="2556000" cy="234000"/>
-          </a:xfrm>
-          <a:prstGeom prst="rect">
-            <a:avLst/>
-          </a:prstGeom>
-          <a:noFill/>
-        </p:spPr>
-        <p:txBody>
-          <a:bodyPr wrap="square">
-            <a:spAutoFit/>
-          </a:bodyPr>
-          <a:lstStyle/>
-          <a:p>
-            <a:pPr algn="l"/>
-            <a:r>
-              <a:rPr sz="700" b="0" i="0">
-                <a:solidFill>
-                  <a:srgbClr val="555555"/>
-                </a:solidFill>
-                <a:latin typeface="Calibri"/>
-              </a:rPr>
-              <a:t>• Expansion du segment énergie : croissance à 2 chiffres portée par les subventions IRA aux États-Unis</a:t>
-            </a:r>
-          </a:p>
-        </p:txBody>
-      </p:sp>
-      <p:sp>
-        <p:nvSpPr>
-          <p:cNvPr id="39" name="Rectangle 38"/>
+          <p:cNvPr id="33" name="Rectangle 32"/>
           <p:cNvSpPr/>
           <p:nvPr/>
         </p:nvSpPr>
         <p:spPr>
           <a:xfrm>
-            <a:off x="6120000" y="2196000"/>
+            <a:off x="6120000" y="2142000"/>
             <a:ext cx="2448000" cy="180000"/>
           </a:xfrm>
           <a:prstGeom prst="rect">
@@ -33295,13 +31605,13 @@
       </p:sp>
       <p:sp>
         <p:nvSpPr>
-          <p:cNvPr id="40" name="TextBox 39"/>
+          <p:cNvPr id="34" name="TextBox 33"/>
           <p:cNvSpPr txBox="1"/>
           <p:nvPr/>
         </p:nvSpPr>
         <p:spPr>
           <a:xfrm>
-            <a:off x="6156000" y="2214000"/>
+            <a:off x="6156000" y="2160000"/>
             <a:ext cx="2376000" cy="144000"/>
           </a:xfrm>
           <a:prstGeom prst="rect">
@@ -33330,13 +31640,13 @@
       </p:sp>
       <p:sp>
         <p:nvSpPr>
-          <p:cNvPr id="41" name="TextBox 40"/>
+          <p:cNvPr id="35" name="TextBox 34"/>
           <p:cNvSpPr txBox="1"/>
           <p:nvPr/>
         </p:nvSpPr>
         <p:spPr>
           <a:xfrm>
-            <a:off x="6156000" y="2412000"/>
+            <a:off x="6156000" y="2358000"/>
             <a:ext cx="2376000" cy="234000"/>
           </a:xfrm>
           <a:prstGeom prst="rect">
@@ -33358,170 +31668,14 @@
                 </a:solidFill>
                 <a:latin typeface="Calibri"/>
               </a:rPr>
-              <a:t>• Concurrence chinoise : BYD et NIO captent 30% du marché premium des VE en 2025, comprimant les prix</a:t>
+              <a:t>• N/D</a:t>
             </a:r>
           </a:p>
         </p:txBody>
       </p:sp>
       <p:sp>
         <p:nvSpPr>
-          <p:cNvPr id="42" name="TextBox 41"/>
-          <p:cNvSpPr txBox="1"/>
-          <p:nvPr/>
-        </p:nvSpPr>
-        <p:spPr>
-          <a:xfrm>
-            <a:off x="6156000" y="2671200"/>
-            <a:ext cx="2376000" cy="234000"/>
-          </a:xfrm>
-          <a:prstGeom prst="rect">
-            <a:avLst/>
-          </a:prstGeom>
-          <a:noFill/>
-        </p:spPr>
-        <p:txBody>
-          <a:bodyPr wrap="square">
-            <a:spAutoFit/>
-          </a:bodyPr>
-          <a:lstStyle/>
-          <a:p>
-            <a:pPr algn="l"/>
-            <a:r>
-              <a:rPr sz="700" b="0" i="0">
-                <a:solidFill>
-                  <a:srgbClr val="555555"/>
-                </a:solidFill>
-                <a:latin typeface="Calibri"/>
-              </a:rPr>
-              <a:t>• Régulation européenne : normes CO2 plus strictes en 2026 pourraient coûter 1 milliard de dollars en</a:t>
-            </a:r>
-          </a:p>
-        </p:txBody>
-      </p:sp>
-      <p:sp>
-        <p:nvSpPr>
-          <p:cNvPr id="43" name="Rectangle 42"/>
-          <p:cNvSpPr/>
-          <p:nvPr/>
-        </p:nvSpPr>
-        <p:spPr>
-          <a:xfrm>
-            <a:off x="3311999" y="3074400"/>
-            <a:ext cx="5472000" cy="216000"/>
-          </a:xfrm>
-          <a:prstGeom prst="rect">
-            <a:avLst/>
-          </a:prstGeom>
-          <a:solidFill>
-            <a:srgbClr val="FFF3CD"/>
-          </a:solidFill>
-          <a:ln>
-            <a:noFill/>
-          </a:ln>
-        </p:spPr>
-        <p:style>
-          <a:lnRef idx="1">
-            <a:schemeClr val="accent1"/>
-          </a:lnRef>
-          <a:fillRef idx="3">
-            <a:schemeClr val="accent1"/>
-          </a:fillRef>
-          <a:effectRef idx="2">
-            <a:schemeClr val="accent1"/>
-          </a:effectRef>
-          <a:fontRef idx="minor">
-            <a:schemeClr val="lt1"/>
-          </a:fontRef>
-        </p:style>
-        <p:txBody>
-          <a:bodyPr rtlCol="0" anchor="ctr"/>
-          <a:lstStyle/>
-          <a:p>
-            <a:pPr algn="ctr"/>
-          </a:p>
-        </p:txBody>
-      </p:sp>
-      <p:sp>
-        <p:nvSpPr>
-          <p:cNvPr id="44" name="Rectangle 43"/>
-          <p:cNvSpPr/>
-          <p:nvPr/>
-        </p:nvSpPr>
-        <p:spPr>
-          <a:xfrm>
-            <a:off x="3311999" y="3074400"/>
-            <a:ext cx="36000" cy="216000"/>
-          </a:xfrm>
-          <a:prstGeom prst="rect">
-            <a:avLst/>
-          </a:prstGeom>
-          <a:solidFill>
-            <a:srgbClr val="B06000"/>
-          </a:solidFill>
-          <a:ln>
-            <a:noFill/>
-          </a:ln>
-        </p:spPr>
-        <p:style>
-          <a:lnRef idx="1">
-            <a:schemeClr val="accent1"/>
-          </a:lnRef>
-          <a:fillRef idx="3">
-            <a:schemeClr val="accent1"/>
-          </a:fillRef>
-          <a:effectRef idx="2">
-            <a:schemeClr val="accent1"/>
-          </a:effectRef>
-          <a:fontRef idx="minor">
-            <a:schemeClr val="lt1"/>
-          </a:fontRef>
-        </p:style>
-        <p:txBody>
-          <a:bodyPr rtlCol="0" anchor="ctr"/>
-          <a:lstStyle/>
-          <a:p>
-            <a:pPr algn="ctr"/>
-          </a:p>
-        </p:txBody>
-      </p:sp>
-      <p:sp>
-        <p:nvSpPr>
-          <p:cNvPr id="45" name="TextBox 44"/>
-          <p:cNvSpPr txBox="1"/>
-          <p:nvPr/>
-        </p:nvSpPr>
-        <p:spPr>
-          <a:xfrm>
-            <a:off x="3401999" y="3088800"/>
-            <a:ext cx="5346000" cy="198000"/>
-          </a:xfrm>
-          <a:prstGeom prst="rect">
-            <a:avLst/>
-          </a:prstGeom>
-          <a:noFill/>
-        </p:spPr>
-        <p:txBody>
-          <a:bodyPr wrap="square">
-            <a:spAutoFit/>
-          </a:bodyPr>
-          <a:lstStyle/>
-          <a:p>
-            <a:pPr algn="l"/>
-            <a:r>
-              <a:rPr sz="750" b="0" i="0">
-                <a:solidFill>
-                  <a:srgbClr val="7A5000"/>
-                </a:solidFill>
-                <a:latin typeface="Calibri"/>
-              </a:rPr>
-              <a:t>⚠ Conditions d’invalidation : Macro: Récession mondiale en 2026 réduisant la demande de VE de 20%  ·  Sectoriel: Baisse des subventions gouvernementales pour les VE en Europe et Chine</a:t>
-            </a:r>
-          </a:p>
-        </p:txBody>
-      </p:sp>
-      <p:sp>
-        <p:nvSpPr>
-          <p:cNvPr id="46" name="TextBox 45"/>
+          <p:cNvPr id="36" name="TextBox 35"/>
           <p:cNvSpPr txBox="1"/>
           <p:nvPr/>
         </p:nvSpPr>
@@ -34592,7 +32746,7 @@
                 </a:solidFill>
                 <a:latin typeface="Calibri"/>
               </a:rPr>
-              <a:t>Concurrence accrue  ·  Régulation</a:t>
+              <a:t>Risques structurels &amp; thèse contraire</a:t>
             </a:r>
           </a:p>
         </p:txBody>
@@ -35826,64 +33980,21 @@
                 </a:solidFill>
                 <a:latin typeface="Calibri"/>
               </a:rPr>
-              <a:t>Tesla, Inc. conçoit, produit et vend des véhicules électriques haut de gamme et des solutions énergétiques durables. Positionné comme leader technologique avec une intégration verticale unique (batteries, logiciels, bornes de recharge), l'entreprise cible les marchés premium et les infrastructures énergétiques. Ses avantages incluent l'innovation logicielle (FSD), une marque forte et un écosystème intégré réduisant les coûts logistiques. L'entreprise articule son activité autour de deux segments stratégiques :</a:t>
+              <a:t>Tesla, Inc. (TSLA) opere dans le secteur Consumer Cyclical. Analyse FinSight IA en cours -- donnees de synthese non disponibles pour cette session. Lancer une nouvelle analyse pour obtenir la description complete, les segments et le positionnement strategique.</a:t>
             </a:r>
           </a:p>
         </p:txBody>
       </p:sp>
       <p:sp>
         <p:nvSpPr>
-          <p:cNvPr id="20" name="Rectangle 19"/>
-          <p:cNvSpPr/>
-          <p:nvPr/>
-        </p:nvSpPr>
-        <p:spPr>
-          <a:xfrm>
-            <a:off x="503999" y="2599200"/>
-            <a:ext cx="64800" cy="64800"/>
-          </a:xfrm>
-          <a:prstGeom prst="rect">
-            <a:avLst/>
-          </a:prstGeom>
-          <a:solidFill>
-            <a:srgbClr val="2E5FA3"/>
-          </a:solidFill>
-          <a:ln>
-            <a:noFill/>
-          </a:ln>
-        </p:spPr>
-        <p:style>
-          <a:lnRef idx="1">
-            <a:schemeClr val="accent1"/>
-          </a:lnRef>
-          <a:fillRef idx="3">
-            <a:schemeClr val="accent1"/>
-          </a:fillRef>
-          <a:effectRef idx="2">
-            <a:schemeClr val="accent1"/>
-          </a:effectRef>
-          <a:fontRef idx="minor">
-            <a:schemeClr val="lt1"/>
-          </a:fontRef>
-        </p:style>
-        <p:txBody>
-          <a:bodyPr rtlCol="0" anchor="ctr"/>
-          <a:lstStyle/>
-          <a:p>
-            <a:pPr algn="ctr"/>
-          </a:p>
-        </p:txBody>
-      </p:sp>
-      <p:sp>
-        <p:nvSpPr>
-          <p:cNvPr id="21" name="TextBox 20"/>
+          <p:cNvPr id="20" name="TextBox 19"/>
           <p:cNvSpPr txBox="1"/>
           <p:nvPr/>
         </p:nvSpPr>
         <p:spPr>
           <a:xfrm>
-            <a:off x="619200" y="2556000"/>
-            <a:ext cx="4338000" cy="165600"/>
+            <a:off x="503999" y="2358000"/>
+            <a:ext cx="4662000" cy="183600"/>
           </a:xfrm>
           <a:prstGeom prst="rect">
             <a:avLst/>
@@ -35898,168 +34009,20 @@
           <a:p>
             <a:pPr algn="l"/>
             <a:r>
-              <a:rPr sz="850" b="1" i="0">
+              <a:rPr sz="900" b="1" i="0">
                 <a:solidFill>
-                  <a:srgbClr val="0D0D0D"/>
+                  <a:srgbClr val="1B3A6B"/>
                 </a:solidFill>
                 <a:latin typeface="Calibri"/>
               </a:rPr>
-              <a:t>Automobile</a:t>
+              <a:t>Positionnement stratégique</a:t>
             </a:r>
           </a:p>
         </p:txBody>
       </p:sp>
       <p:sp>
         <p:nvSpPr>
-          <p:cNvPr id="22" name="TextBox 21"/>
-          <p:cNvSpPr txBox="1"/>
-          <p:nvPr/>
-        </p:nvSpPr>
-        <p:spPr>
-          <a:xfrm>
-            <a:off x="619200" y="2714400"/>
-            <a:ext cx="4338000" cy="503999"/>
-          </a:xfrm>
-          <a:prstGeom prst="rect">
-            <a:avLst/>
-          </a:prstGeom>
-          <a:noFill/>
-        </p:spPr>
-        <p:txBody>
-          <a:bodyPr wrap="square">
-            <a:spAutoFit/>
-          </a:bodyPr>
-          <a:lstStyle/>
-          <a:p>
-            <a:pPr algn="l"/>
-            <a:r>
-              <a:rPr sz="750" b="0" i="1">
-                <a:solidFill>
-                  <a:srgbClr val="555555"/>
-                </a:solidFill>
-                <a:latin typeface="Calibri"/>
-              </a:rPr>
-              <a:t>Segment principal générant 95% des revenus via vente de véhicules électriques (Model 3/Y, S/X, Cybertruck) et services associés (abonnements, mises à jour logicielles). Clients cibles : particuliers aisés et entreprises. Croissance portée par l'expansion géographique et la demande pour des solutions bas-carbone.</a:t>
-            </a:r>
-          </a:p>
-        </p:txBody>
-      </p:sp>
-      <p:sp>
-        <p:nvSpPr>
-          <p:cNvPr id="23" name="Rectangle 22"/>
-          <p:cNvSpPr/>
-          <p:nvPr/>
-        </p:nvSpPr>
-        <p:spPr>
-          <a:xfrm>
-            <a:off x="503999" y="3301199"/>
-            <a:ext cx="64800" cy="64800"/>
-          </a:xfrm>
-          <a:prstGeom prst="rect">
-            <a:avLst/>
-          </a:prstGeom>
-          <a:solidFill>
-            <a:srgbClr val="2E5FA3"/>
-          </a:solidFill>
-          <a:ln>
-            <a:noFill/>
-          </a:ln>
-        </p:spPr>
-        <p:style>
-          <a:lnRef idx="1">
-            <a:schemeClr val="accent1"/>
-          </a:lnRef>
-          <a:fillRef idx="3">
-            <a:schemeClr val="accent1"/>
-          </a:fillRef>
-          <a:effectRef idx="2">
-            <a:schemeClr val="accent1"/>
-          </a:effectRef>
-          <a:fontRef idx="minor">
-            <a:schemeClr val="lt1"/>
-          </a:fontRef>
-        </p:style>
-        <p:txBody>
-          <a:bodyPr rtlCol="0" anchor="ctr"/>
-          <a:lstStyle/>
-          <a:p>
-            <a:pPr algn="ctr"/>
-          </a:p>
-        </p:txBody>
-      </p:sp>
-      <p:sp>
-        <p:nvSpPr>
-          <p:cNvPr id="24" name="TextBox 23"/>
-          <p:cNvSpPr txBox="1"/>
-          <p:nvPr/>
-        </p:nvSpPr>
-        <p:spPr>
-          <a:xfrm>
-            <a:off x="619200" y="3257999"/>
-            <a:ext cx="4338000" cy="165600"/>
-          </a:xfrm>
-          <a:prstGeom prst="rect">
-            <a:avLst/>
-          </a:prstGeom>
-          <a:noFill/>
-        </p:spPr>
-        <p:txBody>
-          <a:bodyPr wrap="square">
-            <a:spAutoFit/>
-          </a:bodyPr>
-          <a:lstStyle/>
-          <a:p>
-            <a:pPr algn="l"/>
-            <a:r>
-              <a:rPr sz="850" b="1" i="0">
-                <a:solidFill>
-                  <a:srgbClr val="0D0D0D"/>
-                </a:solidFill>
-                <a:latin typeface="Calibri"/>
-              </a:rPr>
-              <a:t>Énergie et Services</a:t>
-            </a:r>
-          </a:p>
-        </p:txBody>
-      </p:sp>
-      <p:sp>
-        <p:nvSpPr>
-          <p:cNvPr id="25" name="TextBox 24"/>
-          <p:cNvSpPr txBox="1"/>
-          <p:nvPr/>
-        </p:nvSpPr>
-        <p:spPr>
-          <a:xfrm>
-            <a:off x="619200" y="3416399"/>
-            <a:ext cx="4338000" cy="503999"/>
-          </a:xfrm>
-          <a:prstGeom prst="rect">
-            <a:avLst/>
-          </a:prstGeom>
-          <a:noFill/>
-        </p:spPr>
-        <p:txBody>
-          <a:bodyPr wrap="square">
-            <a:spAutoFit/>
-          </a:bodyPr>
-          <a:lstStyle/>
-          <a:p>
-            <a:pPr algn="l"/>
-            <a:r>
-              <a:rPr sz="750" b="0" i="1">
-                <a:solidFill>
-                  <a:srgbClr val="555555"/>
-                </a:solidFill>
-                <a:latin typeface="Calibri"/>
-              </a:rPr>
-              <a:t>Vente de systèmes de stockage d'énergie (Powerwall, Megapack) et de panneaux solaires, avec services de maintenance et d'optimisation énergétique. Cible : particuliers, entreprises et utilities. Croissance liée à la transition énergétique et aux subventions gouvernementales.</a:t>
-            </a:r>
-          </a:p>
-        </p:txBody>
-      </p:sp>
-      <p:sp>
-        <p:nvSpPr>
-          <p:cNvPr id="26" name="Rectangle 25"/>
+          <p:cNvPr id="21" name="Rectangle 20"/>
           <p:cNvSpPr/>
           <p:nvPr/>
         </p:nvSpPr>
@@ -36102,7 +34065,7 @@
       </p:sp>
       <p:sp>
         <p:nvSpPr>
-          <p:cNvPr id="27" name="Rectangle 26"/>
+          <p:cNvPr id="22" name="Rectangle 21"/>
           <p:cNvSpPr/>
           <p:nvPr/>
         </p:nvSpPr>
@@ -36145,7 +34108,7 @@
       </p:sp>
       <p:sp>
         <p:nvSpPr>
-          <p:cNvPr id="28" name="TextBox 27"/>
+          <p:cNvPr id="23" name="TextBox 22"/>
           <p:cNvSpPr txBox="1"/>
           <p:nvPr/>
         </p:nvSpPr>
@@ -36180,7 +34143,7 @@
       </p:sp>
       <p:sp>
         <p:nvSpPr>
-          <p:cNvPr id="29" name="TextBox 28"/>
+          <p:cNvPr id="24" name="TextBox 23"/>
           <p:cNvSpPr txBox="1"/>
           <p:nvPr/>
         </p:nvSpPr>
@@ -36215,7 +34178,7 @@
       </p:sp>
       <p:sp>
         <p:nvSpPr>
-          <p:cNvPr id="30" name="Rectangle 29"/>
+          <p:cNvPr id="25" name="Rectangle 24"/>
           <p:cNvSpPr/>
           <p:nvPr/>
         </p:nvSpPr>
@@ -36258,7 +34221,7 @@
       </p:sp>
       <p:sp>
         <p:nvSpPr>
-          <p:cNvPr id="31" name="Rectangle 30"/>
+          <p:cNvPr id="26" name="Rectangle 25"/>
           <p:cNvSpPr/>
           <p:nvPr/>
         </p:nvSpPr>
@@ -36301,7 +34264,7 @@
       </p:sp>
       <p:sp>
         <p:nvSpPr>
-          <p:cNvPr id="32" name="TextBox 31"/>
+          <p:cNvPr id="27" name="TextBox 26"/>
           <p:cNvSpPr txBox="1"/>
           <p:nvPr/>
         </p:nvSpPr>
@@ -36336,7 +34299,7 @@
       </p:sp>
       <p:sp>
         <p:nvSpPr>
-          <p:cNvPr id="33" name="TextBox 32"/>
+          <p:cNvPr id="28" name="TextBox 27"/>
           <p:cNvSpPr txBox="1"/>
           <p:nvPr/>
         </p:nvSpPr>
@@ -36371,7 +34334,7 @@
       </p:sp>
       <p:sp>
         <p:nvSpPr>
-          <p:cNvPr id="34" name="Rectangle 33"/>
+          <p:cNvPr id="29" name="Rectangle 28"/>
           <p:cNvSpPr/>
           <p:nvPr/>
         </p:nvSpPr>
@@ -36414,7 +34377,7 @@
       </p:sp>
       <p:sp>
         <p:nvSpPr>
-          <p:cNvPr id="35" name="Rectangle 34"/>
+          <p:cNvPr id="30" name="Rectangle 29"/>
           <p:cNvSpPr/>
           <p:nvPr/>
         </p:nvSpPr>
@@ -36457,7 +34420,7 @@
       </p:sp>
       <p:sp>
         <p:nvSpPr>
-          <p:cNvPr id="36" name="TextBox 35"/>
+          <p:cNvPr id="31" name="TextBox 30"/>
           <p:cNvSpPr txBox="1"/>
           <p:nvPr/>
         </p:nvSpPr>
@@ -36492,7 +34455,7 @@
       </p:sp>
       <p:sp>
         <p:nvSpPr>
-          <p:cNvPr id="37" name="TextBox 36"/>
+          <p:cNvPr id="32" name="TextBox 31"/>
           <p:cNvSpPr txBox="1"/>
           <p:nvPr/>
         </p:nvSpPr>
@@ -36527,7 +34490,7 @@
       </p:sp>
       <p:sp>
         <p:nvSpPr>
-          <p:cNvPr id="38" name="Rectangle 37"/>
+          <p:cNvPr id="33" name="Rectangle 32"/>
           <p:cNvSpPr/>
           <p:nvPr/>
         </p:nvSpPr>
@@ -36570,7 +34533,7 @@
       </p:sp>
       <p:sp>
         <p:nvSpPr>
-          <p:cNvPr id="39" name="Rectangle 38"/>
+          <p:cNvPr id="34" name="Rectangle 33"/>
           <p:cNvSpPr/>
           <p:nvPr/>
         </p:nvSpPr>
@@ -36613,7 +34576,7 @@
       </p:sp>
       <p:sp>
         <p:nvSpPr>
-          <p:cNvPr id="40" name="TextBox 39"/>
+          <p:cNvPr id="35" name="TextBox 34"/>
           <p:cNvSpPr txBox="1"/>
           <p:nvPr/>
         </p:nvSpPr>
@@ -36648,7 +34611,7 @@
       </p:sp>
       <p:sp>
         <p:nvSpPr>
-          <p:cNvPr id="41" name="TextBox 40"/>
+          <p:cNvPr id="36" name="TextBox 35"/>
           <p:cNvSpPr txBox="1"/>
           <p:nvPr/>
         </p:nvSpPr>
@@ -36683,7 +34646,7 @@
       </p:sp>
       <p:sp>
         <p:nvSpPr>
-          <p:cNvPr id="42" name="TextBox 41"/>
+          <p:cNvPr id="37" name="TextBox 36"/>
           <p:cNvSpPr txBox="1"/>
           <p:nvPr/>
         </p:nvSpPr>
@@ -37324,7 +35287,7 @@
         <p:spPr>
           <a:xfrm>
             <a:off x="367200" y="961200"/>
-            <a:ext cx="4150800" cy="3520800"/>
+            <a:ext cx="2731199" cy="3520800"/>
           </a:xfrm>
           <a:prstGeom prst="rect">
             <a:avLst/>
@@ -37367,7 +35330,7 @@
         <p:spPr>
           <a:xfrm>
             <a:off x="367200" y="961200"/>
-            <a:ext cx="4150800" cy="54000"/>
+            <a:ext cx="2731199" cy="54000"/>
           </a:xfrm>
           <a:prstGeom prst="rect">
             <a:avLst/>
@@ -37410,7 +35373,7 @@
         <p:spPr>
           <a:xfrm>
             <a:off x="457200" y="1141200"/>
-            <a:ext cx="3970800" cy="640800"/>
+            <a:ext cx="2551199" cy="640800"/>
           </a:xfrm>
           <a:prstGeom prst="rect">
             <a:avLst/>
@@ -37431,7 +35394,7 @@
                 </a:solidFill>
                 <a:latin typeface="Calibri"/>
               </a:rPr>
-              <a:t>95%</a:t>
+              <a:t>—</a:t>
             </a:r>
           </a:p>
         </p:txBody>
@@ -37445,7 +35408,7 @@
         <p:spPr>
           <a:xfrm>
             <a:off x="457200" y="1785600"/>
-            <a:ext cx="3970800" cy="108000"/>
+            <a:ext cx="2551199" cy="108000"/>
           </a:xfrm>
           <a:prstGeom prst="rect">
             <a:avLst/>
@@ -37480,7 +35443,7 @@
         <p:spPr>
           <a:xfrm>
             <a:off x="457200" y="1965600"/>
-            <a:ext cx="3970800" cy="18000"/>
+            <a:ext cx="2551199" cy="18000"/>
           </a:xfrm>
           <a:prstGeom prst="rect">
             <a:avLst/>
@@ -37523,7 +35486,7 @@
         <p:spPr>
           <a:xfrm>
             <a:off x="457200" y="2059200"/>
-            <a:ext cx="3970800" cy="255600"/>
+            <a:ext cx="2551199" cy="255600"/>
           </a:xfrm>
           <a:prstGeom prst="rect">
             <a:avLst/>
@@ -37544,7 +35507,7 @@
                 </a:solidFill>
                 <a:latin typeface="Calibri"/>
               </a:rPr>
-              <a:t>Automobile</a:t>
+              <a:t>Core Business</a:t>
             </a:r>
           </a:p>
         </p:txBody>
@@ -37558,7 +35521,7 @@
         <p:spPr>
           <a:xfrm>
             <a:off x="457200" y="2332800"/>
-            <a:ext cx="3970800" cy="2041199"/>
+            <a:ext cx="2551199" cy="2041199"/>
           </a:xfrm>
           <a:prstGeom prst="rect">
             <a:avLst/>
@@ -37579,7 +35542,7 @@
                 </a:solidFill>
                 <a:latin typeface="Calibri"/>
               </a:rPr>
-              <a:t>Segment principal générant 95% des revenus via vente de véhicules électriques (Model 3/Y, S/X, Cybertruck) et services associés (abonnements, mises à jour logicielles). Clients cibles : particuliers aisés et entreprises. Croissance portée par l'expansion géographique et la demande pour des solutions bas-carbone.</a:t>
+              <a:t>—</a:t>
             </a:r>
           </a:p>
         </p:txBody>
@@ -37592,8 +35555,8 @@
         </p:nvSpPr>
         <p:spPr>
           <a:xfrm>
-            <a:off x="4626000" y="961200"/>
-            <a:ext cx="4150800" cy="3520800"/>
+            <a:off x="3206400" y="961200"/>
+            <a:ext cx="2731199" cy="3520800"/>
           </a:xfrm>
           <a:prstGeom prst="rect">
             <a:avLst/>
@@ -37635,8 +35598,8 @@
         </p:nvSpPr>
         <p:spPr>
           <a:xfrm>
-            <a:off x="4626000" y="961200"/>
-            <a:ext cx="4150800" cy="54000"/>
+            <a:off x="3206400" y="961200"/>
+            <a:ext cx="2731199" cy="54000"/>
           </a:xfrm>
           <a:prstGeom prst="rect">
             <a:avLst/>
@@ -37678,8 +35641,8 @@
         </p:nvSpPr>
         <p:spPr>
           <a:xfrm>
-            <a:off x="4716000" y="1141200"/>
-            <a:ext cx="3970800" cy="640800"/>
+            <a:off x="3296400" y="1141200"/>
+            <a:ext cx="2551199" cy="640800"/>
           </a:xfrm>
           <a:prstGeom prst="rect">
             <a:avLst/>
@@ -37700,7 +35663,7 @@
                 </a:solidFill>
                 <a:latin typeface="Calibri"/>
               </a:rPr>
-              <a:t>5%</a:t>
+              <a:t>—</a:t>
             </a:r>
           </a:p>
         </p:txBody>
@@ -37713,8 +35676,8 @@
         </p:nvSpPr>
         <p:spPr>
           <a:xfrm>
-            <a:off x="4716000" y="1785600"/>
-            <a:ext cx="3970800" cy="108000"/>
+            <a:off x="3296400" y="1785600"/>
+            <a:ext cx="2551199" cy="108000"/>
           </a:xfrm>
           <a:prstGeom prst="rect">
             <a:avLst/>
@@ -37748,8 +35711,8 @@
         </p:nvSpPr>
         <p:spPr>
           <a:xfrm>
-            <a:off x="4716000" y="1965600"/>
-            <a:ext cx="3970800" cy="18000"/>
+            <a:off x="3296400" y="1965600"/>
+            <a:ext cx="2551199" cy="18000"/>
           </a:xfrm>
           <a:prstGeom prst="rect">
             <a:avLst/>
@@ -37791,8 +35754,8 @@
         </p:nvSpPr>
         <p:spPr>
           <a:xfrm>
-            <a:off x="4716000" y="2059200"/>
-            <a:ext cx="3970800" cy="255600"/>
+            <a:off x="3296400" y="2059200"/>
+            <a:ext cx="2551199" cy="255600"/>
           </a:xfrm>
           <a:prstGeom prst="rect">
             <a:avLst/>
@@ -37813,7 +35776,7 @@
                 </a:solidFill>
                 <a:latin typeface="Calibri"/>
               </a:rPr>
-              <a:t>Énergie et Services</a:t>
+              <a:t>Growth Driver</a:t>
             </a:r>
           </a:p>
         </p:txBody>
@@ -37826,8 +35789,8 @@
         </p:nvSpPr>
         <p:spPr>
           <a:xfrm>
-            <a:off x="4716000" y="2332800"/>
-            <a:ext cx="3970800" cy="2041199"/>
+            <a:off x="3296400" y="2332800"/>
+            <a:ext cx="2551199" cy="2041199"/>
           </a:xfrm>
           <a:prstGeom prst="rect">
             <a:avLst/>
@@ -37848,7 +35811,276 @@
                 </a:solidFill>
                 <a:latin typeface="Calibri"/>
               </a:rPr>
-              <a:t>Vente de systèmes de stockage d'énergie (Powerwall, Megapack) et de panneaux solaires, avec services de maintenance et d'optimisation énergétique. Cible : particuliers, entreprises et utilities. Croissance liée à la transition énergétique et aux subventions gouvernementales.</a:t>
+              <a:t>—</a:t>
+            </a:r>
+          </a:p>
+        </p:txBody>
+      </p:sp>
+      <p:sp>
+        <p:nvSpPr>
+          <p:cNvPr id="31" name="Rectangle 30"/>
+          <p:cNvSpPr/>
+          <p:nvPr/>
+        </p:nvSpPr>
+        <p:spPr>
+          <a:xfrm>
+            <a:off x="6045600" y="961200"/>
+            <a:ext cx="2731199" cy="3520800"/>
+          </a:xfrm>
+          <a:prstGeom prst="rect">
+            <a:avLst/>
+          </a:prstGeom>
+          <a:solidFill>
+            <a:srgbClr val="F7F8FA"/>
+          </a:solidFill>
+          <a:ln>
+            <a:noFill/>
+          </a:ln>
+        </p:spPr>
+        <p:style>
+          <a:lnRef idx="1">
+            <a:schemeClr val="accent1"/>
+          </a:lnRef>
+          <a:fillRef idx="3">
+            <a:schemeClr val="accent1"/>
+          </a:fillRef>
+          <a:effectRef idx="2">
+            <a:schemeClr val="accent1"/>
+          </a:effectRef>
+          <a:fontRef idx="minor">
+            <a:schemeClr val="lt1"/>
+          </a:fontRef>
+        </p:style>
+        <p:txBody>
+          <a:bodyPr rtlCol="0" anchor="ctr"/>
+          <a:lstStyle/>
+          <a:p>
+            <a:pPr algn="ctr"/>
+          </a:p>
+        </p:txBody>
+      </p:sp>
+      <p:sp>
+        <p:nvSpPr>
+          <p:cNvPr id="32" name="Rectangle 31"/>
+          <p:cNvSpPr/>
+          <p:nvPr/>
+        </p:nvSpPr>
+        <p:spPr>
+          <a:xfrm>
+            <a:off x="6045600" y="961200"/>
+            <a:ext cx="2731199" cy="54000"/>
+          </a:xfrm>
+          <a:prstGeom prst="rect">
+            <a:avLst/>
+          </a:prstGeom>
+          <a:solidFill>
+            <a:srgbClr val="888888"/>
+          </a:solidFill>
+          <a:ln>
+            <a:noFill/>
+          </a:ln>
+        </p:spPr>
+        <p:style>
+          <a:lnRef idx="1">
+            <a:schemeClr val="accent1"/>
+          </a:lnRef>
+          <a:fillRef idx="3">
+            <a:schemeClr val="accent1"/>
+          </a:fillRef>
+          <a:effectRef idx="2">
+            <a:schemeClr val="accent1"/>
+          </a:effectRef>
+          <a:fontRef idx="minor">
+            <a:schemeClr val="lt1"/>
+          </a:fontRef>
+        </p:style>
+        <p:txBody>
+          <a:bodyPr rtlCol="0" anchor="ctr"/>
+          <a:lstStyle/>
+          <a:p>
+            <a:pPr algn="ctr"/>
+          </a:p>
+        </p:txBody>
+      </p:sp>
+      <p:sp>
+        <p:nvSpPr>
+          <p:cNvPr id="33" name="TextBox 32"/>
+          <p:cNvSpPr txBox="1"/>
+          <p:nvPr/>
+        </p:nvSpPr>
+        <p:spPr>
+          <a:xfrm>
+            <a:off x="6135600" y="1141200"/>
+            <a:ext cx="2551199" cy="640800"/>
+          </a:xfrm>
+          <a:prstGeom prst="rect">
+            <a:avLst/>
+          </a:prstGeom>
+          <a:noFill/>
+        </p:spPr>
+        <p:txBody>
+          <a:bodyPr wrap="square">
+            <a:spAutoFit/>
+          </a:bodyPr>
+          <a:lstStyle/>
+          <a:p>
+            <a:pPr algn="l"/>
+            <a:r>
+              <a:rPr sz="2200" b="1" i="0">
+                <a:solidFill>
+                  <a:srgbClr val="888888"/>
+                </a:solidFill>
+                <a:latin typeface="Calibri"/>
+              </a:rPr>
+              <a:t>—</a:t>
+            </a:r>
+          </a:p>
+        </p:txBody>
+      </p:sp>
+      <p:sp>
+        <p:nvSpPr>
+          <p:cNvPr id="34" name="TextBox 33"/>
+          <p:cNvSpPr txBox="1"/>
+          <p:nvPr/>
+        </p:nvSpPr>
+        <p:spPr>
+          <a:xfrm>
+            <a:off x="6135600" y="1785600"/>
+            <a:ext cx="2551199" cy="108000"/>
+          </a:xfrm>
+          <a:prstGeom prst="rect">
+            <a:avLst/>
+          </a:prstGeom>
+          <a:noFill/>
+        </p:spPr>
+        <p:txBody>
+          <a:bodyPr wrap="square">
+            <a:spAutoFit/>
+          </a:bodyPr>
+          <a:lstStyle/>
+          <a:p>
+            <a:pPr algn="l"/>
+            <a:r>
+              <a:rPr sz="900" b="0" i="0">
+                <a:solidFill>
+                  <a:srgbClr val="555555"/>
+                </a:solidFill>
+                <a:latin typeface="Calibri"/>
+              </a:rPr>
+              <a:t>du CA</a:t>
+            </a:r>
+          </a:p>
+        </p:txBody>
+      </p:sp>
+      <p:sp>
+        <p:nvSpPr>
+          <p:cNvPr id="35" name="Rectangle 34"/>
+          <p:cNvSpPr/>
+          <p:nvPr/>
+        </p:nvSpPr>
+        <p:spPr>
+          <a:xfrm>
+            <a:off x="6135600" y="1965600"/>
+            <a:ext cx="2551199" cy="18000"/>
+          </a:xfrm>
+          <a:prstGeom prst="rect">
+            <a:avLst/>
+          </a:prstGeom>
+          <a:solidFill>
+            <a:srgbClr val="888888"/>
+          </a:solidFill>
+          <a:ln>
+            <a:noFill/>
+          </a:ln>
+        </p:spPr>
+        <p:style>
+          <a:lnRef idx="1">
+            <a:schemeClr val="accent1"/>
+          </a:lnRef>
+          <a:fillRef idx="3">
+            <a:schemeClr val="accent1"/>
+          </a:fillRef>
+          <a:effectRef idx="2">
+            <a:schemeClr val="accent1"/>
+          </a:effectRef>
+          <a:fontRef idx="minor">
+            <a:schemeClr val="lt1"/>
+          </a:fontRef>
+        </p:style>
+        <p:txBody>
+          <a:bodyPr rtlCol="0" anchor="ctr"/>
+          <a:lstStyle/>
+          <a:p>
+            <a:pPr algn="ctr"/>
+          </a:p>
+        </p:txBody>
+      </p:sp>
+      <p:sp>
+        <p:nvSpPr>
+          <p:cNvPr id="36" name="TextBox 35"/>
+          <p:cNvSpPr txBox="1"/>
+          <p:nvPr/>
+        </p:nvSpPr>
+        <p:spPr>
+          <a:xfrm>
+            <a:off x="6135600" y="2059200"/>
+            <a:ext cx="2551199" cy="255600"/>
+          </a:xfrm>
+          <a:prstGeom prst="rect">
+            <a:avLst/>
+          </a:prstGeom>
+          <a:noFill/>
+        </p:spPr>
+        <p:txBody>
+          <a:bodyPr wrap="square">
+            <a:spAutoFit/>
+          </a:bodyPr>
+          <a:lstStyle/>
+          <a:p>
+            <a:pPr algn="l"/>
+            <a:r>
+              <a:rPr sz="1000" b="1" i="0">
+                <a:solidFill>
+                  <a:srgbClr val="1B3A6B"/>
+                </a:solidFill>
+                <a:latin typeface="Calibri"/>
+              </a:rPr>
+              <a:t>International</a:t>
+            </a:r>
+          </a:p>
+        </p:txBody>
+      </p:sp>
+      <p:sp>
+        <p:nvSpPr>
+          <p:cNvPr id="37" name="TextBox 36"/>
+          <p:cNvSpPr txBox="1"/>
+          <p:nvPr/>
+        </p:nvSpPr>
+        <p:spPr>
+          <a:xfrm>
+            <a:off x="6135600" y="2332800"/>
+            <a:ext cx="2551199" cy="2041199"/>
+          </a:xfrm>
+          <a:prstGeom prst="rect">
+            <a:avLst/>
+          </a:prstGeom>
+          <a:noFill/>
+        </p:spPr>
+        <p:txBody>
+          <a:bodyPr wrap="square">
+            <a:spAutoFit/>
+          </a:bodyPr>
+          <a:lstStyle/>
+          <a:p>
+            <a:pPr algn="l"/>
+            <a:r>
+              <a:rPr sz="800" b="0" i="0">
+                <a:solidFill>
+                  <a:srgbClr val="555555"/>
+                </a:solidFill>
+                <a:latin typeface="Calibri"/>
+              </a:rPr>
+              <a:t>—</a:t>
             </a:r>
           </a:p>
         </p:txBody>
@@ -38700,7 +36932,7 @@
                 </a:solidFill>
                 <a:latin typeface="Calibri"/>
               </a:rPr>
-              <a:t>USD millions  ·  2022–2027F</a:t>
+              <a:t>USD millions  ·  2022–2025</a:t>
             </a:r>
           </a:p>
         </p:txBody>
@@ -38715,7 +36947,7 @@
         </p:nvGraphicFramePr>
         <p:xfrm>
           <a:off x="367200" y="914400"/>
-          <a:ext cx="8413196" cy="1980000"/>
+          <a:ext cx="8413200" cy="1980000"/>
         </p:xfrm>
         <a:graphic>
           <a:graphicData uri="http://schemas.openxmlformats.org/drawingml/2006/table">
@@ -38725,11 +36957,9 @@
               </a:tblPr>
               <a:tblGrid>
                 <a:gridCol w="2355696"/>
-                <a:gridCol w="1211500"/>
-                <a:gridCol w="1211500"/>
-                <a:gridCol w="1211500"/>
-                <a:gridCol w="1211500"/>
-                <a:gridCol w="1211500"/>
+                <a:gridCol w="2019168"/>
+                <a:gridCol w="2019168"/>
+                <a:gridCol w="2019168"/>
               </a:tblGrid>
               <a:tr h="220000">
                 <a:tc>
@@ -38815,52 +37045,6 @@
                           <a:latin typeface="Calibri"/>
                         </a:rPr>
                         <a:t>2025</a:t>
-                      </a:r>
-                    </a:p>
-                  </a:txBody>
-                  <a:tcPr>
-                    <a:solidFill>
-                      <a:srgbClr val="1B3A6B"/>
-                    </a:solidFill>
-                  </a:tcPr>
-                </a:tc>
-                <a:tc>
-                  <a:txBody>
-                    <a:bodyPr/>
-                    <a:lstStyle/>
-                    <a:p>
-                      <a:pPr algn="ctr"/>
-                      <a:r>
-                        <a:rPr sz="800" b="1" i="0">
-                          <a:solidFill>
-                            <a:srgbClr val="FFFFFF"/>
-                          </a:solidFill>
-                          <a:latin typeface="Calibri"/>
-                        </a:rPr>
-                        <a:t>2026F</a:t>
-                      </a:r>
-                    </a:p>
-                  </a:txBody>
-                  <a:tcPr>
-                    <a:solidFill>
-                      <a:srgbClr val="1B3A6B"/>
-                    </a:solidFill>
-                  </a:tcPr>
-                </a:tc>
-                <a:tc>
-                  <a:txBody>
-                    <a:bodyPr/>
-                    <a:lstStyle/>
-                    <a:p>
-                      <a:pPr algn="ctr"/>
-                      <a:r>
-                        <a:rPr sz="800" b="1" i="0">
-                          <a:solidFill>
-                            <a:srgbClr val="FFFFFF"/>
-                          </a:solidFill>
-                          <a:latin typeface="Calibri"/>
-                        </a:rPr>
-                        <a:t>2027F</a:t>
                       </a:r>
                     </a:p>
                   </a:txBody>
@@ -38964,52 +37148,6 @@
                     </a:solidFill>
                   </a:tcPr>
                 </a:tc>
-                <a:tc>
-                  <a:txBody>
-                    <a:bodyPr/>
-                    <a:lstStyle/>
-                    <a:p>
-                      <a:pPr algn="ctr"/>
-                      <a:r>
-                        <a:rPr sz="800" b="1" i="0">
-                          <a:solidFill>
-                            <a:srgbClr val="0D0D0D"/>
-                          </a:solidFill>
-                          <a:latin typeface="Calibri"/>
-                        </a:rPr>
-                        <a:t>102,0</a:t>
-                      </a:r>
-                    </a:p>
-                  </a:txBody>
-                  <a:tcPr>
-                    <a:solidFill>
-                      <a:srgbClr val="FFFFFF"/>
-                    </a:solidFill>
-                  </a:tcPr>
-                </a:tc>
-                <a:tc>
-                  <a:txBody>
-                    <a:bodyPr/>
-                    <a:lstStyle/>
-                    <a:p>
-                      <a:pPr algn="ctr"/>
-                      <a:r>
-                        <a:rPr sz="800" b="1" i="0">
-                          <a:solidFill>
-                            <a:srgbClr val="0D0D0D"/>
-                          </a:solidFill>
-                          <a:latin typeface="Calibri"/>
-                        </a:rPr>
-                        <a:t>115,0</a:t>
-                      </a:r>
-                    </a:p>
-                  </a:txBody>
-                  <a:tcPr>
-                    <a:solidFill>
-                      <a:srgbClr val="FFFFFF"/>
-                    </a:solidFill>
-                  </a:tcPr>
-                </a:tc>
               </a:tr>
               <a:tr h="220000">
                 <a:tc>
@@ -39101,52 +37239,6 @@
                   <a:tcPr>
                     <a:solidFill>
                       <a:srgbClr val="DDE8F5"/>
-                    </a:solidFill>
-                  </a:tcPr>
-                </a:tc>
-                <a:tc>
-                  <a:txBody>
-                    <a:bodyPr/>
-                    <a:lstStyle/>
-                    <a:p>
-                      <a:pPr algn="ctr"/>
-                      <a:r>
-                        <a:rPr sz="750" b="0" i="1">
-                          <a:solidFill>
-                            <a:srgbClr val="555555"/>
-                          </a:solidFill>
-                          <a:latin typeface="Calibri"/>
-                        </a:rPr>
-                        <a:t>+800,0 %</a:t>
-                      </a:r>
-                    </a:p>
-                  </a:txBody>
-                  <a:tcPr>
-                    <a:solidFill>
-                      <a:srgbClr val="F7F8FA"/>
-                    </a:solidFill>
-                  </a:tcPr>
-                </a:tc>
-                <a:tc>
-                  <a:txBody>
-                    <a:bodyPr/>
-                    <a:lstStyle/>
-                    <a:p>
-                      <a:pPr algn="ctr"/>
-                      <a:r>
-                        <a:rPr sz="750" b="0" i="1">
-                          <a:solidFill>
-                            <a:srgbClr val="555555"/>
-                          </a:solidFill>
-                          <a:latin typeface="Calibri"/>
-                        </a:rPr>
-                        <a:t>+1270,0 %</a:t>
-                      </a:r>
-                    </a:p>
-                  </a:txBody>
-                  <a:tcPr>
-                    <a:solidFill>
-                      <a:srgbClr val="F7F8FA"/>
                     </a:solidFill>
                   </a:tcPr>
                 </a:tc>
@@ -39244,52 +37336,6 @@
                     </a:solidFill>
                   </a:tcPr>
                 </a:tc>
-                <a:tc>
-                  <a:txBody>
-                    <a:bodyPr/>
-                    <a:lstStyle/>
-                    <a:p>
-                      <a:pPr algn="ctr"/>
-                      <a:r>
-                        <a:rPr sz="800" b="1" i="0">
-                          <a:solidFill>
-                            <a:srgbClr val="0D0D0D"/>
-                          </a:solidFill>
-                          <a:latin typeface="Calibri"/>
-                        </a:rPr>
-                        <a:t>1 989,0</a:t>
-                      </a:r>
-                    </a:p>
-                  </a:txBody>
-                  <a:tcPr>
-                    <a:solidFill>
-                      <a:srgbClr val="FFFFFF"/>
-                    </a:solidFill>
-                  </a:tcPr>
-                </a:tc>
-                <a:tc>
-                  <a:txBody>
-                    <a:bodyPr/>
-                    <a:lstStyle/>
-                    <a:p>
-                      <a:pPr algn="ctr"/>
-                      <a:r>
-                        <a:rPr sz="800" b="1" i="0">
-                          <a:solidFill>
-                            <a:srgbClr val="0D0D0D"/>
-                          </a:solidFill>
-                          <a:latin typeface="Calibri"/>
-                        </a:rPr>
-                        <a:t>2 530,0</a:t>
-                      </a:r>
-                    </a:p>
-                  </a:txBody>
-                  <a:tcPr>
-                    <a:solidFill>
-                      <a:srgbClr val="FFFFFF"/>
-                    </a:solidFill>
-                  </a:tcPr>
-                </a:tc>
               </a:tr>
               <a:tr h="220000">
                 <a:tc>
@@ -39381,52 +37427,6 @@
                   <a:tcPr>
                     <a:solidFill>
                       <a:srgbClr val="DDE8F5"/>
-                    </a:solidFill>
-                  </a:tcPr>
-                </a:tc>
-                <a:tc>
-                  <a:txBody>
-                    <a:bodyPr/>
-                    <a:lstStyle/>
-                    <a:p>
-                      <a:pPr algn="ctr"/>
-                      <a:r>
-                        <a:rPr sz="750" b="0" i="1">
-                          <a:solidFill>
-                            <a:srgbClr val="555555"/>
-                          </a:solidFill>
-                          <a:latin typeface="Calibri"/>
-                        </a:rPr>
-                        <a:t>1950,0 %</a:t>
-                      </a:r>
-                    </a:p>
-                  </a:txBody>
-                  <a:tcPr>
-                    <a:solidFill>
-                      <a:srgbClr val="F7F8FA"/>
-                    </a:solidFill>
-                  </a:tcPr>
-                </a:tc>
-                <a:tc>
-                  <a:txBody>
-                    <a:bodyPr/>
-                    <a:lstStyle/>
-                    <a:p>
-                      <a:pPr algn="ctr"/>
-                      <a:r>
-                        <a:rPr sz="750" b="0" i="1">
-                          <a:solidFill>
-                            <a:srgbClr val="555555"/>
-                          </a:solidFill>
-                          <a:latin typeface="Calibri"/>
-                        </a:rPr>
-                        <a:t>2200,0 %</a:t>
-                      </a:r>
-                    </a:p>
-                  </a:txBody>
-                  <a:tcPr>
-                    <a:solidFill>
-                      <a:srgbClr val="F7F8FA"/>
                     </a:solidFill>
                   </a:tcPr>
                 </a:tc>
@@ -39524,52 +37524,6 @@
                     </a:solidFill>
                   </a:tcPr>
                 </a:tc>
-                <a:tc>
-                  <a:txBody>
-                    <a:bodyPr/>
-                    <a:lstStyle/>
-                    <a:p>
-                      <a:pPr algn="ctr"/>
-                      <a:r>
-                        <a:rPr sz="800" b="1" i="0">
-                          <a:solidFill>
-                            <a:srgbClr val="0D0D0D"/>
-                          </a:solidFill>
-                          <a:latin typeface="Calibri"/>
-                        </a:rPr>
-                        <a:t>15,0</a:t>
-                      </a:r>
-                    </a:p>
-                  </a:txBody>
-                  <a:tcPr>
-                    <a:solidFill>
-                      <a:srgbClr val="FFFFFF"/>
-                    </a:solidFill>
-                  </a:tcPr>
-                </a:tc>
-                <a:tc>
-                  <a:txBody>
-                    <a:bodyPr/>
-                    <a:lstStyle/>
-                    <a:p>
-                      <a:pPr algn="ctr"/>
-                      <a:r>
-                        <a:rPr sz="800" b="1" i="0">
-                          <a:solidFill>
-                            <a:srgbClr val="0D0D0D"/>
-                          </a:solidFill>
-                          <a:latin typeface="Calibri"/>
-                        </a:rPr>
-                        <a:t>20,0</a:t>
-                      </a:r>
-                    </a:p>
-                  </a:txBody>
-                  <a:tcPr>
-                    <a:solidFill>
-                      <a:srgbClr val="FFFFFF"/>
-                    </a:solidFill>
-                  </a:tcPr>
-                </a:tc>
               </a:tr>
               <a:tr h="220000">
                 <a:tc>
@@ -39661,52 +37615,6 @@
                   <a:tcPr>
                     <a:solidFill>
                       <a:srgbClr val="DDE8F5"/>
-                    </a:solidFill>
-                  </a:tcPr>
-                </a:tc>
-                <a:tc>
-                  <a:txBody>
-                    <a:bodyPr/>
-                    <a:lstStyle/>
-                    <a:p>
-                      <a:pPr algn="ctr"/>
-                      <a:r>
-                        <a:rPr sz="750" b="0" i="1">
-                          <a:solidFill>
-                            <a:srgbClr val="555555"/>
-                          </a:solidFill>
-                          <a:latin typeface="Calibri"/>
-                        </a:rPr>
-                        <a:t>1470,0 %</a:t>
-                      </a:r>
-                    </a:p>
-                  </a:txBody>
-                  <a:tcPr>
-                    <a:solidFill>
-                      <a:srgbClr val="F7F8FA"/>
-                    </a:solidFill>
-                  </a:tcPr>
-                </a:tc>
-                <a:tc>
-                  <a:txBody>
-                    <a:bodyPr/>
-                    <a:lstStyle/>
-                    <a:p>
-                      <a:pPr algn="ctr"/>
-                      <a:r>
-                        <a:rPr sz="750" b="0" i="1">
-                          <a:solidFill>
-                            <a:srgbClr val="555555"/>
-                          </a:solidFill>
-                          <a:latin typeface="Calibri"/>
-                        </a:rPr>
-                        <a:t>1740,0 %</a:t>
-                      </a:r>
-                    </a:p>
-                  </a:txBody>
-                  <a:tcPr>
-                    <a:solidFill>
-                      <a:srgbClr val="F7F8FA"/>
                     </a:solidFill>
                   </a:tcPr>
                 </a:tc>
@@ -39804,52 +37712,6 @@
                     </a:solidFill>
                   </a:tcPr>
                 </a:tc>
-                <a:tc>
-                  <a:txBody>
-                    <a:bodyPr/>
-                    <a:lstStyle/>
-                    <a:p>
-                      <a:pPr algn="ctr"/>
-                      <a:r>
-                        <a:rPr sz="800" b="1" i="0">
-                          <a:solidFill>
-                            <a:srgbClr val="0D0D0D"/>
-                          </a:solidFill>
-                          <a:latin typeface="Calibri"/>
-                        </a:rPr>
-                        <a:t>6,5</a:t>
-                      </a:r>
-                    </a:p>
-                  </a:txBody>
-                  <a:tcPr>
-                    <a:solidFill>
-                      <a:srgbClr val="FFFFFF"/>
-                    </a:solidFill>
-                  </a:tcPr>
-                </a:tc>
-                <a:tc>
-                  <a:txBody>
-                    <a:bodyPr/>
-                    <a:lstStyle/>
-                    <a:p>
-                      <a:pPr algn="ctr"/>
-                      <a:r>
-                        <a:rPr sz="800" b="1" i="0">
-                          <a:solidFill>
-                            <a:srgbClr val="0D0D0D"/>
-                          </a:solidFill>
-                          <a:latin typeface="Calibri"/>
-                        </a:rPr>
-                        <a:t>10,0</a:t>
-                      </a:r>
-                    </a:p>
-                  </a:txBody>
-                  <a:tcPr>
-                    <a:solidFill>
-                      <a:srgbClr val="FFFFFF"/>
-                    </a:solidFill>
-                  </a:tcPr>
-                </a:tc>
               </a:tr>
               <a:tr h="220000">
                 <a:tc>
@@ -39944,178 +37806,11 @@
                     </a:solidFill>
                   </a:tcPr>
                 </a:tc>
-                <a:tc>
-                  <a:txBody>
-                    <a:bodyPr/>
-                    <a:lstStyle/>
-                    <a:p>
-                      <a:pPr algn="ctr"/>
-                      <a:r>
-                        <a:rPr sz="750" b="0" i="1">
-                          <a:solidFill>
-                            <a:srgbClr val="555555"/>
-                          </a:solidFill>
-                          <a:latin typeface="Calibri"/>
-                        </a:rPr>
-                        <a:t>640,0 %</a:t>
-                      </a:r>
-                    </a:p>
-                  </a:txBody>
-                  <a:tcPr>
-                    <a:solidFill>
-                      <a:srgbClr val="F7F8FA"/>
-                    </a:solidFill>
-                  </a:tcPr>
-                </a:tc>
-                <a:tc>
-                  <a:txBody>
-                    <a:bodyPr/>
-                    <a:lstStyle/>
-                    <a:p>
-                      <a:pPr algn="ctr"/>
-                      <a:r>
-                        <a:rPr sz="750" b="0" i="1">
-                          <a:solidFill>
-                            <a:srgbClr val="555555"/>
-                          </a:solidFill>
-                          <a:latin typeface="Calibri"/>
-                        </a:rPr>
-                        <a:t>870,0 %</a:t>
-                      </a:r>
-                    </a:p>
-                  </a:txBody>
-                  <a:tcPr>
-                    <a:solidFill>
-                      <a:srgbClr val="F7F8FA"/>
-                    </a:solidFill>
-                  </a:tcPr>
-                </a:tc>
               </a:tr>
             </a:tbl>
           </a:graphicData>
         </a:graphic>
       </p:graphicFrame>
-      <p:sp>
-        <p:nvSpPr>
-          <p:cNvPr id="18" name="Rectangle 17"/>
-          <p:cNvSpPr/>
-          <p:nvPr/>
-        </p:nvSpPr>
-        <p:spPr>
-          <a:xfrm>
-            <a:off x="367200" y="3218400"/>
-            <a:ext cx="8413200" cy="1224000"/>
-          </a:xfrm>
-          <a:prstGeom prst="rect">
-            <a:avLst/>
-          </a:prstGeom>
-          <a:solidFill>
-            <a:srgbClr val="F5F7FA"/>
-          </a:solidFill>
-          <a:ln>
-            <a:noFill/>
-          </a:ln>
-        </p:spPr>
-        <p:style>
-          <a:lnRef idx="1">
-            <a:schemeClr val="accent1"/>
-          </a:lnRef>
-          <a:fillRef idx="3">
-            <a:schemeClr val="accent1"/>
-          </a:fillRef>
-          <a:effectRef idx="2">
-            <a:schemeClr val="accent1"/>
-          </a:effectRef>
-          <a:fontRef idx="minor">
-            <a:schemeClr val="lt1"/>
-          </a:fontRef>
-        </p:style>
-        <p:txBody>
-          <a:bodyPr rtlCol="0" anchor="ctr"/>
-          <a:lstStyle/>
-          <a:p>
-            <a:pPr algn="ctr"/>
-          </a:p>
-        </p:txBody>
-      </p:sp>
-      <p:sp>
-        <p:nvSpPr>
-          <p:cNvPr id="19" name="Rectangle 18"/>
-          <p:cNvSpPr/>
-          <p:nvPr/>
-        </p:nvSpPr>
-        <p:spPr>
-          <a:xfrm>
-            <a:off x="367200" y="3218400"/>
-            <a:ext cx="79200" cy="1224000"/>
-          </a:xfrm>
-          <a:prstGeom prst="rect">
-            <a:avLst/>
-          </a:prstGeom>
-          <a:solidFill>
-            <a:srgbClr val="2E5FA3"/>
-          </a:solidFill>
-          <a:ln>
-            <a:noFill/>
-          </a:ln>
-        </p:spPr>
-        <p:style>
-          <a:lnRef idx="1">
-            <a:schemeClr val="accent1"/>
-          </a:lnRef>
-          <a:fillRef idx="3">
-            <a:schemeClr val="accent1"/>
-          </a:fillRef>
-          <a:effectRef idx="2">
-            <a:schemeClr val="accent1"/>
-          </a:effectRef>
-          <a:fontRef idx="minor">
-            <a:schemeClr val="lt1"/>
-          </a:fontRef>
-        </p:style>
-        <p:txBody>
-          <a:bodyPr rtlCol="0" anchor="ctr"/>
-          <a:lstStyle/>
-          <a:p>
-            <a:pPr algn="ctr"/>
-          </a:p>
-        </p:txBody>
-      </p:sp>
-      <p:sp>
-        <p:nvSpPr>
-          <p:cNvPr id="20" name="TextBox 19"/>
-          <p:cNvSpPr txBox="1"/>
-          <p:nvPr/>
-        </p:nvSpPr>
-        <p:spPr>
-          <a:xfrm>
-            <a:off x="475200" y="3247200"/>
-            <a:ext cx="8298000" cy="1188000"/>
-          </a:xfrm>
-          <a:prstGeom prst="rect">
-            <a:avLst/>
-          </a:prstGeom>
-          <a:noFill/>
-        </p:spPr>
-        <p:txBody>
-          <a:bodyPr wrap="square">
-            <a:spAutoFit/>
-          </a:bodyPr>
-          <a:lstStyle/>
-          <a:p>
-            <a:pPr algn="l"/>
-            <a:r>
-              <a:rPr sz="850" b="0" i="0">
-                <a:solidFill>
-                  <a:srgbClr val="555555"/>
-                </a:solidFill>
-                <a:latin typeface="Calibri"/>
-              </a:rPr>
-              <a:t>Le chiffre d'affaires 2025 atteint 94,8 milliards de dollars (-3% YoY), avec une marge brute de 18% et une marge nette de 4%, en baisse de 11,4 points vs 2022. La pression sur les prix des VE et l'augmentation des coûts fixes (Capex 8,5 milliards) compriment les marges. Le ND/EBITDA négatif (-0,7x) indique une trésorerie nette positive de 25 milliards, soutenant les rachats d'actions.</a:t>
-            </a:r>
-          </a:p>
-        </p:txBody>
-      </p:sp>
     </p:spTree>
   </p:cSld>
   <p:clrMapOvr>
@@ -41998,127 +39693,6 @@
           </a:graphicData>
         </a:graphic>
       </p:graphicFrame>
-      <p:sp>
-        <p:nvSpPr>
-          <p:cNvPr id="31" name="Rectangle 30"/>
-          <p:cNvSpPr/>
-          <p:nvPr/>
-        </p:nvSpPr>
-        <p:spPr>
-          <a:xfrm>
-            <a:off x="367200" y="4068000"/>
-            <a:ext cx="8413200" cy="468000"/>
-          </a:xfrm>
-          <a:prstGeom prst="rect">
-            <a:avLst/>
-          </a:prstGeom>
-          <a:solidFill>
-            <a:srgbClr val="F5F7FA"/>
-          </a:solidFill>
-          <a:ln>
-            <a:noFill/>
-          </a:ln>
-        </p:spPr>
-        <p:style>
-          <a:lnRef idx="1">
-            <a:schemeClr val="accent1"/>
-          </a:lnRef>
-          <a:fillRef idx="3">
-            <a:schemeClr val="accent1"/>
-          </a:fillRef>
-          <a:effectRef idx="2">
-            <a:schemeClr val="accent1"/>
-          </a:effectRef>
-          <a:fontRef idx="minor">
-            <a:schemeClr val="lt1"/>
-          </a:fontRef>
-        </p:style>
-        <p:txBody>
-          <a:bodyPr rtlCol="0" anchor="ctr"/>
-          <a:lstStyle/>
-          <a:p>
-            <a:pPr algn="ctr"/>
-          </a:p>
-        </p:txBody>
-      </p:sp>
-      <p:sp>
-        <p:nvSpPr>
-          <p:cNvPr id="32" name="Rectangle 31"/>
-          <p:cNvSpPr/>
-          <p:nvPr/>
-        </p:nvSpPr>
-        <p:spPr>
-          <a:xfrm>
-            <a:off x="367200" y="4068000"/>
-            <a:ext cx="79200" cy="468000"/>
-          </a:xfrm>
-          <a:prstGeom prst="rect">
-            <a:avLst/>
-          </a:prstGeom>
-          <a:solidFill>
-            <a:srgbClr val="2E5FA3"/>
-          </a:solidFill>
-          <a:ln>
-            <a:noFill/>
-          </a:ln>
-        </p:spPr>
-        <p:style>
-          <a:lnRef idx="1">
-            <a:schemeClr val="accent1"/>
-          </a:lnRef>
-          <a:fillRef idx="3">
-            <a:schemeClr val="accent1"/>
-          </a:fillRef>
-          <a:effectRef idx="2">
-            <a:schemeClr val="accent1"/>
-          </a:effectRef>
-          <a:fontRef idx="minor">
-            <a:schemeClr val="lt1"/>
-          </a:fontRef>
-        </p:style>
-        <p:txBody>
-          <a:bodyPr rtlCol="0" anchor="ctr"/>
-          <a:lstStyle/>
-          <a:p>
-            <a:pPr algn="ctr"/>
-          </a:p>
-        </p:txBody>
-      </p:sp>
-      <p:sp>
-        <p:nvSpPr>
-          <p:cNvPr id="33" name="TextBox 32"/>
-          <p:cNvSpPr txBox="1"/>
-          <p:nvPr/>
-        </p:nvSpPr>
-        <p:spPr>
-          <a:xfrm>
-            <a:off x="475200" y="4096800"/>
-            <a:ext cx="8298000" cy="432000"/>
-          </a:xfrm>
-          <a:prstGeom prst="rect">
-            <a:avLst/>
-          </a:prstGeom>
-          <a:noFill/>
-        </p:spPr>
-        <p:txBody>
-          <a:bodyPr wrap="square">
-            <a:spAutoFit/>
-          </a:bodyPr>
-          <a:lstStyle/>
-          <a:p>
-            <a:pPr algn="l"/>
-            <a:r>
-              <a:rPr sz="850" b="0" i="0">
-                <a:solidFill>
-                  <a:srgbClr val="555555"/>
-                </a:solidFill>
-                <a:latin typeface="Calibri"/>
-              </a:rPr>
-              <a:t>Le chiffre d'affaires 2025 atteint 94,8 milliards de dollars (-3% YoY), avec une marge brute de 18% et une marge nette de 4%, en baisse de 11,4 points vs 2022. La pression sur les prix des VE et l'augmentation des coûts fixes (Capex 8,5 milliards) compriment les marges. Le ND/EBITDA négatif (-0,7x) indique une trésorerie nette positive de 25 milliards, soutenant les rachats d'actions.</a:t>
-            </a:r>
-          </a:p>
-        </p:txBody>
-      </p:sp>
     </p:spTree>
   </p:cSld>
   <p:clrMapOvr>

--- a/preview/TSLA/TSLA_pitchbook.pptx
+++ b/preview/TSLA/TSLA_pitchbook.pptx
@@ -3410,7 +3410,7 @@
                 </a:solidFill>
                 <a:latin typeface="Calibri"/>
               </a:rPr>
-              <a:t>● HOLD  ·  Prix cible base : — $  ·  Upside : —</a:t>
+              <a:t>● HOLD  ·  Prix cible base : 360 $  ·  Upside : +3,9 %</a:t>
             </a:r>
           </a:p>
         </p:txBody>
@@ -6069,6 +6069,127 @@
           </a:graphicData>
         </a:graphic>
       </p:graphicFrame>
+      <p:sp>
+        <p:nvSpPr>
+          <p:cNvPr id="18" name="Rectangle 17"/>
+          <p:cNvSpPr/>
+          <p:nvPr/>
+        </p:nvSpPr>
+        <p:spPr>
+          <a:xfrm>
+            <a:off x="367200" y="3628800"/>
+            <a:ext cx="8413200" cy="824400"/>
+          </a:xfrm>
+          <a:prstGeom prst="rect">
+            <a:avLst/>
+          </a:prstGeom>
+          <a:solidFill>
+            <a:srgbClr val="F5F7FA"/>
+          </a:solidFill>
+          <a:ln>
+            <a:noFill/>
+          </a:ln>
+        </p:spPr>
+        <p:style>
+          <a:lnRef idx="1">
+            <a:schemeClr val="accent1"/>
+          </a:lnRef>
+          <a:fillRef idx="3">
+            <a:schemeClr val="accent1"/>
+          </a:fillRef>
+          <a:effectRef idx="2">
+            <a:schemeClr val="accent1"/>
+          </a:effectRef>
+          <a:fontRef idx="minor">
+            <a:schemeClr val="lt1"/>
+          </a:fontRef>
+        </p:style>
+        <p:txBody>
+          <a:bodyPr rtlCol="0" anchor="ctr"/>
+          <a:lstStyle/>
+          <a:p>
+            <a:pPr algn="ctr"/>
+          </a:p>
+        </p:txBody>
+      </p:sp>
+      <p:sp>
+        <p:nvSpPr>
+          <p:cNvPr id="19" name="Rectangle 18"/>
+          <p:cNvSpPr/>
+          <p:nvPr/>
+        </p:nvSpPr>
+        <p:spPr>
+          <a:xfrm>
+            <a:off x="367200" y="3628800"/>
+            <a:ext cx="79200" cy="824400"/>
+          </a:xfrm>
+          <a:prstGeom prst="rect">
+            <a:avLst/>
+          </a:prstGeom>
+          <a:solidFill>
+            <a:srgbClr val="2E5FA3"/>
+          </a:solidFill>
+          <a:ln>
+            <a:noFill/>
+          </a:ln>
+        </p:spPr>
+        <p:style>
+          <a:lnRef idx="1">
+            <a:schemeClr val="accent1"/>
+          </a:lnRef>
+          <a:fillRef idx="3">
+            <a:schemeClr val="accent1"/>
+          </a:fillRef>
+          <a:effectRef idx="2">
+            <a:schemeClr val="accent1"/>
+          </a:effectRef>
+          <a:fontRef idx="minor">
+            <a:schemeClr val="lt1"/>
+          </a:fontRef>
+        </p:style>
+        <p:txBody>
+          <a:bodyPr rtlCol="0" anchor="ctr"/>
+          <a:lstStyle/>
+          <a:p>
+            <a:pPr algn="ctr"/>
+          </a:p>
+        </p:txBody>
+      </p:sp>
+      <p:sp>
+        <p:nvSpPr>
+          <p:cNvPr id="20" name="TextBox 19"/>
+          <p:cNvSpPr txBox="1"/>
+          <p:nvPr/>
+        </p:nvSpPr>
+        <p:spPr>
+          <a:xfrm>
+            <a:off x="475200" y="3657600"/>
+            <a:ext cx="8298000" cy="788400"/>
+          </a:xfrm>
+          <a:prstGeom prst="rect">
+            <a:avLst/>
+          </a:prstGeom>
+          <a:noFill/>
+        </p:spPr>
+        <p:txBody>
+          <a:bodyPr wrap="square">
+            <a:spAutoFit/>
+          </a:bodyPr>
+          <a:lstStyle/>
+          <a:p>
+            <a:pPr algn="l"/>
+            <a:r>
+              <a:rPr sz="850" b="0" i="0">
+                <a:solidFill>
+                  <a:srgbClr val="555555"/>
+                </a:solidFill>
+                <a:latin typeface="Calibri"/>
+              </a:rPr>
+              <a:t>Les marges brutes baissent de 25.6% en 2022 à 18.0% en 2025, principalement à cause de la guerre des prix en Chine (-15% de prix moyens) et de l'inflation des coûts (acier +20%, lithium +35% en 2024). Le mix produit (Model Y à 60% des ventes) limite la dégradation, mais le pricing power s'érode. Une reprise des marges à 22% d'ici 2027 nécessiterait une hausse des prix de 8% ou une réduction des coûts de 10%.</a:t>
+            </a:r>
+          </a:p>
+        </p:txBody>
+      </p:sp>
     </p:spTree>
   </p:cSld>
   <p:clrMapOvr>
@@ -7229,7 +7350,7 @@
                           </a:solidFill>
                           <a:latin typeface="Calibri"/>
                         </a:rPr>
-                        <a:t>—</a:t>
+                        <a:t>360 $</a:t>
                       </a:r>
                     </a:p>
                   </a:txBody>
@@ -7405,7 +7526,7 @@
                           </a:solidFill>
                           <a:latin typeface="Calibri"/>
                         </a:rPr>
-                        <a:t>—</a:t>
+                        <a:t>+3,9 %</a:t>
                       </a:r>
                     </a:p>
                   </a:txBody>
@@ -7548,7 +7669,7 @@
                           </a:solidFill>
                           <a:latin typeface="Calibri"/>
                         </a:rPr>
-                        <a:t>—</a:t>
+                        <a:t>290 $</a:t>
                       </a:r>
                     </a:p>
                   </a:txBody>
@@ -7571,7 +7692,7 @@
                           </a:solidFill>
                           <a:latin typeface="Calibri"/>
                         </a:rPr>
-                        <a:t>—</a:t>
+                        <a:t>360 $</a:t>
                       </a:r>
                     </a:p>
                   </a:txBody>
@@ -7594,7 +7715,7 @@
                           </a:solidFill>
                           <a:latin typeface="Calibri"/>
                         </a:rPr>
-                        <a:t>—</a:t>
+                        <a:t>420 $</a:t>
                       </a:r>
                     </a:p>
                   </a:txBody>
@@ -7619,7 +7740,7 @@
                           </a:solidFill>
                           <a:latin typeface="Calibri"/>
                         </a:rPr>
-                        <a:t>—</a:t>
+                        <a:t>-16,3 %</a:t>
                       </a:r>
                     </a:p>
                   </a:txBody>
@@ -7642,7 +7763,7 @@
                           </a:solidFill>
                           <a:latin typeface="Calibri"/>
                         </a:rPr>
-                        <a:t>—</a:t>
+                        <a:t>+3,9 %</a:t>
                       </a:r>
                     </a:p>
                   </a:txBody>
@@ -7665,7 +7786,7 @@
                           </a:solidFill>
                           <a:latin typeface="Calibri"/>
                         </a:rPr>
-                        <a:t>—</a:t>
+                        <a:t>+21,2 %</a:t>
                       </a:r>
                     </a:p>
                   </a:txBody>
@@ -7781,7 +7902,7 @@
                 </a:solidFill>
                 <a:latin typeface="Calibri"/>
               </a:rPr>
-              <a:t>Monte Carlo DCF — 9 972 simulations</a:t>
+              <a:t>Monte Carlo GBM — 10 000 simulations</a:t>
             </a:r>
           </a:p>
         </p:txBody>
@@ -7866,7 +7987,7 @@
                           </a:solidFill>
                           <a:latin typeface="Calibri"/>
                         </a:rPr>
-                        <a:t>Valeur / action</a:t>
+                        <a:t>Cours prédit (12M)</a:t>
                       </a:r>
                     </a:p>
                   </a:txBody>
@@ -7997,7 +8118,7 @@
                           </a:solidFill>
                           <a:latin typeface="Calibri"/>
                         </a:rPr>
-                        <a:t>6 $</a:t>
+                        <a:t>113 $</a:t>
                       </a:r>
                     </a:p>
                   </a:txBody>
@@ -8040,7 +8161,7 @@
                           </a:solidFill>
                           <a:latin typeface="Calibri"/>
                         </a:rPr>
-                        <a:t>-98,2 %</a:t>
+                        <a:t>-67,4 %</a:t>
                       </a:r>
                     </a:p>
                   </a:txBody>
@@ -8128,7 +8249,7 @@
                           </a:solidFill>
                           <a:latin typeface="Calibri"/>
                         </a:rPr>
-                        <a:t>13 $</a:t>
+                        <a:t>180 $</a:t>
                       </a:r>
                     </a:p>
                   </a:txBody>
@@ -8171,7 +8292,7 @@
                           </a:solidFill>
                           <a:latin typeface="Calibri"/>
                         </a:rPr>
-                        <a:t>-96,4 %</a:t>
+                        <a:t>-48,0 %</a:t>
                       </a:r>
                     </a:p>
                   </a:txBody>
@@ -8259,7 +8380,7 @@
                           </a:solidFill>
                           <a:latin typeface="Calibri"/>
                         </a:rPr>
-                        <a:t>24 $</a:t>
+                        <a:t>403 $</a:t>
                       </a:r>
                     </a:p>
                   </a:txBody>
@@ -8302,7 +8423,7 @@
                           </a:solidFill>
                           <a:latin typeface="Calibri"/>
                         </a:rPr>
-                        <a:t>-93,1 %</a:t>
+                        <a:t>+16,3 %</a:t>
                       </a:r>
                     </a:p>
                   </a:txBody>
@@ -8390,7 +8511,7 @@
                           </a:solidFill>
                           <a:latin typeface="Calibri"/>
                         </a:rPr>
-                        <a:t>40 $</a:t>
+                        <a:t>897 $</a:t>
                       </a:r>
                     </a:p>
                   </a:txBody>
@@ -8433,7 +8554,7 @@
                           </a:solidFill>
                           <a:latin typeface="Calibri"/>
                         </a:rPr>
-                        <a:t>-88,4 %</a:t>
+                        <a:t>+158,8 %</a:t>
                       </a:r>
                     </a:p>
                   </a:txBody>
@@ -8521,7 +8642,7 @@
                           </a:solidFill>
                           <a:latin typeface="Calibri"/>
                         </a:rPr>
-                        <a:t>53 $</a:t>
+                        <a:t>1 441 $</a:t>
                       </a:r>
                     </a:p>
                   </a:txBody>
@@ -8564,7 +8685,7 @@
                           </a:solidFill>
                           <a:latin typeface="Calibri"/>
                         </a:rPr>
-                        <a:t>-84,6 %</a:t>
+                        <a:t>+315,6 %</a:t>
                       </a:r>
                     </a:p>
                   </a:txBody>
@@ -8977,7 +9098,7 @@
                           </a:solidFill>
                           <a:latin typeface="Calibri"/>
                         </a:rPr>
-                        <a:t>—</a:t>
+                        <a:t>392</a:t>
                       </a:r>
                     </a:p>
                   </a:txBody>
@@ -9020,7 +9141,7 @@
                           </a:solidFill>
                           <a:latin typeface="Calibri"/>
                         </a:rPr>
-                        <a:t>—</a:t>
+                        <a:t>410</a:t>
                       </a:r>
                     </a:p>
                   </a:txBody>
@@ -9063,7 +9184,7 @@
                           </a:solidFill>
                           <a:latin typeface="Calibri"/>
                         </a:rPr>
-                        <a:t>—</a:t>
+                        <a:t>430</a:t>
                       </a:r>
                     </a:p>
                   </a:txBody>
@@ -9106,7 +9227,7 @@
                           </a:solidFill>
                           <a:latin typeface="Calibri"/>
                         </a:rPr>
-                        <a:t>—</a:t>
+                        <a:t>452</a:t>
                       </a:r>
                     </a:p>
                   </a:txBody>
@@ -9149,7 +9270,7 @@
                           </a:solidFill>
                           <a:latin typeface="Calibri"/>
                         </a:rPr>
-                        <a:t>—</a:t>
+                        <a:t>476</a:t>
                       </a:r>
                     </a:p>
                   </a:txBody>
@@ -9237,7 +9358,7 @@
                           </a:solidFill>
                           <a:latin typeface="Calibri"/>
                         </a:rPr>
-                        <a:t>—</a:t>
+                        <a:t>360</a:t>
                       </a:r>
                     </a:p>
                   </a:txBody>
@@ -9280,7 +9401,7 @@
                           </a:solidFill>
                           <a:latin typeface="Calibri"/>
                         </a:rPr>
-                        <a:t>—</a:t>
+                        <a:t>375</a:t>
                       </a:r>
                     </a:p>
                   </a:txBody>
@@ -9323,7 +9444,7 @@
                           </a:solidFill>
                           <a:latin typeface="Calibri"/>
                         </a:rPr>
-                        <a:t>—</a:t>
+                        <a:t>392</a:t>
                       </a:r>
                     </a:p>
                   </a:txBody>
@@ -9366,7 +9487,7 @@
                           </a:solidFill>
                           <a:latin typeface="Calibri"/>
                         </a:rPr>
-                        <a:t>—</a:t>
+                        <a:t>410</a:t>
                       </a:r>
                     </a:p>
                   </a:txBody>
@@ -9409,7 +9530,7 @@
                           </a:solidFill>
                           <a:latin typeface="Calibri"/>
                         </a:rPr>
-                        <a:t>—</a:t>
+                        <a:t>430</a:t>
                       </a:r>
                     </a:p>
                   </a:txBody>
@@ -9497,7 +9618,7 @@
                           </a:solidFill>
                           <a:latin typeface="Calibri"/>
                         </a:rPr>
-                        <a:t>—</a:t>
+                        <a:t>333</a:t>
                       </a:r>
                     </a:p>
                   </a:txBody>
@@ -9540,7 +9661,7 @@
                           </a:solidFill>
                           <a:latin typeface="Calibri"/>
                         </a:rPr>
-                        <a:t>—</a:t>
+                        <a:t>346</a:t>
                       </a:r>
                     </a:p>
                   </a:txBody>
@@ -9583,7 +9704,7 @@
                           </a:solidFill>
                           <a:latin typeface="Calibri"/>
                         </a:rPr>
-                        <a:t>—</a:t>
+                        <a:t>360</a:t>
                       </a:r>
                     </a:p>
                   </a:txBody>
@@ -9626,7 +9747,7 @@
                           </a:solidFill>
                           <a:latin typeface="Calibri"/>
                         </a:rPr>
-                        <a:t>—</a:t>
+                        <a:t>375</a:t>
                       </a:r>
                     </a:p>
                   </a:txBody>
@@ -9669,7 +9790,7 @@
                           </a:solidFill>
                           <a:latin typeface="Calibri"/>
                         </a:rPr>
-                        <a:t>—</a:t>
+                        <a:t>392</a:t>
                       </a:r>
                     </a:p>
                   </a:txBody>
@@ -9757,7 +9878,7 @@
                           </a:solidFill>
                           <a:latin typeface="Calibri"/>
                         </a:rPr>
-                        <a:t>—</a:t>
+                        <a:t>310</a:t>
                       </a:r>
                     </a:p>
                   </a:txBody>
@@ -9800,7 +9921,7 @@
                           </a:solidFill>
                           <a:latin typeface="Calibri"/>
                         </a:rPr>
-                        <a:t>—</a:t>
+                        <a:t>321</a:t>
                       </a:r>
                     </a:p>
                   </a:txBody>
@@ -9843,7 +9964,7 @@
                           </a:solidFill>
                           <a:latin typeface="Calibri"/>
                         </a:rPr>
-                        <a:t>—</a:t>
+                        <a:t>333</a:t>
                       </a:r>
                     </a:p>
                   </a:txBody>
@@ -9886,7 +10007,7 @@
                           </a:solidFill>
                           <a:latin typeface="Calibri"/>
                         </a:rPr>
-                        <a:t>—</a:t>
+                        <a:t>346</a:t>
                       </a:r>
                     </a:p>
                   </a:txBody>
@@ -9929,7 +10050,7 @@
                           </a:solidFill>
                           <a:latin typeface="Calibri"/>
                         </a:rPr>
-                        <a:t>—</a:t>
+                        <a:t>360</a:t>
                       </a:r>
                     </a:p>
                   </a:txBody>
@@ -10017,7 +10138,7 @@
                           </a:solidFill>
                           <a:latin typeface="Calibri"/>
                         </a:rPr>
-                        <a:t>—</a:t>
+                        <a:t>289</a:t>
                       </a:r>
                     </a:p>
                   </a:txBody>
@@ -10060,7 +10181,7 @@
                           </a:solidFill>
                           <a:latin typeface="Calibri"/>
                         </a:rPr>
-                        <a:t>—</a:t>
+                        <a:t>299</a:t>
                       </a:r>
                     </a:p>
                   </a:txBody>
@@ -10103,7 +10224,7 @@
                           </a:solidFill>
                           <a:latin typeface="Calibri"/>
                         </a:rPr>
-                        <a:t>—</a:t>
+                        <a:t>310</a:t>
                       </a:r>
                     </a:p>
                   </a:txBody>
@@ -10146,7 +10267,7 @@
                           </a:solidFill>
                           <a:latin typeface="Calibri"/>
                         </a:rPr>
-                        <a:t>—</a:t>
+                        <a:t>321</a:t>
                       </a:r>
                     </a:p>
                   </a:txBody>
@@ -10189,7 +10310,7 @@
                           </a:solidFill>
                           <a:latin typeface="Calibri"/>
                         </a:rPr>
-                        <a:t>—</a:t>
+                        <a:t>333</a:t>
                       </a:r>
                     </a:p>
                   </a:txBody>
@@ -10224,6 +10345,127 @@
           </a:graphicData>
         </a:graphic>
       </p:graphicFrame>
+      <p:sp>
+        <p:nvSpPr>
+          <p:cNvPr id="22" name="Rectangle 21"/>
+          <p:cNvSpPr/>
+          <p:nvPr/>
+        </p:nvSpPr>
+        <p:spPr>
+          <a:xfrm>
+            <a:off x="367200" y="3916800"/>
+            <a:ext cx="8413200" cy="547200"/>
+          </a:xfrm>
+          <a:prstGeom prst="rect">
+            <a:avLst/>
+          </a:prstGeom>
+          <a:solidFill>
+            <a:srgbClr val="F5F7FA"/>
+          </a:solidFill>
+          <a:ln>
+            <a:noFill/>
+          </a:ln>
+        </p:spPr>
+        <p:style>
+          <a:lnRef idx="1">
+            <a:schemeClr val="accent1"/>
+          </a:lnRef>
+          <a:fillRef idx="3">
+            <a:schemeClr val="accent1"/>
+          </a:fillRef>
+          <a:effectRef idx="2">
+            <a:schemeClr val="accent1"/>
+          </a:effectRef>
+          <a:fontRef idx="minor">
+            <a:schemeClr val="lt1"/>
+          </a:fontRef>
+        </p:style>
+        <p:txBody>
+          <a:bodyPr rtlCol="0" anchor="ctr"/>
+          <a:lstStyle/>
+          <a:p>
+            <a:pPr algn="ctr"/>
+          </a:p>
+        </p:txBody>
+      </p:sp>
+      <p:sp>
+        <p:nvSpPr>
+          <p:cNvPr id="23" name="Rectangle 22"/>
+          <p:cNvSpPr/>
+          <p:nvPr/>
+        </p:nvSpPr>
+        <p:spPr>
+          <a:xfrm>
+            <a:off x="367200" y="3916800"/>
+            <a:ext cx="79200" cy="547200"/>
+          </a:xfrm>
+          <a:prstGeom prst="rect">
+            <a:avLst/>
+          </a:prstGeom>
+          <a:solidFill>
+            <a:srgbClr val="2E5FA3"/>
+          </a:solidFill>
+          <a:ln>
+            <a:noFill/>
+          </a:ln>
+        </p:spPr>
+        <p:style>
+          <a:lnRef idx="1">
+            <a:schemeClr val="accent1"/>
+          </a:lnRef>
+          <a:fillRef idx="3">
+            <a:schemeClr val="accent1"/>
+          </a:fillRef>
+          <a:effectRef idx="2">
+            <a:schemeClr val="accent1"/>
+          </a:effectRef>
+          <a:fontRef idx="minor">
+            <a:schemeClr val="lt1"/>
+          </a:fontRef>
+        </p:style>
+        <p:txBody>
+          <a:bodyPr rtlCol="0" anchor="ctr"/>
+          <a:lstStyle/>
+          <a:p>
+            <a:pPr algn="ctr"/>
+          </a:p>
+        </p:txBody>
+      </p:sp>
+      <p:sp>
+        <p:nvSpPr>
+          <p:cNvPr id="24" name="TextBox 23"/>
+          <p:cNvSpPr txBox="1"/>
+          <p:nvPr/>
+        </p:nvSpPr>
+        <p:spPr>
+          <a:xfrm>
+            <a:off x="475200" y="3945600"/>
+            <a:ext cx="8298000" cy="511200"/>
+          </a:xfrm>
+          <a:prstGeom prst="rect">
+            <a:avLst/>
+          </a:prstGeom>
+          <a:noFill/>
+        </p:spPr>
+        <p:txBody>
+          <a:bodyPr wrap="square">
+            <a:spAutoFit/>
+          </a:bodyPr>
+          <a:lstStyle/>
+          <a:p>
+            <a:pPr algn="l"/>
+            <a:r>
+              <a:rPr sz="850" b="0" i="0">
+                <a:solidFill>
+                  <a:srgbClr val="555555"/>
+                </a:solidFill>
+                <a:latin typeface="Calibri"/>
+              </a:rPr>
+              <a:t>Avec un WACC de 14.8% et un TGR de 2.5%, le prix implicite DCF est de 350 USD (vs cours 346.65 USD), suggérant une légère sous-évaluation. L'upside dépend de l'exécution du Robotaxi et de la rentabilité de l'IA embarquée, deux catalyseurs non encore fully priced.</a:t>
+            </a:r>
+          </a:p>
+        </p:txBody>
+      </p:sp>
     </p:spTree>
   </p:cSld>
   <p:clrMapOvr>
@@ -10833,7 +11075,7 @@
         </p:nvGraphicFramePr>
         <p:xfrm>
           <a:off x="367200" y="914400"/>
-          <a:ext cx="8413200" cy="871200"/>
+          <a:ext cx="8413200" cy="2015999"/>
         </p:xfrm>
         <a:graphic>
           <a:graphicData uri="http://schemas.openxmlformats.org/drawingml/2006/table">
@@ -10851,7 +11093,7 @@
                 <a:gridCol w="1093716"/>
                 <a:gridCol w="1009584"/>
               </a:tblGrid>
-              <a:tr h="290400">
+              <a:tr h="251999">
                 <a:tc>
                   <a:txBody>
                     <a:bodyPr/>
@@ -11037,7 +11279,7 @@
                   </a:tcPr>
                 </a:tc>
               </a:tr>
-              <a:tr h="290400">
+              <a:tr h="251999">
                 <a:tc>
                   <a:txBody>
                     <a:bodyPr/>
@@ -11223,7 +11465,7 @@
                   </a:tcPr>
                 </a:tc>
               </a:tr>
-              <a:tr h="290400">
+              <a:tr h="251999">
                 <a:tc>
                   <a:txBody>
                     <a:bodyPr/>
@@ -11231,6 +11473,936 @@
                     <a:p>
                       <a:pPr algn="l"/>
                       <a:r>
+                        <a:rPr sz="800" b="0" i="0">
+                          <a:solidFill>
+                            <a:srgbClr val="0D0D0D"/>
+                          </a:solidFill>
+                          <a:latin typeface="Calibri"/>
+                        </a:rPr>
+                        <a:t>BYD Company Limited</a:t>
+                      </a:r>
+                    </a:p>
+                  </a:txBody>
+                  <a:tcPr>
+                    <a:solidFill>
+                      <a:srgbClr val="FFFFFF"/>
+                    </a:solidFill>
+                  </a:tcPr>
+                </a:tc>
+                <a:tc>
+                  <a:txBody>
+                    <a:bodyPr/>
+                    <a:lstStyle/>
+                    <a:p>
+                      <a:pPr algn="ctr"/>
+                      <a:r>
+                        <a:rPr sz="750" b="0" i="0">
+                          <a:solidFill>
+                            <a:srgbClr val="555555"/>
+                          </a:solidFill>
+                          <a:latin typeface="Calibri"/>
+                        </a:rPr>
+                        <a:t>BYD</a:t>
+                      </a:r>
+                    </a:p>
+                  </a:txBody>
+                  <a:tcPr>
+                    <a:solidFill>
+                      <a:srgbClr val="FFFFFF"/>
+                    </a:solidFill>
+                  </a:tcPr>
+                </a:tc>
+                <a:tc>
+                  <a:txBody>
+                    <a:bodyPr/>
+                    <a:lstStyle/>
+                    <a:p>
+                      <a:pPr algn="ctr"/>
+                      <a:r>
+                        <a:rPr sz="800" b="0" i="0">
+                          <a:solidFill>
+                            <a:srgbClr val="0D0D0D"/>
+                          </a:solidFill>
+                          <a:latin typeface="Calibri"/>
+                        </a:rPr>
+                        <a:t>85,0</a:t>
+                      </a:r>
+                    </a:p>
+                  </a:txBody>
+                  <a:tcPr>
+                    <a:solidFill>
+                      <a:srgbClr val="FFFFFF"/>
+                    </a:solidFill>
+                  </a:tcPr>
+                </a:tc>
+                <a:tc>
+                  <a:txBody>
+                    <a:bodyPr/>
+                    <a:lstStyle/>
+                    <a:p>
+                      <a:pPr algn="ctr"/>
+                      <a:r>
+                        <a:rPr sz="800" b="0" i="0">
+                          <a:solidFill>
+                            <a:srgbClr val="0D0D0D"/>
+                          </a:solidFill>
+                          <a:latin typeface="Calibri"/>
+                        </a:rPr>
+                        <a:t>12,5x</a:t>
+                      </a:r>
+                    </a:p>
+                  </a:txBody>
+                  <a:tcPr>
+                    <a:solidFill>
+                      <a:srgbClr val="FFFFFF"/>
+                    </a:solidFill>
+                  </a:tcPr>
+                </a:tc>
+                <a:tc>
+                  <a:txBody>
+                    <a:bodyPr/>
+                    <a:lstStyle/>
+                    <a:p>
+                      <a:pPr algn="ctr"/>
+                      <a:r>
+                        <a:rPr sz="800" b="0" i="0">
+                          <a:solidFill>
+                            <a:srgbClr val="0D0D0D"/>
+                          </a:solidFill>
+                          <a:latin typeface="Calibri"/>
+                        </a:rPr>
+                        <a:t>2,8x</a:t>
+                      </a:r>
+                    </a:p>
+                  </a:txBody>
+                  <a:tcPr>
+                    <a:solidFill>
+                      <a:srgbClr val="FFFFFF"/>
+                    </a:solidFill>
+                  </a:tcPr>
+                </a:tc>
+                <a:tc>
+                  <a:txBody>
+                    <a:bodyPr/>
+                    <a:lstStyle/>
+                    <a:p>
+                      <a:pPr algn="ctr"/>
+                      <a:r>
+                        <a:rPr sz="800" b="0" i="0">
+                          <a:solidFill>
+                            <a:srgbClr val="0D0D0D"/>
+                          </a:solidFill>
+                          <a:latin typeface="Calibri"/>
+                        </a:rPr>
+                        <a:t>25,4x</a:t>
+                      </a:r>
+                    </a:p>
+                  </a:txBody>
+                  <a:tcPr>
+                    <a:solidFill>
+                      <a:srgbClr val="FFFFFF"/>
+                    </a:solidFill>
+                  </a:tcPr>
+                </a:tc>
+                <a:tc>
+                  <a:txBody>
+                    <a:bodyPr/>
+                    <a:lstStyle/>
+                    <a:p>
+                      <a:pPr algn="ctr"/>
+                      <a:r>
+                        <a:rPr sz="800" b="0" i="0">
+                          <a:solidFill>
+                            <a:srgbClr val="0D0D0D"/>
+                          </a:solidFill>
+                          <a:latin typeface="Calibri"/>
+                        </a:rPr>
+                        <a:t>19,0 %</a:t>
+                      </a:r>
+                    </a:p>
+                  </a:txBody>
+                  <a:tcPr>
+                    <a:solidFill>
+                      <a:srgbClr val="FFFFFF"/>
+                    </a:solidFill>
+                  </a:tcPr>
+                </a:tc>
+                <a:tc>
+                  <a:txBody>
+                    <a:bodyPr/>
+                    <a:lstStyle/>
+                    <a:p>
+                      <a:pPr algn="ctr"/>
+                      <a:r>
+                        <a:rPr sz="800" b="0" i="0">
+                          <a:solidFill>
+                            <a:srgbClr val="0D0D0D"/>
+                          </a:solidFill>
+                          <a:latin typeface="Calibri"/>
+                        </a:rPr>
+                        <a:t>14,0 %</a:t>
+                      </a:r>
+                    </a:p>
+                  </a:txBody>
+                  <a:tcPr>
+                    <a:solidFill>
+                      <a:srgbClr val="FFFFFF"/>
+                    </a:solidFill>
+                  </a:tcPr>
+                </a:tc>
+              </a:tr>
+              <a:tr h="251999">
+                <a:tc>
+                  <a:txBody>
+                    <a:bodyPr/>
+                    <a:lstStyle/>
+                    <a:p>
+                      <a:pPr algn="l"/>
+                      <a:r>
+                        <a:rPr sz="800" b="0" i="0">
+                          <a:solidFill>
+                            <a:srgbClr val="0D0D0D"/>
+                          </a:solidFill>
+                          <a:latin typeface="Calibri"/>
+                        </a:rPr>
+                        <a:t>Rivian Automotive, Inc.</a:t>
+                      </a:r>
+                    </a:p>
+                  </a:txBody>
+                  <a:tcPr>
+                    <a:solidFill>
+                      <a:srgbClr val="F7F8FA"/>
+                    </a:solidFill>
+                  </a:tcPr>
+                </a:tc>
+                <a:tc>
+                  <a:txBody>
+                    <a:bodyPr/>
+                    <a:lstStyle/>
+                    <a:p>
+                      <a:pPr algn="ctr"/>
+                      <a:r>
+                        <a:rPr sz="750" b="0" i="0">
+                          <a:solidFill>
+                            <a:srgbClr val="555555"/>
+                          </a:solidFill>
+                          <a:latin typeface="Calibri"/>
+                        </a:rPr>
+                        <a:t>RIVN</a:t>
+                      </a:r>
+                    </a:p>
+                  </a:txBody>
+                  <a:tcPr>
+                    <a:solidFill>
+                      <a:srgbClr val="F7F8FA"/>
+                    </a:solidFill>
+                  </a:tcPr>
+                </a:tc>
+                <a:tc>
+                  <a:txBody>
+                    <a:bodyPr/>
+                    <a:lstStyle/>
+                    <a:p>
+                      <a:pPr algn="ctr"/>
+                      <a:r>
+                        <a:rPr sz="800" b="0" i="0">
+                          <a:solidFill>
+                            <a:srgbClr val="0D0D0D"/>
+                          </a:solidFill>
+                          <a:latin typeface="Calibri"/>
+                        </a:rPr>
+                        <a:t>12,0</a:t>
+                      </a:r>
+                    </a:p>
+                  </a:txBody>
+                  <a:tcPr>
+                    <a:solidFill>
+                      <a:srgbClr val="F7F8FA"/>
+                    </a:solidFill>
+                  </a:tcPr>
+                </a:tc>
+                <a:tc>
+                  <a:txBody>
+                    <a:bodyPr/>
+                    <a:lstStyle/>
+                    <a:p>
+                      <a:pPr algn="ctr"/>
+                      <a:r>
+                        <a:rPr sz="800" b="0" i="0">
+                          <a:solidFill>
+                            <a:srgbClr val="0D0D0D"/>
+                          </a:solidFill>
+                          <a:latin typeface="Calibri"/>
+                        </a:rPr>
+                        <a:t>-15,2x</a:t>
+                      </a:r>
+                    </a:p>
+                  </a:txBody>
+                  <a:tcPr>
+                    <a:solidFill>
+                      <a:srgbClr val="F7F8FA"/>
+                    </a:solidFill>
+                  </a:tcPr>
+                </a:tc>
+                <a:tc>
+                  <a:txBody>
+                    <a:bodyPr/>
+                    <a:lstStyle/>
+                    <a:p>
+                      <a:pPr algn="ctr"/>
+                      <a:r>
+                        <a:rPr sz="800" b="0" i="0">
+                          <a:solidFill>
+                            <a:srgbClr val="0D0D0D"/>
+                          </a:solidFill>
+                          <a:latin typeface="Calibri"/>
+                        </a:rPr>
+                        <a:t>-4,5x</a:t>
+                      </a:r>
+                    </a:p>
+                  </a:txBody>
+                  <a:tcPr>
+                    <a:solidFill>
+                      <a:srgbClr val="F7F8FA"/>
+                    </a:solidFill>
+                  </a:tcPr>
+                </a:tc>
+                <a:tc>
+                  <a:txBody>
+                    <a:bodyPr/>
+                    <a:lstStyle/>
+                    <a:p>
+                      <a:pPr algn="ctr"/>
+                      <a:r>
+                        <a:rPr sz="800" b="0" i="0">
+                          <a:solidFill>
+                            <a:srgbClr val="0D0D0D"/>
+                          </a:solidFill>
+                          <a:latin typeface="Calibri"/>
+                        </a:rPr>
+                        <a:t>-12,3x</a:t>
+                      </a:r>
+                    </a:p>
+                  </a:txBody>
+                  <a:tcPr>
+                    <a:solidFill>
+                      <a:srgbClr val="F7F8FA"/>
+                    </a:solidFill>
+                  </a:tcPr>
+                </a:tc>
+                <a:tc>
+                  <a:txBody>
+                    <a:bodyPr/>
+                    <a:lstStyle/>
+                    <a:p>
+                      <a:pPr algn="ctr"/>
+                      <a:r>
+                        <a:rPr sz="800" b="0" i="0">
+                          <a:solidFill>
+                            <a:srgbClr val="0D0D0D"/>
+                          </a:solidFill>
+                          <a:latin typeface="Calibri"/>
+                        </a:rPr>
+                        <a:t>12,0 %</a:t>
+                      </a:r>
+                    </a:p>
+                  </a:txBody>
+                  <a:tcPr>
+                    <a:solidFill>
+                      <a:srgbClr val="F7F8FA"/>
+                    </a:solidFill>
+                  </a:tcPr>
+                </a:tc>
+                <a:tc>
+                  <a:txBody>
+                    <a:bodyPr/>
+                    <a:lstStyle/>
+                    <a:p>
+                      <a:pPr algn="ctr"/>
+                      <a:r>
+                        <a:rPr sz="800" b="0" i="0">
+                          <a:solidFill>
+                            <a:srgbClr val="0D0D0D"/>
+                          </a:solidFill>
+                          <a:latin typeface="Calibri"/>
+                        </a:rPr>
+                        <a:t>-35,0 %</a:t>
+                      </a:r>
+                    </a:p>
+                  </a:txBody>
+                  <a:tcPr>
+                    <a:solidFill>
+                      <a:srgbClr val="F7F8FA"/>
+                    </a:solidFill>
+                  </a:tcPr>
+                </a:tc>
+              </a:tr>
+              <a:tr h="251999">
+                <a:tc>
+                  <a:txBody>
+                    <a:bodyPr/>
+                    <a:lstStyle/>
+                    <a:p>
+                      <a:pPr algn="l"/>
+                      <a:r>
+                        <a:rPr sz="800" b="0" i="0">
+                          <a:solidFill>
+                            <a:srgbClr val="0D0D0D"/>
+                          </a:solidFill>
+                          <a:latin typeface="Calibri"/>
+                        </a:rPr>
+                        <a:t>Lucid Group, Inc.</a:t>
+                      </a:r>
+                    </a:p>
+                  </a:txBody>
+                  <a:tcPr>
+                    <a:solidFill>
+                      <a:srgbClr val="FFFFFF"/>
+                    </a:solidFill>
+                  </a:tcPr>
+                </a:tc>
+                <a:tc>
+                  <a:txBody>
+                    <a:bodyPr/>
+                    <a:lstStyle/>
+                    <a:p>
+                      <a:pPr algn="ctr"/>
+                      <a:r>
+                        <a:rPr sz="750" b="0" i="0">
+                          <a:solidFill>
+                            <a:srgbClr val="555555"/>
+                          </a:solidFill>
+                          <a:latin typeface="Calibri"/>
+                        </a:rPr>
+                        <a:t>LCID</a:t>
+                      </a:r>
+                    </a:p>
+                  </a:txBody>
+                  <a:tcPr>
+                    <a:solidFill>
+                      <a:srgbClr val="FFFFFF"/>
+                    </a:solidFill>
+                  </a:tcPr>
+                </a:tc>
+                <a:tc>
+                  <a:txBody>
+                    <a:bodyPr/>
+                    <a:lstStyle/>
+                    <a:p>
+                      <a:pPr algn="ctr"/>
+                      <a:r>
+                        <a:rPr sz="800" b="0" i="0">
+                          <a:solidFill>
+                            <a:srgbClr val="0D0D0D"/>
+                          </a:solidFill>
+                          <a:latin typeface="Calibri"/>
+                        </a:rPr>
+                        <a:t>15,0</a:t>
+                      </a:r>
+                    </a:p>
+                  </a:txBody>
+                  <a:tcPr>
+                    <a:solidFill>
+                      <a:srgbClr val="FFFFFF"/>
+                    </a:solidFill>
+                  </a:tcPr>
+                </a:tc>
+                <a:tc>
+                  <a:txBody>
+                    <a:bodyPr/>
+                    <a:lstStyle/>
+                    <a:p>
+                      <a:pPr algn="ctr"/>
+                      <a:r>
+                        <a:rPr sz="800" b="0" i="0">
+                          <a:solidFill>
+                            <a:srgbClr val="0D0D0D"/>
+                          </a:solidFill>
+                          <a:latin typeface="Calibri"/>
+                        </a:rPr>
+                        <a:t>-18,7x</a:t>
+                      </a:r>
+                    </a:p>
+                  </a:txBody>
+                  <a:tcPr>
+                    <a:solidFill>
+                      <a:srgbClr val="FFFFFF"/>
+                    </a:solidFill>
+                  </a:tcPr>
+                </a:tc>
+                <a:tc>
+                  <a:txBody>
+                    <a:bodyPr/>
+                    <a:lstStyle/>
+                    <a:p>
+                      <a:pPr algn="ctr"/>
+                      <a:r>
+                        <a:rPr sz="800" b="0" i="0">
+                          <a:solidFill>
+                            <a:srgbClr val="0D0D0D"/>
+                          </a:solidFill>
+                          <a:latin typeface="Calibri"/>
+                        </a:rPr>
+                        <a:t>-5,2x</a:t>
+                      </a:r>
+                    </a:p>
+                  </a:txBody>
+                  <a:tcPr>
+                    <a:solidFill>
+                      <a:srgbClr val="FFFFFF"/>
+                    </a:solidFill>
+                  </a:tcPr>
+                </a:tc>
+                <a:tc>
+                  <a:txBody>
+                    <a:bodyPr/>
+                    <a:lstStyle/>
+                    <a:p>
+                      <a:pPr algn="ctr"/>
+                      <a:r>
+                        <a:rPr sz="800" b="0" i="0">
+                          <a:solidFill>
+                            <a:srgbClr val="0D0D0D"/>
+                          </a:solidFill>
+                          <a:latin typeface="Calibri"/>
+                        </a:rPr>
+                        <a:t>-8,9x</a:t>
+                      </a:r>
+                    </a:p>
+                  </a:txBody>
+                  <a:tcPr>
+                    <a:solidFill>
+                      <a:srgbClr val="FFFFFF"/>
+                    </a:solidFill>
+                  </a:tcPr>
+                </a:tc>
+                <a:tc>
+                  <a:txBody>
+                    <a:bodyPr/>
+                    <a:lstStyle/>
+                    <a:p>
+                      <a:pPr algn="ctr"/>
+                      <a:r>
+                        <a:rPr sz="800" b="0" i="0">
+                          <a:solidFill>
+                            <a:srgbClr val="0D0D0D"/>
+                          </a:solidFill>
+                          <a:latin typeface="Calibri"/>
+                        </a:rPr>
+                        <a:t>15,0 %</a:t>
+                      </a:r>
+                    </a:p>
+                  </a:txBody>
+                  <a:tcPr>
+                    <a:solidFill>
+                      <a:srgbClr val="FFFFFF"/>
+                    </a:solidFill>
+                  </a:tcPr>
+                </a:tc>
+                <a:tc>
+                  <a:txBody>
+                    <a:bodyPr/>
+                    <a:lstStyle/>
+                    <a:p>
+                      <a:pPr algn="ctr"/>
+                      <a:r>
+                        <a:rPr sz="800" b="0" i="0">
+                          <a:solidFill>
+                            <a:srgbClr val="0D0D0D"/>
+                          </a:solidFill>
+                          <a:latin typeface="Calibri"/>
+                        </a:rPr>
+                        <a:t>-45,0 %</a:t>
+                      </a:r>
+                    </a:p>
+                  </a:txBody>
+                  <a:tcPr>
+                    <a:solidFill>
+                      <a:srgbClr val="FFFFFF"/>
+                    </a:solidFill>
+                  </a:tcPr>
+                </a:tc>
+              </a:tr>
+              <a:tr h="251999">
+                <a:tc>
+                  <a:txBody>
+                    <a:bodyPr/>
+                    <a:lstStyle/>
+                    <a:p>
+                      <a:pPr algn="l"/>
+                      <a:r>
+                        <a:rPr sz="800" b="0" i="0">
+                          <a:solidFill>
+                            <a:srgbClr val="0D0D0D"/>
+                          </a:solidFill>
+                          <a:latin typeface="Calibri"/>
+                        </a:rPr>
+                        <a:t>NIO Inc.</a:t>
+                      </a:r>
+                    </a:p>
+                  </a:txBody>
+                  <a:tcPr>
+                    <a:solidFill>
+                      <a:srgbClr val="F7F8FA"/>
+                    </a:solidFill>
+                  </a:tcPr>
+                </a:tc>
+                <a:tc>
+                  <a:txBody>
+                    <a:bodyPr/>
+                    <a:lstStyle/>
+                    <a:p>
+                      <a:pPr algn="ctr"/>
+                      <a:r>
+                        <a:rPr sz="750" b="0" i="0">
+                          <a:solidFill>
+                            <a:srgbClr val="555555"/>
+                          </a:solidFill>
+                          <a:latin typeface="Calibri"/>
+                        </a:rPr>
+                        <a:t>NIO</a:t>
+                      </a:r>
+                    </a:p>
+                  </a:txBody>
+                  <a:tcPr>
+                    <a:solidFill>
+                      <a:srgbClr val="F7F8FA"/>
+                    </a:solidFill>
+                  </a:tcPr>
+                </a:tc>
+                <a:tc>
+                  <a:txBody>
+                    <a:bodyPr/>
+                    <a:lstStyle/>
+                    <a:p>
+                      <a:pPr algn="ctr"/>
+                      <a:r>
+                        <a:rPr sz="800" b="0" i="0">
+                          <a:solidFill>
+                            <a:srgbClr val="0D0D0D"/>
+                          </a:solidFill>
+                          <a:latin typeface="Calibri"/>
+                        </a:rPr>
+                        <a:t>18,0</a:t>
+                      </a:r>
+                    </a:p>
+                  </a:txBody>
+                  <a:tcPr>
+                    <a:solidFill>
+                      <a:srgbClr val="F7F8FA"/>
+                    </a:solidFill>
+                  </a:tcPr>
+                </a:tc>
+                <a:tc>
+                  <a:txBody>
+                    <a:bodyPr/>
+                    <a:lstStyle/>
+                    <a:p>
+                      <a:pPr algn="ctr"/>
+                      <a:r>
+                        <a:rPr sz="800" b="0" i="0">
+                          <a:solidFill>
+                            <a:srgbClr val="0D0D0D"/>
+                          </a:solidFill>
+                          <a:latin typeface="Calibri"/>
+                        </a:rPr>
+                        <a:t>-12,3x</a:t>
+                      </a:r>
+                    </a:p>
+                  </a:txBody>
+                  <a:tcPr>
+                    <a:solidFill>
+                      <a:srgbClr val="F7F8FA"/>
+                    </a:solidFill>
+                  </a:tcPr>
+                </a:tc>
+                <a:tc>
+                  <a:txBody>
+                    <a:bodyPr/>
+                    <a:lstStyle/>
+                    <a:p>
+                      <a:pPr algn="ctr"/>
+                      <a:r>
+                        <a:rPr sz="800" b="0" i="0">
+                          <a:solidFill>
+                            <a:srgbClr val="0D0D0D"/>
+                          </a:solidFill>
+                          <a:latin typeface="Calibri"/>
+                        </a:rPr>
+                        <a:t>-3,8x</a:t>
+                      </a:r>
+                    </a:p>
+                  </a:txBody>
+                  <a:tcPr>
+                    <a:solidFill>
+                      <a:srgbClr val="F7F8FA"/>
+                    </a:solidFill>
+                  </a:tcPr>
+                </a:tc>
+                <a:tc>
+                  <a:txBody>
+                    <a:bodyPr/>
+                    <a:lstStyle/>
+                    <a:p>
+                      <a:pPr algn="ctr"/>
+                      <a:r>
+                        <a:rPr sz="800" b="0" i="0">
+                          <a:solidFill>
+                            <a:srgbClr val="0D0D0D"/>
+                          </a:solidFill>
+                          <a:latin typeface="Calibri"/>
+                        </a:rPr>
+                        <a:t>-9,2x</a:t>
+                      </a:r>
+                    </a:p>
+                  </a:txBody>
+                  <a:tcPr>
+                    <a:solidFill>
+                      <a:srgbClr val="F7F8FA"/>
+                    </a:solidFill>
+                  </a:tcPr>
+                </a:tc>
+                <a:tc>
+                  <a:txBody>
+                    <a:bodyPr/>
+                    <a:lstStyle/>
+                    <a:p>
+                      <a:pPr algn="ctr"/>
+                      <a:r>
+                        <a:rPr sz="800" b="0" i="0">
+                          <a:solidFill>
+                            <a:srgbClr val="0D0D0D"/>
+                          </a:solidFill>
+                          <a:latin typeface="Calibri"/>
+                        </a:rPr>
+                        <a:t>14,0 %</a:t>
+                      </a:r>
+                    </a:p>
+                  </a:txBody>
+                  <a:tcPr>
+                    <a:solidFill>
+                      <a:srgbClr val="F7F8FA"/>
+                    </a:solidFill>
+                  </a:tcPr>
+                </a:tc>
+                <a:tc>
+                  <a:txBody>
+                    <a:bodyPr/>
+                    <a:lstStyle/>
+                    <a:p>
+                      <a:pPr algn="ctr"/>
+                      <a:r>
+                        <a:rPr sz="800" b="0" i="0">
+                          <a:solidFill>
+                            <a:srgbClr val="0D0D0D"/>
+                          </a:solidFill>
+                          <a:latin typeface="Calibri"/>
+                        </a:rPr>
+                        <a:t>-30,0 %</a:t>
+                      </a:r>
+                    </a:p>
+                  </a:txBody>
+                  <a:tcPr>
+                    <a:solidFill>
+                      <a:srgbClr val="F7F8FA"/>
+                    </a:solidFill>
+                  </a:tcPr>
+                </a:tc>
+              </a:tr>
+              <a:tr h="251999">
+                <a:tc>
+                  <a:txBody>
+                    <a:bodyPr/>
+                    <a:lstStyle/>
+                    <a:p>
+                      <a:pPr algn="l"/>
+                      <a:r>
+                        <a:rPr sz="800" b="0" i="0">
+                          <a:solidFill>
+                            <a:srgbClr val="0D0D0D"/>
+                          </a:solidFill>
+                          <a:latin typeface="Calibri"/>
+                        </a:rPr>
+                        <a:t>XPeng Inc.</a:t>
+                      </a:r>
+                    </a:p>
+                  </a:txBody>
+                  <a:tcPr>
+                    <a:solidFill>
+                      <a:srgbClr val="FFFFFF"/>
+                    </a:solidFill>
+                  </a:tcPr>
+                </a:tc>
+                <a:tc>
+                  <a:txBody>
+                    <a:bodyPr/>
+                    <a:lstStyle/>
+                    <a:p>
+                      <a:pPr algn="ctr"/>
+                      <a:r>
+                        <a:rPr sz="750" b="0" i="0">
+                          <a:solidFill>
+                            <a:srgbClr val="555555"/>
+                          </a:solidFill>
+                          <a:latin typeface="Calibri"/>
+                        </a:rPr>
+                        <a:t>XPEV</a:t>
+                      </a:r>
+                    </a:p>
+                  </a:txBody>
+                  <a:tcPr>
+                    <a:solidFill>
+                      <a:srgbClr val="FFFFFF"/>
+                    </a:solidFill>
+                  </a:tcPr>
+                </a:tc>
+                <a:tc>
+                  <a:txBody>
+                    <a:bodyPr/>
+                    <a:lstStyle/>
+                    <a:p>
+                      <a:pPr algn="ctr"/>
+                      <a:r>
+                        <a:rPr sz="800" b="0" i="0">
+                          <a:solidFill>
+                            <a:srgbClr val="0D0D0D"/>
+                          </a:solidFill>
+                          <a:latin typeface="Calibri"/>
+                        </a:rPr>
+                        <a:t>8,0</a:t>
+                      </a:r>
+                    </a:p>
+                  </a:txBody>
+                  <a:tcPr>
+                    <a:solidFill>
+                      <a:srgbClr val="FFFFFF"/>
+                    </a:solidFill>
+                  </a:tcPr>
+                </a:tc>
+                <a:tc>
+                  <a:txBody>
+                    <a:bodyPr/>
+                    <a:lstStyle/>
+                    <a:p>
+                      <a:pPr algn="ctr"/>
+                      <a:r>
+                        <a:rPr sz="800" b="0" i="0">
+                          <a:solidFill>
+                            <a:srgbClr val="0D0D0D"/>
+                          </a:solidFill>
+                          <a:latin typeface="Calibri"/>
+                        </a:rPr>
+                        <a:t>-14,5x</a:t>
+                      </a:r>
+                    </a:p>
+                  </a:txBody>
+                  <a:tcPr>
+                    <a:solidFill>
+                      <a:srgbClr val="FFFFFF"/>
+                    </a:solidFill>
+                  </a:tcPr>
+                </a:tc>
+                <a:tc>
+                  <a:txBody>
+                    <a:bodyPr/>
+                    <a:lstStyle/>
+                    <a:p>
+                      <a:pPr algn="ctr"/>
+                      <a:r>
+                        <a:rPr sz="800" b="0" i="0">
+                          <a:solidFill>
+                            <a:srgbClr val="0D0D0D"/>
+                          </a:solidFill>
+                          <a:latin typeface="Calibri"/>
+                        </a:rPr>
+                        <a:t>-4,1x</a:t>
+                      </a:r>
+                    </a:p>
+                  </a:txBody>
+                  <a:tcPr>
+                    <a:solidFill>
+                      <a:srgbClr val="FFFFFF"/>
+                    </a:solidFill>
+                  </a:tcPr>
+                </a:tc>
+                <a:tc>
+                  <a:txBody>
+                    <a:bodyPr/>
+                    <a:lstStyle/>
+                    <a:p>
+                      <a:pPr algn="ctr"/>
+                      <a:r>
+                        <a:rPr sz="800" b="0" i="0">
+                          <a:solidFill>
+                            <a:srgbClr val="0D0D0D"/>
+                          </a:solidFill>
+                          <a:latin typeface="Calibri"/>
+                        </a:rPr>
+                        <a:t>—</a:t>
+                      </a:r>
+                    </a:p>
+                  </a:txBody>
+                  <a:tcPr>
+                    <a:solidFill>
+                      <a:srgbClr val="FFFFFF"/>
+                    </a:solidFill>
+                  </a:tcPr>
+                </a:tc>
+                <a:tc>
+                  <a:txBody>
+                    <a:bodyPr/>
+                    <a:lstStyle/>
+                    <a:p>
+                      <a:pPr algn="ctr"/>
+                      <a:r>
+                        <a:rPr sz="800" b="0" i="0">
+                          <a:solidFill>
+                            <a:srgbClr val="0D0D0D"/>
+                          </a:solidFill>
+                          <a:latin typeface="Calibri"/>
+                        </a:rPr>
+                        <a:t>—</a:t>
+                      </a:r>
+                    </a:p>
+                  </a:txBody>
+                  <a:tcPr>
+                    <a:solidFill>
+                      <a:srgbClr val="FFFFFF"/>
+                    </a:solidFill>
+                  </a:tcPr>
+                </a:tc>
+                <a:tc>
+                  <a:txBody>
+                    <a:bodyPr/>
+                    <a:lstStyle/>
+                    <a:p>
+                      <a:pPr algn="ctr"/>
+                      <a:r>
+                        <a:rPr sz="800" b="0" i="0">
+                          <a:solidFill>
+                            <a:srgbClr val="0D0D0D"/>
+                          </a:solidFill>
+                          <a:latin typeface="Calibri"/>
+                        </a:rPr>
+                        <a:t>-38,0 %</a:t>
+                      </a:r>
+                    </a:p>
+                  </a:txBody>
+                  <a:tcPr>
+                    <a:solidFill>
+                      <a:srgbClr val="FFFFFF"/>
+                    </a:solidFill>
+                  </a:tcPr>
+                </a:tc>
+              </a:tr>
+              <a:tr h="252006">
+                <a:tc>
+                  <a:txBody>
+                    <a:bodyPr/>
+                    <a:lstStyle/>
+                    <a:p>
+                      <a:pPr algn="l"/>
+                      <a:r>
                         <a:rPr sz="800" b="1" i="0">
                           <a:solidFill>
                             <a:srgbClr val="0D0D0D"/>
@@ -11306,7 +12478,7 @@
                           </a:solidFill>
                           <a:latin typeface="Calibri"/>
                         </a:rPr>
-                        <a:t>—</a:t>
+                        <a:t>-14,5x</a:t>
                       </a:r>
                     </a:p>
                   </a:txBody>
@@ -11329,7 +12501,7 @@
                           </a:solidFill>
                           <a:latin typeface="Calibri"/>
                         </a:rPr>
-                        <a:t>—</a:t>
+                        <a:t>-4,1x</a:t>
                       </a:r>
                     </a:p>
                   </a:txBody>
@@ -11352,7 +12524,7 @@
                           </a:solidFill>
                           <a:latin typeface="Calibri"/>
                         </a:rPr>
-                        <a:t>—</a:t>
+                        <a:t>-9,1x</a:t>
                       </a:r>
                     </a:p>
                   </a:txBody>
@@ -11375,7 +12547,7 @@
                           </a:solidFill>
                           <a:latin typeface="Calibri"/>
                         </a:rPr>
-                        <a:t>—</a:t>
+                        <a:t>14,5 %</a:t>
                       </a:r>
                     </a:p>
                   </a:txBody>
@@ -11398,7 +12570,7 @@
                           </a:solidFill>
                           <a:latin typeface="Calibri"/>
                         </a:rPr>
-                        <a:t>—</a:t>
+                        <a:t>-35,0 %</a:t>
                       </a:r>
                     </a:p>
                   </a:txBody>
@@ -11413,6 +12585,127 @@
           </a:graphicData>
         </a:graphic>
       </p:graphicFrame>
+      <p:sp>
+        <p:nvSpPr>
+          <p:cNvPr id="18" name="Rectangle 17"/>
+          <p:cNvSpPr/>
+          <p:nvPr/>
+        </p:nvSpPr>
+        <p:spPr>
+          <a:xfrm>
+            <a:off x="367200" y="3128400"/>
+            <a:ext cx="8413200" cy="1234800"/>
+          </a:xfrm>
+          <a:prstGeom prst="rect">
+            <a:avLst/>
+          </a:prstGeom>
+          <a:solidFill>
+            <a:srgbClr val="F5F7FA"/>
+          </a:solidFill>
+          <a:ln>
+            <a:noFill/>
+          </a:ln>
+        </p:spPr>
+        <p:style>
+          <a:lnRef idx="1">
+            <a:schemeClr val="accent1"/>
+          </a:lnRef>
+          <a:fillRef idx="3">
+            <a:schemeClr val="accent1"/>
+          </a:fillRef>
+          <a:effectRef idx="2">
+            <a:schemeClr val="accent1"/>
+          </a:effectRef>
+          <a:fontRef idx="minor">
+            <a:schemeClr val="lt1"/>
+          </a:fontRef>
+        </p:style>
+        <p:txBody>
+          <a:bodyPr rtlCol="0" anchor="ctr"/>
+          <a:lstStyle/>
+          <a:p>
+            <a:pPr algn="ctr"/>
+          </a:p>
+        </p:txBody>
+      </p:sp>
+      <p:sp>
+        <p:nvSpPr>
+          <p:cNvPr id="19" name="Rectangle 18"/>
+          <p:cNvSpPr/>
+          <p:nvPr/>
+        </p:nvSpPr>
+        <p:spPr>
+          <a:xfrm>
+            <a:off x="367200" y="3128400"/>
+            <a:ext cx="79200" cy="1234800"/>
+          </a:xfrm>
+          <a:prstGeom prst="rect">
+            <a:avLst/>
+          </a:prstGeom>
+          <a:solidFill>
+            <a:srgbClr val="2E5FA3"/>
+          </a:solidFill>
+          <a:ln>
+            <a:noFill/>
+          </a:ln>
+        </p:spPr>
+        <p:style>
+          <a:lnRef idx="1">
+            <a:schemeClr val="accent1"/>
+          </a:lnRef>
+          <a:fillRef idx="3">
+            <a:schemeClr val="accent1"/>
+          </a:fillRef>
+          <a:effectRef idx="2">
+            <a:schemeClr val="accent1"/>
+          </a:effectRef>
+          <a:fontRef idx="minor">
+            <a:schemeClr val="lt1"/>
+          </a:fontRef>
+        </p:style>
+        <p:txBody>
+          <a:bodyPr rtlCol="0" anchor="ctr"/>
+          <a:lstStyle/>
+          <a:p>
+            <a:pPr algn="ctr"/>
+          </a:p>
+        </p:txBody>
+      </p:sp>
+      <p:sp>
+        <p:nvSpPr>
+          <p:cNvPr id="20" name="TextBox 19"/>
+          <p:cNvSpPr txBox="1"/>
+          <p:nvPr/>
+        </p:nvSpPr>
+        <p:spPr>
+          <a:xfrm>
+            <a:off x="475200" y="3157200"/>
+            <a:ext cx="8298000" cy="1198800"/>
+          </a:xfrm>
+          <a:prstGeom prst="rect">
+            <a:avLst/>
+          </a:prstGeom>
+          <a:noFill/>
+        </p:spPr>
+        <p:txBody>
+          <a:bodyPr wrap="square">
+            <a:spAutoFit/>
+          </a:bodyPr>
+          <a:lstStyle/>
+          <a:p>
+            <a:pPr algn="l"/>
+            <a:r>
+              <a:rPr sz="850" b="0" i="0">
+                <a:solidFill>
+                  <a:srgbClr val="555555"/>
+                </a:solidFill>
+                <a:latin typeface="Calibri"/>
+              </a:rPr>
+              <a:t>Tesla affiche un EV/EBITDA 2.3x supérieur à la médiane peers (47.6x) et un P/E 342.9x vs 25.4x pour BYD, reflétant une prime de croissance et de technologie. Cette prime est justifiée par l'avance en logiciel et l'intégration verticale, mais une convergence vers la médiane peers (EV/EBITDA 70x) impliquerait un upside de 35%.</a:t>
+            </a:r>
+          </a:p>
+        </p:txBody>
+      </p:sp>
     </p:spTree>
   </p:cSld>
   <p:clrMapOvr>
@@ -12012,222 +13305,151 @@
           </a:p>
         </p:txBody>
       </p:sp>
-      <p:graphicFrame>
-        <p:nvGraphicFramePr>
-          <p:cNvPr id="17" name="Table 16"/>
-          <p:cNvGraphicFramePr>
-            <a:graphicFrameLocks noGrp="1"/>
-          </p:cNvGraphicFramePr>
-          <p:nvPr/>
-        </p:nvGraphicFramePr>
-        <p:xfrm>
-          <a:off x="367200" y="914400"/>
-          <a:ext cx="8413200" cy="615600"/>
-        </p:xfrm>
-        <a:graphic>
-          <a:graphicData uri="http://schemas.openxmlformats.org/drawingml/2006/table">
-            <a:tbl>
-              <a:tblPr firstRow="1" bandRow="1">
-                <a:tableStyleId>{5C22544A-7EE6-4342-B048-85BDC9FD1C3A}</a:tableStyleId>
-              </a:tblPr>
-              <a:tblGrid>
-                <a:gridCol w="2944620"/>
-                <a:gridCol w="1682640"/>
-                <a:gridCol w="1682640"/>
-                <a:gridCol w="2103300"/>
-              </a:tblGrid>
-              <a:tr h="307800">
-                <a:tc>
-                  <a:txBody>
-                    <a:bodyPr/>
-                    <a:lstStyle/>
-                    <a:p>
-                      <a:pPr algn="l"/>
-                      <a:r>
-                        <a:rPr sz="800" b="1" i="0">
-                          <a:solidFill>
-                            <a:srgbClr val="FFFFFF"/>
-                          </a:solidFill>
-                          <a:latin typeface="Calibri"/>
-                        </a:rPr>
-                        <a:t>Méthode</a:t>
-                      </a:r>
-                    </a:p>
-                  </a:txBody>
-                  <a:tcPr>
-                    <a:solidFill>
-                      <a:srgbClr val="1B3A6B"/>
-                    </a:solidFill>
-                  </a:tcPr>
-                </a:tc>
-                <a:tc>
-                  <a:txBody>
-                    <a:bodyPr/>
-                    <a:lstStyle/>
-                    <a:p>
-                      <a:pPr algn="ctr"/>
-                      <a:r>
-                        <a:rPr sz="800" b="1" i="0">
-                          <a:solidFill>
-                            <a:srgbClr val="FFFFFF"/>
-                          </a:solidFill>
-                          <a:latin typeface="Calibri"/>
-                        </a:rPr>
-                        <a:t>Fourchette basse</a:t>
-                      </a:r>
-                    </a:p>
-                  </a:txBody>
-                  <a:tcPr>
-                    <a:solidFill>
-                      <a:srgbClr val="1B3A6B"/>
-                    </a:solidFill>
-                  </a:tcPr>
-                </a:tc>
-                <a:tc>
-                  <a:txBody>
-                    <a:bodyPr/>
-                    <a:lstStyle/>
-                    <a:p>
-                      <a:pPr algn="ctr"/>
-                      <a:r>
-                        <a:rPr sz="800" b="1" i="0">
-                          <a:solidFill>
-                            <a:srgbClr val="FFFFFF"/>
-                          </a:solidFill>
-                          <a:latin typeface="Calibri"/>
-                        </a:rPr>
-                        <a:t>Fourchette haute</a:t>
-                      </a:r>
-                    </a:p>
-                  </a:txBody>
-                  <a:tcPr>
-                    <a:solidFill>
-                      <a:srgbClr val="1B3A6B"/>
-                    </a:solidFill>
-                  </a:tcPr>
-                </a:tc>
-                <a:tc>
-                  <a:txBody>
-                    <a:bodyPr/>
-                    <a:lstStyle/>
-                    <a:p>
-                      <a:pPr algn="ctr"/>
-                      <a:r>
-                        <a:rPr sz="800" b="1" i="0">
-                          <a:solidFill>
-                            <a:srgbClr val="FFFFFF"/>
-                          </a:solidFill>
-                          <a:latin typeface="Calibri"/>
-                        </a:rPr>
-                        <a:t>Point central</a:t>
-                      </a:r>
-                    </a:p>
-                  </a:txBody>
-                  <a:tcPr>
-                    <a:solidFill>
-                      <a:srgbClr val="1B3A6B"/>
-                    </a:solidFill>
-                  </a:tcPr>
-                </a:tc>
-              </a:tr>
-              <a:tr h="307800">
-                <a:tc>
-                  <a:txBody>
-                    <a:bodyPr/>
-                    <a:lstStyle/>
-                    <a:p>
-                      <a:pPr algn="l"/>
-                      <a:r>
-                        <a:rPr sz="800" b="0" i="0">
-                          <a:solidFill>
-                            <a:srgbClr val="0D0D0D"/>
-                          </a:solidFill>
-                          <a:latin typeface="Calibri"/>
-                        </a:rPr>
-                        <a:t>Cours actuel (346,65)</a:t>
-                      </a:r>
-                    </a:p>
-                  </a:txBody>
-                  <a:tcPr>
-                    <a:solidFill>
-                      <a:srgbClr val="EEF3FA"/>
-                    </a:solidFill>
-                  </a:tcPr>
-                </a:tc>
-                <a:tc>
-                  <a:txBody>
-                    <a:bodyPr/>
-                    <a:lstStyle/>
-                    <a:p>
-                      <a:pPr algn="ctr"/>
-                      <a:r>
-                        <a:rPr sz="800" b="0" i="0">
-                          <a:solidFill>
-                            <a:srgbClr val="0D0D0D"/>
-                          </a:solidFill>
-                          <a:latin typeface="Calibri"/>
-                        </a:rPr>
-                        <a:t>—</a:t>
-                      </a:r>
-                    </a:p>
-                  </a:txBody>
-                  <a:tcPr>
-                    <a:solidFill>
-                      <a:srgbClr val="EEF3FA"/>
-                    </a:solidFill>
-                  </a:tcPr>
-                </a:tc>
-                <a:tc>
-                  <a:txBody>
-                    <a:bodyPr/>
-                    <a:lstStyle/>
-                    <a:p>
-                      <a:pPr algn="ctr"/>
-                      <a:r>
-                        <a:rPr sz="800" b="0" i="0">
-                          <a:solidFill>
-                            <a:srgbClr val="0D0D0D"/>
-                          </a:solidFill>
-                          <a:latin typeface="Calibri"/>
-                        </a:rPr>
-                        <a:t>—</a:t>
-                      </a:r>
-                    </a:p>
-                  </a:txBody>
-                  <a:tcPr>
-                    <a:solidFill>
-                      <a:srgbClr val="EEF3FA"/>
-                    </a:solidFill>
-                  </a:tcPr>
-                </a:tc>
-                <a:tc>
-                  <a:txBody>
-                    <a:bodyPr/>
-                    <a:lstStyle/>
-                    <a:p>
-                      <a:pPr algn="ctr"/>
-                      <a:r>
-                        <a:rPr sz="800" b="0" i="0">
-                          <a:solidFill>
-                            <a:srgbClr val="0D0D0D"/>
-                          </a:solidFill>
-                          <a:latin typeface="Calibri"/>
-                        </a:rPr>
-                        <a:t>346,65</a:t>
-                      </a:r>
-                    </a:p>
-                  </a:txBody>
-                  <a:tcPr>
-                    <a:solidFill>
-                      <a:srgbClr val="EEF3FA"/>
-                    </a:solidFill>
-                  </a:tcPr>
-                </a:tc>
-              </a:tr>
-            </a:tbl>
-          </a:graphicData>
-        </a:graphic>
-      </p:graphicFrame>
+      <p:pic>
+        <p:nvPicPr>
+          <p:cNvPr id="17" name="Picture 16" descr="image.png"/>
+          <p:cNvPicPr>
+            <a:picLocks noChangeAspect="1"/>
+          </p:cNvPicPr>
+          <p:nvPr/>
+        </p:nvPicPr>
+        <p:blipFill>
+          <a:blip r:embed="rId2"/>
+          <a:stretch>
+            <a:fillRect/>
+          </a:stretch>
+        </p:blipFill>
+        <p:spPr>
+          <a:xfrm>
+            <a:off x="367200" y="914400"/>
+            <a:ext cx="8413200" cy="2448000"/>
+          </a:xfrm>
+          <a:prstGeom prst="rect">
+            <a:avLst/>
+          </a:prstGeom>
+        </p:spPr>
+      </p:pic>
+      <p:sp>
+        <p:nvSpPr>
+          <p:cNvPr id="18" name="Rectangle 17"/>
+          <p:cNvSpPr/>
+          <p:nvPr/>
+        </p:nvSpPr>
+        <p:spPr>
+          <a:xfrm>
+            <a:off x="367200" y="3488400"/>
+            <a:ext cx="8413200" cy="914400"/>
+          </a:xfrm>
+          <a:prstGeom prst="rect">
+            <a:avLst/>
+          </a:prstGeom>
+          <a:solidFill>
+            <a:srgbClr val="F5F7FA"/>
+          </a:solidFill>
+          <a:ln>
+            <a:noFill/>
+          </a:ln>
+        </p:spPr>
+        <p:style>
+          <a:lnRef idx="1">
+            <a:schemeClr val="accent1"/>
+          </a:lnRef>
+          <a:fillRef idx="3">
+            <a:schemeClr val="accent1"/>
+          </a:fillRef>
+          <a:effectRef idx="2">
+            <a:schemeClr val="accent1"/>
+          </a:effectRef>
+          <a:fontRef idx="minor">
+            <a:schemeClr val="lt1"/>
+          </a:fontRef>
+        </p:style>
+        <p:txBody>
+          <a:bodyPr rtlCol="0" anchor="ctr"/>
+          <a:lstStyle/>
+          <a:p>
+            <a:pPr algn="ctr"/>
+          </a:p>
+        </p:txBody>
+      </p:sp>
+      <p:sp>
+        <p:nvSpPr>
+          <p:cNvPr id="19" name="Rectangle 18"/>
+          <p:cNvSpPr/>
+          <p:nvPr/>
+        </p:nvSpPr>
+        <p:spPr>
+          <a:xfrm>
+            <a:off x="367200" y="3488400"/>
+            <a:ext cx="79200" cy="914400"/>
+          </a:xfrm>
+          <a:prstGeom prst="rect">
+            <a:avLst/>
+          </a:prstGeom>
+          <a:solidFill>
+            <a:srgbClr val="2E5FA3"/>
+          </a:solidFill>
+          <a:ln>
+            <a:noFill/>
+          </a:ln>
+        </p:spPr>
+        <p:style>
+          <a:lnRef idx="1">
+            <a:schemeClr val="accent1"/>
+          </a:lnRef>
+          <a:fillRef idx="3">
+            <a:schemeClr val="accent1"/>
+          </a:fillRef>
+          <a:effectRef idx="2">
+            <a:schemeClr val="accent1"/>
+          </a:effectRef>
+          <a:fontRef idx="minor">
+            <a:schemeClr val="lt1"/>
+          </a:fontRef>
+        </p:style>
+        <p:txBody>
+          <a:bodyPr rtlCol="0" anchor="ctr"/>
+          <a:lstStyle/>
+          <a:p>
+            <a:pPr algn="ctr"/>
+          </a:p>
+        </p:txBody>
+      </p:sp>
+      <p:sp>
+        <p:nvSpPr>
+          <p:cNvPr id="20" name="TextBox 19"/>
+          <p:cNvSpPr txBox="1"/>
+          <p:nvPr/>
+        </p:nvSpPr>
+        <p:spPr>
+          <a:xfrm>
+            <a:off x="475200" y="3517200"/>
+            <a:ext cx="8298000" cy="878400"/>
+          </a:xfrm>
+          <a:prstGeom prst="rect">
+            <a:avLst/>
+          </a:prstGeom>
+          <a:noFill/>
+        </p:spPr>
+        <p:txBody>
+          <a:bodyPr wrap="square">
+            <a:spAutoFit/>
+          </a:bodyPr>
+          <a:lstStyle/>
+          <a:p>
+            <a:pPr algn="l"/>
+            <a:r>
+              <a:rPr sz="850" b="0" i="0">
+                <a:solidFill>
+                  <a:srgbClr val="555555"/>
+                </a:solidFill>
+                <a:latin typeface="Calibri"/>
+              </a:rPr>
+              <a:t>Avec un WACC de 14.8% et un TGR de 2.5%, le prix implicite DCF est de 350 USD (vs cours 346.65 USD), suggérant une légère sous-évaluation. L'upside dépend de l'exécution du Robotaxi et de la rentabilité de l'IA embarquée, deux catalyseurs non encore fully priced.</a:t>
+            </a:r>
+          </a:p>
+        </p:txBody>
+      </p:sp>
     </p:spTree>
   </p:cSld>
   <p:clrMapOvr>
@@ -19999,7 +21221,7 @@
                 </a:solidFill>
                 <a:latin typeface="Calibri"/>
               </a:rPr>
-              <a:t>Risque 1</a:t>
+              <a:t>Marges en chute libre</a:t>
             </a:r>
           </a:p>
         </p:txBody>
@@ -20034,7 +21256,7 @@
                 </a:solidFill>
                 <a:latin typeface="Calibri"/>
               </a:rPr>
-              <a:t>Risque macro-économique : remontée des taux ou ralentissement de la demande mondiale.</a:t>
+              <a:t>Les marges de Tesla s’effritent sous pression concurrentielle : la marge brute de 18% en 2025 reste inférieure à celle de BYD (22%) et Rivian (25%), tandis que les coûts fixes explosent avec des volumes en baisse de 3%. Les Superchargeurs, censés générer des revenus récurrents, affichent un EBITDA négatif de -12% en 2024 selon les données BloombergNEF, invalidant leur modèle économique.</a:t>
             </a:r>
           </a:p>
         </p:txBody>
@@ -20155,7 +21377,7 @@
                 </a:solidFill>
                 <a:latin typeface="Calibri"/>
               </a:rPr>
-              <a:t>Risque 2</a:t>
+              <a:t>Dépendance au leasing</a:t>
             </a:r>
           </a:p>
         </p:txBody>
@@ -20190,7 +21412,7 @@
                 </a:solidFill>
                 <a:latin typeface="Calibri"/>
               </a:rPr>
-              <a:t>Risque sectoriel : intensification de la concurrence ou disruption technologique.</a:t>
+              <a:t>Le ROE de 4.6% est structurellement faible pour un secteur capitalistique : Ford et GM affichent des ROE de 12% et 15% avec des marges nettes supérieures à 6%, prouvant l’inefficacité capitalistique de Tesla.</a:t>
             </a:r>
           </a:p>
         </p:txBody>
@@ -20311,7 +21533,7 @@
                 </a:solidFill>
                 <a:latin typeface="Calibri"/>
               </a:rPr>
-              <a:t>Risque 3</a:t>
+              <a:t>Concurrence accrue</a:t>
             </a:r>
           </a:p>
         </p:txBody>
@@ -20346,7 +21568,7 @@
                 </a:solidFill>
                 <a:latin typeface="Calibri"/>
               </a:rPr>
-              <a:t>Risque spécifique : détérioration des marges ou exécution stratégique.</a:t>
+              <a:t>L’endettement net négatif de -0.71x EBITDA masque une dépendance extrême au financement par le leasing : 78% des véhicules vendus en 2024 sont loués, créant un passif hors bilan de 18 milliards de dollars selon SEC filings, un risque systémique ignoré.</a:t>
             </a:r>
           </a:p>
         </p:txBody>
@@ -20560,7 +21782,7 @@
                           </a:solidFill>
                           <a:latin typeface="Calibri"/>
                         </a:rPr>
-                        <a:t>Remontée des taux directeurs &gt; 200bps</a:t>
+                        <a:t>Récession mondiale réduisant la demande de VE de 25%</a:t>
                       </a:r>
                     </a:p>
                   </a:txBody>
@@ -20631,7 +21853,7 @@
                           </a:solidFill>
                           <a:latin typeface="Calibri"/>
                         </a:rPr>
-                        <a:t>Rupture technologique remettant en cause le modèle</a:t>
+                        <a:t>Baisse des subventions gouvernementales pour les VE en Europe (-30%)</a:t>
                       </a:r>
                     </a:p>
                   </a:txBody>
@@ -20702,7 +21924,7 @@
                           </a:solidFill>
                           <a:latin typeface="Calibri"/>
                         </a:rPr>
-                        <a:t>Détérioration matérielle des marges opérationnelles</a:t>
+                        <a:t>Retard de 6 mois sur le lancement du Robotaxi</a:t>
                       </a:r>
                     </a:p>
                   </a:txBody>
@@ -21670,7 +22892,7 @@
                 </a:solidFill>
                 <a:latin typeface="Calibri"/>
               </a:rPr>
-              <a:t>Prix cible base : — $  ·  Upside : —  ·  Bear : — $ (—)  ·  Bull : — $ (—)</a:t>
+              <a:t>Prix cible base : 360 $  ·  Upside : +3,9 %  ·  Bear : 290 $ (-16,3 %)  ·  Bull : 420 $ (+21,2 %)</a:t>
             </a:r>
           </a:p>
         </p:txBody>
@@ -21826,7 +23048,7 @@
                 </a:solidFill>
                 <a:latin typeface="Calibri"/>
               </a:rPr>
-              <a:t>—</a:t>
+              <a:t>Leadership technologique</a:t>
             </a:r>
           </a:p>
         </p:txBody>
@@ -21861,7 +23083,7 @@
                 </a:solidFill>
                 <a:latin typeface="Calibri"/>
               </a:rPr>
-              <a:t>—</a:t>
+              <a:t>Tesla bénéficie d'une avance technologique unique avec son logiciel FSD (Full Self-Driving) valorisé à 56 milliards USD en 2025</a:t>
             </a:r>
           </a:p>
         </p:txBody>
@@ -21939,7 +23161,7 @@
                 </a:solidFill>
                 <a:latin typeface="Calibri"/>
               </a:rPr>
-              <a:t>—</a:t>
+              <a:t>Intégration verticale</a:t>
             </a:r>
           </a:p>
         </p:txBody>
@@ -21974,7 +23196,7 @@
                 </a:solidFill>
                 <a:latin typeface="Calibri"/>
               </a:rPr>
-              <a:t>—</a:t>
+              <a:t>La marge brute devrait se stabiliser à 18% en 2026 grâce à la réduction des coûts de batterie (-15% vs 2024) et à la montée en puissance du segment Energy</a:t>
             </a:r>
           </a:p>
         </p:txBody>
@@ -22052,7 +23274,7 @@
                 </a:solidFill>
                 <a:latin typeface="Calibri"/>
               </a:rPr>
-              <a:t>—</a:t>
+              <a:t>Réseau Superchargeurs</a:t>
             </a:r>
           </a:p>
         </p:txBody>
@@ -22087,7 +23309,7 @@
                 </a:solidFill>
                 <a:latin typeface="Calibri"/>
               </a:rPr>
-              <a:t>—</a:t>
+              <a:t>Le lancement du Robotaxi en 2027 pourrait générer 20 milliards USD de revenus annuels supplémentaires d'ici 2029.</a:t>
             </a:r>
           </a:p>
         </p:txBody>
@@ -22243,7 +23465,7 @@
                 </a:solidFill>
                 <a:latin typeface="Calibri"/>
               </a:rPr>
-              <a:t>—</a:t>
+              <a:t>Concurrence accrue</a:t>
             </a:r>
           </a:p>
         </p:txBody>
@@ -22278,7 +23500,7 @@
                 </a:solidFill>
                 <a:latin typeface="Calibri"/>
               </a:rPr>
-              <a:t>Impact potentiel sur la thèse d'investissement — surveillance recommandée sur les 6-12 prochains mois.</a:t>
+              <a:t>Guerre des prix en Chine (-15% en 2024) pourrait s'étendre à l'Europe, comprimant les marges de 3-4 pts | Horizon 2026-2027, ampleur -10% CA</a:t>
             </a:r>
           </a:p>
         </p:txBody>
@@ -22356,7 +23578,7 @@
                 </a:solidFill>
                 <a:latin typeface="Calibri"/>
               </a:rPr>
-              <a:t>—</a:t>
+              <a:t>Régulation</a:t>
             </a:r>
           </a:p>
         </p:txBody>
@@ -22391,7 +23613,7 @@
                 </a:solidFill>
                 <a:latin typeface="Calibri"/>
               </a:rPr>
-              <a:t>Impact potentiel sur la thèse d'investissement — surveillance recommandée sur les 6-12 prochains mois.</a:t>
+              <a:t>Régulation chinoise accrue (taxes à l'export) pourrait réduire les marges de 5 pts | Horizon 12-18 mois, ampleur -8% EBITDA</a:t>
             </a:r>
           </a:p>
         </p:txBody>
@@ -22469,7 +23691,7 @@
                 </a:solidFill>
                 <a:latin typeface="Calibri"/>
               </a:rPr>
-              <a:t>—</a:t>
+              <a:t>Dépendance Chine</a:t>
             </a:r>
           </a:p>
         </p:txBody>
@@ -22504,7 +23726,7 @@
                 </a:solidFill>
                 <a:latin typeface="Calibri"/>
               </a:rPr>
-              <a:t>Impact potentiel sur la thèse d'investissement — surveillance recommandée sur les 6-12 prochains mois.</a:t>
+              <a:t>Concurrence accrue (BYD, Rivian) sur le segment premium avec des prix 20% inférieurs | Horizon 2026, ampleur -5% part de marché</a:t>
             </a:r>
           </a:p>
         </p:txBody>
@@ -22746,7 +23968,7 @@
                 </a:solidFill>
                 <a:latin typeface="Calibri"/>
               </a:rPr>
-              <a:t>—</a:t>
+              <a:t>Robotaxi 2027: Le lancement du Robotaxi en 2027 pourrait générer</a:t>
             </a:r>
           </a:p>
         </p:txBody>
@@ -22824,7 +24046,7 @@
                 </a:solidFill>
                 <a:latin typeface="Calibri"/>
               </a:rPr>
-              <a:t>—</a:t>
+              <a:t>Superchargeurs: L'expansion du réseau Superchargeurs (+20% en</a:t>
             </a:r>
           </a:p>
         </p:txBody>
@@ -23061,7 +24283,7 @@
                           </a:solidFill>
                           <a:latin typeface="Calibri"/>
                         </a:rPr>
-                        <a:t>—</a:t>
+                        <a:t>-9,1x</a:t>
                       </a:r>
                     </a:p>
                   </a:txBody>
@@ -23132,7 +24354,7 @@
                           </a:solidFill>
                           <a:latin typeface="Calibri"/>
                         </a:rPr>
-                        <a:t>—</a:t>
+                        <a:t>-14,5x</a:t>
                       </a:r>
                     </a:p>
                   </a:txBody>
@@ -23180,7 +24402,7 @@
                           </a:solidFill>
                           <a:latin typeface="Calibri"/>
                         </a:rPr>
-                        <a:t>— $</a:t>
+                        <a:t>360 $</a:t>
                       </a:r>
                     </a:p>
                   </a:txBody>
@@ -23203,7 +24425,7 @@
                           </a:solidFill>
                           <a:latin typeface="Calibri"/>
                         </a:rPr>
-                        <a:t>Upside —</a:t>
+                        <a:t>Upside +3,9 %</a:t>
                       </a:r>
                     </a:p>
                   </a:txBody>
@@ -23490,7 +24712,7 @@
                 </a:solidFill>
                 <a:latin typeface="Calibri"/>
               </a:rPr>
-              <a:t>vs — med. pairs</a:t>
+              <a:t>vs -14,5x med. pairs</a:t>
             </a:r>
           </a:p>
         </p:txBody>
@@ -23802,7 +25024,7 @@
                 </a:solidFill>
                 <a:latin typeface="Calibri"/>
               </a:rPr>
-              <a:t>— $</a:t>
+              <a:t>360 $</a:t>
             </a:r>
           </a:p>
         </p:txBody>
@@ -23872,7 +25094,7 @@
                 </a:solidFill>
                 <a:latin typeface="Calibri"/>
               </a:rPr>
-              <a:t>Upside — vs cours</a:t>
+              <a:t>Upside +3,9 % vs cours</a:t>
             </a:r>
           </a:p>
         </p:txBody>
@@ -23993,7 +25215,7 @@
                 </a:solidFill>
                 <a:latin typeface="Calibri"/>
               </a:rPr>
-              <a:t>+0,335</a:t>
+              <a:t>+0,381</a:t>
             </a:r>
           </a:p>
         </p:txBody>
@@ -25106,7 +26328,7 @@
                 </a:solidFill>
                 <a:latin typeface="Calibri"/>
               </a:rPr>
-              <a:t>Score agrégé : +0,335</a:t>
+              <a:t>Score agrégé : +0,381</a:t>
             </a:r>
           </a:p>
         </p:txBody>
@@ -25418,7 +26640,7 @@
                 </a:solidFill>
                 <a:latin typeface="Calibri"/>
               </a:rPr>
-              <a:t>54,6 %</a:t>
+              <a:t>58,9 %</a:t>
             </a:r>
           </a:p>
         </p:txBody>
@@ -25874,7 +27096,7 @@
                           </a:solidFill>
                           <a:latin typeface="Calibri"/>
                         </a:rPr>
-                        <a:t>19</a:t>
+                        <a:t>21</a:t>
                       </a:r>
                     </a:p>
                   </a:txBody>
@@ -25897,7 +27119,7 @@
                           </a:solidFill>
                           <a:latin typeface="Calibri"/>
                         </a:rPr>
-                        <a:t>+0,546</a:t>
+                        <a:t>+0,589</a:t>
                       </a:r>
                     </a:p>
                   </a:txBody>
@@ -25920,7 +27142,7 @@
                           </a:solidFill>
                           <a:latin typeface="Calibri"/>
                         </a:rPr>
-                        <a:t>Catalyseurs, croissance, résultats</a:t>
+                        <a:t>Lancement Robotaxi en 2027 avec marge EBITDA estimée à 30% générant 20 MdUSD de revenus annuels d'ici 2029 | Horizon 2027-2029</a:t>
                       </a:r>
                     </a:p>
                   </a:txBody>
@@ -25968,7 +27190,7 @@
                           </a:solidFill>
                           <a:latin typeface="Calibri"/>
                         </a:rPr>
-                        <a:t>5</a:t>
+                        <a:t>3</a:t>
                       </a:r>
                     </a:p>
                   </a:txBody>
@@ -25991,7 +27213,7 @@
                           </a:solidFill>
                           <a:latin typeface="Calibri"/>
                         </a:rPr>
-                        <a:t>+0,243</a:t>
+                        <a:t>+0,203</a:t>
                       </a:r>
                     </a:p>
                   </a:txBody>
@@ -26085,7 +27307,7 @@
                           </a:solidFill>
                           <a:latin typeface="Calibri"/>
                         </a:rPr>
-                        <a:t>+0,211</a:t>
+                        <a:t>+0,207</a:t>
                       </a:r>
                     </a:p>
                   </a:txBody>
@@ -26108,7 +27330,7 @@
                           </a:solidFill>
                           <a:latin typeface="Calibri"/>
                         </a:rPr>
-                        <a:t>Risques macro, concurrence, dette</a:t>
+                        <a:t>Guerre des prix en Chine (-15% en 2024) pourrait s'étendre à l'Europe, comprimant les marges de 3-4 pts | Horizon 2026-2027, ampleur -10% CA</a:t>
                       </a:r>
                     </a:p>
                   </a:txBody>
@@ -26153,7 +27375,7 @@
                 </a:solidFill>
                 <a:latin typeface="Calibri"/>
               </a:rPr>
-              <a:t>La presse financière affiche un optimisme marqué pour Tesla cette semaine, portée par des partenariats stratégiques et des prévisions de livraisons record. Cependant, les tensions géopolitiques et les défis logistiques pèsent sur le sentiment global.</a:t>
+              <a:t>La presse financière affiche un optimisme marqué pour Tesla cette semaine, portée par les partenariats technologiques et les perspectives de croissance. Les analystes soulignent les opportunités liées à l'IA et aux livraisons record, malgré les risques géopolitiques et logistiques persistants.</a:t>
             </a:r>
           </a:p>
         </p:txBody>
@@ -29061,6 +30283,127 @@
           </a:graphicData>
         </a:graphic>
       </p:graphicFrame>
+      <p:sp>
+        <p:nvSpPr>
+          <p:cNvPr id="21" name="Rectangle 20"/>
+          <p:cNvSpPr/>
+          <p:nvPr/>
+        </p:nvSpPr>
+        <p:spPr>
+          <a:xfrm>
+            <a:off x="367200" y="3326400"/>
+            <a:ext cx="8413200" cy="1004400"/>
+          </a:xfrm>
+          <a:prstGeom prst="rect">
+            <a:avLst/>
+          </a:prstGeom>
+          <a:solidFill>
+            <a:srgbClr val="F5F7FA"/>
+          </a:solidFill>
+          <a:ln>
+            <a:noFill/>
+          </a:ln>
+        </p:spPr>
+        <p:style>
+          <a:lnRef idx="1">
+            <a:schemeClr val="accent1"/>
+          </a:lnRef>
+          <a:fillRef idx="3">
+            <a:schemeClr val="accent1"/>
+          </a:fillRef>
+          <a:effectRef idx="2">
+            <a:schemeClr val="accent1"/>
+          </a:effectRef>
+          <a:fontRef idx="minor">
+            <a:schemeClr val="lt1"/>
+          </a:fontRef>
+        </p:style>
+        <p:txBody>
+          <a:bodyPr rtlCol="0" anchor="ctr"/>
+          <a:lstStyle/>
+          <a:p>
+            <a:pPr algn="ctr"/>
+          </a:p>
+        </p:txBody>
+      </p:sp>
+      <p:sp>
+        <p:nvSpPr>
+          <p:cNvPr id="22" name="Rectangle 21"/>
+          <p:cNvSpPr/>
+          <p:nvPr/>
+        </p:nvSpPr>
+        <p:spPr>
+          <a:xfrm>
+            <a:off x="367200" y="3326400"/>
+            <a:ext cx="79200" cy="1004400"/>
+          </a:xfrm>
+          <a:prstGeom prst="rect">
+            <a:avLst/>
+          </a:prstGeom>
+          <a:solidFill>
+            <a:srgbClr val="2E5FA3"/>
+          </a:solidFill>
+          <a:ln>
+            <a:noFill/>
+          </a:ln>
+        </p:spPr>
+        <p:style>
+          <a:lnRef idx="1">
+            <a:schemeClr val="accent1"/>
+          </a:lnRef>
+          <a:fillRef idx="3">
+            <a:schemeClr val="accent1"/>
+          </a:fillRef>
+          <a:effectRef idx="2">
+            <a:schemeClr val="accent1"/>
+          </a:effectRef>
+          <a:fontRef idx="minor">
+            <a:schemeClr val="lt1"/>
+          </a:fontRef>
+        </p:style>
+        <p:txBody>
+          <a:bodyPr rtlCol="0" anchor="ctr"/>
+          <a:lstStyle/>
+          <a:p>
+            <a:pPr algn="ctr"/>
+          </a:p>
+        </p:txBody>
+      </p:sp>
+      <p:sp>
+        <p:nvSpPr>
+          <p:cNvPr id="23" name="TextBox 22"/>
+          <p:cNvSpPr txBox="1"/>
+          <p:nvPr/>
+        </p:nvSpPr>
+        <p:spPr>
+          <a:xfrm>
+            <a:off x="475200" y="3355200"/>
+            <a:ext cx="8298000" cy="968400"/>
+          </a:xfrm>
+          <a:prstGeom prst="rect">
+            <a:avLst/>
+          </a:prstGeom>
+          <a:noFill/>
+        </p:spPr>
+        <p:txBody>
+          <a:bodyPr wrap="square">
+            <a:spAutoFit/>
+          </a:bodyPr>
+          <a:lstStyle/>
+          <a:p>
+            <a:pPr algn="l"/>
+            <a:r>
+              <a:rPr sz="850" b="0" i="0">
+                <a:solidFill>
+                  <a:srgbClr val="555555"/>
+                </a:solidFill>
+                <a:latin typeface="Calibri"/>
+              </a:rPr>
+              <a:t>Tesla se négocie à des multiples extrêmes (EV/EBITDA 109.9x) reflétant une prime de croissance et de technologie. La décote par rapport à la médiane peers sur EV/Revenue (-30%) suggère une sous-évaluation relative.</a:t>
+            </a:r>
+          </a:p>
+        </p:txBody>
+      </p:sp>
     </p:spTree>
   </p:cSld>
   <p:clrMapOvr>
@@ -30343,6 +31686,127 @@
           </a:prstGeom>
         </p:spPr>
       </p:pic>
+      <p:sp>
+        <p:nvSpPr>
+          <p:cNvPr id="35" name="Rectangle 34"/>
+          <p:cNvSpPr/>
+          <p:nvPr/>
+        </p:nvSpPr>
+        <p:spPr>
+          <a:xfrm>
+            <a:off x="367200" y="4132800"/>
+            <a:ext cx="8413200" cy="687600"/>
+          </a:xfrm>
+          <a:prstGeom prst="rect">
+            <a:avLst/>
+          </a:prstGeom>
+          <a:solidFill>
+            <a:srgbClr val="F5F7FA"/>
+          </a:solidFill>
+          <a:ln>
+            <a:noFill/>
+          </a:ln>
+        </p:spPr>
+        <p:style>
+          <a:lnRef idx="1">
+            <a:schemeClr val="accent1"/>
+          </a:lnRef>
+          <a:fillRef idx="3">
+            <a:schemeClr val="accent1"/>
+          </a:fillRef>
+          <a:effectRef idx="2">
+            <a:schemeClr val="accent1"/>
+          </a:effectRef>
+          <a:fontRef idx="minor">
+            <a:schemeClr val="lt1"/>
+          </a:fontRef>
+        </p:style>
+        <p:txBody>
+          <a:bodyPr rtlCol="0" anchor="ctr"/>
+          <a:lstStyle/>
+          <a:p>
+            <a:pPr algn="ctr"/>
+          </a:p>
+        </p:txBody>
+      </p:sp>
+      <p:sp>
+        <p:nvSpPr>
+          <p:cNvPr id="36" name="Rectangle 35"/>
+          <p:cNvSpPr/>
+          <p:nvPr/>
+        </p:nvSpPr>
+        <p:spPr>
+          <a:xfrm>
+            <a:off x="367200" y="4132800"/>
+            <a:ext cx="79200" cy="687600"/>
+          </a:xfrm>
+          <a:prstGeom prst="rect">
+            <a:avLst/>
+          </a:prstGeom>
+          <a:solidFill>
+            <a:srgbClr val="2E5FA3"/>
+          </a:solidFill>
+          <a:ln>
+            <a:noFill/>
+          </a:ln>
+        </p:spPr>
+        <p:style>
+          <a:lnRef idx="1">
+            <a:schemeClr val="accent1"/>
+          </a:lnRef>
+          <a:fillRef idx="3">
+            <a:schemeClr val="accent1"/>
+          </a:fillRef>
+          <a:effectRef idx="2">
+            <a:schemeClr val="accent1"/>
+          </a:effectRef>
+          <a:fontRef idx="minor">
+            <a:schemeClr val="lt1"/>
+          </a:fontRef>
+        </p:style>
+        <p:txBody>
+          <a:bodyPr rtlCol="0" anchor="ctr"/>
+          <a:lstStyle/>
+          <a:p>
+            <a:pPr algn="ctr"/>
+          </a:p>
+        </p:txBody>
+      </p:sp>
+      <p:sp>
+        <p:nvSpPr>
+          <p:cNvPr id="37" name="TextBox 36"/>
+          <p:cNvSpPr txBox="1"/>
+          <p:nvPr/>
+        </p:nvSpPr>
+        <p:spPr>
+          <a:xfrm>
+            <a:off x="475200" y="4161600"/>
+            <a:ext cx="8298000" cy="651599"/>
+          </a:xfrm>
+          <a:prstGeom prst="rect">
+            <a:avLst/>
+          </a:prstGeom>
+          <a:noFill/>
+        </p:spPr>
+        <p:txBody>
+          <a:bodyPr wrap="square">
+            <a:spAutoFit/>
+          </a:bodyPr>
+          <a:lstStyle/>
+          <a:p>
+            <a:pPr algn="l"/>
+            <a:r>
+              <a:rPr sz="850" b="0" i="0">
+                <a:solidFill>
+                  <a:srgbClr val="555555"/>
+                </a:solidFill>
+                <a:latin typeface="Calibri"/>
+              </a:rPr>
+              <a:t>Tesla affiche une résilience opérationnelle malgré un ralentissement des revenus en 2025 (-3%). Les marges se contractent fortement, reflétant des pressions concurrentielles et des investissements massifs en R&amp;D et capex.</a:t>
+            </a:r>
+          </a:p>
+        </p:txBody>
+      </p:sp>
     </p:spTree>
   </p:cSld>
   <p:clrMapOvr>
@@ -31052,7 +32516,7 @@
                 </a:solidFill>
                 <a:latin typeface="Calibri"/>
               </a:rPr>
-              <a:t>Conviction : 50%</a:t>
+              <a:t>Conviction : 55%</a:t>
             </a:r>
           </a:p>
         </p:txBody>
@@ -31144,7 +32608,7 @@
         <p:spPr>
           <a:xfrm>
             <a:off x="324000" y="2196000"/>
-            <a:ext cx="1350000" cy="198000"/>
+            <a:ext cx="1485000" cy="198000"/>
           </a:xfrm>
           <a:prstGeom prst="rect">
             <a:avLst/>
@@ -31286,7 +32750,7 @@
                 </a:solidFill>
                 <a:latin typeface="Calibri"/>
               </a:rPr>
-              <a:t>Delta conviction : +0% vs Avocat du Diable</a:t>
+              <a:t>Delta conviction : +5% vs Avocat du Diable</a:t>
             </a:r>
           </a:p>
         </p:txBody>
@@ -31442,7 +32906,7 @@
                 </a:solidFill>
                 <a:latin typeface="Calibri"/>
               </a:rPr>
-              <a:t>Donnees de synthese non disponibles pour Tesla, Inc.. Relancer l'analyse pour obtenir la these complete.</a:t>
+              <a:t>Tesla bénéficie d'une avance technologique unique avec son logiciel FSD (Full Self-Driving) valorisé à 56 milliards USD en 2025</a:t>
             </a:r>
           </a:p>
         </p:txBody>
@@ -31455,7 +32919,163 @@
         </p:nvSpPr>
         <p:spPr>
           <a:xfrm>
-            <a:off x="3311999" y="2142000"/>
+            <a:off x="3311999" y="1404000"/>
+            <a:ext cx="36000" cy="288000"/>
+          </a:xfrm>
+          <a:prstGeom prst="rect">
+            <a:avLst/>
+          </a:prstGeom>
+          <a:solidFill>
+            <a:srgbClr val="B06000"/>
+          </a:solidFill>
+          <a:ln>
+            <a:noFill/>
+          </a:ln>
+        </p:spPr>
+        <p:style>
+          <a:lnRef idx="1">
+            <a:schemeClr val="accent1"/>
+          </a:lnRef>
+          <a:fillRef idx="3">
+            <a:schemeClr val="accent1"/>
+          </a:fillRef>
+          <a:effectRef idx="2">
+            <a:schemeClr val="accent1"/>
+          </a:effectRef>
+          <a:fontRef idx="minor">
+            <a:schemeClr val="lt1"/>
+          </a:fontRef>
+        </p:style>
+        <p:txBody>
+          <a:bodyPr rtlCol="0" anchor="ctr"/>
+          <a:lstStyle/>
+          <a:p>
+            <a:pPr algn="ctr"/>
+          </a:p>
+        </p:txBody>
+      </p:sp>
+      <p:sp>
+        <p:nvSpPr>
+          <p:cNvPr id="31" name="TextBox 30"/>
+          <p:cNvSpPr txBox="1"/>
+          <p:nvPr/>
+        </p:nvSpPr>
+        <p:spPr>
+          <a:xfrm>
+            <a:off x="3401999" y="1422000"/>
+            <a:ext cx="5346000" cy="270000"/>
+          </a:xfrm>
+          <a:prstGeom prst="rect">
+            <a:avLst/>
+          </a:prstGeom>
+          <a:noFill/>
+        </p:spPr>
+        <p:txBody>
+          <a:bodyPr wrap="square">
+            <a:spAutoFit/>
+          </a:bodyPr>
+          <a:lstStyle/>
+          <a:p>
+            <a:pPr algn="l"/>
+            <a:r>
+              <a:rPr sz="850" b="0" i="0">
+                <a:solidFill>
+                  <a:srgbClr val="555555"/>
+                </a:solidFill>
+                <a:latin typeface="Calibri"/>
+              </a:rPr>
+              <a:t>La marge brute devrait se stabiliser à 18% en 2026 grâce à la réduction des coûts de batterie (-15% vs 2024) et à la montée en puissance du segment</a:t>
+            </a:r>
+          </a:p>
+        </p:txBody>
+      </p:sp>
+      <p:sp>
+        <p:nvSpPr>
+          <p:cNvPr id="32" name="Rectangle 31"/>
+          <p:cNvSpPr/>
+          <p:nvPr/>
+        </p:nvSpPr>
+        <p:spPr>
+          <a:xfrm>
+            <a:off x="3311999" y="1746000"/>
+            <a:ext cx="36000" cy="288000"/>
+          </a:xfrm>
+          <a:prstGeom prst="rect">
+            <a:avLst/>
+          </a:prstGeom>
+          <a:solidFill>
+            <a:srgbClr val="B06000"/>
+          </a:solidFill>
+          <a:ln>
+            <a:noFill/>
+          </a:ln>
+        </p:spPr>
+        <p:style>
+          <a:lnRef idx="1">
+            <a:schemeClr val="accent1"/>
+          </a:lnRef>
+          <a:fillRef idx="3">
+            <a:schemeClr val="accent1"/>
+          </a:fillRef>
+          <a:effectRef idx="2">
+            <a:schemeClr val="accent1"/>
+          </a:effectRef>
+          <a:fontRef idx="minor">
+            <a:schemeClr val="lt1"/>
+          </a:fontRef>
+        </p:style>
+        <p:txBody>
+          <a:bodyPr rtlCol="0" anchor="ctr"/>
+          <a:lstStyle/>
+          <a:p>
+            <a:pPr algn="ctr"/>
+          </a:p>
+        </p:txBody>
+      </p:sp>
+      <p:sp>
+        <p:nvSpPr>
+          <p:cNvPr id="33" name="TextBox 32"/>
+          <p:cNvSpPr txBox="1"/>
+          <p:nvPr/>
+        </p:nvSpPr>
+        <p:spPr>
+          <a:xfrm>
+            <a:off x="3401999" y="1764000"/>
+            <a:ext cx="5346000" cy="270000"/>
+          </a:xfrm>
+          <a:prstGeom prst="rect">
+            <a:avLst/>
+          </a:prstGeom>
+          <a:noFill/>
+        </p:spPr>
+        <p:txBody>
+          <a:bodyPr wrap="square">
+            <a:spAutoFit/>
+          </a:bodyPr>
+          <a:lstStyle/>
+          <a:p>
+            <a:pPr algn="l"/>
+            <a:r>
+              <a:rPr sz="850" b="0" i="0">
+                <a:solidFill>
+                  <a:srgbClr val="555555"/>
+                </a:solidFill>
+                <a:latin typeface="Calibri"/>
+              </a:rPr>
+              <a:t>Le lancement du Robotaxi en 2027 pourrait générer 20 milliards USD de revenus annuels supplémentaires d'ici 2029.</a:t>
+            </a:r>
+          </a:p>
+        </p:txBody>
+      </p:sp>
+      <p:sp>
+        <p:nvSpPr>
+          <p:cNvPr id="34" name="Rectangle 33"/>
+          <p:cNvSpPr/>
+          <p:nvPr/>
+        </p:nvSpPr>
+        <p:spPr>
+          <a:xfrm>
+            <a:off x="3311999" y="2196000"/>
             <a:ext cx="2664000" cy="180000"/>
           </a:xfrm>
           <a:prstGeom prst="rect">
@@ -31492,13 +33112,13 @@
       </p:sp>
       <p:sp>
         <p:nvSpPr>
-          <p:cNvPr id="31" name="TextBox 30"/>
+          <p:cNvPr id="35" name="TextBox 34"/>
           <p:cNvSpPr txBox="1"/>
           <p:nvPr/>
         </p:nvSpPr>
         <p:spPr>
           <a:xfrm>
-            <a:off x="3366000" y="2160000"/>
+            <a:off x="3366000" y="2214000"/>
             <a:ext cx="2592000" cy="144000"/>
           </a:xfrm>
           <a:prstGeom prst="rect">
@@ -31527,13 +33147,13 @@
       </p:sp>
       <p:sp>
         <p:nvSpPr>
-          <p:cNvPr id="32" name="TextBox 31"/>
+          <p:cNvPr id="36" name="TextBox 35"/>
           <p:cNvSpPr txBox="1"/>
           <p:nvPr/>
         </p:nvSpPr>
         <p:spPr>
           <a:xfrm>
-            <a:off x="3401999" y="2358000"/>
+            <a:off x="3401999" y="2412000"/>
             <a:ext cx="2556000" cy="234000"/>
           </a:xfrm>
           <a:prstGeom prst="rect">
@@ -31555,20 +33175,55 @@
                 </a:solidFill>
                 <a:latin typeface="Calibri"/>
               </a:rPr>
-              <a:t>• N/D</a:t>
+              <a:t>• Lancement Robotaxi en 2027 avec marge EBITDA estimée à 30% générant 20 MdUSD de revenus annuels</a:t>
             </a:r>
           </a:p>
         </p:txBody>
       </p:sp>
       <p:sp>
         <p:nvSpPr>
-          <p:cNvPr id="33" name="Rectangle 32"/>
+          <p:cNvPr id="37" name="TextBox 36"/>
+          <p:cNvSpPr txBox="1"/>
+          <p:nvPr/>
+        </p:nvSpPr>
+        <p:spPr>
+          <a:xfrm>
+            <a:off x="3401999" y="2671200"/>
+            <a:ext cx="2556000" cy="234000"/>
+          </a:xfrm>
+          <a:prstGeom prst="rect">
+            <a:avLst/>
+          </a:prstGeom>
+          <a:noFill/>
+        </p:spPr>
+        <p:txBody>
+          <a:bodyPr wrap="square">
+            <a:spAutoFit/>
+          </a:bodyPr>
+          <a:lstStyle/>
+          <a:p>
+            <a:pPr algn="l"/>
+            <a:r>
+              <a:rPr sz="700" b="0" i="0">
+                <a:solidFill>
+                  <a:srgbClr val="555555"/>
+                </a:solidFill>
+                <a:latin typeface="Calibri"/>
+              </a:rPr>
+              <a:t>• Expansion du réseau Superchargeurs (+20% en 2026) avec revenus récurrents de 1.5 MdUSD/an | Horizon</a:t>
+            </a:r>
+          </a:p>
+        </p:txBody>
+      </p:sp>
+      <p:sp>
+        <p:nvSpPr>
+          <p:cNvPr id="38" name="Rectangle 37"/>
           <p:cNvSpPr/>
           <p:nvPr/>
         </p:nvSpPr>
         <p:spPr>
           <a:xfrm>
-            <a:off x="6120000" y="2142000"/>
+            <a:off x="6120000" y="2196000"/>
             <a:ext cx="2448000" cy="180000"/>
           </a:xfrm>
           <a:prstGeom prst="rect">
@@ -31605,13 +33260,13 @@
       </p:sp>
       <p:sp>
         <p:nvSpPr>
-          <p:cNvPr id="34" name="TextBox 33"/>
+          <p:cNvPr id="39" name="TextBox 38"/>
           <p:cNvSpPr txBox="1"/>
           <p:nvPr/>
         </p:nvSpPr>
         <p:spPr>
           <a:xfrm>
-            <a:off x="6156000" y="2160000"/>
+            <a:off x="6156000" y="2214000"/>
             <a:ext cx="2376000" cy="144000"/>
           </a:xfrm>
           <a:prstGeom prst="rect">
@@ -31640,13 +33295,13 @@
       </p:sp>
       <p:sp>
         <p:nvSpPr>
-          <p:cNvPr id="35" name="TextBox 34"/>
+          <p:cNvPr id="40" name="TextBox 39"/>
           <p:cNvSpPr txBox="1"/>
           <p:nvPr/>
         </p:nvSpPr>
         <p:spPr>
           <a:xfrm>
-            <a:off x="6156000" y="2358000"/>
+            <a:off x="6156000" y="2412000"/>
             <a:ext cx="2376000" cy="234000"/>
           </a:xfrm>
           <a:prstGeom prst="rect">
@@ -31668,14 +33323,170 @@
                 </a:solidFill>
                 <a:latin typeface="Calibri"/>
               </a:rPr>
-              <a:t>• N/D</a:t>
+              <a:t>• Guerre des prix en Chine (-15% en 2024) pourrait s'étendre à l'Europe, comprimant les marges de 3-4</a:t>
             </a:r>
           </a:p>
         </p:txBody>
       </p:sp>
       <p:sp>
         <p:nvSpPr>
-          <p:cNvPr id="36" name="TextBox 35"/>
+          <p:cNvPr id="41" name="TextBox 40"/>
+          <p:cNvSpPr txBox="1"/>
+          <p:nvPr/>
+        </p:nvSpPr>
+        <p:spPr>
+          <a:xfrm>
+            <a:off x="6156000" y="2671200"/>
+            <a:ext cx="2376000" cy="234000"/>
+          </a:xfrm>
+          <a:prstGeom prst="rect">
+            <a:avLst/>
+          </a:prstGeom>
+          <a:noFill/>
+        </p:spPr>
+        <p:txBody>
+          <a:bodyPr wrap="square">
+            <a:spAutoFit/>
+          </a:bodyPr>
+          <a:lstStyle/>
+          <a:p>
+            <a:pPr algn="l"/>
+            <a:r>
+              <a:rPr sz="700" b="0" i="0">
+                <a:solidFill>
+                  <a:srgbClr val="555555"/>
+                </a:solidFill>
+                <a:latin typeface="Calibri"/>
+              </a:rPr>
+              <a:t>• Régulation chinoise accrue (taxes à l'export) pourrait réduire les marges de 5 pts | Horizon 12-18</a:t>
+            </a:r>
+          </a:p>
+        </p:txBody>
+      </p:sp>
+      <p:sp>
+        <p:nvSpPr>
+          <p:cNvPr id="42" name="Rectangle 41"/>
+          <p:cNvSpPr/>
+          <p:nvPr/>
+        </p:nvSpPr>
+        <p:spPr>
+          <a:xfrm>
+            <a:off x="3311999" y="3074400"/>
+            <a:ext cx="5472000" cy="216000"/>
+          </a:xfrm>
+          <a:prstGeom prst="rect">
+            <a:avLst/>
+          </a:prstGeom>
+          <a:solidFill>
+            <a:srgbClr val="FFF3CD"/>
+          </a:solidFill>
+          <a:ln>
+            <a:noFill/>
+          </a:ln>
+        </p:spPr>
+        <p:style>
+          <a:lnRef idx="1">
+            <a:schemeClr val="accent1"/>
+          </a:lnRef>
+          <a:fillRef idx="3">
+            <a:schemeClr val="accent1"/>
+          </a:fillRef>
+          <a:effectRef idx="2">
+            <a:schemeClr val="accent1"/>
+          </a:effectRef>
+          <a:fontRef idx="minor">
+            <a:schemeClr val="lt1"/>
+          </a:fontRef>
+        </p:style>
+        <p:txBody>
+          <a:bodyPr rtlCol="0" anchor="ctr"/>
+          <a:lstStyle/>
+          <a:p>
+            <a:pPr algn="ctr"/>
+          </a:p>
+        </p:txBody>
+      </p:sp>
+      <p:sp>
+        <p:nvSpPr>
+          <p:cNvPr id="43" name="Rectangle 42"/>
+          <p:cNvSpPr/>
+          <p:nvPr/>
+        </p:nvSpPr>
+        <p:spPr>
+          <a:xfrm>
+            <a:off x="3311999" y="3074400"/>
+            <a:ext cx="36000" cy="216000"/>
+          </a:xfrm>
+          <a:prstGeom prst="rect">
+            <a:avLst/>
+          </a:prstGeom>
+          <a:solidFill>
+            <a:srgbClr val="B06000"/>
+          </a:solidFill>
+          <a:ln>
+            <a:noFill/>
+          </a:ln>
+        </p:spPr>
+        <p:style>
+          <a:lnRef idx="1">
+            <a:schemeClr val="accent1"/>
+          </a:lnRef>
+          <a:fillRef idx="3">
+            <a:schemeClr val="accent1"/>
+          </a:fillRef>
+          <a:effectRef idx="2">
+            <a:schemeClr val="accent1"/>
+          </a:effectRef>
+          <a:fontRef idx="minor">
+            <a:schemeClr val="lt1"/>
+          </a:fontRef>
+        </p:style>
+        <p:txBody>
+          <a:bodyPr rtlCol="0" anchor="ctr"/>
+          <a:lstStyle/>
+          <a:p>
+            <a:pPr algn="ctr"/>
+          </a:p>
+        </p:txBody>
+      </p:sp>
+      <p:sp>
+        <p:nvSpPr>
+          <p:cNvPr id="44" name="TextBox 43"/>
+          <p:cNvSpPr txBox="1"/>
+          <p:nvPr/>
+        </p:nvSpPr>
+        <p:spPr>
+          <a:xfrm>
+            <a:off x="3401999" y="3088800"/>
+            <a:ext cx="5346000" cy="198000"/>
+          </a:xfrm>
+          <a:prstGeom prst="rect">
+            <a:avLst/>
+          </a:prstGeom>
+          <a:noFill/>
+        </p:spPr>
+        <p:txBody>
+          <a:bodyPr wrap="square">
+            <a:spAutoFit/>
+          </a:bodyPr>
+          <a:lstStyle/>
+          <a:p>
+            <a:pPr algn="l"/>
+            <a:r>
+              <a:rPr sz="750" b="0" i="0">
+                <a:solidFill>
+                  <a:srgbClr val="7A5000"/>
+                </a:solidFill>
+                <a:latin typeface="Calibri"/>
+              </a:rPr>
+              <a:t>⚠ Conditions d’invalidation : Macro: Récession mondiale réduisant la demande de VE de 25%  ·  Sectoriel: Baisse des subventions gouvernementales pour les VE en Europe (-30%)</a:t>
+            </a:r>
+          </a:p>
+        </p:txBody>
+      </p:sp>
+      <p:sp>
+        <p:nvSpPr>
+          <p:cNvPr id="45" name="TextBox 44"/>
           <p:cNvSpPr txBox="1"/>
           <p:nvPr/>
         </p:nvSpPr>
@@ -32746,7 +34557,7 @@
                 </a:solidFill>
                 <a:latin typeface="Calibri"/>
               </a:rPr>
-              <a:t>Risques structurels &amp; thèse contraire</a:t>
+              <a:t>Concurrence accrue  ·  Régulation</a:t>
             </a:r>
           </a:p>
         </p:txBody>
@@ -33980,21 +35791,64 @@
                 </a:solidFill>
                 <a:latin typeface="Calibri"/>
               </a:rPr>
-              <a:t>Tesla, Inc. (TSLA) opere dans le secteur Consumer Cyclical. Analyse FinSight IA en cours -- donnees de synthese non disponibles pour cette session. Lancer une nouvelle analyse pour obtenir la description complete, les segments et le positionnement strategique.</a:t>
+              <a:t>Tesla, Inc. conçoit, fabrique et vend des véhicules électriques haut de gamme ainsi que des solutions de stockage d'énergie et de panneaux solaires. Positionné comme leader technologique, Tesla combine innovation logicielle (FSD), intégration verticale et économies d'échelle pour dominer le marché des VE. Ses avantages incluent un réseau Superchargeurs exclusif, une marque premium et une avance en automatisation industrielle. L'entreprise articule son activité autour de deux segments stratégiques :</a:t>
             </a:r>
           </a:p>
         </p:txBody>
       </p:sp>
       <p:sp>
         <p:nvSpPr>
-          <p:cNvPr id="20" name="TextBox 19"/>
+          <p:cNvPr id="20" name="Rectangle 19"/>
+          <p:cNvSpPr/>
+          <p:nvPr/>
+        </p:nvSpPr>
+        <p:spPr>
+          <a:xfrm>
+            <a:off x="503999" y="2599200"/>
+            <a:ext cx="64800" cy="64800"/>
+          </a:xfrm>
+          <a:prstGeom prst="rect">
+            <a:avLst/>
+          </a:prstGeom>
+          <a:solidFill>
+            <a:srgbClr val="2E5FA3"/>
+          </a:solidFill>
+          <a:ln>
+            <a:noFill/>
+          </a:ln>
+        </p:spPr>
+        <p:style>
+          <a:lnRef idx="1">
+            <a:schemeClr val="accent1"/>
+          </a:lnRef>
+          <a:fillRef idx="3">
+            <a:schemeClr val="accent1"/>
+          </a:fillRef>
+          <a:effectRef idx="2">
+            <a:schemeClr val="accent1"/>
+          </a:effectRef>
+          <a:fontRef idx="minor">
+            <a:schemeClr val="lt1"/>
+          </a:fontRef>
+        </p:style>
+        <p:txBody>
+          <a:bodyPr rtlCol="0" anchor="ctr"/>
+          <a:lstStyle/>
+          <a:p>
+            <a:pPr algn="ctr"/>
+          </a:p>
+        </p:txBody>
+      </p:sp>
+      <p:sp>
+        <p:nvSpPr>
+          <p:cNvPr id="21" name="TextBox 20"/>
           <p:cNvSpPr txBox="1"/>
           <p:nvPr/>
         </p:nvSpPr>
         <p:spPr>
           <a:xfrm>
-            <a:off x="503999" y="2358000"/>
-            <a:ext cx="4662000" cy="183600"/>
+            <a:off x="619200" y="2556000"/>
+            <a:ext cx="4338000" cy="165600"/>
           </a:xfrm>
           <a:prstGeom prst="rect">
             <a:avLst/>
@@ -34009,20 +35863,168 @@
           <a:p>
             <a:pPr algn="l"/>
             <a:r>
-              <a:rPr sz="900" b="1" i="0">
+              <a:rPr sz="850" b="1" i="0">
                 <a:solidFill>
-                  <a:srgbClr val="1B3A6B"/>
+                  <a:srgbClr val="0D0D0D"/>
                 </a:solidFill>
                 <a:latin typeface="Calibri"/>
               </a:rPr>
-              <a:t>Positionnement stratégique</a:t>
+              <a:t>Automotive</a:t>
             </a:r>
           </a:p>
         </p:txBody>
       </p:sp>
       <p:sp>
         <p:nvSpPr>
-          <p:cNvPr id="21" name="Rectangle 20"/>
+          <p:cNvPr id="22" name="TextBox 21"/>
+          <p:cNvSpPr txBox="1"/>
+          <p:nvPr/>
+        </p:nvSpPr>
+        <p:spPr>
+          <a:xfrm>
+            <a:off x="619200" y="2714400"/>
+            <a:ext cx="4338000" cy="503999"/>
+          </a:xfrm>
+          <a:prstGeom prst="rect">
+            <a:avLst/>
+          </a:prstGeom>
+          <a:noFill/>
+        </p:spPr>
+        <p:txBody>
+          <a:bodyPr wrap="square">
+            <a:spAutoFit/>
+          </a:bodyPr>
+          <a:lstStyle/>
+          <a:p>
+            <a:pPr algn="l"/>
+            <a:r>
+              <a:rPr sz="750" b="0" i="1">
+                <a:solidFill>
+                  <a:srgbClr val="555555"/>
+                </a:solidFill>
+                <a:latin typeface="Calibri"/>
+              </a:rPr>
+              <a:t>Segment phare générant 90% des revenus via ventes de véhicules électriques (Model Y, Model 3, Cybertruck) et services associés (abonnements FSD, maintenance). Cible les consommateurs premium et les flottes commerciales. Croissance tirée par l'expansion internationale (Allemagne, Texas) et la réduction des coûts via Gigafactories.</a:t>
+            </a:r>
+          </a:p>
+        </p:txBody>
+      </p:sp>
+      <p:sp>
+        <p:nvSpPr>
+          <p:cNvPr id="23" name="Rectangle 22"/>
+          <p:cNvSpPr/>
+          <p:nvPr/>
+        </p:nvSpPr>
+        <p:spPr>
+          <a:xfrm>
+            <a:off x="503999" y="3301199"/>
+            <a:ext cx="64800" cy="64800"/>
+          </a:xfrm>
+          <a:prstGeom prst="rect">
+            <a:avLst/>
+          </a:prstGeom>
+          <a:solidFill>
+            <a:srgbClr val="2E5FA3"/>
+          </a:solidFill>
+          <a:ln>
+            <a:noFill/>
+          </a:ln>
+        </p:spPr>
+        <p:style>
+          <a:lnRef idx="1">
+            <a:schemeClr val="accent1"/>
+          </a:lnRef>
+          <a:fillRef idx="3">
+            <a:schemeClr val="accent1"/>
+          </a:fillRef>
+          <a:effectRef idx="2">
+            <a:schemeClr val="accent1"/>
+          </a:effectRef>
+          <a:fontRef idx="minor">
+            <a:schemeClr val="lt1"/>
+          </a:fontRef>
+        </p:style>
+        <p:txBody>
+          <a:bodyPr rtlCol="0" anchor="ctr"/>
+          <a:lstStyle/>
+          <a:p>
+            <a:pPr algn="ctr"/>
+          </a:p>
+        </p:txBody>
+      </p:sp>
+      <p:sp>
+        <p:nvSpPr>
+          <p:cNvPr id="24" name="TextBox 23"/>
+          <p:cNvSpPr txBox="1"/>
+          <p:nvPr/>
+        </p:nvSpPr>
+        <p:spPr>
+          <a:xfrm>
+            <a:off x="619200" y="3257999"/>
+            <a:ext cx="4338000" cy="165600"/>
+          </a:xfrm>
+          <a:prstGeom prst="rect">
+            <a:avLst/>
+          </a:prstGeom>
+          <a:noFill/>
+        </p:spPr>
+        <p:txBody>
+          <a:bodyPr wrap="square">
+            <a:spAutoFit/>
+          </a:bodyPr>
+          <a:lstStyle/>
+          <a:p>
+            <a:pPr algn="l"/>
+            <a:r>
+              <a:rPr sz="850" b="1" i="0">
+                <a:solidFill>
+                  <a:srgbClr val="0D0D0D"/>
+                </a:solidFill>
+                <a:latin typeface="Calibri"/>
+              </a:rPr>
+              <a:t>Energy Generation and Storage</a:t>
+            </a:r>
+          </a:p>
+        </p:txBody>
+      </p:sp>
+      <p:sp>
+        <p:nvSpPr>
+          <p:cNvPr id="25" name="TextBox 24"/>
+          <p:cNvSpPr txBox="1"/>
+          <p:nvPr/>
+        </p:nvSpPr>
+        <p:spPr>
+          <a:xfrm>
+            <a:off x="619200" y="3416399"/>
+            <a:ext cx="4338000" cy="503999"/>
+          </a:xfrm>
+          <a:prstGeom prst="rect">
+            <a:avLst/>
+          </a:prstGeom>
+          <a:noFill/>
+        </p:spPr>
+        <p:txBody>
+          <a:bodyPr wrap="square">
+            <a:spAutoFit/>
+          </a:bodyPr>
+          <a:lstStyle/>
+          <a:p>
+            <a:pPr algn="l"/>
+            <a:r>
+              <a:rPr sz="750" b="0" i="1">
+                <a:solidFill>
+                  <a:srgbClr val="555555"/>
+                </a:solidFill>
+                <a:latin typeface="Calibri"/>
+              </a:rPr>
+              <a:t>Vend des batteries Powerwall, Megapack et des solutions solaires pour particuliers et entreprises. Modèle récurrent via contrats de maintenance et ventes de stockage. Clients sensibles aux coûts énergétiques et à la résilience des réseaux. Croissance liée à la transition énergétique et aux subventions gouvernementales.</a:t>
+            </a:r>
+          </a:p>
+        </p:txBody>
+      </p:sp>
+      <p:sp>
+        <p:nvSpPr>
+          <p:cNvPr id="26" name="Rectangle 25"/>
           <p:cNvSpPr/>
           <p:nvPr/>
         </p:nvSpPr>
@@ -34065,7 +36067,7 @@
       </p:sp>
       <p:sp>
         <p:nvSpPr>
-          <p:cNvPr id="22" name="Rectangle 21"/>
+          <p:cNvPr id="27" name="Rectangle 26"/>
           <p:cNvSpPr/>
           <p:nvPr/>
         </p:nvSpPr>
@@ -34108,7 +36110,7 @@
       </p:sp>
       <p:sp>
         <p:nvSpPr>
-          <p:cNvPr id="23" name="TextBox 22"/>
+          <p:cNvPr id="28" name="TextBox 27"/>
           <p:cNvSpPr txBox="1"/>
           <p:nvPr/>
         </p:nvSpPr>
@@ -34143,7 +36145,7 @@
       </p:sp>
       <p:sp>
         <p:nvSpPr>
-          <p:cNvPr id="24" name="TextBox 23"/>
+          <p:cNvPr id="29" name="TextBox 28"/>
           <p:cNvSpPr txBox="1"/>
           <p:nvPr/>
         </p:nvSpPr>
@@ -34178,7 +36180,7 @@
       </p:sp>
       <p:sp>
         <p:nvSpPr>
-          <p:cNvPr id="25" name="Rectangle 24"/>
+          <p:cNvPr id="30" name="Rectangle 29"/>
           <p:cNvSpPr/>
           <p:nvPr/>
         </p:nvSpPr>
@@ -34221,7 +36223,7 @@
       </p:sp>
       <p:sp>
         <p:nvSpPr>
-          <p:cNvPr id="26" name="Rectangle 25"/>
+          <p:cNvPr id="31" name="Rectangle 30"/>
           <p:cNvSpPr/>
           <p:nvPr/>
         </p:nvSpPr>
@@ -34264,7 +36266,7 @@
       </p:sp>
       <p:sp>
         <p:nvSpPr>
-          <p:cNvPr id="27" name="TextBox 26"/>
+          <p:cNvPr id="32" name="TextBox 31"/>
           <p:cNvSpPr txBox="1"/>
           <p:nvPr/>
         </p:nvSpPr>
@@ -34299,7 +36301,7 @@
       </p:sp>
       <p:sp>
         <p:nvSpPr>
-          <p:cNvPr id="28" name="TextBox 27"/>
+          <p:cNvPr id="33" name="TextBox 32"/>
           <p:cNvSpPr txBox="1"/>
           <p:nvPr/>
         </p:nvSpPr>
@@ -34334,7 +36336,7 @@
       </p:sp>
       <p:sp>
         <p:nvSpPr>
-          <p:cNvPr id="29" name="Rectangle 28"/>
+          <p:cNvPr id="34" name="Rectangle 33"/>
           <p:cNvSpPr/>
           <p:nvPr/>
         </p:nvSpPr>
@@ -34377,7 +36379,7 @@
       </p:sp>
       <p:sp>
         <p:nvSpPr>
-          <p:cNvPr id="30" name="Rectangle 29"/>
+          <p:cNvPr id="35" name="Rectangle 34"/>
           <p:cNvSpPr/>
           <p:nvPr/>
         </p:nvSpPr>
@@ -34420,7 +36422,7 @@
       </p:sp>
       <p:sp>
         <p:nvSpPr>
-          <p:cNvPr id="31" name="TextBox 30"/>
+          <p:cNvPr id="36" name="TextBox 35"/>
           <p:cNvSpPr txBox="1"/>
           <p:nvPr/>
         </p:nvSpPr>
@@ -34455,7 +36457,7 @@
       </p:sp>
       <p:sp>
         <p:nvSpPr>
-          <p:cNvPr id="32" name="TextBox 31"/>
+          <p:cNvPr id="37" name="TextBox 36"/>
           <p:cNvSpPr txBox="1"/>
           <p:nvPr/>
         </p:nvSpPr>
@@ -34490,7 +36492,7 @@
       </p:sp>
       <p:sp>
         <p:nvSpPr>
-          <p:cNvPr id="33" name="Rectangle 32"/>
+          <p:cNvPr id="38" name="Rectangle 37"/>
           <p:cNvSpPr/>
           <p:nvPr/>
         </p:nvSpPr>
@@ -34533,7 +36535,7 @@
       </p:sp>
       <p:sp>
         <p:nvSpPr>
-          <p:cNvPr id="34" name="Rectangle 33"/>
+          <p:cNvPr id="39" name="Rectangle 38"/>
           <p:cNvSpPr/>
           <p:nvPr/>
         </p:nvSpPr>
@@ -34576,7 +36578,7 @@
       </p:sp>
       <p:sp>
         <p:nvSpPr>
-          <p:cNvPr id="35" name="TextBox 34"/>
+          <p:cNvPr id="40" name="TextBox 39"/>
           <p:cNvSpPr txBox="1"/>
           <p:nvPr/>
         </p:nvSpPr>
@@ -34611,7 +36613,7 @@
       </p:sp>
       <p:sp>
         <p:nvSpPr>
-          <p:cNvPr id="36" name="TextBox 35"/>
+          <p:cNvPr id="41" name="TextBox 40"/>
           <p:cNvSpPr txBox="1"/>
           <p:nvPr/>
         </p:nvSpPr>
@@ -34646,7 +36648,7 @@
       </p:sp>
       <p:sp>
         <p:nvSpPr>
-          <p:cNvPr id="37" name="TextBox 36"/>
+          <p:cNvPr id="42" name="TextBox 41"/>
           <p:cNvSpPr txBox="1"/>
           <p:nvPr/>
         </p:nvSpPr>
@@ -35287,7 +37289,7 @@
         <p:spPr>
           <a:xfrm>
             <a:off x="367200" y="961200"/>
-            <a:ext cx="2731199" cy="3520800"/>
+            <a:ext cx="4150800" cy="3520800"/>
           </a:xfrm>
           <a:prstGeom prst="rect">
             <a:avLst/>
@@ -35330,7 +37332,7 @@
         <p:spPr>
           <a:xfrm>
             <a:off x="367200" y="961200"/>
-            <a:ext cx="2731199" cy="54000"/>
+            <a:ext cx="4150800" cy="54000"/>
           </a:xfrm>
           <a:prstGeom prst="rect">
             <a:avLst/>
@@ -35373,7 +37375,7 @@
         <p:spPr>
           <a:xfrm>
             <a:off x="457200" y="1141200"/>
-            <a:ext cx="2551199" cy="640800"/>
+            <a:ext cx="3970800" cy="640800"/>
           </a:xfrm>
           <a:prstGeom prst="rect">
             <a:avLst/>
@@ -35394,7 +37396,7 @@
                 </a:solidFill>
                 <a:latin typeface="Calibri"/>
               </a:rPr>
-              <a:t>—</a:t>
+              <a:t>90%</a:t>
             </a:r>
           </a:p>
         </p:txBody>
@@ -35408,7 +37410,7 @@
         <p:spPr>
           <a:xfrm>
             <a:off x="457200" y="1785600"/>
-            <a:ext cx="2551199" cy="108000"/>
+            <a:ext cx="3970800" cy="108000"/>
           </a:xfrm>
           <a:prstGeom prst="rect">
             <a:avLst/>
@@ -35443,7 +37445,7 @@
         <p:spPr>
           <a:xfrm>
             <a:off x="457200" y="1965600"/>
-            <a:ext cx="2551199" cy="18000"/>
+            <a:ext cx="3970800" cy="18000"/>
           </a:xfrm>
           <a:prstGeom prst="rect">
             <a:avLst/>
@@ -35486,7 +37488,7 @@
         <p:spPr>
           <a:xfrm>
             <a:off x="457200" y="2059200"/>
-            <a:ext cx="2551199" cy="255600"/>
+            <a:ext cx="3970800" cy="255600"/>
           </a:xfrm>
           <a:prstGeom prst="rect">
             <a:avLst/>
@@ -35507,7 +37509,7 @@
                 </a:solidFill>
                 <a:latin typeface="Calibri"/>
               </a:rPr>
-              <a:t>Core Business</a:t>
+              <a:t>Automotive</a:t>
             </a:r>
           </a:p>
         </p:txBody>
@@ -35521,7 +37523,7 @@
         <p:spPr>
           <a:xfrm>
             <a:off x="457200" y="2332800"/>
-            <a:ext cx="2551199" cy="2041199"/>
+            <a:ext cx="3970800" cy="2041199"/>
           </a:xfrm>
           <a:prstGeom prst="rect">
             <a:avLst/>
@@ -35542,7 +37544,7 @@
                 </a:solidFill>
                 <a:latin typeface="Calibri"/>
               </a:rPr>
-              <a:t>—</a:t>
+              <a:t>Segment phare générant 90% des revenus via ventes de véhicules électriques (Model Y, Model 3, Cybertruck) et services associés (abonnements FSD, maintenance). Cible les consommateurs premium et les flottes commerciales. Croissance tirée par l'expansion internationale (Allemagne, Texas) et la réduction des coûts via Gigafactories.</a:t>
             </a:r>
           </a:p>
         </p:txBody>
@@ -35555,8 +37557,8 @@
         </p:nvSpPr>
         <p:spPr>
           <a:xfrm>
-            <a:off x="3206400" y="961200"/>
-            <a:ext cx="2731199" cy="3520800"/>
+            <a:off x="4626000" y="961200"/>
+            <a:ext cx="4150800" cy="3520800"/>
           </a:xfrm>
           <a:prstGeom prst="rect">
             <a:avLst/>
@@ -35598,8 +37600,8 @@
         </p:nvSpPr>
         <p:spPr>
           <a:xfrm>
-            <a:off x="3206400" y="961200"/>
-            <a:ext cx="2731199" cy="54000"/>
+            <a:off x="4626000" y="961200"/>
+            <a:ext cx="4150800" cy="54000"/>
           </a:xfrm>
           <a:prstGeom prst="rect">
             <a:avLst/>
@@ -35641,8 +37643,8 @@
         </p:nvSpPr>
         <p:spPr>
           <a:xfrm>
-            <a:off x="3296400" y="1141200"/>
-            <a:ext cx="2551199" cy="640800"/>
+            <a:off x="4716000" y="1141200"/>
+            <a:ext cx="3970800" cy="640800"/>
           </a:xfrm>
           <a:prstGeom prst="rect">
             <a:avLst/>
@@ -35663,7 +37665,7 @@
                 </a:solidFill>
                 <a:latin typeface="Calibri"/>
               </a:rPr>
-              <a:t>—</a:t>
+              <a:t>10%</a:t>
             </a:r>
           </a:p>
         </p:txBody>
@@ -35676,8 +37678,8 @@
         </p:nvSpPr>
         <p:spPr>
           <a:xfrm>
-            <a:off x="3296400" y="1785600"/>
-            <a:ext cx="2551199" cy="108000"/>
+            <a:off x="4716000" y="1785600"/>
+            <a:ext cx="3970800" cy="108000"/>
           </a:xfrm>
           <a:prstGeom prst="rect">
             <a:avLst/>
@@ -35711,8 +37713,8 @@
         </p:nvSpPr>
         <p:spPr>
           <a:xfrm>
-            <a:off x="3296400" y="1965600"/>
-            <a:ext cx="2551199" cy="18000"/>
+            <a:off x="4716000" y="1965600"/>
+            <a:ext cx="3970800" cy="18000"/>
           </a:xfrm>
           <a:prstGeom prst="rect">
             <a:avLst/>
@@ -35754,8 +37756,8 @@
         </p:nvSpPr>
         <p:spPr>
           <a:xfrm>
-            <a:off x="3296400" y="2059200"/>
-            <a:ext cx="2551199" cy="255600"/>
+            <a:off x="4716000" y="2059200"/>
+            <a:ext cx="3970800" cy="255600"/>
           </a:xfrm>
           <a:prstGeom prst="rect">
             <a:avLst/>
@@ -35776,7 +37778,7 @@
                 </a:solidFill>
                 <a:latin typeface="Calibri"/>
               </a:rPr>
-              <a:t>Growth Driver</a:t>
+              <a:t>Energy Generation and Storage</a:t>
             </a:r>
           </a:p>
         </p:txBody>
@@ -35789,8 +37791,8 @@
         </p:nvSpPr>
         <p:spPr>
           <a:xfrm>
-            <a:off x="3296400" y="2332800"/>
-            <a:ext cx="2551199" cy="2041199"/>
+            <a:off x="4716000" y="2332800"/>
+            <a:ext cx="3970800" cy="2041199"/>
           </a:xfrm>
           <a:prstGeom prst="rect">
             <a:avLst/>
@@ -35811,276 +37813,7 @@
                 </a:solidFill>
                 <a:latin typeface="Calibri"/>
               </a:rPr>
-              <a:t>—</a:t>
-            </a:r>
-          </a:p>
-        </p:txBody>
-      </p:sp>
-      <p:sp>
-        <p:nvSpPr>
-          <p:cNvPr id="31" name="Rectangle 30"/>
-          <p:cNvSpPr/>
-          <p:nvPr/>
-        </p:nvSpPr>
-        <p:spPr>
-          <a:xfrm>
-            <a:off x="6045600" y="961200"/>
-            <a:ext cx="2731199" cy="3520800"/>
-          </a:xfrm>
-          <a:prstGeom prst="rect">
-            <a:avLst/>
-          </a:prstGeom>
-          <a:solidFill>
-            <a:srgbClr val="F7F8FA"/>
-          </a:solidFill>
-          <a:ln>
-            <a:noFill/>
-          </a:ln>
-        </p:spPr>
-        <p:style>
-          <a:lnRef idx="1">
-            <a:schemeClr val="accent1"/>
-          </a:lnRef>
-          <a:fillRef idx="3">
-            <a:schemeClr val="accent1"/>
-          </a:fillRef>
-          <a:effectRef idx="2">
-            <a:schemeClr val="accent1"/>
-          </a:effectRef>
-          <a:fontRef idx="minor">
-            <a:schemeClr val="lt1"/>
-          </a:fontRef>
-        </p:style>
-        <p:txBody>
-          <a:bodyPr rtlCol="0" anchor="ctr"/>
-          <a:lstStyle/>
-          <a:p>
-            <a:pPr algn="ctr"/>
-          </a:p>
-        </p:txBody>
-      </p:sp>
-      <p:sp>
-        <p:nvSpPr>
-          <p:cNvPr id="32" name="Rectangle 31"/>
-          <p:cNvSpPr/>
-          <p:nvPr/>
-        </p:nvSpPr>
-        <p:spPr>
-          <a:xfrm>
-            <a:off x="6045600" y="961200"/>
-            <a:ext cx="2731199" cy="54000"/>
-          </a:xfrm>
-          <a:prstGeom prst="rect">
-            <a:avLst/>
-          </a:prstGeom>
-          <a:solidFill>
-            <a:srgbClr val="888888"/>
-          </a:solidFill>
-          <a:ln>
-            <a:noFill/>
-          </a:ln>
-        </p:spPr>
-        <p:style>
-          <a:lnRef idx="1">
-            <a:schemeClr val="accent1"/>
-          </a:lnRef>
-          <a:fillRef idx="3">
-            <a:schemeClr val="accent1"/>
-          </a:fillRef>
-          <a:effectRef idx="2">
-            <a:schemeClr val="accent1"/>
-          </a:effectRef>
-          <a:fontRef idx="minor">
-            <a:schemeClr val="lt1"/>
-          </a:fontRef>
-        </p:style>
-        <p:txBody>
-          <a:bodyPr rtlCol="0" anchor="ctr"/>
-          <a:lstStyle/>
-          <a:p>
-            <a:pPr algn="ctr"/>
-          </a:p>
-        </p:txBody>
-      </p:sp>
-      <p:sp>
-        <p:nvSpPr>
-          <p:cNvPr id="33" name="TextBox 32"/>
-          <p:cNvSpPr txBox="1"/>
-          <p:nvPr/>
-        </p:nvSpPr>
-        <p:spPr>
-          <a:xfrm>
-            <a:off x="6135600" y="1141200"/>
-            <a:ext cx="2551199" cy="640800"/>
-          </a:xfrm>
-          <a:prstGeom prst="rect">
-            <a:avLst/>
-          </a:prstGeom>
-          <a:noFill/>
-        </p:spPr>
-        <p:txBody>
-          <a:bodyPr wrap="square">
-            <a:spAutoFit/>
-          </a:bodyPr>
-          <a:lstStyle/>
-          <a:p>
-            <a:pPr algn="l"/>
-            <a:r>
-              <a:rPr sz="2200" b="1" i="0">
-                <a:solidFill>
-                  <a:srgbClr val="888888"/>
-                </a:solidFill>
-                <a:latin typeface="Calibri"/>
-              </a:rPr>
-              <a:t>—</a:t>
-            </a:r>
-          </a:p>
-        </p:txBody>
-      </p:sp>
-      <p:sp>
-        <p:nvSpPr>
-          <p:cNvPr id="34" name="TextBox 33"/>
-          <p:cNvSpPr txBox="1"/>
-          <p:nvPr/>
-        </p:nvSpPr>
-        <p:spPr>
-          <a:xfrm>
-            <a:off x="6135600" y="1785600"/>
-            <a:ext cx="2551199" cy="108000"/>
-          </a:xfrm>
-          <a:prstGeom prst="rect">
-            <a:avLst/>
-          </a:prstGeom>
-          <a:noFill/>
-        </p:spPr>
-        <p:txBody>
-          <a:bodyPr wrap="square">
-            <a:spAutoFit/>
-          </a:bodyPr>
-          <a:lstStyle/>
-          <a:p>
-            <a:pPr algn="l"/>
-            <a:r>
-              <a:rPr sz="900" b="0" i="0">
-                <a:solidFill>
-                  <a:srgbClr val="555555"/>
-                </a:solidFill>
-                <a:latin typeface="Calibri"/>
-              </a:rPr>
-              <a:t>du CA</a:t>
-            </a:r>
-          </a:p>
-        </p:txBody>
-      </p:sp>
-      <p:sp>
-        <p:nvSpPr>
-          <p:cNvPr id="35" name="Rectangle 34"/>
-          <p:cNvSpPr/>
-          <p:nvPr/>
-        </p:nvSpPr>
-        <p:spPr>
-          <a:xfrm>
-            <a:off x="6135600" y="1965600"/>
-            <a:ext cx="2551199" cy="18000"/>
-          </a:xfrm>
-          <a:prstGeom prst="rect">
-            <a:avLst/>
-          </a:prstGeom>
-          <a:solidFill>
-            <a:srgbClr val="888888"/>
-          </a:solidFill>
-          <a:ln>
-            <a:noFill/>
-          </a:ln>
-        </p:spPr>
-        <p:style>
-          <a:lnRef idx="1">
-            <a:schemeClr val="accent1"/>
-          </a:lnRef>
-          <a:fillRef idx="3">
-            <a:schemeClr val="accent1"/>
-          </a:fillRef>
-          <a:effectRef idx="2">
-            <a:schemeClr val="accent1"/>
-          </a:effectRef>
-          <a:fontRef idx="minor">
-            <a:schemeClr val="lt1"/>
-          </a:fontRef>
-        </p:style>
-        <p:txBody>
-          <a:bodyPr rtlCol="0" anchor="ctr"/>
-          <a:lstStyle/>
-          <a:p>
-            <a:pPr algn="ctr"/>
-          </a:p>
-        </p:txBody>
-      </p:sp>
-      <p:sp>
-        <p:nvSpPr>
-          <p:cNvPr id="36" name="TextBox 35"/>
-          <p:cNvSpPr txBox="1"/>
-          <p:nvPr/>
-        </p:nvSpPr>
-        <p:spPr>
-          <a:xfrm>
-            <a:off x="6135600" y="2059200"/>
-            <a:ext cx="2551199" cy="255600"/>
-          </a:xfrm>
-          <a:prstGeom prst="rect">
-            <a:avLst/>
-          </a:prstGeom>
-          <a:noFill/>
-        </p:spPr>
-        <p:txBody>
-          <a:bodyPr wrap="square">
-            <a:spAutoFit/>
-          </a:bodyPr>
-          <a:lstStyle/>
-          <a:p>
-            <a:pPr algn="l"/>
-            <a:r>
-              <a:rPr sz="1000" b="1" i="0">
-                <a:solidFill>
-                  <a:srgbClr val="1B3A6B"/>
-                </a:solidFill>
-                <a:latin typeface="Calibri"/>
-              </a:rPr>
-              <a:t>International</a:t>
-            </a:r>
-          </a:p>
-        </p:txBody>
-      </p:sp>
-      <p:sp>
-        <p:nvSpPr>
-          <p:cNvPr id="37" name="TextBox 36"/>
-          <p:cNvSpPr txBox="1"/>
-          <p:nvPr/>
-        </p:nvSpPr>
-        <p:spPr>
-          <a:xfrm>
-            <a:off x="6135600" y="2332800"/>
-            <a:ext cx="2551199" cy="2041199"/>
-          </a:xfrm>
-          <a:prstGeom prst="rect">
-            <a:avLst/>
-          </a:prstGeom>
-          <a:noFill/>
-        </p:spPr>
-        <p:txBody>
-          <a:bodyPr wrap="square">
-            <a:spAutoFit/>
-          </a:bodyPr>
-          <a:lstStyle/>
-          <a:p>
-            <a:pPr algn="l"/>
-            <a:r>
-              <a:rPr sz="800" b="0" i="0">
-                <a:solidFill>
-                  <a:srgbClr val="555555"/>
-                </a:solidFill>
-                <a:latin typeface="Calibri"/>
-              </a:rPr>
-              <a:t>—</a:t>
+              <a:t>Vend des batteries Powerwall, Megapack et des solutions solaires pour particuliers et entreprises. Modèle récurrent via contrats de maintenance et ventes de stockage. Clients sensibles aux coûts énergétiques et à la résilience des réseaux. Croissance liée à la transition énergétique et aux subventions gouvernementales.</a:t>
             </a:r>
           </a:p>
         </p:txBody>
@@ -36932,7 +38665,7 @@
                 </a:solidFill>
                 <a:latin typeface="Calibri"/>
               </a:rPr>
-              <a:t>USD millions  ·  2022–2025</a:t>
+              <a:t>USD millions  ·  2022–2027F</a:t>
             </a:r>
           </a:p>
         </p:txBody>
@@ -36947,7 +38680,7 @@
         </p:nvGraphicFramePr>
         <p:xfrm>
           <a:off x="367200" y="914400"/>
-          <a:ext cx="8413200" cy="1980000"/>
+          <a:ext cx="8413196" cy="1980000"/>
         </p:xfrm>
         <a:graphic>
           <a:graphicData uri="http://schemas.openxmlformats.org/drawingml/2006/table">
@@ -36957,9 +38690,11 @@
               </a:tblPr>
               <a:tblGrid>
                 <a:gridCol w="2355696"/>
-                <a:gridCol w="2019168"/>
-                <a:gridCol w="2019168"/>
-                <a:gridCol w="2019168"/>
+                <a:gridCol w="1211500"/>
+                <a:gridCol w="1211500"/>
+                <a:gridCol w="1211500"/>
+                <a:gridCol w="1211500"/>
+                <a:gridCol w="1211500"/>
               </a:tblGrid>
               <a:tr h="220000">
                 <a:tc>
@@ -37054,6 +38789,52 @@
                     </a:solidFill>
                   </a:tcPr>
                 </a:tc>
+                <a:tc>
+                  <a:txBody>
+                    <a:bodyPr/>
+                    <a:lstStyle/>
+                    <a:p>
+                      <a:pPr algn="ctr"/>
+                      <a:r>
+                        <a:rPr sz="800" b="1" i="0">
+                          <a:solidFill>
+                            <a:srgbClr val="FFFFFF"/>
+                          </a:solidFill>
+                          <a:latin typeface="Calibri"/>
+                        </a:rPr>
+                        <a:t>2026F</a:t>
+                      </a:r>
+                    </a:p>
+                  </a:txBody>
+                  <a:tcPr>
+                    <a:solidFill>
+                      <a:srgbClr val="1B3A6B"/>
+                    </a:solidFill>
+                  </a:tcPr>
+                </a:tc>
+                <a:tc>
+                  <a:txBody>
+                    <a:bodyPr/>
+                    <a:lstStyle/>
+                    <a:p>
+                      <a:pPr algn="ctr"/>
+                      <a:r>
+                        <a:rPr sz="800" b="1" i="0">
+                          <a:solidFill>
+                            <a:srgbClr val="FFFFFF"/>
+                          </a:solidFill>
+                          <a:latin typeface="Calibri"/>
+                        </a:rPr>
+                        <a:t>2027F</a:t>
+                      </a:r>
+                    </a:p>
+                  </a:txBody>
+                  <a:tcPr>
+                    <a:solidFill>
+                      <a:srgbClr val="1B3A6B"/>
+                    </a:solidFill>
+                  </a:tcPr>
+                </a:tc>
               </a:tr>
               <a:tr h="220000">
                 <a:tc>
@@ -37148,6 +38929,52 @@
                     </a:solidFill>
                   </a:tcPr>
                 </a:tc>
+                <a:tc>
+                  <a:txBody>
+                    <a:bodyPr/>
+                    <a:lstStyle/>
+                    <a:p>
+                      <a:pPr algn="ctr"/>
+                      <a:r>
+                        <a:rPr sz="800" b="1" i="0">
+                          <a:solidFill>
+                            <a:srgbClr val="0D0D0D"/>
+                          </a:solidFill>
+                          <a:latin typeface="Calibri"/>
+                        </a:rPr>
+                        <a:t>102,0</a:t>
+                      </a:r>
+                    </a:p>
+                  </a:txBody>
+                  <a:tcPr>
+                    <a:solidFill>
+                      <a:srgbClr val="FFFFFF"/>
+                    </a:solidFill>
+                  </a:tcPr>
+                </a:tc>
+                <a:tc>
+                  <a:txBody>
+                    <a:bodyPr/>
+                    <a:lstStyle/>
+                    <a:p>
+                      <a:pPr algn="ctr"/>
+                      <a:r>
+                        <a:rPr sz="800" b="1" i="0">
+                          <a:solidFill>
+                            <a:srgbClr val="0D0D0D"/>
+                          </a:solidFill>
+                          <a:latin typeface="Calibri"/>
+                        </a:rPr>
+                        <a:t>120,0</a:t>
+                      </a:r>
+                    </a:p>
+                  </a:txBody>
+                  <a:tcPr>
+                    <a:solidFill>
+                      <a:srgbClr val="FFFFFF"/>
+                    </a:solidFill>
+                  </a:tcPr>
+                </a:tc>
               </a:tr>
               <a:tr h="220000">
                 <a:tc>
@@ -37242,6 +39069,52 @@
                     </a:solidFill>
                   </a:tcPr>
                 </a:tc>
+                <a:tc>
+                  <a:txBody>
+                    <a:bodyPr/>
+                    <a:lstStyle/>
+                    <a:p>
+                      <a:pPr algn="ctr"/>
+                      <a:r>
+                        <a:rPr sz="750" b="0" i="1">
+                          <a:solidFill>
+                            <a:srgbClr val="555555"/>
+                          </a:solidFill>
+                          <a:latin typeface="Calibri"/>
+                        </a:rPr>
+                        <a:t>+780,0 %</a:t>
+                      </a:r>
+                    </a:p>
+                  </a:txBody>
+                  <a:tcPr>
+                    <a:solidFill>
+                      <a:srgbClr val="F7F8FA"/>
+                    </a:solidFill>
+                  </a:tcPr>
+                </a:tc>
+                <a:tc>
+                  <a:txBody>
+                    <a:bodyPr/>
+                    <a:lstStyle/>
+                    <a:p>
+                      <a:pPr algn="ctr"/>
+                      <a:r>
+                        <a:rPr sz="750" b="0" i="1">
+                          <a:solidFill>
+                            <a:srgbClr val="555555"/>
+                          </a:solidFill>
+                          <a:latin typeface="Calibri"/>
+                        </a:rPr>
+                        <a:t>+1760,0 %</a:t>
+                      </a:r>
+                    </a:p>
+                  </a:txBody>
+                  <a:tcPr>
+                    <a:solidFill>
+                      <a:srgbClr val="F7F8FA"/>
+                    </a:solidFill>
+                  </a:tcPr>
+                </a:tc>
               </a:tr>
               <a:tr h="220000">
                 <a:tc>
@@ -37336,6 +39209,52 @@
                     </a:solidFill>
                   </a:tcPr>
                 </a:tc>
+                <a:tc>
+                  <a:txBody>
+                    <a:bodyPr/>
+                    <a:lstStyle/>
+                    <a:p>
+                      <a:pPr algn="ctr"/>
+                      <a:r>
+                        <a:rPr sz="800" b="1" i="0">
+                          <a:solidFill>
+                            <a:srgbClr val="0D0D0D"/>
+                          </a:solidFill>
+                          <a:latin typeface="Calibri"/>
+                        </a:rPr>
+                        <a:t>1 938,0</a:t>
+                      </a:r>
+                    </a:p>
+                  </a:txBody>
+                  <a:tcPr>
+                    <a:solidFill>
+                      <a:srgbClr val="FFFFFF"/>
+                    </a:solidFill>
+                  </a:tcPr>
+                </a:tc>
+                <a:tc>
+                  <a:txBody>
+                    <a:bodyPr/>
+                    <a:lstStyle/>
+                    <a:p>
+                      <a:pPr algn="ctr"/>
+                      <a:r>
+                        <a:rPr sz="800" b="1" i="0">
+                          <a:solidFill>
+                            <a:srgbClr val="0D0D0D"/>
+                          </a:solidFill>
+                          <a:latin typeface="Calibri"/>
+                        </a:rPr>
+                        <a:t>2 520,0</a:t>
+                      </a:r>
+                    </a:p>
+                  </a:txBody>
+                  <a:tcPr>
+                    <a:solidFill>
+                      <a:srgbClr val="FFFFFF"/>
+                    </a:solidFill>
+                  </a:tcPr>
+                </a:tc>
               </a:tr>
               <a:tr h="220000">
                 <a:tc>
@@ -37430,6 +39349,52 @@
                     </a:solidFill>
                   </a:tcPr>
                 </a:tc>
+                <a:tc>
+                  <a:txBody>
+                    <a:bodyPr/>
+                    <a:lstStyle/>
+                    <a:p>
+                      <a:pPr algn="ctr"/>
+                      <a:r>
+                        <a:rPr sz="750" b="0" i="1">
+                          <a:solidFill>
+                            <a:srgbClr val="555555"/>
+                          </a:solidFill>
+                          <a:latin typeface="Calibri"/>
+                        </a:rPr>
+                        <a:t>1900,0 %</a:t>
+                      </a:r>
+                    </a:p>
+                  </a:txBody>
+                  <a:tcPr>
+                    <a:solidFill>
+                      <a:srgbClr val="F7F8FA"/>
+                    </a:solidFill>
+                  </a:tcPr>
+                </a:tc>
+                <a:tc>
+                  <a:txBody>
+                    <a:bodyPr/>
+                    <a:lstStyle/>
+                    <a:p>
+                      <a:pPr algn="ctr"/>
+                      <a:r>
+                        <a:rPr sz="750" b="0" i="1">
+                          <a:solidFill>
+                            <a:srgbClr val="555555"/>
+                          </a:solidFill>
+                          <a:latin typeface="Calibri"/>
+                        </a:rPr>
+                        <a:t>2100,0 %</a:t>
+                      </a:r>
+                    </a:p>
+                  </a:txBody>
+                  <a:tcPr>
+                    <a:solidFill>
+                      <a:srgbClr val="F7F8FA"/>
+                    </a:solidFill>
+                  </a:tcPr>
+                </a:tc>
               </a:tr>
               <a:tr h="220000">
                 <a:tc>
@@ -37524,6 +39489,52 @@
                     </a:solidFill>
                   </a:tcPr>
                 </a:tc>
+                <a:tc>
+                  <a:txBody>
+                    <a:bodyPr/>
+                    <a:lstStyle/>
+                    <a:p>
+                      <a:pPr algn="ctr"/>
+                      <a:r>
+                        <a:rPr sz="800" b="1" i="0">
+                          <a:solidFill>
+                            <a:srgbClr val="0D0D0D"/>
+                          </a:solidFill>
+                          <a:latin typeface="Calibri"/>
+                        </a:rPr>
+                        <a:t>15,3</a:t>
+                      </a:r>
+                    </a:p>
+                  </a:txBody>
+                  <a:tcPr>
+                    <a:solidFill>
+                      <a:srgbClr val="FFFFFF"/>
+                    </a:solidFill>
+                  </a:tcPr>
+                </a:tc>
+                <a:tc>
+                  <a:txBody>
+                    <a:bodyPr/>
+                    <a:lstStyle/>
+                    <a:p>
+                      <a:pPr algn="ctr"/>
+                      <a:r>
+                        <a:rPr sz="800" b="1" i="0">
+                          <a:solidFill>
+                            <a:srgbClr val="0D0D0D"/>
+                          </a:solidFill>
+                          <a:latin typeface="Calibri"/>
+                        </a:rPr>
+                        <a:t>22,8</a:t>
+                      </a:r>
+                    </a:p>
+                  </a:txBody>
+                  <a:tcPr>
+                    <a:solidFill>
+                      <a:srgbClr val="FFFFFF"/>
+                    </a:solidFill>
+                  </a:tcPr>
+                </a:tc>
               </a:tr>
               <a:tr h="220000">
                 <a:tc>
@@ -37618,6 +39629,52 @@
                     </a:solidFill>
                   </a:tcPr>
                 </a:tc>
+                <a:tc>
+                  <a:txBody>
+                    <a:bodyPr/>
+                    <a:lstStyle/>
+                    <a:p>
+                      <a:pPr algn="ctr"/>
+                      <a:r>
+                        <a:rPr sz="750" b="0" i="1">
+                          <a:solidFill>
+                            <a:srgbClr val="555555"/>
+                          </a:solidFill>
+                          <a:latin typeface="Calibri"/>
+                        </a:rPr>
+                        <a:t>1500,0 %</a:t>
+                      </a:r>
+                    </a:p>
+                  </a:txBody>
+                  <a:tcPr>
+                    <a:solidFill>
+                      <a:srgbClr val="F7F8FA"/>
+                    </a:solidFill>
+                  </a:tcPr>
+                </a:tc>
+                <a:tc>
+                  <a:txBody>
+                    <a:bodyPr/>
+                    <a:lstStyle/>
+                    <a:p>
+                      <a:pPr algn="ctr"/>
+                      <a:r>
+                        <a:rPr sz="750" b="0" i="1">
+                          <a:solidFill>
+                            <a:srgbClr val="555555"/>
+                          </a:solidFill>
+                          <a:latin typeface="Calibri"/>
+                        </a:rPr>
+                        <a:t>1900,0 %</a:t>
+                      </a:r>
+                    </a:p>
+                  </a:txBody>
+                  <a:tcPr>
+                    <a:solidFill>
+                      <a:srgbClr val="F7F8FA"/>
+                    </a:solidFill>
+                  </a:tcPr>
+                </a:tc>
               </a:tr>
               <a:tr h="220000">
                 <a:tc>
@@ -37712,6 +39769,52 @@
                     </a:solidFill>
                   </a:tcPr>
                 </a:tc>
+                <a:tc>
+                  <a:txBody>
+                    <a:bodyPr/>
+                    <a:lstStyle/>
+                    <a:p>
+                      <a:pPr algn="ctr"/>
+                      <a:r>
+                        <a:rPr sz="800" b="1" i="0">
+                          <a:solidFill>
+                            <a:srgbClr val="0D0D0D"/>
+                          </a:solidFill>
+                          <a:latin typeface="Calibri"/>
+                        </a:rPr>
+                        <a:t>6,1</a:t>
+                      </a:r>
+                    </a:p>
+                  </a:txBody>
+                  <a:tcPr>
+                    <a:solidFill>
+                      <a:srgbClr val="FFFFFF"/>
+                    </a:solidFill>
+                  </a:tcPr>
+                </a:tc>
+                <a:tc>
+                  <a:txBody>
+                    <a:bodyPr/>
+                    <a:lstStyle/>
+                    <a:p>
+                      <a:pPr algn="ctr"/>
+                      <a:r>
+                        <a:rPr sz="800" b="1" i="0">
+                          <a:solidFill>
+                            <a:srgbClr val="0D0D0D"/>
+                          </a:solidFill>
+                          <a:latin typeface="Calibri"/>
+                        </a:rPr>
+                        <a:t>12,0</a:t>
+                      </a:r>
+                    </a:p>
+                  </a:txBody>
+                  <a:tcPr>
+                    <a:solidFill>
+                      <a:srgbClr val="FFFFFF"/>
+                    </a:solidFill>
+                  </a:tcPr>
+                </a:tc>
               </a:tr>
               <a:tr h="220000">
                 <a:tc>
@@ -37803,6 +39906,52 @@
                   <a:tcPr>
                     <a:solidFill>
                       <a:srgbClr val="DDE8F5"/>
+                    </a:solidFill>
+                  </a:tcPr>
+                </a:tc>
+                <a:tc>
+                  <a:txBody>
+                    <a:bodyPr/>
+                    <a:lstStyle/>
+                    <a:p>
+                      <a:pPr algn="ctr"/>
+                      <a:r>
+                        <a:rPr sz="750" b="0" i="1">
+                          <a:solidFill>
+                            <a:srgbClr val="555555"/>
+                          </a:solidFill>
+                          <a:latin typeface="Calibri"/>
+                        </a:rPr>
+                        <a:t>600,0 %</a:t>
+                      </a:r>
+                    </a:p>
+                  </a:txBody>
+                  <a:tcPr>
+                    <a:solidFill>
+                      <a:srgbClr val="F7F8FA"/>
+                    </a:solidFill>
+                  </a:tcPr>
+                </a:tc>
+                <a:tc>
+                  <a:txBody>
+                    <a:bodyPr/>
+                    <a:lstStyle/>
+                    <a:p>
+                      <a:pPr algn="ctr"/>
+                      <a:r>
+                        <a:rPr sz="750" b="0" i="1">
+                          <a:solidFill>
+                            <a:srgbClr val="555555"/>
+                          </a:solidFill>
+                          <a:latin typeface="Calibri"/>
+                        </a:rPr>
+                        <a:t>1000,0 %</a:t>
+                      </a:r>
+                    </a:p>
+                  </a:txBody>
+                  <a:tcPr>
+                    <a:solidFill>
+                      <a:srgbClr val="F7F8FA"/>
                     </a:solidFill>
                   </a:tcPr>
                 </a:tc>
@@ -37811,6 +39960,127 @@
           </a:graphicData>
         </a:graphic>
       </p:graphicFrame>
+      <p:sp>
+        <p:nvSpPr>
+          <p:cNvPr id="18" name="Rectangle 17"/>
+          <p:cNvSpPr/>
+          <p:nvPr/>
+        </p:nvSpPr>
+        <p:spPr>
+          <a:xfrm>
+            <a:off x="367200" y="3218400"/>
+            <a:ext cx="8413200" cy="1224000"/>
+          </a:xfrm>
+          <a:prstGeom prst="rect">
+            <a:avLst/>
+          </a:prstGeom>
+          <a:solidFill>
+            <a:srgbClr val="F5F7FA"/>
+          </a:solidFill>
+          <a:ln>
+            <a:noFill/>
+          </a:ln>
+        </p:spPr>
+        <p:style>
+          <a:lnRef idx="1">
+            <a:schemeClr val="accent1"/>
+          </a:lnRef>
+          <a:fillRef idx="3">
+            <a:schemeClr val="accent1"/>
+          </a:fillRef>
+          <a:effectRef idx="2">
+            <a:schemeClr val="accent1"/>
+          </a:effectRef>
+          <a:fontRef idx="minor">
+            <a:schemeClr val="lt1"/>
+          </a:fontRef>
+        </p:style>
+        <p:txBody>
+          <a:bodyPr rtlCol="0" anchor="ctr"/>
+          <a:lstStyle/>
+          <a:p>
+            <a:pPr algn="ctr"/>
+          </a:p>
+        </p:txBody>
+      </p:sp>
+      <p:sp>
+        <p:nvSpPr>
+          <p:cNvPr id="19" name="Rectangle 18"/>
+          <p:cNvSpPr/>
+          <p:nvPr/>
+        </p:nvSpPr>
+        <p:spPr>
+          <a:xfrm>
+            <a:off x="367200" y="3218400"/>
+            <a:ext cx="79200" cy="1224000"/>
+          </a:xfrm>
+          <a:prstGeom prst="rect">
+            <a:avLst/>
+          </a:prstGeom>
+          <a:solidFill>
+            <a:srgbClr val="2E5FA3"/>
+          </a:solidFill>
+          <a:ln>
+            <a:noFill/>
+          </a:ln>
+        </p:spPr>
+        <p:style>
+          <a:lnRef idx="1">
+            <a:schemeClr val="accent1"/>
+          </a:lnRef>
+          <a:fillRef idx="3">
+            <a:schemeClr val="accent1"/>
+          </a:fillRef>
+          <a:effectRef idx="2">
+            <a:schemeClr val="accent1"/>
+          </a:effectRef>
+          <a:fontRef idx="minor">
+            <a:schemeClr val="lt1"/>
+          </a:fontRef>
+        </p:style>
+        <p:txBody>
+          <a:bodyPr rtlCol="0" anchor="ctr"/>
+          <a:lstStyle/>
+          <a:p>
+            <a:pPr algn="ctr"/>
+          </a:p>
+        </p:txBody>
+      </p:sp>
+      <p:sp>
+        <p:nvSpPr>
+          <p:cNvPr id="20" name="TextBox 19"/>
+          <p:cNvSpPr txBox="1"/>
+          <p:nvPr/>
+        </p:nvSpPr>
+        <p:spPr>
+          <a:xfrm>
+            <a:off x="475200" y="3247200"/>
+            <a:ext cx="8298000" cy="1188000"/>
+          </a:xfrm>
+          <a:prstGeom prst="rect">
+            <a:avLst/>
+          </a:prstGeom>
+          <a:noFill/>
+        </p:spPr>
+        <p:txBody>
+          <a:bodyPr wrap="square">
+            <a:spAutoFit/>
+          </a:bodyPr>
+          <a:lstStyle/>
+          <a:p>
+            <a:pPr algn="l"/>
+            <a:r>
+              <a:rPr sz="850" b="0" i="0">
+                <a:solidFill>
+                  <a:srgbClr val="555555"/>
+                </a:solidFill>
+                <a:latin typeface="Calibri"/>
+              </a:rPr>
+              <a:t>Le CA 2025 atteint 94,8 MdUSD (-3% YoY), impacté par une baisse des livraisons en Chine (-10% vs 2024). La marge nette chute à 4% en 2025 (vs 15.5% en 2023) en raison de la pression sur les prix (+12% de baisses en 2024) et des coûts fixes élevés (R&amp;D 5.2 MdUSD, capex 8.5 MdUSD). Le ND/EBITDA négatif (-0.7x) indique une trésorerie nette de 25 MdUSD, soutenant les rachats d'actions (5 MdUSD prévus en 2026).</a:t>
+            </a:r>
+          </a:p>
+        </p:txBody>
+      </p:sp>
     </p:spTree>
   </p:cSld>
   <p:clrMapOvr>
@@ -39693,6 +41963,127 @@
           </a:graphicData>
         </a:graphic>
       </p:graphicFrame>
+      <p:sp>
+        <p:nvSpPr>
+          <p:cNvPr id="31" name="Rectangle 30"/>
+          <p:cNvSpPr/>
+          <p:nvPr/>
+        </p:nvSpPr>
+        <p:spPr>
+          <a:xfrm>
+            <a:off x="367200" y="4068000"/>
+            <a:ext cx="8413200" cy="468000"/>
+          </a:xfrm>
+          <a:prstGeom prst="rect">
+            <a:avLst/>
+          </a:prstGeom>
+          <a:solidFill>
+            <a:srgbClr val="F5F7FA"/>
+          </a:solidFill>
+          <a:ln>
+            <a:noFill/>
+          </a:ln>
+        </p:spPr>
+        <p:style>
+          <a:lnRef idx="1">
+            <a:schemeClr val="accent1"/>
+          </a:lnRef>
+          <a:fillRef idx="3">
+            <a:schemeClr val="accent1"/>
+          </a:fillRef>
+          <a:effectRef idx="2">
+            <a:schemeClr val="accent1"/>
+          </a:effectRef>
+          <a:fontRef idx="minor">
+            <a:schemeClr val="lt1"/>
+          </a:fontRef>
+        </p:style>
+        <p:txBody>
+          <a:bodyPr rtlCol="0" anchor="ctr"/>
+          <a:lstStyle/>
+          <a:p>
+            <a:pPr algn="ctr"/>
+          </a:p>
+        </p:txBody>
+      </p:sp>
+      <p:sp>
+        <p:nvSpPr>
+          <p:cNvPr id="32" name="Rectangle 31"/>
+          <p:cNvSpPr/>
+          <p:nvPr/>
+        </p:nvSpPr>
+        <p:spPr>
+          <a:xfrm>
+            <a:off x="367200" y="4068000"/>
+            <a:ext cx="79200" cy="468000"/>
+          </a:xfrm>
+          <a:prstGeom prst="rect">
+            <a:avLst/>
+          </a:prstGeom>
+          <a:solidFill>
+            <a:srgbClr val="2E5FA3"/>
+          </a:solidFill>
+          <a:ln>
+            <a:noFill/>
+          </a:ln>
+        </p:spPr>
+        <p:style>
+          <a:lnRef idx="1">
+            <a:schemeClr val="accent1"/>
+          </a:lnRef>
+          <a:fillRef idx="3">
+            <a:schemeClr val="accent1"/>
+          </a:fillRef>
+          <a:effectRef idx="2">
+            <a:schemeClr val="accent1"/>
+          </a:effectRef>
+          <a:fontRef idx="minor">
+            <a:schemeClr val="lt1"/>
+          </a:fontRef>
+        </p:style>
+        <p:txBody>
+          <a:bodyPr rtlCol="0" anchor="ctr"/>
+          <a:lstStyle/>
+          <a:p>
+            <a:pPr algn="ctr"/>
+          </a:p>
+        </p:txBody>
+      </p:sp>
+      <p:sp>
+        <p:nvSpPr>
+          <p:cNvPr id="33" name="TextBox 32"/>
+          <p:cNvSpPr txBox="1"/>
+          <p:nvPr/>
+        </p:nvSpPr>
+        <p:spPr>
+          <a:xfrm>
+            <a:off x="475200" y="4096800"/>
+            <a:ext cx="8298000" cy="432000"/>
+          </a:xfrm>
+          <a:prstGeom prst="rect">
+            <a:avLst/>
+          </a:prstGeom>
+          <a:noFill/>
+        </p:spPr>
+        <p:txBody>
+          <a:bodyPr wrap="square">
+            <a:spAutoFit/>
+          </a:bodyPr>
+          <a:lstStyle/>
+          <a:p>
+            <a:pPr algn="l"/>
+            <a:r>
+              <a:rPr sz="850" b="0" i="0">
+                <a:solidFill>
+                  <a:srgbClr val="555555"/>
+                </a:solidFill>
+                <a:latin typeface="Calibri"/>
+              </a:rPr>
+              <a:t>Le CA 2025 atteint 94,8 MdUSD (-3% YoY), impacté par une baisse des livraisons en Chine (-10% vs 2024). La marge nette chute à 4% en 2025 (vs 15.5% en 2023) en raison de la pression sur les prix (+12% de baisses en 2024) et des coûts fixes élevés (R&amp;D 5.2 MdUSD, capex 8.5 MdUSD). Le ND/EBITDA négatif (-0.7x) indique une trésorerie nette de 25 MdUSD, soutenant les rachats d'actions (5 MdUSD prévus en 2026).</a:t>
+            </a:r>
+          </a:p>
+        </p:txBody>
+      </p:sp>
     </p:spTree>
   </p:cSld>
   <p:clrMapOvr>

--- a/preview/TSLA/TSLA_pitchbook.pptx
+++ b/preview/TSLA/TSLA_pitchbook.pptx
@@ -3410,7 +3410,7 @@
                 </a:solidFill>
                 <a:latin typeface="Calibri"/>
               </a:rPr>
-              <a:t>● HOLD  ·  Prix cible base : 380 $  ·  Upside : +10,7 %</a:t>
+              <a:t>● HOLD  ·  Prix cible base : — $  ·  Upside : —</a:t>
             </a:r>
           </a:p>
         </p:txBody>
@@ -6069,127 +6069,6 @@
           </a:graphicData>
         </a:graphic>
       </p:graphicFrame>
-      <p:sp>
-        <p:nvSpPr>
-          <p:cNvPr id="18" name="Rectangle 17"/>
-          <p:cNvSpPr/>
-          <p:nvPr/>
-        </p:nvSpPr>
-        <p:spPr>
-          <a:xfrm>
-            <a:off x="367200" y="3628800"/>
-            <a:ext cx="8413200" cy="824400"/>
-          </a:xfrm>
-          <a:prstGeom prst="rect">
-            <a:avLst/>
-          </a:prstGeom>
-          <a:solidFill>
-            <a:srgbClr val="F5F7FA"/>
-          </a:solidFill>
-          <a:ln>
-            <a:noFill/>
-          </a:ln>
-        </p:spPr>
-        <p:style>
-          <a:lnRef idx="1">
-            <a:schemeClr val="accent1"/>
-          </a:lnRef>
-          <a:fillRef idx="3">
-            <a:schemeClr val="accent1"/>
-          </a:fillRef>
-          <a:effectRef idx="2">
-            <a:schemeClr val="accent1"/>
-          </a:effectRef>
-          <a:fontRef idx="minor">
-            <a:schemeClr val="lt1"/>
-          </a:fontRef>
-        </p:style>
-        <p:txBody>
-          <a:bodyPr rtlCol="0" anchor="ctr"/>
-          <a:lstStyle/>
-          <a:p>
-            <a:pPr algn="ctr"/>
-          </a:p>
-        </p:txBody>
-      </p:sp>
-      <p:sp>
-        <p:nvSpPr>
-          <p:cNvPr id="19" name="Rectangle 18"/>
-          <p:cNvSpPr/>
-          <p:nvPr/>
-        </p:nvSpPr>
-        <p:spPr>
-          <a:xfrm>
-            <a:off x="367200" y="3628800"/>
-            <a:ext cx="79200" cy="824400"/>
-          </a:xfrm>
-          <a:prstGeom prst="rect">
-            <a:avLst/>
-          </a:prstGeom>
-          <a:solidFill>
-            <a:srgbClr val="2E5FA3"/>
-          </a:solidFill>
-          <a:ln>
-            <a:noFill/>
-          </a:ln>
-        </p:spPr>
-        <p:style>
-          <a:lnRef idx="1">
-            <a:schemeClr val="accent1"/>
-          </a:lnRef>
-          <a:fillRef idx="3">
-            <a:schemeClr val="accent1"/>
-          </a:fillRef>
-          <a:effectRef idx="2">
-            <a:schemeClr val="accent1"/>
-          </a:effectRef>
-          <a:fontRef idx="minor">
-            <a:schemeClr val="lt1"/>
-          </a:fontRef>
-        </p:style>
-        <p:txBody>
-          <a:bodyPr rtlCol="0" anchor="ctr"/>
-          <a:lstStyle/>
-          <a:p>
-            <a:pPr algn="ctr"/>
-          </a:p>
-        </p:txBody>
-      </p:sp>
-      <p:sp>
-        <p:nvSpPr>
-          <p:cNvPr id="20" name="TextBox 19"/>
-          <p:cNvSpPr txBox="1"/>
-          <p:nvPr/>
-        </p:nvSpPr>
-        <p:spPr>
-          <a:xfrm>
-            <a:off x="475200" y="3657600"/>
-            <a:ext cx="8298000" cy="788400"/>
-          </a:xfrm>
-          <a:prstGeom prst="rect">
-            <a:avLst/>
-          </a:prstGeom>
-          <a:noFill/>
-        </p:spPr>
-        <p:txBody>
-          <a:bodyPr wrap="square">
-            <a:spAutoFit/>
-          </a:bodyPr>
-          <a:lstStyle/>
-          <a:p>
-            <a:pPr algn="l"/>
-            <a:r>
-              <a:rPr sz="850" b="0" i="0">
-                <a:solidFill>
-                  <a:srgbClr val="555555"/>
-                </a:solidFill>
-                <a:latin typeface="Calibri"/>
-              </a:rPr>
-              <a:t>Les marges ont chuté de 25.6% (GM 2022) à 18.0% (2025) et de 21.7% (EBITDA 2022) à 12.4% (2025), principalement à cause de la guerre des prix sur les VE et de l'inflation des coûts. La résilience des marges nettes (15.5% en 2023 vs 4.0% en 2025) masque une dégradation structurelle. Le pricing power semble affaibli, avec un risque de mean-reversion si la concurrence s'intensifie.</a:t>
-            </a:r>
-          </a:p>
-        </p:txBody>
-      </p:sp>
     </p:spTree>
   </p:cSld>
   <p:clrMapOvr>
@@ -7350,7 +7229,7 @@
                           </a:solidFill>
                           <a:latin typeface="Calibri"/>
                         </a:rPr>
-                        <a:t>380 $</a:t>
+                        <a:t>—</a:t>
                       </a:r>
                     </a:p>
                   </a:txBody>
@@ -7526,7 +7405,7 @@
                           </a:solidFill>
                           <a:latin typeface="Calibri"/>
                         </a:rPr>
-                        <a:t>+10,7 %</a:t>
+                        <a:t>—</a:t>
                       </a:r>
                     </a:p>
                   </a:txBody>
@@ -7669,7 +7548,7 @@
                           </a:solidFill>
                           <a:latin typeface="Calibri"/>
                         </a:rPr>
-                        <a:t>290 $</a:t>
+                        <a:t>—</a:t>
                       </a:r>
                     </a:p>
                   </a:txBody>
@@ -7692,7 +7571,7 @@
                           </a:solidFill>
                           <a:latin typeface="Calibri"/>
                         </a:rPr>
-                        <a:t>380 $</a:t>
+                        <a:t>—</a:t>
                       </a:r>
                     </a:p>
                   </a:txBody>
@@ -7715,7 +7594,7 @@
                           </a:solidFill>
                           <a:latin typeface="Calibri"/>
                         </a:rPr>
-                        <a:t>450 $</a:t>
+                        <a:t>—</a:t>
                       </a:r>
                     </a:p>
                   </a:txBody>
@@ -7740,7 +7619,7 @@
                           </a:solidFill>
                           <a:latin typeface="Calibri"/>
                         </a:rPr>
-                        <a:t>-15,5 %</a:t>
+                        <a:t>—</a:t>
                       </a:r>
                     </a:p>
                   </a:txBody>
@@ -7763,7 +7642,7 @@
                           </a:solidFill>
                           <a:latin typeface="Calibri"/>
                         </a:rPr>
-                        <a:t>+10,7 %</a:t>
+                        <a:t>—</a:t>
                       </a:r>
                     </a:p>
                   </a:txBody>
@@ -7786,7 +7665,7 @@
                           </a:solidFill>
                           <a:latin typeface="Calibri"/>
                         </a:rPr>
-                        <a:t>+31,1 %</a:t>
+                        <a:t>—</a:t>
                       </a:r>
                     </a:p>
                   </a:txBody>
@@ -9098,7 +8977,7 @@
                           </a:solidFill>
                           <a:latin typeface="Calibri"/>
                         </a:rPr>
-                        <a:t>414</a:t>
+                        <a:t>—</a:t>
                       </a:r>
                     </a:p>
                   </a:txBody>
@@ -9141,7 +9020,7 @@
                           </a:solidFill>
                           <a:latin typeface="Calibri"/>
                         </a:rPr>
-                        <a:t>433</a:t>
+                        <a:t>—</a:t>
                       </a:r>
                     </a:p>
                   </a:txBody>
@@ -9184,7 +9063,7 @@
                           </a:solidFill>
                           <a:latin typeface="Calibri"/>
                         </a:rPr>
-                        <a:t>454</a:t>
+                        <a:t>—</a:t>
                       </a:r>
                     </a:p>
                   </a:txBody>
@@ -9227,7 +9106,7 @@
                           </a:solidFill>
                           <a:latin typeface="Calibri"/>
                         </a:rPr>
-                        <a:t>477</a:t>
+                        <a:t>—</a:t>
                       </a:r>
                     </a:p>
                   </a:txBody>
@@ -9270,7 +9149,7 @@
                           </a:solidFill>
                           <a:latin typeface="Calibri"/>
                         </a:rPr>
-                        <a:t>503</a:t>
+                        <a:t>—</a:t>
                       </a:r>
                     </a:p>
                   </a:txBody>
@@ -9358,7 +9237,7 @@
                           </a:solidFill>
                           <a:latin typeface="Calibri"/>
                         </a:rPr>
-                        <a:t>380</a:t>
+                        <a:t>—</a:t>
                       </a:r>
                     </a:p>
                   </a:txBody>
@@ -9401,7 +9280,7 @@
                           </a:solidFill>
                           <a:latin typeface="Calibri"/>
                         </a:rPr>
-                        <a:t>396</a:t>
+                        <a:t>—</a:t>
                       </a:r>
                     </a:p>
                   </a:txBody>
@@ -9444,7 +9323,7 @@
                           </a:solidFill>
                           <a:latin typeface="Calibri"/>
                         </a:rPr>
-                        <a:t>414</a:t>
+                        <a:t>—</a:t>
                       </a:r>
                     </a:p>
                   </a:txBody>
@@ -9487,7 +9366,7 @@
                           </a:solidFill>
                           <a:latin typeface="Calibri"/>
                         </a:rPr>
-                        <a:t>433</a:t>
+                        <a:t>—</a:t>
                       </a:r>
                     </a:p>
                   </a:txBody>
@@ -9530,7 +9409,7 @@
                           </a:solidFill>
                           <a:latin typeface="Calibri"/>
                         </a:rPr>
-                        <a:t>454</a:t>
+                        <a:t>—</a:t>
                       </a:r>
                     </a:p>
                   </a:txBody>
@@ -9618,7 +9497,7 @@
                           </a:solidFill>
                           <a:latin typeface="Calibri"/>
                         </a:rPr>
-                        <a:t>351</a:t>
+                        <a:t>—</a:t>
                       </a:r>
                     </a:p>
                   </a:txBody>
@@ -9661,7 +9540,7 @@
                           </a:solidFill>
                           <a:latin typeface="Calibri"/>
                         </a:rPr>
-                        <a:t>365</a:t>
+                        <a:t>—</a:t>
                       </a:r>
                     </a:p>
                   </a:txBody>
@@ -9704,7 +9583,7 @@
                           </a:solidFill>
                           <a:latin typeface="Calibri"/>
                         </a:rPr>
-                        <a:t>380</a:t>
+                        <a:t>—</a:t>
                       </a:r>
                     </a:p>
                   </a:txBody>
@@ -9747,7 +9626,7 @@
                           </a:solidFill>
                           <a:latin typeface="Calibri"/>
                         </a:rPr>
-                        <a:t>396</a:t>
+                        <a:t>—</a:t>
                       </a:r>
                     </a:p>
                   </a:txBody>
@@ -9790,7 +9669,7 @@
                           </a:solidFill>
                           <a:latin typeface="Calibri"/>
                         </a:rPr>
-                        <a:t>414</a:t>
+                        <a:t>—</a:t>
                       </a:r>
                     </a:p>
                   </a:txBody>
@@ -9878,7 +9757,7 @@
                           </a:solidFill>
                           <a:latin typeface="Calibri"/>
                         </a:rPr>
-                        <a:t>327</a:t>
+                        <a:t>—</a:t>
                       </a:r>
                     </a:p>
                   </a:txBody>
@@ -9921,7 +9800,7 @@
                           </a:solidFill>
                           <a:latin typeface="Calibri"/>
                         </a:rPr>
-                        <a:t>339</a:t>
+                        <a:t>—</a:t>
                       </a:r>
                     </a:p>
                   </a:txBody>
@@ -9964,7 +9843,7 @@
                           </a:solidFill>
                           <a:latin typeface="Calibri"/>
                         </a:rPr>
-                        <a:t>351</a:t>
+                        <a:t>—</a:t>
                       </a:r>
                     </a:p>
                   </a:txBody>
@@ -10007,7 +9886,7 @@
                           </a:solidFill>
                           <a:latin typeface="Calibri"/>
                         </a:rPr>
-                        <a:t>365</a:t>
+                        <a:t>—</a:t>
                       </a:r>
                     </a:p>
                   </a:txBody>
@@ -10050,7 +9929,7 @@
                           </a:solidFill>
                           <a:latin typeface="Calibri"/>
                         </a:rPr>
-                        <a:t>380</a:t>
+                        <a:t>—</a:t>
                       </a:r>
                     </a:p>
                   </a:txBody>
@@ -10138,7 +10017,7 @@
                           </a:solidFill>
                           <a:latin typeface="Calibri"/>
                         </a:rPr>
-                        <a:t>305</a:t>
+                        <a:t>—</a:t>
                       </a:r>
                     </a:p>
                   </a:txBody>
@@ -10181,7 +10060,7 @@
                           </a:solidFill>
                           <a:latin typeface="Calibri"/>
                         </a:rPr>
-                        <a:t>316</a:t>
+                        <a:t>—</a:t>
                       </a:r>
                     </a:p>
                   </a:txBody>
@@ -10224,7 +10103,7 @@
                           </a:solidFill>
                           <a:latin typeface="Calibri"/>
                         </a:rPr>
-                        <a:t>327</a:t>
+                        <a:t>—</a:t>
                       </a:r>
                     </a:p>
                   </a:txBody>
@@ -10267,7 +10146,7 @@
                           </a:solidFill>
                           <a:latin typeface="Calibri"/>
                         </a:rPr>
-                        <a:t>339</a:t>
+                        <a:t>—</a:t>
                       </a:r>
                     </a:p>
                   </a:txBody>
@@ -10310,7 +10189,7 @@
                           </a:solidFill>
                           <a:latin typeface="Calibri"/>
                         </a:rPr>
-                        <a:t>351</a:t>
+                        <a:t>—</a:t>
                       </a:r>
                     </a:p>
                   </a:txBody>
@@ -10345,127 +10224,6 @@
           </a:graphicData>
         </a:graphic>
       </p:graphicFrame>
-      <p:sp>
-        <p:nvSpPr>
-          <p:cNvPr id="22" name="Rectangle 21"/>
-          <p:cNvSpPr/>
-          <p:nvPr/>
-        </p:nvSpPr>
-        <p:spPr>
-          <a:xfrm>
-            <a:off x="367200" y="3916800"/>
-            <a:ext cx="8413200" cy="547200"/>
-          </a:xfrm>
-          <a:prstGeom prst="rect">
-            <a:avLst/>
-          </a:prstGeom>
-          <a:solidFill>
-            <a:srgbClr val="F5F7FA"/>
-          </a:solidFill>
-          <a:ln>
-            <a:noFill/>
-          </a:ln>
-        </p:spPr>
-        <p:style>
-          <a:lnRef idx="1">
-            <a:schemeClr val="accent1"/>
-          </a:lnRef>
-          <a:fillRef idx="3">
-            <a:schemeClr val="accent1"/>
-          </a:fillRef>
-          <a:effectRef idx="2">
-            <a:schemeClr val="accent1"/>
-          </a:effectRef>
-          <a:fontRef idx="minor">
-            <a:schemeClr val="lt1"/>
-          </a:fontRef>
-        </p:style>
-        <p:txBody>
-          <a:bodyPr rtlCol="0" anchor="ctr"/>
-          <a:lstStyle/>
-          <a:p>
-            <a:pPr algn="ctr"/>
-          </a:p>
-        </p:txBody>
-      </p:sp>
-      <p:sp>
-        <p:nvSpPr>
-          <p:cNvPr id="23" name="Rectangle 22"/>
-          <p:cNvSpPr/>
-          <p:nvPr/>
-        </p:nvSpPr>
-        <p:spPr>
-          <a:xfrm>
-            <a:off x="367200" y="3916800"/>
-            <a:ext cx="79200" cy="547200"/>
-          </a:xfrm>
-          <a:prstGeom prst="rect">
-            <a:avLst/>
-          </a:prstGeom>
-          <a:solidFill>
-            <a:srgbClr val="2E5FA3"/>
-          </a:solidFill>
-          <a:ln>
-            <a:noFill/>
-          </a:ln>
-        </p:spPr>
-        <p:style>
-          <a:lnRef idx="1">
-            <a:schemeClr val="accent1"/>
-          </a:lnRef>
-          <a:fillRef idx="3">
-            <a:schemeClr val="accent1"/>
-          </a:fillRef>
-          <a:effectRef idx="2">
-            <a:schemeClr val="accent1"/>
-          </a:effectRef>
-          <a:fontRef idx="minor">
-            <a:schemeClr val="lt1"/>
-          </a:fontRef>
-        </p:style>
-        <p:txBody>
-          <a:bodyPr rtlCol="0" anchor="ctr"/>
-          <a:lstStyle/>
-          <a:p>
-            <a:pPr algn="ctr"/>
-          </a:p>
-        </p:txBody>
-      </p:sp>
-      <p:sp>
-        <p:nvSpPr>
-          <p:cNvPr id="24" name="TextBox 23"/>
-          <p:cNvSpPr txBox="1"/>
-          <p:nvPr/>
-        </p:nvSpPr>
-        <p:spPr>
-          <a:xfrm>
-            <a:off x="475200" y="3945600"/>
-            <a:ext cx="8298000" cy="511200"/>
-          </a:xfrm>
-          <a:prstGeom prst="rect">
-            <a:avLst/>
-          </a:prstGeom>
-          <a:noFill/>
-        </p:spPr>
-        <p:txBody>
-          <a:bodyPr wrap="square">
-            <a:spAutoFit/>
-          </a:bodyPr>
-          <a:lstStyle/>
-          <a:p>
-            <a:pPr algn="l"/>
-            <a:r>
-              <a:rPr sz="850" b="0" i="0">
-                <a:solidFill>
-                  <a:srgbClr val="555555"/>
-                </a:solidFill>
-                <a:latin typeface="Calibri"/>
-              </a:rPr>
-              <a:t>Avec un WACC de 14.8% et un TGR de 2.5%, le prix implicite DCF se situe entre 290 USD (bear) et 450 USD (bull), contre un cours de 343.25 USD. La prime actuelle suggère que le marché anticipe déjà une partie de la croissance future, limitant l'upside sans exécution parfaite sur les robotaxis et l'IA.</a:t>
-            </a:r>
-          </a:p>
-        </p:txBody>
-      </p:sp>
     </p:spTree>
   </p:cSld>
   <p:clrMapOvr>
@@ -11075,7 +10833,7 @@
         </p:nvGraphicFramePr>
         <p:xfrm>
           <a:off x="367200" y="914400"/>
-          <a:ext cx="8413200" cy="2015999"/>
+          <a:ext cx="8413200" cy="871200"/>
         </p:xfrm>
         <a:graphic>
           <a:graphicData uri="http://schemas.openxmlformats.org/drawingml/2006/table">
@@ -11093,7 +10851,7 @@
                 <a:gridCol w="1093716"/>
                 <a:gridCol w="1009584"/>
               </a:tblGrid>
-              <a:tr h="251999">
+              <a:tr h="290400">
                 <a:tc>
                   <a:txBody>
                     <a:bodyPr/>
@@ -11279,7 +11037,7 @@
                   </a:tcPr>
                 </a:tc>
               </a:tr>
-              <a:tr h="251999">
+              <a:tr h="290400">
                 <a:tc>
                   <a:txBody>
                     <a:bodyPr/>
@@ -11465,937 +11223,7 @@
                   </a:tcPr>
                 </a:tc>
               </a:tr>
-              <a:tr h="251999">
-                <a:tc>
-                  <a:txBody>
-                    <a:bodyPr/>
-                    <a:lstStyle/>
-                    <a:p>
-                      <a:pPr algn="l"/>
-                      <a:r>
-                        <a:rPr sz="800" b="0" i="0">
-                          <a:solidFill>
-                            <a:srgbClr val="0D0D0D"/>
-                          </a:solidFill>
-                          <a:latin typeface="Calibri"/>
-                        </a:rPr>
-                        <a:t>BYD Company</a:t>
-                      </a:r>
-                    </a:p>
-                  </a:txBody>
-                  <a:tcPr>
-                    <a:solidFill>
-                      <a:srgbClr val="FFFFFF"/>
-                    </a:solidFill>
-                  </a:tcPr>
-                </a:tc>
-                <a:tc>
-                  <a:txBody>
-                    <a:bodyPr/>
-                    <a:lstStyle/>
-                    <a:p>
-                      <a:pPr algn="ctr"/>
-                      <a:r>
-                        <a:rPr sz="750" b="0" i="0">
-                          <a:solidFill>
-                            <a:srgbClr val="555555"/>
-                          </a:solidFill>
-                          <a:latin typeface="Calibri"/>
-                        </a:rPr>
-                        <a:t>BYD.US</a:t>
-                      </a:r>
-                    </a:p>
-                  </a:txBody>
-                  <a:tcPr>
-                    <a:solidFill>
-                      <a:srgbClr val="FFFFFF"/>
-                    </a:solidFill>
-                  </a:tcPr>
-                </a:tc>
-                <a:tc>
-                  <a:txBody>
-                    <a:bodyPr/>
-                    <a:lstStyle/>
-                    <a:p>
-                      <a:pPr algn="ctr"/>
-                      <a:r>
-                        <a:rPr sz="800" b="0" i="0">
-                          <a:solidFill>
-                            <a:srgbClr val="0D0D0D"/>
-                          </a:solidFill>
-                          <a:latin typeface="Calibri"/>
-                        </a:rPr>
-                        <a:t>85,0</a:t>
-                      </a:r>
-                    </a:p>
-                  </a:txBody>
-                  <a:tcPr>
-                    <a:solidFill>
-                      <a:srgbClr val="FFFFFF"/>
-                    </a:solidFill>
-                  </a:tcPr>
-                </a:tc>
-                <a:tc>
-                  <a:txBody>
-                    <a:bodyPr/>
-                    <a:lstStyle/>
-                    <a:p>
-                      <a:pPr algn="ctr"/>
-                      <a:r>
-                        <a:rPr sz="800" b="0" i="0">
-                          <a:solidFill>
-                            <a:srgbClr val="0D0D0D"/>
-                          </a:solidFill>
-                          <a:latin typeface="Calibri"/>
-                        </a:rPr>
-                        <a:t>22,5x</a:t>
-                      </a:r>
-                    </a:p>
-                  </a:txBody>
-                  <a:tcPr>
-                    <a:solidFill>
-                      <a:srgbClr val="FFFFFF"/>
-                    </a:solidFill>
-                  </a:tcPr>
-                </a:tc>
-                <a:tc>
-                  <a:txBody>
-                    <a:bodyPr/>
-                    <a:lstStyle/>
-                    <a:p>
-                      <a:pPr algn="ctr"/>
-                      <a:r>
-                        <a:rPr sz="800" b="0" i="0">
-                          <a:solidFill>
-                            <a:srgbClr val="0D0D0D"/>
-                          </a:solidFill>
-                          <a:latin typeface="Calibri"/>
-                        </a:rPr>
-                        <a:t>3,8x</a:t>
-                      </a:r>
-                    </a:p>
-                  </a:txBody>
-                  <a:tcPr>
-                    <a:solidFill>
-                      <a:srgbClr val="FFFFFF"/>
-                    </a:solidFill>
-                  </a:tcPr>
-                </a:tc>
-                <a:tc>
-                  <a:txBody>
-                    <a:bodyPr/>
-                    <a:lstStyle/>
-                    <a:p>
-                      <a:pPr algn="ctr"/>
-                      <a:r>
-                        <a:rPr sz="800" b="0" i="0">
-                          <a:solidFill>
-                            <a:srgbClr val="0D0D0D"/>
-                          </a:solidFill>
-                          <a:latin typeface="Calibri"/>
-                        </a:rPr>
-                        <a:t>45,0x</a:t>
-                      </a:r>
-                    </a:p>
-                  </a:txBody>
-                  <a:tcPr>
-                    <a:solidFill>
-                      <a:srgbClr val="FFFFFF"/>
-                    </a:solidFill>
-                  </a:tcPr>
-                </a:tc>
-                <a:tc>
-                  <a:txBody>
-                    <a:bodyPr/>
-                    <a:lstStyle/>
-                    <a:p>
-                      <a:pPr algn="ctr"/>
-                      <a:r>
-                        <a:rPr sz="800" b="0" i="0">
-                          <a:solidFill>
-                            <a:srgbClr val="0D0D0D"/>
-                          </a:solidFill>
-                          <a:latin typeface="Calibri"/>
-                        </a:rPr>
-                        <a:t>22,0 %</a:t>
-                      </a:r>
-                    </a:p>
-                  </a:txBody>
-                  <a:tcPr>
-                    <a:solidFill>
-                      <a:srgbClr val="FFFFFF"/>
-                    </a:solidFill>
-                  </a:tcPr>
-                </a:tc>
-                <a:tc>
-                  <a:txBody>
-                    <a:bodyPr/>
-                    <a:lstStyle/>
-                    <a:p>
-                      <a:pPr algn="ctr"/>
-                      <a:r>
-                        <a:rPr sz="800" b="0" i="0">
-                          <a:solidFill>
-                            <a:srgbClr val="0D0D0D"/>
-                          </a:solidFill>
-                          <a:latin typeface="Calibri"/>
-                        </a:rPr>
-                        <a:t>15,0 %</a:t>
-                      </a:r>
-                    </a:p>
-                  </a:txBody>
-                  <a:tcPr>
-                    <a:solidFill>
-                      <a:srgbClr val="FFFFFF"/>
-                    </a:solidFill>
-                  </a:tcPr>
-                </a:tc>
-              </a:tr>
-              <a:tr h="251999">
-                <a:tc>
-                  <a:txBody>
-                    <a:bodyPr/>
-                    <a:lstStyle/>
-                    <a:p>
-                      <a:pPr algn="l"/>
-                      <a:r>
-                        <a:rPr sz="800" b="0" i="0">
-                          <a:solidFill>
-                            <a:srgbClr val="0D0D0D"/>
-                          </a:solidFill>
-                          <a:latin typeface="Calibri"/>
-                        </a:rPr>
-                        <a:t>Rivian Automotive</a:t>
-                      </a:r>
-                    </a:p>
-                  </a:txBody>
-                  <a:tcPr>
-                    <a:solidFill>
-                      <a:srgbClr val="F7F8FA"/>
-                    </a:solidFill>
-                  </a:tcPr>
-                </a:tc>
-                <a:tc>
-                  <a:txBody>
-                    <a:bodyPr/>
-                    <a:lstStyle/>
-                    <a:p>
-                      <a:pPr algn="ctr"/>
-                      <a:r>
-                        <a:rPr sz="750" b="0" i="0">
-                          <a:solidFill>
-                            <a:srgbClr val="555555"/>
-                          </a:solidFill>
-                          <a:latin typeface="Calibri"/>
-                        </a:rPr>
-                        <a:t>RIVN.US</a:t>
-                      </a:r>
-                    </a:p>
-                  </a:txBody>
-                  <a:tcPr>
-                    <a:solidFill>
-                      <a:srgbClr val="F7F8FA"/>
-                    </a:solidFill>
-                  </a:tcPr>
-                </a:tc>
-                <a:tc>
-                  <a:txBody>
-                    <a:bodyPr/>
-                    <a:lstStyle/>
-                    <a:p>
-                      <a:pPr algn="ctr"/>
-                      <a:r>
-                        <a:rPr sz="800" b="0" i="0">
-                          <a:solidFill>
-                            <a:srgbClr val="0D0D0D"/>
-                          </a:solidFill>
-                          <a:latin typeface="Calibri"/>
-                        </a:rPr>
-                        <a:t>12,0</a:t>
-                      </a:r>
-                    </a:p>
-                  </a:txBody>
-                  <a:tcPr>
-                    <a:solidFill>
-                      <a:srgbClr val="F7F8FA"/>
-                    </a:solidFill>
-                  </a:tcPr>
-                </a:tc>
-                <a:tc>
-                  <a:txBody>
-                    <a:bodyPr/>
-                    <a:lstStyle/>
-                    <a:p>
-                      <a:pPr algn="ctr"/>
-                      <a:r>
-                        <a:rPr sz="800" b="0" i="0">
-                          <a:solidFill>
-                            <a:srgbClr val="0D0D0D"/>
-                          </a:solidFill>
-                          <a:latin typeface="Calibri"/>
-                        </a:rPr>
-                        <a:t>-12,0x</a:t>
-                      </a:r>
-                    </a:p>
-                  </a:txBody>
-                  <a:tcPr>
-                    <a:solidFill>
-                      <a:srgbClr val="F7F8FA"/>
-                    </a:solidFill>
-                  </a:tcPr>
-                </a:tc>
-                <a:tc>
-                  <a:txBody>
-                    <a:bodyPr/>
-                    <a:lstStyle/>
-                    <a:p>
-                      <a:pPr algn="ctr"/>
-                      <a:r>
-                        <a:rPr sz="800" b="0" i="0">
-                          <a:solidFill>
-                            <a:srgbClr val="0D0D0D"/>
-                          </a:solidFill>
-                          <a:latin typeface="Calibri"/>
-                        </a:rPr>
-                        <a:t>-5,0x</a:t>
-                      </a:r>
-                    </a:p>
-                  </a:txBody>
-                  <a:tcPr>
-                    <a:solidFill>
-                      <a:srgbClr val="F7F8FA"/>
-                    </a:solidFill>
-                  </a:tcPr>
-                </a:tc>
-                <a:tc>
-                  <a:txBody>
-                    <a:bodyPr/>
-                    <a:lstStyle/>
-                    <a:p>
-                      <a:pPr algn="ctr"/>
-                      <a:r>
-                        <a:rPr sz="800" b="0" i="0">
-                          <a:solidFill>
-                            <a:srgbClr val="0D0D0D"/>
-                          </a:solidFill>
-                          <a:latin typeface="Calibri"/>
-                        </a:rPr>
-                        <a:t>-10,0x</a:t>
-                      </a:r>
-                    </a:p>
-                  </a:txBody>
-                  <a:tcPr>
-                    <a:solidFill>
-                      <a:srgbClr val="F7F8FA"/>
-                    </a:solidFill>
-                  </a:tcPr>
-                </a:tc>
-                <a:tc>
-                  <a:txBody>
-                    <a:bodyPr/>
-                    <a:lstStyle/>
-                    <a:p>
-                      <a:pPr algn="ctr"/>
-                      <a:r>
-                        <a:rPr sz="800" b="0" i="0">
-                          <a:solidFill>
-                            <a:srgbClr val="0D0D0D"/>
-                          </a:solidFill>
-                          <a:latin typeface="Calibri"/>
-                        </a:rPr>
-                        <a:t>15,0 %</a:t>
-                      </a:r>
-                    </a:p>
-                  </a:txBody>
-                  <a:tcPr>
-                    <a:solidFill>
-                      <a:srgbClr val="F7F8FA"/>
-                    </a:solidFill>
-                  </a:tcPr>
-                </a:tc>
-                <a:tc>
-                  <a:txBody>
-                    <a:bodyPr/>
-                    <a:lstStyle/>
-                    <a:p>
-                      <a:pPr algn="ctr"/>
-                      <a:r>
-                        <a:rPr sz="800" b="0" i="0">
-                          <a:solidFill>
-                            <a:srgbClr val="0D0D0D"/>
-                          </a:solidFill>
-                          <a:latin typeface="Calibri"/>
-                        </a:rPr>
-                        <a:t>-30,0 %</a:t>
-                      </a:r>
-                    </a:p>
-                  </a:txBody>
-                  <a:tcPr>
-                    <a:solidFill>
-                      <a:srgbClr val="F7F8FA"/>
-                    </a:solidFill>
-                  </a:tcPr>
-                </a:tc>
-              </a:tr>
-              <a:tr h="251999">
-                <a:tc>
-                  <a:txBody>
-                    <a:bodyPr/>
-                    <a:lstStyle/>
-                    <a:p>
-                      <a:pPr algn="l"/>
-                      <a:r>
-                        <a:rPr sz="800" b="0" i="0">
-                          <a:solidFill>
-                            <a:srgbClr val="0D0D0D"/>
-                          </a:solidFill>
-                          <a:latin typeface="Calibri"/>
-                        </a:rPr>
-                        <a:t>Lucid Group</a:t>
-                      </a:r>
-                    </a:p>
-                  </a:txBody>
-                  <a:tcPr>
-                    <a:solidFill>
-                      <a:srgbClr val="FFFFFF"/>
-                    </a:solidFill>
-                  </a:tcPr>
-                </a:tc>
-                <a:tc>
-                  <a:txBody>
-                    <a:bodyPr/>
-                    <a:lstStyle/>
-                    <a:p>
-                      <a:pPr algn="ctr"/>
-                      <a:r>
-                        <a:rPr sz="750" b="0" i="0">
-                          <a:solidFill>
-                            <a:srgbClr val="555555"/>
-                          </a:solidFill>
-                          <a:latin typeface="Calibri"/>
-                        </a:rPr>
-                        <a:t>LCID.US</a:t>
-                      </a:r>
-                    </a:p>
-                  </a:txBody>
-                  <a:tcPr>
-                    <a:solidFill>
-                      <a:srgbClr val="FFFFFF"/>
-                    </a:solidFill>
-                  </a:tcPr>
-                </a:tc>
-                <a:tc>
-                  <a:txBody>
-                    <a:bodyPr/>
-                    <a:lstStyle/>
-                    <a:p>
-                      <a:pPr algn="ctr"/>
-                      <a:r>
-                        <a:rPr sz="800" b="0" i="0">
-                          <a:solidFill>
-                            <a:srgbClr val="0D0D0D"/>
-                          </a:solidFill>
-                          <a:latin typeface="Calibri"/>
-                        </a:rPr>
-                        <a:t>15,0</a:t>
-                      </a:r>
-                    </a:p>
-                  </a:txBody>
-                  <a:tcPr>
-                    <a:solidFill>
-                      <a:srgbClr val="FFFFFF"/>
-                    </a:solidFill>
-                  </a:tcPr>
-                </a:tc>
-                <a:tc>
-                  <a:txBody>
-                    <a:bodyPr/>
-                    <a:lstStyle/>
-                    <a:p>
-                      <a:pPr algn="ctr"/>
-                      <a:r>
-                        <a:rPr sz="800" b="0" i="0">
-                          <a:solidFill>
-                            <a:srgbClr val="0D0D0D"/>
-                          </a:solidFill>
-                          <a:latin typeface="Calibri"/>
-                        </a:rPr>
-                        <a:t>-18,0x</a:t>
-                      </a:r>
-                    </a:p>
-                  </a:txBody>
-                  <a:tcPr>
-                    <a:solidFill>
-                      <a:srgbClr val="FFFFFF"/>
-                    </a:solidFill>
-                  </a:tcPr>
-                </a:tc>
-                <a:tc>
-                  <a:txBody>
-                    <a:bodyPr/>
-                    <a:lstStyle/>
-                    <a:p>
-                      <a:pPr algn="ctr"/>
-                      <a:r>
-                        <a:rPr sz="800" b="0" i="0">
-                          <a:solidFill>
-                            <a:srgbClr val="0D0D0D"/>
-                          </a:solidFill>
-                          <a:latin typeface="Calibri"/>
-                        </a:rPr>
-                        <a:t>-8,0x</a:t>
-                      </a:r>
-                    </a:p>
-                  </a:txBody>
-                  <a:tcPr>
-                    <a:solidFill>
-                      <a:srgbClr val="FFFFFF"/>
-                    </a:solidFill>
-                  </a:tcPr>
-                </a:tc>
-                <a:tc>
-                  <a:txBody>
-                    <a:bodyPr/>
-                    <a:lstStyle/>
-                    <a:p>
-                      <a:pPr algn="ctr"/>
-                      <a:r>
-                        <a:rPr sz="800" b="0" i="0">
-                          <a:solidFill>
-                            <a:srgbClr val="0D0D0D"/>
-                          </a:solidFill>
-                          <a:latin typeface="Calibri"/>
-                        </a:rPr>
-                        <a:t>-15,0x</a:t>
-                      </a:r>
-                    </a:p>
-                  </a:txBody>
-                  <a:tcPr>
-                    <a:solidFill>
-                      <a:srgbClr val="FFFFFF"/>
-                    </a:solidFill>
-                  </a:tcPr>
-                </a:tc>
-                <a:tc>
-                  <a:txBody>
-                    <a:bodyPr/>
-                    <a:lstStyle/>
-                    <a:p>
-                      <a:pPr algn="ctr"/>
-                      <a:r>
-                        <a:rPr sz="800" b="0" i="0">
-                          <a:solidFill>
-                            <a:srgbClr val="0D0D0D"/>
-                          </a:solidFill>
-                          <a:latin typeface="Calibri"/>
-                        </a:rPr>
-                        <a:t>18,0 %</a:t>
-                      </a:r>
-                    </a:p>
-                  </a:txBody>
-                  <a:tcPr>
-                    <a:solidFill>
-                      <a:srgbClr val="FFFFFF"/>
-                    </a:solidFill>
-                  </a:tcPr>
-                </a:tc>
-                <a:tc>
-                  <a:txBody>
-                    <a:bodyPr/>
-                    <a:lstStyle/>
-                    <a:p>
-                      <a:pPr algn="ctr"/>
-                      <a:r>
-                        <a:rPr sz="800" b="0" i="0">
-                          <a:solidFill>
-                            <a:srgbClr val="0D0D0D"/>
-                          </a:solidFill>
-                          <a:latin typeface="Calibri"/>
-                        </a:rPr>
-                        <a:t>-40,0 %</a:t>
-                      </a:r>
-                    </a:p>
-                  </a:txBody>
-                  <a:tcPr>
-                    <a:solidFill>
-                      <a:srgbClr val="FFFFFF"/>
-                    </a:solidFill>
-                  </a:tcPr>
-                </a:tc>
-              </a:tr>
-              <a:tr h="251999">
-                <a:tc>
-                  <a:txBody>
-                    <a:bodyPr/>
-                    <a:lstStyle/>
-                    <a:p>
-                      <a:pPr algn="l"/>
-                      <a:r>
-                        <a:rPr sz="800" b="0" i="0">
-                          <a:solidFill>
-                            <a:srgbClr val="0D0D0D"/>
-                          </a:solidFill>
-                          <a:latin typeface="Calibri"/>
-                        </a:rPr>
-                        <a:t>NIO Inc</a:t>
-                      </a:r>
-                    </a:p>
-                  </a:txBody>
-                  <a:tcPr>
-                    <a:solidFill>
-                      <a:srgbClr val="F7F8FA"/>
-                    </a:solidFill>
-                  </a:tcPr>
-                </a:tc>
-                <a:tc>
-                  <a:txBody>
-                    <a:bodyPr/>
-                    <a:lstStyle/>
-                    <a:p>
-                      <a:pPr algn="ctr"/>
-                      <a:r>
-                        <a:rPr sz="750" b="0" i="0">
-                          <a:solidFill>
-                            <a:srgbClr val="555555"/>
-                          </a:solidFill>
-                          <a:latin typeface="Calibri"/>
-                        </a:rPr>
-                        <a:t>NIO.US</a:t>
-                      </a:r>
-                    </a:p>
-                  </a:txBody>
-                  <a:tcPr>
-                    <a:solidFill>
-                      <a:srgbClr val="F7F8FA"/>
-                    </a:solidFill>
-                  </a:tcPr>
-                </a:tc>
-                <a:tc>
-                  <a:txBody>
-                    <a:bodyPr/>
-                    <a:lstStyle/>
-                    <a:p>
-                      <a:pPr algn="ctr"/>
-                      <a:r>
-                        <a:rPr sz="800" b="0" i="0">
-                          <a:solidFill>
-                            <a:srgbClr val="0D0D0D"/>
-                          </a:solidFill>
-                          <a:latin typeface="Calibri"/>
-                        </a:rPr>
-                        <a:t>20,0</a:t>
-                      </a:r>
-                    </a:p>
-                  </a:txBody>
-                  <a:tcPr>
-                    <a:solidFill>
-                      <a:srgbClr val="F7F8FA"/>
-                    </a:solidFill>
-                  </a:tcPr>
-                </a:tc>
-                <a:tc>
-                  <a:txBody>
-                    <a:bodyPr/>
-                    <a:lstStyle/>
-                    <a:p>
-                      <a:pPr algn="ctr"/>
-                      <a:r>
-                        <a:rPr sz="800" b="0" i="0">
-                          <a:solidFill>
-                            <a:srgbClr val="0D0D0D"/>
-                          </a:solidFill>
-                          <a:latin typeface="Calibri"/>
-                        </a:rPr>
-                        <a:t>-25,0x</a:t>
-                      </a:r>
-                    </a:p>
-                  </a:txBody>
-                  <a:tcPr>
-                    <a:solidFill>
-                      <a:srgbClr val="F7F8FA"/>
-                    </a:solidFill>
-                  </a:tcPr>
-                </a:tc>
-                <a:tc>
-                  <a:txBody>
-                    <a:bodyPr/>
-                    <a:lstStyle/>
-                    <a:p>
-                      <a:pPr algn="ctr"/>
-                      <a:r>
-                        <a:rPr sz="800" b="0" i="0">
-                          <a:solidFill>
-                            <a:srgbClr val="0D0D0D"/>
-                          </a:solidFill>
-                          <a:latin typeface="Calibri"/>
-                        </a:rPr>
-                        <a:t>-10,0x</a:t>
-                      </a:r>
-                    </a:p>
-                  </a:txBody>
-                  <a:tcPr>
-                    <a:solidFill>
-                      <a:srgbClr val="F7F8FA"/>
-                    </a:solidFill>
-                  </a:tcPr>
-                </a:tc>
-                <a:tc>
-                  <a:txBody>
-                    <a:bodyPr/>
-                    <a:lstStyle/>
-                    <a:p>
-                      <a:pPr algn="ctr"/>
-                      <a:r>
-                        <a:rPr sz="800" b="0" i="0">
-                          <a:solidFill>
-                            <a:srgbClr val="0D0D0D"/>
-                          </a:solidFill>
-                          <a:latin typeface="Calibri"/>
-                        </a:rPr>
-                        <a:t>-20,0x</a:t>
-                      </a:r>
-                    </a:p>
-                  </a:txBody>
-                  <a:tcPr>
-                    <a:solidFill>
-                      <a:srgbClr val="F7F8FA"/>
-                    </a:solidFill>
-                  </a:tcPr>
-                </a:tc>
-                <a:tc>
-                  <a:txBody>
-                    <a:bodyPr/>
-                    <a:lstStyle/>
-                    <a:p>
-                      <a:pPr algn="ctr"/>
-                      <a:r>
-                        <a:rPr sz="800" b="0" i="0">
-                          <a:solidFill>
-                            <a:srgbClr val="0D0D0D"/>
-                          </a:solidFill>
-                          <a:latin typeface="Calibri"/>
-                        </a:rPr>
-                        <a:t>12,0 %</a:t>
-                      </a:r>
-                    </a:p>
-                  </a:txBody>
-                  <a:tcPr>
-                    <a:solidFill>
-                      <a:srgbClr val="F7F8FA"/>
-                    </a:solidFill>
-                  </a:tcPr>
-                </a:tc>
-                <a:tc>
-                  <a:txBody>
-                    <a:bodyPr/>
-                    <a:lstStyle/>
-                    <a:p>
-                      <a:pPr algn="ctr"/>
-                      <a:r>
-                        <a:rPr sz="800" b="0" i="0">
-                          <a:solidFill>
-                            <a:srgbClr val="0D0D0D"/>
-                          </a:solidFill>
-                          <a:latin typeface="Calibri"/>
-                        </a:rPr>
-                        <a:t>-50,0 %</a:t>
-                      </a:r>
-                    </a:p>
-                  </a:txBody>
-                  <a:tcPr>
-                    <a:solidFill>
-                      <a:srgbClr val="F7F8FA"/>
-                    </a:solidFill>
-                  </a:tcPr>
-                </a:tc>
-              </a:tr>
-              <a:tr h="251999">
-                <a:tc>
-                  <a:txBody>
-                    <a:bodyPr/>
-                    <a:lstStyle/>
-                    <a:p>
-                      <a:pPr algn="l"/>
-                      <a:r>
-                        <a:rPr sz="800" b="0" i="0">
-                          <a:solidFill>
-                            <a:srgbClr val="0D0D0D"/>
-                          </a:solidFill>
-                          <a:latin typeface="Calibri"/>
-                        </a:rPr>
-                        <a:t>Ford Motor</a:t>
-                      </a:r>
-                    </a:p>
-                  </a:txBody>
-                  <a:tcPr>
-                    <a:solidFill>
-                      <a:srgbClr val="FFFFFF"/>
-                    </a:solidFill>
-                  </a:tcPr>
-                </a:tc>
-                <a:tc>
-                  <a:txBody>
-                    <a:bodyPr/>
-                    <a:lstStyle/>
-                    <a:p>
-                      <a:pPr algn="ctr"/>
-                      <a:r>
-                        <a:rPr sz="750" b="0" i="0">
-                          <a:solidFill>
-                            <a:srgbClr val="555555"/>
-                          </a:solidFill>
-                          <a:latin typeface="Calibri"/>
-                        </a:rPr>
-                        <a:t>F.US</a:t>
-                      </a:r>
-                    </a:p>
-                  </a:txBody>
-                  <a:tcPr>
-                    <a:solidFill>
-                      <a:srgbClr val="FFFFFF"/>
-                    </a:solidFill>
-                  </a:tcPr>
-                </a:tc>
-                <a:tc>
-                  <a:txBody>
-                    <a:bodyPr/>
-                    <a:lstStyle/>
-                    <a:p>
-                      <a:pPr algn="ctr"/>
-                      <a:r>
-                        <a:rPr sz="800" b="0" i="0">
-                          <a:solidFill>
-                            <a:srgbClr val="0D0D0D"/>
-                          </a:solidFill>
-                          <a:latin typeface="Calibri"/>
-                        </a:rPr>
-                        <a:t>50,0</a:t>
-                      </a:r>
-                    </a:p>
-                  </a:txBody>
-                  <a:tcPr>
-                    <a:solidFill>
-                      <a:srgbClr val="FFFFFF"/>
-                    </a:solidFill>
-                  </a:tcPr>
-                </a:tc>
-                <a:tc>
-                  <a:txBody>
-                    <a:bodyPr/>
-                    <a:lstStyle/>
-                    <a:p>
-                      <a:pPr algn="ctr"/>
-                      <a:r>
-                        <a:rPr sz="800" b="0" i="0">
-                          <a:solidFill>
-                            <a:srgbClr val="0D0D0D"/>
-                          </a:solidFill>
-                          <a:latin typeface="Calibri"/>
-                        </a:rPr>
-                        <a:t>6,5x</a:t>
-                      </a:r>
-                    </a:p>
-                  </a:txBody>
-                  <a:tcPr>
-                    <a:solidFill>
-                      <a:srgbClr val="FFFFFF"/>
-                    </a:solidFill>
-                  </a:tcPr>
-                </a:tc>
-                <a:tc>
-                  <a:txBody>
-                    <a:bodyPr/>
-                    <a:lstStyle/>
-                    <a:p>
-                      <a:pPr algn="ctr"/>
-                      <a:r>
-                        <a:rPr sz="800" b="0" i="0">
-                          <a:solidFill>
-                            <a:srgbClr val="0D0D0D"/>
-                          </a:solidFill>
-                          <a:latin typeface="Calibri"/>
-                        </a:rPr>
-                        <a:t>1,2x</a:t>
-                      </a:r>
-                    </a:p>
-                  </a:txBody>
-                  <a:tcPr>
-                    <a:solidFill>
-                      <a:srgbClr val="FFFFFF"/>
-                    </a:solidFill>
-                  </a:tcPr>
-                </a:tc>
-                <a:tc>
-                  <a:txBody>
-                    <a:bodyPr/>
-                    <a:lstStyle/>
-                    <a:p>
-                      <a:pPr algn="ctr"/>
-                      <a:r>
-                        <a:rPr sz="800" b="0" i="0">
-                          <a:solidFill>
-                            <a:srgbClr val="0D0D0D"/>
-                          </a:solidFill>
-                          <a:latin typeface="Calibri"/>
-                        </a:rPr>
-                        <a:t>8,0x</a:t>
-                      </a:r>
-                    </a:p>
-                  </a:txBody>
-                  <a:tcPr>
-                    <a:solidFill>
-                      <a:srgbClr val="FFFFFF"/>
-                    </a:solidFill>
-                  </a:tcPr>
-                </a:tc>
-                <a:tc>
-                  <a:txBody>
-                    <a:bodyPr/>
-                    <a:lstStyle/>
-                    <a:p>
-                      <a:pPr algn="ctr"/>
-                      <a:r>
-                        <a:rPr sz="800" b="0" i="0">
-                          <a:solidFill>
-                            <a:srgbClr val="0D0D0D"/>
-                          </a:solidFill>
-                          <a:latin typeface="Calibri"/>
-                        </a:rPr>
-                        <a:t>16,0 %</a:t>
-                      </a:r>
-                    </a:p>
-                  </a:txBody>
-                  <a:tcPr>
-                    <a:solidFill>
-                      <a:srgbClr val="FFFFFF"/>
-                    </a:solidFill>
-                  </a:tcPr>
-                </a:tc>
-                <a:tc>
-                  <a:txBody>
-                    <a:bodyPr/>
-                    <a:lstStyle/>
-                    <a:p>
-                      <a:pPr algn="ctr"/>
-                      <a:r>
-                        <a:rPr sz="800" b="0" i="0">
-                          <a:solidFill>
-                            <a:srgbClr val="0D0D0D"/>
-                          </a:solidFill>
-                          <a:latin typeface="Calibri"/>
-                        </a:rPr>
-                        <a:t>10,0 %</a:t>
-                      </a:r>
-                    </a:p>
-                  </a:txBody>
-                  <a:tcPr>
-                    <a:solidFill>
-                      <a:srgbClr val="FFFFFF"/>
-                    </a:solidFill>
-                  </a:tcPr>
-                </a:tc>
-              </a:tr>
-              <a:tr h="252006">
+              <a:tr h="290400">
                 <a:tc>
                   <a:txBody>
                     <a:bodyPr/>
@@ -12478,7 +11306,7 @@
                           </a:solidFill>
                           <a:latin typeface="Calibri"/>
                         </a:rPr>
-                        <a:t>-12,0x</a:t>
+                        <a:t>—</a:t>
                       </a:r>
                     </a:p>
                   </a:txBody>
@@ -12501,7 +11329,7 @@
                           </a:solidFill>
                           <a:latin typeface="Calibri"/>
                         </a:rPr>
-                        <a:t>-5,0x</a:t>
+                        <a:t>—</a:t>
                       </a:r>
                     </a:p>
                   </a:txBody>
@@ -12524,7 +11352,7 @@
                           </a:solidFill>
                           <a:latin typeface="Calibri"/>
                         </a:rPr>
-                        <a:t>-10,0x</a:t>
+                        <a:t>—</a:t>
                       </a:r>
                     </a:p>
                   </a:txBody>
@@ -12547,7 +11375,7 @@
                           </a:solidFill>
                           <a:latin typeface="Calibri"/>
                         </a:rPr>
-                        <a:t>16,0 %</a:t>
+                        <a:t>—</a:t>
                       </a:r>
                     </a:p>
                   </a:txBody>
@@ -12570,7 +11398,7 @@
                           </a:solidFill>
                           <a:latin typeface="Calibri"/>
                         </a:rPr>
-                        <a:t>-30,0 %</a:t>
+                        <a:t>—</a:t>
                       </a:r>
                     </a:p>
                   </a:txBody>
@@ -12585,127 +11413,6 @@
           </a:graphicData>
         </a:graphic>
       </p:graphicFrame>
-      <p:sp>
-        <p:nvSpPr>
-          <p:cNvPr id="18" name="Rectangle 17"/>
-          <p:cNvSpPr/>
-          <p:nvPr/>
-        </p:nvSpPr>
-        <p:spPr>
-          <a:xfrm>
-            <a:off x="367200" y="3128400"/>
-            <a:ext cx="8413200" cy="1548000"/>
-          </a:xfrm>
-          <a:prstGeom prst="rect">
-            <a:avLst/>
-          </a:prstGeom>
-          <a:solidFill>
-            <a:srgbClr val="F5F7FA"/>
-          </a:solidFill>
-          <a:ln>
-            <a:noFill/>
-          </a:ln>
-        </p:spPr>
-        <p:style>
-          <a:lnRef idx="1">
-            <a:schemeClr val="accent1"/>
-          </a:lnRef>
-          <a:fillRef idx="3">
-            <a:schemeClr val="accent1"/>
-          </a:fillRef>
-          <a:effectRef idx="2">
-            <a:schemeClr val="accent1"/>
-          </a:effectRef>
-          <a:fontRef idx="minor">
-            <a:schemeClr val="lt1"/>
-          </a:fontRef>
-        </p:style>
-        <p:txBody>
-          <a:bodyPr rtlCol="0" anchor="ctr"/>
-          <a:lstStyle/>
-          <a:p>
-            <a:pPr algn="ctr"/>
-          </a:p>
-        </p:txBody>
-      </p:sp>
-      <p:sp>
-        <p:nvSpPr>
-          <p:cNvPr id="19" name="Rectangle 18"/>
-          <p:cNvSpPr/>
-          <p:nvPr/>
-        </p:nvSpPr>
-        <p:spPr>
-          <a:xfrm>
-            <a:off x="367200" y="3128400"/>
-            <a:ext cx="79200" cy="1548000"/>
-          </a:xfrm>
-          <a:prstGeom prst="rect">
-            <a:avLst/>
-          </a:prstGeom>
-          <a:solidFill>
-            <a:srgbClr val="2E5FA3"/>
-          </a:solidFill>
-          <a:ln>
-            <a:noFill/>
-          </a:ln>
-        </p:spPr>
-        <p:style>
-          <a:lnRef idx="1">
-            <a:schemeClr val="accent1"/>
-          </a:lnRef>
-          <a:fillRef idx="3">
-            <a:schemeClr val="accent1"/>
-          </a:fillRef>
-          <a:effectRef idx="2">
-            <a:schemeClr val="accent1"/>
-          </a:effectRef>
-          <a:fontRef idx="minor">
-            <a:schemeClr val="lt1"/>
-          </a:fontRef>
-        </p:style>
-        <p:txBody>
-          <a:bodyPr rtlCol="0" anchor="ctr"/>
-          <a:lstStyle/>
-          <a:p>
-            <a:pPr algn="ctr"/>
-          </a:p>
-        </p:txBody>
-      </p:sp>
-      <p:sp>
-        <p:nvSpPr>
-          <p:cNvPr id="20" name="TextBox 19"/>
-          <p:cNvSpPr txBox="1"/>
-          <p:nvPr/>
-        </p:nvSpPr>
-        <p:spPr>
-          <a:xfrm>
-            <a:off x="475200" y="3157200"/>
-            <a:ext cx="8298000" cy="1512000"/>
-          </a:xfrm>
-          <a:prstGeom prst="rect">
-            <a:avLst/>
-          </a:prstGeom>
-          <a:noFill/>
-        </p:spPr>
-        <p:txBody>
-          <a:bodyPr wrap="square">
-            <a:spAutoFit/>
-          </a:bodyPr>
-          <a:lstStyle/>
-          <a:p>
-            <a:pPr algn="l"/>
-            <a:r>
-              <a:rPr sz="850" b="0" i="0">
-                <a:solidFill>
-                  <a:srgbClr val="555555"/>
-                </a:solidFill>
-                <a:latin typeface="Calibri"/>
-              </a:rPr>
-              <a:t>Tesla affiche une prime de 120% sur l'EV/EBITDA médiane peers (108.8x vs ~49x) et de 280% sur le P/E (339.5x vs ~120x), justifiée par sa croissance supérieure et son avance technologique. Une convergence vers la médiane peers impliquerait un downside de ~30%, tandis qu'une prime maintenue nécessiterait une exécution impeccable sur les nouveaux segments. Les marges ont chuté de 25.6% (GM 2022) à 18.0% (2025) et de 21.7% (EBITDA 2022) à 12.4% (2025), principalement à cause de la guerre des prix sur les VE et de l'inflation des coûts. La résilience des marges nettes (15.5% en 2023 vs 4.0% en 2025) masque une dégradation structurelle. Le pricing power semble affaibli, avec un risque de mean-reversion si la concurrence s'intensifie. Tesla se négocie à des multiples extrêmes (EV/EBITDA 108.8x, P/E 339.5x) reflétant une prime de croissance et de technologie. La décote par rapport à sa prime historique suggère une attente de catalyseurs concrets pour justifier ces niveaux.</a:t>
-            </a:r>
-          </a:p>
-        </p:txBody>
-      </p:sp>
     </p:spTree>
   </p:cSld>
   <p:clrMapOvr>
@@ -13305,151 +12012,222 @@
           </a:p>
         </p:txBody>
       </p:sp>
-      <p:pic>
-        <p:nvPicPr>
-          <p:cNvPr id="17" name="Picture 16" descr="image.png"/>
-          <p:cNvPicPr>
-            <a:picLocks noChangeAspect="1"/>
-          </p:cNvPicPr>
-          <p:nvPr/>
-        </p:nvPicPr>
-        <p:blipFill>
-          <a:blip r:embed="rId2"/>
-          <a:stretch>
-            <a:fillRect/>
-          </a:stretch>
-        </p:blipFill>
-        <p:spPr>
-          <a:xfrm>
-            <a:off x="367200" y="914400"/>
-            <a:ext cx="8413200" cy="2448000"/>
-          </a:xfrm>
-          <a:prstGeom prst="rect">
-            <a:avLst/>
-          </a:prstGeom>
-        </p:spPr>
-      </p:pic>
-      <p:sp>
-        <p:nvSpPr>
-          <p:cNvPr id="18" name="Rectangle 17"/>
-          <p:cNvSpPr/>
-          <p:nvPr/>
-        </p:nvSpPr>
-        <p:spPr>
-          <a:xfrm>
-            <a:off x="367200" y="3488400"/>
-            <a:ext cx="8413200" cy="1281600"/>
-          </a:xfrm>
-          <a:prstGeom prst="rect">
-            <a:avLst/>
-          </a:prstGeom>
-          <a:solidFill>
-            <a:srgbClr val="F5F7FA"/>
-          </a:solidFill>
-          <a:ln>
-            <a:noFill/>
-          </a:ln>
-        </p:spPr>
-        <p:style>
-          <a:lnRef idx="1">
-            <a:schemeClr val="accent1"/>
-          </a:lnRef>
-          <a:fillRef idx="3">
-            <a:schemeClr val="accent1"/>
-          </a:fillRef>
-          <a:effectRef idx="2">
-            <a:schemeClr val="accent1"/>
-          </a:effectRef>
-          <a:fontRef idx="minor">
-            <a:schemeClr val="lt1"/>
-          </a:fontRef>
-        </p:style>
-        <p:txBody>
-          <a:bodyPr rtlCol="0" anchor="ctr"/>
-          <a:lstStyle/>
-          <a:p>
-            <a:pPr algn="ctr"/>
-          </a:p>
-        </p:txBody>
-      </p:sp>
-      <p:sp>
-        <p:nvSpPr>
-          <p:cNvPr id="19" name="Rectangle 18"/>
-          <p:cNvSpPr/>
-          <p:nvPr/>
-        </p:nvSpPr>
-        <p:spPr>
-          <a:xfrm>
-            <a:off x="367200" y="3488400"/>
-            <a:ext cx="79200" cy="1281600"/>
-          </a:xfrm>
-          <a:prstGeom prst="rect">
-            <a:avLst/>
-          </a:prstGeom>
-          <a:solidFill>
-            <a:srgbClr val="2E5FA3"/>
-          </a:solidFill>
-          <a:ln>
-            <a:noFill/>
-          </a:ln>
-        </p:spPr>
-        <p:style>
-          <a:lnRef idx="1">
-            <a:schemeClr val="accent1"/>
-          </a:lnRef>
-          <a:fillRef idx="3">
-            <a:schemeClr val="accent1"/>
-          </a:fillRef>
-          <a:effectRef idx="2">
-            <a:schemeClr val="accent1"/>
-          </a:effectRef>
-          <a:fontRef idx="minor">
-            <a:schemeClr val="lt1"/>
-          </a:fontRef>
-        </p:style>
-        <p:txBody>
-          <a:bodyPr rtlCol="0" anchor="ctr"/>
-          <a:lstStyle/>
-          <a:p>
-            <a:pPr algn="ctr"/>
-          </a:p>
-        </p:txBody>
-      </p:sp>
-      <p:sp>
-        <p:nvSpPr>
-          <p:cNvPr id="20" name="TextBox 19"/>
-          <p:cNvSpPr txBox="1"/>
-          <p:nvPr/>
-        </p:nvSpPr>
-        <p:spPr>
-          <a:xfrm>
-            <a:off x="475200" y="3517200"/>
-            <a:ext cx="8298000" cy="1245600"/>
-          </a:xfrm>
-          <a:prstGeom prst="rect">
-            <a:avLst/>
-          </a:prstGeom>
-          <a:noFill/>
-        </p:spPr>
-        <p:txBody>
-          <a:bodyPr wrap="square">
-            <a:spAutoFit/>
-          </a:bodyPr>
-          <a:lstStyle/>
-          <a:p>
-            <a:pPr algn="l"/>
-            <a:r>
-              <a:rPr sz="850" b="0" i="0">
-                <a:solidFill>
-                  <a:srgbClr val="555555"/>
-                </a:solidFill>
-                <a:latin typeface="Calibri"/>
-              </a:rPr>
-              <a:t>Avec un WACC de 14.8% et un TGR de 2.5%, le prix implicite DCF se situe entre 290 USD (bear) et 450 USD (bull), contre un cours de 343.25 USD. La prime actuelle suggère que le marché anticipe déjà une partie de la croissance future, limitant l'upside sans exécution parfaite sur les robotaxis et l'IA. Tesla se négocie à des multiples extrêmes (EV/EBITDA 108.8x, P/E 339.5x) reflétant une prime de croissance et de technologie. La décote par rapport à sa prime historique suggère une attente de catalyseurs concrets pour justifier ces niveaux.</a:t>
-            </a:r>
-          </a:p>
-        </p:txBody>
-      </p:sp>
+      <p:graphicFrame>
+        <p:nvGraphicFramePr>
+          <p:cNvPr id="17" name="Table 16"/>
+          <p:cNvGraphicFramePr>
+            <a:graphicFrameLocks noGrp="1"/>
+          </p:cNvGraphicFramePr>
+          <p:nvPr/>
+        </p:nvGraphicFramePr>
+        <p:xfrm>
+          <a:off x="367200" y="914400"/>
+          <a:ext cx="8413200" cy="615600"/>
+        </p:xfrm>
+        <a:graphic>
+          <a:graphicData uri="http://schemas.openxmlformats.org/drawingml/2006/table">
+            <a:tbl>
+              <a:tblPr firstRow="1" bandRow="1">
+                <a:tableStyleId>{5C22544A-7EE6-4342-B048-85BDC9FD1C3A}</a:tableStyleId>
+              </a:tblPr>
+              <a:tblGrid>
+                <a:gridCol w="2944620"/>
+                <a:gridCol w="1682640"/>
+                <a:gridCol w="1682640"/>
+                <a:gridCol w="2103300"/>
+              </a:tblGrid>
+              <a:tr h="307800">
+                <a:tc>
+                  <a:txBody>
+                    <a:bodyPr/>
+                    <a:lstStyle/>
+                    <a:p>
+                      <a:pPr algn="l"/>
+                      <a:r>
+                        <a:rPr sz="800" b="1" i="0">
+                          <a:solidFill>
+                            <a:srgbClr val="FFFFFF"/>
+                          </a:solidFill>
+                          <a:latin typeface="Calibri"/>
+                        </a:rPr>
+                        <a:t>Méthode</a:t>
+                      </a:r>
+                    </a:p>
+                  </a:txBody>
+                  <a:tcPr>
+                    <a:solidFill>
+                      <a:srgbClr val="1B3A6B"/>
+                    </a:solidFill>
+                  </a:tcPr>
+                </a:tc>
+                <a:tc>
+                  <a:txBody>
+                    <a:bodyPr/>
+                    <a:lstStyle/>
+                    <a:p>
+                      <a:pPr algn="ctr"/>
+                      <a:r>
+                        <a:rPr sz="800" b="1" i="0">
+                          <a:solidFill>
+                            <a:srgbClr val="FFFFFF"/>
+                          </a:solidFill>
+                          <a:latin typeface="Calibri"/>
+                        </a:rPr>
+                        <a:t>Fourchette basse</a:t>
+                      </a:r>
+                    </a:p>
+                  </a:txBody>
+                  <a:tcPr>
+                    <a:solidFill>
+                      <a:srgbClr val="1B3A6B"/>
+                    </a:solidFill>
+                  </a:tcPr>
+                </a:tc>
+                <a:tc>
+                  <a:txBody>
+                    <a:bodyPr/>
+                    <a:lstStyle/>
+                    <a:p>
+                      <a:pPr algn="ctr"/>
+                      <a:r>
+                        <a:rPr sz="800" b="1" i="0">
+                          <a:solidFill>
+                            <a:srgbClr val="FFFFFF"/>
+                          </a:solidFill>
+                          <a:latin typeface="Calibri"/>
+                        </a:rPr>
+                        <a:t>Fourchette haute</a:t>
+                      </a:r>
+                    </a:p>
+                  </a:txBody>
+                  <a:tcPr>
+                    <a:solidFill>
+                      <a:srgbClr val="1B3A6B"/>
+                    </a:solidFill>
+                  </a:tcPr>
+                </a:tc>
+                <a:tc>
+                  <a:txBody>
+                    <a:bodyPr/>
+                    <a:lstStyle/>
+                    <a:p>
+                      <a:pPr algn="ctr"/>
+                      <a:r>
+                        <a:rPr sz="800" b="1" i="0">
+                          <a:solidFill>
+                            <a:srgbClr val="FFFFFF"/>
+                          </a:solidFill>
+                          <a:latin typeface="Calibri"/>
+                        </a:rPr>
+                        <a:t>Point central</a:t>
+                      </a:r>
+                    </a:p>
+                  </a:txBody>
+                  <a:tcPr>
+                    <a:solidFill>
+                      <a:srgbClr val="1B3A6B"/>
+                    </a:solidFill>
+                  </a:tcPr>
+                </a:tc>
+              </a:tr>
+              <a:tr h="307800">
+                <a:tc>
+                  <a:txBody>
+                    <a:bodyPr/>
+                    <a:lstStyle/>
+                    <a:p>
+                      <a:pPr algn="l"/>
+                      <a:r>
+                        <a:rPr sz="800" b="0" i="0">
+                          <a:solidFill>
+                            <a:srgbClr val="0D0D0D"/>
+                          </a:solidFill>
+                          <a:latin typeface="Calibri"/>
+                        </a:rPr>
+                        <a:t>Cours actuel (343,25)</a:t>
+                      </a:r>
+                    </a:p>
+                  </a:txBody>
+                  <a:tcPr>
+                    <a:solidFill>
+                      <a:srgbClr val="EEF3FA"/>
+                    </a:solidFill>
+                  </a:tcPr>
+                </a:tc>
+                <a:tc>
+                  <a:txBody>
+                    <a:bodyPr/>
+                    <a:lstStyle/>
+                    <a:p>
+                      <a:pPr algn="ctr"/>
+                      <a:r>
+                        <a:rPr sz="800" b="0" i="0">
+                          <a:solidFill>
+                            <a:srgbClr val="0D0D0D"/>
+                          </a:solidFill>
+                          <a:latin typeface="Calibri"/>
+                        </a:rPr>
+                        <a:t>—</a:t>
+                      </a:r>
+                    </a:p>
+                  </a:txBody>
+                  <a:tcPr>
+                    <a:solidFill>
+                      <a:srgbClr val="EEF3FA"/>
+                    </a:solidFill>
+                  </a:tcPr>
+                </a:tc>
+                <a:tc>
+                  <a:txBody>
+                    <a:bodyPr/>
+                    <a:lstStyle/>
+                    <a:p>
+                      <a:pPr algn="ctr"/>
+                      <a:r>
+                        <a:rPr sz="800" b="0" i="0">
+                          <a:solidFill>
+                            <a:srgbClr val="0D0D0D"/>
+                          </a:solidFill>
+                          <a:latin typeface="Calibri"/>
+                        </a:rPr>
+                        <a:t>—</a:t>
+                      </a:r>
+                    </a:p>
+                  </a:txBody>
+                  <a:tcPr>
+                    <a:solidFill>
+                      <a:srgbClr val="EEF3FA"/>
+                    </a:solidFill>
+                  </a:tcPr>
+                </a:tc>
+                <a:tc>
+                  <a:txBody>
+                    <a:bodyPr/>
+                    <a:lstStyle/>
+                    <a:p>
+                      <a:pPr algn="ctr"/>
+                      <a:r>
+                        <a:rPr sz="800" b="0" i="0">
+                          <a:solidFill>
+                            <a:srgbClr val="0D0D0D"/>
+                          </a:solidFill>
+                          <a:latin typeface="Calibri"/>
+                        </a:rPr>
+                        <a:t>343,25</a:t>
+                      </a:r>
+                    </a:p>
+                  </a:txBody>
+                  <a:tcPr>
+                    <a:solidFill>
+                      <a:srgbClr val="EEF3FA"/>
+                    </a:solidFill>
+                  </a:tcPr>
+                </a:tc>
+              </a:tr>
+            </a:tbl>
+          </a:graphicData>
+        </a:graphic>
+      </p:graphicFrame>
     </p:spTree>
   </p:cSld>
   <p:clrMapOvr>
@@ -15122,7 +13900,7 @@
                 </a:solidFill>
                 <a:latin typeface="Calibri"/>
               </a:rPr>
-              <a:t>Le P/E affiche une expansion multiple de 237.1x sur la période (102,4x → 339,5x), signal d’une réévaluation favorable du profil de croissance. L’EV/EBITDA diverge à 108,8x vs 72,1x historique. Le CA 2025 atteint 94,8 Md$ (-3% YoY), marqué par une pression sur les marges (GM 18.0%, EBITDA 12.4%, Net 4.0%) due à la baisse des prix des VE et à l'augmentation des coûts fixes. Le bilan reste solide avec un ND/EBITDA négatif (-0.7x), permettant une flexibilité financière pour les investissements (Capex 8,5 Md$ en 2025) et potentiellement des rachats d'actions.</a:t>
+              <a:t>Le P/E affiche une expansion multiple de 237.1x sur la période (102,4x → 339,5x), signal d’une réévaluation favorable du profil de croissance. L’EV/EBITDA diverge à 108,8x vs 72,1x historique.</a:t>
             </a:r>
           </a:p>
         </p:txBody>
@@ -17639,7 +16417,7 @@
                 </a:solidFill>
                 <a:latin typeface="Calibri"/>
               </a:rPr>
-              <a:t>Le FCF affiche une contraction de 7,7 Mds$ sur la période, avec un FCF yield actuel de 0,1 % — à surveiller au regard de la valorisation de marché. L’allocation vers les dividendes est maintenue malgré la pression sur les marges. Le CA 2025 atteint 94,8 Md$ (-3% YoY), marqué par une pression sur les marges (GM 18.0%, EBITDA 12.4%, Net 4.0%) due à la baisse des prix des VE et à l'augmentation des coûts fixes. Le bilan reste solide avec un ND/EBITDA négatif (-0.7x), permettant une flexibilité financière pour les investissements (Capex 8,5 Md$ en 2025) et potentiellement des rachats d'actions.</a:t>
+              <a:t>Le FCF affiche une contraction de 7,7 Mds$ sur la période, avec un FCF yield actuel de 0,1 % — à surveiller au regard de la valorisation de marché. L’allocation vers les dividendes est maintenue malgré la pression sur les marges.</a:t>
             </a:r>
           </a:p>
         </p:txBody>
@@ -21221,7 +19999,7 @@
                 </a:solidFill>
                 <a:latin typeface="Calibri"/>
               </a:rPr>
-              <a:t>Marges en effondrement</a:t>
+              <a:t>Risque 1</a:t>
             </a:r>
           </a:p>
         </p:txBody>
@@ -21256,7 +20034,7 @@
                 </a:solidFill>
                 <a:latin typeface="Calibri"/>
               </a:rPr>
-              <a:t>L’écosystème fermé de Tesla, vanté pour sa rentabilité, montre des signes de saturation avec une croissance des ventes de véhicules de -3% en 2025.</a:t>
+              <a:t>Risque macro-économique : remontée des taux ou ralentissement de la demande mondiale.</a:t>
             </a:r>
           </a:p>
         </p:txBody>
@@ -21377,7 +20155,7 @@
                 </a:solidFill>
                 <a:latin typeface="Calibri"/>
               </a:rPr>
-              <a:t>Régulation punitive</a:t>
+              <a:t>Risque 2</a:t>
             </a:r>
           </a:p>
         </p:txBody>
@@ -21412,7 +20190,7 @@
                 </a:solidFill>
                 <a:latin typeface="Calibri"/>
               </a:rPr>
-              <a:t>Les marges sur les services (Superchargeur, abonnements) chutent de 12% depuis 2023, en raison d’une concurrence agressive de Electrify America et Ionity.</a:t>
+              <a:t>Risque sectoriel : intensification de la concurrence ou disruption technologique.</a:t>
             </a:r>
           </a:p>
         </p:txBody>
@@ -21533,7 +20311,7 @@
                 </a:solidFill>
                 <a:latin typeface="Calibri"/>
               </a:rPr>
-              <a:t>Surévaluation extrême</a:t>
+              <a:t>Risque 3</a:t>
             </a:r>
           </a:p>
         </p:txBody>
@@ -21568,7 +20346,7 @@
                 </a:solidFill>
                 <a:latin typeface="Calibri"/>
               </a:rPr>
-              <a:t>Le ratio EV/EBITDA de 108,78x est le plus élevé du secteur, indiquant une surévaluation de 300% par rapport à Ford (28x).</a:t>
+              <a:t>Risque spécifique : détérioration des marges ou exécution stratégique.</a:t>
             </a:r>
           </a:p>
         </p:txBody>
@@ -21782,7 +20560,7 @@
                           </a:solidFill>
                           <a:latin typeface="Calibri"/>
                         </a:rPr>
-                        <a:t>Récession mondiale prolongée réduisant la demande en VE de -15% en 2026</a:t>
+                        <a:t>Remontée des taux directeurs &gt; 200bps</a:t>
                       </a:r>
                     </a:p>
                   </a:txBody>
@@ -21853,7 +20631,7 @@
                           </a:solidFill>
                           <a:latin typeface="Calibri"/>
                         </a:rPr>
-                        <a:t>Subventions chinoises massives pour les VE locaux réduisant la part de marché de Tesla à &lt;10% en Chine</a:t>
+                        <a:t>Rupture technologique remettant en cause le modèle</a:t>
                       </a:r>
                     </a:p>
                   </a:txBody>
@@ -21924,7 +20702,7 @@
                           </a:solidFill>
                           <a:latin typeface="Calibri"/>
                         </a:rPr>
-                        <a:t>Retards majeurs sur le robotaxi ou rappels massifs de véhicules en 2025-2026</a:t>
+                        <a:t>Détérioration matérielle des marges opérationnelles</a:t>
                       </a:r>
                     </a:p>
                   </a:txBody>
@@ -22892,7 +21670,7 @@
                 </a:solidFill>
                 <a:latin typeface="Calibri"/>
               </a:rPr>
-              <a:t>Prix cible base : 380 $  ·  Upside : +10,7 %  ·  Bear : 290 $ (-15,5 %)  ·  Bull : 450 $ (+31,1 %)</a:t>
+              <a:t>Prix cible base : — $  ·  Upside : —  ·  Bear : — $ (—)  ·  Bull : — $ (—)</a:t>
             </a:r>
           </a:p>
         </p:txBody>
@@ -23048,7 +21826,7 @@
                 </a:solidFill>
                 <a:latin typeface="Calibri"/>
               </a:rPr>
-              <a:t>Intégration verticale</a:t>
+              <a:t>—</a:t>
             </a:r>
           </a:p>
         </p:txBody>
@@ -23083,7 +21861,7 @@
                 </a:solidFill>
                 <a:latin typeface="Calibri"/>
               </a:rPr>
-              <a:t>Tesla bénéficie d'un pipeline de produits disruptifs (Cybertruck, robotaxis) avec un potentiel de revenus additionnels de 20-30 Md$ d'ici 2027</a:t>
+              <a:t>—</a:t>
             </a:r>
           </a:p>
         </p:txBody>
@@ -23161,7 +21939,7 @@
                 </a:solidFill>
                 <a:latin typeface="Calibri"/>
               </a:rPr>
-              <a:t>Leadership IA/autopilot</a:t>
+              <a:t>—</a:t>
             </a:r>
           </a:p>
         </p:txBody>
@@ -23196,7 +21974,7 @@
                 </a:solidFill>
                 <a:latin typeface="Calibri"/>
               </a:rPr>
-              <a:t>La marge brute devrait se stabiliser à 22% d'ici 2027 grâce à l'amélioration du mix produit et la réduction des coûts de batterie</a:t>
+              <a:t>—</a:t>
             </a:r>
           </a:p>
         </p:txBody>
@@ -23274,7 +22052,7 @@
                 </a:solidFill>
                 <a:latin typeface="Calibri"/>
               </a:rPr>
-              <a:t>Écosystème fermé</a:t>
+              <a:t>—</a:t>
             </a:r>
           </a:p>
         </p:txBody>
@@ -23309,7 +22087,7 @@
                 </a:solidFill>
                 <a:latin typeface="Calibri"/>
               </a:rPr>
-              <a:t>Le lancement des robotaxis en 2026 pourrait générer un EBITDA supplémentaire de 15 Md$ annuel à maturité.</a:t>
+              <a:t>—</a:t>
             </a:r>
           </a:p>
         </p:txBody>
@@ -23465,7 +22243,7 @@
                 </a:solidFill>
                 <a:latin typeface="Calibri"/>
               </a:rPr>
-              <a:t>Concurrence chinoise</a:t>
+              <a:t>—</a:t>
             </a:r>
           </a:p>
         </p:txBody>
@@ -23500,7 +22278,7 @@
                 </a:solidFill>
                 <a:latin typeface="Calibri"/>
               </a:rPr>
-              <a:t>Guerre des prix VE en Chine : pression sur GM de -5pts d'ici 2026 avec risque de perte de part de marché | Régulation européenne stricte : coûts supplémentaires de 2 Md$ annuels pour</a:t>
+              <a:t>Impact potentiel sur la thèse d'investissement — surveillance recommandée sur les 6-12 prochains mois.</a:t>
             </a:r>
           </a:p>
         </p:txBody>
@@ -23578,7 +22356,7 @@
                 </a:solidFill>
                 <a:latin typeface="Calibri"/>
               </a:rPr>
-              <a:t>Régulation</a:t>
+              <a:t>—</a:t>
             </a:r>
           </a:p>
         </p:txBody>
@@ -23613,7 +22391,7 @@
                 </a:solidFill>
                 <a:latin typeface="Calibri"/>
               </a:rPr>
-              <a:t>Les marges sur les services (Superchargeur, abonnements) chutent de 12% depuis 2023, en raison d’une concurrence agressive de Electrify America et Ionity.</a:t>
+              <a:t>Impact potentiel sur la thèse d'investissement — surveillance recommandée sur les 6-12 prochains mois.</a:t>
             </a:r>
           </a:p>
         </p:txBody>
@@ -23691,7 +22469,7 @@
                 </a:solidFill>
                 <a:latin typeface="Calibri"/>
               </a:rPr>
-              <a:t>Exécution opérationnelle</a:t>
+              <a:t>—</a:t>
             </a:r>
           </a:p>
         </p:txBody>
@@ -23726,7 +22504,7 @@
                 </a:solidFill>
                 <a:latin typeface="Calibri"/>
               </a:rPr>
-              <a:t>Le ratio EV/EBITDA de 108,78x est le plus élevé du secteur, indiquant une surévaluation de 300% par rapport à Ford (28x).</a:t>
+              <a:t>Impact potentiel sur la thèse d'investissement — surveillance recommandée sur les 6-12 prochains mois.</a:t>
             </a:r>
           </a:p>
         </p:txBody>
@@ -23968,7 +22746,7 @@
                 </a:solidFill>
                 <a:latin typeface="Calibri"/>
               </a:rPr>
-              <a:t>Robotaxis 2026: Le lancement commercial des robotaxis en 2026</a:t>
+              <a:t>—</a:t>
             </a:r>
           </a:p>
         </p:txBody>
@@ -24046,7 +22824,7 @@
                 </a:solidFill>
                 <a:latin typeface="Calibri"/>
               </a:rPr>
-              <a:t>Gigafactory Berlin/T: L'augmentation de la capacité de</a:t>
+              <a:t>—</a:t>
             </a:r>
           </a:p>
         </p:txBody>
@@ -24139,7 +22917,7 @@
         </p:nvGraphicFramePr>
         <p:xfrm>
           <a:off x="4708800" y="3560400"/>
-          <a:ext cx="4068000" cy="396000"/>
+          <a:ext cx="4068000" cy="468000"/>
         </p:xfrm>
         <a:graphic>
           <a:graphicData uri="http://schemas.openxmlformats.org/drawingml/2006/table">
@@ -24152,7 +22930,7 @@
                 <a:gridCol w="1017000"/>
                 <a:gridCol w="1017000"/>
               </a:tblGrid>
-              <a:tr h="99000">
+              <a:tr h="117000">
                 <a:tc>
                   <a:txBody>
                     <a:bodyPr/>
@@ -24223,7 +23001,7 @@
                   </a:tcPr>
                 </a:tc>
               </a:tr>
-              <a:tr h="99000">
+              <a:tr h="117000">
                 <a:tc>
                   <a:txBody>
                     <a:bodyPr/>
@@ -24283,7 +23061,7 @@
                           </a:solidFill>
                           <a:latin typeface="Calibri"/>
                         </a:rPr>
-                        <a:t>-10,0x</a:t>
+                        <a:t>—</a:t>
                       </a:r>
                     </a:p>
                   </a:txBody>
@@ -24294,7 +23072,7 @@
                   </a:tcPr>
                 </a:tc>
               </a:tr>
-              <a:tr h="99000">
+              <a:tr h="117000">
                 <a:tc>
                   <a:txBody>
                     <a:bodyPr/>
@@ -24354,7 +23132,7 @@
                           </a:solidFill>
                           <a:latin typeface="Calibri"/>
                         </a:rPr>
-                        <a:t>-12,0x</a:t>
+                        <a:t>—</a:t>
                       </a:r>
                     </a:p>
                   </a:txBody>
@@ -24365,7 +23143,7 @@
                   </a:tcPr>
                 </a:tc>
               </a:tr>
-              <a:tr h="99000">
+              <a:tr h="117000">
                 <a:tc>
                   <a:txBody>
                     <a:bodyPr/>
@@ -24402,7 +23180,7 @@
                           </a:solidFill>
                           <a:latin typeface="Calibri"/>
                         </a:rPr>
-                        <a:t>380 $</a:t>
+                        <a:t>— $</a:t>
                       </a:r>
                     </a:p>
                   </a:txBody>
@@ -24425,7 +23203,7 @@
                           </a:solidFill>
                           <a:latin typeface="Calibri"/>
                         </a:rPr>
-                        <a:t>Upside +10,7 %</a:t>
+                        <a:t>Upside —</a:t>
                       </a:r>
                     </a:p>
                   </a:txBody>
@@ -24669,7 +23447,7 @@
                 </a:solidFill>
                 <a:latin typeface="Calibri"/>
               </a:rPr>
-              <a:t>vs -12,0x med. pairs</a:t>
+              <a:t>vs — med. pairs</a:t>
             </a:r>
           </a:p>
         </p:txBody>
@@ -24981,7 +23759,7 @@
                 </a:solidFill>
                 <a:latin typeface="Calibri"/>
               </a:rPr>
-              <a:t>380 $</a:t>
+              <a:t>— $</a:t>
             </a:r>
           </a:p>
         </p:txBody>
@@ -25051,7 +23829,7 @@
                 </a:solidFill>
                 <a:latin typeface="Calibri"/>
               </a:rPr>
-              <a:t>Upside +10,7 % vs cours</a:t>
+              <a:t>Upside — vs cours</a:t>
             </a:r>
           </a:p>
         </p:txBody>
@@ -27099,7 +25877,7 @@
                           </a:solidFill>
                           <a:latin typeface="Calibri"/>
                         </a:rPr>
-                        <a:t>Lancement robotaxis 2026 : potentiel EBITDA de 15 Md$ annuel à maturité avec marge &gt;30% | Croissance du segment énergie : CA +25% YoY d'ici 2027 grâce aux abonnements solaires | Expansion internationale : +40% du CA hors Amérique du Nord…</a:t>
+                        <a:t>Catalyseurs, croissance, résultats</a:t>
                       </a:r>
                     </a:p>
                   </a:txBody>
@@ -27287,7 +26065,7 @@
                           </a:solidFill>
                           <a:latin typeface="Calibri"/>
                         </a:rPr>
-                        <a:t>Guerre des prix VE en Chine : pression sur GM de -5pts d'ici 2026 avec risque de perte de part de marché | Régulation européenne stricte : coûts supplémentaires de 2 Md$ annuels pour conformité CO2 | Retards sur Cybertruck : surcoûts de 1…</a:t>
+                        <a:t>Risques macro, concurrence, dette</a:t>
                       </a:r>
                     </a:p>
                   </a:txBody>
@@ -27332,7 +26110,7 @@
                 </a:solidFill>
                 <a:latin typeface="Calibri"/>
               </a:rPr>
-              <a:t>La presse financière cette semaine dresse un bilan très négatif pour Tesla, marquée par des déceptions sur les livraisons et des perspectives de flux de trésorerie fortement révisées à la baisse. Les rares éléments positifs, comme l’alliance autour du projet Terafab, peinent à contrebalancer les signaux d’alerte majeurs.</a:t>
+              <a:t>La presse financière cette semaine dresse un bilan très négatif pour Tesla, marquée par des déceptions sur les livraisons et des perspectives de flux de trésorerie fortement dégradées. Les rares éléments positifs, comme l'implication dans les puces Terafab, peinent à contrebalancer les alertes majeures sur la santé financière de l'entreprise.</a:t>
             </a:r>
           </a:p>
         </p:txBody>
@@ -30240,127 +29018,6 @@
           </a:graphicData>
         </a:graphic>
       </p:graphicFrame>
-      <p:sp>
-        <p:nvSpPr>
-          <p:cNvPr id="21" name="Rectangle 20"/>
-          <p:cNvSpPr/>
-          <p:nvPr/>
-        </p:nvSpPr>
-        <p:spPr>
-          <a:xfrm>
-            <a:off x="367200" y="3326400"/>
-            <a:ext cx="8413200" cy="1443600"/>
-          </a:xfrm>
-          <a:prstGeom prst="rect">
-            <a:avLst/>
-          </a:prstGeom>
-          <a:solidFill>
-            <a:srgbClr val="F5F7FA"/>
-          </a:solidFill>
-          <a:ln>
-            <a:noFill/>
-          </a:ln>
-        </p:spPr>
-        <p:style>
-          <a:lnRef idx="1">
-            <a:schemeClr val="accent1"/>
-          </a:lnRef>
-          <a:fillRef idx="3">
-            <a:schemeClr val="accent1"/>
-          </a:fillRef>
-          <a:effectRef idx="2">
-            <a:schemeClr val="accent1"/>
-          </a:effectRef>
-          <a:fontRef idx="minor">
-            <a:schemeClr val="lt1"/>
-          </a:fontRef>
-        </p:style>
-        <p:txBody>
-          <a:bodyPr rtlCol="0" anchor="ctr"/>
-          <a:lstStyle/>
-          <a:p>
-            <a:pPr algn="ctr"/>
-          </a:p>
-        </p:txBody>
-      </p:sp>
-      <p:sp>
-        <p:nvSpPr>
-          <p:cNvPr id="22" name="Rectangle 21"/>
-          <p:cNvSpPr/>
-          <p:nvPr/>
-        </p:nvSpPr>
-        <p:spPr>
-          <a:xfrm>
-            <a:off x="367200" y="3326400"/>
-            <a:ext cx="79200" cy="1443600"/>
-          </a:xfrm>
-          <a:prstGeom prst="rect">
-            <a:avLst/>
-          </a:prstGeom>
-          <a:solidFill>
-            <a:srgbClr val="2E5FA3"/>
-          </a:solidFill>
-          <a:ln>
-            <a:noFill/>
-          </a:ln>
-        </p:spPr>
-        <p:style>
-          <a:lnRef idx="1">
-            <a:schemeClr val="accent1"/>
-          </a:lnRef>
-          <a:fillRef idx="3">
-            <a:schemeClr val="accent1"/>
-          </a:fillRef>
-          <a:effectRef idx="2">
-            <a:schemeClr val="accent1"/>
-          </a:effectRef>
-          <a:fontRef idx="minor">
-            <a:schemeClr val="lt1"/>
-          </a:fontRef>
-        </p:style>
-        <p:txBody>
-          <a:bodyPr rtlCol="0" anchor="ctr"/>
-          <a:lstStyle/>
-          <a:p>
-            <a:pPr algn="ctr"/>
-          </a:p>
-        </p:txBody>
-      </p:sp>
-      <p:sp>
-        <p:nvSpPr>
-          <p:cNvPr id="23" name="TextBox 22"/>
-          <p:cNvSpPr txBox="1"/>
-          <p:nvPr/>
-        </p:nvSpPr>
-        <p:spPr>
-          <a:xfrm>
-            <a:off x="475200" y="3355200"/>
-            <a:ext cx="8298000" cy="1407600"/>
-          </a:xfrm>
-          <a:prstGeom prst="rect">
-            <a:avLst/>
-          </a:prstGeom>
-          <a:noFill/>
-        </p:spPr>
-        <p:txBody>
-          <a:bodyPr wrap="square">
-            <a:spAutoFit/>
-          </a:bodyPr>
-          <a:lstStyle/>
-          <a:p>
-            <a:pPr algn="l"/>
-            <a:r>
-              <a:rPr sz="850" b="0" i="0">
-                <a:solidFill>
-                  <a:srgbClr val="555555"/>
-                </a:solidFill>
-                <a:latin typeface="Calibri"/>
-              </a:rPr>
-              <a:t>Tesla se négocie à des multiples extrêmes (EV/EBITDA 108.8x, P/E 339.5x) reflétant une prime de croissance et de technologie. La décote par rapport à sa prime historique suggère une attente de catalyseurs concrets pour justifier ces niveaux. Tesla affiche une prime de 120% sur l'EV/EBITDA médiane peers (108.8x vs ~49x) et de 280% sur le P/E (339.5x vs ~120x), justifiée par sa croissance supérieure et son avance technologique. Une convergence vers la médiane peers impliquerait un downside de ~30%, tandis qu'une prime maintenue nécessiterait une exécution impeccable sur les nouveaux segments. Tesla bénéficie d'un pipeline de produits disruptifs (Cybertruck, robotaxis) avec un potentiel de revenus additionnels de 20-30 Md$ d'ici 2027 La marge brute devrait se stabiliser à 22% d'ici 2027 grâce à l'amélioration du mix produit et la réduction des coûts de batterie Le lancement des robotaxis en 2026 pourrait générer un EBITDA supplémentaire de 15 Md$ annuel à maturité. Tesla affiche une résilience opérationnelle malgré un environnement concurrentiel intense et une pression sur les marges. La valorisation reste élevée, mais des catalyseurs structurels (IA, robotaxis) pourraient justifier une prime à long terme.</a:t>
-            </a:r>
-          </a:p>
-        </p:txBody>
-      </p:sp>
     </p:spTree>
   </p:cSld>
   <p:clrMapOvr>
@@ -31643,127 +30300,6 @@
           </a:prstGeom>
         </p:spPr>
       </p:pic>
-      <p:sp>
-        <p:nvSpPr>
-          <p:cNvPr id="35" name="Rectangle 34"/>
-          <p:cNvSpPr/>
-          <p:nvPr/>
-        </p:nvSpPr>
-        <p:spPr>
-          <a:xfrm>
-            <a:off x="367200" y="4158000"/>
-            <a:ext cx="8413200" cy="648000"/>
-          </a:xfrm>
-          <a:prstGeom prst="rect">
-            <a:avLst/>
-          </a:prstGeom>
-          <a:solidFill>
-            <a:srgbClr val="F5F7FA"/>
-          </a:solidFill>
-          <a:ln>
-            <a:noFill/>
-          </a:ln>
-        </p:spPr>
-        <p:style>
-          <a:lnRef idx="1">
-            <a:schemeClr val="accent1"/>
-          </a:lnRef>
-          <a:fillRef idx="3">
-            <a:schemeClr val="accent1"/>
-          </a:fillRef>
-          <a:effectRef idx="2">
-            <a:schemeClr val="accent1"/>
-          </a:effectRef>
-          <a:fontRef idx="minor">
-            <a:schemeClr val="lt1"/>
-          </a:fontRef>
-        </p:style>
-        <p:txBody>
-          <a:bodyPr rtlCol="0" anchor="ctr"/>
-          <a:lstStyle/>
-          <a:p>
-            <a:pPr algn="ctr"/>
-          </a:p>
-        </p:txBody>
-      </p:sp>
-      <p:sp>
-        <p:nvSpPr>
-          <p:cNvPr id="36" name="Rectangle 35"/>
-          <p:cNvSpPr/>
-          <p:nvPr/>
-        </p:nvSpPr>
-        <p:spPr>
-          <a:xfrm>
-            <a:off x="367200" y="4158000"/>
-            <a:ext cx="79200" cy="648000"/>
-          </a:xfrm>
-          <a:prstGeom prst="rect">
-            <a:avLst/>
-          </a:prstGeom>
-          <a:solidFill>
-            <a:srgbClr val="2E5FA3"/>
-          </a:solidFill>
-          <a:ln>
-            <a:noFill/>
-          </a:ln>
-        </p:spPr>
-        <p:style>
-          <a:lnRef idx="1">
-            <a:schemeClr val="accent1"/>
-          </a:lnRef>
-          <a:fillRef idx="3">
-            <a:schemeClr val="accent1"/>
-          </a:fillRef>
-          <a:effectRef idx="2">
-            <a:schemeClr val="accent1"/>
-          </a:effectRef>
-          <a:fontRef idx="minor">
-            <a:schemeClr val="lt1"/>
-          </a:fontRef>
-        </p:style>
-        <p:txBody>
-          <a:bodyPr rtlCol="0" anchor="ctr"/>
-          <a:lstStyle/>
-          <a:p>
-            <a:pPr algn="ctr"/>
-          </a:p>
-        </p:txBody>
-      </p:sp>
-      <p:sp>
-        <p:nvSpPr>
-          <p:cNvPr id="37" name="TextBox 36"/>
-          <p:cNvSpPr txBox="1"/>
-          <p:nvPr/>
-        </p:nvSpPr>
-        <p:spPr>
-          <a:xfrm>
-            <a:off x="475200" y="4186800"/>
-            <a:ext cx="8298000" cy="612000"/>
-          </a:xfrm>
-          <a:prstGeom prst="rect">
-            <a:avLst/>
-          </a:prstGeom>
-          <a:noFill/>
-        </p:spPr>
-        <p:txBody>
-          <a:bodyPr wrap="square">
-            <a:spAutoFit/>
-          </a:bodyPr>
-          <a:lstStyle/>
-          <a:p>
-            <a:pPr algn="l"/>
-            <a:r>
-              <a:rPr sz="850" b="0" i="0">
-                <a:solidFill>
-                  <a:srgbClr val="555555"/>
-                </a:solidFill>
-                <a:latin typeface="Calibri"/>
-              </a:rPr>
-              <a:t>Tesla affiche une résilience opérationnelle malgré un environnement concurrentiel intense et une pression sur les marges. La valorisation reste élevée, mais des catalyseurs structurels (IA, robotaxis) pourraient justifier une prime à long terme.</a:t>
-            </a:r>
-          </a:p>
-        </p:txBody>
-      </p:sp>
     </p:spTree>
   </p:cSld>
   <p:clrMapOvr>
@@ -32473,7 +31009,7 @@
                 </a:solidFill>
                 <a:latin typeface="Calibri"/>
               </a:rPr>
-              <a:t>Conviction : 55%</a:t>
+              <a:t>Conviction : 50%</a:t>
             </a:r>
           </a:p>
         </p:txBody>
@@ -32565,7 +31101,7 @@
         <p:spPr>
           <a:xfrm>
             <a:off x="324000" y="2196000"/>
-            <a:ext cx="1485000" cy="198000"/>
+            <a:ext cx="1350000" cy="198000"/>
           </a:xfrm>
           <a:prstGeom prst="rect">
             <a:avLst/>
@@ -32707,7 +31243,7 @@
                 </a:solidFill>
                 <a:latin typeface="Calibri"/>
               </a:rPr>
-              <a:t>Delta conviction : +5% vs Avocat du Diable</a:t>
+              <a:t>Delta conviction : +0% vs Avocat du Diable</a:t>
             </a:r>
           </a:p>
         </p:txBody>
@@ -32863,7 +31399,7 @@
                 </a:solidFill>
                 <a:latin typeface="Calibri"/>
               </a:rPr>
-              <a:t>Tesla bénéficie d'un pipeline de produits disruptifs (Cybertruck, robotaxis) avec un potentiel de revenus additionnels de 20-30 Md$ d'ici 2027</a:t>
+              <a:t>Donnees de synthese non disponibles pour Tesla, Inc.. Relancer l'analyse pour obtenir la these complete.</a:t>
             </a:r>
           </a:p>
         </p:txBody>
@@ -32876,163 +31412,7 @@
         </p:nvSpPr>
         <p:spPr>
           <a:xfrm>
-            <a:off x="3311999" y="1404000"/>
-            <a:ext cx="36000" cy="288000"/>
-          </a:xfrm>
-          <a:prstGeom prst="rect">
-            <a:avLst/>
-          </a:prstGeom>
-          <a:solidFill>
-            <a:srgbClr val="B06000"/>
-          </a:solidFill>
-          <a:ln>
-            <a:noFill/>
-          </a:ln>
-        </p:spPr>
-        <p:style>
-          <a:lnRef idx="1">
-            <a:schemeClr val="accent1"/>
-          </a:lnRef>
-          <a:fillRef idx="3">
-            <a:schemeClr val="accent1"/>
-          </a:fillRef>
-          <a:effectRef idx="2">
-            <a:schemeClr val="accent1"/>
-          </a:effectRef>
-          <a:fontRef idx="minor">
-            <a:schemeClr val="lt1"/>
-          </a:fontRef>
-        </p:style>
-        <p:txBody>
-          <a:bodyPr rtlCol="0" anchor="ctr"/>
-          <a:lstStyle/>
-          <a:p>
-            <a:pPr algn="ctr"/>
-          </a:p>
-        </p:txBody>
-      </p:sp>
-      <p:sp>
-        <p:nvSpPr>
-          <p:cNvPr id="31" name="TextBox 30"/>
-          <p:cNvSpPr txBox="1"/>
-          <p:nvPr/>
-        </p:nvSpPr>
-        <p:spPr>
-          <a:xfrm>
-            <a:off x="3401999" y="1422000"/>
-            <a:ext cx="5346000" cy="270000"/>
-          </a:xfrm>
-          <a:prstGeom prst="rect">
-            <a:avLst/>
-          </a:prstGeom>
-          <a:noFill/>
-        </p:spPr>
-        <p:txBody>
-          <a:bodyPr wrap="square">
-            <a:spAutoFit/>
-          </a:bodyPr>
-          <a:lstStyle/>
-          <a:p>
-            <a:pPr algn="l"/>
-            <a:r>
-              <a:rPr sz="850" b="0" i="0">
-                <a:solidFill>
-                  <a:srgbClr val="555555"/>
-                </a:solidFill>
-                <a:latin typeface="Calibri"/>
-              </a:rPr>
-              <a:t>La marge brute devrait se stabiliser à 22% d'ici 2027 grâce à l'amélioration du mix produit et la réduction des coûts de batterie</a:t>
-            </a:r>
-          </a:p>
-        </p:txBody>
-      </p:sp>
-      <p:sp>
-        <p:nvSpPr>
-          <p:cNvPr id="32" name="Rectangle 31"/>
-          <p:cNvSpPr/>
-          <p:nvPr/>
-        </p:nvSpPr>
-        <p:spPr>
-          <a:xfrm>
-            <a:off x="3311999" y="1746000"/>
-            <a:ext cx="36000" cy="288000"/>
-          </a:xfrm>
-          <a:prstGeom prst="rect">
-            <a:avLst/>
-          </a:prstGeom>
-          <a:solidFill>
-            <a:srgbClr val="B06000"/>
-          </a:solidFill>
-          <a:ln>
-            <a:noFill/>
-          </a:ln>
-        </p:spPr>
-        <p:style>
-          <a:lnRef idx="1">
-            <a:schemeClr val="accent1"/>
-          </a:lnRef>
-          <a:fillRef idx="3">
-            <a:schemeClr val="accent1"/>
-          </a:fillRef>
-          <a:effectRef idx="2">
-            <a:schemeClr val="accent1"/>
-          </a:effectRef>
-          <a:fontRef idx="minor">
-            <a:schemeClr val="lt1"/>
-          </a:fontRef>
-        </p:style>
-        <p:txBody>
-          <a:bodyPr rtlCol="0" anchor="ctr"/>
-          <a:lstStyle/>
-          <a:p>
-            <a:pPr algn="ctr"/>
-          </a:p>
-        </p:txBody>
-      </p:sp>
-      <p:sp>
-        <p:nvSpPr>
-          <p:cNvPr id="33" name="TextBox 32"/>
-          <p:cNvSpPr txBox="1"/>
-          <p:nvPr/>
-        </p:nvSpPr>
-        <p:spPr>
-          <a:xfrm>
-            <a:off x="3401999" y="1764000"/>
-            <a:ext cx="5346000" cy="270000"/>
-          </a:xfrm>
-          <a:prstGeom prst="rect">
-            <a:avLst/>
-          </a:prstGeom>
-          <a:noFill/>
-        </p:spPr>
-        <p:txBody>
-          <a:bodyPr wrap="square">
-            <a:spAutoFit/>
-          </a:bodyPr>
-          <a:lstStyle/>
-          <a:p>
-            <a:pPr algn="l"/>
-            <a:r>
-              <a:rPr sz="850" b="0" i="0">
-                <a:solidFill>
-                  <a:srgbClr val="555555"/>
-                </a:solidFill>
-                <a:latin typeface="Calibri"/>
-              </a:rPr>
-              <a:t>Le lancement des robotaxis en 2026 pourrait générer un EBITDA supplémentaire de 15 Md$ annuel à maturité.</a:t>
-            </a:r>
-          </a:p>
-        </p:txBody>
-      </p:sp>
-      <p:sp>
-        <p:nvSpPr>
-          <p:cNvPr id="34" name="Rectangle 33"/>
-          <p:cNvSpPr/>
-          <p:nvPr/>
-        </p:nvSpPr>
-        <p:spPr>
-          <a:xfrm>
-            <a:off x="3311999" y="2196000"/>
+            <a:off x="3311999" y="2142000"/>
             <a:ext cx="2664000" cy="180000"/>
           </a:xfrm>
           <a:prstGeom prst="rect">
@@ -33069,13 +31449,13 @@
       </p:sp>
       <p:sp>
         <p:nvSpPr>
-          <p:cNvPr id="35" name="TextBox 34"/>
+          <p:cNvPr id="31" name="TextBox 30"/>
           <p:cNvSpPr txBox="1"/>
           <p:nvPr/>
         </p:nvSpPr>
         <p:spPr>
           <a:xfrm>
-            <a:off x="3366000" y="2214000"/>
+            <a:off x="3366000" y="2160000"/>
             <a:ext cx="2592000" cy="144000"/>
           </a:xfrm>
           <a:prstGeom prst="rect">
@@ -33104,13 +31484,13 @@
       </p:sp>
       <p:sp>
         <p:nvSpPr>
-          <p:cNvPr id="36" name="TextBox 35"/>
+          <p:cNvPr id="32" name="TextBox 31"/>
           <p:cNvSpPr txBox="1"/>
           <p:nvPr/>
         </p:nvSpPr>
         <p:spPr>
           <a:xfrm>
-            <a:off x="3401999" y="2412000"/>
+            <a:off x="3401999" y="2358000"/>
             <a:ext cx="2556000" cy="234000"/>
           </a:xfrm>
           <a:prstGeom prst="rect">
@@ -33132,20 +31512,20 @@
                 </a:solidFill>
                 <a:latin typeface="Calibri"/>
               </a:rPr>
-              <a:t>• Lancement robotaxis 2026 : potentiel EBITDA de 15 Md$ annuel à maturité avec marge &gt;30% |</a:t>
+              <a:t>• N/D</a:t>
             </a:r>
           </a:p>
         </p:txBody>
       </p:sp>
       <p:sp>
         <p:nvSpPr>
-          <p:cNvPr id="37" name="Rectangle 36"/>
+          <p:cNvPr id="33" name="Rectangle 32"/>
           <p:cNvSpPr/>
           <p:nvPr/>
         </p:nvSpPr>
         <p:spPr>
           <a:xfrm>
-            <a:off x="6120000" y="2196000"/>
+            <a:off x="6120000" y="2142000"/>
             <a:ext cx="2448000" cy="180000"/>
           </a:xfrm>
           <a:prstGeom prst="rect">
@@ -33182,13 +31562,13 @@
       </p:sp>
       <p:sp>
         <p:nvSpPr>
-          <p:cNvPr id="38" name="TextBox 37"/>
+          <p:cNvPr id="34" name="TextBox 33"/>
           <p:cNvSpPr txBox="1"/>
           <p:nvPr/>
         </p:nvSpPr>
         <p:spPr>
           <a:xfrm>
-            <a:off x="6156000" y="2214000"/>
+            <a:off x="6156000" y="2160000"/>
             <a:ext cx="2376000" cy="144000"/>
           </a:xfrm>
           <a:prstGeom prst="rect">
@@ -33217,13 +31597,13 @@
       </p:sp>
       <p:sp>
         <p:nvSpPr>
-          <p:cNvPr id="39" name="TextBox 38"/>
+          <p:cNvPr id="35" name="TextBox 34"/>
           <p:cNvSpPr txBox="1"/>
           <p:nvPr/>
         </p:nvSpPr>
         <p:spPr>
           <a:xfrm>
-            <a:off x="6156000" y="2412000"/>
+            <a:off x="6156000" y="2358000"/>
             <a:ext cx="2376000" cy="234000"/>
           </a:xfrm>
           <a:prstGeom prst="rect">
@@ -33245,135 +31625,14 @@
                 </a:solidFill>
                 <a:latin typeface="Calibri"/>
               </a:rPr>
-              <a:t>• Guerre des prix VE en Chine : pression sur GM de -5pts d'ici 2026 avec risque de perte de part de</a:t>
+              <a:t>• N/D</a:t>
             </a:r>
           </a:p>
         </p:txBody>
       </p:sp>
       <p:sp>
         <p:nvSpPr>
-          <p:cNvPr id="40" name="Rectangle 39"/>
-          <p:cNvSpPr/>
-          <p:nvPr/>
-        </p:nvSpPr>
-        <p:spPr>
-          <a:xfrm>
-            <a:off x="3311999" y="2815200"/>
-            <a:ext cx="5472000" cy="216000"/>
-          </a:xfrm>
-          <a:prstGeom prst="rect">
-            <a:avLst/>
-          </a:prstGeom>
-          <a:solidFill>
-            <a:srgbClr val="FFF3CD"/>
-          </a:solidFill>
-          <a:ln>
-            <a:noFill/>
-          </a:ln>
-        </p:spPr>
-        <p:style>
-          <a:lnRef idx="1">
-            <a:schemeClr val="accent1"/>
-          </a:lnRef>
-          <a:fillRef idx="3">
-            <a:schemeClr val="accent1"/>
-          </a:fillRef>
-          <a:effectRef idx="2">
-            <a:schemeClr val="accent1"/>
-          </a:effectRef>
-          <a:fontRef idx="minor">
-            <a:schemeClr val="lt1"/>
-          </a:fontRef>
-        </p:style>
-        <p:txBody>
-          <a:bodyPr rtlCol="0" anchor="ctr"/>
-          <a:lstStyle/>
-          <a:p>
-            <a:pPr algn="ctr"/>
-          </a:p>
-        </p:txBody>
-      </p:sp>
-      <p:sp>
-        <p:nvSpPr>
-          <p:cNvPr id="41" name="Rectangle 40"/>
-          <p:cNvSpPr/>
-          <p:nvPr/>
-        </p:nvSpPr>
-        <p:spPr>
-          <a:xfrm>
-            <a:off x="3311999" y="2815200"/>
-            <a:ext cx="36000" cy="216000"/>
-          </a:xfrm>
-          <a:prstGeom prst="rect">
-            <a:avLst/>
-          </a:prstGeom>
-          <a:solidFill>
-            <a:srgbClr val="B06000"/>
-          </a:solidFill>
-          <a:ln>
-            <a:noFill/>
-          </a:ln>
-        </p:spPr>
-        <p:style>
-          <a:lnRef idx="1">
-            <a:schemeClr val="accent1"/>
-          </a:lnRef>
-          <a:fillRef idx="3">
-            <a:schemeClr val="accent1"/>
-          </a:fillRef>
-          <a:effectRef idx="2">
-            <a:schemeClr val="accent1"/>
-          </a:effectRef>
-          <a:fontRef idx="minor">
-            <a:schemeClr val="lt1"/>
-          </a:fontRef>
-        </p:style>
-        <p:txBody>
-          <a:bodyPr rtlCol="0" anchor="ctr"/>
-          <a:lstStyle/>
-          <a:p>
-            <a:pPr algn="ctr"/>
-          </a:p>
-        </p:txBody>
-      </p:sp>
-      <p:sp>
-        <p:nvSpPr>
-          <p:cNvPr id="42" name="TextBox 41"/>
-          <p:cNvSpPr txBox="1"/>
-          <p:nvPr/>
-        </p:nvSpPr>
-        <p:spPr>
-          <a:xfrm>
-            <a:off x="3401999" y="2833200"/>
-            <a:ext cx="5310000" cy="180000"/>
-          </a:xfrm>
-          <a:prstGeom prst="rect">
-            <a:avLst/>
-          </a:prstGeom>
-          <a:noFill/>
-        </p:spPr>
-        <p:txBody>
-          <a:bodyPr wrap="square">
-            <a:spAutoFit/>
-          </a:bodyPr>
-          <a:lstStyle/>
-          <a:p>
-            <a:pPr algn="l"/>
-            <a:r>
-              <a:rPr sz="750" b="0" i="0">
-                <a:solidFill>
-                  <a:srgbClr val="7A5000"/>
-                </a:solidFill>
-                <a:latin typeface="Calibri"/>
-              </a:rPr>
-              <a:t>⚠ Conditions d’invalidation : Macro: Récession mondiale prolongée réduisant la demande en VE de -  ·  Sectoriel: Subventions chinoises massives pour les VE locaux réduisant </a:t>
-            </a:r>
-          </a:p>
-        </p:txBody>
-      </p:sp>
-      <p:sp>
-        <p:nvSpPr>
-          <p:cNvPr id="43" name="TextBox 42"/>
+          <p:cNvPr id="36" name="TextBox 35"/>
           <p:cNvSpPr txBox="1"/>
           <p:nvPr/>
         </p:nvSpPr>
@@ -34444,7 +32703,7 @@
                 </a:solidFill>
                 <a:latin typeface="Calibri"/>
               </a:rPr>
-              <a:t>Concurrence chinoise  ·  Régulation</a:t>
+              <a:t>Risques structurels &amp; thèse contraire</a:t>
             </a:r>
           </a:p>
         </p:txBody>
@@ -35678,64 +33937,21 @@
                 </a:solidFill>
                 <a:latin typeface="Calibri"/>
               </a:rPr>
-              <a:t>Tesla, Inc. conçoit, produit et vend des véhicules électriques haut de gamme ainsi que des solutions de stockage d'énergie et des panneaux solaires. Positionné comme leader technologique avec une intégration verticale unique (batteries, logiciels, bornes), le groupe mise sur l'innovation pour consolider son avantage concurrentiel face à la concurrence chinoise et traditionnelle. Son écosystème intégré et son avance en IA/autopilot renforcent sa différenciation sur le marché des mobilités durables. L'entreprise articule son activité autour de deux segments stratégiques :</a:t>
+              <a:t>Tesla, Inc. (TSLA) opere dans le secteur Consumer Cyclical. Analyse FinSight IA en cours -- donnees de synthese non disponibles pour cette session. Lancer une nouvelle analyse pour obtenir la description complete, les segments et le positionnement strategique.</a:t>
             </a:r>
           </a:p>
         </p:txBody>
       </p:sp>
       <p:sp>
         <p:nvSpPr>
-          <p:cNvPr id="20" name="Rectangle 19"/>
-          <p:cNvSpPr/>
-          <p:nvPr/>
-        </p:nvSpPr>
-        <p:spPr>
-          <a:xfrm>
-            <a:off x="503999" y="2599200"/>
-            <a:ext cx="64800" cy="64800"/>
-          </a:xfrm>
-          <a:prstGeom prst="rect">
-            <a:avLst/>
-          </a:prstGeom>
-          <a:solidFill>
-            <a:srgbClr val="2E5FA3"/>
-          </a:solidFill>
-          <a:ln>
-            <a:noFill/>
-          </a:ln>
-        </p:spPr>
-        <p:style>
-          <a:lnRef idx="1">
-            <a:schemeClr val="accent1"/>
-          </a:lnRef>
-          <a:fillRef idx="3">
-            <a:schemeClr val="accent1"/>
-          </a:fillRef>
-          <a:effectRef idx="2">
-            <a:schemeClr val="accent1"/>
-          </a:effectRef>
-          <a:fontRef idx="minor">
-            <a:schemeClr val="lt1"/>
-          </a:fontRef>
-        </p:style>
-        <p:txBody>
-          <a:bodyPr rtlCol="0" anchor="ctr"/>
-          <a:lstStyle/>
-          <a:p>
-            <a:pPr algn="ctr"/>
-          </a:p>
-        </p:txBody>
-      </p:sp>
-      <p:sp>
-        <p:nvSpPr>
-          <p:cNvPr id="21" name="TextBox 20"/>
+          <p:cNvPr id="20" name="TextBox 19"/>
           <p:cNvSpPr txBox="1"/>
           <p:nvPr/>
         </p:nvSpPr>
         <p:spPr>
           <a:xfrm>
-            <a:off x="619200" y="2556000"/>
-            <a:ext cx="4338000" cy="165600"/>
+            <a:off x="503999" y="2358000"/>
+            <a:ext cx="4662000" cy="183600"/>
           </a:xfrm>
           <a:prstGeom prst="rect">
             <a:avLst/>
@@ -35750,168 +33966,20 @@
           <a:p>
             <a:pPr algn="l"/>
             <a:r>
-              <a:rPr sz="850" b="1" i="0">
+              <a:rPr sz="900" b="1" i="0">
                 <a:solidFill>
-                  <a:srgbClr val="0D0D0D"/>
+                  <a:srgbClr val="1B3A6B"/>
                 </a:solidFill>
                 <a:latin typeface="Calibri"/>
               </a:rPr>
-              <a:t>Véhicules électriques</a:t>
+              <a:t>Positionnement stratégique</a:t>
             </a:r>
           </a:p>
         </p:txBody>
       </p:sp>
       <p:sp>
         <p:nvSpPr>
-          <p:cNvPr id="22" name="TextBox 21"/>
-          <p:cNvSpPr txBox="1"/>
-          <p:nvPr/>
-        </p:nvSpPr>
-        <p:spPr>
-          <a:xfrm>
-            <a:off x="619200" y="2714400"/>
-            <a:ext cx="4338000" cy="503999"/>
-          </a:xfrm>
-          <a:prstGeom prst="rect">
-            <a:avLst/>
-          </a:prstGeom>
-          <a:noFill/>
-        </p:spPr>
-        <p:txBody>
-          <a:bodyPr wrap="square">
-            <a:spAutoFit/>
-          </a:bodyPr>
-          <a:lstStyle/>
-          <a:p>
-            <a:pPr algn="l"/>
-            <a:r>
-              <a:rPr sz="750" b="0" i="1">
-                <a:solidFill>
-                  <a:srgbClr val="555555"/>
-                </a:solidFill>
-                <a:latin typeface="Calibri"/>
-              </a:rPr>
-              <a:t>Segment principal générant 90% du CA, axé sur la vente de modèles haut de gamme (Model Y, Model 3, Cybertruck) avec une stratégie de prix premium et une production optimisée via Gigafactories. Clients cibles : particuliers aisés et entreprises pour flottes. Croissance tirée par l'expansion géographique et l'amélioration des marges via l'automatisation et les économies d'échelle.</a:t>
-            </a:r>
-          </a:p>
-        </p:txBody>
-      </p:sp>
-      <p:sp>
-        <p:nvSpPr>
-          <p:cNvPr id="23" name="Rectangle 22"/>
-          <p:cNvSpPr/>
-          <p:nvPr/>
-        </p:nvSpPr>
-        <p:spPr>
-          <a:xfrm>
-            <a:off x="503999" y="3301199"/>
-            <a:ext cx="64800" cy="64800"/>
-          </a:xfrm>
-          <a:prstGeom prst="rect">
-            <a:avLst/>
-          </a:prstGeom>
-          <a:solidFill>
-            <a:srgbClr val="2E5FA3"/>
-          </a:solidFill>
-          <a:ln>
-            <a:noFill/>
-          </a:ln>
-        </p:spPr>
-        <p:style>
-          <a:lnRef idx="1">
-            <a:schemeClr val="accent1"/>
-          </a:lnRef>
-          <a:fillRef idx="3">
-            <a:schemeClr val="accent1"/>
-          </a:fillRef>
-          <a:effectRef idx="2">
-            <a:schemeClr val="accent1"/>
-          </a:effectRef>
-          <a:fontRef idx="minor">
-            <a:schemeClr val="lt1"/>
-          </a:fontRef>
-        </p:style>
-        <p:txBody>
-          <a:bodyPr rtlCol="0" anchor="ctr"/>
-          <a:lstStyle/>
-          <a:p>
-            <a:pPr algn="ctr"/>
-          </a:p>
-        </p:txBody>
-      </p:sp>
-      <p:sp>
-        <p:nvSpPr>
-          <p:cNvPr id="24" name="TextBox 23"/>
-          <p:cNvSpPr txBox="1"/>
-          <p:nvPr/>
-        </p:nvSpPr>
-        <p:spPr>
-          <a:xfrm>
-            <a:off x="619200" y="3257999"/>
-            <a:ext cx="4338000" cy="165600"/>
-          </a:xfrm>
-          <a:prstGeom prst="rect">
-            <a:avLst/>
-          </a:prstGeom>
-          <a:noFill/>
-        </p:spPr>
-        <p:txBody>
-          <a:bodyPr wrap="square">
-            <a:spAutoFit/>
-          </a:bodyPr>
-          <a:lstStyle/>
-          <a:p>
-            <a:pPr algn="l"/>
-            <a:r>
-              <a:rPr sz="850" b="1" i="0">
-                <a:solidFill>
-                  <a:srgbClr val="0D0D0D"/>
-                </a:solidFill>
-                <a:latin typeface="Calibri"/>
-              </a:rPr>
-              <a:t>Énergie et services</a:t>
-            </a:r>
-          </a:p>
-        </p:txBody>
-      </p:sp>
-      <p:sp>
-        <p:nvSpPr>
-          <p:cNvPr id="25" name="TextBox 24"/>
-          <p:cNvSpPr txBox="1"/>
-          <p:nvPr/>
-        </p:nvSpPr>
-        <p:spPr>
-          <a:xfrm>
-            <a:off x="619200" y="3416399"/>
-            <a:ext cx="4338000" cy="503999"/>
-          </a:xfrm>
-          <a:prstGeom prst="rect">
-            <a:avLst/>
-          </a:prstGeom>
-          <a:noFill/>
-        </p:spPr>
-        <p:txBody>
-          <a:bodyPr wrap="square">
-            <a:spAutoFit/>
-          </a:bodyPr>
-          <a:lstStyle/>
-          <a:p>
-            <a:pPr algn="l"/>
-            <a:r>
-              <a:rPr sz="750" b="0" i="1">
-                <a:solidFill>
-                  <a:srgbClr val="555555"/>
-                </a:solidFill>
-                <a:latin typeface="Calibri"/>
-              </a:rPr>
-              <a:t>Comprend les batteries Powerwall/Powerpack, les solutions solaires et le réseau de Superchargeurs. Modèle de revenus récurrents via abonnements (énergie) et services premium (bornes). Clients : ménages, entreprises et collectivités. Croissance portée par la demande en stockage d'énergie et l'électrification des réseaux.</a:t>
-            </a:r>
-          </a:p>
-        </p:txBody>
-      </p:sp>
-      <p:sp>
-        <p:nvSpPr>
-          <p:cNvPr id="26" name="Rectangle 25"/>
+          <p:cNvPr id="21" name="Rectangle 20"/>
           <p:cNvSpPr/>
           <p:nvPr/>
         </p:nvSpPr>
@@ -35954,7 +34022,7 @@
       </p:sp>
       <p:sp>
         <p:nvSpPr>
-          <p:cNvPr id="27" name="Rectangle 26"/>
+          <p:cNvPr id="22" name="Rectangle 21"/>
           <p:cNvSpPr/>
           <p:nvPr/>
         </p:nvSpPr>
@@ -35997,7 +34065,7 @@
       </p:sp>
       <p:sp>
         <p:nvSpPr>
-          <p:cNvPr id="28" name="TextBox 27"/>
+          <p:cNvPr id="23" name="TextBox 22"/>
           <p:cNvSpPr txBox="1"/>
           <p:nvPr/>
         </p:nvSpPr>
@@ -36032,7 +34100,7 @@
       </p:sp>
       <p:sp>
         <p:nvSpPr>
-          <p:cNvPr id="29" name="TextBox 28"/>
+          <p:cNvPr id="24" name="TextBox 23"/>
           <p:cNvSpPr txBox="1"/>
           <p:nvPr/>
         </p:nvSpPr>
@@ -36067,7 +34135,7 @@
       </p:sp>
       <p:sp>
         <p:nvSpPr>
-          <p:cNvPr id="30" name="Rectangle 29"/>
+          <p:cNvPr id="25" name="Rectangle 24"/>
           <p:cNvSpPr/>
           <p:nvPr/>
         </p:nvSpPr>
@@ -36110,7 +34178,7 @@
       </p:sp>
       <p:sp>
         <p:nvSpPr>
-          <p:cNvPr id="31" name="Rectangle 30"/>
+          <p:cNvPr id="26" name="Rectangle 25"/>
           <p:cNvSpPr/>
           <p:nvPr/>
         </p:nvSpPr>
@@ -36153,7 +34221,7 @@
       </p:sp>
       <p:sp>
         <p:nvSpPr>
-          <p:cNvPr id="32" name="TextBox 31"/>
+          <p:cNvPr id="27" name="TextBox 26"/>
           <p:cNvSpPr txBox="1"/>
           <p:nvPr/>
         </p:nvSpPr>
@@ -36188,7 +34256,7 @@
       </p:sp>
       <p:sp>
         <p:nvSpPr>
-          <p:cNvPr id="33" name="TextBox 32"/>
+          <p:cNvPr id="28" name="TextBox 27"/>
           <p:cNvSpPr txBox="1"/>
           <p:nvPr/>
         </p:nvSpPr>
@@ -36223,7 +34291,7 @@
       </p:sp>
       <p:sp>
         <p:nvSpPr>
-          <p:cNvPr id="34" name="Rectangle 33"/>
+          <p:cNvPr id="29" name="Rectangle 28"/>
           <p:cNvSpPr/>
           <p:nvPr/>
         </p:nvSpPr>
@@ -36266,7 +34334,7 @@
       </p:sp>
       <p:sp>
         <p:nvSpPr>
-          <p:cNvPr id="35" name="Rectangle 34"/>
+          <p:cNvPr id="30" name="Rectangle 29"/>
           <p:cNvSpPr/>
           <p:nvPr/>
         </p:nvSpPr>
@@ -36309,7 +34377,7 @@
       </p:sp>
       <p:sp>
         <p:nvSpPr>
-          <p:cNvPr id="36" name="TextBox 35"/>
+          <p:cNvPr id="31" name="TextBox 30"/>
           <p:cNvSpPr txBox="1"/>
           <p:nvPr/>
         </p:nvSpPr>
@@ -36344,7 +34412,7 @@
       </p:sp>
       <p:sp>
         <p:nvSpPr>
-          <p:cNvPr id="37" name="TextBox 36"/>
+          <p:cNvPr id="32" name="TextBox 31"/>
           <p:cNvSpPr txBox="1"/>
           <p:nvPr/>
         </p:nvSpPr>
@@ -36379,7 +34447,7 @@
       </p:sp>
       <p:sp>
         <p:nvSpPr>
-          <p:cNvPr id="38" name="Rectangle 37"/>
+          <p:cNvPr id="33" name="Rectangle 32"/>
           <p:cNvSpPr/>
           <p:nvPr/>
         </p:nvSpPr>
@@ -36422,7 +34490,7 @@
       </p:sp>
       <p:sp>
         <p:nvSpPr>
-          <p:cNvPr id="39" name="Rectangle 38"/>
+          <p:cNvPr id="34" name="Rectangle 33"/>
           <p:cNvSpPr/>
           <p:nvPr/>
         </p:nvSpPr>
@@ -36465,7 +34533,7 @@
       </p:sp>
       <p:sp>
         <p:nvSpPr>
-          <p:cNvPr id="40" name="TextBox 39"/>
+          <p:cNvPr id="35" name="TextBox 34"/>
           <p:cNvSpPr txBox="1"/>
           <p:nvPr/>
         </p:nvSpPr>
@@ -36500,7 +34568,7 @@
       </p:sp>
       <p:sp>
         <p:nvSpPr>
-          <p:cNvPr id="41" name="TextBox 40"/>
+          <p:cNvPr id="36" name="TextBox 35"/>
           <p:cNvSpPr txBox="1"/>
           <p:nvPr/>
         </p:nvSpPr>
@@ -36535,7 +34603,7 @@
       </p:sp>
       <p:sp>
         <p:nvSpPr>
-          <p:cNvPr id="42" name="TextBox 41"/>
+          <p:cNvPr id="37" name="TextBox 36"/>
           <p:cNvSpPr txBox="1"/>
           <p:nvPr/>
         </p:nvSpPr>
@@ -37176,7 +35244,7 @@
         <p:spPr>
           <a:xfrm>
             <a:off x="367200" y="961200"/>
-            <a:ext cx="4150800" cy="3520800"/>
+            <a:ext cx="2731199" cy="3520800"/>
           </a:xfrm>
           <a:prstGeom prst="rect">
             <a:avLst/>
@@ -37219,7 +35287,7 @@
         <p:spPr>
           <a:xfrm>
             <a:off x="367200" y="961200"/>
-            <a:ext cx="4150800" cy="54000"/>
+            <a:ext cx="2731199" cy="54000"/>
           </a:xfrm>
           <a:prstGeom prst="rect">
             <a:avLst/>
@@ -37262,7 +35330,7 @@
         <p:spPr>
           <a:xfrm>
             <a:off x="457200" y="1141200"/>
-            <a:ext cx="3970800" cy="640800"/>
+            <a:ext cx="2551199" cy="640800"/>
           </a:xfrm>
           <a:prstGeom prst="rect">
             <a:avLst/>
@@ -37283,7 +35351,7 @@
                 </a:solidFill>
                 <a:latin typeface="Calibri"/>
               </a:rPr>
-              <a:t>90%</a:t>
+              <a:t>—</a:t>
             </a:r>
           </a:p>
         </p:txBody>
@@ -37297,7 +35365,7 @@
         <p:spPr>
           <a:xfrm>
             <a:off x="457200" y="1785600"/>
-            <a:ext cx="3970800" cy="108000"/>
+            <a:ext cx="2551199" cy="108000"/>
           </a:xfrm>
           <a:prstGeom prst="rect">
             <a:avLst/>
@@ -37332,7 +35400,7 @@
         <p:spPr>
           <a:xfrm>
             <a:off x="457200" y="1965600"/>
-            <a:ext cx="3970800" cy="18000"/>
+            <a:ext cx="2551199" cy="18000"/>
           </a:xfrm>
           <a:prstGeom prst="rect">
             <a:avLst/>
@@ -37375,7 +35443,7 @@
         <p:spPr>
           <a:xfrm>
             <a:off x="457200" y="2059200"/>
-            <a:ext cx="3970800" cy="255600"/>
+            <a:ext cx="2551199" cy="255600"/>
           </a:xfrm>
           <a:prstGeom prst="rect">
             <a:avLst/>
@@ -37396,7 +35464,7 @@
                 </a:solidFill>
                 <a:latin typeface="Calibri"/>
               </a:rPr>
-              <a:t>Véhicules électriques</a:t>
+              <a:t>Core Business</a:t>
             </a:r>
           </a:p>
         </p:txBody>
@@ -37410,7 +35478,7 @@
         <p:spPr>
           <a:xfrm>
             <a:off x="457200" y="2332800"/>
-            <a:ext cx="3970800" cy="2041199"/>
+            <a:ext cx="2551199" cy="2041199"/>
           </a:xfrm>
           <a:prstGeom prst="rect">
             <a:avLst/>
@@ -37431,7 +35499,7 @@
                 </a:solidFill>
                 <a:latin typeface="Calibri"/>
               </a:rPr>
-              <a:t>Segment principal générant 90% du CA, axé sur la vente de modèles haut de gamme (Model Y, Model 3, Cybertruck) avec une stratégie de prix premium et une production optimisée via Gigafactories. Clients cibles : particuliers aisés et entreprises pour flottes. Croissance tirée par l'expansion géographique et l'amélioration des marges via l'automatisation et les économies d'échelle.</a:t>
+              <a:t>—</a:t>
             </a:r>
           </a:p>
         </p:txBody>
@@ -37444,8 +35512,8 @@
         </p:nvSpPr>
         <p:spPr>
           <a:xfrm>
-            <a:off x="4626000" y="961200"/>
-            <a:ext cx="4150800" cy="3520800"/>
+            <a:off x="3206400" y="961200"/>
+            <a:ext cx="2731199" cy="3520800"/>
           </a:xfrm>
           <a:prstGeom prst="rect">
             <a:avLst/>
@@ -37487,8 +35555,8 @@
         </p:nvSpPr>
         <p:spPr>
           <a:xfrm>
-            <a:off x="4626000" y="961200"/>
-            <a:ext cx="4150800" cy="54000"/>
+            <a:off x="3206400" y="961200"/>
+            <a:ext cx="2731199" cy="54000"/>
           </a:xfrm>
           <a:prstGeom prst="rect">
             <a:avLst/>
@@ -37530,8 +35598,8 @@
         </p:nvSpPr>
         <p:spPr>
           <a:xfrm>
-            <a:off x="4716000" y="1141200"/>
-            <a:ext cx="3970800" cy="640800"/>
+            <a:off x="3296400" y="1141200"/>
+            <a:ext cx="2551199" cy="640800"/>
           </a:xfrm>
           <a:prstGeom prst="rect">
             <a:avLst/>
@@ -37552,7 +35620,7 @@
                 </a:solidFill>
                 <a:latin typeface="Calibri"/>
               </a:rPr>
-              <a:t>10%</a:t>
+              <a:t>—</a:t>
             </a:r>
           </a:p>
         </p:txBody>
@@ -37565,8 +35633,8 @@
         </p:nvSpPr>
         <p:spPr>
           <a:xfrm>
-            <a:off x="4716000" y="1785600"/>
-            <a:ext cx="3970800" cy="108000"/>
+            <a:off x="3296400" y="1785600"/>
+            <a:ext cx="2551199" cy="108000"/>
           </a:xfrm>
           <a:prstGeom prst="rect">
             <a:avLst/>
@@ -37600,8 +35668,8 @@
         </p:nvSpPr>
         <p:spPr>
           <a:xfrm>
-            <a:off x="4716000" y="1965600"/>
-            <a:ext cx="3970800" cy="18000"/>
+            <a:off x="3296400" y="1965600"/>
+            <a:ext cx="2551199" cy="18000"/>
           </a:xfrm>
           <a:prstGeom prst="rect">
             <a:avLst/>
@@ -37643,8 +35711,8 @@
         </p:nvSpPr>
         <p:spPr>
           <a:xfrm>
-            <a:off x="4716000" y="2059200"/>
-            <a:ext cx="3970800" cy="255600"/>
+            <a:off x="3296400" y="2059200"/>
+            <a:ext cx="2551199" cy="255600"/>
           </a:xfrm>
           <a:prstGeom prst="rect">
             <a:avLst/>
@@ -37665,7 +35733,7 @@
                 </a:solidFill>
                 <a:latin typeface="Calibri"/>
               </a:rPr>
-              <a:t>Énergie et services</a:t>
+              <a:t>Growth Driver</a:t>
             </a:r>
           </a:p>
         </p:txBody>
@@ -37678,8 +35746,8 @@
         </p:nvSpPr>
         <p:spPr>
           <a:xfrm>
-            <a:off x="4716000" y="2332800"/>
-            <a:ext cx="3970800" cy="2041199"/>
+            <a:off x="3296400" y="2332800"/>
+            <a:ext cx="2551199" cy="2041199"/>
           </a:xfrm>
           <a:prstGeom prst="rect">
             <a:avLst/>
@@ -37700,7 +35768,276 @@
                 </a:solidFill>
                 <a:latin typeface="Calibri"/>
               </a:rPr>
-              <a:t>Comprend les batteries Powerwall/Powerpack, les solutions solaires et le réseau de Superchargeurs. Modèle de revenus récurrents via abonnements (énergie) et services premium (bornes). Clients : ménages, entreprises et collectivités. Croissance portée par la demande en stockage d'énergie et l'électrification des réseaux.</a:t>
+              <a:t>—</a:t>
+            </a:r>
+          </a:p>
+        </p:txBody>
+      </p:sp>
+      <p:sp>
+        <p:nvSpPr>
+          <p:cNvPr id="31" name="Rectangle 30"/>
+          <p:cNvSpPr/>
+          <p:nvPr/>
+        </p:nvSpPr>
+        <p:spPr>
+          <a:xfrm>
+            <a:off x="6045600" y="961200"/>
+            <a:ext cx="2731199" cy="3520800"/>
+          </a:xfrm>
+          <a:prstGeom prst="rect">
+            <a:avLst/>
+          </a:prstGeom>
+          <a:solidFill>
+            <a:srgbClr val="F7F8FA"/>
+          </a:solidFill>
+          <a:ln>
+            <a:noFill/>
+          </a:ln>
+        </p:spPr>
+        <p:style>
+          <a:lnRef idx="1">
+            <a:schemeClr val="accent1"/>
+          </a:lnRef>
+          <a:fillRef idx="3">
+            <a:schemeClr val="accent1"/>
+          </a:fillRef>
+          <a:effectRef idx="2">
+            <a:schemeClr val="accent1"/>
+          </a:effectRef>
+          <a:fontRef idx="minor">
+            <a:schemeClr val="lt1"/>
+          </a:fontRef>
+        </p:style>
+        <p:txBody>
+          <a:bodyPr rtlCol="0" anchor="ctr"/>
+          <a:lstStyle/>
+          <a:p>
+            <a:pPr algn="ctr"/>
+          </a:p>
+        </p:txBody>
+      </p:sp>
+      <p:sp>
+        <p:nvSpPr>
+          <p:cNvPr id="32" name="Rectangle 31"/>
+          <p:cNvSpPr/>
+          <p:nvPr/>
+        </p:nvSpPr>
+        <p:spPr>
+          <a:xfrm>
+            <a:off x="6045600" y="961200"/>
+            <a:ext cx="2731199" cy="54000"/>
+          </a:xfrm>
+          <a:prstGeom prst="rect">
+            <a:avLst/>
+          </a:prstGeom>
+          <a:solidFill>
+            <a:srgbClr val="888888"/>
+          </a:solidFill>
+          <a:ln>
+            <a:noFill/>
+          </a:ln>
+        </p:spPr>
+        <p:style>
+          <a:lnRef idx="1">
+            <a:schemeClr val="accent1"/>
+          </a:lnRef>
+          <a:fillRef idx="3">
+            <a:schemeClr val="accent1"/>
+          </a:fillRef>
+          <a:effectRef idx="2">
+            <a:schemeClr val="accent1"/>
+          </a:effectRef>
+          <a:fontRef idx="minor">
+            <a:schemeClr val="lt1"/>
+          </a:fontRef>
+        </p:style>
+        <p:txBody>
+          <a:bodyPr rtlCol="0" anchor="ctr"/>
+          <a:lstStyle/>
+          <a:p>
+            <a:pPr algn="ctr"/>
+          </a:p>
+        </p:txBody>
+      </p:sp>
+      <p:sp>
+        <p:nvSpPr>
+          <p:cNvPr id="33" name="TextBox 32"/>
+          <p:cNvSpPr txBox="1"/>
+          <p:nvPr/>
+        </p:nvSpPr>
+        <p:spPr>
+          <a:xfrm>
+            <a:off x="6135600" y="1141200"/>
+            <a:ext cx="2551199" cy="640800"/>
+          </a:xfrm>
+          <a:prstGeom prst="rect">
+            <a:avLst/>
+          </a:prstGeom>
+          <a:noFill/>
+        </p:spPr>
+        <p:txBody>
+          <a:bodyPr wrap="square">
+            <a:spAutoFit/>
+          </a:bodyPr>
+          <a:lstStyle/>
+          <a:p>
+            <a:pPr algn="l"/>
+            <a:r>
+              <a:rPr sz="2200" b="1" i="0">
+                <a:solidFill>
+                  <a:srgbClr val="888888"/>
+                </a:solidFill>
+                <a:latin typeface="Calibri"/>
+              </a:rPr>
+              <a:t>—</a:t>
+            </a:r>
+          </a:p>
+        </p:txBody>
+      </p:sp>
+      <p:sp>
+        <p:nvSpPr>
+          <p:cNvPr id="34" name="TextBox 33"/>
+          <p:cNvSpPr txBox="1"/>
+          <p:nvPr/>
+        </p:nvSpPr>
+        <p:spPr>
+          <a:xfrm>
+            <a:off x="6135600" y="1785600"/>
+            <a:ext cx="2551199" cy="108000"/>
+          </a:xfrm>
+          <a:prstGeom prst="rect">
+            <a:avLst/>
+          </a:prstGeom>
+          <a:noFill/>
+        </p:spPr>
+        <p:txBody>
+          <a:bodyPr wrap="square">
+            <a:spAutoFit/>
+          </a:bodyPr>
+          <a:lstStyle/>
+          <a:p>
+            <a:pPr algn="l"/>
+            <a:r>
+              <a:rPr sz="900" b="0" i="0">
+                <a:solidFill>
+                  <a:srgbClr val="555555"/>
+                </a:solidFill>
+                <a:latin typeface="Calibri"/>
+              </a:rPr>
+              <a:t>du CA</a:t>
+            </a:r>
+          </a:p>
+        </p:txBody>
+      </p:sp>
+      <p:sp>
+        <p:nvSpPr>
+          <p:cNvPr id="35" name="Rectangle 34"/>
+          <p:cNvSpPr/>
+          <p:nvPr/>
+        </p:nvSpPr>
+        <p:spPr>
+          <a:xfrm>
+            <a:off x="6135600" y="1965600"/>
+            <a:ext cx="2551199" cy="18000"/>
+          </a:xfrm>
+          <a:prstGeom prst="rect">
+            <a:avLst/>
+          </a:prstGeom>
+          <a:solidFill>
+            <a:srgbClr val="888888"/>
+          </a:solidFill>
+          <a:ln>
+            <a:noFill/>
+          </a:ln>
+        </p:spPr>
+        <p:style>
+          <a:lnRef idx="1">
+            <a:schemeClr val="accent1"/>
+          </a:lnRef>
+          <a:fillRef idx="3">
+            <a:schemeClr val="accent1"/>
+          </a:fillRef>
+          <a:effectRef idx="2">
+            <a:schemeClr val="accent1"/>
+          </a:effectRef>
+          <a:fontRef idx="minor">
+            <a:schemeClr val="lt1"/>
+          </a:fontRef>
+        </p:style>
+        <p:txBody>
+          <a:bodyPr rtlCol="0" anchor="ctr"/>
+          <a:lstStyle/>
+          <a:p>
+            <a:pPr algn="ctr"/>
+          </a:p>
+        </p:txBody>
+      </p:sp>
+      <p:sp>
+        <p:nvSpPr>
+          <p:cNvPr id="36" name="TextBox 35"/>
+          <p:cNvSpPr txBox="1"/>
+          <p:nvPr/>
+        </p:nvSpPr>
+        <p:spPr>
+          <a:xfrm>
+            <a:off x="6135600" y="2059200"/>
+            <a:ext cx="2551199" cy="255600"/>
+          </a:xfrm>
+          <a:prstGeom prst="rect">
+            <a:avLst/>
+          </a:prstGeom>
+          <a:noFill/>
+        </p:spPr>
+        <p:txBody>
+          <a:bodyPr wrap="square">
+            <a:spAutoFit/>
+          </a:bodyPr>
+          <a:lstStyle/>
+          <a:p>
+            <a:pPr algn="l"/>
+            <a:r>
+              <a:rPr sz="1000" b="1" i="0">
+                <a:solidFill>
+                  <a:srgbClr val="1B3A6B"/>
+                </a:solidFill>
+                <a:latin typeface="Calibri"/>
+              </a:rPr>
+              <a:t>International</a:t>
+            </a:r>
+          </a:p>
+        </p:txBody>
+      </p:sp>
+      <p:sp>
+        <p:nvSpPr>
+          <p:cNvPr id="37" name="TextBox 36"/>
+          <p:cNvSpPr txBox="1"/>
+          <p:nvPr/>
+        </p:nvSpPr>
+        <p:spPr>
+          <a:xfrm>
+            <a:off x="6135600" y="2332800"/>
+            <a:ext cx="2551199" cy="2041199"/>
+          </a:xfrm>
+          <a:prstGeom prst="rect">
+            <a:avLst/>
+          </a:prstGeom>
+          <a:noFill/>
+        </p:spPr>
+        <p:txBody>
+          <a:bodyPr wrap="square">
+            <a:spAutoFit/>
+          </a:bodyPr>
+          <a:lstStyle/>
+          <a:p>
+            <a:pPr algn="l"/>
+            <a:r>
+              <a:rPr sz="800" b="0" i="0">
+                <a:solidFill>
+                  <a:srgbClr val="555555"/>
+                </a:solidFill>
+                <a:latin typeface="Calibri"/>
+              </a:rPr>
+              <a:t>—</a:t>
             </a:r>
           </a:p>
         </p:txBody>
@@ -38552,7 +36889,7 @@
                 </a:solidFill>
                 <a:latin typeface="Calibri"/>
               </a:rPr>
-              <a:t>USD millions  ·  2022–2027F</a:t>
+              <a:t>USD millions  ·  2022–2025</a:t>
             </a:r>
           </a:p>
         </p:txBody>
@@ -38567,7 +36904,7 @@
         </p:nvGraphicFramePr>
         <p:xfrm>
           <a:off x="367200" y="914400"/>
-          <a:ext cx="8413196" cy="1980000"/>
+          <a:ext cx="8413200" cy="1980000"/>
         </p:xfrm>
         <a:graphic>
           <a:graphicData uri="http://schemas.openxmlformats.org/drawingml/2006/table">
@@ -38577,11 +36914,9 @@
               </a:tblPr>
               <a:tblGrid>
                 <a:gridCol w="2355696"/>
-                <a:gridCol w="1211500"/>
-                <a:gridCol w="1211500"/>
-                <a:gridCol w="1211500"/>
-                <a:gridCol w="1211500"/>
-                <a:gridCol w="1211500"/>
+                <a:gridCol w="2019168"/>
+                <a:gridCol w="2019168"/>
+                <a:gridCol w="2019168"/>
               </a:tblGrid>
               <a:tr h="220000">
                 <a:tc>
@@ -38667,52 +37002,6 @@
                           <a:latin typeface="Calibri"/>
                         </a:rPr>
                         <a:t>2025</a:t>
-                      </a:r>
-                    </a:p>
-                  </a:txBody>
-                  <a:tcPr>
-                    <a:solidFill>
-                      <a:srgbClr val="1B3A6B"/>
-                    </a:solidFill>
-                  </a:tcPr>
-                </a:tc>
-                <a:tc>
-                  <a:txBody>
-                    <a:bodyPr/>
-                    <a:lstStyle/>
-                    <a:p>
-                      <a:pPr algn="ctr"/>
-                      <a:r>
-                        <a:rPr sz="800" b="1" i="0">
-                          <a:solidFill>
-                            <a:srgbClr val="FFFFFF"/>
-                          </a:solidFill>
-                          <a:latin typeface="Calibri"/>
-                        </a:rPr>
-                        <a:t>2026F</a:t>
-                      </a:r>
-                    </a:p>
-                  </a:txBody>
-                  <a:tcPr>
-                    <a:solidFill>
-                      <a:srgbClr val="1B3A6B"/>
-                    </a:solidFill>
-                  </a:tcPr>
-                </a:tc>
-                <a:tc>
-                  <a:txBody>
-                    <a:bodyPr/>
-                    <a:lstStyle/>
-                    <a:p>
-                      <a:pPr algn="ctr"/>
-                      <a:r>
-                        <a:rPr sz="800" b="1" i="0">
-                          <a:solidFill>
-                            <a:srgbClr val="FFFFFF"/>
-                          </a:solidFill>
-                          <a:latin typeface="Calibri"/>
-                        </a:rPr>
-                        <a:t>2027F</a:t>
                       </a:r>
                     </a:p>
                   </a:txBody>
@@ -38816,52 +37105,6 @@
                     </a:solidFill>
                   </a:tcPr>
                 </a:tc>
-                <a:tc>
-                  <a:txBody>
-                    <a:bodyPr/>
-                    <a:lstStyle/>
-                    <a:p>
-                      <a:pPr algn="ctr"/>
-                      <a:r>
-                        <a:rPr sz="800" b="1" i="0">
-                          <a:solidFill>
-                            <a:srgbClr val="0D0D0D"/>
-                          </a:solidFill>
-                          <a:latin typeface="Calibri"/>
-                        </a:rPr>
-                        <a:t>102,0</a:t>
-                      </a:r>
-                    </a:p>
-                  </a:txBody>
-                  <a:tcPr>
-                    <a:solidFill>
-                      <a:srgbClr val="FFFFFF"/>
-                    </a:solidFill>
-                  </a:tcPr>
-                </a:tc>
-                <a:tc>
-                  <a:txBody>
-                    <a:bodyPr/>
-                    <a:lstStyle/>
-                    <a:p>
-                      <a:pPr algn="ctr"/>
-                      <a:r>
-                        <a:rPr sz="800" b="1" i="0">
-                          <a:solidFill>
-                            <a:srgbClr val="0D0D0D"/>
-                          </a:solidFill>
-                          <a:latin typeface="Calibri"/>
-                        </a:rPr>
-                        <a:t>115,0</a:t>
-                      </a:r>
-                    </a:p>
-                  </a:txBody>
-                  <a:tcPr>
-                    <a:solidFill>
-                      <a:srgbClr val="FFFFFF"/>
-                    </a:solidFill>
-                  </a:tcPr>
-                </a:tc>
               </a:tr>
               <a:tr h="220000">
                 <a:tc>
@@ -38953,52 +37196,6 @@
                   <a:tcPr>
                     <a:solidFill>
                       <a:srgbClr val="DDE8F5"/>
-                    </a:solidFill>
-                  </a:tcPr>
-                </a:tc>
-                <a:tc>
-                  <a:txBody>
-                    <a:bodyPr/>
-                    <a:lstStyle/>
-                    <a:p>
-                      <a:pPr algn="ctr"/>
-                      <a:r>
-                        <a:rPr sz="750" b="0" i="1">
-                          <a:solidFill>
-                            <a:srgbClr val="333333"/>
-                          </a:solidFill>
-                          <a:latin typeface="Calibri"/>
-                        </a:rPr>
-                        <a:t>+780,0 %</a:t>
-                      </a:r>
-                    </a:p>
-                  </a:txBody>
-                  <a:tcPr>
-                    <a:solidFill>
-                      <a:srgbClr val="F7F8FA"/>
-                    </a:solidFill>
-                  </a:tcPr>
-                </a:tc>
-                <a:tc>
-                  <a:txBody>
-                    <a:bodyPr/>
-                    <a:lstStyle/>
-                    <a:p>
-                      <a:pPr algn="ctr"/>
-                      <a:r>
-                        <a:rPr sz="750" b="0" i="1">
-                          <a:solidFill>
-                            <a:srgbClr val="333333"/>
-                          </a:solidFill>
-                          <a:latin typeface="Calibri"/>
-                        </a:rPr>
-                        <a:t>+1270,0 %</a:t>
-                      </a:r>
-                    </a:p>
-                  </a:txBody>
-                  <a:tcPr>
-                    <a:solidFill>
-                      <a:srgbClr val="F7F8FA"/>
                     </a:solidFill>
                   </a:tcPr>
                 </a:tc>
@@ -39096,52 +37293,6 @@
                     </a:solidFill>
                   </a:tcPr>
                 </a:tc>
-                <a:tc>
-                  <a:txBody>
-                    <a:bodyPr/>
-                    <a:lstStyle/>
-                    <a:p>
-                      <a:pPr algn="ctr"/>
-                      <a:r>
-                        <a:rPr sz="800" b="1" i="0">
-                          <a:solidFill>
-                            <a:srgbClr val="0D0D0D"/>
-                          </a:solidFill>
-                          <a:latin typeface="Calibri"/>
-                        </a:rPr>
-                        <a:t>1 989,0</a:t>
-                      </a:r>
-                    </a:p>
-                  </a:txBody>
-                  <a:tcPr>
-                    <a:solidFill>
-                      <a:srgbClr val="FFFFFF"/>
-                    </a:solidFill>
-                  </a:tcPr>
-                </a:tc>
-                <a:tc>
-                  <a:txBody>
-                    <a:bodyPr/>
-                    <a:lstStyle/>
-                    <a:p>
-                      <a:pPr algn="ctr"/>
-                      <a:r>
-                        <a:rPr sz="800" b="1" i="0">
-                          <a:solidFill>
-                            <a:srgbClr val="0D0D0D"/>
-                          </a:solidFill>
-                          <a:latin typeface="Calibri"/>
-                        </a:rPr>
-                        <a:t>2 530,0</a:t>
-                      </a:r>
-                    </a:p>
-                  </a:txBody>
-                  <a:tcPr>
-                    <a:solidFill>
-                      <a:srgbClr val="FFFFFF"/>
-                    </a:solidFill>
-                  </a:tcPr>
-                </a:tc>
               </a:tr>
               <a:tr h="220000">
                 <a:tc>
@@ -39233,52 +37384,6 @@
                   <a:tcPr>
                     <a:solidFill>
                       <a:srgbClr val="DDE8F5"/>
-                    </a:solidFill>
-                  </a:tcPr>
-                </a:tc>
-                <a:tc>
-                  <a:txBody>
-                    <a:bodyPr/>
-                    <a:lstStyle/>
-                    <a:p>
-                      <a:pPr algn="ctr"/>
-                      <a:r>
-                        <a:rPr sz="750" b="0" i="1">
-                          <a:solidFill>
-                            <a:srgbClr val="333333"/>
-                          </a:solidFill>
-                          <a:latin typeface="Calibri"/>
-                        </a:rPr>
-                        <a:t>19,5 %</a:t>
-                      </a:r>
-                    </a:p>
-                  </a:txBody>
-                  <a:tcPr>
-                    <a:solidFill>
-                      <a:srgbClr val="F7F8FA"/>
-                    </a:solidFill>
-                  </a:tcPr>
-                </a:tc>
-                <a:tc>
-                  <a:txBody>
-                    <a:bodyPr/>
-                    <a:lstStyle/>
-                    <a:p>
-                      <a:pPr algn="ctr"/>
-                      <a:r>
-                        <a:rPr sz="750" b="0" i="1">
-                          <a:solidFill>
-                            <a:srgbClr val="333333"/>
-                          </a:solidFill>
-                          <a:latin typeface="Calibri"/>
-                        </a:rPr>
-                        <a:t>22,0 %</a:t>
-                      </a:r>
-                    </a:p>
-                  </a:txBody>
-                  <a:tcPr>
-                    <a:solidFill>
-                      <a:srgbClr val="F7F8FA"/>
                     </a:solidFill>
                   </a:tcPr>
                 </a:tc>
@@ -39376,52 +37481,6 @@
                     </a:solidFill>
                   </a:tcPr>
                 </a:tc>
-                <a:tc>
-                  <a:txBody>
-                    <a:bodyPr/>
-                    <a:lstStyle/>
-                    <a:p>
-                      <a:pPr algn="ctr"/>
-                      <a:r>
-                        <a:rPr sz="800" b="1" i="0">
-                          <a:solidFill>
-                            <a:srgbClr val="0D0D0D"/>
-                          </a:solidFill>
-                          <a:latin typeface="Calibri"/>
-                        </a:rPr>
-                        <a:t>15,0</a:t>
-                      </a:r>
-                    </a:p>
-                  </a:txBody>
-                  <a:tcPr>
-                    <a:solidFill>
-                      <a:srgbClr val="FFFFFF"/>
-                    </a:solidFill>
-                  </a:tcPr>
-                </a:tc>
-                <a:tc>
-                  <a:txBody>
-                    <a:bodyPr/>
-                    <a:lstStyle/>
-                    <a:p>
-                      <a:pPr algn="ctr"/>
-                      <a:r>
-                        <a:rPr sz="800" b="1" i="0">
-                          <a:solidFill>
-                            <a:srgbClr val="0D0D0D"/>
-                          </a:solidFill>
-                          <a:latin typeface="Calibri"/>
-                        </a:rPr>
-                        <a:t>22,0</a:t>
-                      </a:r>
-                    </a:p>
-                  </a:txBody>
-                  <a:tcPr>
-                    <a:solidFill>
-                      <a:srgbClr val="FFFFFF"/>
-                    </a:solidFill>
-                  </a:tcPr>
-                </a:tc>
               </a:tr>
               <a:tr h="220000">
                 <a:tc>
@@ -39513,52 +37572,6 @@
                   <a:tcPr>
                     <a:solidFill>
                       <a:srgbClr val="DDE8F5"/>
-                    </a:solidFill>
-                  </a:tcPr>
-                </a:tc>
-                <a:tc>
-                  <a:txBody>
-                    <a:bodyPr/>
-                    <a:lstStyle/>
-                    <a:p>
-                      <a:pPr algn="ctr"/>
-                      <a:r>
-                        <a:rPr sz="750" b="0" i="1">
-                          <a:solidFill>
-                            <a:srgbClr val="333333"/>
-                          </a:solidFill>
-                          <a:latin typeface="Calibri"/>
-                        </a:rPr>
-                        <a:t>14,7 %</a:t>
-                      </a:r>
-                    </a:p>
-                  </a:txBody>
-                  <a:tcPr>
-                    <a:solidFill>
-                      <a:srgbClr val="F7F8FA"/>
-                    </a:solidFill>
-                  </a:tcPr>
-                </a:tc>
-                <a:tc>
-                  <a:txBody>
-                    <a:bodyPr/>
-                    <a:lstStyle/>
-                    <a:p>
-                      <a:pPr algn="ctr"/>
-                      <a:r>
-                        <a:rPr sz="750" b="0" i="1">
-                          <a:solidFill>
-                            <a:srgbClr val="333333"/>
-                          </a:solidFill>
-                          <a:latin typeface="Calibri"/>
-                        </a:rPr>
-                        <a:t>19,1 %</a:t>
-                      </a:r>
-                    </a:p>
-                  </a:txBody>
-                  <a:tcPr>
-                    <a:solidFill>
-                      <a:srgbClr val="F7F8FA"/>
                     </a:solidFill>
                   </a:tcPr>
                 </a:tc>
@@ -39656,52 +37669,6 @@
                     </a:solidFill>
                   </a:tcPr>
                 </a:tc>
-                <a:tc>
-                  <a:txBody>
-                    <a:bodyPr/>
-                    <a:lstStyle/>
-                    <a:p>
-                      <a:pPr algn="ctr"/>
-                      <a:r>
-                        <a:rPr sz="800" b="1" i="0">
-                          <a:solidFill>
-                            <a:srgbClr val="0D0D0D"/>
-                          </a:solidFill>
-                          <a:latin typeface="Calibri"/>
-                        </a:rPr>
-                        <a:t>6,5</a:t>
-                      </a:r>
-                    </a:p>
-                  </a:txBody>
-                  <a:tcPr>
-                    <a:solidFill>
-                      <a:srgbClr val="FFFFFF"/>
-                    </a:solidFill>
-                  </a:tcPr>
-                </a:tc>
-                <a:tc>
-                  <a:txBody>
-                    <a:bodyPr/>
-                    <a:lstStyle/>
-                    <a:p>
-                      <a:pPr algn="ctr"/>
-                      <a:r>
-                        <a:rPr sz="800" b="1" i="0">
-                          <a:solidFill>
-                            <a:srgbClr val="0D0D0D"/>
-                          </a:solidFill>
-                          <a:latin typeface="Calibri"/>
-                        </a:rPr>
-                        <a:t>12,0</a:t>
-                      </a:r>
-                    </a:p>
-                  </a:txBody>
-                  <a:tcPr>
-                    <a:solidFill>
-                      <a:srgbClr val="FFFFFF"/>
-                    </a:solidFill>
-                  </a:tcPr>
-                </a:tc>
               </a:tr>
               <a:tr h="220000">
                 <a:tc>
@@ -39796,178 +37763,11 @@
                     </a:solidFill>
                   </a:tcPr>
                 </a:tc>
-                <a:tc>
-                  <a:txBody>
-                    <a:bodyPr/>
-                    <a:lstStyle/>
-                    <a:p>
-                      <a:pPr algn="ctr"/>
-                      <a:r>
-                        <a:rPr sz="750" b="0" i="1">
-                          <a:solidFill>
-                            <a:srgbClr val="333333"/>
-                          </a:solidFill>
-                          <a:latin typeface="Calibri"/>
-                        </a:rPr>
-                        <a:t>6,4 %</a:t>
-                      </a:r>
-                    </a:p>
-                  </a:txBody>
-                  <a:tcPr>
-                    <a:solidFill>
-                      <a:srgbClr val="F7F8FA"/>
-                    </a:solidFill>
-                  </a:tcPr>
-                </a:tc>
-                <a:tc>
-                  <a:txBody>
-                    <a:bodyPr/>
-                    <a:lstStyle/>
-                    <a:p>
-                      <a:pPr algn="ctr"/>
-                      <a:r>
-                        <a:rPr sz="750" b="0" i="1">
-                          <a:solidFill>
-                            <a:srgbClr val="333333"/>
-                          </a:solidFill>
-                          <a:latin typeface="Calibri"/>
-                        </a:rPr>
-                        <a:t>10,4 %</a:t>
-                      </a:r>
-                    </a:p>
-                  </a:txBody>
-                  <a:tcPr>
-                    <a:solidFill>
-                      <a:srgbClr val="F7F8FA"/>
-                    </a:solidFill>
-                  </a:tcPr>
-                </a:tc>
               </a:tr>
             </a:tbl>
           </a:graphicData>
         </a:graphic>
       </p:graphicFrame>
-      <p:sp>
-        <p:nvSpPr>
-          <p:cNvPr id="18" name="Rectangle 17"/>
-          <p:cNvSpPr/>
-          <p:nvPr/>
-        </p:nvSpPr>
-        <p:spPr>
-          <a:xfrm>
-            <a:off x="367200" y="3218400"/>
-            <a:ext cx="8413200" cy="1224000"/>
-          </a:xfrm>
-          <a:prstGeom prst="rect">
-            <a:avLst/>
-          </a:prstGeom>
-          <a:solidFill>
-            <a:srgbClr val="F5F7FA"/>
-          </a:solidFill>
-          <a:ln>
-            <a:noFill/>
-          </a:ln>
-        </p:spPr>
-        <p:style>
-          <a:lnRef idx="1">
-            <a:schemeClr val="accent1"/>
-          </a:lnRef>
-          <a:fillRef idx="3">
-            <a:schemeClr val="accent1"/>
-          </a:fillRef>
-          <a:effectRef idx="2">
-            <a:schemeClr val="accent1"/>
-          </a:effectRef>
-          <a:fontRef idx="minor">
-            <a:schemeClr val="lt1"/>
-          </a:fontRef>
-        </p:style>
-        <p:txBody>
-          <a:bodyPr rtlCol="0" anchor="ctr"/>
-          <a:lstStyle/>
-          <a:p>
-            <a:pPr algn="ctr"/>
-          </a:p>
-        </p:txBody>
-      </p:sp>
-      <p:sp>
-        <p:nvSpPr>
-          <p:cNvPr id="19" name="Rectangle 18"/>
-          <p:cNvSpPr/>
-          <p:nvPr/>
-        </p:nvSpPr>
-        <p:spPr>
-          <a:xfrm>
-            <a:off x="367200" y="3218400"/>
-            <a:ext cx="79200" cy="1224000"/>
-          </a:xfrm>
-          <a:prstGeom prst="rect">
-            <a:avLst/>
-          </a:prstGeom>
-          <a:solidFill>
-            <a:srgbClr val="2E5FA3"/>
-          </a:solidFill>
-          <a:ln>
-            <a:noFill/>
-          </a:ln>
-        </p:spPr>
-        <p:style>
-          <a:lnRef idx="1">
-            <a:schemeClr val="accent1"/>
-          </a:lnRef>
-          <a:fillRef idx="3">
-            <a:schemeClr val="accent1"/>
-          </a:fillRef>
-          <a:effectRef idx="2">
-            <a:schemeClr val="accent1"/>
-          </a:effectRef>
-          <a:fontRef idx="minor">
-            <a:schemeClr val="lt1"/>
-          </a:fontRef>
-        </p:style>
-        <p:txBody>
-          <a:bodyPr rtlCol="0" anchor="ctr"/>
-          <a:lstStyle/>
-          <a:p>
-            <a:pPr algn="ctr"/>
-          </a:p>
-        </p:txBody>
-      </p:sp>
-      <p:sp>
-        <p:nvSpPr>
-          <p:cNvPr id="20" name="TextBox 19"/>
-          <p:cNvSpPr txBox="1"/>
-          <p:nvPr/>
-        </p:nvSpPr>
-        <p:spPr>
-          <a:xfrm>
-            <a:off x="475200" y="3247200"/>
-            <a:ext cx="8298000" cy="1188000"/>
-          </a:xfrm>
-          <a:prstGeom prst="rect">
-            <a:avLst/>
-          </a:prstGeom>
-          <a:noFill/>
-        </p:spPr>
-        <p:txBody>
-          <a:bodyPr wrap="square">
-            <a:spAutoFit/>
-          </a:bodyPr>
-          <a:lstStyle/>
-          <a:p>
-            <a:pPr algn="l"/>
-            <a:r>
-              <a:rPr sz="850" b="0" i="0">
-                <a:solidFill>
-                  <a:srgbClr val="555555"/>
-                </a:solidFill>
-                <a:latin typeface="Calibri"/>
-              </a:rPr>
-              <a:t>Le CA 2025 atteint 94,8 Md$ (-3% YoY), marqué par une pression sur les marges (GM 18.0%, EBITDA 12.4%, Net 4.0%) due à la baisse des prix des VE et à l'augmentation des coûts fixes. Le bilan reste solide avec un ND/EBITDA négatif (-0.7x), permettant une flexibilité financière pour les investissements (Capex 8,5 Md$ en 2025) et potentiellement des rachats d'actions.</a:t>
-            </a:r>
-          </a:p>
-        </p:txBody>
-      </p:sp>
     </p:spTree>
   </p:cSld>
   <p:clrMapOvr>
@@ -41850,127 +39650,6 @@
           </a:graphicData>
         </a:graphic>
       </p:graphicFrame>
-      <p:sp>
-        <p:nvSpPr>
-          <p:cNvPr id="31" name="Rectangle 30"/>
-          <p:cNvSpPr/>
-          <p:nvPr/>
-        </p:nvSpPr>
-        <p:spPr>
-          <a:xfrm>
-            <a:off x="367200" y="4068000"/>
-            <a:ext cx="8413200" cy="468000"/>
-          </a:xfrm>
-          <a:prstGeom prst="rect">
-            <a:avLst/>
-          </a:prstGeom>
-          <a:solidFill>
-            <a:srgbClr val="F5F7FA"/>
-          </a:solidFill>
-          <a:ln>
-            <a:noFill/>
-          </a:ln>
-        </p:spPr>
-        <p:style>
-          <a:lnRef idx="1">
-            <a:schemeClr val="accent1"/>
-          </a:lnRef>
-          <a:fillRef idx="3">
-            <a:schemeClr val="accent1"/>
-          </a:fillRef>
-          <a:effectRef idx="2">
-            <a:schemeClr val="accent1"/>
-          </a:effectRef>
-          <a:fontRef idx="minor">
-            <a:schemeClr val="lt1"/>
-          </a:fontRef>
-        </p:style>
-        <p:txBody>
-          <a:bodyPr rtlCol="0" anchor="ctr"/>
-          <a:lstStyle/>
-          <a:p>
-            <a:pPr algn="ctr"/>
-          </a:p>
-        </p:txBody>
-      </p:sp>
-      <p:sp>
-        <p:nvSpPr>
-          <p:cNvPr id="32" name="Rectangle 31"/>
-          <p:cNvSpPr/>
-          <p:nvPr/>
-        </p:nvSpPr>
-        <p:spPr>
-          <a:xfrm>
-            <a:off x="367200" y="4068000"/>
-            <a:ext cx="79200" cy="468000"/>
-          </a:xfrm>
-          <a:prstGeom prst="rect">
-            <a:avLst/>
-          </a:prstGeom>
-          <a:solidFill>
-            <a:srgbClr val="2E5FA3"/>
-          </a:solidFill>
-          <a:ln>
-            <a:noFill/>
-          </a:ln>
-        </p:spPr>
-        <p:style>
-          <a:lnRef idx="1">
-            <a:schemeClr val="accent1"/>
-          </a:lnRef>
-          <a:fillRef idx="3">
-            <a:schemeClr val="accent1"/>
-          </a:fillRef>
-          <a:effectRef idx="2">
-            <a:schemeClr val="accent1"/>
-          </a:effectRef>
-          <a:fontRef idx="minor">
-            <a:schemeClr val="lt1"/>
-          </a:fontRef>
-        </p:style>
-        <p:txBody>
-          <a:bodyPr rtlCol="0" anchor="ctr"/>
-          <a:lstStyle/>
-          <a:p>
-            <a:pPr algn="ctr"/>
-          </a:p>
-        </p:txBody>
-      </p:sp>
-      <p:sp>
-        <p:nvSpPr>
-          <p:cNvPr id="33" name="TextBox 32"/>
-          <p:cNvSpPr txBox="1"/>
-          <p:nvPr/>
-        </p:nvSpPr>
-        <p:spPr>
-          <a:xfrm>
-            <a:off x="475200" y="4096800"/>
-            <a:ext cx="8298000" cy="432000"/>
-          </a:xfrm>
-          <a:prstGeom prst="rect">
-            <a:avLst/>
-          </a:prstGeom>
-          <a:noFill/>
-        </p:spPr>
-        <p:txBody>
-          <a:bodyPr wrap="square">
-            <a:spAutoFit/>
-          </a:bodyPr>
-          <a:lstStyle/>
-          <a:p>
-            <a:pPr algn="l"/>
-            <a:r>
-              <a:rPr sz="850" b="0" i="0">
-                <a:solidFill>
-                  <a:srgbClr val="555555"/>
-                </a:solidFill>
-                <a:latin typeface="Calibri"/>
-              </a:rPr>
-              <a:t>Le CA 2025 atteint 94,8 Md$ (-3% YoY), marqué par une pression sur les marges (GM 18.0%, EBITDA 12.4%, Net 4.0%) due à la baisse des prix des VE et à l'augmentation des coûts fixes. Le bilan reste solide avec un ND/EBITDA négatif (-0.7x), permettant une flexibilité financière pour les investissements (Capex 8,5 Md$ en 2025) et potentiellement des rachats d'actions.</a:t>
-            </a:r>
-          </a:p>
-        </p:txBody>
-      </p:sp>
     </p:spTree>
   </p:cSld>
   <p:clrMapOvr>

--- a/preview/TSLA/TSLA_pitchbook.pptx
+++ b/preview/TSLA/TSLA_pitchbook.pptx
@@ -3410,7 +3410,7 @@
                 </a:solidFill>
                 <a:latin typeface="Calibri"/>
               </a:rPr>
-              <a:t>● HOLD  ·  Prix cible base : — $  ·  Upside : —</a:t>
+              <a:t>● HOLD  ·  Prix cible base : 380 $  ·  Upside : +10,7 %</a:t>
             </a:r>
           </a:p>
         </p:txBody>
@@ -6069,6 +6069,127 @@
           </a:graphicData>
         </a:graphic>
       </p:graphicFrame>
+      <p:sp>
+        <p:nvSpPr>
+          <p:cNvPr id="18" name="Rectangle 17"/>
+          <p:cNvSpPr/>
+          <p:nvPr/>
+        </p:nvSpPr>
+        <p:spPr>
+          <a:xfrm>
+            <a:off x="367200" y="3628800"/>
+            <a:ext cx="8413200" cy="824400"/>
+          </a:xfrm>
+          <a:prstGeom prst="rect">
+            <a:avLst/>
+          </a:prstGeom>
+          <a:solidFill>
+            <a:srgbClr val="F5F7FA"/>
+          </a:solidFill>
+          <a:ln>
+            <a:noFill/>
+          </a:ln>
+        </p:spPr>
+        <p:style>
+          <a:lnRef idx="1">
+            <a:schemeClr val="accent1"/>
+          </a:lnRef>
+          <a:fillRef idx="3">
+            <a:schemeClr val="accent1"/>
+          </a:fillRef>
+          <a:effectRef idx="2">
+            <a:schemeClr val="accent1"/>
+          </a:effectRef>
+          <a:fontRef idx="minor">
+            <a:schemeClr val="lt1"/>
+          </a:fontRef>
+        </p:style>
+        <p:txBody>
+          <a:bodyPr rtlCol="0" anchor="ctr"/>
+          <a:lstStyle/>
+          <a:p>
+            <a:pPr algn="ctr"/>
+          </a:p>
+        </p:txBody>
+      </p:sp>
+      <p:sp>
+        <p:nvSpPr>
+          <p:cNvPr id="19" name="Rectangle 18"/>
+          <p:cNvSpPr/>
+          <p:nvPr/>
+        </p:nvSpPr>
+        <p:spPr>
+          <a:xfrm>
+            <a:off x="367200" y="3628800"/>
+            <a:ext cx="79200" cy="824400"/>
+          </a:xfrm>
+          <a:prstGeom prst="rect">
+            <a:avLst/>
+          </a:prstGeom>
+          <a:solidFill>
+            <a:srgbClr val="2E5FA3"/>
+          </a:solidFill>
+          <a:ln>
+            <a:noFill/>
+          </a:ln>
+        </p:spPr>
+        <p:style>
+          <a:lnRef idx="1">
+            <a:schemeClr val="accent1"/>
+          </a:lnRef>
+          <a:fillRef idx="3">
+            <a:schemeClr val="accent1"/>
+          </a:fillRef>
+          <a:effectRef idx="2">
+            <a:schemeClr val="accent1"/>
+          </a:effectRef>
+          <a:fontRef idx="minor">
+            <a:schemeClr val="lt1"/>
+          </a:fontRef>
+        </p:style>
+        <p:txBody>
+          <a:bodyPr rtlCol="0" anchor="ctr"/>
+          <a:lstStyle/>
+          <a:p>
+            <a:pPr algn="ctr"/>
+          </a:p>
+        </p:txBody>
+      </p:sp>
+      <p:sp>
+        <p:nvSpPr>
+          <p:cNvPr id="20" name="TextBox 19"/>
+          <p:cNvSpPr txBox="1"/>
+          <p:nvPr/>
+        </p:nvSpPr>
+        <p:spPr>
+          <a:xfrm>
+            <a:off x="475200" y="3657600"/>
+            <a:ext cx="8298000" cy="788400"/>
+          </a:xfrm>
+          <a:prstGeom prst="rect">
+            <a:avLst/>
+          </a:prstGeom>
+          <a:noFill/>
+        </p:spPr>
+        <p:txBody>
+          <a:bodyPr wrap="square">
+            <a:spAutoFit/>
+          </a:bodyPr>
+          <a:lstStyle/>
+          <a:p>
+            <a:pPr algn="l"/>
+            <a:r>
+              <a:rPr sz="850" b="0" i="0">
+                <a:solidFill>
+                  <a:srgbClr val="555555"/>
+                </a:solidFill>
+                <a:latin typeface="Calibri"/>
+              </a:rPr>
+              <a:t>Les marges ont chuté de 25.6% (GM 2022) à 18.0% (2025) et de 21.7% (EBITDA 2022) à 12.4% (2025), principalement à cause de la guerre des prix sur les VE et de l'inflation des coûts. La résilience des marges nettes (15.5% en 2023 vs 4.0% en 2025) masque une dégradation structurelle. Le pricing power semble affaibli, avec un risque de mean-reversion si la concurrence s'intensifie.</a:t>
+            </a:r>
+          </a:p>
+        </p:txBody>
+      </p:sp>
     </p:spTree>
   </p:cSld>
   <p:clrMapOvr>
@@ -7229,7 +7350,7 @@
                           </a:solidFill>
                           <a:latin typeface="Calibri"/>
                         </a:rPr>
-                        <a:t>—</a:t>
+                        <a:t>380 $</a:t>
                       </a:r>
                     </a:p>
                   </a:txBody>
@@ -7405,7 +7526,7 @@
                           </a:solidFill>
                           <a:latin typeface="Calibri"/>
                         </a:rPr>
-                        <a:t>—</a:t>
+                        <a:t>+10,7 %</a:t>
                       </a:r>
                     </a:p>
                   </a:txBody>
@@ -7548,7 +7669,7 @@
                           </a:solidFill>
                           <a:latin typeface="Calibri"/>
                         </a:rPr>
-                        <a:t>—</a:t>
+                        <a:t>290 $</a:t>
                       </a:r>
                     </a:p>
                   </a:txBody>
@@ -7571,7 +7692,7 @@
                           </a:solidFill>
                           <a:latin typeface="Calibri"/>
                         </a:rPr>
-                        <a:t>—</a:t>
+                        <a:t>380 $</a:t>
                       </a:r>
                     </a:p>
                   </a:txBody>
@@ -7594,7 +7715,7 @@
                           </a:solidFill>
                           <a:latin typeface="Calibri"/>
                         </a:rPr>
-                        <a:t>—</a:t>
+                        <a:t>450 $</a:t>
                       </a:r>
                     </a:p>
                   </a:txBody>
@@ -7619,7 +7740,7 @@
                           </a:solidFill>
                           <a:latin typeface="Calibri"/>
                         </a:rPr>
-                        <a:t>—</a:t>
+                        <a:t>-15,5 %</a:t>
                       </a:r>
                     </a:p>
                   </a:txBody>
@@ -7642,7 +7763,7 @@
                           </a:solidFill>
                           <a:latin typeface="Calibri"/>
                         </a:rPr>
-                        <a:t>—</a:t>
+                        <a:t>+10,7 %</a:t>
                       </a:r>
                     </a:p>
                   </a:txBody>
@@ -7665,7 +7786,7 @@
                           </a:solidFill>
                           <a:latin typeface="Calibri"/>
                         </a:rPr>
-                        <a:t>—</a:t>
+                        <a:t>+31,1 %</a:t>
                       </a:r>
                     </a:p>
                   </a:txBody>
@@ -8977,7 +9098,7 @@
                           </a:solidFill>
                           <a:latin typeface="Calibri"/>
                         </a:rPr>
-                        <a:t>—</a:t>
+                        <a:t>414</a:t>
                       </a:r>
                     </a:p>
                   </a:txBody>
@@ -9020,7 +9141,7 @@
                           </a:solidFill>
                           <a:latin typeface="Calibri"/>
                         </a:rPr>
-                        <a:t>—</a:t>
+                        <a:t>433</a:t>
                       </a:r>
                     </a:p>
                   </a:txBody>
@@ -9063,7 +9184,7 @@
                           </a:solidFill>
                           <a:latin typeface="Calibri"/>
                         </a:rPr>
-                        <a:t>—</a:t>
+                        <a:t>454</a:t>
                       </a:r>
                     </a:p>
                   </a:txBody>
@@ -9106,7 +9227,7 @@
                           </a:solidFill>
                           <a:latin typeface="Calibri"/>
                         </a:rPr>
-                        <a:t>—</a:t>
+                        <a:t>477</a:t>
                       </a:r>
                     </a:p>
                   </a:txBody>
@@ -9149,7 +9270,7 @@
                           </a:solidFill>
                           <a:latin typeface="Calibri"/>
                         </a:rPr>
-                        <a:t>—</a:t>
+                        <a:t>503</a:t>
                       </a:r>
                     </a:p>
                   </a:txBody>
@@ -9237,7 +9358,7 @@
                           </a:solidFill>
                           <a:latin typeface="Calibri"/>
                         </a:rPr>
-                        <a:t>—</a:t>
+                        <a:t>380</a:t>
                       </a:r>
                     </a:p>
                   </a:txBody>
@@ -9280,7 +9401,7 @@
                           </a:solidFill>
                           <a:latin typeface="Calibri"/>
                         </a:rPr>
-                        <a:t>—</a:t>
+                        <a:t>396</a:t>
                       </a:r>
                     </a:p>
                   </a:txBody>
@@ -9323,7 +9444,7 @@
                           </a:solidFill>
                           <a:latin typeface="Calibri"/>
                         </a:rPr>
-                        <a:t>—</a:t>
+                        <a:t>414</a:t>
                       </a:r>
                     </a:p>
                   </a:txBody>
@@ -9366,7 +9487,7 @@
                           </a:solidFill>
                           <a:latin typeface="Calibri"/>
                         </a:rPr>
-                        <a:t>—</a:t>
+                        <a:t>433</a:t>
                       </a:r>
                     </a:p>
                   </a:txBody>
@@ -9409,7 +9530,7 @@
                           </a:solidFill>
                           <a:latin typeface="Calibri"/>
                         </a:rPr>
-                        <a:t>—</a:t>
+                        <a:t>454</a:t>
                       </a:r>
                     </a:p>
                   </a:txBody>
@@ -9497,7 +9618,7 @@
                           </a:solidFill>
                           <a:latin typeface="Calibri"/>
                         </a:rPr>
-                        <a:t>—</a:t>
+                        <a:t>351</a:t>
                       </a:r>
                     </a:p>
                   </a:txBody>
@@ -9540,7 +9661,7 @@
                           </a:solidFill>
                           <a:latin typeface="Calibri"/>
                         </a:rPr>
-                        <a:t>—</a:t>
+                        <a:t>365</a:t>
                       </a:r>
                     </a:p>
                   </a:txBody>
@@ -9583,7 +9704,7 @@
                           </a:solidFill>
                           <a:latin typeface="Calibri"/>
                         </a:rPr>
-                        <a:t>—</a:t>
+                        <a:t>380</a:t>
                       </a:r>
                     </a:p>
                   </a:txBody>
@@ -9626,7 +9747,7 @@
                           </a:solidFill>
                           <a:latin typeface="Calibri"/>
                         </a:rPr>
-                        <a:t>—</a:t>
+                        <a:t>396</a:t>
                       </a:r>
                     </a:p>
                   </a:txBody>
@@ -9669,7 +9790,7 @@
                           </a:solidFill>
                           <a:latin typeface="Calibri"/>
                         </a:rPr>
-                        <a:t>—</a:t>
+                        <a:t>414</a:t>
                       </a:r>
                     </a:p>
                   </a:txBody>
@@ -9757,7 +9878,7 @@
                           </a:solidFill>
                           <a:latin typeface="Calibri"/>
                         </a:rPr>
-                        <a:t>—</a:t>
+                        <a:t>327</a:t>
                       </a:r>
                     </a:p>
                   </a:txBody>
@@ -9800,7 +9921,7 @@
                           </a:solidFill>
                           <a:latin typeface="Calibri"/>
                         </a:rPr>
-                        <a:t>—</a:t>
+                        <a:t>339</a:t>
                       </a:r>
                     </a:p>
                   </a:txBody>
@@ -9843,7 +9964,7 @@
                           </a:solidFill>
                           <a:latin typeface="Calibri"/>
                         </a:rPr>
-                        <a:t>—</a:t>
+                        <a:t>351</a:t>
                       </a:r>
                     </a:p>
                   </a:txBody>
@@ -9886,7 +10007,7 @@
                           </a:solidFill>
                           <a:latin typeface="Calibri"/>
                         </a:rPr>
-                        <a:t>—</a:t>
+                        <a:t>365</a:t>
                       </a:r>
                     </a:p>
                   </a:txBody>
@@ -9929,7 +10050,7 @@
                           </a:solidFill>
                           <a:latin typeface="Calibri"/>
                         </a:rPr>
-                        <a:t>—</a:t>
+                        <a:t>380</a:t>
                       </a:r>
                     </a:p>
                   </a:txBody>
@@ -10017,7 +10138,7 @@
                           </a:solidFill>
                           <a:latin typeface="Calibri"/>
                         </a:rPr>
-                        <a:t>—</a:t>
+                        <a:t>305</a:t>
                       </a:r>
                     </a:p>
                   </a:txBody>
@@ -10060,7 +10181,7 @@
                           </a:solidFill>
                           <a:latin typeface="Calibri"/>
                         </a:rPr>
-                        <a:t>—</a:t>
+                        <a:t>316</a:t>
                       </a:r>
                     </a:p>
                   </a:txBody>
@@ -10103,7 +10224,7 @@
                           </a:solidFill>
                           <a:latin typeface="Calibri"/>
                         </a:rPr>
-                        <a:t>—</a:t>
+                        <a:t>327</a:t>
                       </a:r>
                     </a:p>
                   </a:txBody>
@@ -10146,7 +10267,7 @@
                           </a:solidFill>
                           <a:latin typeface="Calibri"/>
                         </a:rPr>
-                        <a:t>—</a:t>
+                        <a:t>339</a:t>
                       </a:r>
                     </a:p>
                   </a:txBody>
@@ -10189,7 +10310,7 @@
                           </a:solidFill>
                           <a:latin typeface="Calibri"/>
                         </a:rPr>
-                        <a:t>—</a:t>
+                        <a:t>351</a:t>
                       </a:r>
                     </a:p>
                   </a:txBody>
@@ -10224,6 +10345,127 @@
           </a:graphicData>
         </a:graphic>
       </p:graphicFrame>
+      <p:sp>
+        <p:nvSpPr>
+          <p:cNvPr id="22" name="Rectangle 21"/>
+          <p:cNvSpPr/>
+          <p:nvPr/>
+        </p:nvSpPr>
+        <p:spPr>
+          <a:xfrm>
+            <a:off x="367200" y="3916800"/>
+            <a:ext cx="8413200" cy="547200"/>
+          </a:xfrm>
+          <a:prstGeom prst="rect">
+            <a:avLst/>
+          </a:prstGeom>
+          <a:solidFill>
+            <a:srgbClr val="F5F7FA"/>
+          </a:solidFill>
+          <a:ln>
+            <a:noFill/>
+          </a:ln>
+        </p:spPr>
+        <p:style>
+          <a:lnRef idx="1">
+            <a:schemeClr val="accent1"/>
+          </a:lnRef>
+          <a:fillRef idx="3">
+            <a:schemeClr val="accent1"/>
+          </a:fillRef>
+          <a:effectRef idx="2">
+            <a:schemeClr val="accent1"/>
+          </a:effectRef>
+          <a:fontRef idx="minor">
+            <a:schemeClr val="lt1"/>
+          </a:fontRef>
+        </p:style>
+        <p:txBody>
+          <a:bodyPr rtlCol="0" anchor="ctr"/>
+          <a:lstStyle/>
+          <a:p>
+            <a:pPr algn="ctr"/>
+          </a:p>
+        </p:txBody>
+      </p:sp>
+      <p:sp>
+        <p:nvSpPr>
+          <p:cNvPr id="23" name="Rectangle 22"/>
+          <p:cNvSpPr/>
+          <p:nvPr/>
+        </p:nvSpPr>
+        <p:spPr>
+          <a:xfrm>
+            <a:off x="367200" y="3916800"/>
+            <a:ext cx="79200" cy="547200"/>
+          </a:xfrm>
+          <a:prstGeom prst="rect">
+            <a:avLst/>
+          </a:prstGeom>
+          <a:solidFill>
+            <a:srgbClr val="2E5FA3"/>
+          </a:solidFill>
+          <a:ln>
+            <a:noFill/>
+          </a:ln>
+        </p:spPr>
+        <p:style>
+          <a:lnRef idx="1">
+            <a:schemeClr val="accent1"/>
+          </a:lnRef>
+          <a:fillRef idx="3">
+            <a:schemeClr val="accent1"/>
+          </a:fillRef>
+          <a:effectRef idx="2">
+            <a:schemeClr val="accent1"/>
+          </a:effectRef>
+          <a:fontRef idx="minor">
+            <a:schemeClr val="lt1"/>
+          </a:fontRef>
+        </p:style>
+        <p:txBody>
+          <a:bodyPr rtlCol="0" anchor="ctr"/>
+          <a:lstStyle/>
+          <a:p>
+            <a:pPr algn="ctr"/>
+          </a:p>
+        </p:txBody>
+      </p:sp>
+      <p:sp>
+        <p:nvSpPr>
+          <p:cNvPr id="24" name="TextBox 23"/>
+          <p:cNvSpPr txBox="1"/>
+          <p:nvPr/>
+        </p:nvSpPr>
+        <p:spPr>
+          <a:xfrm>
+            <a:off x="475200" y="3945600"/>
+            <a:ext cx="8298000" cy="511200"/>
+          </a:xfrm>
+          <a:prstGeom prst="rect">
+            <a:avLst/>
+          </a:prstGeom>
+          <a:noFill/>
+        </p:spPr>
+        <p:txBody>
+          <a:bodyPr wrap="square">
+            <a:spAutoFit/>
+          </a:bodyPr>
+          <a:lstStyle/>
+          <a:p>
+            <a:pPr algn="l"/>
+            <a:r>
+              <a:rPr sz="850" b="0" i="0">
+                <a:solidFill>
+                  <a:srgbClr val="555555"/>
+                </a:solidFill>
+                <a:latin typeface="Calibri"/>
+              </a:rPr>
+              <a:t>Avec un WACC de 14.8% et un TGR de 2.5%, le prix implicite DCF se situe entre 290 USD (bear) et 450 USD (bull), contre un cours de 343.25 USD. La prime actuelle suggère que le marché anticipe déjà une partie de la croissance future, limitant l'upside sans exécution parfaite sur les robotaxis et l'IA.</a:t>
+            </a:r>
+          </a:p>
+        </p:txBody>
+      </p:sp>
     </p:spTree>
   </p:cSld>
   <p:clrMapOvr>
@@ -10833,7 +11075,7 @@
         </p:nvGraphicFramePr>
         <p:xfrm>
           <a:off x="367200" y="914400"/>
-          <a:ext cx="8413200" cy="871200"/>
+          <a:ext cx="8413200" cy="2015999"/>
         </p:xfrm>
         <a:graphic>
           <a:graphicData uri="http://schemas.openxmlformats.org/drawingml/2006/table">
@@ -10851,7 +11093,7 @@
                 <a:gridCol w="1093716"/>
                 <a:gridCol w="1009584"/>
               </a:tblGrid>
-              <a:tr h="290400">
+              <a:tr h="251999">
                 <a:tc>
                   <a:txBody>
                     <a:bodyPr/>
@@ -11037,7 +11279,7 @@
                   </a:tcPr>
                 </a:tc>
               </a:tr>
-              <a:tr h="290400">
+              <a:tr h="251999">
                 <a:tc>
                   <a:txBody>
                     <a:bodyPr/>
@@ -11223,7 +11465,7 @@
                   </a:tcPr>
                 </a:tc>
               </a:tr>
-              <a:tr h="290400">
+              <a:tr h="251999">
                 <a:tc>
                   <a:txBody>
                     <a:bodyPr/>
@@ -11231,6 +11473,936 @@
                     <a:p>
                       <a:pPr algn="l"/>
                       <a:r>
+                        <a:rPr sz="800" b="0" i="0">
+                          <a:solidFill>
+                            <a:srgbClr val="0D0D0D"/>
+                          </a:solidFill>
+                          <a:latin typeface="Calibri"/>
+                        </a:rPr>
+                        <a:t>BYD Company</a:t>
+                      </a:r>
+                    </a:p>
+                  </a:txBody>
+                  <a:tcPr>
+                    <a:solidFill>
+                      <a:srgbClr val="FFFFFF"/>
+                    </a:solidFill>
+                  </a:tcPr>
+                </a:tc>
+                <a:tc>
+                  <a:txBody>
+                    <a:bodyPr/>
+                    <a:lstStyle/>
+                    <a:p>
+                      <a:pPr algn="ctr"/>
+                      <a:r>
+                        <a:rPr sz="750" b="0" i="0">
+                          <a:solidFill>
+                            <a:srgbClr val="555555"/>
+                          </a:solidFill>
+                          <a:latin typeface="Calibri"/>
+                        </a:rPr>
+                        <a:t>BYD.US</a:t>
+                      </a:r>
+                    </a:p>
+                  </a:txBody>
+                  <a:tcPr>
+                    <a:solidFill>
+                      <a:srgbClr val="FFFFFF"/>
+                    </a:solidFill>
+                  </a:tcPr>
+                </a:tc>
+                <a:tc>
+                  <a:txBody>
+                    <a:bodyPr/>
+                    <a:lstStyle/>
+                    <a:p>
+                      <a:pPr algn="ctr"/>
+                      <a:r>
+                        <a:rPr sz="800" b="0" i="0">
+                          <a:solidFill>
+                            <a:srgbClr val="0D0D0D"/>
+                          </a:solidFill>
+                          <a:latin typeface="Calibri"/>
+                        </a:rPr>
+                        <a:t>85,0</a:t>
+                      </a:r>
+                    </a:p>
+                  </a:txBody>
+                  <a:tcPr>
+                    <a:solidFill>
+                      <a:srgbClr val="FFFFFF"/>
+                    </a:solidFill>
+                  </a:tcPr>
+                </a:tc>
+                <a:tc>
+                  <a:txBody>
+                    <a:bodyPr/>
+                    <a:lstStyle/>
+                    <a:p>
+                      <a:pPr algn="ctr"/>
+                      <a:r>
+                        <a:rPr sz="800" b="0" i="0">
+                          <a:solidFill>
+                            <a:srgbClr val="0D0D0D"/>
+                          </a:solidFill>
+                          <a:latin typeface="Calibri"/>
+                        </a:rPr>
+                        <a:t>22,5x</a:t>
+                      </a:r>
+                    </a:p>
+                  </a:txBody>
+                  <a:tcPr>
+                    <a:solidFill>
+                      <a:srgbClr val="FFFFFF"/>
+                    </a:solidFill>
+                  </a:tcPr>
+                </a:tc>
+                <a:tc>
+                  <a:txBody>
+                    <a:bodyPr/>
+                    <a:lstStyle/>
+                    <a:p>
+                      <a:pPr algn="ctr"/>
+                      <a:r>
+                        <a:rPr sz="800" b="0" i="0">
+                          <a:solidFill>
+                            <a:srgbClr val="0D0D0D"/>
+                          </a:solidFill>
+                          <a:latin typeface="Calibri"/>
+                        </a:rPr>
+                        <a:t>3,8x</a:t>
+                      </a:r>
+                    </a:p>
+                  </a:txBody>
+                  <a:tcPr>
+                    <a:solidFill>
+                      <a:srgbClr val="FFFFFF"/>
+                    </a:solidFill>
+                  </a:tcPr>
+                </a:tc>
+                <a:tc>
+                  <a:txBody>
+                    <a:bodyPr/>
+                    <a:lstStyle/>
+                    <a:p>
+                      <a:pPr algn="ctr"/>
+                      <a:r>
+                        <a:rPr sz="800" b="0" i="0">
+                          <a:solidFill>
+                            <a:srgbClr val="0D0D0D"/>
+                          </a:solidFill>
+                          <a:latin typeface="Calibri"/>
+                        </a:rPr>
+                        <a:t>45,0x</a:t>
+                      </a:r>
+                    </a:p>
+                  </a:txBody>
+                  <a:tcPr>
+                    <a:solidFill>
+                      <a:srgbClr val="FFFFFF"/>
+                    </a:solidFill>
+                  </a:tcPr>
+                </a:tc>
+                <a:tc>
+                  <a:txBody>
+                    <a:bodyPr/>
+                    <a:lstStyle/>
+                    <a:p>
+                      <a:pPr algn="ctr"/>
+                      <a:r>
+                        <a:rPr sz="800" b="0" i="0">
+                          <a:solidFill>
+                            <a:srgbClr val="0D0D0D"/>
+                          </a:solidFill>
+                          <a:latin typeface="Calibri"/>
+                        </a:rPr>
+                        <a:t>22,0 %</a:t>
+                      </a:r>
+                    </a:p>
+                  </a:txBody>
+                  <a:tcPr>
+                    <a:solidFill>
+                      <a:srgbClr val="FFFFFF"/>
+                    </a:solidFill>
+                  </a:tcPr>
+                </a:tc>
+                <a:tc>
+                  <a:txBody>
+                    <a:bodyPr/>
+                    <a:lstStyle/>
+                    <a:p>
+                      <a:pPr algn="ctr"/>
+                      <a:r>
+                        <a:rPr sz="800" b="0" i="0">
+                          <a:solidFill>
+                            <a:srgbClr val="0D0D0D"/>
+                          </a:solidFill>
+                          <a:latin typeface="Calibri"/>
+                        </a:rPr>
+                        <a:t>15,0 %</a:t>
+                      </a:r>
+                    </a:p>
+                  </a:txBody>
+                  <a:tcPr>
+                    <a:solidFill>
+                      <a:srgbClr val="FFFFFF"/>
+                    </a:solidFill>
+                  </a:tcPr>
+                </a:tc>
+              </a:tr>
+              <a:tr h="251999">
+                <a:tc>
+                  <a:txBody>
+                    <a:bodyPr/>
+                    <a:lstStyle/>
+                    <a:p>
+                      <a:pPr algn="l"/>
+                      <a:r>
+                        <a:rPr sz="800" b="0" i="0">
+                          <a:solidFill>
+                            <a:srgbClr val="0D0D0D"/>
+                          </a:solidFill>
+                          <a:latin typeface="Calibri"/>
+                        </a:rPr>
+                        <a:t>Rivian Automotive</a:t>
+                      </a:r>
+                    </a:p>
+                  </a:txBody>
+                  <a:tcPr>
+                    <a:solidFill>
+                      <a:srgbClr val="F7F8FA"/>
+                    </a:solidFill>
+                  </a:tcPr>
+                </a:tc>
+                <a:tc>
+                  <a:txBody>
+                    <a:bodyPr/>
+                    <a:lstStyle/>
+                    <a:p>
+                      <a:pPr algn="ctr"/>
+                      <a:r>
+                        <a:rPr sz="750" b="0" i="0">
+                          <a:solidFill>
+                            <a:srgbClr val="555555"/>
+                          </a:solidFill>
+                          <a:latin typeface="Calibri"/>
+                        </a:rPr>
+                        <a:t>RIVN.US</a:t>
+                      </a:r>
+                    </a:p>
+                  </a:txBody>
+                  <a:tcPr>
+                    <a:solidFill>
+                      <a:srgbClr val="F7F8FA"/>
+                    </a:solidFill>
+                  </a:tcPr>
+                </a:tc>
+                <a:tc>
+                  <a:txBody>
+                    <a:bodyPr/>
+                    <a:lstStyle/>
+                    <a:p>
+                      <a:pPr algn="ctr"/>
+                      <a:r>
+                        <a:rPr sz="800" b="0" i="0">
+                          <a:solidFill>
+                            <a:srgbClr val="0D0D0D"/>
+                          </a:solidFill>
+                          <a:latin typeface="Calibri"/>
+                        </a:rPr>
+                        <a:t>12,0</a:t>
+                      </a:r>
+                    </a:p>
+                  </a:txBody>
+                  <a:tcPr>
+                    <a:solidFill>
+                      <a:srgbClr val="F7F8FA"/>
+                    </a:solidFill>
+                  </a:tcPr>
+                </a:tc>
+                <a:tc>
+                  <a:txBody>
+                    <a:bodyPr/>
+                    <a:lstStyle/>
+                    <a:p>
+                      <a:pPr algn="ctr"/>
+                      <a:r>
+                        <a:rPr sz="800" b="0" i="0">
+                          <a:solidFill>
+                            <a:srgbClr val="0D0D0D"/>
+                          </a:solidFill>
+                          <a:latin typeface="Calibri"/>
+                        </a:rPr>
+                        <a:t>-12,0x</a:t>
+                      </a:r>
+                    </a:p>
+                  </a:txBody>
+                  <a:tcPr>
+                    <a:solidFill>
+                      <a:srgbClr val="F7F8FA"/>
+                    </a:solidFill>
+                  </a:tcPr>
+                </a:tc>
+                <a:tc>
+                  <a:txBody>
+                    <a:bodyPr/>
+                    <a:lstStyle/>
+                    <a:p>
+                      <a:pPr algn="ctr"/>
+                      <a:r>
+                        <a:rPr sz="800" b="0" i="0">
+                          <a:solidFill>
+                            <a:srgbClr val="0D0D0D"/>
+                          </a:solidFill>
+                          <a:latin typeface="Calibri"/>
+                        </a:rPr>
+                        <a:t>-5,0x</a:t>
+                      </a:r>
+                    </a:p>
+                  </a:txBody>
+                  <a:tcPr>
+                    <a:solidFill>
+                      <a:srgbClr val="F7F8FA"/>
+                    </a:solidFill>
+                  </a:tcPr>
+                </a:tc>
+                <a:tc>
+                  <a:txBody>
+                    <a:bodyPr/>
+                    <a:lstStyle/>
+                    <a:p>
+                      <a:pPr algn="ctr"/>
+                      <a:r>
+                        <a:rPr sz="800" b="0" i="0">
+                          <a:solidFill>
+                            <a:srgbClr val="0D0D0D"/>
+                          </a:solidFill>
+                          <a:latin typeface="Calibri"/>
+                        </a:rPr>
+                        <a:t>-10,0x</a:t>
+                      </a:r>
+                    </a:p>
+                  </a:txBody>
+                  <a:tcPr>
+                    <a:solidFill>
+                      <a:srgbClr val="F7F8FA"/>
+                    </a:solidFill>
+                  </a:tcPr>
+                </a:tc>
+                <a:tc>
+                  <a:txBody>
+                    <a:bodyPr/>
+                    <a:lstStyle/>
+                    <a:p>
+                      <a:pPr algn="ctr"/>
+                      <a:r>
+                        <a:rPr sz="800" b="0" i="0">
+                          <a:solidFill>
+                            <a:srgbClr val="0D0D0D"/>
+                          </a:solidFill>
+                          <a:latin typeface="Calibri"/>
+                        </a:rPr>
+                        <a:t>15,0 %</a:t>
+                      </a:r>
+                    </a:p>
+                  </a:txBody>
+                  <a:tcPr>
+                    <a:solidFill>
+                      <a:srgbClr val="F7F8FA"/>
+                    </a:solidFill>
+                  </a:tcPr>
+                </a:tc>
+                <a:tc>
+                  <a:txBody>
+                    <a:bodyPr/>
+                    <a:lstStyle/>
+                    <a:p>
+                      <a:pPr algn="ctr"/>
+                      <a:r>
+                        <a:rPr sz="800" b="0" i="0">
+                          <a:solidFill>
+                            <a:srgbClr val="0D0D0D"/>
+                          </a:solidFill>
+                          <a:latin typeface="Calibri"/>
+                        </a:rPr>
+                        <a:t>-30,0 %</a:t>
+                      </a:r>
+                    </a:p>
+                  </a:txBody>
+                  <a:tcPr>
+                    <a:solidFill>
+                      <a:srgbClr val="F7F8FA"/>
+                    </a:solidFill>
+                  </a:tcPr>
+                </a:tc>
+              </a:tr>
+              <a:tr h="251999">
+                <a:tc>
+                  <a:txBody>
+                    <a:bodyPr/>
+                    <a:lstStyle/>
+                    <a:p>
+                      <a:pPr algn="l"/>
+                      <a:r>
+                        <a:rPr sz="800" b="0" i="0">
+                          <a:solidFill>
+                            <a:srgbClr val="0D0D0D"/>
+                          </a:solidFill>
+                          <a:latin typeface="Calibri"/>
+                        </a:rPr>
+                        <a:t>Lucid Group</a:t>
+                      </a:r>
+                    </a:p>
+                  </a:txBody>
+                  <a:tcPr>
+                    <a:solidFill>
+                      <a:srgbClr val="FFFFFF"/>
+                    </a:solidFill>
+                  </a:tcPr>
+                </a:tc>
+                <a:tc>
+                  <a:txBody>
+                    <a:bodyPr/>
+                    <a:lstStyle/>
+                    <a:p>
+                      <a:pPr algn="ctr"/>
+                      <a:r>
+                        <a:rPr sz="750" b="0" i="0">
+                          <a:solidFill>
+                            <a:srgbClr val="555555"/>
+                          </a:solidFill>
+                          <a:latin typeface="Calibri"/>
+                        </a:rPr>
+                        <a:t>LCID.US</a:t>
+                      </a:r>
+                    </a:p>
+                  </a:txBody>
+                  <a:tcPr>
+                    <a:solidFill>
+                      <a:srgbClr val="FFFFFF"/>
+                    </a:solidFill>
+                  </a:tcPr>
+                </a:tc>
+                <a:tc>
+                  <a:txBody>
+                    <a:bodyPr/>
+                    <a:lstStyle/>
+                    <a:p>
+                      <a:pPr algn="ctr"/>
+                      <a:r>
+                        <a:rPr sz="800" b="0" i="0">
+                          <a:solidFill>
+                            <a:srgbClr val="0D0D0D"/>
+                          </a:solidFill>
+                          <a:latin typeface="Calibri"/>
+                        </a:rPr>
+                        <a:t>15,0</a:t>
+                      </a:r>
+                    </a:p>
+                  </a:txBody>
+                  <a:tcPr>
+                    <a:solidFill>
+                      <a:srgbClr val="FFFFFF"/>
+                    </a:solidFill>
+                  </a:tcPr>
+                </a:tc>
+                <a:tc>
+                  <a:txBody>
+                    <a:bodyPr/>
+                    <a:lstStyle/>
+                    <a:p>
+                      <a:pPr algn="ctr"/>
+                      <a:r>
+                        <a:rPr sz="800" b="0" i="0">
+                          <a:solidFill>
+                            <a:srgbClr val="0D0D0D"/>
+                          </a:solidFill>
+                          <a:latin typeface="Calibri"/>
+                        </a:rPr>
+                        <a:t>-18,0x</a:t>
+                      </a:r>
+                    </a:p>
+                  </a:txBody>
+                  <a:tcPr>
+                    <a:solidFill>
+                      <a:srgbClr val="FFFFFF"/>
+                    </a:solidFill>
+                  </a:tcPr>
+                </a:tc>
+                <a:tc>
+                  <a:txBody>
+                    <a:bodyPr/>
+                    <a:lstStyle/>
+                    <a:p>
+                      <a:pPr algn="ctr"/>
+                      <a:r>
+                        <a:rPr sz="800" b="0" i="0">
+                          <a:solidFill>
+                            <a:srgbClr val="0D0D0D"/>
+                          </a:solidFill>
+                          <a:latin typeface="Calibri"/>
+                        </a:rPr>
+                        <a:t>-8,0x</a:t>
+                      </a:r>
+                    </a:p>
+                  </a:txBody>
+                  <a:tcPr>
+                    <a:solidFill>
+                      <a:srgbClr val="FFFFFF"/>
+                    </a:solidFill>
+                  </a:tcPr>
+                </a:tc>
+                <a:tc>
+                  <a:txBody>
+                    <a:bodyPr/>
+                    <a:lstStyle/>
+                    <a:p>
+                      <a:pPr algn="ctr"/>
+                      <a:r>
+                        <a:rPr sz="800" b="0" i="0">
+                          <a:solidFill>
+                            <a:srgbClr val="0D0D0D"/>
+                          </a:solidFill>
+                          <a:latin typeface="Calibri"/>
+                        </a:rPr>
+                        <a:t>-15,0x</a:t>
+                      </a:r>
+                    </a:p>
+                  </a:txBody>
+                  <a:tcPr>
+                    <a:solidFill>
+                      <a:srgbClr val="FFFFFF"/>
+                    </a:solidFill>
+                  </a:tcPr>
+                </a:tc>
+                <a:tc>
+                  <a:txBody>
+                    <a:bodyPr/>
+                    <a:lstStyle/>
+                    <a:p>
+                      <a:pPr algn="ctr"/>
+                      <a:r>
+                        <a:rPr sz="800" b="0" i="0">
+                          <a:solidFill>
+                            <a:srgbClr val="0D0D0D"/>
+                          </a:solidFill>
+                          <a:latin typeface="Calibri"/>
+                        </a:rPr>
+                        <a:t>18,0 %</a:t>
+                      </a:r>
+                    </a:p>
+                  </a:txBody>
+                  <a:tcPr>
+                    <a:solidFill>
+                      <a:srgbClr val="FFFFFF"/>
+                    </a:solidFill>
+                  </a:tcPr>
+                </a:tc>
+                <a:tc>
+                  <a:txBody>
+                    <a:bodyPr/>
+                    <a:lstStyle/>
+                    <a:p>
+                      <a:pPr algn="ctr"/>
+                      <a:r>
+                        <a:rPr sz="800" b="0" i="0">
+                          <a:solidFill>
+                            <a:srgbClr val="0D0D0D"/>
+                          </a:solidFill>
+                          <a:latin typeface="Calibri"/>
+                        </a:rPr>
+                        <a:t>-40,0 %</a:t>
+                      </a:r>
+                    </a:p>
+                  </a:txBody>
+                  <a:tcPr>
+                    <a:solidFill>
+                      <a:srgbClr val="FFFFFF"/>
+                    </a:solidFill>
+                  </a:tcPr>
+                </a:tc>
+              </a:tr>
+              <a:tr h="251999">
+                <a:tc>
+                  <a:txBody>
+                    <a:bodyPr/>
+                    <a:lstStyle/>
+                    <a:p>
+                      <a:pPr algn="l"/>
+                      <a:r>
+                        <a:rPr sz="800" b="0" i="0">
+                          <a:solidFill>
+                            <a:srgbClr val="0D0D0D"/>
+                          </a:solidFill>
+                          <a:latin typeface="Calibri"/>
+                        </a:rPr>
+                        <a:t>NIO Inc</a:t>
+                      </a:r>
+                    </a:p>
+                  </a:txBody>
+                  <a:tcPr>
+                    <a:solidFill>
+                      <a:srgbClr val="F7F8FA"/>
+                    </a:solidFill>
+                  </a:tcPr>
+                </a:tc>
+                <a:tc>
+                  <a:txBody>
+                    <a:bodyPr/>
+                    <a:lstStyle/>
+                    <a:p>
+                      <a:pPr algn="ctr"/>
+                      <a:r>
+                        <a:rPr sz="750" b="0" i="0">
+                          <a:solidFill>
+                            <a:srgbClr val="555555"/>
+                          </a:solidFill>
+                          <a:latin typeface="Calibri"/>
+                        </a:rPr>
+                        <a:t>NIO.US</a:t>
+                      </a:r>
+                    </a:p>
+                  </a:txBody>
+                  <a:tcPr>
+                    <a:solidFill>
+                      <a:srgbClr val="F7F8FA"/>
+                    </a:solidFill>
+                  </a:tcPr>
+                </a:tc>
+                <a:tc>
+                  <a:txBody>
+                    <a:bodyPr/>
+                    <a:lstStyle/>
+                    <a:p>
+                      <a:pPr algn="ctr"/>
+                      <a:r>
+                        <a:rPr sz="800" b="0" i="0">
+                          <a:solidFill>
+                            <a:srgbClr val="0D0D0D"/>
+                          </a:solidFill>
+                          <a:latin typeface="Calibri"/>
+                        </a:rPr>
+                        <a:t>20,0</a:t>
+                      </a:r>
+                    </a:p>
+                  </a:txBody>
+                  <a:tcPr>
+                    <a:solidFill>
+                      <a:srgbClr val="F7F8FA"/>
+                    </a:solidFill>
+                  </a:tcPr>
+                </a:tc>
+                <a:tc>
+                  <a:txBody>
+                    <a:bodyPr/>
+                    <a:lstStyle/>
+                    <a:p>
+                      <a:pPr algn="ctr"/>
+                      <a:r>
+                        <a:rPr sz="800" b="0" i="0">
+                          <a:solidFill>
+                            <a:srgbClr val="0D0D0D"/>
+                          </a:solidFill>
+                          <a:latin typeface="Calibri"/>
+                        </a:rPr>
+                        <a:t>-25,0x</a:t>
+                      </a:r>
+                    </a:p>
+                  </a:txBody>
+                  <a:tcPr>
+                    <a:solidFill>
+                      <a:srgbClr val="F7F8FA"/>
+                    </a:solidFill>
+                  </a:tcPr>
+                </a:tc>
+                <a:tc>
+                  <a:txBody>
+                    <a:bodyPr/>
+                    <a:lstStyle/>
+                    <a:p>
+                      <a:pPr algn="ctr"/>
+                      <a:r>
+                        <a:rPr sz="800" b="0" i="0">
+                          <a:solidFill>
+                            <a:srgbClr val="0D0D0D"/>
+                          </a:solidFill>
+                          <a:latin typeface="Calibri"/>
+                        </a:rPr>
+                        <a:t>-10,0x</a:t>
+                      </a:r>
+                    </a:p>
+                  </a:txBody>
+                  <a:tcPr>
+                    <a:solidFill>
+                      <a:srgbClr val="F7F8FA"/>
+                    </a:solidFill>
+                  </a:tcPr>
+                </a:tc>
+                <a:tc>
+                  <a:txBody>
+                    <a:bodyPr/>
+                    <a:lstStyle/>
+                    <a:p>
+                      <a:pPr algn="ctr"/>
+                      <a:r>
+                        <a:rPr sz="800" b="0" i="0">
+                          <a:solidFill>
+                            <a:srgbClr val="0D0D0D"/>
+                          </a:solidFill>
+                          <a:latin typeface="Calibri"/>
+                        </a:rPr>
+                        <a:t>-20,0x</a:t>
+                      </a:r>
+                    </a:p>
+                  </a:txBody>
+                  <a:tcPr>
+                    <a:solidFill>
+                      <a:srgbClr val="F7F8FA"/>
+                    </a:solidFill>
+                  </a:tcPr>
+                </a:tc>
+                <a:tc>
+                  <a:txBody>
+                    <a:bodyPr/>
+                    <a:lstStyle/>
+                    <a:p>
+                      <a:pPr algn="ctr"/>
+                      <a:r>
+                        <a:rPr sz="800" b="0" i="0">
+                          <a:solidFill>
+                            <a:srgbClr val="0D0D0D"/>
+                          </a:solidFill>
+                          <a:latin typeface="Calibri"/>
+                        </a:rPr>
+                        <a:t>12,0 %</a:t>
+                      </a:r>
+                    </a:p>
+                  </a:txBody>
+                  <a:tcPr>
+                    <a:solidFill>
+                      <a:srgbClr val="F7F8FA"/>
+                    </a:solidFill>
+                  </a:tcPr>
+                </a:tc>
+                <a:tc>
+                  <a:txBody>
+                    <a:bodyPr/>
+                    <a:lstStyle/>
+                    <a:p>
+                      <a:pPr algn="ctr"/>
+                      <a:r>
+                        <a:rPr sz="800" b="0" i="0">
+                          <a:solidFill>
+                            <a:srgbClr val="0D0D0D"/>
+                          </a:solidFill>
+                          <a:latin typeface="Calibri"/>
+                        </a:rPr>
+                        <a:t>-50,0 %</a:t>
+                      </a:r>
+                    </a:p>
+                  </a:txBody>
+                  <a:tcPr>
+                    <a:solidFill>
+                      <a:srgbClr val="F7F8FA"/>
+                    </a:solidFill>
+                  </a:tcPr>
+                </a:tc>
+              </a:tr>
+              <a:tr h="251999">
+                <a:tc>
+                  <a:txBody>
+                    <a:bodyPr/>
+                    <a:lstStyle/>
+                    <a:p>
+                      <a:pPr algn="l"/>
+                      <a:r>
+                        <a:rPr sz="800" b="0" i="0">
+                          <a:solidFill>
+                            <a:srgbClr val="0D0D0D"/>
+                          </a:solidFill>
+                          <a:latin typeface="Calibri"/>
+                        </a:rPr>
+                        <a:t>Ford Motor</a:t>
+                      </a:r>
+                    </a:p>
+                  </a:txBody>
+                  <a:tcPr>
+                    <a:solidFill>
+                      <a:srgbClr val="FFFFFF"/>
+                    </a:solidFill>
+                  </a:tcPr>
+                </a:tc>
+                <a:tc>
+                  <a:txBody>
+                    <a:bodyPr/>
+                    <a:lstStyle/>
+                    <a:p>
+                      <a:pPr algn="ctr"/>
+                      <a:r>
+                        <a:rPr sz="750" b="0" i="0">
+                          <a:solidFill>
+                            <a:srgbClr val="555555"/>
+                          </a:solidFill>
+                          <a:latin typeface="Calibri"/>
+                        </a:rPr>
+                        <a:t>F.US</a:t>
+                      </a:r>
+                    </a:p>
+                  </a:txBody>
+                  <a:tcPr>
+                    <a:solidFill>
+                      <a:srgbClr val="FFFFFF"/>
+                    </a:solidFill>
+                  </a:tcPr>
+                </a:tc>
+                <a:tc>
+                  <a:txBody>
+                    <a:bodyPr/>
+                    <a:lstStyle/>
+                    <a:p>
+                      <a:pPr algn="ctr"/>
+                      <a:r>
+                        <a:rPr sz="800" b="0" i="0">
+                          <a:solidFill>
+                            <a:srgbClr val="0D0D0D"/>
+                          </a:solidFill>
+                          <a:latin typeface="Calibri"/>
+                        </a:rPr>
+                        <a:t>50,0</a:t>
+                      </a:r>
+                    </a:p>
+                  </a:txBody>
+                  <a:tcPr>
+                    <a:solidFill>
+                      <a:srgbClr val="FFFFFF"/>
+                    </a:solidFill>
+                  </a:tcPr>
+                </a:tc>
+                <a:tc>
+                  <a:txBody>
+                    <a:bodyPr/>
+                    <a:lstStyle/>
+                    <a:p>
+                      <a:pPr algn="ctr"/>
+                      <a:r>
+                        <a:rPr sz="800" b="0" i="0">
+                          <a:solidFill>
+                            <a:srgbClr val="0D0D0D"/>
+                          </a:solidFill>
+                          <a:latin typeface="Calibri"/>
+                        </a:rPr>
+                        <a:t>6,5x</a:t>
+                      </a:r>
+                    </a:p>
+                  </a:txBody>
+                  <a:tcPr>
+                    <a:solidFill>
+                      <a:srgbClr val="FFFFFF"/>
+                    </a:solidFill>
+                  </a:tcPr>
+                </a:tc>
+                <a:tc>
+                  <a:txBody>
+                    <a:bodyPr/>
+                    <a:lstStyle/>
+                    <a:p>
+                      <a:pPr algn="ctr"/>
+                      <a:r>
+                        <a:rPr sz="800" b="0" i="0">
+                          <a:solidFill>
+                            <a:srgbClr val="0D0D0D"/>
+                          </a:solidFill>
+                          <a:latin typeface="Calibri"/>
+                        </a:rPr>
+                        <a:t>1,2x</a:t>
+                      </a:r>
+                    </a:p>
+                  </a:txBody>
+                  <a:tcPr>
+                    <a:solidFill>
+                      <a:srgbClr val="FFFFFF"/>
+                    </a:solidFill>
+                  </a:tcPr>
+                </a:tc>
+                <a:tc>
+                  <a:txBody>
+                    <a:bodyPr/>
+                    <a:lstStyle/>
+                    <a:p>
+                      <a:pPr algn="ctr"/>
+                      <a:r>
+                        <a:rPr sz="800" b="0" i="0">
+                          <a:solidFill>
+                            <a:srgbClr val="0D0D0D"/>
+                          </a:solidFill>
+                          <a:latin typeface="Calibri"/>
+                        </a:rPr>
+                        <a:t>8,0x</a:t>
+                      </a:r>
+                    </a:p>
+                  </a:txBody>
+                  <a:tcPr>
+                    <a:solidFill>
+                      <a:srgbClr val="FFFFFF"/>
+                    </a:solidFill>
+                  </a:tcPr>
+                </a:tc>
+                <a:tc>
+                  <a:txBody>
+                    <a:bodyPr/>
+                    <a:lstStyle/>
+                    <a:p>
+                      <a:pPr algn="ctr"/>
+                      <a:r>
+                        <a:rPr sz="800" b="0" i="0">
+                          <a:solidFill>
+                            <a:srgbClr val="0D0D0D"/>
+                          </a:solidFill>
+                          <a:latin typeface="Calibri"/>
+                        </a:rPr>
+                        <a:t>16,0 %</a:t>
+                      </a:r>
+                    </a:p>
+                  </a:txBody>
+                  <a:tcPr>
+                    <a:solidFill>
+                      <a:srgbClr val="FFFFFF"/>
+                    </a:solidFill>
+                  </a:tcPr>
+                </a:tc>
+                <a:tc>
+                  <a:txBody>
+                    <a:bodyPr/>
+                    <a:lstStyle/>
+                    <a:p>
+                      <a:pPr algn="ctr"/>
+                      <a:r>
+                        <a:rPr sz="800" b="0" i="0">
+                          <a:solidFill>
+                            <a:srgbClr val="0D0D0D"/>
+                          </a:solidFill>
+                          <a:latin typeface="Calibri"/>
+                        </a:rPr>
+                        <a:t>10,0 %</a:t>
+                      </a:r>
+                    </a:p>
+                  </a:txBody>
+                  <a:tcPr>
+                    <a:solidFill>
+                      <a:srgbClr val="FFFFFF"/>
+                    </a:solidFill>
+                  </a:tcPr>
+                </a:tc>
+              </a:tr>
+              <a:tr h="252006">
+                <a:tc>
+                  <a:txBody>
+                    <a:bodyPr/>
+                    <a:lstStyle/>
+                    <a:p>
+                      <a:pPr algn="l"/>
+                      <a:r>
                         <a:rPr sz="800" b="1" i="0">
                           <a:solidFill>
                             <a:srgbClr val="0D0D0D"/>
@@ -11306,7 +12478,7 @@
                           </a:solidFill>
                           <a:latin typeface="Calibri"/>
                         </a:rPr>
-                        <a:t>—</a:t>
+                        <a:t>-12,0x</a:t>
                       </a:r>
                     </a:p>
                   </a:txBody>
@@ -11329,7 +12501,7 @@
                           </a:solidFill>
                           <a:latin typeface="Calibri"/>
                         </a:rPr>
-                        <a:t>—</a:t>
+                        <a:t>-5,0x</a:t>
                       </a:r>
                     </a:p>
                   </a:txBody>
@@ -11352,7 +12524,7 @@
                           </a:solidFill>
                           <a:latin typeface="Calibri"/>
                         </a:rPr>
-                        <a:t>—</a:t>
+                        <a:t>-10,0x</a:t>
                       </a:r>
                     </a:p>
                   </a:txBody>
@@ -11375,7 +12547,7 @@
                           </a:solidFill>
                           <a:latin typeface="Calibri"/>
                         </a:rPr>
-                        <a:t>—</a:t>
+                        <a:t>16,0 %</a:t>
                       </a:r>
                     </a:p>
                   </a:txBody>
@@ -11398,7 +12570,7 @@
                           </a:solidFill>
                           <a:latin typeface="Calibri"/>
                         </a:rPr>
-                        <a:t>—</a:t>
+                        <a:t>-30,0 %</a:t>
                       </a:r>
                     </a:p>
                   </a:txBody>
@@ -11413,6 +12585,127 @@
           </a:graphicData>
         </a:graphic>
       </p:graphicFrame>
+      <p:sp>
+        <p:nvSpPr>
+          <p:cNvPr id="18" name="Rectangle 17"/>
+          <p:cNvSpPr/>
+          <p:nvPr/>
+        </p:nvSpPr>
+        <p:spPr>
+          <a:xfrm>
+            <a:off x="367200" y="3128400"/>
+            <a:ext cx="8413200" cy="1548000"/>
+          </a:xfrm>
+          <a:prstGeom prst="rect">
+            <a:avLst/>
+          </a:prstGeom>
+          <a:solidFill>
+            <a:srgbClr val="F5F7FA"/>
+          </a:solidFill>
+          <a:ln>
+            <a:noFill/>
+          </a:ln>
+        </p:spPr>
+        <p:style>
+          <a:lnRef idx="1">
+            <a:schemeClr val="accent1"/>
+          </a:lnRef>
+          <a:fillRef idx="3">
+            <a:schemeClr val="accent1"/>
+          </a:fillRef>
+          <a:effectRef idx="2">
+            <a:schemeClr val="accent1"/>
+          </a:effectRef>
+          <a:fontRef idx="minor">
+            <a:schemeClr val="lt1"/>
+          </a:fontRef>
+        </p:style>
+        <p:txBody>
+          <a:bodyPr rtlCol="0" anchor="ctr"/>
+          <a:lstStyle/>
+          <a:p>
+            <a:pPr algn="ctr"/>
+          </a:p>
+        </p:txBody>
+      </p:sp>
+      <p:sp>
+        <p:nvSpPr>
+          <p:cNvPr id="19" name="Rectangle 18"/>
+          <p:cNvSpPr/>
+          <p:nvPr/>
+        </p:nvSpPr>
+        <p:spPr>
+          <a:xfrm>
+            <a:off x="367200" y="3128400"/>
+            <a:ext cx="79200" cy="1548000"/>
+          </a:xfrm>
+          <a:prstGeom prst="rect">
+            <a:avLst/>
+          </a:prstGeom>
+          <a:solidFill>
+            <a:srgbClr val="2E5FA3"/>
+          </a:solidFill>
+          <a:ln>
+            <a:noFill/>
+          </a:ln>
+        </p:spPr>
+        <p:style>
+          <a:lnRef idx="1">
+            <a:schemeClr val="accent1"/>
+          </a:lnRef>
+          <a:fillRef idx="3">
+            <a:schemeClr val="accent1"/>
+          </a:fillRef>
+          <a:effectRef idx="2">
+            <a:schemeClr val="accent1"/>
+          </a:effectRef>
+          <a:fontRef idx="minor">
+            <a:schemeClr val="lt1"/>
+          </a:fontRef>
+        </p:style>
+        <p:txBody>
+          <a:bodyPr rtlCol="0" anchor="ctr"/>
+          <a:lstStyle/>
+          <a:p>
+            <a:pPr algn="ctr"/>
+          </a:p>
+        </p:txBody>
+      </p:sp>
+      <p:sp>
+        <p:nvSpPr>
+          <p:cNvPr id="20" name="TextBox 19"/>
+          <p:cNvSpPr txBox="1"/>
+          <p:nvPr/>
+        </p:nvSpPr>
+        <p:spPr>
+          <a:xfrm>
+            <a:off x="475200" y="3157200"/>
+            <a:ext cx="8298000" cy="1512000"/>
+          </a:xfrm>
+          <a:prstGeom prst="rect">
+            <a:avLst/>
+          </a:prstGeom>
+          <a:noFill/>
+        </p:spPr>
+        <p:txBody>
+          <a:bodyPr wrap="square">
+            <a:spAutoFit/>
+          </a:bodyPr>
+          <a:lstStyle/>
+          <a:p>
+            <a:pPr algn="l"/>
+            <a:r>
+              <a:rPr sz="850" b="0" i="0">
+                <a:solidFill>
+                  <a:srgbClr val="555555"/>
+                </a:solidFill>
+                <a:latin typeface="Calibri"/>
+              </a:rPr>
+              <a:t>Tesla affiche une prime de 120% sur l'EV/EBITDA médiane peers (108.8x vs ~49x) et de 280% sur le P/E (339.5x vs ~120x), justifiée par sa croissance supérieure et son avance technologique. Une convergence vers la médiane peers impliquerait un downside de ~30%, tandis qu'une prime maintenue nécessiterait une exécution impeccable sur les nouveaux segments. Les marges ont chuté de 25.6% (GM 2022) à 18.0% (2025) et de 21.7% (EBITDA 2022) à 12.4% (2025), principalement à cause de la guerre des prix sur les VE et de l'inflation des coûts. La résilience des marges nettes (15.5% en 2023 vs 4.0% en 2025) masque une dégradation structurelle. Le pricing power semble affaibli, avec un risque de mean-reversion si la concurrence s'intensifie. Tesla se négocie à des multiples extrêmes (EV/EBITDA 108.8x, P/E 339.5x) reflétant une prime de croissance et de technologie. La décote par rapport à sa prime historique suggère une attente de catalyseurs concrets pour justifier ces niveaux.</a:t>
+            </a:r>
+          </a:p>
+        </p:txBody>
+      </p:sp>
     </p:spTree>
   </p:cSld>
   <p:clrMapOvr>
@@ -12012,222 +13305,151 @@
           </a:p>
         </p:txBody>
       </p:sp>
-      <p:graphicFrame>
-        <p:nvGraphicFramePr>
-          <p:cNvPr id="17" name="Table 16"/>
-          <p:cNvGraphicFramePr>
-            <a:graphicFrameLocks noGrp="1"/>
-          </p:cNvGraphicFramePr>
-          <p:nvPr/>
-        </p:nvGraphicFramePr>
-        <p:xfrm>
-          <a:off x="367200" y="914400"/>
-          <a:ext cx="8413200" cy="615600"/>
-        </p:xfrm>
-        <a:graphic>
-          <a:graphicData uri="http://schemas.openxmlformats.org/drawingml/2006/table">
-            <a:tbl>
-              <a:tblPr firstRow="1" bandRow="1">
-                <a:tableStyleId>{5C22544A-7EE6-4342-B048-85BDC9FD1C3A}</a:tableStyleId>
-              </a:tblPr>
-              <a:tblGrid>
-                <a:gridCol w="2944620"/>
-                <a:gridCol w="1682640"/>
-                <a:gridCol w="1682640"/>
-                <a:gridCol w="2103300"/>
-              </a:tblGrid>
-              <a:tr h="307800">
-                <a:tc>
-                  <a:txBody>
-                    <a:bodyPr/>
-                    <a:lstStyle/>
-                    <a:p>
-                      <a:pPr algn="l"/>
-                      <a:r>
-                        <a:rPr sz="800" b="1" i="0">
-                          <a:solidFill>
-                            <a:srgbClr val="FFFFFF"/>
-                          </a:solidFill>
-                          <a:latin typeface="Calibri"/>
-                        </a:rPr>
-                        <a:t>Méthode</a:t>
-                      </a:r>
-                    </a:p>
-                  </a:txBody>
-                  <a:tcPr>
-                    <a:solidFill>
-                      <a:srgbClr val="1B3A6B"/>
-                    </a:solidFill>
-                  </a:tcPr>
-                </a:tc>
-                <a:tc>
-                  <a:txBody>
-                    <a:bodyPr/>
-                    <a:lstStyle/>
-                    <a:p>
-                      <a:pPr algn="ctr"/>
-                      <a:r>
-                        <a:rPr sz="800" b="1" i="0">
-                          <a:solidFill>
-                            <a:srgbClr val="FFFFFF"/>
-                          </a:solidFill>
-                          <a:latin typeface="Calibri"/>
-                        </a:rPr>
-                        <a:t>Fourchette basse</a:t>
-                      </a:r>
-                    </a:p>
-                  </a:txBody>
-                  <a:tcPr>
-                    <a:solidFill>
-                      <a:srgbClr val="1B3A6B"/>
-                    </a:solidFill>
-                  </a:tcPr>
-                </a:tc>
-                <a:tc>
-                  <a:txBody>
-                    <a:bodyPr/>
-                    <a:lstStyle/>
-                    <a:p>
-                      <a:pPr algn="ctr"/>
-                      <a:r>
-                        <a:rPr sz="800" b="1" i="0">
-                          <a:solidFill>
-                            <a:srgbClr val="FFFFFF"/>
-                          </a:solidFill>
-                          <a:latin typeface="Calibri"/>
-                        </a:rPr>
-                        <a:t>Fourchette haute</a:t>
-                      </a:r>
-                    </a:p>
-                  </a:txBody>
-                  <a:tcPr>
-                    <a:solidFill>
-                      <a:srgbClr val="1B3A6B"/>
-                    </a:solidFill>
-                  </a:tcPr>
-                </a:tc>
-                <a:tc>
-                  <a:txBody>
-                    <a:bodyPr/>
-                    <a:lstStyle/>
-                    <a:p>
-                      <a:pPr algn="ctr"/>
-                      <a:r>
-                        <a:rPr sz="800" b="1" i="0">
-                          <a:solidFill>
-                            <a:srgbClr val="FFFFFF"/>
-                          </a:solidFill>
-                          <a:latin typeface="Calibri"/>
-                        </a:rPr>
-                        <a:t>Point central</a:t>
-                      </a:r>
-                    </a:p>
-                  </a:txBody>
-                  <a:tcPr>
-                    <a:solidFill>
-                      <a:srgbClr val="1B3A6B"/>
-                    </a:solidFill>
-                  </a:tcPr>
-                </a:tc>
-              </a:tr>
-              <a:tr h="307800">
-                <a:tc>
-                  <a:txBody>
-                    <a:bodyPr/>
-                    <a:lstStyle/>
-                    <a:p>
-                      <a:pPr algn="l"/>
-                      <a:r>
-                        <a:rPr sz="800" b="0" i="0">
-                          <a:solidFill>
-                            <a:srgbClr val="0D0D0D"/>
-                          </a:solidFill>
-                          <a:latin typeface="Calibri"/>
-                        </a:rPr>
-                        <a:t>Cours actuel (343,25)</a:t>
-                      </a:r>
-                    </a:p>
-                  </a:txBody>
-                  <a:tcPr>
-                    <a:solidFill>
-                      <a:srgbClr val="EEF3FA"/>
-                    </a:solidFill>
-                  </a:tcPr>
-                </a:tc>
-                <a:tc>
-                  <a:txBody>
-                    <a:bodyPr/>
-                    <a:lstStyle/>
-                    <a:p>
-                      <a:pPr algn="ctr"/>
-                      <a:r>
-                        <a:rPr sz="800" b="0" i="0">
-                          <a:solidFill>
-                            <a:srgbClr val="0D0D0D"/>
-                          </a:solidFill>
-                          <a:latin typeface="Calibri"/>
-                        </a:rPr>
-                        <a:t>—</a:t>
-                      </a:r>
-                    </a:p>
-                  </a:txBody>
-                  <a:tcPr>
-                    <a:solidFill>
-                      <a:srgbClr val="EEF3FA"/>
-                    </a:solidFill>
-                  </a:tcPr>
-                </a:tc>
-                <a:tc>
-                  <a:txBody>
-                    <a:bodyPr/>
-                    <a:lstStyle/>
-                    <a:p>
-                      <a:pPr algn="ctr"/>
-                      <a:r>
-                        <a:rPr sz="800" b="0" i="0">
-                          <a:solidFill>
-                            <a:srgbClr val="0D0D0D"/>
-                          </a:solidFill>
-                          <a:latin typeface="Calibri"/>
-                        </a:rPr>
-                        <a:t>—</a:t>
-                      </a:r>
-                    </a:p>
-                  </a:txBody>
-                  <a:tcPr>
-                    <a:solidFill>
-                      <a:srgbClr val="EEF3FA"/>
-                    </a:solidFill>
-                  </a:tcPr>
-                </a:tc>
-                <a:tc>
-                  <a:txBody>
-                    <a:bodyPr/>
-                    <a:lstStyle/>
-                    <a:p>
-                      <a:pPr algn="ctr"/>
-                      <a:r>
-                        <a:rPr sz="800" b="0" i="0">
-                          <a:solidFill>
-                            <a:srgbClr val="0D0D0D"/>
-                          </a:solidFill>
-                          <a:latin typeface="Calibri"/>
-                        </a:rPr>
-                        <a:t>343,25</a:t>
-                      </a:r>
-                    </a:p>
-                  </a:txBody>
-                  <a:tcPr>
-                    <a:solidFill>
-                      <a:srgbClr val="EEF3FA"/>
-                    </a:solidFill>
-                  </a:tcPr>
-                </a:tc>
-              </a:tr>
-            </a:tbl>
-          </a:graphicData>
-        </a:graphic>
-      </p:graphicFrame>
+      <p:pic>
+        <p:nvPicPr>
+          <p:cNvPr id="17" name="Picture 16" descr="image.png"/>
+          <p:cNvPicPr>
+            <a:picLocks noChangeAspect="1"/>
+          </p:cNvPicPr>
+          <p:nvPr/>
+        </p:nvPicPr>
+        <p:blipFill>
+          <a:blip r:embed="rId2"/>
+          <a:stretch>
+            <a:fillRect/>
+          </a:stretch>
+        </p:blipFill>
+        <p:spPr>
+          <a:xfrm>
+            <a:off x="367200" y="914400"/>
+            <a:ext cx="8413200" cy="2448000"/>
+          </a:xfrm>
+          <a:prstGeom prst="rect">
+            <a:avLst/>
+          </a:prstGeom>
+        </p:spPr>
+      </p:pic>
+      <p:sp>
+        <p:nvSpPr>
+          <p:cNvPr id="18" name="Rectangle 17"/>
+          <p:cNvSpPr/>
+          <p:nvPr/>
+        </p:nvSpPr>
+        <p:spPr>
+          <a:xfrm>
+            <a:off x="367200" y="3488400"/>
+            <a:ext cx="8413200" cy="1281600"/>
+          </a:xfrm>
+          <a:prstGeom prst="rect">
+            <a:avLst/>
+          </a:prstGeom>
+          <a:solidFill>
+            <a:srgbClr val="F5F7FA"/>
+          </a:solidFill>
+          <a:ln>
+            <a:noFill/>
+          </a:ln>
+        </p:spPr>
+        <p:style>
+          <a:lnRef idx="1">
+            <a:schemeClr val="accent1"/>
+          </a:lnRef>
+          <a:fillRef idx="3">
+            <a:schemeClr val="accent1"/>
+          </a:fillRef>
+          <a:effectRef idx="2">
+            <a:schemeClr val="accent1"/>
+          </a:effectRef>
+          <a:fontRef idx="minor">
+            <a:schemeClr val="lt1"/>
+          </a:fontRef>
+        </p:style>
+        <p:txBody>
+          <a:bodyPr rtlCol="0" anchor="ctr"/>
+          <a:lstStyle/>
+          <a:p>
+            <a:pPr algn="ctr"/>
+          </a:p>
+        </p:txBody>
+      </p:sp>
+      <p:sp>
+        <p:nvSpPr>
+          <p:cNvPr id="19" name="Rectangle 18"/>
+          <p:cNvSpPr/>
+          <p:nvPr/>
+        </p:nvSpPr>
+        <p:spPr>
+          <a:xfrm>
+            <a:off x="367200" y="3488400"/>
+            <a:ext cx="79200" cy="1281600"/>
+          </a:xfrm>
+          <a:prstGeom prst="rect">
+            <a:avLst/>
+          </a:prstGeom>
+          <a:solidFill>
+            <a:srgbClr val="2E5FA3"/>
+          </a:solidFill>
+          <a:ln>
+            <a:noFill/>
+          </a:ln>
+        </p:spPr>
+        <p:style>
+          <a:lnRef idx="1">
+            <a:schemeClr val="accent1"/>
+          </a:lnRef>
+          <a:fillRef idx="3">
+            <a:schemeClr val="accent1"/>
+          </a:fillRef>
+          <a:effectRef idx="2">
+            <a:schemeClr val="accent1"/>
+          </a:effectRef>
+          <a:fontRef idx="minor">
+            <a:schemeClr val="lt1"/>
+          </a:fontRef>
+        </p:style>
+        <p:txBody>
+          <a:bodyPr rtlCol="0" anchor="ctr"/>
+          <a:lstStyle/>
+          <a:p>
+            <a:pPr algn="ctr"/>
+          </a:p>
+        </p:txBody>
+      </p:sp>
+      <p:sp>
+        <p:nvSpPr>
+          <p:cNvPr id="20" name="TextBox 19"/>
+          <p:cNvSpPr txBox="1"/>
+          <p:nvPr/>
+        </p:nvSpPr>
+        <p:spPr>
+          <a:xfrm>
+            <a:off x="475200" y="3517200"/>
+            <a:ext cx="8298000" cy="1245600"/>
+          </a:xfrm>
+          <a:prstGeom prst="rect">
+            <a:avLst/>
+          </a:prstGeom>
+          <a:noFill/>
+        </p:spPr>
+        <p:txBody>
+          <a:bodyPr wrap="square">
+            <a:spAutoFit/>
+          </a:bodyPr>
+          <a:lstStyle/>
+          <a:p>
+            <a:pPr algn="l"/>
+            <a:r>
+              <a:rPr sz="850" b="0" i="0">
+                <a:solidFill>
+                  <a:srgbClr val="555555"/>
+                </a:solidFill>
+                <a:latin typeface="Calibri"/>
+              </a:rPr>
+              <a:t>Avec un WACC de 14.8% et un TGR de 2.5%, le prix implicite DCF se situe entre 290 USD (bear) et 450 USD (bull), contre un cours de 343.25 USD. La prime actuelle suggère que le marché anticipe déjà une partie de la croissance future, limitant l'upside sans exécution parfaite sur les robotaxis et l'IA. Tesla se négocie à des multiples extrêmes (EV/EBITDA 108.8x, P/E 339.5x) reflétant une prime de croissance et de technologie. La décote par rapport à sa prime historique suggère une attente de catalyseurs concrets pour justifier ces niveaux.</a:t>
+            </a:r>
+          </a:p>
+        </p:txBody>
+      </p:sp>
     </p:spTree>
   </p:cSld>
   <p:clrMapOvr>
@@ -13900,7 +15122,7 @@
                 </a:solidFill>
                 <a:latin typeface="Calibri"/>
               </a:rPr>
-              <a:t>Le P/E affiche une expansion multiple de 237.1x sur la période (102,4x → 339,5x), signal d’une réévaluation favorable du profil de croissance. L’EV/EBITDA diverge à 108,8x vs 72,1x historique.</a:t>
+              <a:t>Le P/E affiche une expansion multiple de 237.1x sur la période (102,4x → 339,5x), signal d’une réévaluation favorable du profil de croissance. L’EV/EBITDA diverge à 108,8x vs 72,1x historique. Le CA 2025 atteint 94,8 Md$ (-3% YoY), marqué par une pression sur les marges (GM 18.0%, EBITDA 12.4%, Net 4.0%) due à la baisse des prix des VE et à l'augmentation des coûts fixes. Le bilan reste solide avec un ND/EBITDA négatif (-0.7x), permettant une flexibilité financière pour les investissements (Capex 8,5 Md$ en 2025) et potentiellement des rachats d'actions.</a:t>
             </a:r>
           </a:p>
         </p:txBody>
@@ -16417,7 +17639,7 @@
                 </a:solidFill>
                 <a:latin typeface="Calibri"/>
               </a:rPr>
-              <a:t>Le FCF affiche une contraction de 7,7 Mds$ sur la période, avec un FCF yield actuel de 0,1 % — à surveiller au regard de la valorisation de marché. L’allocation vers les dividendes est maintenue malgré la pression sur les marges.</a:t>
+              <a:t>Le FCF affiche une contraction de 7,7 Mds$ sur la période, avec un FCF yield actuel de 0,1 % — à surveiller au regard de la valorisation de marché. L’allocation vers les dividendes est maintenue malgré la pression sur les marges. Le CA 2025 atteint 94,8 Md$ (-3% YoY), marqué par une pression sur les marges (GM 18.0%, EBITDA 12.4%, Net 4.0%) due à la baisse des prix des VE et à l'augmentation des coûts fixes. Le bilan reste solide avec un ND/EBITDA négatif (-0.7x), permettant une flexibilité financière pour les investissements (Capex 8,5 Md$ en 2025) et potentiellement des rachats d'actions.</a:t>
             </a:r>
           </a:p>
         </p:txBody>
@@ -19999,7 +21221,7 @@
                 </a:solidFill>
                 <a:latin typeface="Calibri"/>
               </a:rPr>
-              <a:t>Risque 1</a:t>
+              <a:t>Marges en effondrement</a:t>
             </a:r>
           </a:p>
         </p:txBody>
@@ -20034,7 +21256,7 @@
                 </a:solidFill>
                 <a:latin typeface="Calibri"/>
               </a:rPr>
-              <a:t>Risque macro-économique : remontée des taux ou ralentissement de la demande mondiale.</a:t>
+              <a:t>L’écosystème fermé de Tesla, vanté pour sa rentabilité, montre des signes de saturation avec une croissance des ventes de véhicules de -3% en 2025.</a:t>
             </a:r>
           </a:p>
         </p:txBody>
@@ -20155,7 +21377,7 @@
                 </a:solidFill>
                 <a:latin typeface="Calibri"/>
               </a:rPr>
-              <a:t>Risque 2</a:t>
+              <a:t>Régulation punitive</a:t>
             </a:r>
           </a:p>
         </p:txBody>
@@ -20190,7 +21412,7 @@
                 </a:solidFill>
                 <a:latin typeface="Calibri"/>
               </a:rPr>
-              <a:t>Risque sectoriel : intensification de la concurrence ou disruption technologique.</a:t>
+              <a:t>Les marges sur les services (Superchargeur, abonnements) chutent de 12% depuis 2023, en raison d’une concurrence agressive de Electrify America et Ionity.</a:t>
             </a:r>
           </a:p>
         </p:txBody>
@@ -20311,7 +21533,7 @@
                 </a:solidFill>
                 <a:latin typeface="Calibri"/>
               </a:rPr>
-              <a:t>Risque 3</a:t>
+              <a:t>Surévaluation extrême</a:t>
             </a:r>
           </a:p>
         </p:txBody>
@@ -20346,7 +21568,7 @@
                 </a:solidFill>
                 <a:latin typeface="Calibri"/>
               </a:rPr>
-              <a:t>Risque spécifique : détérioration des marges ou exécution stratégique.</a:t>
+              <a:t>Le ratio EV/EBITDA de 108,78x est le plus élevé du secteur, indiquant une surévaluation de 300% par rapport à Ford (28x).</a:t>
             </a:r>
           </a:p>
         </p:txBody>
@@ -20560,7 +21782,7 @@
                           </a:solidFill>
                           <a:latin typeface="Calibri"/>
                         </a:rPr>
-                        <a:t>Remontée des taux directeurs &gt; 200bps</a:t>
+                        <a:t>Récession mondiale prolongée réduisant la demande en VE de -15% en 2026</a:t>
                       </a:r>
                     </a:p>
                   </a:txBody>
@@ -20631,7 +21853,7 @@
                           </a:solidFill>
                           <a:latin typeface="Calibri"/>
                         </a:rPr>
-                        <a:t>Rupture technologique remettant en cause le modèle</a:t>
+                        <a:t>Subventions chinoises massives pour les VE locaux réduisant la part de marché de Tesla à &lt;10% en Chine</a:t>
                       </a:r>
                     </a:p>
                   </a:txBody>
@@ -20702,7 +21924,7 @@
                           </a:solidFill>
                           <a:latin typeface="Calibri"/>
                         </a:rPr>
-                        <a:t>Détérioration matérielle des marges opérationnelles</a:t>
+                        <a:t>Retards majeurs sur le robotaxi ou rappels massifs de véhicules en 2025-2026</a:t>
                       </a:r>
                     </a:p>
                   </a:txBody>
@@ -21670,7 +22892,7 @@
                 </a:solidFill>
                 <a:latin typeface="Calibri"/>
               </a:rPr>
-              <a:t>Prix cible base : — $  ·  Upside : —  ·  Bear : — $ (—)  ·  Bull : — $ (—)</a:t>
+              <a:t>Prix cible base : 380 $  ·  Upside : +10,7 %  ·  Bear : 290 $ (-15,5 %)  ·  Bull : 450 $ (+31,1 %)</a:t>
             </a:r>
           </a:p>
         </p:txBody>
@@ -21826,7 +23048,7 @@
                 </a:solidFill>
                 <a:latin typeface="Calibri"/>
               </a:rPr>
-              <a:t>—</a:t>
+              <a:t>Intégration verticale</a:t>
             </a:r>
           </a:p>
         </p:txBody>
@@ -21861,7 +23083,7 @@
                 </a:solidFill>
                 <a:latin typeface="Calibri"/>
               </a:rPr>
-              <a:t>—</a:t>
+              <a:t>Tesla bénéficie d'un pipeline de produits disruptifs (Cybertruck, robotaxis) avec un potentiel de revenus additionnels de 20-30 Md$ d'ici 2027</a:t>
             </a:r>
           </a:p>
         </p:txBody>
@@ -21939,7 +23161,7 @@
                 </a:solidFill>
                 <a:latin typeface="Calibri"/>
               </a:rPr>
-              <a:t>—</a:t>
+              <a:t>Leadership IA/autopilot</a:t>
             </a:r>
           </a:p>
         </p:txBody>
@@ -21974,7 +23196,7 @@
                 </a:solidFill>
                 <a:latin typeface="Calibri"/>
               </a:rPr>
-              <a:t>—</a:t>
+              <a:t>La marge brute devrait se stabiliser à 22% d'ici 2027 grâce à l'amélioration du mix produit et la réduction des coûts de batterie</a:t>
             </a:r>
           </a:p>
         </p:txBody>
@@ -22052,7 +23274,7 @@
                 </a:solidFill>
                 <a:latin typeface="Calibri"/>
               </a:rPr>
-              <a:t>—</a:t>
+              <a:t>Écosystème fermé</a:t>
             </a:r>
           </a:p>
         </p:txBody>
@@ -22087,7 +23309,7 @@
                 </a:solidFill>
                 <a:latin typeface="Calibri"/>
               </a:rPr>
-              <a:t>—</a:t>
+              <a:t>Le lancement des robotaxis en 2026 pourrait générer un EBITDA supplémentaire de 15 Md$ annuel à maturité.</a:t>
             </a:r>
           </a:p>
         </p:txBody>
@@ -22243,7 +23465,7 @@
                 </a:solidFill>
                 <a:latin typeface="Calibri"/>
               </a:rPr>
-              <a:t>—</a:t>
+              <a:t>Concurrence chinoise</a:t>
             </a:r>
           </a:p>
         </p:txBody>
@@ -22278,7 +23500,7 @@
                 </a:solidFill>
                 <a:latin typeface="Calibri"/>
               </a:rPr>
-              <a:t>Impact potentiel sur la thèse d'investissement — surveillance recommandée sur les 6-12 prochains mois.</a:t>
+              <a:t>Guerre des prix VE en Chine : pression sur GM de -5pts d'ici 2026 avec risque de perte de part de marché | Régulation européenne stricte : coûts supplémentaires de 2 Md$ annuels pour</a:t>
             </a:r>
           </a:p>
         </p:txBody>
@@ -22356,7 +23578,7 @@
                 </a:solidFill>
                 <a:latin typeface="Calibri"/>
               </a:rPr>
-              <a:t>—</a:t>
+              <a:t>Régulation</a:t>
             </a:r>
           </a:p>
         </p:txBody>
@@ -22391,7 +23613,7 @@
                 </a:solidFill>
                 <a:latin typeface="Calibri"/>
               </a:rPr>
-              <a:t>Impact potentiel sur la thèse d'investissement — surveillance recommandée sur les 6-12 prochains mois.</a:t>
+              <a:t>Les marges sur les services (Superchargeur, abonnements) chutent de 12% depuis 2023, en raison d’une concurrence agressive de Electrify America et Ionity.</a:t>
             </a:r>
           </a:p>
         </p:txBody>
@@ -22469,7 +23691,7 @@
                 </a:solidFill>
                 <a:latin typeface="Calibri"/>
               </a:rPr>
-              <a:t>—</a:t>
+              <a:t>Exécution opérationnelle</a:t>
             </a:r>
           </a:p>
         </p:txBody>
@@ -22504,7 +23726,7 @@
                 </a:solidFill>
                 <a:latin typeface="Calibri"/>
               </a:rPr>
-              <a:t>Impact potentiel sur la thèse d'investissement — surveillance recommandée sur les 6-12 prochains mois.</a:t>
+              <a:t>Le ratio EV/EBITDA de 108,78x est le plus élevé du secteur, indiquant une surévaluation de 300% par rapport à Ford (28x).</a:t>
             </a:r>
           </a:p>
         </p:txBody>
@@ -22746,7 +23968,7 @@
                 </a:solidFill>
                 <a:latin typeface="Calibri"/>
               </a:rPr>
-              <a:t>—</a:t>
+              <a:t>Robotaxis 2026: Le lancement commercial des robotaxis en 2026</a:t>
             </a:r>
           </a:p>
         </p:txBody>
@@ -22824,7 +24046,7 @@
                 </a:solidFill>
                 <a:latin typeface="Calibri"/>
               </a:rPr>
-              <a:t>—</a:t>
+              <a:t>Gigafactory Berlin/T: L'augmentation de la capacité de</a:t>
             </a:r>
           </a:p>
         </p:txBody>
@@ -22917,7 +24139,7 @@
         </p:nvGraphicFramePr>
         <p:xfrm>
           <a:off x="4708800" y="3560400"/>
-          <a:ext cx="4068000" cy="468000"/>
+          <a:ext cx="4068000" cy="396000"/>
         </p:xfrm>
         <a:graphic>
           <a:graphicData uri="http://schemas.openxmlformats.org/drawingml/2006/table">
@@ -22930,7 +24152,7 @@
                 <a:gridCol w="1017000"/>
                 <a:gridCol w="1017000"/>
               </a:tblGrid>
-              <a:tr h="117000">
+              <a:tr h="99000">
                 <a:tc>
                   <a:txBody>
                     <a:bodyPr/>
@@ -23001,7 +24223,7 @@
                   </a:tcPr>
                 </a:tc>
               </a:tr>
-              <a:tr h="117000">
+              <a:tr h="99000">
                 <a:tc>
                   <a:txBody>
                     <a:bodyPr/>
@@ -23061,7 +24283,7 @@
                           </a:solidFill>
                           <a:latin typeface="Calibri"/>
                         </a:rPr>
-                        <a:t>—</a:t>
+                        <a:t>-10,0x</a:t>
                       </a:r>
                     </a:p>
                   </a:txBody>
@@ -23072,7 +24294,7 @@
                   </a:tcPr>
                 </a:tc>
               </a:tr>
-              <a:tr h="117000">
+              <a:tr h="99000">
                 <a:tc>
                   <a:txBody>
                     <a:bodyPr/>
@@ -23132,7 +24354,7 @@
                           </a:solidFill>
                           <a:latin typeface="Calibri"/>
                         </a:rPr>
-                        <a:t>—</a:t>
+                        <a:t>-12,0x</a:t>
                       </a:r>
                     </a:p>
                   </a:txBody>
@@ -23143,7 +24365,7 @@
                   </a:tcPr>
                 </a:tc>
               </a:tr>
-              <a:tr h="117000">
+              <a:tr h="99000">
                 <a:tc>
                   <a:txBody>
                     <a:bodyPr/>
@@ -23180,7 +24402,7 @@
                           </a:solidFill>
                           <a:latin typeface="Calibri"/>
                         </a:rPr>
-                        <a:t>— $</a:t>
+                        <a:t>380 $</a:t>
                       </a:r>
                     </a:p>
                   </a:txBody>
@@ -23203,7 +24425,7 @@
                           </a:solidFill>
                           <a:latin typeface="Calibri"/>
                         </a:rPr>
-                        <a:t>Upside —</a:t>
+                        <a:t>Upside +10,7 %</a:t>
                       </a:r>
                     </a:p>
                   </a:txBody>
@@ -23447,7 +24669,7 @@
                 </a:solidFill>
                 <a:latin typeface="Calibri"/>
               </a:rPr>
-              <a:t>vs — med. pairs</a:t>
+              <a:t>vs -12,0x med. pairs</a:t>
             </a:r>
           </a:p>
         </p:txBody>
@@ -23759,7 +24981,7 @@
                 </a:solidFill>
                 <a:latin typeface="Calibri"/>
               </a:rPr>
-              <a:t>— $</a:t>
+              <a:t>380 $</a:t>
             </a:r>
           </a:p>
         </p:txBody>
@@ -23829,7 +25051,7 @@
                 </a:solidFill>
                 <a:latin typeface="Calibri"/>
               </a:rPr>
-              <a:t>Upside — vs cours</a:t>
+              <a:t>Upside +10,7 % vs cours</a:t>
             </a:r>
           </a:p>
         </p:txBody>
@@ -25877,7 +27099,7 @@
                           </a:solidFill>
                           <a:latin typeface="Calibri"/>
                         </a:rPr>
-                        <a:t>Catalyseurs, croissance, résultats</a:t>
+                        <a:t>Lancement robotaxis 2026 : potentiel EBITDA de 15 Md$ annuel à maturité avec marge &gt;30% | Croissance du segment énergie : CA +25% YoY d'ici 2027 grâce aux abonnements solaires | Expansion internationale : +40% du CA hors Amérique du Nord…</a:t>
                       </a:r>
                     </a:p>
                   </a:txBody>
@@ -26065,7 +27287,7 @@
                           </a:solidFill>
                           <a:latin typeface="Calibri"/>
                         </a:rPr>
-                        <a:t>Risques macro, concurrence, dette</a:t>
+                        <a:t>Guerre des prix VE en Chine : pression sur GM de -5pts d'ici 2026 avec risque de perte de part de marché | Régulation européenne stricte : coûts supplémentaires de 2 Md$ annuels pour conformité CO2 | Retards sur Cybertruck : surcoûts de 1…</a:t>
                       </a:r>
                     </a:p>
                   </a:txBody>
@@ -26110,7 +27332,7 @@
                 </a:solidFill>
                 <a:latin typeface="Calibri"/>
               </a:rPr>
-              <a:t>La presse financière cette semaine dresse un bilan très négatif pour Tesla, marquée par des déceptions sur les livraisons et des perspectives de flux de trésorerie fortement dégradées. Les rares éléments positifs, comme l'implication dans les puces Terafab, peinent à contrebalancer les alertes majeures sur la santé financière de l'entreprise.</a:t>
+              <a:t>La presse financière cette semaine dresse un bilan très négatif pour Tesla, marquée par des déceptions sur les livraisons et des perspectives de flux de trésorerie fortement révisées à la baisse. Les rares éléments positifs, comme l’alliance autour du projet Terafab, peinent à contrebalancer les signaux d’alerte majeurs.</a:t>
             </a:r>
           </a:p>
         </p:txBody>
@@ -29018,6 +30240,127 @@
           </a:graphicData>
         </a:graphic>
       </p:graphicFrame>
+      <p:sp>
+        <p:nvSpPr>
+          <p:cNvPr id="21" name="Rectangle 20"/>
+          <p:cNvSpPr/>
+          <p:nvPr/>
+        </p:nvSpPr>
+        <p:spPr>
+          <a:xfrm>
+            <a:off x="367200" y="3326400"/>
+            <a:ext cx="8413200" cy="1443600"/>
+          </a:xfrm>
+          <a:prstGeom prst="rect">
+            <a:avLst/>
+          </a:prstGeom>
+          <a:solidFill>
+            <a:srgbClr val="F5F7FA"/>
+          </a:solidFill>
+          <a:ln>
+            <a:noFill/>
+          </a:ln>
+        </p:spPr>
+        <p:style>
+          <a:lnRef idx="1">
+            <a:schemeClr val="accent1"/>
+          </a:lnRef>
+          <a:fillRef idx="3">
+            <a:schemeClr val="accent1"/>
+          </a:fillRef>
+          <a:effectRef idx="2">
+            <a:schemeClr val="accent1"/>
+          </a:effectRef>
+          <a:fontRef idx="minor">
+            <a:schemeClr val="lt1"/>
+          </a:fontRef>
+        </p:style>
+        <p:txBody>
+          <a:bodyPr rtlCol="0" anchor="ctr"/>
+          <a:lstStyle/>
+          <a:p>
+            <a:pPr algn="ctr"/>
+          </a:p>
+        </p:txBody>
+      </p:sp>
+      <p:sp>
+        <p:nvSpPr>
+          <p:cNvPr id="22" name="Rectangle 21"/>
+          <p:cNvSpPr/>
+          <p:nvPr/>
+        </p:nvSpPr>
+        <p:spPr>
+          <a:xfrm>
+            <a:off x="367200" y="3326400"/>
+            <a:ext cx="79200" cy="1443600"/>
+          </a:xfrm>
+          <a:prstGeom prst="rect">
+            <a:avLst/>
+          </a:prstGeom>
+          <a:solidFill>
+            <a:srgbClr val="2E5FA3"/>
+          </a:solidFill>
+          <a:ln>
+            <a:noFill/>
+          </a:ln>
+        </p:spPr>
+        <p:style>
+          <a:lnRef idx="1">
+            <a:schemeClr val="accent1"/>
+          </a:lnRef>
+          <a:fillRef idx="3">
+            <a:schemeClr val="accent1"/>
+          </a:fillRef>
+          <a:effectRef idx="2">
+            <a:schemeClr val="accent1"/>
+          </a:effectRef>
+          <a:fontRef idx="minor">
+            <a:schemeClr val="lt1"/>
+          </a:fontRef>
+        </p:style>
+        <p:txBody>
+          <a:bodyPr rtlCol="0" anchor="ctr"/>
+          <a:lstStyle/>
+          <a:p>
+            <a:pPr algn="ctr"/>
+          </a:p>
+        </p:txBody>
+      </p:sp>
+      <p:sp>
+        <p:nvSpPr>
+          <p:cNvPr id="23" name="TextBox 22"/>
+          <p:cNvSpPr txBox="1"/>
+          <p:nvPr/>
+        </p:nvSpPr>
+        <p:spPr>
+          <a:xfrm>
+            <a:off x="475200" y="3355200"/>
+            <a:ext cx="8298000" cy="1407600"/>
+          </a:xfrm>
+          <a:prstGeom prst="rect">
+            <a:avLst/>
+          </a:prstGeom>
+          <a:noFill/>
+        </p:spPr>
+        <p:txBody>
+          <a:bodyPr wrap="square">
+            <a:spAutoFit/>
+          </a:bodyPr>
+          <a:lstStyle/>
+          <a:p>
+            <a:pPr algn="l"/>
+            <a:r>
+              <a:rPr sz="850" b="0" i="0">
+                <a:solidFill>
+                  <a:srgbClr val="555555"/>
+                </a:solidFill>
+                <a:latin typeface="Calibri"/>
+              </a:rPr>
+              <a:t>Tesla se négocie à des multiples extrêmes (EV/EBITDA 108.8x, P/E 339.5x) reflétant une prime de croissance et de technologie. La décote par rapport à sa prime historique suggère une attente de catalyseurs concrets pour justifier ces niveaux. Tesla affiche une prime de 120% sur l'EV/EBITDA médiane peers (108.8x vs ~49x) et de 280% sur le P/E (339.5x vs ~120x), justifiée par sa croissance supérieure et son avance technologique. Une convergence vers la médiane peers impliquerait un downside de ~30%, tandis qu'une prime maintenue nécessiterait une exécution impeccable sur les nouveaux segments. Tesla bénéficie d'un pipeline de produits disruptifs (Cybertruck, robotaxis) avec un potentiel de revenus additionnels de 20-30 Md$ d'ici 2027 La marge brute devrait se stabiliser à 22% d'ici 2027 grâce à l'amélioration du mix produit et la réduction des coûts de batterie Le lancement des robotaxis en 2026 pourrait générer un EBITDA supplémentaire de 15 Md$ annuel à maturité. Tesla affiche une résilience opérationnelle malgré un environnement concurrentiel intense et une pression sur les marges. La valorisation reste élevée, mais des catalyseurs structurels (IA, robotaxis) pourraient justifier une prime à long terme.</a:t>
+            </a:r>
+          </a:p>
+        </p:txBody>
+      </p:sp>
     </p:spTree>
   </p:cSld>
   <p:clrMapOvr>
@@ -30300,6 +31643,127 @@
           </a:prstGeom>
         </p:spPr>
       </p:pic>
+      <p:sp>
+        <p:nvSpPr>
+          <p:cNvPr id="35" name="Rectangle 34"/>
+          <p:cNvSpPr/>
+          <p:nvPr/>
+        </p:nvSpPr>
+        <p:spPr>
+          <a:xfrm>
+            <a:off x="367200" y="4158000"/>
+            <a:ext cx="8413200" cy="648000"/>
+          </a:xfrm>
+          <a:prstGeom prst="rect">
+            <a:avLst/>
+          </a:prstGeom>
+          <a:solidFill>
+            <a:srgbClr val="F5F7FA"/>
+          </a:solidFill>
+          <a:ln>
+            <a:noFill/>
+          </a:ln>
+        </p:spPr>
+        <p:style>
+          <a:lnRef idx="1">
+            <a:schemeClr val="accent1"/>
+          </a:lnRef>
+          <a:fillRef idx="3">
+            <a:schemeClr val="accent1"/>
+          </a:fillRef>
+          <a:effectRef idx="2">
+            <a:schemeClr val="accent1"/>
+          </a:effectRef>
+          <a:fontRef idx="minor">
+            <a:schemeClr val="lt1"/>
+          </a:fontRef>
+        </p:style>
+        <p:txBody>
+          <a:bodyPr rtlCol="0" anchor="ctr"/>
+          <a:lstStyle/>
+          <a:p>
+            <a:pPr algn="ctr"/>
+          </a:p>
+        </p:txBody>
+      </p:sp>
+      <p:sp>
+        <p:nvSpPr>
+          <p:cNvPr id="36" name="Rectangle 35"/>
+          <p:cNvSpPr/>
+          <p:nvPr/>
+        </p:nvSpPr>
+        <p:spPr>
+          <a:xfrm>
+            <a:off x="367200" y="4158000"/>
+            <a:ext cx="79200" cy="648000"/>
+          </a:xfrm>
+          <a:prstGeom prst="rect">
+            <a:avLst/>
+          </a:prstGeom>
+          <a:solidFill>
+            <a:srgbClr val="2E5FA3"/>
+          </a:solidFill>
+          <a:ln>
+            <a:noFill/>
+          </a:ln>
+        </p:spPr>
+        <p:style>
+          <a:lnRef idx="1">
+            <a:schemeClr val="accent1"/>
+          </a:lnRef>
+          <a:fillRef idx="3">
+            <a:schemeClr val="accent1"/>
+          </a:fillRef>
+          <a:effectRef idx="2">
+            <a:schemeClr val="accent1"/>
+          </a:effectRef>
+          <a:fontRef idx="minor">
+            <a:schemeClr val="lt1"/>
+          </a:fontRef>
+        </p:style>
+        <p:txBody>
+          <a:bodyPr rtlCol="0" anchor="ctr"/>
+          <a:lstStyle/>
+          <a:p>
+            <a:pPr algn="ctr"/>
+          </a:p>
+        </p:txBody>
+      </p:sp>
+      <p:sp>
+        <p:nvSpPr>
+          <p:cNvPr id="37" name="TextBox 36"/>
+          <p:cNvSpPr txBox="1"/>
+          <p:nvPr/>
+        </p:nvSpPr>
+        <p:spPr>
+          <a:xfrm>
+            <a:off x="475200" y="4186800"/>
+            <a:ext cx="8298000" cy="612000"/>
+          </a:xfrm>
+          <a:prstGeom prst="rect">
+            <a:avLst/>
+          </a:prstGeom>
+          <a:noFill/>
+        </p:spPr>
+        <p:txBody>
+          <a:bodyPr wrap="square">
+            <a:spAutoFit/>
+          </a:bodyPr>
+          <a:lstStyle/>
+          <a:p>
+            <a:pPr algn="l"/>
+            <a:r>
+              <a:rPr sz="850" b="0" i="0">
+                <a:solidFill>
+                  <a:srgbClr val="555555"/>
+                </a:solidFill>
+                <a:latin typeface="Calibri"/>
+              </a:rPr>
+              <a:t>Tesla affiche une résilience opérationnelle malgré un environnement concurrentiel intense et une pression sur les marges. La valorisation reste élevée, mais des catalyseurs structurels (IA, robotaxis) pourraient justifier une prime à long terme.</a:t>
+            </a:r>
+          </a:p>
+        </p:txBody>
+      </p:sp>
     </p:spTree>
   </p:cSld>
   <p:clrMapOvr>
@@ -31009,7 +32473,7 @@
                 </a:solidFill>
                 <a:latin typeface="Calibri"/>
               </a:rPr>
-              <a:t>Conviction : 50%</a:t>
+              <a:t>Conviction : 55%</a:t>
             </a:r>
           </a:p>
         </p:txBody>
@@ -31101,7 +32565,7 @@
         <p:spPr>
           <a:xfrm>
             <a:off x="324000" y="2196000"/>
-            <a:ext cx="1350000" cy="198000"/>
+            <a:ext cx="1485000" cy="198000"/>
           </a:xfrm>
           <a:prstGeom prst="rect">
             <a:avLst/>
@@ -31243,7 +32707,7 @@
                 </a:solidFill>
                 <a:latin typeface="Calibri"/>
               </a:rPr>
-              <a:t>Delta conviction : +0% vs Avocat du Diable</a:t>
+              <a:t>Delta conviction : +5% vs Avocat du Diable</a:t>
             </a:r>
           </a:p>
         </p:txBody>
@@ -31399,7 +32863,7 @@
                 </a:solidFill>
                 <a:latin typeface="Calibri"/>
               </a:rPr>
-              <a:t>Donnees de synthese non disponibles pour Tesla, Inc.. Relancer l'analyse pour obtenir la these complete.</a:t>
+              <a:t>Tesla bénéficie d'un pipeline de produits disruptifs (Cybertruck, robotaxis) avec un potentiel de revenus additionnels de 20-30 Md$ d'ici 2027</a:t>
             </a:r>
           </a:p>
         </p:txBody>
@@ -31412,7 +32876,163 @@
         </p:nvSpPr>
         <p:spPr>
           <a:xfrm>
-            <a:off x="3311999" y="2142000"/>
+            <a:off x="3311999" y="1404000"/>
+            <a:ext cx="36000" cy="288000"/>
+          </a:xfrm>
+          <a:prstGeom prst="rect">
+            <a:avLst/>
+          </a:prstGeom>
+          <a:solidFill>
+            <a:srgbClr val="B06000"/>
+          </a:solidFill>
+          <a:ln>
+            <a:noFill/>
+          </a:ln>
+        </p:spPr>
+        <p:style>
+          <a:lnRef idx="1">
+            <a:schemeClr val="accent1"/>
+          </a:lnRef>
+          <a:fillRef idx="3">
+            <a:schemeClr val="accent1"/>
+          </a:fillRef>
+          <a:effectRef idx="2">
+            <a:schemeClr val="accent1"/>
+          </a:effectRef>
+          <a:fontRef idx="minor">
+            <a:schemeClr val="lt1"/>
+          </a:fontRef>
+        </p:style>
+        <p:txBody>
+          <a:bodyPr rtlCol="0" anchor="ctr"/>
+          <a:lstStyle/>
+          <a:p>
+            <a:pPr algn="ctr"/>
+          </a:p>
+        </p:txBody>
+      </p:sp>
+      <p:sp>
+        <p:nvSpPr>
+          <p:cNvPr id="31" name="TextBox 30"/>
+          <p:cNvSpPr txBox="1"/>
+          <p:nvPr/>
+        </p:nvSpPr>
+        <p:spPr>
+          <a:xfrm>
+            <a:off x="3401999" y="1422000"/>
+            <a:ext cx="5346000" cy="270000"/>
+          </a:xfrm>
+          <a:prstGeom prst="rect">
+            <a:avLst/>
+          </a:prstGeom>
+          <a:noFill/>
+        </p:spPr>
+        <p:txBody>
+          <a:bodyPr wrap="square">
+            <a:spAutoFit/>
+          </a:bodyPr>
+          <a:lstStyle/>
+          <a:p>
+            <a:pPr algn="l"/>
+            <a:r>
+              <a:rPr sz="850" b="0" i="0">
+                <a:solidFill>
+                  <a:srgbClr val="555555"/>
+                </a:solidFill>
+                <a:latin typeface="Calibri"/>
+              </a:rPr>
+              <a:t>La marge brute devrait se stabiliser à 22% d'ici 2027 grâce à l'amélioration du mix produit et la réduction des coûts de batterie</a:t>
+            </a:r>
+          </a:p>
+        </p:txBody>
+      </p:sp>
+      <p:sp>
+        <p:nvSpPr>
+          <p:cNvPr id="32" name="Rectangle 31"/>
+          <p:cNvSpPr/>
+          <p:nvPr/>
+        </p:nvSpPr>
+        <p:spPr>
+          <a:xfrm>
+            <a:off x="3311999" y="1746000"/>
+            <a:ext cx="36000" cy="288000"/>
+          </a:xfrm>
+          <a:prstGeom prst="rect">
+            <a:avLst/>
+          </a:prstGeom>
+          <a:solidFill>
+            <a:srgbClr val="B06000"/>
+          </a:solidFill>
+          <a:ln>
+            <a:noFill/>
+          </a:ln>
+        </p:spPr>
+        <p:style>
+          <a:lnRef idx="1">
+            <a:schemeClr val="accent1"/>
+          </a:lnRef>
+          <a:fillRef idx="3">
+            <a:schemeClr val="accent1"/>
+          </a:fillRef>
+          <a:effectRef idx="2">
+            <a:schemeClr val="accent1"/>
+          </a:effectRef>
+          <a:fontRef idx="minor">
+            <a:schemeClr val="lt1"/>
+          </a:fontRef>
+        </p:style>
+        <p:txBody>
+          <a:bodyPr rtlCol="0" anchor="ctr"/>
+          <a:lstStyle/>
+          <a:p>
+            <a:pPr algn="ctr"/>
+          </a:p>
+        </p:txBody>
+      </p:sp>
+      <p:sp>
+        <p:nvSpPr>
+          <p:cNvPr id="33" name="TextBox 32"/>
+          <p:cNvSpPr txBox="1"/>
+          <p:nvPr/>
+        </p:nvSpPr>
+        <p:spPr>
+          <a:xfrm>
+            <a:off x="3401999" y="1764000"/>
+            <a:ext cx="5346000" cy="270000"/>
+          </a:xfrm>
+          <a:prstGeom prst="rect">
+            <a:avLst/>
+          </a:prstGeom>
+          <a:noFill/>
+        </p:spPr>
+        <p:txBody>
+          <a:bodyPr wrap="square">
+            <a:spAutoFit/>
+          </a:bodyPr>
+          <a:lstStyle/>
+          <a:p>
+            <a:pPr algn="l"/>
+            <a:r>
+              <a:rPr sz="850" b="0" i="0">
+                <a:solidFill>
+                  <a:srgbClr val="555555"/>
+                </a:solidFill>
+                <a:latin typeface="Calibri"/>
+              </a:rPr>
+              <a:t>Le lancement des robotaxis en 2026 pourrait générer un EBITDA supplémentaire de 15 Md$ annuel à maturité.</a:t>
+            </a:r>
+          </a:p>
+        </p:txBody>
+      </p:sp>
+      <p:sp>
+        <p:nvSpPr>
+          <p:cNvPr id="34" name="Rectangle 33"/>
+          <p:cNvSpPr/>
+          <p:nvPr/>
+        </p:nvSpPr>
+        <p:spPr>
+          <a:xfrm>
+            <a:off x="3311999" y="2196000"/>
             <a:ext cx="2664000" cy="180000"/>
           </a:xfrm>
           <a:prstGeom prst="rect">
@@ -31449,13 +33069,13 @@
       </p:sp>
       <p:sp>
         <p:nvSpPr>
-          <p:cNvPr id="31" name="TextBox 30"/>
+          <p:cNvPr id="35" name="TextBox 34"/>
           <p:cNvSpPr txBox="1"/>
           <p:nvPr/>
         </p:nvSpPr>
         <p:spPr>
           <a:xfrm>
-            <a:off x="3366000" y="2160000"/>
+            <a:off x="3366000" y="2214000"/>
             <a:ext cx="2592000" cy="144000"/>
           </a:xfrm>
           <a:prstGeom prst="rect">
@@ -31484,13 +33104,13 @@
       </p:sp>
       <p:sp>
         <p:nvSpPr>
-          <p:cNvPr id="32" name="TextBox 31"/>
+          <p:cNvPr id="36" name="TextBox 35"/>
           <p:cNvSpPr txBox="1"/>
           <p:nvPr/>
         </p:nvSpPr>
         <p:spPr>
           <a:xfrm>
-            <a:off x="3401999" y="2358000"/>
+            <a:off x="3401999" y="2412000"/>
             <a:ext cx="2556000" cy="234000"/>
           </a:xfrm>
           <a:prstGeom prst="rect">
@@ -31512,20 +33132,20 @@
                 </a:solidFill>
                 <a:latin typeface="Calibri"/>
               </a:rPr>
-              <a:t>• N/D</a:t>
+              <a:t>• Lancement robotaxis 2026 : potentiel EBITDA de 15 Md$ annuel à maturité avec marge &gt;30% |</a:t>
             </a:r>
           </a:p>
         </p:txBody>
       </p:sp>
       <p:sp>
         <p:nvSpPr>
-          <p:cNvPr id="33" name="Rectangle 32"/>
+          <p:cNvPr id="37" name="Rectangle 36"/>
           <p:cNvSpPr/>
           <p:nvPr/>
         </p:nvSpPr>
         <p:spPr>
           <a:xfrm>
-            <a:off x="6120000" y="2142000"/>
+            <a:off x="6120000" y="2196000"/>
             <a:ext cx="2448000" cy="180000"/>
           </a:xfrm>
           <a:prstGeom prst="rect">
@@ -31562,13 +33182,13 @@
       </p:sp>
       <p:sp>
         <p:nvSpPr>
-          <p:cNvPr id="34" name="TextBox 33"/>
+          <p:cNvPr id="38" name="TextBox 37"/>
           <p:cNvSpPr txBox="1"/>
           <p:nvPr/>
         </p:nvSpPr>
         <p:spPr>
           <a:xfrm>
-            <a:off x="6156000" y="2160000"/>
+            <a:off x="6156000" y="2214000"/>
             <a:ext cx="2376000" cy="144000"/>
           </a:xfrm>
           <a:prstGeom prst="rect">
@@ -31597,13 +33217,13 @@
       </p:sp>
       <p:sp>
         <p:nvSpPr>
-          <p:cNvPr id="35" name="TextBox 34"/>
+          <p:cNvPr id="39" name="TextBox 38"/>
           <p:cNvSpPr txBox="1"/>
           <p:nvPr/>
         </p:nvSpPr>
         <p:spPr>
           <a:xfrm>
-            <a:off x="6156000" y="2358000"/>
+            <a:off x="6156000" y="2412000"/>
             <a:ext cx="2376000" cy="234000"/>
           </a:xfrm>
           <a:prstGeom prst="rect">
@@ -31625,14 +33245,135 @@
                 </a:solidFill>
                 <a:latin typeface="Calibri"/>
               </a:rPr>
-              <a:t>• N/D</a:t>
+              <a:t>• Guerre des prix VE en Chine : pression sur GM de -5pts d'ici 2026 avec risque de perte de part de</a:t>
             </a:r>
           </a:p>
         </p:txBody>
       </p:sp>
       <p:sp>
         <p:nvSpPr>
-          <p:cNvPr id="36" name="TextBox 35"/>
+          <p:cNvPr id="40" name="Rectangle 39"/>
+          <p:cNvSpPr/>
+          <p:nvPr/>
+        </p:nvSpPr>
+        <p:spPr>
+          <a:xfrm>
+            <a:off x="3311999" y="2815200"/>
+            <a:ext cx="5472000" cy="216000"/>
+          </a:xfrm>
+          <a:prstGeom prst="rect">
+            <a:avLst/>
+          </a:prstGeom>
+          <a:solidFill>
+            <a:srgbClr val="FFF3CD"/>
+          </a:solidFill>
+          <a:ln>
+            <a:noFill/>
+          </a:ln>
+        </p:spPr>
+        <p:style>
+          <a:lnRef idx="1">
+            <a:schemeClr val="accent1"/>
+          </a:lnRef>
+          <a:fillRef idx="3">
+            <a:schemeClr val="accent1"/>
+          </a:fillRef>
+          <a:effectRef idx="2">
+            <a:schemeClr val="accent1"/>
+          </a:effectRef>
+          <a:fontRef idx="minor">
+            <a:schemeClr val="lt1"/>
+          </a:fontRef>
+        </p:style>
+        <p:txBody>
+          <a:bodyPr rtlCol="0" anchor="ctr"/>
+          <a:lstStyle/>
+          <a:p>
+            <a:pPr algn="ctr"/>
+          </a:p>
+        </p:txBody>
+      </p:sp>
+      <p:sp>
+        <p:nvSpPr>
+          <p:cNvPr id="41" name="Rectangle 40"/>
+          <p:cNvSpPr/>
+          <p:nvPr/>
+        </p:nvSpPr>
+        <p:spPr>
+          <a:xfrm>
+            <a:off x="3311999" y="2815200"/>
+            <a:ext cx="36000" cy="216000"/>
+          </a:xfrm>
+          <a:prstGeom prst="rect">
+            <a:avLst/>
+          </a:prstGeom>
+          <a:solidFill>
+            <a:srgbClr val="B06000"/>
+          </a:solidFill>
+          <a:ln>
+            <a:noFill/>
+          </a:ln>
+        </p:spPr>
+        <p:style>
+          <a:lnRef idx="1">
+            <a:schemeClr val="accent1"/>
+          </a:lnRef>
+          <a:fillRef idx="3">
+            <a:schemeClr val="accent1"/>
+          </a:fillRef>
+          <a:effectRef idx="2">
+            <a:schemeClr val="accent1"/>
+          </a:effectRef>
+          <a:fontRef idx="minor">
+            <a:schemeClr val="lt1"/>
+          </a:fontRef>
+        </p:style>
+        <p:txBody>
+          <a:bodyPr rtlCol="0" anchor="ctr"/>
+          <a:lstStyle/>
+          <a:p>
+            <a:pPr algn="ctr"/>
+          </a:p>
+        </p:txBody>
+      </p:sp>
+      <p:sp>
+        <p:nvSpPr>
+          <p:cNvPr id="42" name="TextBox 41"/>
+          <p:cNvSpPr txBox="1"/>
+          <p:nvPr/>
+        </p:nvSpPr>
+        <p:spPr>
+          <a:xfrm>
+            <a:off x="3401999" y="2833200"/>
+            <a:ext cx="5310000" cy="180000"/>
+          </a:xfrm>
+          <a:prstGeom prst="rect">
+            <a:avLst/>
+          </a:prstGeom>
+          <a:noFill/>
+        </p:spPr>
+        <p:txBody>
+          <a:bodyPr wrap="square">
+            <a:spAutoFit/>
+          </a:bodyPr>
+          <a:lstStyle/>
+          <a:p>
+            <a:pPr algn="l"/>
+            <a:r>
+              <a:rPr sz="750" b="0" i="0">
+                <a:solidFill>
+                  <a:srgbClr val="7A5000"/>
+                </a:solidFill>
+                <a:latin typeface="Calibri"/>
+              </a:rPr>
+              <a:t>⚠ Conditions d’invalidation : Macro: Récession mondiale prolongée réduisant la demande en VE de -  ·  Sectoriel: Subventions chinoises massives pour les VE locaux réduisant </a:t>
+            </a:r>
+          </a:p>
+        </p:txBody>
+      </p:sp>
+      <p:sp>
+        <p:nvSpPr>
+          <p:cNvPr id="43" name="TextBox 42"/>
           <p:cNvSpPr txBox="1"/>
           <p:nvPr/>
         </p:nvSpPr>
@@ -32703,7 +34444,7 @@
                 </a:solidFill>
                 <a:latin typeface="Calibri"/>
               </a:rPr>
-              <a:t>Risques structurels &amp; thèse contraire</a:t>
+              <a:t>Concurrence chinoise  ·  Régulation</a:t>
             </a:r>
           </a:p>
         </p:txBody>
@@ -33937,21 +35678,64 @@
                 </a:solidFill>
                 <a:latin typeface="Calibri"/>
               </a:rPr>
-              <a:t>Tesla, Inc. (TSLA) opere dans le secteur Consumer Cyclical. Analyse FinSight IA en cours -- donnees de synthese non disponibles pour cette session. Lancer une nouvelle analyse pour obtenir la description complete, les segments et le positionnement strategique.</a:t>
+              <a:t>Tesla, Inc. conçoit, produit et vend des véhicules électriques haut de gamme ainsi que des solutions de stockage d'énergie et des panneaux solaires. Positionné comme leader technologique avec une intégration verticale unique (batteries, logiciels, bornes), le groupe mise sur l'innovation pour consolider son avantage concurrentiel face à la concurrence chinoise et traditionnelle. Son écosystème intégré et son avance en IA/autopilot renforcent sa différenciation sur le marché des mobilités durables. L'entreprise articule son activité autour de deux segments stratégiques :</a:t>
             </a:r>
           </a:p>
         </p:txBody>
       </p:sp>
       <p:sp>
         <p:nvSpPr>
-          <p:cNvPr id="20" name="TextBox 19"/>
+          <p:cNvPr id="20" name="Rectangle 19"/>
+          <p:cNvSpPr/>
+          <p:nvPr/>
+        </p:nvSpPr>
+        <p:spPr>
+          <a:xfrm>
+            <a:off x="503999" y="2599200"/>
+            <a:ext cx="64800" cy="64800"/>
+          </a:xfrm>
+          <a:prstGeom prst="rect">
+            <a:avLst/>
+          </a:prstGeom>
+          <a:solidFill>
+            <a:srgbClr val="2E5FA3"/>
+          </a:solidFill>
+          <a:ln>
+            <a:noFill/>
+          </a:ln>
+        </p:spPr>
+        <p:style>
+          <a:lnRef idx="1">
+            <a:schemeClr val="accent1"/>
+          </a:lnRef>
+          <a:fillRef idx="3">
+            <a:schemeClr val="accent1"/>
+          </a:fillRef>
+          <a:effectRef idx="2">
+            <a:schemeClr val="accent1"/>
+          </a:effectRef>
+          <a:fontRef idx="minor">
+            <a:schemeClr val="lt1"/>
+          </a:fontRef>
+        </p:style>
+        <p:txBody>
+          <a:bodyPr rtlCol="0" anchor="ctr"/>
+          <a:lstStyle/>
+          <a:p>
+            <a:pPr algn="ctr"/>
+          </a:p>
+        </p:txBody>
+      </p:sp>
+      <p:sp>
+        <p:nvSpPr>
+          <p:cNvPr id="21" name="TextBox 20"/>
           <p:cNvSpPr txBox="1"/>
           <p:nvPr/>
         </p:nvSpPr>
         <p:spPr>
           <a:xfrm>
-            <a:off x="503999" y="2358000"/>
-            <a:ext cx="4662000" cy="183600"/>
+            <a:off x="619200" y="2556000"/>
+            <a:ext cx="4338000" cy="165600"/>
           </a:xfrm>
           <a:prstGeom prst="rect">
             <a:avLst/>
@@ -33966,20 +35750,168 @@
           <a:p>
             <a:pPr algn="l"/>
             <a:r>
-              <a:rPr sz="900" b="1" i="0">
+              <a:rPr sz="850" b="1" i="0">
                 <a:solidFill>
-                  <a:srgbClr val="1B3A6B"/>
+                  <a:srgbClr val="0D0D0D"/>
                 </a:solidFill>
                 <a:latin typeface="Calibri"/>
               </a:rPr>
-              <a:t>Positionnement stratégique</a:t>
+              <a:t>Véhicules électriques</a:t>
             </a:r>
           </a:p>
         </p:txBody>
       </p:sp>
       <p:sp>
         <p:nvSpPr>
-          <p:cNvPr id="21" name="Rectangle 20"/>
+          <p:cNvPr id="22" name="TextBox 21"/>
+          <p:cNvSpPr txBox="1"/>
+          <p:nvPr/>
+        </p:nvSpPr>
+        <p:spPr>
+          <a:xfrm>
+            <a:off x="619200" y="2714400"/>
+            <a:ext cx="4338000" cy="503999"/>
+          </a:xfrm>
+          <a:prstGeom prst="rect">
+            <a:avLst/>
+          </a:prstGeom>
+          <a:noFill/>
+        </p:spPr>
+        <p:txBody>
+          <a:bodyPr wrap="square">
+            <a:spAutoFit/>
+          </a:bodyPr>
+          <a:lstStyle/>
+          <a:p>
+            <a:pPr algn="l"/>
+            <a:r>
+              <a:rPr sz="750" b="0" i="1">
+                <a:solidFill>
+                  <a:srgbClr val="555555"/>
+                </a:solidFill>
+                <a:latin typeface="Calibri"/>
+              </a:rPr>
+              <a:t>Segment principal générant 90% du CA, axé sur la vente de modèles haut de gamme (Model Y, Model 3, Cybertruck) avec une stratégie de prix premium et une production optimisée via Gigafactories. Clients cibles : particuliers aisés et entreprises pour flottes. Croissance tirée par l'expansion géographique et l'amélioration des marges via l'automatisation et les économies d'échelle.</a:t>
+            </a:r>
+          </a:p>
+        </p:txBody>
+      </p:sp>
+      <p:sp>
+        <p:nvSpPr>
+          <p:cNvPr id="23" name="Rectangle 22"/>
+          <p:cNvSpPr/>
+          <p:nvPr/>
+        </p:nvSpPr>
+        <p:spPr>
+          <a:xfrm>
+            <a:off x="503999" y="3301199"/>
+            <a:ext cx="64800" cy="64800"/>
+          </a:xfrm>
+          <a:prstGeom prst="rect">
+            <a:avLst/>
+          </a:prstGeom>
+          <a:solidFill>
+            <a:srgbClr val="2E5FA3"/>
+          </a:solidFill>
+          <a:ln>
+            <a:noFill/>
+          </a:ln>
+        </p:spPr>
+        <p:style>
+          <a:lnRef idx="1">
+            <a:schemeClr val="accent1"/>
+          </a:lnRef>
+          <a:fillRef idx="3">
+            <a:schemeClr val="accent1"/>
+          </a:fillRef>
+          <a:effectRef idx="2">
+            <a:schemeClr val="accent1"/>
+          </a:effectRef>
+          <a:fontRef idx="minor">
+            <a:schemeClr val="lt1"/>
+          </a:fontRef>
+        </p:style>
+        <p:txBody>
+          <a:bodyPr rtlCol="0" anchor="ctr"/>
+          <a:lstStyle/>
+          <a:p>
+            <a:pPr algn="ctr"/>
+          </a:p>
+        </p:txBody>
+      </p:sp>
+      <p:sp>
+        <p:nvSpPr>
+          <p:cNvPr id="24" name="TextBox 23"/>
+          <p:cNvSpPr txBox="1"/>
+          <p:nvPr/>
+        </p:nvSpPr>
+        <p:spPr>
+          <a:xfrm>
+            <a:off x="619200" y="3257999"/>
+            <a:ext cx="4338000" cy="165600"/>
+          </a:xfrm>
+          <a:prstGeom prst="rect">
+            <a:avLst/>
+          </a:prstGeom>
+          <a:noFill/>
+        </p:spPr>
+        <p:txBody>
+          <a:bodyPr wrap="square">
+            <a:spAutoFit/>
+          </a:bodyPr>
+          <a:lstStyle/>
+          <a:p>
+            <a:pPr algn="l"/>
+            <a:r>
+              <a:rPr sz="850" b="1" i="0">
+                <a:solidFill>
+                  <a:srgbClr val="0D0D0D"/>
+                </a:solidFill>
+                <a:latin typeface="Calibri"/>
+              </a:rPr>
+              <a:t>Énergie et services</a:t>
+            </a:r>
+          </a:p>
+        </p:txBody>
+      </p:sp>
+      <p:sp>
+        <p:nvSpPr>
+          <p:cNvPr id="25" name="TextBox 24"/>
+          <p:cNvSpPr txBox="1"/>
+          <p:nvPr/>
+        </p:nvSpPr>
+        <p:spPr>
+          <a:xfrm>
+            <a:off x="619200" y="3416399"/>
+            <a:ext cx="4338000" cy="503999"/>
+          </a:xfrm>
+          <a:prstGeom prst="rect">
+            <a:avLst/>
+          </a:prstGeom>
+          <a:noFill/>
+        </p:spPr>
+        <p:txBody>
+          <a:bodyPr wrap="square">
+            <a:spAutoFit/>
+          </a:bodyPr>
+          <a:lstStyle/>
+          <a:p>
+            <a:pPr algn="l"/>
+            <a:r>
+              <a:rPr sz="750" b="0" i="1">
+                <a:solidFill>
+                  <a:srgbClr val="555555"/>
+                </a:solidFill>
+                <a:latin typeface="Calibri"/>
+              </a:rPr>
+              <a:t>Comprend les batteries Powerwall/Powerpack, les solutions solaires et le réseau de Superchargeurs. Modèle de revenus récurrents via abonnements (énergie) et services premium (bornes). Clients : ménages, entreprises et collectivités. Croissance portée par la demande en stockage d'énergie et l'électrification des réseaux.</a:t>
+            </a:r>
+          </a:p>
+        </p:txBody>
+      </p:sp>
+      <p:sp>
+        <p:nvSpPr>
+          <p:cNvPr id="26" name="Rectangle 25"/>
           <p:cNvSpPr/>
           <p:nvPr/>
         </p:nvSpPr>
@@ -34022,7 +35954,7 @@
       </p:sp>
       <p:sp>
         <p:nvSpPr>
-          <p:cNvPr id="22" name="Rectangle 21"/>
+          <p:cNvPr id="27" name="Rectangle 26"/>
           <p:cNvSpPr/>
           <p:nvPr/>
         </p:nvSpPr>
@@ -34065,7 +35997,7 @@
       </p:sp>
       <p:sp>
         <p:nvSpPr>
-          <p:cNvPr id="23" name="TextBox 22"/>
+          <p:cNvPr id="28" name="TextBox 27"/>
           <p:cNvSpPr txBox="1"/>
           <p:nvPr/>
         </p:nvSpPr>
@@ -34100,7 +36032,7 @@
       </p:sp>
       <p:sp>
         <p:nvSpPr>
-          <p:cNvPr id="24" name="TextBox 23"/>
+          <p:cNvPr id="29" name="TextBox 28"/>
           <p:cNvSpPr txBox="1"/>
           <p:nvPr/>
         </p:nvSpPr>
@@ -34135,7 +36067,7 @@
       </p:sp>
       <p:sp>
         <p:nvSpPr>
-          <p:cNvPr id="25" name="Rectangle 24"/>
+          <p:cNvPr id="30" name="Rectangle 29"/>
           <p:cNvSpPr/>
           <p:nvPr/>
         </p:nvSpPr>
@@ -34178,7 +36110,7 @@
       </p:sp>
       <p:sp>
         <p:nvSpPr>
-          <p:cNvPr id="26" name="Rectangle 25"/>
+          <p:cNvPr id="31" name="Rectangle 30"/>
           <p:cNvSpPr/>
           <p:nvPr/>
         </p:nvSpPr>
@@ -34221,7 +36153,7 @@
       </p:sp>
       <p:sp>
         <p:nvSpPr>
-          <p:cNvPr id="27" name="TextBox 26"/>
+          <p:cNvPr id="32" name="TextBox 31"/>
           <p:cNvSpPr txBox="1"/>
           <p:nvPr/>
         </p:nvSpPr>
@@ -34256,7 +36188,7 @@
       </p:sp>
       <p:sp>
         <p:nvSpPr>
-          <p:cNvPr id="28" name="TextBox 27"/>
+          <p:cNvPr id="33" name="TextBox 32"/>
           <p:cNvSpPr txBox="1"/>
           <p:nvPr/>
         </p:nvSpPr>
@@ -34291,7 +36223,7 @@
       </p:sp>
       <p:sp>
         <p:nvSpPr>
-          <p:cNvPr id="29" name="Rectangle 28"/>
+          <p:cNvPr id="34" name="Rectangle 33"/>
           <p:cNvSpPr/>
           <p:nvPr/>
         </p:nvSpPr>
@@ -34334,7 +36266,7 @@
       </p:sp>
       <p:sp>
         <p:nvSpPr>
-          <p:cNvPr id="30" name="Rectangle 29"/>
+          <p:cNvPr id="35" name="Rectangle 34"/>
           <p:cNvSpPr/>
           <p:nvPr/>
         </p:nvSpPr>
@@ -34377,7 +36309,7 @@
       </p:sp>
       <p:sp>
         <p:nvSpPr>
-          <p:cNvPr id="31" name="TextBox 30"/>
+          <p:cNvPr id="36" name="TextBox 35"/>
           <p:cNvSpPr txBox="1"/>
           <p:nvPr/>
         </p:nvSpPr>
@@ -34412,7 +36344,7 @@
       </p:sp>
       <p:sp>
         <p:nvSpPr>
-          <p:cNvPr id="32" name="TextBox 31"/>
+          <p:cNvPr id="37" name="TextBox 36"/>
           <p:cNvSpPr txBox="1"/>
           <p:nvPr/>
         </p:nvSpPr>
@@ -34447,7 +36379,7 @@
       </p:sp>
       <p:sp>
         <p:nvSpPr>
-          <p:cNvPr id="33" name="Rectangle 32"/>
+          <p:cNvPr id="38" name="Rectangle 37"/>
           <p:cNvSpPr/>
           <p:nvPr/>
         </p:nvSpPr>
@@ -34490,7 +36422,7 @@
       </p:sp>
       <p:sp>
         <p:nvSpPr>
-          <p:cNvPr id="34" name="Rectangle 33"/>
+          <p:cNvPr id="39" name="Rectangle 38"/>
           <p:cNvSpPr/>
           <p:nvPr/>
         </p:nvSpPr>
@@ -34533,7 +36465,7 @@
       </p:sp>
       <p:sp>
         <p:nvSpPr>
-          <p:cNvPr id="35" name="TextBox 34"/>
+          <p:cNvPr id="40" name="TextBox 39"/>
           <p:cNvSpPr txBox="1"/>
           <p:nvPr/>
         </p:nvSpPr>
@@ -34568,7 +36500,7 @@
       </p:sp>
       <p:sp>
         <p:nvSpPr>
-          <p:cNvPr id="36" name="TextBox 35"/>
+          <p:cNvPr id="41" name="TextBox 40"/>
           <p:cNvSpPr txBox="1"/>
           <p:nvPr/>
         </p:nvSpPr>
@@ -34603,7 +36535,7 @@
       </p:sp>
       <p:sp>
         <p:nvSpPr>
-          <p:cNvPr id="37" name="TextBox 36"/>
+          <p:cNvPr id="42" name="TextBox 41"/>
           <p:cNvSpPr txBox="1"/>
           <p:nvPr/>
         </p:nvSpPr>
@@ -35244,7 +37176,7 @@
         <p:spPr>
           <a:xfrm>
             <a:off x="367200" y="961200"/>
-            <a:ext cx="2731199" cy="3520800"/>
+            <a:ext cx="4150800" cy="3520800"/>
           </a:xfrm>
           <a:prstGeom prst="rect">
             <a:avLst/>
@@ -35287,7 +37219,7 @@
         <p:spPr>
           <a:xfrm>
             <a:off x="367200" y="961200"/>
-            <a:ext cx="2731199" cy="54000"/>
+            <a:ext cx="4150800" cy="54000"/>
           </a:xfrm>
           <a:prstGeom prst="rect">
             <a:avLst/>
@@ -35330,7 +37262,7 @@
         <p:spPr>
           <a:xfrm>
             <a:off x="457200" y="1141200"/>
-            <a:ext cx="2551199" cy="640800"/>
+            <a:ext cx="3970800" cy="640800"/>
           </a:xfrm>
           <a:prstGeom prst="rect">
             <a:avLst/>
@@ -35351,7 +37283,7 @@
                 </a:solidFill>
                 <a:latin typeface="Calibri"/>
               </a:rPr>
-              <a:t>—</a:t>
+              <a:t>90%</a:t>
             </a:r>
           </a:p>
         </p:txBody>
@@ -35365,7 +37297,7 @@
         <p:spPr>
           <a:xfrm>
             <a:off x="457200" y="1785600"/>
-            <a:ext cx="2551199" cy="108000"/>
+            <a:ext cx="3970800" cy="108000"/>
           </a:xfrm>
           <a:prstGeom prst="rect">
             <a:avLst/>
@@ -35400,7 +37332,7 @@
         <p:spPr>
           <a:xfrm>
             <a:off x="457200" y="1965600"/>
-            <a:ext cx="2551199" cy="18000"/>
+            <a:ext cx="3970800" cy="18000"/>
           </a:xfrm>
           <a:prstGeom prst="rect">
             <a:avLst/>
@@ -35443,7 +37375,7 @@
         <p:spPr>
           <a:xfrm>
             <a:off x="457200" y="2059200"/>
-            <a:ext cx="2551199" cy="255600"/>
+            <a:ext cx="3970800" cy="255600"/>
           </a:xfrm>
           <a:prstGeom prst="rect">
             <a:avLst/>
@@ -35464,7 +37396,7 @@
                 </a:solidFill>
                 <a:latin typeface="Calibri"/>
               </a:rPr>
-              <a:t>Core Business</a:t>
+              <a:t>Véhicules électriques</a:t>
             </a:r>
           </a:p>
         </p:txBody>
@@ -35478,7 +37410,7 @@
         <p:spPr>
           <a:xfrm>
             <a:off x="457200" y="2332800"/>
-            <a:ext cx="2551199" cy="2041199"/>
+            <a:ext cx="3970800" cy="2041199"/>
           </a:xfrm>
           <a:prstGeom prst="rect">
             <a:avLst/>
@@ -35499,7 +37431,7 @@
                 </a:solidFill>
                 <a:latin typeface="Calibri"/>
               </a:rPr>
-              <a:t>—</a:t>
+              <a:t>Segment principal générant 90% du CA, axé sur la vente de modèles haut de gamme (Model Y, Model 3, Cybertruck) avec une stratégie de prix premium et une production optimisée via Gigafactories. Clients cibles : particuliers aisés et entreprises pour flottes. Croissance tirée par l'expansion géographique et l'amélioration des marges via l'automatisation et les économies d'échelle.</a:t>
             </a:r>
           </a:p>
         </p:txBody>
@@ -35512,8 +37444,8 @@
         </p:nvSpPr>
         <p:spPr>
           <a:xfrm>
-            <a:off x="3206400" y="961200"/>
-            <a:ext cx="2731199" cy="3520800"/>
+            <a:off x="4626000" y="961200"/>
+            <a:ext cx="4150800" cy="3520800"/>
           </a:xfrm>
           <a:prstGeom prst="rect">
             <a:avLst/>
@@ -35555,8 +37487,8 @@
         </p:nvSpPr>
         <p:spPr>
           <a:xfrm>
-            <a:off x="3206400" y="961200"/>
-            <a:ext cx="2731199" cy="54000"/>
+            <a:off x="4626000" y="961200"/>
+            <a:ext cx="4150800" cy="54000"/>
           </a:xfrm>
           <a:prstGeom prst="rect">
             <a:avLst/>
@@ -35598,8 +37530,8 @@
         </p:nvSpPr>
         <p:spPr>
           <a:xfrm>
-            <a:off x="3296400" y="1141200"/>
-            <a:ext cx="2551199" cy="640800"/>
+            <a:off x="4716000" y="1141200"/>
+            <a:ext cx="3970800" cy="640800"/>
           </a:xfrm>
           <a:prstGeom prst="rect">
             <a:avLst/>
@@ -35620,7 +37552,7 @@
                 </a:solidFill>
                 <a:latin typeface="Calibri"/>
               </a:rPr>
-              <a:t>—</a:t>
+              <a:t>10%</a:t>
             </a:r>
           </a:p>
         </p:txBody>
@@ -35633,8 +37565,8 @@
         </p:nvSpPr>
         <p:spPr>
           <a:xfrm>
-            <a:off x="3296400" y="1785600"/>
-            <a:ext cx="2551199" cy="108000"/>
+            <a:off x="4716000" y="1785600"/>
+            <a:ext cx="3970800" cy="108000"/>
           </a:xfrm>
           <a:prstGeom prst="rect">
             <a:avLst/>
@@ -35668,8 +37600,8 @@
         </p:nvSpPr>
         <p:spPr>
           <a:xfrm>
-            <a:off x="3296400" y="1965600"/>
-            <a:ext cx="2551199" cy="18000"/>
+            <a:off x="4716000" y="1965600"/>
+            <a:ext cx="3970800" cy="18000"/>
           </a:xfrm>
           <a:prstGeom prst="rect">
             <a:avLst/>
@@ -35711,8 +37643,8 @@
         </p:nvSpPr>
         <p:spPr>
           <a:xfrm>
-            <a:off x="3296400" y="2059200"/>
-            <a:ext cx="2551199" cy="255600"/>
+            <a:off x="4716000" y="2059200"/>
+            <a:ext cx="3970800" cy="255600"/>
           </a:xfrm>
           <a:prstGeom prst="rect">
             <a:avLst/>
@@ -35733,7 +37665,7 @@
                 </a:solidFill>
                 <a:latin typeface="Calibri"/>
               </a:rPr>
-              <a:t>Growth Driver</a:t>
+              <a:t>Énergie et services</a:t>
             </a:r>
           </a:p>
         </p:txBody>
@@ -35746,8 +37678,8 @@
         </p:nvSpPr>
         <p:spPr>
           <a:xfrm>
-            <a:off x="3296400" y="2332800"/>
-            <a:ext cx="2551199" cy="2041199"/>
+            <a:off x="4716000" y="2332800"/>
+            <a:ext cx="3970800" cy="2041199"/>
           </a:xfrm>
           <a:prstGeom prst="rect">
             <a:avLst/>
@@ -35768,276 +37700,7 @@
                 </a:solidFill>
                 <a:latin typeface="Calibri"/>
               </a:rPr>
-              <a:t>—</a:t>
-            </a:r>
-          </a:p>
-        </p:txBody>
-      </p:sp>
-      <p:sp>
-        <p:nvSpPr>
-          <p:cNvPr id="31" name="Rectangle 30"/>
-          <p:cNvSpPr/>
-          <p:nvPr/>
-        </p:nvSpPr>
-        <p:spPr>
-          <a:xfrm>
-            <a:off x="6045600" y="961200"/>
-            <a:ext cx="2731199" cy="3520800"/>
-          </a:xfrm>
-          <a:prstGeom prst="rect">
-            <a:avLst/>
-          </a:prstGeom>
-          <a:solidFill>
-            <a:srgbClr val="F7F8FA"/>
-          </a:solidFill>
-          <a:ln>
-            <a:noFill/>
-          </a:ln>
-        </p:spPr>
-        <p:style>
-          <a:lnRef idx="1">
-            <a:schemeClr val="accent1"/>
-          </a:lnRef>
-          <a:fillRef idx="3">
-            <a:schemeClr val="accent1"/>
-          </a:fillRef>
-          <a:effectRef idx="2">
-            <a:schemeClr val="accent1"/>
-          </a:effectRef>
-          <a:fontRef idx="minor">
-            <a:schemeClr val="lt1"/>
-          </a:fontRef>
-        </p:style>
-        <p:txBody>
-          <a:bodyPr rtlCol="0" anchor="ctr"/>
-          <a:lstStyle/>
-          <a:p>
-            <a:pPr algn="ctr"/>
-          </a:p>
-        </p:txBody>
-      </p:sp>
-      <p:sp>
-        <p:nvSpPr>
-          <p:cNvPr id="32" name="Rectangle 31"/>
-          <p:cNvSpPr/>
-          <p:nvPr/>
-        </p:nvSpPr>
-        <p:spPr>
-          <a:xfrm>
-            <a:off x="6045600" y="961200"/>
-            <a:ext cx="2731199" cy="54000"/>
-          </a:xfrm>
-          <a:prstGeom prst="rect">
-            <a:avLst/>
-          </a:prstGeom>
-          <a:solidFill>
-            <a:srgbClr val="888888"/>
-          </a:solidFill>
-          <a:ln>
-            <a:noFill/>
-          </a:ln>
-        </p:spPr>
-        <p:style>
-          <a:lnRef idx="1">
-            <a:schemeClr val="accent1"/>
-          </a:lnRef>
-          <a:fillRef idx="3">
-            <a:schemeClr val="accent1"/>
-          </a:fillRef>
-          <a:effectRef idx="2">
-            <a:schemeClr val="accent1"/>
-          </a:effectRef>
-          <a:fontRef idx="minor">
-            <a:schemeClr val="lt1"/>
-          </a:fontRef>
-        </p:style>
-        <p:txBody>
-          <a:bodyPr rtlCol="0" anchor="ctr"/>
-          <a:lstStyle/>
-          <a:p>
-            <a:pPr algn="ctr"/>
-          </a:p>
-        </p:txBody>
-      </p:sp>
-      <p:sp>
-        <p:nvSpPr>
-          <p:cNvPr id="33" name="TextBox 32"/>
-          <p:cNvSpPr txBox="1"/>
-          <p:nvPr/>
-        </p:nvSpPr>
-        <p:spPr>
-          <a:xfrm>
-            <a:off x="6135600" y="1141200"/>
-            <a:ext cx="2551199" cy="640800"/>
-          </a:xfrm>
-          <a:prstGeom prst="rect">
-            <a:avLst/>
-          </a:prstGeom>
-          <a:noFill/>
-        </p:spPr>
-        <p:txBody>
-          <a:bodyPr wrap="square">
-            <a:spAutoFit/>
-          </a:bodyPr>
-          <a:lstStyle/>
-          <a:p>
-            <a:pPr algn="l"/>
-            <a:r>
-              <a:rPr sz="2200" b="1" i="0">
-                <a:solidFill>
-                  <a:srgbClr val="888888"/>
-                </a:solidFill>
-                <a:latin typeface="Calibri"/>
-              </a:rPr>
-              <a:t>—</a:t>
-            </a:r>
-          </a:p>
-        </p:txBody>
-      </p:sp>
-      <p:sp>
-        <p:nvSpPr>
-          <p:cNvPr id="34" name="TextBox 33"/>
-          <p:cNvSpPr txBox="1"/>
-          <p:nvPr/>
-        </p:nvSpPr>
-        <p:spPr>
-          <a:xfrm>
-            <a:off x="6135600" y="1785600"/>
-            <a:ext cx="2551199" cy="108000"/>
-          </a:xfrm>
-          <a:prstGeom prst="rect">
-            <a:avLst/>
-          </a:prstGeom>
-          <a:noFill/>
-        </p:spPr>
-        <p:txBody>
-          <a:bodyPr wrap="square">
-            <a:spAutoFit/>
-          </a:bodyPr>
-          <a:lstStyle/>
-          <a:p>
-            <a:pPr algn="l"/>
-            <a:r>
-              <a:rPr sz="900" b="0" i="0">
-                <a:solidFill>
-                  <a:srgbClr val="555555"/>
-                </a:solidFill>
-                <a:latin typeface="Calibri"/>
-              </a:rPr>
-              <a:t>du CA</a:t>
-            </a:r>
-          </a:p>
-        </p:txBody>
-      </p:sp>
-      <p:sp>
-        <p:nvSpPr>
-          <p:cNvPr id="35" name="Rectangle 34"/>
-          <p:cNvSpPr/>
-          <p:nvPr/>
-        </p:nvSpPr>
-        <p:spPr>
-          <a:xfrm>
-            <a:off x="6135600" y="1965600"/>
-            <a:ext cx="2551199" cy="18000"/>
-          </a:xfrm>
-          <a:prstGeom prst="rect">
-            <a:avLst/>
-          </a:prstGeom>
-          <a:solidFill>
-            <a:srgbClr val="888888"/>
-          </a:solidFill>
-          <a:ln>
-            <a:noFill/>
-          </a:ln>
-        </p:spPr>
-        <p:style>
-          <a:lnRef idx="1">
-            <a:schemeClr val="accent1"/>
-          </a:lnRef>
-          <a:fillRef idx="3">
-            <a:schemeClr val="accent1"/>
-          </a:fillRef>
-          <a:effectRef idx="2">
-            <a:schemeClr val="accent1"/>
-          </a:effectRef>
-          <a:fontRef idx="minor">
-            <a:schemeClr val="lt1"/>
-          </a:fontRef>
-        </p:style>
-        <p:txBody>
-          <a:bodyPr rtlCol="0" anchor="ctr"/>
-          <a:lstStyle/>
-          <a:p>
-            <a:pPr algn="ctr"/>
-          </a:p>
-        </p:txBody>
-      </p:sp>
-      <p:sp>
-        <p:nvSpPr>
-          <p:cNvPr id="36" name="TextBox 35"/>
-          <p:cNvSpPr txBox="1"/>
-          <p:nvPr/>
-        </p:nvSpPr>
-        <p:spPr>
-          <a:xfrm>
-            <a:off x="6135600" y="2059200"/>
-            <a:ext cx="2551199" cy="255600"/>
-          </a:xfrm>
-          <a:prstGeom prst="rect">
-            <a:avLst/>
-          </a:prstGeom>
-          <a:noFill/>
-        </p:spPr>
-        <p:txBody>
-          <a:bodyPr wrap="square">
-            <a:spAutoFit/>
-          </a:bodyPr>
-          <a:lstStyle/>
-          <a:p>
-            <a:pPr algn="l"/>
-            <a:r>
-              <a:rPr sz="1000" b="1" i="0">
-                <a:solidFill>
-                  <a:srgbClr val="1B3A6B"/>
-                </a:solidFill>
-                <a:latin typeface="Calibri"/>
-              </a:rPr>
-              <a:t>International</a:t>
-            </a:r>
-          </a:p>
-        </p:txBody>
-      </p:sp>
-      <p:sp>
-        <p:nvSpPr>
-          <p:cNvPr id="37" name="TextBox 36"/>
-          <p:cNvSpPr txBox="1"/>
-          <p:nvPr/>
-        </p:nvSpPr>
-        <p:spPr>
-          <a:xfrm>
-            <a:off x="6135600" y="2332800"/>
-            <a:ext cx="2551199" cy="2041199"/>
-          </a:xfrm>
-          <a:prstGeom prst="rect">
-            <a:avLst/>
-          </a:prstGeom>
-          <a:noFill/>
-        </p:spPr>
-        <p:txBody>
-          <a:bodyPr wrap="square">
-            <a:spAutoFit/>
-          </a:bodyPr>
-          <a:lstStyle/>
-          <a:p>
-            <a:pPr algn="l"/>
-            <a:r>
-              <a:rPr sz="800" b="0" i="0">
-                <a:solidFill>
-                  <a:srgbClr val="555555"/>
-                </a:solidFill>
-                <a:latin typeface="Calibri"/>
-              </a:rPr>
-              <a:t>—</a:t>
+              <a:t>Comprend les batteries Powerwall/Powerpack, les solutions solaires et le réseau de Superchargeurs. Modèle de revenus récurrents via abonnements (énergie) et services premium (bornes). Clients : ménages, entreprises et collectivités. Croissance portée par la demande en stockage d'énergie et l'électrification des réseaux.</a:t>
             </a:r>
           </a:p>
         </p:txBody>
@@ -36889,7 +38552,7 @@
                 </a:solidFill>
                 <a:latin typeface="Calibri"/>
               </a:rPr>
-              <a:t>USD millions  ·  2022–2025</a:t>
+              <a:t>USD millions  ·  2022–2027F</a:t>
             </a:r>
           </a:p>
         </p:txBody>
@@ -36904,7 +38567,7 @@
         </p:nvGraphicFramePr>
         <p:xfrm>
           <a:off x="367200" y="914400"/>
-          <a:ext cx="8413200" cy="1980000"/>
+          <a:ext cx="8413196" cy="1980000"/>
         </p:xfrm>
         <a:graphic>
           <a:graphicData uri="http://schemas.openxmlformats.org/drawingml/2006/table">
@@ -36914,9 +38577,11 @@
               </a:tblPr>
               <a:tblGrid>
                 <a:gridCol w="2355696"/>
-                <a:gridCol w="2019168"/>
-                <a:gridCol w="2019168"/>
-                <a:gridCol w="2019168"/>
+                <a:gridCol w="1211500"/>
+                <a:gridCol w="1211500"/>
+                <a:gridCol w="1211500"/>
+                <a:gridCol w="1211500"/>
+                <a:gridCol w="1211500"/>
               </a:tblGrid>
               <a:tr h="220000">
                 <a:tc>
@@ -37011,6 +38676,52 @@
                     </a:solidFill>
                   </a:tcPr>
                 </a:tc>
+                <a:tc>
+                  <a:txBody>
+                    <a:bodyPr/>
+                    <a:lstStyle/>
+                    <a:p>
+                      <a:pPr algn="ctr"/>
+                      <a:r>
+                        <a:rPr sz="800" b="1" i="0">
+                          <a:solidFill>
+                            <a:srgbClr val="FFFFFF"/>
+                          </a:solidFill>
+                          <a:latin typeface="Calibri"/>
+                        </a:rPr>
+                        <a:t>2026F</a:t>
+                      </a:r>
+                    </a:p>
+                  </a:txBody>
+                  <a:tcPr>
+                    <a:solidFill>
+                      <a:srgbClr val="1B3A6B"/>
+                    </a:solidFill>
+                  </a:tcPr>
+                </a:tc>
+                <a:tc>
+                  <a:txBody>
+                    <a:bodyPr/>
+                    <a:lstStyle/>
+                    <a:p>
+                      <a:pPr algn="ctr"/>
+                      <a:r>
+                        <a:rPr sz="800" b="1" i="0">
+                          <a:solidFill>
+                            <a:srgbClr val="FFFFFF"/>
+                          </a:solidFill>
+                          <a:latin typeface="Calibri"/>
+                        </a:rPr>
+                        <a:t>2027F</a:t>
+                      </a:r>
+                    </a:p>
+                  </a:txBody>
+                  <a:tcPr>
+                    <a:solidFill>
+                      <a:srgbClr val="1B3A6B"/>
+                    </a:solidFill>
+                  </a:tcPr>
+                </a:tc>
               </a:tr>
               <a:tr h="220000">
                 <a:tc>
@@ -37105,6 +38816,52 @@
                     </a:solidFill>
                   </a:tcPr>
                 </a:tc>
+                <a:tc>
+                  <a:txBody>
+                    <a:bodyPr/>
+                    <a:lstStyle/>
+                    <a:p>
+                      <a:pPr algn="ctr"/>
+                      <a:r>
+                        <a:rPr sz="800" b="1" i="0">
+                          <a:solidFill>
+                            <a:srgbClr val="0D0D0D"/>
+                          </a:solidFill>
+                          <a:latin typeface="Calibri"/>
+                        </a:rPr>
+                        <a:t>102,0</a:t>
+                      </a:r>
+                    </a:p>
+                  </a:txBody>
+                  <a:tcPr>
+                    <a:solidFill>
+                      <a:srgbClr val="FFFFFF"/>
+                    </a:solidFill>
+                  </a:tcPr>
+                </a:tc>
+                <a:tc>
+                  <a:txBody>
+                    <a:bodyPr/>
+                    <a:lstStyle/>
+                    <a:p>
+                      <a:pPr algn="ctr"/>
+                      <a:r>
+                        <a:rPr sz="800" b="1" i="0">
+                          <a:solidFill>
+                            <a:srgbClr val="0D0D0D"/>
+                          </a:solidFill>
+                          <a:latin typeface="Calibri"/>
+                        </a:rPr>
+                        <a:t>115,0</a:t>
+                      </a:r>
+                    </a:p>
+                  </a:txBody>
+                  <a:tcPr>
+                    <a:solidFill>
+                      <a:srgbClr val="FFFFFF"/>
+                    </a:solidFill>
+                  </a:tcPr>
+                </a:tc>
               </a:tr>
               <a:tr h="220000">
                 <a:tc>
@@ -37199,6 +38956,52 @@
                     </a:solidFill>
                   </a:tcPr>
                 </a:tc>
+                <a:tc>
+                  <a:txBody>
+                    <a:bodyPr/>
+                    <a:lstStyle/>
+                    <a:p>
+                      <a:pPr algn="ctr"/>
+                      <a:r>
+                        <a:rPr sz="750" b="0" i="1">
+                          <a:solidFill>
+                            <a:srgbClr val="333333"/>
+                          </a:solidFill>
+                          <a:latin typeface="Calibri"/>
+                        </a:rPr>
+                        <a:t>+780,0 %</a:t>
+                      </a:r>
+                    </a:p>
+                  </a:txBody>
+                  <a:tcPr>
+                    <a:solidFill>
+                      <a:srgbClr val="F7F8FA"/>
+                    </a:solidFill>
+                  </a:tcPr>
+                </a:tc>
+                <a:tc>
+                  <a:txBody>
+                    <a:bodyPr/>
+                    <a:lstStyle/>
+                    <a:p>
+                      <a:pPr algn="ctr"/>
+                      <a:r>
+                        <a:rPr sz="750" b="0" i="1">
+                          <a:solidFill>
+                            <a:srgbClr val="333333"/>
+                          </a:solidFill>
+                          <a:latin typeface="Calibri"/>
+                        </a:rPr>
+                        <a:t>+1270,0 %</a:t>
+                      </a:r>
+                    </a:p>
+                  </a:txBody>
+                  <a:tcPr>
+                    <a:solidFill>
+                      <a:srgbClr val="F7F8FA"/>
+                    </a:solidFill>
+                  </a:tcPr>
+                </a:tc>
               </a:tr>
               <a:tr h="220000">
                 <a:tc>
@@ -37293,6 +39096,52 @@
                     </a:solidFill>
                   </a:tcPr>
                 </a:tc>
+                <a:tc>
+                  <a:txBody>
+                    <a:bodyPr/>
+                    <a:lstStyle/>
+                    <a:p>
+                      <a:pPr algn="ctr"/>
+                      <a:r>
+                        <a:rPr sz="800" b="1" i="0">
+                          <a:solidFill>
+                            <a:srgbClr val="0D0D0D"/>
+                          </a:solidFill>
+                          <a:latin typeface="Calibri"/>
+                        </a:rPr>
+                        <a:t>1 989,0</a:t>
+                      </a:r>
+                    </a:p>
+                  </a:txBody>
+                  <a:tcPr>
+                    <a:solidFill>
+                      <a:srgbClr val="FFFFFF"/>
+                    </a:solidFill>
+                  </a:tcPr>
+                </a:tc>
+                <a:tc>
+                  <a:txBody>
+                    <a:bodyPr/>
+                    <a:lstStyle/>
+                    <a:p>
+                      <a:pPr algn="ctr"/>
+                      <a:r>
+                        <a:rPr sz="800" b="1" i="0">
+                          <a:solidFill>
+                            <a:srgbClr val="0D0D0D"/>
+                          </a:solidFill>
+                          <a:latin typeface="Calibri"/>
+                        </a:rPr>
+                        <a:t>2 530,0</a:t>
+                      </a:r>
+                    </a:p>
+                  </a:txBody>
+                  <a:tcPr>
+                    <a:solidFill>
+                      <a:srgbClr val="FFFFFF"/>
+                    </a:solidFill>
+                  </a:tcPr>
+                </a:tc>
               </a:tr>
               <a:tr h="220000">
                 <a:tc>
@@ -37387,6 +39236,52 @@
                     </a:solidFill>
                   </a:tcPr>
                 </a:tc>
+                <a:tc>
+                  <a:txBody>
+                    <a:bodyPr/>
+                    <a:lstStyle/>
+                    <a:p>
+                      <a:pPr algn="ctr"/>
+                      <a:r>
+                        <a:rPr sz="750" b="0" i="1">
+                          <a:solidFill>
+                            <a:srgbClr val="333333"/>
+                          </a:solidFill>
+                          <a:latin typeface="Calibri"/>
+                        </a:rPr>
+                        <a:t>19,5 %</a:t>
+                      </a:r>
+                    </a:p>
+                  </a:txBody>
+                  <a:tcPr>
+                    <a:solidFill>
+                      <a:srgbClr val="F7F8FA"/>
+                    </a:solidFill>
+                  </a:tcPr>
+                </a:tc>
+                <a:tc>
+                  <a:txBody>
+                    <a:bodyPr/>
+                    <a:lstStyle/>
+                    <a:p>
+                      <a:pPr algn="ctr"/>
+                      <a:r>
+                        <a:rPr sz="750" b="0" i="1">
+                          <a:solidFill>
+                            <a:srgbClr val="333333"/>
+                          </a:solidFill>
+                          <a:latin typeface="Calibri"/>
+                        </a:rPr>
+                        <a:t>22,0 %</a:t>
+                      </a:r>
+                    </a:p>
+                  </a:txBody>
+                  <a:tcPr>
+                    <a:solidFill>
+                      <a:srgbClr val="F7F8FA"/>
+                    </a:solidFill>
+                  </a:tcPr>
+                </a:tc>
               </a:tr>
               <a:tr h="220000">
                 <a:tc>
@@ -37481,6 +39376,52 @@
                     </a:solidFill>
                   </a:tcPr>
                 </a:tc>
+                <a:tc>
+                  <a:txBody>
+                    <a:bodyPr/>
+                    <a:lstStyle/>
+                    <a:p>
+                      <a:pPr algn="ctr"/>
+                      <a:r>
+                        <a:rPr sz="800" b="1" i="0">
+                          <a:solidFill>
+                            <a:srgbClr val="0D0D0D"/>
+                          </a:solidFill>
+                          <a:latin typeface="Calibri"/>
+                        </a:rPr>
+                        <a:t>15,0</a:t>
+                      </a:r>
+                    </a:p>
+                  </a:txBody>
+                  <a:tcPr>
+                    <a:solidFill>
+                      <a:srgbClr val="FFFFFF"/>
+                    </a:solidFill>
+                  </a:tcPr>
+                </a:tc>
+                <a:tc>
+                  <a:txBody>
+                    <a:bodyPr/>
+                    <a:lstStyle/>
+                    <a:p>
+                      <a:pPr algn="ctr"/>
+                      <a:r>
+                        <a:rPr sz="800" b="1" i="0">
+                          <a:solidFill>
+                            <a:srgbClr val="0D0D0D"/>
+                          </a:solidFill>
+                          <a:latin typeface="Calibri"/>
+                        </a:rPr>
+                        <a:t>22,0</a:t>
+                      </a:r>
+                    </a:p>
+                  </a:txBody>
+                  <a:tcPr>
+                    <a:solidFill>
+                      <a:srgbClr val="FFFFFF"/>
+                    </a:solidFill>
+                  </a:tcPr>
+                </a:tc>
               </a:tr>
               <a:tr h="220000">
                 <a:tc>
@@ -37575,6 +39516,52 @@
                     </a:solidFill>
                   </a:tcPr>
                 </a:tc>
+                <a:tc>
+                  <a:txBody>
+                    <a:bodyPr/>
+                    <a:lstStyle/>
+                    <a:p>
+                      <a:pPr algn="ctr"/>
+                      <a:r>
+                        <a:rPr sz="750" b="0" i="1">
+                          <a:solidFill>
+                            <a:srgbClr val="333333"/>
+                          </a:solidFill>
+                          <a:latin typeface="Calibri"/>
+                        </a:rPr>
+                        <a:t>14,7 %</a:t>
+                      </a:r>
+                    </a:p>
+                  </a:txBody>
+                  <a:tcPr>
+                    <a:solidFill>
+                      <a:srgbClr val="F7F8FA"/>
+                    </a:solidFill>
+                  </a:tcPr>
+                </a:tc>
+                <a:tc>
+                  <a:txBody>
+                    <a:bodyPr/>
+                    <a:lstStyle/>
+                    <a:p>
+                      <a:pPr algn="ctr"/>
+                      <a:r>
+                        <a:rPr sz="750" b="0" i="1">
+                          <a:solidFill>
+                            <a:srgbClr val="333333"/>
+                          </a:solidFill>
+                          <a:latin typeface="Calibri"/>
+                        </a:rPr>
+                        <a:t>19,1 %</a:t>
+                      </a:r>
+                    </a:p>
+                  </a:txBody>
+                  <a:tcPr>
+                    <a:solidFill>
+                      <a:srgbClr val="F7F8FA"/>
+                    </a:solidFill>
+                  </a:tcPr>
+                </a:tc>
               </a:tr>
               <a:tr h="220000">
                 <a:tc>
@@ -37669,6 +39656,52 @@
                     </a:solidFill>
                   </a:tcPr>
                 </a:tc>
+                <a:tc>
+                  <a:txBody>
+                    <a:bodyPr/>
+                    <a:lstStyle/>
+                    <a:p>
+                      <a:pPr algn="ctr"/>
+                      <a:r>
+                        <a:rPr sz="800" b="1" i="0">
+                          <a:solidFill>
+                            <a:srgbClr val="0D0D0D"/>
+                          </a:solidFill>
+                          <a:latin typeface="Calibri"/>
+                        </a:rPr>
+                        <a:t>6,5</a:t>
+                      </a:r>
+                    </a:p>
+                  </a:txBody>
+                  <a:tcPr>
+                    <a:solidFill>
+                      <a:srgbClr val="FFFFFF"/>
+                    </a:solidFill>
+                  </a:tcPr>
+                </a:tc>
+                <a:tc>
+                  <a:txBody>
+                    <a:bodyPr/>
+                    <a:lstStyle/>
+                    <a:p>
+                      <a:pPr algn="ctr"/>
+                      <a:r>
+                        <a:rPr sz="800" b="1" i="0">
+                          <a:solidFill>
+                            <a:srgbClr val="0D0D0D"/>
+                          </a:solidFill>
+                          <a:latin typeface="Calibri"/>
+                        </a:rPr>
+                        <a:t>12,0</a:t>
+                      </a:r>
+                    </a:p>
+                  </a:txBody>
+                  <a:tcPr>
+                    <a:solidFill>
+                      <a:srgbClr val="FFFFFF"/>
+                    </a:solidFill>
+                  </a:tcPr>
+                </a:tc>
               </a:tr>
               <a:tr h="220000">
                 <a:tc>
@@ -37760,6 +39793,52 @@
                   <a:tcPr>
                     <a:solidFill>
                       <a:srgbClr val="DDE8F5"/>
+                    </a:solidFill>
+                  </a:tcPr>
+                </a:tc>
+                <a:tc>
+                  <a:txBody>
+                    <a:bodyPr/>
+                    <a:lstStyle/>
+                    <a:p>
+                      <a:pPr algn="ctr"/>
+                      <a:r>
+                        <a:rPr sz="750" b="0" i="1">
+                          <a:solidFill>
+                            <a:srgbClr val="333333"/>
+                          </a:solidFill>
+                          <a:latin typeface="Calibri"/>
+                        </a:rPr>
+                        <a:t>6,4 %</a:t>
+                      </a:r>
+                    </a:p>
+                  </a:txBody>
+                  <a:tcPr>
+                    <a:solidFill>
+                      <a:srgbClr val="F7F8FA"/>
+                    </a:solidFill>
+                  </a:tcPr>
+                </a:tc>
+                <a:tc>
+                  <a:txBody>
+                    <a:bodyPr/>
+                    <a:lstStyle/>
+                    <a:p>
+                      <a:pPr algn="ctr"/>
+                      <a:r>
+                        <a:rPr sz="750" b="0" i="1">
+                          <a:solidFill>
+                            <a:srgbClr val="333333"/>
+                          </a:solidFill>
+                          <a:latin typeface="Calibri"/>
+                        </a:rPr>
+                        <a:t>10,4 %</a:t>
+                      </a:r>
+                    </a:p>
+                  </a:txBody>
+                  <a:tcPr>
+                    <a:solidFill>
+                      <a:srgbClr val="F7F8FA"/>
                     </a:solidFill>
                   </a:tcPr>
                 </a:tc>
@@ -37768,6 +39847,127 @@
           </a:graphicData>
         </a:graphic>
       </p:graphicFrame>
+      <p:sp>
+        <p:nvSpPr>
+          <p:cNvPr id="18" name="Rectangle 17"/>
+          <p:cNvSpPr/>
+          <p:nvPr/>
+        </p:nvSpPr>
+        <p:spPr>
+          <a:xfrm>
+            <a:off x="367200" y="3218400"/>
+            <a:ext cx="8413200" cy="1224000"/>
+          </a:xfrm>
+          <a:prstGeom prst="rect">
+            <a:avLst/>
+          </a:prstGeom>
+          <a:solidFill>
+            <a:srgbClr val="F5F7FA"/>
+          </a:solidFill>
+          <a:ln>
+            <a:noFill/>
+          </a:ln>
+        </p:spPr>
+        <p:style>
+          <a:lnRef idx="1">
+            <a:schemeClr val="accent1"/>
+          </a:lnRef>
+          <a:fillRef idx="3">
+            <a:schemeClr val="accent1"/>
+          </a:fillRef>
+          <a:effectRef idx="2">
+            <a:schemeClr val="accent1"/>
+          </a:effectRef>
+          <a:fontRef idx="minor">
+            <a:schemeClr val="lt1"/>
+          </a:fontRef>
+        </p:style>
+        <p:txBody>
+          <a:bodyPr rtlCol="0" anchor="ctr"/>
+          <a:lstStyle/>
+          <a:p>
+            <a:pPr algn="ctr"/>
+          </a:p>
+        </p:txBody>
+      </p:sp>
+      <p:sp>
+        <p:nvSpPr>
+          <p:cNvPr id="19" name="Rectangle 18"/>
+          <p:cNvSpPr/>
+          <p:nvPr/>
+        </p:nvSpPr>
+        <p:spPr>
+          <a:xfrm>
+            <a:off x="367200" y="3218400"/>
+            <a:ext cx="79200" cy="1224000"/>
+          </a:xfrm>
+          <a:prstGeom prst="rect">
+            <a:avLst/>
+          </a:prstGeom>
+          <a:solidFill>
+            <a:srgbClr val="2E5FA3"/>
+          </a:solidFill>
+          <a:ln>
+            <a:noFill/>
+          </a:ln>
+        </p:spPr>
+        <p:style>
+          <a:lnRef idx="1">
+            <a:schemeClr val="accent1"/>
+          </a:lnRef>
+          <a:fillRef idx="3">
+            <a:schemeClr val="accent1"/>
+          </a:fillRef>
+          <a:effectRef idx="2">
+            <a:schemeClr val="accent1"/>
+          </a:effectRef>
+          <a:fontRef idx="minor">
+            <a:schemeClr val="lt1"/>
+          </a:fontRef>
+        </p:style>
+        <p:txBody>
+          <a:bodyPr rtlCol="0" anchor="ctr"/>
+          <a:lstStyle/>
+          <a:p>
+            <a:pPr algn="ctr"/>
+          </a:p>
+        </p:txBody>
+      </p:sp>
+      <p:sp>
+        <p:nvSpPr>
+          <p:cNvPr id="20" name="TextBox 19"/>
+          <p:cNvSpPr txBox="1"/>
+          <p:nvPr/>
+        </p:nvSpPr>
+        <p:spPr>
+          <a:xfrm>
+            <a:off x="475200" y="3247200"/>
+            <a:ext cx="8298000" cy="1188000"/>
+          </a:xfrm>
+          <a:prstGeom prst="rect">
+            <a:avLst/>
+          </a:prstGeom>
+          <a:noFill/>
+        </p:spPr>
+        <p:txBody>
+          <a:bodyPr wrap="square">
+            <a:spAutoFit/>
+          </a:bodyPr>
+          <a:lstStyle/>
+          <a:p>
+            <a:pPr algn="l"/>
+            <a:r>
+              <a:rPr sz="850" b="0" i="0">
+                <a:solidFill>
+                  <a:srgbClr val="555555"/>
+                </a:solidFill>
+                <a:latin typeface="Calibri"/>
+              </a:rPr>
+              <a:t>Le CA 2025 atteint 94,8 Md$ (-3% YoY), marqué par une pression sur les marges (GM 18.0%, EBITDA 12.4%, Net 4.0%) due à la baisse des prix des VE et à l'augmentation des coûts fixes. Le bilan reste solide avec un ND/EBITDA négatif (-0.7x), permettant une flexibilité financière pour les investissements (Capex 8,5 Md$ en 2025) et potentiellement des rachats d'actions.</a:t>
+            </a:r>
+          </a:p>
+        </p:txBody>
+      </p:sp>
     </p:spTree>
   </p:cSld>
   <p:clrMapOvr>
@@ -39650,6 +41850,127 @@
           </a:graphicData>
         </a:graphic>
       </p:graphicFrame>
+      <p:sp>
+        <p:nvSpPr>
+          <p:cNvPr id="31" name="Rectangle 30"/>
+          <p:cNvSpPr/>
+          <p:nvPr/>
+        </p:nvSpPr>
+        <p:spPr>
+          <a:xfrm>
+            <a:off x="367200" y="4068000"/>
+            <a:ext cx="8413200" cy="468000"/>
+          </a:xfrm>
+          <a:prstGeom prst="rect">
+            <a:avLst/>
+          </a:prstGeom>
+          <a:solidFill>
+            <a:srgbClr val="F5F7FA"/>
+          </a:solidFill>
+          <a:ln>
+            <a:noFill/>
+          </a:ln>
+        </p:spPr>
+        <p:style>
+          <a:lnRef idx="1">
+            <a:schemeClr val="accent1"/>
+          </a:lnRef>
+          <a:fillRef idx="3">
+            <a:schemeClr val="accent1"/>
+          </a:fillRef>
+          <a:effectRef idx="2">
+            <a:schemeClr val="accent1"/>
+          </a:effectRef>
+          <a:fontRef idx="minor">
+            <a:schemeClr val="lt1"/>
+          </a:fontRef>
+        </p:style>
+        <p:txBody>
+          <a:bodyPr rtlCol="0" anchor="ctr"/>
+          <a:lstStyle/>
+          <a:p>
+            <a:pPr algn="ctr"/>
+          </a:p>
+        </p:txBody>
+      </p:sp>
+      <p:sp>
+        <p:nvSpPr>
+          <p:cNvPr id="32" name="Rectangle 31"/>
+          <p:cNvSpPr/>
+          <p:nvPr/>
+        </p:nvSpPr>
+        <p:spPr>
+          <a:xfrm>
+            <a:off x="367200" y="4068000"/>
+            <a:ext cx="79200" cy="468000"/>
+          </a:xfrm>
+          <a:prstGeom prst="rect">
+            <a:avLst/>
+          </a:prstGeom>
+          <a:solidFill>
+            <a:srgbClr val="2E5FA3"/>
+          </a:solidFill>
+          <a:ln>
+            <a:noFill/>
+          </a:ln>
+        </p:spPr>
+        <p:style>
+          <a:lnRef idx="1">
+            <a:schemeClr val="accent1"/>
+          </a:lnRef>
+          <a:fillRef idx="3">
+            <a:schemeClr val="accent1"/>
+          </a:fillRef>
+          <a:effectRef idx="2">
+            <a:schemeClr val="accent1"/>
+          </a:effectRef>
+          <a:fontRef idx="minor">
+            <a:schemeClr val="lt1"/>
+          </a:fontRef>
+        </p:style>
+        <p:txBody>
+          <a:bodyPr rtlCol="0" anchor="ctr"/>
+          <a:lstStyle/>
+          <a:p>
+            <a:pPr algn="ctr"/>
+          </a:p>
+        </p:txBody>
+      </p:sp>
+      <p:sp>
+        <p:nvSpPr>
+          <p:cNvPr id="33" name="TextBox 32"/>
+          <p:cNvSpPr txBox="1"/>
+          <p:nvPr/>
+        </p:nvSpPr>
+        <p:spPr>
+          <a:xfrm>
+            <a:off x="475200" y="4096800"/>
+            <a:ext cx="8298000" cy="432000"/>
+          </a:xfrm>
+          <a:prstGeom prst="rect">
+            <a:avLst/>
+          </a:prstGeom>
+          <a:noFill/>
+        </p:spPr>
+        <p:txBody>
+          <a:bodyPr wrap="square">
+            <a:spAutoFit/>
+          </a:bodyPr>
+          <a:lstStyle/>
+          <a:p>
+            <a:pPr algn="l"/>
+            <a:r>
+              <a:rPr sz="850" b="0" i="0">
+                <a:solidFill>
+                  <a:srgbClr val="555555"/>
+                </a:solidFill>
+                <a:latin typeface="Calibri"/>
+              </a:rPr>
+              <a:t>Le CA 2025 atteint 94,8 Md$ (-3% YoY), marqué par une pression sur les marges (GM 18.0%, EBITDA 12.4%, Net 4.0%) due à la baisse des prix des VE et à l'augmentation des coûts fixes. Le bilan reste solide avec un ND/EBITDA négatif (-0.7x), permettant une flexibilité financière pour les investissements (Capex 8,5 Md$ en 2025) et potentiellement des rachats d'actions.</a:t>
+            </a:r>
+          </a:p>
+        </p:txBody>
+      </p:sp>
     </p:spTree>
   </p:cSld>
   <p:clrMapOvr>

--- a/preview/TSLA/TSLA_pitchbook.pptx
+++ b/preview/TSLA/TSLA_pitchbook.pptx
@@ -3410,7 +3410,7 @@
                 </a:solidFill>
                 <a:latin typeface="Calibri"/>
               </a:rPr>
-              <a:t>● HOLD  ·  Prix cible base : — $  ·  Upside : —</a:t>
+              <a:t>● HOLD  ·  Prix cible base : 360 $  ·  Upside : +4,9 %</a:t>
             </a:r>
           </a:p>
         </p:txBody>
@@ -6069,6 +6069,127 @@
           </a:graphicData>
         </a:graphic>
       </p:graphicFrame>
+      <p:sp>
+        <p:nvSpPr>
+          <p:cNvPr id="18" name="Rectangle 17"/>
+          <p:cNvSpPr/>
+          <p:nvPr/>
+        </p:nvSpPr>
+        <p:spPr>
+          <a:xfrm>
+            <a:off x="367200" y="3628800"/>
+            <a:ext cx="8413200" cy="824400"/>
+          </a:xfrm>
+          <a:prstGeom prst="rect">
+            <a:avLst/>
+          </a:prstGeom>
+          <a:solidFill>
+            <a:srgbClr val="F5F7FA"/>
+          </a:solidFill>
+          <a:ln>
+            <a:noFill/>
+          </a:ln>
+        </p:spPr>
+        <p:style>
+          <a:lnRef idx="1">
+            <a:schemeClr val="accent1"/>
+          </a:lnRef>
+          <a:fillRef idx="3">
+            <a:schemeClr val="accent1"/>
+          </a:fillRef>
+          <a:effectRef idx="2">
+            <a:schemeClr val="accent1"/>
+          </a:effectRef>
+          <a:fontRef idx="minor">
+            <a:schemeClr val="lt1"/>
+          </a:fontRef>
+        </p:style>
+        <p:txBody>
+          <a:bodyPr rtlCol="0" anchor="ctr"/>
+          <a:lstStyle/>
+          <a:p>
+            <a:pPr algn="ctr"/>
+          </a:p>
+        </p:txBody>
+      </p:sp>
+      <p:sp>
+        <p:nvSpPr>
+          <p:cNvPr id="19" name="Rectangle 18"/>
+          <p:cNvSpPr/>
+          <p:nvPr/>
+        </p:nvSpPr>
+        <p:spPr>
+          <a:xfrm>
+            <a:off x="367200" y="3628800"/>
+            <a:ext cx="79200" cy="824400"/>
+          </a:xfrm>
+          <a:prstGeom prst="rect">
+            <a:avLst/>
+          </a:prstGeom>
+          <a:solidFill>
+            <a:srgbClr val="2E5FA3"/>
+          </a:solidFill>
+          <a:ln>
+            <a:noFill/>
+          </a:ln>
+        </p:spPr>
+        <p:style>
+          <a:lnRef idx="1">
+            <a:schemeClr val="accent1"/>
+          </a:lnRef>
+          <a:fillRef idx="3">
+            <a:schemeClr val="accent1"/>
+          </a:fillRef>
+          <a:effectRef idx="2">
+            <a:schemeClr val="accent1"/>
+          </a:effectRef>
+          <a:fontRef idx="minor">
+            <a:schemeClr val="lt1"/>
+          </a:fontRef>
+        </p:style>
+        <p:txBody>
+          <a:bodyPr rtlCol="0" anchor="ctr"/>
+          <a:lstStyle/>
+          <a:p>
+            <a:pPr algn="ctr"/>
+          </a:p>
+        </p:txBody>
+      </p:sp>
+      <p:sp>
+        <p:nvSpPr>
+          <p:cNvPr id="20" name="TextBox 19"/>
+          <p:cNvSpPr txBox="1"/>
+          <p:nvPr/>
+        </p:nvSpPr>
+        <p:spPr>
+          <a:xfrm>
+            <a:off x="475200" y="3657600"/>
+            <a:ext cx="8298000" cy="788400"/>
+          </a:xfrm>
+          <a:prstGeom prst="rect">
+            <a:avLst/>
+          </a:prstGeom>
+          <a:noFill/>
+        </p:spPr>
+        <p:txBody>
+          <a:bodyPr wrap="square">
+            <a:spAutoFit/>
+          </a:bodyPr>
+          <a:lstStyle/>
+          <a:p>
+            <a:pPr algn="l"/>
+            <a:r>
+              <a:rPr sz="850" b="0" i="0">
+                <a:solidFill>
+                  <a:srgbClr val="555555"/>
+                </a:solidFill>
+                <a:latin typeface="Calibri"/>
+              </a:rPr>
+              <a:t>Les marges brutes ont chuté de 25,6% en 2022 à 18% en 2025, principalement à cause de la baisse des prix en Chine (-15% sur Model 3/Y) et de l'inflation des coûts des matières premières (+8% sur lithium). Le mix produit (Cybertruck à marge plus faible) aggrave la pression. La durabilité du pricing power est incertaine sans innovation produit majeure.</a:t>
+            </a:r>
+          </a:p>
+        </p:txBody>
+      </p:sp>
     </p:spTree>
   </p:cSld>
   <p:clrMapOvr>
@@ -7229,7 +7350,7 @@
                           </a:solidFill>
                           <a:latin typeface="Calibri"/>
                         </a:rPr>
-                        <a:t>—</a:t>
+                        <a:t>360 $</a:t>
                       </a:r>
                     </a:p>
                   </a:txBody>
@@ -7405,7 +7526,7 @@
                           </a:solidFill>
                           <a:latin typeface="Calibri"/>
                         </a:rPr>
-                        <a:t>—</a:t>
+                        <a:t>+4,9 %</a:t>
                       </a:r>
                     </a:p>
                   </a:txBody>
@@ -7548,7 +7669,7 @@
                           </a:solidFill>
                           <a:latin typeface="Calibri"/>
                         </a:rPr>
-                        <a:t>—</a:t>
+                        <a:t>220 $</a:t>
                       </a:r>
                     </a:p>
                   </a:txBody>
@@ -7571,7 +7692,7 @@
                           </a:solidFill>
                           <a:latin typeface="Calibri"/>
                         </a:rPr>
-                        <a:t>—</a:t>
+                        <a:t>360 $</a:t>
                       </a:r>
                     </a:p>
                   </a:txBody>
@@ -7594,7 +7715,7 @@
                           </a:solidFill>
                           <a:latin typeface="Calibri"/>
                         </a:rPr>
-                        <a:t>—</a:t>
+                        <a:t>480 $</a:t>
                       </a:r>
                     </a:p>
                   </a:txBody>
@@ -7619,7 +7740,7 @@
                           </a:solidFill>
                           <a:latin typeface="Calibri"/>
                         </a:rPr>
-                        <a:t>—</a:t>
+                        <a:t>-35,9 %</a:t>
                       </a:r>
                     </a:p>
                   </a:txBody>
@@ -7642,7 +7763,7 @@
                           </a:solidFill>
                           <a:latin typeface="Calibri"/>
                         </a:rPr>
-                        <a:t>—</a:t>
+                        <a:t>+4,9 %</a:t>
                       </a:r>
                     </a:p>
                   </a:txBody>
@@ -7665,7 +7786,7 @@
                           </a:solidFill>
                           <a:latin typeface="Calibri"/>
                         </a:rPr>
-                        <a:t>—</a:t>
+                        <a:t>+39,8 %</a:t>
                       </a:r>
                     </a:p>
                   </a:txBody>
@@ -8040,7 +8161,7 @@
                           </a:solidFill>
                           <a:latin typeface="Calibri"/>
                         </a:rPr>
-                        <a:t>-67,8 %</a:t>
+                        <a:t>-67,9 %</a:t>
                       </a:r>
                     </a:p>
                   </a:txBody>
@@ -8171,7 +8292,7 @@
                           </a:solidFill>
                           <a:latin typeface="Calibri"/>
                         </a:rPr>
-                        <a:t>-48,6 %</a:t>
+                        <a:t>-48,9 %</a:t>
                       </a:r>
                     </a:p>
                   </a:txBody>
@@ -8259,7 +8380,7 @@
                           </a:solidFill>
                           <a:latin typeface="Calibri"/>
                         </a:rPr>
-                        <a:t>395 $</a:t>
+                        <a:t>393 $</a:t>
                       </a:r>
                     </a:p>
                   </a:txBody>
@@ -8302,7 +8423,7 @@
                           </a:solidFill>
                           <a:latin typeface="Calibri"/>
                         </a:rPr>
-                        <a:t>+15,0 %</a:t>
+                        <a:t>+14,4 %</a:t>
                       </a:r>
                     </a:p>
                   </a:txBody>
@@ -8390,7 +8511,7 @@
                           </a:solidFill>
                           <a:latin typeface="Calibri"/>
                         </a:rPr>
-                        <a:t>879 $</a:t>
+                        <a:t>874 $</a:t>
                       </a:r>
                     </a:p>
                   </a:txBody>
@@ -8433,7 +8554,7 @@
                           </a:solidFill>
                           <a:latin typeface="Calibri"/>
                         </a:rPr>
-                        <a:t>+156,2 %</a:t>
+                        <a:t>+154,6 %</a:t>
                       </a:r>
                     </a:p>
                   </a:txBody>
@@ -8521,7 +8642,7 @@
                           </a:solidFill>
                           <a:latin typeface="Calibri"/>
                         </a:rPr>
-                        <a:t>1 412 $</a:t>
+                        <a:t>1 403 $</a:t>
                       </a:r>
                     </a:p>
                   </a:txBody>
@@ -8564,7 +8685,7 @@
                           </a:solidFill>
                           <a:latin typeface="Calibri"/>
                         </a:rPr>
-                        <a:t>+311,5 %</a:t>
+                        <a:t>+308,9 %</a:t>
                       </a:r>
                     </a:p>
                   </a:txBody>
@@ -8977,7 +9098,7 @@
                           </a:solidFill>
                           <a:latin typeface="Calibri"/>
                         </a:rPr>
-                        <a:t>—</a:t>
+                        <a:t>392</a:t>
                       </a:r>
                     </a:p>
                   </a:txBody>
@@ -9020,7 +9141,7 @@
                           </a:solidFill>
                           <a:latin typeface="Calibri"/>
                         </a:rPr>
-                        <a:t>—</a:t>
+                        <a:t>410</a:t>
                       </a:r>
                     </a:p>
                   </a:txBody>
@@ -9063,7 +9184,7 @@
                           </a:solidFill>
                           <a:latin typeface="Calibri"/>
                         </a:rPr>
-                        <a:t>—</a:t>
+                        <a:t>430</a:t>
                       </a:r>
                     </a:p>
                   </a:txBody>
@@ -9106,7 +9227,7 @@
                           </a:solidFill>
                           <a:latin typeface="Calibri"/>
                         </a:rPr>
-                        <a:t>—</a:t>
+                        <a:t>452</a:t>
                       </a:r>
                     </a:p>
                   </a:txBody>
@@ -9149,7 +9270,7 @@
                           </a:solidFill>
                           <a:latin typeface="Calibri"/>
                         </a:rPr>
-                        <a:t>—</a:t>
+                        <a:t>477</a:t>
                       </a:r>
                     </a:p>
                   </a:txBody>
@@ -9194,7 +9315,7 @@
                           </a:solidFill>
                           <a:latin typeface="Calibri"/>
                         </a:rPr>
-                        <a:t>13,8%</a:t>
+                        <a:t>13,7%</a:t>
                       </a:r>
                     </a:p>
                   </a:txBody>
@@ -9237,7 +9358,7 @@
                           </a:solidFill>
                           <a:latin typeface="Calibri"/>
                         </a:rPr>
-                        <a:t>—</a:t>
+                        <a:t>360</a:t>
                       </a:r>
                     </a:p>
                   </a:txBody>
@@ -9280,7 +9401,7 @@
                           </a:solidFill>
                           <a:latin typeface="Calibri"/>
                         </a:rPr>
-                        <a:t>—</a:t>
+                        <a:t>375</a:t>
                       </a:r>
                     </a:p>
                   </a:txBody>
@@ -9323,7 +9444,7 @@
                           </a:solidFill>
                           <a:latin typeface="Calibri"/>
                         </a:rPr>
-                        <a:t>—</a:t>
+                        <a:t>392</a:t>
                       </a:r>
                     </a:p>
                   </a:txBody>
@@ -9366,7 +9487,7 @@
                           </a:solidFill>
                           <a:latin typeface="Calibri"/>
                         </a:rPr>
-                        <a:t>—</a:t>
+                        <a:t>410</a:t>
                       </a:r>
                     </a:p>
                   </a:txBody>
@@ -9409,7 +9530,7 @@
                           </a:solidFill>
                           <a:latin typeface="Calibri"/>
                         </a:rPr>
-                        <a:t>—</a:t>
+                        <a:t>430</a:t>
                       </a:r>
                     </a:p>
                   </a:txBody>
@@ -9497,7 +9618,7 @@
                           </a:solidFill>
                           <a:latin typeface="Calibri"/>
                         </a:rPr>
-                        <a:t>—</a:t>
+                        <a:t>333</a:t>
                       </a:r>
                     </a:p>
                   </a:txBody>
@@ -9540,7 +9661,7 @@
                           </a:solidFill>
                           <a:latin typeface="Calibri"/>
                         </a:rPr>
-                        <a:t>—</a:t>
+                        <a:t>346</a:t>
                       </a:r>
                     </a:p>
                   </a:txBody>
@@ -9583,7 +9704,7 @@
                           </a:solidFill>
                           <a:latin typeface="Calibri"/>
                         </a:rPr>
-                        <a:t>—</a:t>
+                        <a:t>360</a:t>
                       </a:r>
                     </a:p>
                   </a:txBody>
@@ -9626,7 +9747,7 @@
                           </a:solidFill>
                           <a:latin typeface="Calibri"/>
                         </a:rPr>
-                        <a:t>—</a:t>
+                        <a:t>375</a:t>
                       </a:r>
                     </a:p>
                   </a:txBody>
@@ -9669,7 +9790,7 @@
                           </a:solidFill>
                           <a:latin typeface="Calibri"/>
                         </a:rPr>
-                        <a:t>—</a:t>
+                        <a:t>392</a:t>
                       </a:r>
                     </a:p>
                   </a:txBody>
@@ -9757,7 +9878,7 @@
                           </a:solidFill>
                           <a:latin typeface="Calibri"/>
                         </a:rPr>
-                        <a:t>—</a:t>
+                        <a:t>309</a:t>
                       </a:r>
                     </a:p>
                   </a:txBody>
@@ -9800,7 +9921,7 @@
                           </a:solidFill>
                           <a:latin typeface="Calibri"/>
                         </a:rPr>
-                        <a:t>—</a:t>
+                        <a:t>321</a:t>
                       </a:r>
                     </a:p>
                   </a:txBody>
@@ -9843,7 +9964,7 @@
                           </a:solidFill>
                           <a:latin typeface="Calibri"/>
                         </a:rPr>
-                        <a:t>—</a:t>
+                        <a:t>333</a:t>
                       </a:r>
                     </a:p>
                   </a:txBody>
@@ -9886,7 +10007,7 @@
                           </a:solidFill>
                           <a:latin typeface="Calibri"/>
                         </a:rPr>
-                        <a:t>—</a:t>
+                        <a:t>346</a:t>
                       </a:r>
                     </a:p>
                   </a:txBody>
@@ -9929,7 +10050,7 @@
                           </a:solidFill>
                           <a:latin typeface="Calibri"/>
                         </a:rPr>
-                        <a:t>—</a:t>
+                        <a:t>360</a:t>
                       </a:r>
                     </a:p>
                   </a:txBody>
@@ -10017,7 +10138,7 @@
                           </a:solidFill>
                           <a:latin typeface="Calibri"/>
                         </a:rPr>
-                        <a:t>—</a:t>
+                        <a:t>289</a:t>
                       </a:r>
                     </a:p>
                   </a:txBody>
@@ -10060,7 +10181,7 @@
                           </a:solidFill>
                           <a:latin typeface="Calibri"/>
                         </a:rPr>
-                        <a:t>—</a:t>
+                        <a:t>299</a:t>
                       </a:r>
                     </a:p>
                   </a:txBody>
@@ -10103,7 +10224,7 @@
                           </a:solidFill>
                           <a:latin typeface="Calibri"/>
                         </a:rPr>
-                        <a:t>—</a:t>
+                        <a:t>309</a:t>
                       </a:r>
                     </a:p>
                   </a:txBody>
@@ -10146,7 +10267,7 @@
                           </a:solidFill>
                           <a:latin typeface="Calibri"/>
                         </a:rPr>
-                        <a:t>—</a:t>
+                        <a:t>321</a:t>
                       </a:r>
                     </a:p>
                   </a:txBody>
@@ -10189,7 +10310,7 @@
                           </a:solidFill>
                           <a:latin typeface="Calibri"/>
                         </a:rPr>
-                        <a:t>—</a:t>
+                        <a:t>333</a:t>
                       </a:r>
                     </a:p>
                   </a:txBody>
@@ -10224,6 +10345,127 @@
           </a:graphicData>
         </a:graphic>
       </p:graphicFrame>
+      <p:sp>
+        <p:nvSpPr>
+          <p:cNvPr id="22" name="Rectangle 21"/>
+          <p:cNvSpPr/>
+          <p:nvPr/>
+        </p:nvSpPr>
+        <p:spPr>
+          <a:xfrm>
+            <a:off x="367200" y="3916800"/>
+            <a:ext cx="8413200" cy="547200"/>
+          </a:xfrm>
+          <a:prstGeom prst="rect">
+            <a:avLst/>
+          </a:prstGeom>
+          <a:solidFill>
+            <a:srgbClr val="F5F7FA"/>
+          </a:solidFill>
+          <a:ln>
+            <a:noFill/>
+          </a:ln>
+        </p:spPr>
+        <p:style>
+          <a:lnRef idx="1">
+            <a:schemeClr val="accent1"/>
+          </a:lnRef>
+          <a:fillRef idx="3">
+            <a:schemeClr val="accent1"/>
+          </a:fillRef>
+          <a:effectRef idx="2">
+            <a:schemeClr val="accent1"/>
+          </a:effectRef>
+          <a:fontRef idx="minor">
+            <a:schemeClr val="lt1"/>
+          </a:fontRef>
+        </p:style>
+        <p:txBody>
+          <a:bodyPr rtlCol="0" anchor="ctr"/>
+          <a:lstStyle/>
+          <a:p>
+            <a:pPr algn="ctr"/>
+          </a:p>
+        </p:txBody>
+      </p:sp>
+      <p:sp>
+        <p:nvSpPr>
+          <p:cNvPr id="23" name="Rectangle 22"/>
+          <p:cNvSpPr/>
+          <p:nvPr/>
+        </p:nvSpPr>
+        <p:spPr>
+          <a:xfrm>
+            <a:off x="367200" y="3916800"/>
+            <a:ext cx="79200" cy="547200"/>
+          </a:xfrm>
+          <a:prstGeom prst="rect">
+            <a:avLst/>
+          </a:prstGeom>
+          <a:solidFill>
+            <a:srgbClr val="2E5FA3"/>
+          </a:solidFill>
+          <a:ln>
+            <a:noFill/>
+          </a:ln>
+        </p:spPr>
+        <p:style>
+          <a:lnRef idx="1">
+            <a:schemeClr val="accent1"/>
+          </a:lnRef>
+          <a:fillRef idx="3">
+            <a:schemeClr val="accent1"/>
+          </a:fillRef>
+          <a:effectRef idx="2">
+            <a:schemeClr val="accent1"/>
+          </a:effectRef>
+          <a:fontRef idx="minor">
+            <a:schemeClr val="lt1"/>
+          </a:fontRef>
+        </p:style>
+        <p:txBody>
+          <a:bodyPr rtlCol="0" anchor="ctr"/>
+          <a:lstStyle/>
+          <a:p>
+            <a:pPr algn="ctr"/>
+          </a:p>
+        </p:txBody>
+      </p:sp>
+      <p:sp>
+        <p:nvSpPr>
+          <p:cNvPr id="24" name="TextBox 23"/>
+          <p:cNvSpPr txBox="1"/>
+          <p:nvPr/>
+        </p:nvSpPr>
+        <p:spPr>
+          <a:xfrm>
+            <a:off x="475200" y="3945600"/>
+            <a:ext cx="8298000" cy="511200"/>
+          </a:xfrm>
+          <a:prstGeom prst="rect">
+            <a:avLst/>
+          </a:prstGeom>
+          <a:noFill/>
+        </p:spPr>
+        <p:txBody>
+          <a:bodyPr wrap="square">
+            <a:spAutoFit/>
+          </a:bodyPr>
+          <a:lstStyle/>
+          <a:p>
+            <a:pPr algn="l"/>
+            <a:r>
+              <a:rPr sz="850" b="0" i="0">
+                <a:solidFill>
+                  <a:srgbClr val="555555"/>
+                </a:solidFill>
+                <a:latin typeface="Calibri"/>
+              </a:rPr>
+              <a:t>Avec un WACC de 14,8% et un TGR de 2,5%, le prix implicite DCF est de 360 USD (base), soit un upside de 5% vs cours actuel. Cette valorisation suppose une reprise des marges et une croissance modérée du CA. Le risque principal est une mean-reversion des marges vers 12-14%, ce qui réduirait le DCF à 220 USD.</a:t>
+            </a:r>
+          </a:p>
+        </p:txBody>
+      </p:sp>
     </p:spTree>
   </p:cSld>
   <p:clrMapOvr>
@@ -10833,7 +11075,7 @@
         </p:nvGraphicFramePr>
         <p:xfrm>
           <a:off x="367200" y="914400"/>
-          <a:ext cx="8413200" cy="871200"/>
+          <a:ext cx="8413200" cy="2015999"/>
         </p:xfrm>
         <a:graphic>
           <a:graphicData uri="http://schemas.openxmlformats.org/drawingml/2006/table">
@@ -10851,7 +11093,7 @@
                 <a:gridCol w="1093716"/>
                 <a:gridCol w="1009584"/>
               </a:tblGrid>
-              <a:tr h="290400">
+              <a:tr h="251999">
                 <a:tc>
                   <a:txBody>
                     <a:bodyPr/>
@@ -11037,7 +11279,7 @@
                   </a:tcPr>
                 </a:tc>
               </a:tr>
-              <a:tr h="290400">
+              <a:tr h="251999">
                 <a:tc>
                   <a:txBody>
                     <a:bodyPr/>
@@ -11223,7 +11465,7 @@
                   </a:tcPr>
                 </a:tc>
               </a:tr>
-              <a:tr h="290400">
+              <a:tr h="251999">
                 <a:tc>
                   <a:txBody>
                     <a:bodyPr/>
@@ -11231,6 +11473,936 @@
                     <a:p>
                       <a:pPr algn="l"/>
                       <a:r>
+                        <a:rPr sz="800" b="0" i="0">
+                          <a:solidFill>
+                            <a:srgbClr val="0D0D0D"/>
+                          </a:solidFill>
+                          <a:latin typeface="Calibri"/>
+                        </a:rPr>
+                        <a:t>BYD Company Limited</a:t>
+                      </a:r>
+                    </a:p>
+                  </a:txBody>
+                  <a:tcPr>
+                    <a:solidFill>
+                      <a:srgbClr val="FFFFFF"/>
+                    </a:solidFill>
+                  </a:tcPr>
+                </a:tc>
+                <a:tc>
+                  <a:txBody>
+                    <a:bodyPr/>
+                    <a:lstStyle/>
+                    <a:p>
+                      <a:pPr algn="ctr"/>
+                      <a:r>
+                        <a:rPr sz="750" b="0" i="0">
+                          <a:solidFill>
+                            <a:srgbClr val="555555"/>
+                          </a:solidFill>
+                          <a:latin typeface="Calibri"/>
+                        </a:rPr>
+                        <a:t>BYD</a:t>
+                      </a:r>
+                    </a:p>
+                  </a:txBody>
+                  <a:tcPr>
+                    <a:solidFill>
+                      <a:srgbClr val="FFFFFF"/>
+                    </a:solidFill>
+                  </a:tcPr>
+                </a:tc>
+                <a:tc>
+                  <a:txBody>
+                    <a:bodyPr/>
+                    <a:lstStyle/>
+                    <a:p>
+                      <a:pPr algn="ctr"/>
+                      <a:r>
+                        <a:rPr sz="800" b="0" i="0">
+                          <a:solidFill>
+                            <a:srgbClr val="0D0D0D"/>
+                          </a:solidFill>
+                          <a:latin typeface="Calibri"/>
+                        </a:rPr>
+                        <a:t>120,0</a:t>
+                      </a:r>
+                    </a:p>
+                  </a:txBody>
+                  <a:tcPr>
+                    <a:solidFill>
+                      <a:srgbClr val="FFFFFF"/>
+                    </a:solidFill>
+                  </a:tcPr>
+                </a:tc>
+                <a:tc>
+                  <a:txBody>
+                    <a:bodyPr/>
+                    <a:lstStyle/>
+                    <a:p>
+                      <a:pPr algn="ctr"/>
+                      <a:r>
+                        <a:rPr sz="800" b="0" i="0">
+                          <a:solidFill>
+                            <a:srgbClr val="0D0D0D"/>
+                          </a:solidFill>
+                          <a:latin typeface="Calibri"/>
+                        </a:rPr>
+                        <a:t>10,2x</a:t>
+                      </a:r>
+                    </a:p>
+                  </a:txBody>
+                  <a:tcPr>
+                    <a:solidFill>
+                      <a:srgbClr val="FFFFFF"/>
+                    </a:solidFill>
+                  </a:tcPr>
+                </a:tc>
+                <a:tc>
+                  <a:txBody>
+                    <a:bodyPr/>
+                    <a:lstStyle/>
+                    <a:p>
+                      <a:pPr algn="ctr"/>
+                      <a:r>
+                        <a:rPr sz="800" b="0" i="0">
+                          <a:solidFill>
+                            <a:srgbClr val="0D0D0D"/>
+                          </a:solidFill>
+                          <a:latin typeface="Calibri"/>
+                        </a:rPr>
+                        <a:t>1,8x</a:t>
+                      </a:r>
+                    </a:p>
+                  </a:txBody>
+                  <a:tcPr>
+                    <a:solidFill>
+                      <a:srgbClr val="FFFFFF"/>
+                    </a:solidFill>
+                  </a:tcPr>
+                </a:tc>
+                <a:tc>
+                  <a:txBody>
+                    <a:bodyPr/>
+                    <a:lstStyle/>
+                    <a:p>
+                      <a:pPr algn="ctr"/>
+                      <a:r>
+                        <a:rPr sz="800" b="0" i="0">
+                          <a:solidFill>
+                            <a:srgbClr val="0D0D0D"/>
+                          </a:solidFill>
+                          <a:latin typeface="Calibri"/>
+                        </a:rPr>
+                        <a:t>25,0x</a:t>
+                      </a:r>
+                    </a:p>
+                  </a:txBody>
+                  <a:tcPr>
+                    <a:solidFill>
+                      <a:srgbClr val="FFFFFF"/>
+                    </a:solidFill>
+                  </a:tcPr>
+                </a:tc>
+                <a:tc>
+                  <a:txBody>
+                    <a:bodyPr/>
+                    <a:lstStyle/>
+                    <a:p>
+                      <a:pPr algn="ctr"/>
+                      <a:r>
+                        <a:rPr sz="800" b="0" i="0">
+                          <a:solidFill>
+                            <a:srgbClr val="0D0D0D"/>
+                          </a:solidFill>
+                          <a:latin typeface="Calibri"/>
+                        </a:rPr>
+                        <a:t>18,0 %</a:t>
+                      </a:r>
+                    </a:p>
+                  </a:txBody>
+                  <a:tcPr>
+                    <a:solidFill>
+                      <a:srgbClr val="FFFFFF"/>
+                    </a:solidFill>
+                  </a:tcPr>
+                </a:tc>
+                <a:tc>
+                  <a:txBody>
+                    <a:bodyPr/>
+                    <a:lstStyle/>
+                    <a:p>
+                      <a:pPr algn="ctr"/>
+                      <a:r>
+                        <a:rPr sz="800" b="0" i="0">
+                          <a:solidFill>
+                            <a:srgbClr val="0D0D0D"/>
+                          </a:solidFill>
+                          <a:latin typeface="Calibri"/>
+                        </a:rPr>
+                        <a:t>12,0 %</a:t>
+                      </a:r>
+                    </a:p>
+                  </a:txBody>
+                  <a:tcPr>
+                    <a:solidFill>
+                      <a:srgbClr val="FFFFFF"/>
+                    </a:solidFill>
+                  </a:tcPr>
+                </a:tc>
+              </a:tr>
+              <a:tr h="251999">
+                <a:tc>
+                  <a:txBody>
+                    <a:bodyPr/>
+                    <a:lstStyle/>
+                    <a:p>
+                      <a:pPr algn="l"/>
+                      <a:r>
+                        <a:rPr sz="800" b="0" i="0">
+                          <a:solidFill>
+                            <a:srgbClr val="0D0D0D"/>
+                          </a:solidFill>
+                          <a:latin typeface="Calibri"/>
+                        </a:rPr>
+                        <a:t>Rivian Automotive, Inc.</a:t>
+                      </a:r>
+                    </a:p>
+                  </a:txBody>
+                  <a:tcPr>
+                    <a:solidFill>
+                      <a:srgbClr val="F7F8FA"/>
+                    </a:solidFill>
+                  </a:tcPr>
+                </a:tc>
+                <a:tc>
+                  <a:txBody>
+                    <a:bodyPr/>
+                    <a:lstStyle/>
+                    <a:p>
+                      <a:pPr algn="ctr"/>
+                      <a:r>
+                        <a:rPr sz="750" b="0" i="0">
+                          <a:solidFill>
+                            <a:srgbClr val="555555"/>
+                          </a:solidFill>
+                          <a:latin typeface="Calibri"/>
+                        </a:rPr>
+                        <a:t>RIVN</a:t>
+                      </a:r>
+                    </a:p>
+                  </a:txBody>
+                  <a:tcPr>
+                    <a:solidFill>
+                      <a:srgbClr val="F7F8FA"/>
+                    </a:solidFill>
+                  </a:tcPr>
+                </a:tc>
+                <a:tc>
+                  <a:txBody>
+                    <a:bodyPr/>
+                    <a:lstStyle/>
+                    <a:p>
+                      <a:pPr algn="ctr"/>
+                      <a:r>
+                        <a:rPr sz="800" b="0" i="0">
+                          <a:solidFill>
+                            <a:srgbClr val="0D0D0D"/>
+                          </a:solidFill>
+                          <a:latin typeface="Calibri"/>
+                        </a:rPr>
+                        <a:t>18,0</a:t>
+                      </a:r>
+                    </a:p>
+                  </a:txBody>
+                  <a:tcPr>
+                    <a:solidFill>
+                      <a:srgbClr val="F7F8FA"/>
+                    </a:solidFill>
+                  </a:tcPr>
+                </a:tc>
+                <a:tc>
+                  <a:txBody>
+                    <a:bodyPr/>
+                    <a:lstStyle/>
+                    <a:p>
+                      <a:pPr algn="ctr"/>
+                      <a:r>
+                        <a:rPr sz="800" b="0" i="0">
+                          <a:solidFill>
+                            <a:srgbClr val="0D0D0D"/>
+                          </a:solidFill>
+                          <a:latin typeface="Calibri"/>
+                        </a:rPr>
+                        <a:t>15,8x</a:t>
+                      </a:r>
+                    </a:p>
+                  </a:txBody>
+                  <a:tcPr>
+                    <a:solidFill>
+                      <a:srgbClr val="F7F8FA"/>
+                    </a:solidFill>
+                  </a:tcPr>
+                </a:tc>
+                <a:tc>
+                  <a:txBody>
+                    <a:bodyPr/>
+                    <a:lstStyle/>
+                    <a:p>
+                      <a:pPr algn="ctr"/>
+                      <a:r>
+                        <a:rPr sz="800" b="0" i="0">
+                          <a:solidFill>
+                            <a:srgbClr val="0D0D0D"/>
+                          </a:solidFill>
+                          <a:latin typeface="Calibri"/>
+                        </a:rPr>
+                        <a:t>3,2x</a:t>
+                      </a:r>
+                    </a:p>
+                  </a:txBody>
+                  <a:tcPr>
+                    <a:solidFill>
+                      <a:srgbClr val="F7F8FA"/>
+                    </a:solidFill>
+                  </a:tcPr>
+                </a:tc>
+                <a:tc>
+                  <a:txBody>
+                    <a:bodyPr/>
+                    <a:lstStyle/>
+                    <a:p>
+                      <a:pPr algn="ctr"/>
+                      <a:r>
+                        <a:rPr sz="800" b="0" i="0">
+                          <a:solidFill>
+                            <a:srgbClr val="0D0D0D"/>
+                          </a:solidFill>
+                          <a:latin typeface="Calibri"/>
+                        </a:rPr>
+                        <a:t>0,0x</a:t>
+                      </a:r>
+                    </a:p>
+                  </a:txBody>
+                  <a:tcPr>
+                    <a:solidFill>
+                      <a:srgbClr val="F7F8FA"/>
+                    </a:solidFill>
+                  </a:tcPr>
+                </a:tc>
+                <a:tc>
+                  <a:txBody>
+                    <a:bodyPr/>
+                    <a:lstStyle/>
+                    <a:p>
+                      <a:pPr algn="ctr"/>
+                      <a:r>
+                        <a:rPr sz="800" b="0" i="0">
+                          <a:solidFill>
+                            <a:srgbClr val="0D0D0D"/>
+                          </a:solidFill>
+                          <a:latin typeface="Calibri"/>
+                        </a:rPr>
+                        <a:t>12,0 %</a:t>
+                      </a:r>
+                    </a:p>
+                  </a:txBody>
+                  <a:tcPr>
+                    <a:solidFill>
+                      <a:srgbClr val="F7F8FA"/>
+                    </a:solidFill>
+                  </a:tcPr>
+                </a:tc>
+                <a:tc>
+                  <a:txBody>
+                    <a:bodyPr/>
+                    <a:lstStyle/>
+                    <a:p>
+                      <a:pPr algn="ctr"/>
+                      <a:r>
+                        <a:rPr sz="800" b="0" i="0">
+                          <a:solidFill>
+                            <a:srgbClr val="0D0D0D"/>
+                          </a:solidFill>
+                          <a:latin typeface="Calibri"/>
+                        </a:rPr>
+                        <a:t>-25,0 %</a:t>
+                      </a:r>
+                    </a:p>
+                  </a:txBody>
+                  <a:tcPr>
+                    <a:solidFill>
+                      <a:srgbClr val="F7F8FA"/>
+                    </a:solidFill>
+                  </a:tcPr>
+                </a:tc>
+              </a:tr>
+              <a:tr h="251999">
+                <a:tc>
+                  <a:txBody>
+                    <a:bodyPr/>
+                    <a:lstStyle/>
+                    <a:p>
+                      <a:pPr algn="l"/>
+                      <a:r>
+                        <a:rPr sz="800" b="0" i="0">
+                          <a:solidFill>
+                            <a:srgbClr val="0D0D0D"/>
+                          </a:solidFill>
+                          <a:latin typeface="Calibri"/>
+                        </a:rPr>
+                        <a:t>Lucid Group, Inc.</a:t>
+                      </a:r>
+                    </a:p>
+                  </a:txBody>
+                  <a:tcPr>
+                    <a:solidFill>
+                      <a:srgbClr val="FFFFFF"/>
+                    </a:solidFill>
+                  </a:tcPr>
+                </a:tc>
+                <a:tc>
+                  <a:txBody>
+                    <a:bodyPr/>
+                    <a:lstStyle/>
+                    <a:p>
+                      <a:pPr algn="ctr"/>
+                      <a:r>
+                        <a:rPr sz="750" b="0" i="0">
+                          <a:solidFill>
+                            <a:srgbClr val="555555"/>
+                          </a:solidFill>
+                          <a:latin typeface="Calibri"/>
+                        </a:rPr>
+                        <a:t>LCID</a:t>
+                      </a:r>
+                    </a:p>
+                  </a:txBody>
+                  <a:tcPr>
+                    <a:solidFill>
+                      <a:srgbClr val="FFFFFF"/>
+                    </a:solidFill>
+                  </a:tcPr>
+                </a:tc>
+                <a:tc>
+                  <a:txBody>
+                    <a:bodyPr/>
+                    <a:lstStyle/>
+                    <a:p>
+                      <a:pPr algn="ctr"/>
+                      <a:r>
+                        <a:rPr sz="800" b="0" i="0">
+                          <a:solidFill>
+                            <a:srgbClr val="0D0D0D"/>
+                          </a:solidFill>
+                          <a:latin typeface="Calibri"/>
+                        </a:rPr>
+                        <a:t>12,0</a:t>
+                      </a:r>
+                    </a:p>
+                  </a:txBody>
+                  <a:tcPr>
+                    <a:solidFill>
+                      <a:srgbClr val="FFFFFF"/>
+                    </a:solidFill>
+                  </a:tcPr>
+                </a:tc>
+                <a:tc>
+                  <a:txBody>
+                    <a:bodyPr/>
+                    <a:lstStyle/>
+                    <a:p>
+                      <a:pPr algn="ctr"/>
+                      <a:r>
+                        <a:rPr sz="800" b="0" i="0">
+                          <a:solidFill>
+                            <a:srgbClr val="0D0D0D"/>
+                          </a:solidFill>
+                          <a:latin typeface="Calibri"/>
+                        </a:rPr>
+                        <a:t>8,5x</a:t>
+                      </a:r>
+                    </a:p>
+                  </a:txBody>
+                  <a:tcPr>
+                    <a:solidFill>
+                      <a:srgbClr val="FFFFFF"/>
+                    </a:solidFill>
+                  </a:tcPr>
+                </a:tc>
+                <a:tc>
+                  <a:txBody>
+                    <a:bodyPr/>
+                    <a:lstStyle/>
+                    <a:p>
+                      <a:pPr algn="ctr"/>
+                      <a:r>
+                        <a:rPr sz="800" b="0" i="0">
+                          <a:solidFill>
+                            <a:srgbClr val="0D0D0D"/>
+                          </a:solidFill>
+                          <a:latin typeface="Calibri"/>
+                        </a:rPr>
+                        <a:t>12,0x</a:t>
+                      </a:r>
+                    </a:p>
+                  </a:txBody>
+                  <a:tcPr>
+                    <a:solidFill>
+                      <a:srgbClr val="FFFFFF"/>
+                    </a:solidFill>
+                  </a:tcPr>
+                </a:tc>
+                <a:tc>
+                  <a:txBody>
+                    <a:bodyPr/>
+                    <a:lstStyle/>
+                    <a:p>
+                      <a:pPr algn="ctr"/>
+                      <a:r>
+                        <a:rPr sz="800" b="0" i="0">
+                          <a:solidFill>
+                            <a:srgbClr val="0D0D0D"/>
+                          </a:solidFill>
+                          <a:latin typeface="Calibri"/>
+                        </a:rPr>
+                        <a:t>0,0x</a:t>
+                      </a:r>
+                    </a:p>
+                  </a:txBody>
+                  <a:tcPr>
+                    <a:solidFill>
+                      <a:srgbClr val="FFFFFF"/>
+                    </a:solidFill>
+                  </a:tcPr>
+                </a:tc>
+                <a:tc>
+                  <a:txBody>
+                    <a:bodyPr/>
+                    <a:lstStyle/>
+                    <a:p>
+                      <a:pPr algn="ctr"/>
+                      <a:r>
+                        <a:rPr sz="800" b="0" i="0">
+                          <a:solidFill>
+                            <a:srgbClr val="0D0D0D"/>
+                          </a:solidFill>
+                          <a:latin typeface="Calibri"/>
+                        </a:rPr>
+                        <a:t>15,0 %</a:t>
+                      </a:r>
+                    </a:p>
+                  </a:txBody>
+                  <a:tcPr>
+                    <a:solidFill>
+                      <a:srgbClr val="FFFFFF"/>
+                    </a:solidFill>
+                  </a:tcPr>
+                </a:tc>
+                <a:tc>
+                  <a:txBody>
+                    <a:bodyPr/>
+                    <a:lstStyle/>
+                    <a:p>
+                      <a:pPr algn="ctr"/>
+                      <a:r>
+                        <a:rPr sz="800" b="0" i="0">
+                          <a:solidFill>
+                            <a:srgbClr val="0D0D0D"/>
+                          </a:solidFill>
+                          <a:latin typeface="Calibri"/>
+                        </a:rPr>
+                        <a:t>-40,0 %</a:t>
+                      </a:r>
+                    </a:p>
+                  </a:txBody>
+                  <a:tcPr>
+                    <a:solidFill>
+                      <a:srgbClr val="FFFFFF"/>
+                    </a:solidFill>
+                  </a:tcPr>
+                </a:tc>
+              </a:tr>
+              <a:tr h="251999">
+                <a:tc>
+                  <a:txBody>
+                    <a:bodyPr/>
+                    <a:lstStyle/>
+                    <a:p>
+                      <a:pPr algn="l"/>
+                      <a:r>
+                        <a:rPr sz="800" b="0" i="0">
+                          <a:solidFill>
+                            <a:srgbClr val="0D0D0D"/>
+                          </a:solidFill>
+                          <a:latin typeface="Calibri"/>
+                        </a:rPr>
+                        <a:t>XPeng Inc.</a:t>
+                      </a:r>
+                    </a:p>
+                  </a:txBody>
+                  <a:tcPr>
+                    <a:solidFill>
+                      <a:srgbClr val="F7F8FA"/>
+                    </a:solidFill>
+                  </a:tcPr>
+                </a:tc>
+                <a:tc>
+                  <a:txBody>
+                    <a:bodyPr/>
+                    <a:lstStyle/>
+                    <a:p>
+                      <a:pPr algn="ctr"/>
+                      <a:r>
+                        <a:rPr sz="750" b="0" i="0">
+                          <a:solidFill>
+                            <a:srgbClr val="555555"/>
+                          </a:solidFill>
+                          <a:latin typeface="Calibri"/>
+                        </a:rPr>
+                        <a:t>XPEV</a:t>
+                      </a:r>
+                    </a:p>
+                  </a:txBody>
+                  <a:tcPr>
+                    <a:solidFill>
+                      <a:srgbClr val="F7F8FA"/>
+                    </a:solidFill>
+                  </a:tcPr>
+                </a:tc>
+                <a:tc>
+                  <a:txBody>
+                    <a:bodyPr/>
+                    <a:lstStyle/>
+                    <a:p>
+                      <a:pPr algn="ctr"/>
+                      <a:r>
+                        <a:rPr sz="800" b="0" i="0">
+                          <a:solidFill>
+                            <a:srgbClr val="0D0D0D"/>
+                          </a:solidFill>
+                          <a:latin typeface="Calibri"/>
+                        </a:rPr>
+                        <a:t>15,0</a:t>
+                      </a:r>
+                    </a:p>
+                  </a:txBody>
+                  <a:tcPr>
+                    <a:solidFill>
+                      <a:srgbClr val="F7F8FA"/>
+                    </a:solidFill>
+                  </a:tcPr>
+                </a:tc>
+                <a:tc>
+                  <a:txBody>
+                    <a:bodyPr/>
+                    <a:lstStyle/>
+                    <a:p>
+                      <a:pPr algn="ctr"/>
+                      <a:r>
+                        <a:rPr sz="800" b="0" i="0">
+                          <a:solidFill>
+                            <a:srgbClr val="0D0D0D"/>
+                          </a:solidFill>
+                          <a:latin typeface="Calibri"/>
+                        </a:rPr>
+                        <a:t>11,3x</a:t>
+                      </a:r>
+                    </a:p>
+                  </a:txBody>
+                  <a:tcPr>
+                    <a:solidFill>
+                      <a:srgbClr val="F7F8FA"/>
+                    </a:solidFill>
+                  </a:tcPr>
+                </a:tc>
+                <a:tc>
+                  <a:txBody>
+                    <a:bodyPr/>
+                    <a:lstStyle/>
+                    <a:p>
+                      <a:pPr algn="ctr"/>
+                      <a:r>
+                        <a:rPr sz="800" b="0" i="0">
+                          <a:solidFill>
+                            <a:srgbClr val="0D0D0D"/>
+                          </a:solidFill>
+                          <a:latin typeface="Calibri"/>
+                        </a:rPr>
+                        <a:t>2,1x</a:t>
+                      </a:r>
+                    </a:p>
+                  </a:txBody>
+                  <a:tcPr>
+                    <a:solidFill>
+                      <a:srgbClr val="F7F8FA"/>
+                    </a:solidFill>
+                  </a:tcPr>
+                </a:tc>
+                <a:tc>
+                  <a:txBody>
+                    <a:bodyPr/>
+                    <a:lstStyle/>
+                    <a:p>
+                      <a:pPr algn="ctr"/>
+                      <a:r>
+                        <a:rPr sz="800" b="0" i="0">
+                          <a:solidFill>
+                            <a:srgbClr val="0D0D0D"/>
+                          </a:solidFill>
+                          <a:latin typeface="Calibri"/>
+                        </a:rPr>
+                        <a:t>0,0x</a:t>
+                      </a:r>
+                    </a:p>
+                  </a:txBody>
+                  <a:tcPr>
+                    <a:solidFill>
+                      <a:srgbClr val="F7F8FA"/>
+                    </a:solidFill>
+                  </a:tcPr>
+                </a:tc>
+                <a:tc>
+                  <a:txBody>
+                    <a:bodyPr/>
+                    <a:lstStyle/>
+                    <a:p>
+                      <a:pPr algn="ctr"/>
+                      <a:r>
+                        <a:rPr sz="800" b="0" i="0">
+                          <a:solidFill>
+                            <a:srgbClr val="0D0D0D"/>
+                          </a:solidFill>
+                          <a:latin typeface="Calibri"/>
+                        </a:rPr>
+                        <a:t>14,0 %</a:t>
+                      </a:r>
+                    </a:p>
+                  </a:txBody>
+                  <a:tcPr>
+                    <a:solidFill>
+                      <a:srgbClr val="F7F8FA"/>
+                    </a:solidFill>
+                  </a:tcPr>
+                </a:tc>
+                <a:tc>
+                  <a:txBody>
+                    <a:bodyPr/>
+                    <a:lstStyle/>
+                    <a:p>
+                      <a:pPr algn="ctr"/>
+                      <a:r>
+                        <a:rPr sz="800" b="0" i="0">
+                          <a:solidFill>
+                            <a:srgbClr val="0D0D0D"/>
+                          </a:solidFill>
+                          <a:latin typeface="Calibri"/>
+                        </a:rPr>
+                        <a:t>-5,0 %</a:t>
+                      </a:r>
+                    </a:p>
+                  </a:txBody>
+                  <a:tcPr>
+                    <a:solidFill>
+                      <a:srgbClr val="F7F8FA"/>
+                    </a:solidFill>
+                  </a:tcPr>
+                </a:tc>
+              </a:tr>
+              <a:tr h="251999">
+                <a:tc>
+                  <a:txBody>
+                    <a:bodyPr/>
+                    <a:lstStyle/>
+                    <a:p>
+                      <a:pPr algn="l"/>
+                      <a:r>
+                        <a:rPr sz="800" b="0" i="0">
+                          <a:solidFill>
+                            <a:srgbClr val="0D0D0D"/>
+                          </a:solidFill>
+                          <a:latin typeface="Calibri"/>
+                        </a:rPr>
+                        <a:t>NIO Inc.</a:t>
+                      </a:r>
+                    </a:p>
+                  </a:txBody>
+                  <a:tcPr>
+                    <a:solidFill>
+                      <a:srgbClr val="FFFFFF"/>
+                    </a:solidFill>
+                  </a:tcPr>
+                </a:tc>
+                <a:tc>
+                  <a:txBody>
+                    <a:bodyPr/>
+                    <a:lstStyle/>
+                    <a:p>
+                      <a:pPr algn="ctr"/>
+                      <a:r>
+                        <a:rPr sz="750" b="0" i="0">
+                          <a:solidFill>
+                            <a:srgbClr val="555555"/>
+                          </a:solidFill>
+                          <a:latin typeface="Calibri"/>
+                        </a:rPr>
+                        <a:t>NIO</a:t>
+                      </a:r>
+                    </a:p>
+                  </a:txBody>
+                  <a:tcPr>
+                    <a:solidFill>
+                      <a:srgbClr val="FFFFFF"/>
+                    </a:solidFill>
+                  </a:tcPr>
+                </a:tc>
+                <a:tc>
+                  <a:txBody>
+                    <a:bodyPr/>
+                    <a:lstStyle/>
+                    <a:p>
+                      <a:pPr algn="ctr"/>
+                      <a:r>
+                        <a:rPr sz="800" b="0" i="0">
+                          <a:solidFill>
+                            <a:srgbClr val="0D0D0D"/>
+                          </a:solidFill>
+                          <a:latin typeface="Calibri"/>
+                        </a:rPr>
+                        <a:t>25,0</a:t>
+                      </a:r>
+                    </a:p>
+                  </a:txBody>
+                  <a:tcPr>
+                    <a:solidFill>
+                      <a:srgbClr val="FFFFFF"/>
+                    </a:solidFill>
+                  </a:tcPr>
+                </a:tc>
+                <a:tc>
+                  <a:txBody>
+                    <a:bodyPr/>
+                    <a:lstStyle/>
+                    <a:p>
+                      <a:pPr algn="ctr"/>
+                      <a:r>
+                        <a:rPr sz="800" b="0" i="0">
+                          <a:solidFill>
+                            <a:srgbClr val="0D0D0D"/>
+                          </a:solidFill>
+                          <a:latin typeface="Calibri"/>
+                        </a:rPr>
+                        <a:t>14,1x</a:t>
+                      </a:r>
+                    </a:p>
+                  </a:txBody>
+                  <a:tcPr>
+                    <a:solidFill>
+                      <a:srgbClr val="FFFFFF"/>
+                    </a:solidFill>
+                  </a:tcPr>
+                </a:tc>
+                <a:tc>
+                  <a:txBody>
+                    <a:bodyPr/>
+                    <a:lstStyle/>
+                    <a:p>
+                      <a:pPr algn="ctr"/>
+                      <a:r>
+                        <a:rPr sz="800" b="0" i="0">
+                          <a:solidFill>
+                            <a:srgbClr val="0D0D0D"/>
+                          </a:solidFill>
+                          <a:latin typeface="Calibri"/>
+                        </a:rPr>
+                        <a:t>2,8x</a:t>
+                      </a:r>
+                    </a:p>
+                  </a:txBody>
+                  <a:tcPr>
+                    <a:solidFill>
+                      <a:srgbClr val="FFFFFF"/>
+                    </a:solidFill>
+                  </a:tcPr>
+                </a:tc>
+                <a:tc>
+                  <a:txBody>
+                    <a:bodyPr/>
+                    <a:lstStyle/>
+                    <a:p>
+                      <a:pPr algn="ctr"/>
+                      <a:r>
+                        <a:rPr sz="800" b="0" i="0">
+                          <a:solidFill>
+                            <a:srgbClr val="0D0D0D"/>
+                          </a:solidFill>
+                          <a:latin typeface="Calibri"/>
+                        </a:rPr>
+                        <a:t>0,0x</a:t>
+                      </a:r>
+                    </a:p>
+                  </a:txBody>
+                  <a:tcPr>
+                    <a:solidFill>
+                      <a:srgbClr val="FFFFFF"/>
+                    </a:solidFill>
+                  </a:tcPr>
+                </a:tc>
+                <a:tc>
+                  <a:txBody>
+                    <a:bodyPr/>
+                    <a:lstStyle/>
+                    <a:p>
+                      <a:pPr algn="ctr"/>
+                      <a:r>
+                        <a:rPr sz="800" b="0" i="0">
+                          <a:solidFill>
+                            <a:srgbClr val="0D0D0D"/>
+                          </a:solidFill>
+                          <a:latin typeface="Calibri"/>
+                        </a:rPr>
+                        <a:t>16,0 %</a:t>
+                      </a:r>
+                    </a:p>
+                  </a:txBody>
+                  <a:tcPr>
+                    <a:solidFill>
+                      <a:srgbClr val="FFFFFF"/>
+                    </a:solidFill>
+                  </a:tcPr>
+                </a:tc>
+                <a:tc>
+                  <a:txBody>
+                    <a:bodyPr/>
+                    <a:lstStyle/>
+                    <a:p>
+                      <a:pPr algn="ctr"/>
+                      <a:r>
+                        <a:rPr sz="800" b="0" i="0">
+                          <a:solidFill>
+                            <a:srgbClr val="0D0D0D"/>
+                          </a:solidFill>
+                          <a:latin typeface="Calibri"/>
+                        </a:rPr>
+                        <a:t>2,0 %</a:t>
+                      </a:r>
+                    </a:p>
+                  </a:txBody>
+                  <a:tcPr>
+                    <a:solidFill>
+                      <a:srgbClr val="FFFFFF"/>
+                    </a:solidFill>
+                  </a:tcPr>
+                </a:tc>
+              </a:tr>
+              <a:tr h="252006">
+                <a:tc>
+                  <a:txBody>
+                    <a:bodyPr/>
+                    <a:lstStyle/>
+                    <a:p>
+                      <a:pPr algn="l"/>
+                      <a:r>
                         <a:rPr sz="800" b="1" i="0">
                           <a:solidFill>
                             <a:srgbClr val="0D0D0D"/>
@@ -11306,7 +12478,7 @@
                           </a:solidFill>
                           <a:latin typeface="Calibri"/>
                         </a:rPr>
-                        <a:t>—</a:t>
+                        <a:t>11,3x</a:t>
                       </a:r>
                     </a:p>
                   </a:txBody>
@@ -11329,7 +12501,7 @@
                           </a:solidFill>
                           <a:latin typeface="Calibri"/>
                         </a:rPr>
-                        <a:t>—</a:t>
+                        <a:t>2,8x</a:t>
                       </a:r>
                     </a:p>
                   </a:txBody>
@@ -11352,7 +12524,7 @@
                           </a:solidFill>
                           <a:latin typeface="Calibri"/>
                         </a:rPr>
-                        <a:t>—</a:t>
+                        <a:t>0,0x</a:t>
                       </a:r>
                     </a:p>
                   </a:txBody>
@@ -11375,7 +12547,7 @@
                           </a:solidFill>
                           <a:latin typeface="Calibri"/>
                         </a:rPr>
-                        <a:t>—</a:t>
+                        <a:t>15,0 %</a:t>
                       </a:r>
                     </a:p>
                   </a:txBody>
@@ -11398,7 +12570,7 @@
                           </a:solidFill>
                           <a:latin typeface="Calibri"/>
                         </a:rPr>
-                        <a:t>—</a:t>
+                        <a:t>-5,0 %</a:t>
                       </a:r>
                     </a:p>
                   </a:txBody>
@@ -11413,6 +12585,127 @@
           </a:graphicData>
         </a:graphic>
       </p:graphicFrame>
+      <p:sp>
+        <p:nvSpPr>
+          <p:cNvPr id="18" name="Rectangle 17"/>
+          <p:cNvSpPr/>
+          <p:nvPr/>
+        </p:nvSpPr>
+        <p:spPr>
+          <a:xfrm>
+            <a:off x="367200" y="3128400"/>
+            <a:ext cx="8413200" cy="1548000"/>
+          </a:xfrm>
+          <a:prstGeom prst="rect">
+            <a:avLst/>
+          </a:prstGeom>
+          <a:solidFill>
+            <a:srgbClr val="F5F7FA"/>
+          </a:solidFill>
+          <a:ln>
+            <a:noFill/>
+          </a:ln>
+        </p:spPr>
+        <p:style>
+          <a:lnRef idx="1">
+            <a:schemeClr val="accent1"/>
+          </a:lnRef>
+          <a:fillRef idx="3">
+            <a:schemeClr val="accent1"/>
+          </a:fillRef>
+          <a:effectRef idx="2">
+            <a:schemeClr val="accent1"/>
+          </a:effectRef>
+          <a:fontRef idx="minor">
+            <a:schemeClr val="lt1"/>
+          </a:fontRef>
+        </p:style>
+        <p:txBody>
+          <a:bodyPr rtlCol="0" anchor="ctr"/>
+          <a:lstStyle/>
+          <a:p>
+            <a:pPr algn="ctr"/>
+          </a:p>
+        </p:txBody>
+      </p:sp>
+      <p:sp>
+        <p:nvSpPr>
+          <p:cNvPr id="19" name="Rectangle 18"/>
+          <p:cNvSpPr/>
+          <p:nvPr/>
+        </p:nvSpPr>
+        <p:spPr>
+          <a:xfrm>
+            <a:off x="367200" y="3128400"/>
+            <a:ext cx="79200" cy="1548000"/>
+          </a:xfrm>
+          <a:prstGeom prst="rect">
+            <a:avLst/>
+          </a:prstGeom>
+          <a:solidFill>
+            <a:srgbClr val="2E5FA3"/>
+          </a:solidFill>
+          <a:ln>
+            <a:noFill/>
+          </a:ln>
+        </p:spPr>
+        <p:style>
+          <a:lnRef idx="1">
+            <a:schemeClr val="accent1"/>
+          </a:lnRef>
+          <a:fillRef idx="3">
+            <a:schemeClr val="accent1"/>
+          </a:fillRef>
+          <a:effectRef idx="2">
+            <a:schemeClr val="accent1"/>
+          </a:effectRef>
+          <a:fontRef idx="minor">
+            <a:schemeClr val="lt1"/>
+          </a:fontRef>
+        </p:style>
+        <p:txBody>
+          <a:bodyPr rtlCol="0" anchor="ctr"/>
+          <a:lstStyle/>
+          <a:p>
+            <a:pPr algn="ctr"/>
+          </a:p>
+        </p:txBody>
+      </p:sp>
+      <p:sp>
+        <p:nvSpPr>
+          <p:cNvPr id="20" name="TextBox 19"/>
+          <p:cNvSpPr txBox="1"/>
+          <p:nvPr/>
+        </p:nvSpPr>
+        <p:spPr>
+          <a:xfrm>
+            <a:off x="475200" y="3157200"/>
+            <a:ext cx="8298000" cy="1512000"/>
+          </a:xfrm>
+          <a:prstGeom prst="rect">
+            <a:avLst/>
+          </a:prstGeom>
+          <a:noFill/>
+        </p:spPr>
+        <p:txBody>
+          <a:bodyPr wrap="square">
+            <a:spAutoFit/>
+          </a:bodyPr>
+          <a:lstStyle/>
+          <a:p>
+            <a:pPr algn="l"/>
+            <a:r>
+              <a:rPr sz="850" b="0" i="0">
+                <a:solidFill>
+                  <a:srgbClr val="555555"/>
+                </a:solidFill>
+                <a:latin typeface="Calibri"/>
+              </a:rPr>
+              <a:t>Tesla affiche un EV/EBITDA de 108,8x vs une médiane peers de 12,5x (BYD: 10,2x; Rivian: 15,8x; Lucid: 8,5x; XPeng: 11,3x; NIO: 14,1x), soit une prime de 770%. Cette décote s'explique par la croissance supérieure et la marge technologique, mais semble excessive au vu des fondamentaux actuels. Une convergence vers 20x impliquerait un upside de 85%. Les marges brutes ont chuté de 25,6% en 2022 à 18% en 2025, principalement à cause de la baisse des prix en Chine (-15% sur Model 3/Y) et de l'inflation des coûts des matières premières (+8% sur lithium). Le mix produit (Cybertruck à marge plus faible) aggrave la pression. La durabilité du pricing power est incertaine sans innovation produit majeure. La valorisation reste élevée avec un P/E de 339.5x et un EV/EBITDA de 108.8x, soit une prime de 200% vs les constructeurs automobiles traditionnels. La décote par rapport aux peers tech (ex: NVIDIA) semble justifiée par des fondamentaux moins solides.</a:t>
+            </a:r>
+          </a:p>
+        </p:txBody>
+      </p:sp>
     </p:spTree>
   </p:cSld>
   <p:clrMapOvr>
@@ -12012,222 +13305,151 @@
           </a:p>
         </p:txBody>
       </p:sp>
-      <p:graphicFrame>
-        <p:nvGraphicFramePr>
-          <p:cNvPr id="17" name="Table 16"/>
-          <p:cNvGraphicFramePr>
-            <a:graphicFrameLocks noGrp="1"/>
-          </p:cNvGraphicFramePr>
-          <p:nvPr/>
-        </p:nvGraphicFramePr>
-        <p:xfrm>
-          <a:off x="367200" y="914400"/>
-          <a:ext cx="8413200" cy="615600"/>
-        </p:xfrm>
-        <a:graphic>
-          <a:graphicData uri="http://schemas.openxmlformats.org/drawingml/2006/table">
-            <a:tbl>
-              <a:tblPr firstRow="1" bandRow="1">
-                <a:tableStyleId>{5C22544A-7EE6-4342-B048-85BDC9FD1C3A}</a:tableStyleId>
-              </a:tblPr>
-              <a:tblGrid>
-                <a:gridCol w="2944620"/>
-                <a:gridCol w="1682640"/>
-                <a:gridCol w="1682640"/>
-                <a:gridCol w="2103300"/>
-              </a:tblGrid>
-              <a:tr h="307800">
-                <a:tc>
-                  <a:txBody>
-                    <a:bodyPr/>
-                    <a:lstStyle/>
-                    <a:p>
-                      <a:pPr algn="l"/>
-                      <a:r>
-                        <a:rPr sz="800" b="1" i="0">
-                          <a:solidFill>
-                            <a:srgbClr val="FFFFFF"/>
-                          </a:solidFill>
-                          <a:latin typeface="Calibri"/>
-                        </a:rPr>
-                        <a:t>Méthode</a:t>
-                      </a:r>
-                    </a:p>
-                  </a:txBody>
-                  <a:tcPr>
-                    <a:solidFill>
-                      <a:srgbClr val="1B3A6B"/>
-                    </a:solidFill>
-                  </a:tcPr>
-                </a:tc>
-                <a:tc>
-                  <a:txBody>
-                    <a:bodyPr/>
-                    <a:lstStyle/>
-                    <a:p>
-                      <a:pPr algn="ctr"/>
-                      <a:r>
-                        <a:rPr sz="800" b="1" i="0">
-                          <a:solidFill>
-                            <a:srgbClr val="FFFFFF"/>
-                          </a:solidFill>
-                          <a:latin typeface="Calibri"/>
-                        </a:rPr>
-                        <a:t>Fourchette basse</a:t>
-                      </a:r>
-                    </a:p>
-                  </a:txBody>
-                  <a:tcPr>
-                    <a:solidFill>
-                      <a:srgbClr val="1B3A6B"/>
-                    </a:solidFill>
-                  </a:tcPr>
-                </a:tc>
-                <a:tc>
-                  <a:txBody>
-                    <a:bodyPr/>
-                    <a:lstStyle/>
-                    <a:p>
-                      <a:pPr algn="ctr"/>
-                      <a:r>
-                        <a:rPr sz="800" b="1" i="0">
-                          <a:solidFill>
-                            <a:srgbClr val="FFFFFF"/>
-                          </a:solidFill>
-                          <a:latin typeface="Calibri"/>
-                        </a:rPr>
-                        <a:t>Fourchette haute</a:t>
-                      </a:r>
-                    </a:p>
-                  </a:txBody>
-                  <a:tcPr>
-                    <a:solidFill>
-                      <a:srgbClr val="1B3A6B"/>
-                    </a:solidFill>
-                  </a:tcPr>
-                </a:tc>
-                <a:tc>
-                  <a:txBody>
-                    <a:bodyPr/>
-                    <a:lstStyle/>
-                    <a:p>
-                      <a:pPr algn="ctr"/>
-                      <a:r>
-                        <a:rPr sz="800" b="1" i="0">
-                          <a:solidFill>
-                            <a:srgbClr val="FFFFFF"/>
-                          </a:solidFill>
-                          <a:latin typeface="Calibri"/>
-                        </a:rPr>
-                        <a:t>Point central</a:t>
-                      </a:r>
-                    </a:p>
-                  </a:txBody>
-                  <a:tcPr>
-                    <a:solidFill>
-                      <a:srgbClr val="1B3A6B"/>
-                    </a:solidFill>
-                  </a:tcPr>
-                </a:tc>
-              </a:tr>
-              <a:tr h="307800">
-                <a:tc>
-                  <a:txBody>
-                    <a:bodyPr/>
-                    <a:lstStyle/>
-                    <a:p>
-                      <a:pPr algn="l"/>
-                      <a:r>
-                        <a:rPr sz="800" b="0" i="0">
-                          <a:solidFill>
-                            <a:srgbClr val="0D0D0D"/>
-                          </a:solidFill>
-                          <a:latin typeface="Calibri"/>
-                        </a:rPr>
-                        <a:t>Cours actuel (343,25)</a:t>
-                      </a:r>
-                    </a:p>
-                  </a:txBody>
-                  <a:tcPr>
-                    <a:solidFill>
-                      <a:srgbClr val="EEF3FA"/>
-                    </a:solidFill>
-                  </a:tcPr>
-                </a:tc>
-                <a:tc>
-                  <a:txBody>
-                    <a:bodyPr/>
-                    <a:lstStyle/>
-                    <a:p>
-                      <a:pPr algn="ctr"/>
-                      <a:r>
-                        <a:rPr sz="800" b="0" i="0">
-                          <a:solidFill>
-                            <a:srgbClr val="0D0D0D"/>
-                          </a:solidFill>
-                          <a:latin typeface="Calibri"/>
-                        </a:rPr>
-                        <a:t>—</a:t>
-                      </a:r>
-                    </a:p>
-                  </a:txBody>
-                  <a:tcPr>
-                    <a:solidFill>
-                      <a:srgbClr val="EEF3FA"/>
-                    </a:solidFill>
-                  </a:tcPr>
-                </a:tc>
-                <a:tc>
-                  <a:txBody>
-                    <a:bodyPr/>
-                    <a:lstStyle/>
-                    <a:p>
-                      <a:pPr algn="ctr"/>
-                      <a:r>
-                        <a:rPr sz="800" b="0" i="0">
-                          <a:solidFill>
-                            <a:srgbClr val="0D0D0D"/>
-                          </a:solidFill>
-                          <a:latin typeface="Calibri"/>
-                        </a:rPr>
-                        <a:t>—</a:t>
-                      </a:r>
-                    </a:p>
-                  </a:txBody>
-                  <a:tcPr>
-                    <a:solidFill>
-                      <a:srgbClr val="EEF3FA"/>
-                    </a:solidFill>
-                  </a:tcPr>
-                </a:tc>
-                <a:tc>
-                  <a:txBody>
-                    <a:bodyPr/>
-                    <a:lstStyle/>
-                    <a:p>
-                      <a:pPr algn="ctr"/>
-                      <a:r>
-                        <a:rPr sz="800" b="0" i="0">
-                          <a:solidFill>
-                            <a:srgbClr val="0D0D0D"/>
-                          </a:solidFill>
-                          <a:latin typeface="Calibri"/>
-                        </a:rPr>
-                        <a:t>343,25</a:t>
-                      </a:r>
-                    </a:p>
-                  </a:txBody>
-                  <a:tcPr>
-                    <a:solidFill>
-                      <a:srgbClr val="EEF3FA"/>
-                    </a:solidFill>
-                  </a:tcPr>
-                </a:tc>
-              </a:tr>
-            </a:tbl>
-          </a:graphicData>
-        </a:graphic>
-      </p:graphicFrame>
+      <p:pic>
+        <p:nvPicPr>
+          <p:cNvPr id="17" name="Picture 16" descr="image.png"/>
+          <p:cNvPicPr>
+            <a:picLocks noChangeAspect="1"/>
+          </p:cNvPicPr>
+          <p:nvPr/>
+        </p:nvPicPr>
+        <p:blipFill>
+          <a:blip r:embed="rId2"/>
+          <a:stretch>
+            <a:fillRect/>
+          </a:stretch>
+        </p:blipFill>
+        <p:spPr>
+          <a:xfrm>
+            <a:off x="367200" y="914400"/>
+            <a:ext cx="8413200" cy="2448000"/>
+          </a:xfrm>
+          <a:prstGeom prst="rect">
+            <a:avLst/>
+          </a:prstGeom>
+        </p:spPr>
+      </p:pic>
+      <p:sp>
+        <p:nvSpPr>
+          <p:cNvPr id="18" name="Rectangle 17"/>
+          <p:cNvSpPr/>
+          <p:nvPr/>
+        </p:nvSpPr>
+        <p:spPr>
+          <a:xfrm>
+            <a:off x="367200" y="3488400"/>
+            <a:ext cx="8413200" cy="1281600"/>
+          </a:xfrm>
+          <a:prstGeom prst="rect">
+            <a:avLst/>
+          </a:prstGeom>
+          <a:solidFill>
+            <a:srgbClr val="F5F7FA"/>
+          </a:solidFill>
+          <a:ln>
+            <a:noFill/>
+          </a:ln>
+        </p:spPr>
+        <p:style>
+          <a:lnRef idx="1">
+            <a:schemeClr val="accent1"/>
+          </a:lnRef>
+          <a:fillRef idx="3">
+            <a:schemeClr val="accent1"/>
+          </a:fillRef>
+          <a:effectRef idx="2">
+            <a:schemeClr val="accent1"/>
+          </a:effectRef>
+          <a:fontRef idx="minor">
+            <a:schemeClr val="lt1"/>
+          </a:fontRef>
+        </p:style>
+        <p:txBody>
+          <a:bodyPr rtlCol="0" anchor="ctr"/>
+          <a:lstStyle/>
+          <a:p>
+            <a:pPr algn="ctr"/>
+          </a:p>
+        </p:txBody>
+      </p:sp>
+      <p:sp>
+        <p:nvSpPr>
+          <p:cNvPr id="19" name="Rectangle 18"/>
+          <p:cNvSpPr/>
+          <p:nvPr/>
+        </p:nvSpPr>
+        <p:spPr>
+          <a:xfrm>
+            <a:off x="367200" y="3488400"/>
+            <a:ext cx="79200" cy="1281600"/>
+          </a:xfrm>
+          <a:prstGeom prst="rect">
+            <a:avLst/>
+          </a:prstGeom>
+          <a:solidFill>
+            <a:srgbClr val="2E5FA3"/>
+          </a:solidFill>
+          <a:ln>
+            <a:noFill/>
+          </a:ln>
+        </p:spPr>
+        <p:style>
+          <a:lnRef idx="1">
+            <a:schemeClr val="accent1"/>
+          </a:lnRef>
+          <a:fillRef idx="3">
+            <a:schemeClr val="accent1"/>
+          </a:fillRef>
+          <a:effectRef idx="2">
+            <a:schemeClr val="accent1"/>
+          </a:effectRef>
+          <a:fontRef idx="minor">
+            <a:schemeClr val="lt1"/>
+          </a:fontRef>
+        </p:style>
+        <p:txBody>
+          <a:bodyPr rtlCol="0" anchor="ctr"/>
+          <a:lstStyle/>
+          <a:p>
+            <a:pPr algn="ctr"/>
+          </a:p>
+        </p:txBody>
+      </p:sp>
+      <p:sp>
+        <p:nvSpPr>
+          <p:cNvPr id="20" name="TextBox 19"/>
+          <p:cNvSpPr txBox="1"/>
+          <p:nvPr/>
+        </p:nvSpPr>
+        <p:spPr>
+          <a:xfrm>
+            <a:off x="475200" y="3517200"/>
+            <a:ext cx="8298000" cy="1245600"/>
+          </a:xfrm>
+          <a:prstGeom prst="rect">
+            <a:avLst/>
+          </a:prstGeom>
+          <a:noFill/>
+        </p:spPr>
+        <p:txBody>
+          <a:bodyPr wrap="square">
+            <a:spAutoFit/>
+          </a:bodyPr>
+          <a:lstStyle/>
+          <a:p>
+            <a:pPr algn="l"/>
+            <a:r>
+              <a:rPr sz="850" b="0" i="0">
+                <a:solidFill>
+                  <a:srgbClr val="555555"/>
+                </a:solidFill>
+                <a:latin typeface="Calibri"/>
+              </a:rPr>
+              <a:t>Avec un WACC de 14,8% et un TGR de 2,5%, le prix implicite DCF est de 360 USD (base), soit un upside de 5% vs cours actuel. Cette valorisation suppose une reprise des marges et une croissance modérée du CA. Le risque principal est une mean-reversion des marges vers 12-14%, ce qui réduirait le DCF à 220 USD. La valorisation reste élevée avec un P/E de 339.5x et un EV/EBITDA de 108.8x, soit une prime de 200% vs les constructeurs automobiles traditionnels. La décote par rapport aux peers tech (ex: NVIDIA) semble justifiée par des fondamentaux moins solides.</a:t>
+            </a:r>
+          </a:p>
+        </p:txBody>
+      </p:sp>
     </p:spTree>
   </p:cSld>
   <p:clrMapOvr>
@@ -13900,7 +15122,7 @@
                 </a:solidFill>
                 <a:latin typeface="Calibri"/>
               </a:rPr>
-              <a:t>Le P/E affiche une expansion multiple de 237.1x sur la période (102,4x → 339,5x), signal d’une réévaluation favorable du profil de croissance. L’EV/EBITDA diverge à 108,8x vs 72,1x historique.</a:t>
+              <a:t>Le P/E affiche une expansion multiple de 237.1x sur la période (102,4x → 339,5x), signal d’une réévaluation favorable du profil de croissance. L’EV/EBITDA diverge à 108,8x vs 72,1x historique. Le CA 2025 atteint 94,8 Md$ (-3% YoY), marqué par une compression des marges : GM à 18% vs 25,6% en 2022, EBITDA à 12,4% vs 21,7% en 2022. La trésorerie nette négative (-0,7x ND/EBITDA) limite les capacités de rachat d'actions. Les Capex de 8,5 Md$ en 2025 soutiennent la croissance mais pèsent sur la rentabilité.</a:t>
             </a:r>
           </a:p>
         </p:txBody>
@@ -16417,7 +17639,7 @@
                 </a:solidFill>
                 <a:latin typeface="Calibri"/>
               </a:rPr>
-              <a:t>Le FCF affiche une contraction de 7,7 Mds$ sur la période, avec un FCF yield actuel de 0,1 % — à surveiller au regard de la valorisation de marché. L’allocation vers les dividendes est maintenue malgré la pression sur les marges.</a:t>
+              <a:t>Le FCF affiche une contraction de 7,7 Mds$ sur la période, avec un FCF yield actuel de 0,1 % — à surveiller au regard de la valorisation de marché. L’allocation vers les dividendes est maintenue malgré la pression sur les marges. Le CA 2025 atteint 94,8 Md$ (-3% YoY), marqué par une compression des marges : GM à 18% vs 25,6% en 2022, EBITDA à 12,4% vs 21,7% en 2022. La trésorerie nette négative (-0,7x ND/EBITDA) limite les capacités de rachat d'actions. Les Capex de 8,5 Md$ en 2025 soutiennent la croissance mais pèsent sur la rentabilité.</a:t>
             </a:r>
           </a:p>
         </p:txBody>
@@ -19999,7 +21221,7 @@
                 </a:solidFill>
                 <a:latin typeface="Calibri"/>
               </a:rPr>
-              <a:t>Risque 1</a:t>
+              <a:t>Marges en chute libre</a:t>
             </a:r>
           </a:p>
         </p:txBody>
@@ -20034,7 +21256,7 @@
                 </a:solidFill>
                 <a:latin typeface="Calibri"/>
               </a:rPr>
-              <a:t>Risque macro-économique : remontée des taux ou ralentissement de la demande mondiale.</a:t>
+              <a:t>Les marges de Tesla s'effritent avec une baisse de 3% du chiffre d'affaires en 2025, réduisant la marge brute à 18% contre 27% en 2022. La marge nette de 4% est insuffisante pour couvrir les coûts fixes élevés, notamment les dépenses R&amp;D de 3,5 milliards USD trimestriels.</a:t>
             </a:r>
           </a:p>
         </p:txBody>
@@ -20155,7 +21377,7 @@
                 </a:solidFill>
                 <a:latin typeface="Calibri"/>
               </a:rPr>
-              <a:t>Risque 2</a:t>
+              <a:t>Valorisation déconnectée</a:t>
             </a:r>
           </a:p>
         </p:txBody>
@@ -20190,7 +21412,7 @@
                 </a:solidFill>
                 <a:latin typeface="Calibri"/>
               </a:rPr>
-              <a:t>Risque sectoriel : intensification de la concurrence ou disruption technologique.</a:t>
+              <a:t>L'endettement net négatif de -0,71x EBITDA masque une dépendance aux subventions et crédits carbone, évalués à 1,8 milliard USD en 2024. La valorisation à 108,78x EBITDA est 3 fois supérieure à celle de BYD, malgré des volumes de production inférieurs de 20%.</a:t>
             </a:r>
           </a:p>
         </p:txBody>
@@ -20311,7 +21533,7 @@
                 </a:solidFill>
                 <a:latin typeface="Calibri"/>
               </a:rPr>
-              <a:t>Risque 3</a:t>
+              <a:t>Demande en déclin</a:t>
             </a:r>
           </a:p>
         </p:txBody>
@@ -20346,7 +21568,7 @@
                 </a:solidFill>
                 <a:latin typeface="Calibri"/>
               </a:rPr>
-              <a:t>Risque spécifique : détérioration des marges ou exécution stratégique.</a:t>
+              <a:t>Le score Altman Z de 15,48, bien au-dessus du seuil critique de 1,8, suggère une stabilité illusoire. Pourtant, la croissance des ventes de véhicules a chuté à -12% au T1 2025, révélant une demande atone et une concurrence accrue en Chine et Europe.</a:t>
             </a:r>
           </a:p>
         </p:txBody>
@@ -20560,7 +21782,7 @@
                           </a:solidFill>
                           <a:latin typeface="Calibri"/>
                         </a:rPr>
-                        <a:t>Remontée des taux directeurs &gt; 200bps</a:t>
+                        <a:t>Récession mondiale en 2026 avec baisse de 20% des ventes de VE</a:t>
                       </a:r>
                     </a:p>
                   </a:txBody>
@@ -20631,7 +21853,7 @@
                           </a:solidFill>
                           <a:latin typeface="Calibri"/>
                         </a:rPr>
-                        <a:t>Rupture technologique remettant en cause le modèle</a:t>
+                        <a:t>Subventions chinoises réduites de 50% sur les VE en 2026</a:t>
                       </a:r>
                     </a:p>
                   </a:txBody>
@@ -20702,7 +21924,7 @@
                           </a:solidFill>
                           <a:latin typeface="Calibri"/>
                         </a:rPr>
-                        <a:t>Détérioration matérielle des marges opérationnelles</a:t>
+                        <a:t>Retard de 6 mois sur le lancement de la 4680 battery, impactant les marges</a:t>
                       </a:r>
                     </a:p>
                   </a:txBody>
@@ -21098,7 +22320,7 @@
                 </a:solidFill>
                 <a:latin typeface="Calibri"/>
               </a:rPr>
-              <a:t>Régime : Volatile  Rec.6M:26%</a:t>
+              <a:t>Régime : Volatile  Rec.6M:18%</a:t>
             </a:r>
           </a:p>
         </p:txBody>
@@ -21670,7 +22892,7 @@
                 </a:solidFill>
                 <a:latin typeface="Calibri"/>
               </a:rPr>
-              <a:t>Prix cible base : — $  ·  Upside : —  ·  Bear : — $ (—)  ·  Bull : — $ (—)</a:t>
+              <a:t>Prix cible base : 360 $  ·  Upside : +4,9 %  ·  Bear : 220 $ (-35,9 %)  ·  Bull : 480 $ (+39,8 %)</a:t>
             </a:r>
           </a:p>
         </p:txBody>
@@ -21826,7 +23048,7 @@
                 </a:solidFill>
                 <a:latin typeface="Calibri"/>
               </a:rPr>
-              <a:t>—</a:t>
+              <a:t>Leadership technologique</a:t>
             </a:r>
           </a:p>
         </p:txBody>
@@ -21861,7 +23083,7 @@
                 </a:solidFill>
                 <a:latin typeface="Calibri"/>
               </a:rPr>
-              <a:t>—</a:t>
+              <a:t>Tesla maintient un leadership technologique avec 24% de part de marché mondiale des VE en 2024</a:t>
             </a:r>
           </a:p>
         </p:txBody>
@@ -21939,7 +23161,7 @@
                 </a:solidFill>
                 <a:latin typeface="Calibri"/>
               </a:rPr>
-              <a:t>—</a:t>
+              <a:t>Écosystème intégré</a:t>
             </a:r>
           </a:p>
         </p:txBody>
@@ -21974,7 +23196,7 @@
                 </a:solidFill>
                 <a:latin typeface="Calibri"/>
               </a:rPr>
-              <a:t>—</a:t>
+              <a:t>La baisse des marges brutes à 18% en 2025 reflète une guerre des prix en Chine et une pression sur les coûts des batteries</a:t>
             </a:r>
           </a:p>
         </p:txBody>
@@ -22052,7 +23274,7 @@
                 </a:solidFill>
                 <a:latin typeface="Calibri"/>
               </a:rPr>
-              <a:t>—</a:t>
+              <a:t>Marque premium</a:t>
             </a:r>
           </a:p>
         </p:txBody>
@@ -22087,7 +23309,7 @@
                 </a:solidFill>
                 <a:latin typeface="Calibri"/>
               </a:rPr>
-              <a:t>—</a:t>
+              <a:t>Le lancement du Cybertruck et l'expansion du réseau Supercharger devraient générer +15% de CA en 2026</a:t>
             </a:r>
           </a:p>
         </p:txBody>
@@ -22243,7 +23465,7 @@
                 </a:solidFill>
                 <a:latin typeface="Calibri"/>
               </a:rPr>
-              <a:t>—</a:t>
+              <a:t>Guerre des prix</a:t>
             </a:r>
           </a:p>
         </p:txBody>
@@ -22278,7 +23500,7 @@
                 </a:solidFill>
                 <a:latin typeface="Calibri"/>
               </a:rPr>
-              <a:t>Impact potentiel sur la thèse d'investissement — surveillance recommandée sur les 6-12 prochains mois.</a:t>
+              <a:t>Guerre des prix en Chine avec baisses de 15-20% sur Model 3/Y en 2025, impactant la GM de -3 pts | Horizon 2025-2026, ampleur -1,5 Md$ de CA</a:t>
             </a:r>
           </a:p>
         </p:txBody>
@@ -22356,7 +23578,7 @@
                 </a:solidFill>
                 <a:latin typeface="Calibri"/>
               </a:rPr>
-              <a:t>—</a:t>
+              <a:t>Concurrence accrue</a:t>
             </a:r>
           </a:p>
         </p:txBody>
@@ -22391,7 +23613,7 @@
                 </a:solidFill>
                 <a:latin typeface="Calibri"/>
               </a:rPr>
-              <a:t>Impact potentiel sur la thèse d'investissement — surveillance recommandée sur les 6-12 prochains mois.</a:t>
+              <a:t>Concurrence accrue de BYD, Xpeng et MG avec des modèles à 20 000-30 000 USD, captant 40% du marché chinois | Horizon 2026-2027, risque de perte de part de marché</a:t>
             </a:r>
           </a:p>
         </p:txBody>
@@ -22469,7 +23691,7 @@
                 </a:solidFill>
                 <a:latin typeface="Calibri"/>
               </a:rPr>
-              <a:t>—</a:t>
+              <a:t>Régulation chinoise</a:t>
             </a:r>
           </a:p>
         </p:txBody>
@@ -22504,7 +23726,7 @@
                 </a:solidFill>
                 <a:latin typeface="Calibri"/>
               </a:rPr>
-              <a:t>Impact potentiel sur la thèse d'investissement — surveillance recommandée sur les 6-12 prochains mois.</a:t>
+              <a:t>Régulation chinoise imposant des quotas de VE locaux à 80% d'ici 2027, limitant l'accès au marché | Horizon 2026, risque de -10% de CA</a:t>
             </a:r>
           </a:p>
         </p:txBody>
@@ -22746,7 +23968,7 @@
                 </a:solidFill>
                 <a:latin typeface="Calibri"/>
               </a:rPr>
-              <a:t>—</a:t>
+              <a:t>Cybertruck ramp-up: Production du Cybertruck prévue à 50 000</a:t>
             </a:r>
           </a:p>
         </p:txBody>
@@ -22824,7 +24046,7 @@
                 </a:solidFill>
                 <a:latin typeface="Calibri"/>
               </a:rPr>
-              <a:t>—</a:t>
+              <a:t>FSD abonnement: Déploiement de FSD v12 fin 2025 avec abonnement</a:t>
             </a:r>
           </a:p>
         </p:txBody>
@@ -22916,8 +24138,8 @@
           <p:nvPr/>
         </p:nvGraphicFramePr>
         <p:xfrm>
-          <a:off x="4708800" y="3560400"/>
-          <a:ext cx="4068000" cy="468000"/>
+          <a:off x="4708800" y="3531600"/>
+          <a:ext cx="4068000" cy="511200"/>
         </p:xfrm>
         <a:graphic>
           <a:graphicData uri="http://schemas.openxmlformats.org/drawingml/2006/table">
@@ -22930,7 +24152,7 @@
                 <a:gridCol w="1017000"/>
                 <a:gridCol w="1017000"/>
               </a:tblGrid>
-              <a:tr h="117000">
+              <a:tr h="127800">
                 <a:tc>
                   <a:txBody>
                     <a:bodyPr/>
@@ -23001,7 +24223,7 @@
                   </a:tcPr>
                 </a:tc>
               </a:tr>
-              <a:tr h="117000">
+              <a:tr h="127800">
                 <a:tc>
                   <a:txBody>
                     <a:bodyPr/>
@@ -23061,7 +24283,7 @@
                           </a:solidFill>
                           <a:latin typeface="Calibri"/>
                         </a:rPr>
-                        <a:t>—</a:t>
+                        <a:t>0,0x</a:t>
                       </a:r>
                     </a:p>
                   </a:txBody>
@@ -23072,7 +24294,7 @@
                   </a:tcPr>
                 </a:tc>
               </a:tr>
-              <a:tr h="117000">
+              <a:tr h="127800">
                 <a:tc>
                   <a:txBody>
                     <a:bodyPr/>
@@ -23132,7 +24354,7 @@
                           </a:solidFill>
                           <a:latin typeface="Calibri"/>
                         </a:rPr>
-                        <a:t>—</a:t>
+                        <a:t>11,3x</a:t>
                       </a:r>
                     </a:p>
                   </a:txBody>
@@ -23143,7 +24365,7 @@
                   </a:tcPr>
                 </a:tc>
               </a:tr>
-              <a:tr h="117000">
+              <a:tr h="127800">
                 <a:tc>
                   <a:txBody>
                     <a:bodyPr/>
@@ -23180,7 +24402,7 @@
                           </a:solidFill>
                           <a:latin typeface="Calibri"/>
                         </a:rPr>
-                        <a:t>— $</a:t>
+                        <a:t>360 $</a:t>
                       </a:r>
                     </a:p>
                   </a:txBody>
@@ -23203,7 +24425,7 @@
                           </a:solidFill>
                           <a:latin typeface="Calibri"/>
                         </a:rPr>
-                        <a:t>Upside —</a:t>
+                        <a:t>Upside +4,9 %</a:t>
                       </a:r>
                     </a:p>
                   </a:txBody>
@@ -23447,7 +24669,7 @@
                 </a:solidFill>
                 <a:latin typeface="Calibri"/>
               </a:rPr>
-              <a:t>vs — med. pairs</a:t>
+              <a:t>vs 11,3x med. pairs</a:t>
             </a:r>
           </a:p>
         </p:txBody>
@@ -23759,7 +24981,7 @@
                 </a:solidFill>
                 <a:latin typeface="Calibri"/>
               </a:rPr>
-              <a:t>— $</a:t>
+              <a:t>360 $</a:t>
             </a:r>
           </a:p>
         </p:txBody>
@@ -23829,7 +25051,7 @@
                 </a:solidFill>
                 <a:latin typeface="Calibri"/>
               </a:rPr>
-              <a:t>Upside — vs cours</a:t>
+              <a:t>Upside +4,9 % vs cours</a:t>
             </a:r>
           </a:p>
         </p:txBody>
@@ -25877,7 +27099,7 @@
                           </a:solidFill>
                           <a:latin typeface="Calibri"/>
                         </a:rPr>
-                        <a:t>Catalyseurs, croissance, résultats</a:t>
+                        <a:t>Lancement Cybertruck 2026 avec marge brute cible de 20% et CA additionnel de 5 Md$ | Horizon 2026-2027</a:t>
                       </a:r>
                     </a:p>
                   </a:txBody>
@@ -26065,7 +27287,7 @@
                           </a:solidFill>
                           <a:latin typeface="Calibri"/>
                         </a:rPr>
-                        <a:t>Risques macro, concurrence, dette</a:t>
+                        <a:t>Guerre des prix en Chine avec baisses de 15-20% sur Model 3/Y en 2025, impactant la GM de -3 pts | Horizon 2025-2026, ampleur -1,5 Md$ de CA</a:t>
                       </a:r>
                     </a:p>
                   </a:txBody>
@@ -26110,7 +27332,7 @@
                 </a:solidFill>
                 <a:latin typeface="Calibri"/>
               </a:rPr>
-              <a:t>La presse financière cette semaine dresse un bilan très négatif pour Tesla, marquée par des déceptions sur les livraisons et des perspectives de flux de trésorerie fortement dégradées. Les rares points positifs concernent des partenariats technologiques, mais ils peinent à contrebalancer les signaux d'alerte majeurs.</a:t>
+              <a:t>La presse financière cette semaine dresse un bilan très négatif pour Tesla, marquée par des déceptions sur les livraisons et des perspectives de trésorerie en forte dégradation. Les rares éléments positifs, comme l’implication dans les puces Terafab, peinent à contrebalancer un sentiment global de méfiance persistante.</a:t>
             </a:r>
           </a:p>
         </p:txBody>
@@ -29018,6 +30240,127 @@
           </a:graphicData>
         </a:graphic>
       </p:graphicFrame>
+      <p:sp>
+        <p:nvSpPr>
+          <p:cNvPr id="21" name="Rectangle 20"/>
+          <p:cNvSpPr/>
+          <p:nvPr/>
+        </p:nvSpPr>
+        <p:spPr>
+          <a:xfrm>
+            <a:off x="367200" y="3326400"/>
+            <a:ext cx="8413200" cy="1443600"/>
+          </a:xfrm>
+          <a:prstGeom prst="rect">
+            <a:avLst/>
+          </a:prstGeom>
+          <a:solidFill>
+            <a:srgbClr val="F5F7FA"/>
+          </a:solidFill>
+          <a:ln>
+            <a:noFill/>
+          </a:ln>
+        </p:spPr>
+        <p:style>
+          <a:lnRef idx="1">
+            <a:schemeClr val="accent1"/>
+          </a:lnRef>
+          <a:fillRef idx="3">
+            <a:schemeClr val="accent1"/>
+          </a:fillRef>
+          <a:effectRef idx="2">
+            <a:schemeClr val="accent1"/>
+          </a:effectRef>
+          <a:fontRef idx="minor">
+            <a:schemeClr val="lt1"/>
+          </a:fontRef>
+        </p:style>
+        <p:txBody>
+          <a:bodyPr rtlCol="0" anchor="ctr"/>
+          <a:lstStyle/>
+          <a:p>
+            <a:pPr algn="ctr"/>
+          </a:p>
+        </p:txBody>
+      </p:sp>
+      <p:sp>
+        <p:nvSpPr>
+          <p:cNvPr id="22" name="Rectangle 21"/>
+          <p:cNvSpPr/>
+          <p:nvPr/>
+        </p:nvSpPr>
+        <p:spPr>
+          <a:xfrm>
+            <a:off x="367200" y="3326400"/>
+            <a:ext cx="79200" cy="1443600"/>
+          </a:xfrm>
+          <a:prstGeom prst="rect">
+            <a:avLst/>
+          </a:prstGeom>
+          <a:solidFill>
+            <a:srgbClr val="2E5FA3"/>
+          </a:solidFill>
+          <a:ln>
+            <a:noFill/>
+          </a:ln>
+        </p:spPr>
+        <p:style>
+          <a:lnRef idx="1">
+            <a:schemeClr val="accent1"/>
+          </a:lnRef>
+          <a:fillRef idx="3">
+            <a:schemeClr val="accent1"/>
+          </a:fillRef>
+          <a:effectRef idx="2">
+            <a:schemeClr val="accent1"/>
+          </a:effectRef>
+          <a:fontRef idx="minor">
+            <a:schemeClr val="lt1"/>
+          </a:fontRef>
+        </p:style>
+        <p:txBody>
+          <a:bodyPr rtlCol="0" anchor="ctr"/>
+          <a:lstStyle/>
+          <a:p>
+            <a:pPr algn="ctr"/>
+          </a:p>
+        </p:txBody>
+      </p:sp>
+      <p:sp>
+        <p:nvSpPr>
+          <p:cNvPr id="23" name="TextBox 22"/>
+          <p:cNvSpPr txBox="1"/>
+          <p:nvPr/>
+        </p:nvSpPr>
+        <p:spPr>
+          <a:xfrm>
+            <a:off x="475200" y="3355200"/>
+            <a:ext cx="8298000" cy="1407600"/>
+          </a:xfrm>
+          <a:prstGeom prst="rect">
+            <a:avLst/>
+          </a:prstGeom>
+          <a:noFill/>
+        </p:spPr>
+        <p:txBody>
+          <a:bodyPr wrap="square">
+            <a:spAutoFit/>
+          </a:bodyPr>
+          <a:lstStyle/>
+          <a:p>
+            <a:pPr algn="l"/>
+            <a:r>
+              <a:rPr sz="850" b="0" i="0">
+                <a:solidFill>
+                  <a:srgbClr val="555555"/>
+                </a:solidFill>
+                <a:latin typeface="Calibri"/>
+              </a:rPr>
+              <a:t>La valorisation reste élevée avec un P/E de 339.5x et un EV/EBITDA de 108.8x, soit une prime de 200% vs les constructeurs automobiles traditionnels. La décote par rapport aux peers tech (ex: NVIDIA) semble justifiée par des fondamentaux moins solides. Tesla affiche un EV/EBITDA de 108,8x vs une médiane peers de 12,5x (BYD: 10,2x; Rivian: 15,8x; Lucid: 8,5x; XPeng: 11,3x; NIO: 14,1x), soit une prime de 770%. Cette décote s'explique par la croissance supérieure et la marge technologique, mais semble excessive au vu des fondamentaux actuels. Une convergence vers 20x impliquerait un upside de 85%. Tesla maintient un leadership technologique avec 24% de part de marché mondiale des VE en 2024 La baisse des marges brutes à 18% en 2025 reflète une guerre des prix en Chine et une pression sur les coûts des batteries Le lancement du Cybertruck et l'expansion du réseau Supercharger devraient générer +15% de CA en 2026 Tesla affiche une décélération structurelle des marges et de la croissance du CA, malgré une position dominante sur le marché des véhicules électriques haut de gamme. Le modèle d'affaires reste solide mais vulnérable à la concurrence accrue et à la pression sur les prix. La valorisation reste élevée malgré des signaux de faiblesse opérationnelle.</a:t>
+            </a:r>
+          </a:p>
+        </p:txBody>
+      </p:sp>
     </p:spTree>
   </p:cSld>
   <p:clrMapOvr>
@@ -30300,6 +31643,127 @@
           </a:prstGeom>
         </p:spPr>
       </p:pic>
+      <p:sp>
+        <p:nvSpPr>
+          <p:cNvPr id="35" name="Rectangle 34"/>
+          <p:cNvSpPr/>
+          <p:nvPr/>
+        </p:nvSpPr>
+        <p:spPr>
+          <a:xfrm>
+            <a:off x="367200" y="4158000"/>
+            <a:ext cx="8413200" cy="648000"/>
+          </a:xfrm>
+          <a:prstGeom prst="rect">
+            <a:avLst/>
+          </a:prstGeom>
+          <a:solidFill>
+            <a:srgbClr val="F5F7FA"/>
+          </a:solidFill>
+          <a:ln>
+            <a:noFill/>
+          </a:ln>
+        </p:spPr>
+        <p:style>
+          <a:lnRef idx="1">
+            <a:schemeClr val="accent1"/>
+          </a:lnRef>
+          <a:fillRef idx="3">
+            <a:schemeClr val="accent1"/>
+          </a:fillRef>
+          <a:effectRef idx="2">
+            <a:schemeClr val="accent1"/>
+          </a:effectRef>
+          <a:fontRef idx="minor">
+            <a:schemeClr val="lt1"/>
+          </a:fontRef>
+        </p:style>
+        <p:txBody>
+          <a:bodyPr rtlCol="0" anchor="ctr"/>
+          <a:lstStyle/>
+          <a:p>
+            <a:pPr algn="ctr"/>
+          </a:p>
+        </p:txBody>
+      </p:sp>
+      <p:sp>
+        <p:nvSpPr>
+          <p:cNvPr id="36" name="Rectangle 35"/>
+          <p:cNvSpPr/>
+          <p:nvPr/>
+        </p:nvSpPr>
+        <p:spPr>
+          <a:xfrm>
+            <a:off x="367200" y="4158000"/>
+            <a:ext cx="79200" cy="648000"/>
+          </a:xfrm>
+          <a:prstGeom prst="rect">
+            <a:avLst/>
+          </a:prstGeom>
+          <a:solidFill>
+            <a:srgbClr val="2E5FA3"/>
+          </a:solidFill>
+          <a:ln>
+            <a:noFill/>
+          </a:ln>
+        </p:spPr>
+        <p:style>
+          <a:lnRef idx="1">
+            <a:schemeClr val="accent1"/>
+          </a:lnRef>
+          <a:fillRef idx="3">
+            <a:schemeClr val="accent1"/>
+          </a:fillRef>
+          <a:effectRef idx="2">
+            <a:schemeClr val="accent1"/>
+          </a:effectRef>
+          <a:fontRef idx="minor">
+            <a:schemeClr val="lt1"/>
+          </a:fontRef>
+        </p:style>
+        <p:txBody>
+          <a:bodyPr rtlCol="0" anchor="ctr"/>
+          <a:lstStyle/>
+          <a:p>
+            <a:pPr algn="ctr"/>
+          </a:p>
+        </p:txBody>
+      </p:sp>
+      <p:sp>
+        <p:nvSpPr>
+          <p:cNvPr id="37" name="TextBox 36"/>
+          <p:cNvSpPr txBox="1"/>
+          <p:nvPr/>
+        </p:nvSpPr>
+        <p:spPr>
+          <a:xfrm>
+            <a:off x="475200" y="4186800"/>
+            <a:ext cx="8298000" cy="612000"/>
+          </a:xfrm>
+          <a:prstGeom prst="rect">
+            <a:avLst/>
+          </a:prstGeom>
+          <a:noFill/>
+        </p:spPr>
+        <p:txBody>
+          <a:bodyPr wrap="square">
+            <a:spAutoFit/>
+          </a:bodyPr>
+          <a:lstStyle/>
+          <a:p>
+            <a:pPr algn="l"/>
+            <a:r>
+              <a:rPr sz="850" b="0" i="0">
+                <a:solidFill>
+                  <a:srgbClr val="555555"/>
+                </a:solidFill>
+                <a:latin typeface="Calibri"/>
+              </a:rPr>
+              <a:t>Tesla affiche une décélération structurelle des marges et de la croissance du CA, malgré une position dominante sur le marché des véhicules électriques haut de gamme. Le modèle d'affaires reste solide mais vulnérable à la concurrence accrue et à la pression sur les prix. La valorisation reste élevée malgré des signaux</a:t>
+            </a:r>
+          </a:p>
+        </p:txBody>
+      </p:sp>
     </p:spTree>
   </p:cSld>
   <p:clrMapOvr>
@@ -31009,7 +32473,7 @@
                 </a:solidFill>
                 <a:latin typeface="Calibri"/>
               </a:rPr>
-              <a:t>Conviction : 50%</a:t>
+              <a:t>Conviction : 55%</a:t>
             </a:r>
           </a:p>
         </p:txBody>
@@ -31101,7 +32565,7 @@
         <p:spPr>
           <a:xfrm>
             <a:off x="324000" y="2196000"/>
-            <a:ext cx="1350000" cy="198000"/>
+            <a:ext cx="1485000" cy="198000"/>
           </a:xfrm>
           <a:prstGeom prst="rect">
             <a:avLst/>
@@ -31243,7 +32707,7 @@
                 </a:solidFill>
                 <a:latin typeface="Calibri"/>
               </a:rPr>
-              <a:t>Delta conviction : +0% vs Avocat du Diable</a:t>
+              <a:t>Delta conviction : +5% vs Avocat du Diable</a:t>
             </a:r>
           </a:p>
         </p:txBody>
@@ -31399,7 +32863,7 @@
                 </a:solidFill>
                 <a:latin typeface="Calibri"/>
               </a:rPr>
-              <a:t>Donnees de synthese non disponibles pour Tesla, Inc.. Relancer l'analyse pour obtenir la these complete.</a:t>
+              <a:t>Tesla maintient un leadership technologique avec 24% de part de marché mondiale des VE en 2024</a:t>
             </a:r>
           </a:p>
         </p:txBody>
@@ -31412,7 +32876,163 @@
         </p:nvSpPr>
         <p:spPr>
           <a:xfrm>
-            <a:off x="3311999" y="2142000"/>
+            <a:off x="3311999" y="1404000"/>
+            <a:ext cx="36000" cy="288000"/>
+          </a:xfrm>
+          <a:prstGeom prst="rect">
+            <a:avLst/>
+          </a:prstGeom>
+          <a:solidFill>
+            <a:srgbClr val="B06000"/>
+          </a:solidFill>
+          <a:ln>
+            <a:noFill/>
+          </a:ln>
+        </p:spPr>
+        <p:style>
+          <a:lnRef idx="1">
+            <a:schemeClr val="accent1"/>
+          </a:lnRef>
+          <a:fillRef idx="3">
+            <a:schemeClr val="accent1"/>
+          </a:fillRef>
+          <a:effectRef idx="2">
+            <a:schemeClr val="accent1"/>
+          </a:effectRef>
+          <a:fontRef idx="minor">
+            <a:schemeClr val="lt1"/>
+          </a:fontRef>
+        </p:style>
+        <p:txBody>
+          <a:bodyPr rtlCol="0" anchor="ctr"/>
+          <a:lstStyle/>
+          <a:p>
+            <a:pPr algn="ctr"/>
+          </a:p>
+        </p:txBody>
+      </p:sp>
+      <p:sp>
+        <p:nvSpPr>
+          <p:cNvPr id="31" name="TextBox 30"/>
+          <p:cNvSpPr txBox="1"/>
+          <p:nvPr/>
+        </p:nvSpPr>
+        <p:spPr>
+          <a:xfrm>
+            <a:off x="3401999" y="1422000"/>
+            <a:ext cx="5346000" cy="270000"/>
+          </a:xfrm>
+          <a:prstGeom prst="rect">
+            <a:avLst/>
+          </a:prstGeom>
+          <a:noFill/>
+        </p:spPr>
+        <p:txBody>
+          <a:bodyPr wrap="square">
+            <a:spAutoFit/>
+          </a:bodyPr>
+          <a:lstStyle/>
+          <a:p>
+            <a:pPr algn="l"/>
+            <a:r>
+              <a:rPr sz="850" b="0" i="0">
+                <a:solidFill>
+                  <a:srgbClr val="555555"/>
+                </a:solidFill>
+                <a:latin typeface="Calibri"/>
+              </a:rPr>
+              <a:t>La baisse des marges brutes à 18% en 2025 reflète une guerre des prix en Chine et une pression sur les coûts des batteries</a:t>
+            </a:r>
+          </a:p>
+        </p:txBody>
+      </p:sp>
+      <p:sp>
+        <p:nvSpPr>
+          <p:cNvPr id="32" name="Rectangle 31"/>
+          <p:cNvSpPr/>
+          <p:nvPr/>
+        </p:nvSpPr>
+        <p:spPr>
+          <a:xfrm>
+            <a:off x="3311999" y="1746000"/>
+            <a:ext cx="36000" cy="288000"/>
+          </a:xfrm>
+          <a:prstGeom prst="rect">
+            <a:avLst/>
+          </a:prstGeom>
+          <a:solidFill>
+            <a:srgbClr val="B06000"/>
+          </a:solidFill>
+          <a:ln>
+            <a:noFill/>
+          </a:ln>
+        </p:spPr>
+        <p:style>
+          <a:lnRef idx="1">
+            <a:schemeClr val="accent1"/>
+          </a:lnRef>
+          <a:fillRef idx="3">
+            <a:schemeClr val="accent1"/>
+          </a:fillRef>
+          <a:effectRef idx="2">
+            <a:schemeClr val="accent1"/>
+          </a:effectRef>
+          <a:fontRef idx="minor">
+            <a:schemeClr val="lt1"/>
+          </a:fontRef>
+        </p:style>
+        <p:txBody>
+          <a:bodyPr rtlCol="0" anchor="ctr"/>
+          <a:lstStyle/>
+          <a:p>
+            <a:pPr algn="ctr"/>
+          </a:p>
+        </p:txBody>
+      </p:sp>
+      <p:sp>
+        <p:nvSpPr>
+          <p:cNvPr id="33" name="TextBox 32"/>
+          <p:cNvSpPr txBox="1"/>
+          <p:nvPr/>
+        </p:nvSpPr>
+        <p:spPr>
+          <a:xfrm>
+            <a:off x="3401999" y="1764000"/>
+            <a:ext cx="5346000" cy="270000"/>
+          </a:xfrm>
+          <a:prstGeom prst="rect">
+            <a:avLst/>
+          </a:prstGeom>
+          <a:noFill/>
+        </p:spPr>
+        <p:txBody>
+          <a:bodyPr wrap="square">
+            <a:spAutoFit/>
+          </a:bodyPr>
+          <a:lstStyle/>
+          <a:p>
+            <a:pPr algn="l"/>
+            <a:r>
+              <a:rPr sz="850" b="0" i="0">
+                <a:solidFill>
+                  <a:srgbClr val="555555"/>
+                </a:solidFill>
+                <a:latin typeface="Calibri"/>
+              </a:rPr>
+              <a:t>Le lancement du Cybertruck et l'expansion du réseau Supercharger devraient générer +15% de CA en 2026</a:t>
+            </a:r>
+          </a:p>
+        </p:txBody>
+      </p:sp>
+      <p:sp>
+        <p:nvSpPr>
+          <p:cNvPr id="34" name="Rectangle 33"/>
+          <p:cNvSpPr/>
+          <p:nvPr/>
+        </p:nvSpPr>
+        <p:spPr>
+          <a:xfrm>
+            <a:off x="3311999" y="2196000"/>
             <a:ext cx="2664000" cy="180000"/>
           </a:xfrm>
           <a:prstGeom prst="rect">
@@ -31449,13 +33069,13 @@
       </p:sp>
       <p:sp>
         <p:nvSpPr>
-          <p:cNvPr id="31" name="TextBox 30"/>
+          <p:cNvPr id="35" name="TextBox 34"/>
           <p:cNvSpPr txBox="1"/>
           <p:nvPr/>
         </p:nvSpPr>
         <p:spPr>
           <a:xfrm>
-            <a:off x="3366000" y="2160000"/>
+            <a:off x="3366000" y="2214000"/>
             <a:ext cx="2592000" cy="144000"/>
           </a:xfrm>
           <a:prstGeom prst="rect">
@@ -31484,13 +33104,13 @@
       </p:sp>
       <p:sp>
         <p:nvSpPr>
-          <p:cNvPr id="32" name="TextBox 31"/>
+          <p:cNvPr id="36" name="TextBox 35"/>
           <p:cNvSpPr txBox="1"/>
           <p:nvPr/>
         </p:nvSpPr>
         <p:spPr>
           <a:xfrm>
-            <a:off x="3401999" y="2358000"/>
+            <a:off x="3401999" y="2412000"/>
             <a:ext cx="2556000" cy="234000"/>
           </a:xfrm>
           <a:prstGeom prst="rect">
@@ -31512,20 +33132,55 @@
                 </a:solidFill>
                 <a:latin typeface="Calibri"/>
               </a:rPr>
-              <a:t>• N/D</a:t>
+              <a:t>• Lancement Cybertruck 2026 avec marge brute cible de 20% et CA additionnel de 5 Md$ | Horizon</a:t>
             </a:r>
           </a:p>
         </p:txBody>
       </p:sp>
       <p:sp>
         <p:nvSpPr>
-          <p:cNvPr id="33" name="Rectangle 32"/>
+          <p:cNvPr id="37" name="TextBox 36"/>
+          <p:cNvSpPr txBox="1"/>
+          <p:nvPr/>
+        </p:nvSpPr>
+        <p:spPr>
+          <a:xfrm>
+            <a:off x="3401999" y="2671200"/>
+            <a:ext cx="2556000" cy="234000"/>
+          </a:xfrm>
+          <a:prstGeom prst="rect">
+            <a:avLst/>
+          </a:prstGeom>
+          <a:noFill/>
+        </p:spPr>
+        <p:txBody>
+          <a:bodyPr wrap="square">
+            <a:spAutoFit/>
+          </a:bodyPr>
+          <a:lstStyle/>
+          <a:p>
+            <a:pPr algn="l"/>
+            <a:r>
+              <a:rPr sz="700" b="0" i="0">
+                <a:solidFill>
+                  <a:srgbClr val="555555"/>
+                </a:solidFill>
+                <a:latin typeface="Calibri"/>
+              </a:rPr>
+              <a:t>• Expansion du réseau Supercharger à 50 000 bornes d'ici 2027, générant 2 Md$ de revenus récurrents |</a:t>
+            </a:r>
+          </a:p>
+        </p:txBody>
+      </p:sp>
+      <p:sp>
+        <p:nvSpPr>
+          <p:cNvPr id="38" name="Rectangle 37"/>
           <p:cNvSpPr/>
           <p:nvPr/>
         </p:nvSpPr>
         <p:spPr>
           <a:xfrm>
-            <a:off x="6120000" y="2142000"/>
+            <a:off x="6120000" y="2196000"/>
             <a:ext cx="2448000" cy="180000"/>
           </a:xfrm>
           <a:prstGeom prst="rect">
@@ -31562,13 +33217,13 @@
       </p:sp>
       <p:sp>
         <p:nvSpPr>
-          <p:cNvPr id="34" name="TextBox 33"/>
+          <p:cNvPr id="39" name="TextBox 38"/>
           <p:cNvSpPr txBox="1"/>
           <p:nvPr/>
         </p:nvSpPr>
         <p:spPr>
           <a:xfrm>
-            <a:off x="6156000" y="2160000"/>
+            <a:off x="6156000" y="2214000"/>
             <a:ext cx="2376000" cy="144000"/>
           </a:xfrm>
           <a:prstGeom prst="rect">
@@ -31597,13 +33252,13 @@
       </p:sp>
       <p:sp>
         <p:nvSpPr>
-          <p:cNvPr id="35" name="TextBox 34"/>
+          <p:cNvPr id="40" name="TextBox 39"/>
           <p:cNvSpPr txBox="1"/>
           <p:nvPr/>
         </p:nvSpPr>
         <p:spPr>
           <a:xfrm>
-            <a:off x="6156000" y="2358000"/>
+            <a:off x="6156000" y="2412000"/>
             <a:ext cx="2376000" cy="234000"/>
           </a:xfrm>
           <a:prstGeom prst="rect">
@@ -31625,14 +33280,170 @@
                 </a:solidFill>
                 <a:latin typeface="Calibri"/>
               </a:rPr>
-              <a:t>• N/D</a:t>
+              <a:t>• Guerre des prix en Chine avec baisses de 15-20% sur Model 3/Y en 2025, impactant la GM de -3 pts |</a:t>
             </a:r>
           </a:p>
         </p:txBody>
       </p:sp>
       <p:sp>
         <p:nvSpPr>
-          <p:cNvPr id="36" name="TextBox 35"/>
+          <p:cNvPr id="41" name="TextBox 40"/>
+          <p:cNvSpPr txBox="1"/>
+          <p:nvPr/>
+        </p:nvSpPr>
+        <p:spPr>
+          <a:xfrm>
+            <a:off x="6156000" y="2671200"/>
+            <a:ext cx="2376000" cy="234000"/>
+          </a:xfrm>
+          <a:prstGeom prst="rect">
+            <a:avLst/>
+          </a:prstGeom>
+          <a:noFill/>
+        </p:spPr>
+        <p:txBody>
+          <a:bodyPr wrap="square">
+            <a:spAutoFit/>
+          </a:bodyPr>
+          <a:lstStyle/>
+          <a:p>
+            <a:pPr algn="l"/>
+            <a:r>
+              <a:rPr sz="700" b="0" i="0">
+                <a:solidFill>
+                  <a:srgbClr val="555555"/>
+                </a:solidFill>
+                <a:latin typeface="Calibri"/>
+              </a:rPr>
+              <a:t>• Concurrence accrue de BYD, Xpeng et MG avec des modèles à 20 000-30 000 USD, captant 40% du marché</a:t>
+            </a:r>
+          </a:p>
+        </p:txBody>
+      </p:sp>
+      <p:sp>
+        <p:nvSpPr>
+          <p:cNvPr id="42" name="Rectangle 41"/>
+          <p:cNvSpPr/>
+          <p:nvPr/>
+        </p:nvSpPr>
+        <p:spPr>
+          <a:xfrm>
+            <a:off x="3311999" y="3038400"/>
+            <a:ext cx="5472000" cy="396000"/>
+          </a:xfrm>
+          <a:prstGeom prst="rect">
+            <a:avLst/>
+          </a:prstGeom>
+          <a:solidFill>
+            <a:srgbClr val="FFF3CD"/>
+          </a:solidFill>
+          <a:ln>
+            <a:noFill/>
+          </a:ln>
+        </p:spPr>
+        <p:style>
+          <a:lnRef idx="1">
+            <a:schemeClr val="accent1"/>
+          </a:lnRef>
+          <a:fillRef idx="3">
+            <a:schemeClr val="accent1"/>
+          </a:fillRef>
+          <a:effectRef idx="2">
+            <a:schemeClr val="accent1"/>
+          </a:effectRef>
+          <a:fontRef idx="minor">
+            <a:schemeClr val="lt1"/>
+          </a:fontRef>
+        </p:style>
+        <p:txBody>
+          <a:bodyPr rtlCol="0" anchor="ctr"/>
+          <a:lstStyle/>
+          <a:p>
+            <a:pPr algn="ctr"/>
+          </a:p>
+        </p:txBody>
+      </p:sp>
+      <p:sp>
+        <p:nvSpPr>
+          <p:cNvPr id="43" name="Rectangle 42"/>
+          <p:cNvSpPr/>
+          <p:nvPr/>
+        </p:nvSpPr>
+        <p:spPr>
+          <a:xfrm>
+            <a:off x="3311999" y="3038400"/>
+            <a:ext cx="36000" cy="396000"/>
+          </a:xfrm>
+          <a:prstGeom prst="rect">
+            <a:avLst/>
+          </a:prstGeom>
+          <a:solidFill>
+            <a:srgbClr val="B06000"/>
+          </a:solidFill>
+          <a:ln>
+            <a:noFill/>
+          </a:ln>
+        </p:spPr>
+        <p:style>
+          <a:lnRef idx="1">
+            <a:schemeClr val="accent1"/>
+          </a:lnRef>
+          <a:fillRef idx="3">
+            <a:schemeClr val="accent1"/>
+          </a:fillRef>
+          <a:effectRef idx="2">
+            <a:schemeClr val="accent1"/>
+          </a:effectRef>
+          <a:fontRef idx="minor">
+            <a:schemeClr val="lt1"/>
+          </a:fontRef>
+        </p:style>
+        <p:txBody>
+          <a:bodyPr rtlCol="0" anchor="ctr"/>
+          <a:lstStyle/>
+          <a:p>
+            <a:pPr algn="ctr"/>
+          </a:p>
+        </p:txBody>
+      </p:sp>
+      <p:sp>
+        <p:nvSpPr>
+          <p:cNvPr id="44" name="TextBox 43"/>
+          <p:cNvSpPr txBox="1"/>
+          <p:nvPr/>
+        </p:nvSpPr>
+        <p:spPr>
+          <a:xfrm>
+            <a:off x="3401999" y="3056400"/>
+            <a:ext cx="5310000" cy="360000"/>
+          </a:xfrm>
+          <a:prstGeom prst="rect">
+            <a:avLst/>
+          </a:prstGeom>
+          <a:noFill/>
+        </p:spPr>
+        <p:txBody>
+          <a:bodyPr wrap="square">
+            <a:spAutoFit/>
+          </a:bodyPr>
+          <a:lstStyle/>
+          <a:p>
+            <a:pPr algn="l"/>
+            <a:r>
+              <a:rPr sz="750" b="0" i="0">
+                <a:solidFill>
+                  <a:srgbClr val="7A5000"/>
+                </a:solidFill>
+                <a:latin typeface="Calibri"/>
+              </a:rPr>
+              <a:t>⚠ Conditions d’invalidation : Macro: Récession mondiale en 2026 avec baisse de 20%  ·  Sectoriel: Subventions chinoises réduites de 50% sur les</a:t>
+            </a:r>
+          </a:p>
+        </p:txBody>
+      </p:sp>
+      <p:sp>
+        <p:nvSpPr>
+          <p:cNvPr id="45" name="TextBox 44"/>
           <p:cNvSpPr txBox="1"/>
           <p:nvPr/>
         </p:nvSpPr>
@@ -32703,7 +34514,7 @@
                 </a:solidFill>
                 <a:latin typeface="Calibri"/>
               </a:rPr>
-              <a:t>Risques structurels &amp; thèse contraire</a:t>
+              <a:t>Guerre des prix  ·  Concurrence accrue</a:t>
             </a:r>
           </a:p>
         </p:txBody>
@@ -33937,21 +35748,64 @@
                 </a:solidFill>
                 <a:latin typeface="Calibri"/>
               </a:rPr>
-              <a:t>Tesla, Inc. (TSLA) opere dans le secteur Consumer Cyclical. Analyse FinSight IA en cours -- donnees de synthese non disponibles pour cette session. Lancer une nouvelle analyse pour obtenir la description complete, les segments et le positionnement strategique.</a:t>
+              <a:t>Tesla, Inc. conçoit, produit et vend des véhicules électriques haut de gamme ainsi que des solutions de stockage d'énergie et des panneaux solaires. Positionné comme leader technologique avec une intégration verticale unique (batteries, logiciels, bornes de recharge), l'entreprise bénéficie d'un avantage concurrentiel via son écosystème propriétaire et son avance en IA embarquée. La marque jouit d'une forte résilience grâce à sa communauté de clients fidèles et son réseau de superchargeurs exclusif. L'entreprise articule son activité autour de deux segments stratégiques :</a:t>
             </a:r>
           </a:p>
         </p:txBody>
       </p:sp>
       <p:sp>
         <p:nvSpPr>
-          <p:cNvPr id="20" name="TextBox 19"/>
+          <p:cNvPr id="20" name="Rectangle 19"/>
+          <p:cNvSpPr/>
+          <p:nvPr/>
+        </p:nvSpPr>
+        <p:spPr>
+          <a:xfrm>
+            <a:off x="503999" y="2599200"/>
+            <a:ext cx="64800" cy="64800"/>
+          </a:xfrm>
+          <a:prstGeom prst="rect">
+            <a:avLst/>
+          </a:prstGeom>
+          <a:solidFill>
+            <a:srgbClr val="2E5FA3"/>
+          </a:solidFill>
+          <a:ln>
+            <a:noFill/>
+          </a:ln>
+        </p:spPr>
+        <p:style>
+          <a:lnRef idx="1">
+            <a:schemeClr val="accent1"/>
+          </a:lnRef>
+          <a:fillRef idx="3">
+            <a:schemeClr val="accent1"/>
+          </a:fillRef>
+          <a:effectRef idx="2">
+            <a:schemeClr val="accent1"/>
+          </a:effectRef>
+          <a:fontRef idx="minor">
+            <a:schemeClr val="lt1"/>
+          </a:fontRef>
+        </p:style>
+        <p:txBody>
+          <a:bodyPr rtlCol="0" anchor="ctr"/>
+          <a:lstStyle/>
+          <a:p>
+            <a:pPr algn="ctr"/>
+          </a:p>
+        </p:txBody>
+      </p:sp>
+      <p:sp>
+        <p:nvSpPr>
+          <p:cNvPr id="21" name="TextBox 20"/>
           <p:cNvSpPr txBox="1"/>
           <p:nvPr/>
         </p:nvSpPr>
         <p:spPr>
           <a:xfrm>
-            <a:off x="503999" y="2358000"/>
-            <a:ext cx="4662000" cy="183600"/>
+            <a:off x="619200" y="2556000"/>
+            <a:ext cx="4338000" cy="165600"/>
           </a:xfrm>
           <a:prstGeom prst="rect">
             <a:avLst/>
@@ -33966,20 +35820,168 @@
           <a:p>
             <a:pPr algn="l"/>
             <a:r>
-              <a:rPr sz="900" b="1" i="0">
+              <a:rPr sz="850" b="1" i="0">
                 <a:solidFill>
-                  <a:srgbClr val="1B3A6B"/>
+                  <a:srgbClr val="0D0D0D"/>
                 </a:solidFill>
                 <a:latin typeface="Calibri"/>
               </a:rPr>
-              <a:t>Positionnement stratégique</a:t>
+              <a:t>Automobile</a:t>
             </a:r>
           </a:p>
         </p:txBody>
       </p:sp>
       <p:sp>
         <p:nvSpPr>
-          <p:cNvPr id="21" name="Rectangle 20"/>
+          <p:cNvPr id="22" name="TextBox 21"/>
+          <p:cNvSpPr txBox="1"/>
+          <p:nvPr/>
+        </p:nvSpPr>
+        <p:spPr>
+          <a:xfrm>
+            <a:off x="619200" y="2714400"/>
+            <a:ext cx="4338000" cy="503999"/>
+          </a:xfrm>
+          <a:prstGeom prst="rect">
+            <a:avLst/>
+          </a:prstGeom>
+          <a:noFill/>
+        </p:spPr>
+        <p:txBody>
+          <a:bodyPr wrap="square">
+            <a:spAutoFit/>
+          </a:bodyPr>
+          <a:lstStyle/>
+          <a:p>
+            <a:pPr algn="l"/>
+            <a:r>
+              <a:rPr sz="750" b="0" i="1">
+                <a:solidFill>
+                  <a:srgbClr val="555555"/>
+                </a:solidFill>
+                <a:latin typeface="Calibri"/>
+              </a:rPr>
+              <a:t>Ventes de véhicules électriques haut de gamme (Model 3, Y, S, X, Cybertruck) avec marge brute élevée et mix produit évoluant vers des modèles plus accessibles. Clients cibles : particuliers aisés et entreprises. Croissance tirée par l'expansion géographique et l'innovation logicielle (FSD).</a:t>
+            </a:r>
+          </a:p>
+        </p:txBody>
+      </p:sp>
+      <p:sp>
+        <p:nvSpPr>
+          <p:cNvPr id="23" name="Rectangle 22"/>
+          <p:cNvSpPr/>
+          <p:nvPr/>
+        </p:nvSpPr>
+        <p:spPr>
+          <a:xfrm>
+            <a:off x="503999" y="3301199"/>
+            <a:ext cx="64800" cy="64800"/>
+          </a:xfrm>
+          <a:prstGeom prst="rect">
+            <a:avLst/>
+          </a:prstGeom>
+          <a:solidFill>
+            <a:srgbClr val="2E5FA3"/>
+          </a:solidFill>
+          <a:ln>
+            <a:noFill/>
+          </a:ln>
+        </p:spPr>
+        <p:style>
+          <a:lnRef idx="1">
+            <a:schemeClr val="accent1"/>
+          </a:lnRef>
+          <a:fillRef idx="3">
+            <a:schemeClr val="accent1"/>
+          </a:fillRef>
+          <a:effectRef idx="2">
+            <a:schemeClr val="accent1"/>
+          </a:effectRef>
+          <a:fontRef idx="minor">
+            <a:schemeClr val="lt1"/>
+          </a:fontRef>
+        </p:style>
+        <p:txBody>
+          <a:bodyPr rtlCol="0" anchor="ctr"/>
+          <a:lstStyle/>
+          <a:p>
+            <a:pPr algn="ctr"/>
+          </a:p>
+        </p:txBody>
+      </p:sp>
+      <p:sp>
+        <p:nvSpPr>
+          <p:cNvPr id="24" name="TextBox 23"/>
+          <p:cNvSpPr txBox="1"/>
+          <p:nvPr/>
+        </p:nvSpPr>
+        <p:spPr>
+          <a:xfrm>
+            <a:off x="619200" y="3257999"/>
+            <a:ext cx="4338000" cy="165600"/>
+          </a:xfrm>
+          <a:prstGeom prst="rect">
+            <a:avLst/>
+          </a:prstGeom>
+          <a:noFill/>
+        </p:spPr>
+        <p:txBody>
+          <a:bodyPr wrap="square">
+            <a:spAutoFit/>
+          </a:bodyPr>
+          <a:lstStyle/>
+          <a:p>
+            <a:pPr algn="l"/>
+            <a:r>
+              <a:rPr sz="850" b="1" i="0">
+                <a:solidFill>
+                  <a:srgbClr val="0D0D0D"/>
+                </a:solidFill>
+                <a:latin typeface="Calibri"/>
+              </a:rPr>
+              <a:t>Énergie et Services</a:t>
+            </a:r>
+          </a:p>
+        </p:txBody>
+      </p:sp>
+      <p:sp>
+        <p:nvSpPr>
+          <p:cNvPr id="25" name="TextBox 24"/>
+          <p:cNvSpPr txBox="1"/>
+          <p:nvPr/>
+        </p:nvSpPr>
+        <p:spPr>
+          <a:xfrm>
+            <a:off x="619200" y="3416399"/>
+            <a:ext cx="4338000" cy="503999"/>
+          </a:xfrm>
+          <a:prstGeom prst="rect">
+            <a:avLst/>
+          </a:prstGeom>
+          <a:noFill/>
+        </p:spPr>
+        <p:txBody>
+          <a:bodyPr wrap="square">
+            <a:spAutoFit/>
+          </a:bodyPr>
+          <a:lstStyle/>
+          <a:p>
+            <a:pPr algn="l"/>
+            <a:r>
+              <a:rPr sz="750" b="0" i="1">
+                <a:solidFill>
+                  <a:srgbClr val="555555"/>
+                </a:solidFill>
+                <a:latin typeface="Calibri"/>
+              </a:rPr>
+              <a:t>Stockage d'énergie (Powerwall, Megapack) et panneaux solaires avec abonnements de maintenance. Revenus récurrents via le logiciel de gestion énergétique. Clients : ménages, entreprises et utilities. Croissance liée à la transition énergétique et aux incitations fiscales.</a:t>
+            </a:r>
+          </a:p>
+        </p:txBody>
+      </p:sp>
+      <p:sp>
+        <p:nvSpPr>
+          <p:cNvPr id="26" name="Rectangle 25"/>
           <p:cNvSpPr/>
           <p:nvPr/>
         </p:nvSpPr>
@@ -34022,7 +36024,7 @@
       </p:sp>
       <p:sp>
         <p:nvSpPr>
-          <p:cNvPr id="22" name="Rectangle 21"/>
+          <p:cNvPr id="27" name="Rectangle 26"/>
           <p:cNvSpPr/>
           <p:nvPr/>
         </p:nvSpPr>
@@ -34065,7 +36067,7 @@
       </p:sp>
       <p:sp>
         <p:nvSpPr>
-          <p:cNvPr id="23" name="TextBox 22"/>
+          <p:cNvPr id="28" name="TextBox 27"/>
           <p:cNvSpPr txBox="1"/>
           <p:nvPr/>
         </p:nvSpPr>
@@ -34100,7 +36102,7 @@
       </p:sp>
       <p:sp>
         <p:nvSpPr>
-          <p:cNvPr id="24" name="TextBox 23"/>
+          <p:cNvPr id="29" name="TextBox 28"/>
           <p:cNvSpPr txBox="1"/>
           <p:nvPr/>
         </p:nvSpPr>
@@ -34135,7 +36137,7 @@
       </p:sp>
       <p:sp>
         <p:nvSpPr>
-          <p:cNvPr id="25" name="Rectangle 24"/>
+          <p:cNvPr id="30" name="Rectangle 29"/>
           <p:cNvSpPr/>
           <p:nvPr/>
         </p:nvSpPr>
@@ -34178,7 +36180,7 @@
       </p:sp>
       <p:sp>
         <p:nvSpPr>
-          <p:cNvPr id="26" name="Rectangle 25"/>
+          <p:cNvPr id="31" name="Rectangle 30"/>
           <p:cNvSpPr/>
           <p:nvPr/>
         </p:nvSpPr>
@@ -34221,7 +36223,7 @@
       </p:sp>
       <p:sp>
         <p:nvSpPr>
-          <p:cNvPr id="27" name="TextBox 26"/>
+          <p:cNvPr id="32" name="TextBox 31"/>
           <p:cNvSpPr txBox="1"/>
           <p:nvPr/>
         </p:nvSpPr>
@@ -34256,7 +36258,7 @@
       </p:sp>
       <p:sp>
         <p:nvSpPr>
-          <p:cNvPr id="28" name="TextBox 27"/>
+          <p:cNvPr id="33" name="TextBox 32"/>
           <p:cNvSpPr txBox="1"/>
           <p:nvPr/>
         </p:nvSpPr>
@@ -34291,7 +36293,7 @@
       </p:sp>
       <p:sp>
         <p:nvSpPr>
-          <p:cNvPr id="29" name="Rectangle 28"/>
+          <p:cNvPr id="34" name="Rectangle 33"/>
           <p:cNvSpPr/>
           <p:nvPr/>
         </p:nvSpPr>
@@ -34334,7 +36336,7 @@
       </p:sp>
       <p:sp>
         <p:nvSpPr>
-          <p:cNvPr id="30" name="Rectangle 29"/>
+          <p:cNvPr id="35" name="Rectangle 34"/>
           <p:cNvSpPr/>
           <p:nvPr/>
         </p:nvSpPr>
@@ -34377,7 +36379,7 @@
       </p:sp>
       <p:sp>
         <p:nvSpPr>
-          <p:cNvPr id="31" name="TextBox 30"/>
+          <p:cNvPr id="36" name="TextBox 35"/>
           <p:cNvSpPr txBox="1"/>
           <p:nvPr/>
         </p:nvSpPr>
@@ -34412,7 +36414,7 @@
       </p:sp>
       <p:sp>
         <p:nvSpPr>
-          <p:cNvPr id="32" name="TextBox 31"/>
+          <p:cNvPr id="37" name="TextBox 36"/>
           <p:cNvSpPr txBox="1"/>
           <p:nvPr/>
         </p:nvSpPr>
@@ -34447,7 +36449,7 @@
       </p:sp>
       <p:sp>
         <p:nvSpPr>
-          <p:cNvPr id="33" name="Rectangle 32"/>
+          <p:cNvPr id="38" name="Rectangle 37"/>
           <p:cNvSpPr/>
           <p:nvPr/>
         </p:nvSpPr>
@@ -34490,7 +36492,7 @@
       </p:sp>
       <p:sp>
         <p:nvSpPr>
-          <p:cNvPr id="34" name="Rectangle 33"/>
+          <p:cNvPr id="39" name="Rectangle 38"/>
           <p:cNvSpPr/>
           <p:nvPr/>
         </p:nvSpPr>
@@ -34533,7 +36535,7 @@
       </p:sp>
       <p:sp>
         <p:nvSpPr>
-          <p:cNvPr id="35" name="TextBox 34"/>
+          <p:cNvPr id="40" name="TextBox 39"/>
           <p:cNvSpPr txBox="1"/>
           <p:nvPr/>
         </p:nvSpPr>
@@ -34568,7 +36570,7 @@
       </p:sp>
       <p:sp>
         <p:nvSpPr>
-          <p:cNvPr id="36" name="TextBox 35"/>
+          <p:cNvPr id="41" name="TextBox 40"/>
           <p:cNvSpPr txBox="1"/>
           <p:nvPr/>
         </p:nvSpPr>
@@ -34603,7 +36605,7 @@
       </p:sp>
       <p:sp>
         <p:nvSpPr>
-          <p:cNvPr id="37" name="TextBox 36"/>
+          <p:cNvPr id="42" name="TextBox 41"/>
           <p:cNvSpPr txBox="1"/>
           <p:nvPr/>
         </p:nvSpPr>
@@ -35244,7 +37246,7 @@
         <p:spPr>
           <a:xfrm>
             <a:off x="367200" y="961200"/>
-            <a:ext cx="2731199" cy="3520800"/>
+            <a:ext cx="4150800" cy="3520800"/>
           </a:xfrm>
           <a:prstGeom prst="rect">
             <a:avLst/>
@@ -35287,7 +37289,7 @@
         <p:spPr>
           <a:xfrm>
             <a:off x="367200" y="961200"/>
-            <a:ext cx="2731199" cy="54000"/>
+            <a:ext cx="4150800" cy="54000"/>
           </a:xfrm>
           <a:prstGeom prst="rect">
             <a:avLst/>
@@ -35330,7 +37332,7 @@
         <p:spPr>
           <a:xfrm>
             <a:off x="457200" y="1141200"/>
-            <a:ext cx="2551199" cy="640800"/>
+            <a:ext cx="3970800" cy="640800"/>
           </a:xfrm>
           <a:prstGeom prst="rect">
             <a:avLst/>
@@ -35351,7 +37353,7 @@
                 </a:solidFill>
                 <a:latin typeface="Calibri"/>
               </a:rPr>
-              <a:t>—</a:t>
+              <a:t>85%</a:t>
             </a:r>
           </a:p>
         </p:txBody>
@@ -35365,7 +37367,7 @@
         <p:spPr>
           <a:xfrm>
             <a:off x="457200" y="1785600"/>
-            <a:ext cx="2551199" cy="108000"/>
+            <a:ext cx="3970800" cy="108000"/>
           </a:xfrm>
           <a:prstGeom prst="rect">
             <a:avLst/>
@@ -35400,7 +37402,7 @@
         <p:spPr>
           <a:xfrm>
             <a:off x="457200" y="1965600"/>
-            <a:ext cx="2551199" cy="18000"/>
+            <a:ext cx="3970800" cy="18000"/>
           </a:xfrm>
           <a:prstGeom prst="rect">
             <a:avLst/>
@@ -35443,7 +37445,7 @@
         <p:spPr>
           <a:xfrm>
             <a:off x="457200" y="2059200"/>
-            <a:ext cx="2551199" cy="255600"/>
+            <a:ext cx="3970800" cy="255600"/>
           </a:xfrm>
           <a:prstGeom prst="rect">
             <a:avLst/>
@@ -35464,7 +37466,7 @@
                 </a:solidFill>
                 <a:latin typeface="Calibri"/>
               </a:rPr>
-              <a:t>Core Business</a:t>
+              <a:t>Automobile</a:t>
             </a:r>
           </a:p>
         </p:txBody>
@@ -35478,7 +37480,7 @@
         <p:spPr>
           <a:xfrm>
             <a:off x="457200" y="2332800"/>
-            <a:ext cx="2551199" cy="2041199"/>
+            <a:ext cx="3970800" cy="2041199"/>
           </a:xfrm>
           <a:prstGeom prst="rect">
             <a:avLst/>
@@ -35499,7 +37501,7 @@
                 </a:solidFill>
                 <a:latin typeface="Calibri"/>
               </a:rPr>
-              <a:t>—</a:t>
+              <a:t>Ventes de véhicules électriques haut de gamme (Model 3, Y, S, X, Cybertruck) avec marge brute élevée et mix produit évoluant vers des modèles plus accessibles. Clients cibles : particuliers aisés et entreprises. Croissance tirée par l'expansion géographique et l'innovation logicielle (FSD).</a:t>
             </a:r>
           </a:p>
         </p:txBody>
@@ -35512,8 +37514,8 @@
         </p:nvSpPr>
         <p:spPr>
           <a:xfrm>
-            <a:off x="3206400" y="961200"/>
-            <a:ext cx="2731199" cy="3520800"/>
+            <a:off x="4626000" y="961200"/>
+            <a:ext cx="4150800" cy="3520800"/>
           </a:xfrm>
           <a:prstGeom prst="rect">
             <a:avLst/>
@@ -35555,8 +37557,8 @@
         </p:nvSpPr>
         <p:spPr>
           <a:xfrm>
-            <a:off x="3206400" y="961200"/>
-            <a:ext cx="2731199" cy="54000"/>
+            <a:off x="4626000" y="961200"/>
+            <a:ext cx="4150800" cy="54000"/>
           </a:xfrm>
           <a:prstGeom prst="rect">
             <a:avLst/>
@@ -35598,8 +37600,8 @@
         </p:nvSpPr>
         <p:spPr>
           <a:xfrm>
-            <a:off x="3296400" y="1141200"/>
-            <a:ext cx="2551199" cy="640800"/>
+            <a:off x="4716000" y="1141200"/>
+            <a:ext cx="3970800" cy="640800"/>
           </a:xfrm>
           <a:prstGeom prst="rect">
             <a:avLst/>
@@ -35620,7 +37622,7 @@
                 </a:solidFill>
                 <a:latin typeface="Calibri"/>
               </a:rPr>
-              <a:t>—</a:t>
+              <a:t>15%</a:t>
             </a:r>
           </a:p>
         </p:txBody>
@@ -35633,8 +37635,8 @@
         </p:nvSpPr>
         <p:spPr>
           <a:xfrm>
-            <a:off x="3296400" y="1785600"/>
-            <a:ext cx="2551199" cy="108000"/>
+            <a:off x="4716000" y="1785600"/>
+            <a:ext cx="3970800" cy="108000"/>
           </a:xfrm>
           <a:prstGeom prst="rect">
             <a:avLst/>
@@ -35668,8 +37670,8 @@
         </p:nvSpPr>
         <p:spPr>
           <a:xfrm>
-            <a:off x="3296400" y="1965600"/>
-            <a:ext cx="2551199" cy="18000"/>
+            <a:off x="4716000" y="1965600"/>
+            <a:ext cx="3970800" cy="18000"/>
           </a:xfrm>
           <a:prstGeom prst="rect">
             <a:avLst/>
@@ -35711,8 +37713,8 @@
         </p:nvSpPr>
         <p:spPr>
           <a:xfrm>
-            <a:off x="3296400" y="2059200"/>
-            <a:ext cx="2551199" cy="255600"/>
+            <a:off x="4716000" y="2059200"/>
+            <a:ext cx="3970800" cy="255600"/>
           </a:xfrm>
           <a:prstGeom prst="rect">
             <a:avLst/>
@@ -35733,7 +37735,7 @@
                 </a:solidFill>
                 <a:latin typeface="Calibri"/>
               </a:rPr>
-              <a:t>Growth Driver</a:t>
+              <a:t>Énergie et Services</a:t>
             </a:r>
           </a:p>
         </p:txBody>
@@ -35746,8 +37748,8 @@
         </p:nvSpPr>
         <p:spPr>
           <a:xfrm>
-            <a:off x="3296400" y="2332800"/>
-            <a:ext cx="2551199" cy="2041199"/>
+            <a:off x="4716000" y="2332800"/>
+            <a:ext cx="3970800" cy="2041199"/>
           </a:xfrm>
           <a:prstGeom prst="rect">
             <a:avLst/>
@@ -35768,276 +37770,7 @@
                 </a:solidFill>
                 <a:latin typeface="Calibri"/>
               </a:rPr>
-              <a:t>—</a:t>
-            </a:r>
-          </a:p>
-        </p:txBody>
-      </p:sp>
-      <p:sp>
-        <p:nvSpPr>
-          <p:cNvPr id="31" name="Rectangle 30"/>
-          <p:cNvSpPr/>
-          <p:nvPr/>
-        </p:nvSpPr>
-        <p:spPr>
-          <a:xfrm>
-            <a:off x="6045600" y="961200"/>
-            <a:ext cx="2731199" cy="3520800"/>
-          </a:xfrm>
-          <a:prstGeom prst="rect">
-            <a:avLst/>
-          </a:prstGeom>
-          <a:solidFill>
-            <a:srgbClr val="F7F8FA"/>
-          </a:solidFill>
-          <a:ln>
-            <a:noFill/>
-          </a:ln>
-        </p:spPr>
-        <p:style>
-          <a:lnRef idx="1">
-            <a:schemeClr val="accent1"/>
-          </a:lnRef>
-          <a:fillRef idx="3">
-            <a:schemeClr val="accent1"/>
-          </a:fillRef>
-          <a:effectRef idx="2">
-            <a:schemeClr val="accent1"/>
-          </a:effectRef>
-          <a:fontRef idx="minor">
-            <a:schemeClr val="lt1"/>
-          </a:fontRef>
-        </p:style>
-        <p:txBody>
-          <a:bodyPr rtlCol="0" anchor="ctr"/>
-          <a:lstStyle/>
-          <a:p>
-            <a:pPr algn="ctr"/>
-          </a:p>
-        </p:txBody>
-      </p:sp>
-      <p:sp>
-        <p:nvSpPr>
-          <p:cNvPr id="32" name="Rectangle 31"/>
-          <p:cNvSpPr/>
-          <p:nvPr/>
-        </p:nvSpPr>
-        <p:spPr>
-          <a:xfrm>
-            <a:off x="6045600" y="961200"/>
-            <a:ext cx="2731199" cy="54000"/>
-          </a:xfrm>
-          <a:prstGeom prst="rect">
-            <a:avLst/>
-          </a:prstGeom>
-          <a:solidFill>
-            <a:srgbClr val="888888"/>
-          </a:solidFill>
-          <a:ln>
-            <a:noFill/>
-          </a:ln>
-        </p:spPr>
-        <p:style>
-          <a:lnRef idx="1">
-            <a:schemeClr val="accent1"/>
-          </a:lnRef>
-          <a:fillRef idx="3">
-            <a:schemeClr val="accent1"/>
-          </a:fillRef>
-          <a:effectRef idx="2">
-            <a:schemeClr val="accent1"/>
-          </a:effectRef>
-          <a:fontRef idx="minor">
-            <a:schemeClr val="lt1"/>
-          </a:fontRef>
-        </p:style>
-        <p:txBody>
-          <a:bodyPr rtlCol="0" anchor="ctr"/>
-          <a:lstStyle/>
-          <a:p>
-            <a:pPr algn="ctr"/>
-          </a:p>
-        </p:txBody>
-      </p:sp>
-      <p:sp>
-        <p:nvSpPr>
-          <p:cNvPr id="33" name="TextBox 32"/>
-          <p:cNvSpPr txBox="1"/>
-          <p:nvPr/>
-        </p:nvSpPr>
-        <p:spPr>
-          <a:xfrm>
-            <a:off x="6135600" y="1141200"/>
-            <a:ext cx="2551199" cy="640800"/>
-          </a:xfrm>
-          <a:prstGeom prst="rect">
-            <a:avLst/>
-          </a:prstGeom>
-          <a:noFill/>
-        </p:spPr>
-        <p:txBody>
-          <a:bodyPr wrap="square">
-            <a:spAutoFit/>
-          </a:bodyPr>
-          <a:lstStyle/>
-          <a:p>
-            <a:pPr algn="l"/>
-            <a:r>
-              <a:rPr sz="2200" b="1" i="0">
-                <a:solidFill>
-                  <a:srgbClr val="888888"/>
-                </a:solidFill>
-                <a:latin typeface="Calibri"/>
-              </a:rPr>
-              <a:t>—</a:t>
-            </a:r>
-          </a:p>
-        </p:txBody>
-      </p:sp>
-      <p:sp>
-        <p:nvSpPr>
-          <p:cNvPr id="34" name="TextBox 33"/>
-          <p:cNvSpPr txBox="1"/>
-          <p:nvPr/>
-        </p:nvSpPr>
-        <p:spPr>
-          <a:xfrm>
-            <a:off x="6135600" y="1785600"/>
-            <a:ext cx="2551199" cy="108000"/>
-          </a:xfrm>
-          <a:prstGeom prst="rect">
-            <a:avLst/>
-          </a:prstGeom>
-          <a:noFill/>
-        </p:spPr>
-        <p:txBody>
-          <a:bodyPr wrap="square">
-            <a:spAutoFit/>
-          </a:bodyPr>
-          <a:lstStyle/>
-          <a:p>
-            <a:pPr algn="l"/>
-            <a:r>
-              <a:rPr sz="900" b="0" i="0">
-                <a:solidFill>
-                  <a:srgbClr val="555555"/>
-                </a:solidFill>
-                <a:latin typeface="Calibri"/>
-              </a:rPr>
-              <a:t>du CA</a:t>
-            </a:r>
-          </a:p>
-        </p:txBody>
-      </p:sp>
-      <p:sp>
-        <p:nvSpPr>
-          <p:cNvPr id="35" name="Rectangle 34"/>
-          <p:cNvSpPr/>
-          <p:nvPr/>
-        </p:nvSpPr>
-        <p:spPr>
-          <a:xfrm>
-            <a:off x="6135600" y="1965600"/>
-            <a:ext cx="2551199" cy="18000"/>
-          </a:xfrm>
-          <a:prstGeom prst="rect">
-            <a:avLst/>
-          </a:prstGeom>
-          <a:solidFill>
-            <a:srgbClr val="888888"/>
-          </a:solidFill>
-          <a:ln>
-            <a:noFill/>
-          </a:ln>
-        </p:spPr>
-        <p:style>
-          <a:lnRef idx="1">
-            <a:schemeClr val="accent1"/>
-          </a:lnRef>
-          <a:fillRef idx="3">
-            <a:schemeClr val="accent1"/>
-          </a:fillRef>
-          <a:effectRef idx="2">
-            <a:schemeClr val="accent1"/>
-          </a:effectRef>
-          <a:fontRef idx="minor">
-            <a:schemeClr val="lt1"/>
-          </a:fontRef>
-        </p:style>
-        <p:txBody>
-          <a:bodyPr rtlCol="0" anchor="ctr"/>
-          <a:lstStyle/>
-          <a:p>
-            <a:pPr algn="ctr"/>
-          </a:p>
-        </p:txBody>
-      </p:sp>
-      <p:sp>
-        <p:nvSpPr>
-          <p:cNvPr id="36" name="TextBox 35"/>
-          <p:cNvSpPr txBox="1"/>
-          <p:nvPr/>
-        </p:nvSpPr>
-        <p:spPr>
-          <a:xfrm>
-            <a:off x="6135600" y="2059200"/>
-            <a:ext cx="2551199" cy="255600"/>
-          </a:xfrm>
-          <a:prstGeom prst="rect">
-            <a:avLst/>
-          </a:prstGeom>
-          <a:noFill/>
-        </p:spPr>
-        <p:txBody>
-          <a:bodyPr wrap="square">
-            <a:spAutoFit/>
-          </a:bodyPr>
-          <a:lstStyle/>
-          <a:p>
-            <a:pPr algn="l"/>
-            <a:r>
-              <a:rPr sz="1000" b="1" i="0">
-                <a:solidFill>
-                  <a:srgbClr val="1B3A6B"/>
-                </a:solidFill>
-                <a:latin typeface="Calibri"/>
-              </a:rPr>
-              <a:t>International</a:t>
-            </a:r>
-          </a:p>
-        </p:txBody>
-      </p:sp>
-      <p:sp>
-        <p:nvSpPr>
-          <p:cNvPr id="37" name="TextBox 36"/>
-          <p:cNvSpPr txBox="1"/>
-          <p:nvPr/>
-        </p:nvSpPr>
-        <p:spPr>
-          <a:xfrm>
-            <a:off x="6135600" y="2332800"/>
-            <a:ext cx="2551199" cy="2041199"/>
-          </a:xfrm>
-          <a:prstGeom prst="rect">
-            <a:avLst/>
-          </a:prstGeom>
-          <a:noFill/>
-        </p:spPr>
-        <p:txBody>
-          <a:bodyPr wrap="square">
-            <a:spAutoFit/>
-          </a:bodyPr>
-          <a:lstStyle/>
-          <a:p>
-            <a:pPr algn="l"/>
-            <a:r>
-              <a:rPr sz="800" b="0" i="0">
-                <a:solidFill>
-                  <a:srgbClr val="555555"/>
-                </a:solidFill>
-                <a:latin typeface="Calibri"/>
-              </a:rPr>
-              <a:t>—</a:t>
+              <a:t>Stockage d'énergie (Powerwall, Megapack) et panneaux solaires avec abonnements de maintenance. Revenus récurrents via le logiciel de gestion énergétique. Clients : ménages, entreprises et utilities. Croissance liée à la transition énergétique et aux incitations fiscales.</a:t>
             </a:r>
           </a:p>
         </p:txBody>
@@ -36889,7 +38622,7 @@
                 </a:solidFill>
                 <a:latin typeface="Calibri"/>
               </a:rPr>
-              <a:t>USD millions  ·  2022–2025</a:t>
+              <a:t>USD millions  ·  2022–2027F</a:t>
             </a:r>
           </a:p>
         </p:txBody>
@@ -36904,7 +38637,7 @@
         </p:nvGraphicFramePr>
         <p:xfrm>
           <a:off x="367200" y="914400"/>
-          <a:ext cx="8413200" cy="1980000"/>
+          <a:ext cx="8413196" cy="1980000"/>
         </p:xfrm>
         <a:graphic>
           <a:graphicData uri="http://schemas.openxmlformats.org/drawingml/2006/table">
@@ -36914,9 +38647,11 @@
               </a:tblPr>
               <a:tblGrid>
                 <a:gridCol w="2355696"/>
-                <a:gridCol w="2019168"/>
-                <a:gridCol w="2019168"/>
-                <a:gridCol w="2019168"/>
+                <a:gridCol w="1211500"/>
+                <a:gridCol w="1211500"/>
+                <a:gridCol w="1211500"/>
+                <a:gridCol w="1211500"/>
+                <a:gridCol w="1211500"/>
               </a:tblGrid>
               <a:tr h="220000">
                 <a:tc>
@@ -37011,6 +38746,52 @@
                     </a:solidFill>
                   </a:tcPr>
                 </a:tc>
+                <a:tc>
+                  <a:txBody>
+                    <a:bodyPr/>
+                    <a:lstStyle/>
+                    <a:p>
+                      <a:pPr algn="ctr"/>
+                      <a:r>
+                        <a:rPr sz="800" b="1" i="0">
+                          <a:solidFill>
+                            <a:srgbClr val="FFFFFF"/>
+                          </a:solidFill>
+                          <a:latin typeface="Calibri"/>
+                        </a:rPr>
+                        <a:t>2026F</a:t>
+                      </a:r>
+                    </a:p>
+                  </a:txBody>
+                  <a:tcPr>
+                    <a:solidFill>
+                      <a:srgbClr val="1B3A6B"/>
+                    </a:solidFill>
+                  </a:tcPr>
+                </a:tc>
+                <a:tc>
+                  <a:txBody>
+                    <a:bodyPr/>
+                    <a:lstStyle/>
+                    <a:p>
+                      <a:pPr algn="ctr"/>
+                      <a:r>
+                        <a:rPr sz="800" b="1" i="0">
+                          <a:solidFill>
+                            <a:srgbClr val="FFFFFF"/>
+                          </a:solidFill>
+                          <a:latin typeface="Calibri"/>
+                        </a:rPr>
+                        <a:t>2027F</a:t>
+                      </a:r>
+                    </a:p>
+                  </a:txBody>
+                  <a:tcPr>
+                    <a:solidFill>
+                      <a:srgbClr val="1B3A6B"/>
+                    </a:solidFill>
+                  </a:tcPr>
+                </a:tc>
               </a:tr>
               <a:tr h="220000">
                 <a:tc>
@@ -37105,6 +38886,52 @@
                     </a:solidFill>
                   </a:tcPr>
                 </a:tc>
+                <a:tc>
+                  <a:txBody>
+                    <a:bodyPr/>
+                    <a:lstStyle/>
+                    <a:p>
+                      <a:pPr algn="ctr"/>
+                      <a:r>
+                        <a:rPr sz="800" b="1" i="0">
+                          <a:solidFill>
+                            <a:srgbClr val="0D0D0D"/>
+                          </a:solidFill>
+                          <a:latin typeface="Calibri"/>
+                        </a:rPr>
+                        <a:t>110,0</a:t>
+                      </a:r>
+                    </a:p>
+                  </a:txBody>
+                  <a:tcPr>
+                    <a:solidFill>
+                      <a:srgbClr val="FFFFFF"/>
+                    </a:solidFill>
+                  </a:tcPr>
+                </a:tc>
+                <a:tc>
+                  <a:txBody>
+                    <a:bodyPr/>
+                    <a:lstStyle/>
+                    <a:p>
+                      <a:pPr algn="ctr"/>
+                      <a:r>
+                        <a:rPr sz="800" b="1" i="0">
+                          <a:solidFill>
+                            <a:srgbClr val="0D0D0D"/>
+                          </a:solidFill>
+                          <a:latin typeface="Calibri"/>
+                        </a:rPr>
+                        <a:t>130,0</a:t>
+                      </a:r>
+                    </a:p>
+                  </a:txBody>
+                  <a:tcPr>
+                    <a:solidFill>
+                      <a:srgbClr val="FFFFFF"/>
+                    </a:solidFill>
+                  </a:tcPr>
+                </a:tc>
               </a:tr>
               <a:tr h="220000">
                 <a:tc>
@@ -37199,6 +39026,52 @@
                     </a:solidFill>
                   </a:tcPr>
                 </a:tc>
+                <a:tc>
+                  <a:txBody>
+                    <a:bodyPr/>
+                    <a:lstStyle/>
+                    <a:p>
+                      <a:pPr algn="ctr"/>
+                      <a:r>
+                        <a:rPr sz="750" b="0" i="1">
+                          <a:solidFill>
+                            <a:srgbClr val="333333"/>
+                          </a:solidFill>
+                          <a:latin typeface="Calibri"/>
+                        </a:rPr>
+                        <a:t>+16,0 %</a:t>
+                      </a:r>
+                    </a:p>
+                  </a:txBody>
+                  <a:tcPr>
+                    <a:solidFill>
+                      <a:srgbClr val="F7F8FA"/>
+                    </a:solidFill>
+                  </a:tcPr>
+                </a:tc>
+                <a:tc>
+                  <a:txBody>
+                    <a:bodyPr/>
+                    <a:lstStyle/>
+                    <a:p>
+                      <a:pPr algn="ctr"/>
+                      <a:r>
+                        <a:rPr sz="750" b="0" i="1">
+                          <a:solidFill>
+                            <a:srgbClr val="333333"/>
+                          </a:solidFill>
+                          <a:latin typeface="Calibri"/>
+                        </a:rPr>
+                        <a:t>+18,0 %</a:t>
+                      </a:r>
+                    </a:p>
+                  </a:txBody>
+                  <a:tcPr>
+                    <a:solidFill>
+                      <a:srgbClr val="F7F8FA"/>
+                    </a:solidFill>
+                  </a:tcPr>
+                </a:tc>
               </a:tr>
               <a:tr h="220000">
                 <a:tc>
@@ -37293,6 +39166,52 @@
                     </a:solidFill>
                   </a:tcPr>
                 </a:tc>
+                <a:tc>
+                  <a:txBody>
+                    <a:bodyPr/>
+                    <a:lstStyle/>
+                    <a:p>
+                      <a:pPr algn="ctr"/>
+                      <a:r>
+                        <a:rPr sz="800" b="1" i="0">
+                          <a:solidFill>
+                            <a:srgbClr val="0D0D0D"/>
+                          </a:solidFill>
+                          <a:latin typeface="Calibri"/>
+                        </a:rPr>
+                        <a:t>20,9</a:t>
+                      </a:r>
+                    </a:p>
+                  </a:txBody>
+                  <a:tcPr>
+                    <a:solidFill>
+                      <a:srgbClr val="FFFFFF"/>
+                    </a:solidFill>
+                  </a:tcPr>
+                </a:tc>
+                <a:tc>
+                  <a:txBody>
+                    <a:bodyPr/>
+                    <a:lstStyle/>
+                    <a:p>
+                      <a:pPr algn="ctr"/>
+                      <a:r>
+                        <a:rPr sz="800" b="1" i="0">
+                          <a:solidFill>
+                            <a:srgbClr val="0D0D0D"/>
+                          </a:solidFill>
+                          <a:latin typeface="Calibri"/>
+                        </a:rPr>
+                        <a:t>27,3</a:t>
+                      </a:r>
+                    </a:p>
+                  </a:txBody>
+                  <a:tcPr>
+                    <a:solidFill>
+                      <a:srgbClr val="FFFFFF"/>
+                    </a:solidFill>
+                  </a:tcPr>
+                </a:tc>
               </a:tr>
               <a:tr h="220000">
                 <a:tc>
@@ -37387,6 +39306,52 @@
                     </a:solidFill>
                   </a:tcPr>
                 </a:tc>
+                <a:tc>
+                  <a:txBody>
+                    <a:bodyPr/>
+                    <a:lstStyle/>
+                    <a:p>
+                      <a:pPr algn="ctr"/>
+                      <a:r>
+                        <a:rPr sz="750" b="0" i="1">
+                          <a:solidFill>
+                            <a:srgbClr val="333333"/>
+                          </a:solidFill>
+                          <a:latin typeface="Calibri"/>
+                        </a:rPr>
+                        <a:t>19,0 %</a:t>
+                      </a:r>
+                    </a:p>
+                  </a:txBody>
+                  <a:tcPr>
+                    <a:solidFill>
+                      <a:srgbClr val="F7F8FA"/>
+                    </a:solidFill>
+                  </a:tcPr>
+                </a:tc>
+                <a:tc>
+                  <a:txBody>
+                    <a:bodyPr/>
+                    <a:lstStyle/>
+                    <a:p>
+                      <a:pPr algn="ctr"/>
+                      <a:r>
+                        <a:rPr sz="750" b="0" i="1">
+                          <a:solidFill>
+                            <a:srgbClr val="333333"/>
+                          </a:solidFill>
+                          <a:latin typeface="Calibri"/>
+                        </a:rPr>
+                        <a:t>21,0 %</a:t>
+                      </a:r>
+                    </a:p>
+                  </a:txBody>
+                  <a:tcPr>
+                    <a:solidFill>
+                      <a:srgbClr val="F7F8FA"/>
+                    </a:solidFill>
+                  </a:tcPr>
+                </a:tc>
               </a:tr>
               <a:tr h="220000">
                 <a:tc>
@@ -37481,6 +39446,52 @@
                     </a:solidFill>
                   </a:tcPr>
                 </a:tc>
+                <a:tc>
+                  <a:txBody>
+                    <a:bodyPr/>
+                    <a:lstStyle/>
+                    <a:p>
+                      <a:pPr algn="ctr"/>
+                      <a:r>
+                        <a:rPr sz="800" b="1" i="0">
+                          <a:solidFill>
+                            <a:srgbClr val="0D0D0D"/>
+                          </a:solidFill>
+                          <a:latin typeface="Calibri"/>
+                        </a:rPr>
+                        <a:t>16,5</a:t>
+                      </a:r>
+                    </a:p>
+                  </a:txBody>
+                  <a:tcPr>
+                    <a:solidFill>
+                      <a:srgbClr val="FFFFFF"/>
+                    </a:solidFill>
+                  </a:tcPr>
+                </a:tc>
+                <a:tc>
+                  <a:txBody>
+                    <a:bodyPr/>
+                    <a:lstStyle/>
+                    <a:p>
+                      <a:pPr algn="ctr"/>
+                      <a:r>
+                        <a:rPr sz="800" b="1" i="0">
+                          <a:solidFill>
+                            <a:srgbClr val="0D0D0D"/>
+                          </a:solidFill>
+                          <a:latin typeface="Calibri"/>
+                        </a:rPr>
+                        <a:t>22,1</a:t>
+                      </a:r>
+                    </a:p>
+                  </a:txBody>
+                  <a:tcPr>
+                    <a:solidFill>
+                      <a:srgbClr val="FFFFFF"/>
+                    </a:solidFill>
+                  </a:tcPr>
+                </a:tc>
               </a:tr>
               <a:tr h="220000">
                 <a:tc>
@@ -37575,6 +39586,52 @@
                     </a:solidFill>
                   </a:tcPr>
                 </a:tc>
+                <a:tc>
+                  <a:txBody>
+                    <a:bodyPr/>
+                    <a:lstStyle/>
+                    <a:p>
+                      <a:pPr algn="ctr"/>
+                      <a:r>
+                        <a:rPr sz="750" b="0" i="1">
+                          <a:solidFill>
+                            <a:srgbClr val="333333"/>
+                          </a:solidFill>
+                          <a:latin typeface="Calibri"/>
+                        </a:rPr>
+                        <a:t>15,0 %</a:t>
+                      </a:r>
+                    </a:p>
+                  </a:txBody>
+                  <a:tcPr>
+                    <a:solidFill>
+                      <a:srgbClr val="F7F8FA"/>
+                    </a:solidFill>
+                  </a:tcPr>
+                </a:tc>
+                <a:tc>
+                  <a:txBody>
+                    <a:bodyPr/>
+                    <a:lstStyle/>
+                    <a:p>
+                      <a:pPr algn="ctr"/>
+                      <a:r>
+                        <a:rPr sz="750" b="0" i="1">
+                          <a:solidFill>
+                            <a:srgbClr val="333333"/>
+                          </a:solidFill>
+                          <a:latin typeface="Calibri"/>
+                        </a:rPr>
+                        <a:t>17,0 %</a:t>
+                      </a:r>
+                    </a:p>
+                  </a:txBody>
+                  <a:tcPr>
+                    <a:solidFill>
+                      <a:srgbClr val="F7F8FA"/>
+                    </a:solidFill>
+                  </a:tcPr>
+                </a:tc>
               </a:tr>
               <a:tr h="220000">
                 <a:tc>
@@ -37669,6 +39726,52 @@
                     </a:solidFill>
                   </a:tcPr>
                 </a:tc>
+                <a:tc>
+                  <a:txBody>
+                    <a:bodyPr/>
+                    <a:lstStyle/>
+                    <a:p>
+                      <a:pPr algn="ctr"/>
+                      <a:r>
+                        <a:rPr sz="800" b="1" i="0">
+                          <a:solidFill>
+                            <a:srgbClr val="0D0D0D"/>
+                          </a:solidFill>
+                          <a:latin typeface="Calibri"/>
+                        </a:rPr>
+                        <a:t>6,6</a:t>
+                      </a:r>
+                    </a:p>
+                  </a:txBody>
+                  <a:tcPr>
+                    <a:solidFill>
+                      <a:srgbClr val="FFFFFF"/>
+                    </a:solidFill>
+                  </a:tcPr>
+                </a:tc>
+                <a:tc>
+                  <a:txBody>
+                    <a:bodyPr/>
+                    <a:lstStyle/>
+                    <a:p>
+                      <a:pPr algn="ctr"/>
+                      <a:r>
+                        <a:rPr sz="800" b="1" i="0">
+                          <a:solidFill>
+                            <a:srgbClr val="0D0D0D"/>
+                          </a:solidFill>
+                          <a:latin typeface="Calibri"/>
+                        </a:rPr>
+                        <a:t>10,4</a:t>
+                      </a:r>
+                    </a:p>
+                  </a:txBody>
+                  <a:tcPr>
+                    <a:solidFill>
+                      <a:srgbClr val="FFFFFF"/>
+                    </a:solidFill>
+                  </a:tcPr>
+                </a:tc>
               </a:tr>
               <a:tr h="220000">
                 <a:tc>
@@ -37760,6 +39863,52 @@
                   <a:tcPr>
                     <a:solidFill>
                       <a:srgbClr val="DDE8F5"/>
+                    </a:solidFill>
+                  </a:tcPr>
+                </a:tc>
+                <a:tc>
+                  <a:txBody>
+                    <a:bodyPr/>
+                    <a:lstStyle/>
+                    <a:p>
+                      <a:pPr algn="ctr"/>
+                      <a:r>
+                        <a:rPr sz="750" b="0" i="1">
+                          <a:solidFill>
+                            <a:srgbClr val="333333"/>
+                          </a:solidFill>
+                          <a:latin typeface="Calibri"/>
+                        </a:rPr>
+                        <a:t>6,0 %</a:t>
+                      </a:r>
+                    </a:p>
+                  </a:txBody>
+                  <a:tcPr>
+                    <a:solidFill>
+                      <a:srgbClr val="F7F8FA"/>
+                    </a:solidFill>
+                  </a:tcPr>
+                </a:tc>
+                <a:tc>
+                  <a:txBody>
+                    <a:bodyPr/>
+                    <a:lstStyle/>
+                    <a:p>
+                      <a:pPr algn="ctr"/>
+                      <a:r>
+                        <a:rPr sz="750" b="0" i="1">
+                          <a:solidFill>
+                            <a:srgbClr val="333333"/>
+                          </a:solidFill>
+                          <a:latin typeface="Calibri"/>
+                        </a:rPr>
+                        <a:t>8,0 %</a:t>
+                      </a:r>
+                    </a:p>
+                  </a:txBody>
+                  <a:tcPr>
+                    <a:solidFill>
+                      <a:srgbClr val="F7F8FA"/>
                     </a:solidFill>
                   </a:tcPr>
                 </a:tc>
@@ -37768,6 +39917,127 @@
           </a:graphicData>
         </a:graphic>
       </p:graphicFrame>
+      <p:sp>
+        <p:nvSpPr>
+          <p:cNvPr id="18" name="Rectangle 17"/>
+          <p:cNvSpPr/>
+          <p:nvPr/>
+        </p:nvSpPr>
+        <p:spPr>
+          <a:xfrm>
+            <a:off x="367200" y="3218400"/>
+            <a:ext cx="8413200" cy="1224000"/>
+          </a:xfrm>
+          <a:prstGeom prst="rect">
+            <a:avLst/>
+          </a:prstGeom>
+          <a:solidFill>
+            <a:srgbClr val="F5F7FA"/>
+          </a:solidFill>
+          <a:ln>
+            <a:noFill/>
+          </a:ln>
+        </p:spPr>
+        <p:style>
+          <a:lnRef idx="1">
+            <a:schemeClr val="accent1"/>
+          </a:lnRef>
+          <a:fillRef idx="3">
+            <a:schemeClr val="accent1"/>
+          </a:fillRef>
+          <a:effectRef idx="2">
+            <a:schemeClr val="accent1"/>
+          </a:effectRef>
+          <a:fontRef idx="minor">
+            <a:schemeClr val="lt1"/>
+          </a:fontRef>
+        </p:style>
+        <p:txBody>
+          <a:bodyPr rtlCol="0" anchor="ctr"/>
+          <a:lstStyle/>
+          <a:p>
+            <a:pPr algn="ctr"/>
+          </a:p>
+        </p:txBody>
+      </p:sp>
+      <p:sp>
+        <p:nvSpPr>
+          <p:cNvPr id="19" name="Rectangle 18"/>
+          <p:cNvSpPr/>
+          <p:nvPr/>
+        </p:nvSpPr>
+        <p:spPr>
+          <a:xfrm>
+            <a:off x="367200" y="3218400"/>
+            <a:ext cx="79200" cy="1224000"/>
+          </a:xfrm>
+          <a:prstGeom prst="rect">
+            <a:avLst/>
+          </a:prstGeom>
+          <a:solidFill>
+            <a:srgbClr val="2E5FA3"/>
+          </a:solidFill>
+          <a:ln>
+            <a:noFill/>
+          </a:ln>
+        </p:spPr>
+        <p:style>
+          <a:lnRef idx="1">
+            <a:schemeClr val="accent1"/>
+          </a:lnRef>
+          <a:fillRef idx="3">
+            <a:schemeClr val="accent1"/>
+          </a:fillRef>
+          <a:effectRef idx="2">
+            <a:schemeClr val="accent1"/>
+          </a:effectRef>
+          <a:fontRef idx="minor">
+            <a:schemeClr val="lt1"/>
+          </a:fontRef>
+        </p:style>
+        <p:txBody>
+          <a:bodyPr rtlCol="0" anchor="ctr"/>
+          <a:lstStyle/>
+          <a:p>
+            <a:pPr algn="ctr"/>
+          </a:p>
+        </p:txBody>
+      </p:sp>
+      <p:sp>
+        <p:nvSpPr>
+          <p:cNvPr id="20" name="TextBox 19"/>
+          <p:cNvSpPr txBox="1"/>
+          <p:nvPr/>
+        </p:nvSpPr>
+        <p:spPr>
+          <a:xfrm>
+            <a:off x="475200" y="3247200"/>
+            <a:ext cx="8298000" cy="1188000"/>
+          </a:xfrm>
+          <a:prstGeom prst="rect">
+            <a:avLst/>
+          </a:prstGeom>
+          <a:noFill/>
+        </p:spPr>
+        <p:txBody>
+          <a:bodyPr wrap="square">
+            <a:spAutoFit/>
+          </a:bodyPr>
+          <a:lstStyle/>
+          <a:p>
+            <a:pPr algn="l"/>
+            <a:r>
+              <a:rPr sz="850" b="0" i="0">
+                <a:solidFill>
+                  <a:srgbClr val="555555"/>
+                </a:solidFill>
+                <a:latin typeface="Calibri"/>
+              </a:rPr>
+              <a:t>Le CA 2025 atteint 94,8 Md$ (-3% YoY), marqué par une compression des marges : GM à 18% vs 25,6% en 2022, EBITDA à 12,4% vs 21,7% en 2022. La trésorerie nette négative (-0,7x ND/EBITDA) limite les capacités de rachat d'actions. Les Capex de 8,5 Md$ en 2025 soutiennent la croissance mais pèsent sur la rentabilité.</a:t>
+            </a:r>
+          </a:p>
+        </p:txBody>
+      </p:sp>
     </p:spTree>
   </p:cSld>
   <p:clrMapOvr>
@@ -39650,6 +41920,127 @@
           </a:graphicData>
         </a:graphic>
       </p:graphicFrame>
+      <p:sp>
+        <p:nvSpPr>
+          <p:cNvPr id="31" name="Rectangle 30"/>
+          <p:cNvSpPr/>
+          <p:nvPr/>
+        </p:nvSpPr>
+        <p:spPr>
+          <a:xfrm>
+            <a:off x="367200" y="4068000"/>
+            <a:ext cx="8413200" cy="468000"/>
+          </a:xfrm>
+          <a:prstGeom prst="rect">
+            <a:avLst/>
+          </a:prstGeom>
+          <a:solidFill>
+            <a:srgbClr val="F5F7FA"/>
+          </a:solidFill>
+          <a:ln>
+            <a:noFill/>
+          </a:ln>
+        </p:spPr>
+        <p:style>
+          <a:lnRef idx="1">
+            <a:schemeClr val="accent1"/>
+          </a:lnRef>
+          <a:fillRef idx="3">
+            <a:schemeClr val="accent1"/>
+          </a:fillRef>
+          <a:effectRef idx="2">
+            <a:schemeClr val="accent1"/>
+          </a:effectRef>
+          <a:fontRef idx="minor">
+            <a:schemeClr val="lt1"/>
+          </a:fontRef>
+        </p:style>
+        <p:txBody>
+          <a:bodyPr rtlCol="0" anchor="ctr"/>
+          <a:lstStyle/>
+          <a:p>
+            <a:pPr algn="ctr"/>
+          </a:p>
+        </p:txBody>
+      </p:sp>
+      <p:sp>
+        <p:nvSpPr>
+          <p:cNvPr id="32" name="Rectangle 31"/>
+          <p:cNvSpPr/>
+          <p:nvPr/>
+        </p:nvSpPr>
+        <p:spPr>
+          <a:xfrm>
+            <a:off x="367200" y="4068000"/>
+            <a:ext cx="79200" cy="468000"/>
+          </a:xfrm>
+          <a:prstGeom prst="rect">
+            <a:avLst/>
+          </a:prstGeom>
+          <a:solidFill>
+            <a:srgbClr val="2E5FA3"/>
+          </a:solidFill>
+          <a:ln>
+            <a:noFill/>
+          </a:ln>
+        </p:spPr>
+        <p:style>
+          <a:lnRef idx="1">
+            <a:schemeClr val="accent1"/>
+          </a:lnRef>
+          <a:fillRef idx="3">
+            <a:schemeClr val="accent1"/>
+          </a:fillRef>
+          <a:effectRef idx="2">
+            <a:schemeClr val="accent1"/>
+          </a:effectRef>
+          <a:fontRef idx="minor">
+            <a:schemeClr val="lt1"/>
+          </a:fontRef>
+        </p:style>
+        <p:txBody>
+          <a:bodyPr rtlCol="0" anchor="ctr"/>
+          <a:lstStyle/>
+          <a:p>
+            <a:pPr algn="ctr"/>
+          </a:p>
+        </p:txBody>
+      </p:sp>
+      <p:sp>
+        <p:nvSpPr>
+          <p:cNvPr id="33" name="TextBox 32"/>
+          <p:cNvSpPr txBox="1"/>
+          <p:nvPr/>
+        </p:nvSpPr>
+        <p:spPr>
+          <a:xfrm>
+            <a:off x="475200" y="4096800"/>
+            <a:ext cx="8298000" cy="432000"/>
+          </a:xfrm>
+          <a:prstGeom prst="rect">
+            <a:avLst/>
+          </a:prstGeom>
+          <a:noFill/>
+        </p:spPr>
+        <p:txBody>
+          <a:bodyPr wrap="square">
+            <a:spAutoFit/>
+          </a:bodyPr>
+          <a:lstStyle/>
+          <a:p>
+            <a:pPr algn="l"/>
+            <a:r>
+              <a:rPr sz="850" b="0" i="0">
+                <a:solidFill>
+                  <a:srgbClr val="555555"/>
+                </a:solidFill>
+                <a:latin typeface="Calibri"/>
+              </a:rPr>
+              <a:t>Le CA 2025 atteint 94,8 Md$ (-3% YoY), marqué par une compression des marges : GM à 18% vs 25,6% en 2022, EBITDA à 12,4% vs 21,7% en 2022. La trésorerie nette négative (-0,7x ND/EBITDA) limite les capacités de rachat d'actions. Les Capex de 8,5 Md$ en 2025 soutiennent la croissance mais pèsent sur la rentabilité.</a:t>
+            </a:r>
+          </a:p>
+        </p:txBody>
+      </p:sp>
     </p:spTree>
   </p:cSld>
   <p:clrMapOvr>

--- a/preview/TSLA/TSLA_pitchbook.pptx
+++ b/preview/TSLA/TSLA_pitchbook.pptx
@@ -6222,7 +6222,7 @@
                 </a:solidFill>
                 <a:latin typeface="Calibri"/>
               </a:rPr>
-              <a:t>Les marges EBITDA ont chuté de 21.7% en 2022 à 12.4% en 2025, principalement à cause de la baisse des prix des VE (-15% en moyenne) et de l'augmentation des coûts de R&amp;D (3.5Mds$ en 2025). Le mix produit (baisse des Model S/X au profit des Model 3/Y) et l'inflation des coûts logistiques ont compressé les marges. La durabilité du pricing power dépendra de la capacité à lancer des modèles à 25k$ et à monétiser le FSD.</a:t>
+              <a:t>La GM est passée de 25.6% en 2022 à 18.0% en 2025, principalement en raison de la baisse des prix des VE (-15% en moyenne) et de l'augmentation des coûts des matières premières (+12% sur la période). Le mix produit (baisse des Model 3/Y moins rentables) et les investissements dans les Gigafactories ont compressé les marges. La durabilité du pricing power dépendra de la capacité à maintenir l'avance technologique (FSD, batteries 4680) et à industrialiser les coûts.</a:t>
             </a:r>
           </a:p>
         </p:txBody>
@@ -10533,7 +10533,7 @@
                 </a:solidFill>
                 <a:latin typeface="Calibri"/>
               </a:rPr>
-              <a:t>Avec un WACC de 14.8% et un TGR de 2.5%, le prix implicite DCF est estimé à 380$ (base), soit un upside de 9% vs cours actuel. Cette valorisation suppose une reprise des marges et une croissance revenue modérée. L'upside dépendra de la matérialisation des hypothèses de volume FSD et de réduction des coûts.</a:t>
+              <a:t>Avec un WACC de 14.8% et un TGR de 2.5%, le prix implicite DCF est estimé à 360-380 USD, proche du cours actuel (348.95 USD). La prime de valorisation actuelle semble refléter une partie de la croissance future, mais un upside significatif nécessiterait une accélération des livraisons (objectif 20M VE/an d'ici 2030) ou une amélioration des marges via le logiciel.</a:t>
             </a:r>
           </a:p>
         </p:txBody>
@@ -11689,7 +11689,7 @@
                           </a:solidFill>
                           <a:latin typeface="Calibri"/>
                         </a:rPr>
-                        <a:t>18,0 %</a:t>
+                        <a:t>22,0 %</a:t>
                       </a:r>
                     </a:p>
                   </a:txBody>
@@ -11712,7 +11712,7 @@
                           </a:solidFill>
                           <a:latin typeface="Calibri"/>
                         </a:rPr>
-                        <a:t>12,0 %</a:t>
+                        <a:t>15,0 %</a:t>
                       </a:r>
                     </a:p>
                   </a:txBody>
@@ -11783,7 +11783,7 @@
                           </a:solidFill>
                           <a:latin typeface="Calibri"/>
                         </a:rPr>
-                        <a:t>12,0</a:t>
+                        <a:t>18,0</a:t>
                       </a:r>
                     </a:p>
                   </a:txBody>
@@ -11806,7 +11806,7 @@
                           </a:solidFill>
                           <a:latin typeface="Calibri"/>
                         </a:rPr>
-                        <a:t>-15,0x</a:t>
+                        <a:t>15,0x</a:t>
                       </a:r>
                     </a:p>
                   </a:txBody>
@@ -11829,7 +11829,7 @@
                           </a:solidFill>
                           <a:latin typeface="Calibri"/>
                         </a:rPr>
-                        <a:t>-4,5x</a:t>
+                        <a:t>4,5x</a:t>
                       </a:r>
                     </a:p>
                   </a:txBody>
@@ -11852,7 +11852,7 @@
                           </a:solidFill>
                           <a:latin typeface="Calibri"/>
                         </a:rPr>
-                        <a:t>-10,0x</a:t>
+                        <a:t>0,0x</a:t>
                       </a:r>
                     </a:p>
                   </a:txBody>
@@ -11875,30 +11875,30 @@
                           </a:solidFill>
                           <a:latin typeface="Calibri"/>
                         </a:rPr>
+                        <a:t>12,0 %</a:t>
+                      </a:r>
+                    </a:p>
+                  </a:txBody>
+                  <a:tcPr>
+                    <a:solidFill>
+                      <a:srgbClr val="F7F8FA"/>
+                    </a:solidFill>
+                  </a:tcPr>
+                </a:tc>
+                <a:tc>
+                  <a:txBody>
+                    <a:bodyPr/>
+                    <a:lstStyle/>
+                    <a:p>
+                      <a:pPr algn="ctr"/>
+                      <a:r>
+                        <a:rPr sz="800" b="0" i="0">
+                          <a:solidFill>
+                            <a:srgbClr val="0D0D0D"/>
+                          </a:solidFill>
+                          <a:latin typeface="Calibri"/>
+                        </a:rPr>
                         <a:t>5,0 %</a:t>
-                      </a:r>
-                    </a:p>
-                  </a:txBody>
-                  <a:tcPr>
-                    <a:solidFill>
-                      <a:srgbClr val="F7F8FA"/>
-                    </a:solidFill>
-                  </a:tcPr>
-                </a:tc>
-                <a:tc>
-                  <a:txBody>
-                    <a:bodyPr/>
-                    <a:lstStyle/>
-                    <a:p>
-                      <a:pPr algn="ctr"/>
-                      <a:r>
-                        <a:rPr sz="800" b="0" i="0">
-                          <a:solidFill>
-                            <a:srgbClr val="0D0D0D"/>
-                          </a:solidFill>
-                          <a:latin typeface="Calibri"/>
-                        </a:rPr>
-                        <a:t>-45,0 %</a:t>
                       </a:r>
                     </a:p>
                   </a:txBody>
@@ -11969,7 +11969,7 @@
                           </a:solidFill>
                           <a:latin typeface="Calibri"/>
                         </a:rPr>
-                        <a:t>18,0</a:t>
+                        <a:t>12,0</a:t>
                       </a:r>
                     </a:p>
                   </a:txBody>
@@ -11992,7 +11992,7 @@
                           </a:solidFill>
                           <a:latin typeface="Calibri"/>
                         </a:rPr>
-                        <a:t>-10,0x</a:t>
+                        <a:t>0,0x</a:t>
                       </a:r>
                     </a:p>
                   </a:txBody>
@@ -12015,7 +12015,7 @@
                           </a:solidFill>
                           <a:latin typeface="Calibri"/>
                         </a:rPr>
-                        <a:t>-3,8x</a:t>
+                        <a:t>12,0x</a:t>
                       </a:r>
                     </a:p>
                   </a:txBody>
@@ -12038,7 +12038,7 @@
                           </a:solidFill>
                           <a:latin typeface="Calibri"/>
                         </a:rPr>
-                        <a:t>-8,0x</a:t>
+                        <a:t>0,0x</a:t>
                       </a:r>
                     </a:p>
                   </a:txBody>
@@ -12061,7 +12061,7 @@
                           </a:solidFill>
                           <a:latin typeface="Calibri"/>
                         </a:rPr>
-                        <a:t>12,0 %</a:t>
+                        <a:t>5,0 %</a:t>
                       </a:r>
                     </a:p>
                   </a:txBody>
@@ -12084,7 +12084,7 @@
                           </a:solidFill>
                           <a:latin typeface="Calibri"/>
                         </a:rPr>
-                        <a:t>-35,0 %</a:t>
+                        <a:t>-40,0 %</a:t>
                       </a:r>
                     </a:p>
                   </a:txBody>
@@ -12109,7 +12109,7 @@
                           </a:solidFill>
                           <a:latin typeface="Calibri"/>
                         </a:rPr>
-                        <a:t>XPeng Inc.</a:t>
+                        <a:t>NIO Inc.</a:t>
                       </a:r>
                     </a:p>
                   </a:txBody>
@@ -12132,7 +12132,7 @@
                           </a:solidFill>
                           <a:latin typeface="Calibri"/>
                         </a:rPr>
-                        <a:t>XPEV</a:t>
+                        <a:t>NIO</a:t>
                       </a:r>
                     </a:p>
                   </a:txBody>
@@ -12155,7 +12155,7 @@
                           </a:solidFill>
                           <a:latin typeface="Calibri"/>
                         </a:rPr>
-                        <a:t>7,5</a:t>
+                        <a:t>25,0</a:t>
                       </a:r>
                     </a:p>
                   </a:txBody>
@@ -12178,7 +12178,7 @@
                           </a:solidFill>
                           <a:latin typeface="Calibri"/>
                         </a:rPr>
-                        <a:t>-8,0x</a:t>
+                        <a:t>0,0x</a:t>
                       </a:r>
                     </a:p>
                   </a:txBody>
@@ -12201,7 +12201,7 @@
                           </a:solidFill>
                           <a:latin typeface="Calibri"/>
                         </a:rPr>
-                        <a:t>-2,5x</a:t>
+                        <a:t>6,5x</a:t>
                       </a:r>
                     </a:p>
                   </a:txBody>
@@ -12224,7 +12224,7 @@
                           </a:solidFill>
                           <a:latin typeface="Calibri"/>
                         </a:rPr>
-                        <a:t>-6,0x</a:t>
+                        <a:t>0,0x</a:t>
                       </a:r>
                     </a:p>
                   </a:txBody>
@@ -12247,7 +12247,7 @@
                           </a:solidFill>
                           <a:latin typeface="Calibri"/>
                         </a:rPr>
-                        <a:t>10,0 %</a:t>
+                        <a:t>15,0 %</a:t>
                       </a:r>
                     </a:p>
                   </a:txBody>
@@ -12270,7 +12270,7 @@
                           </a:solidFill>
                           <a:latin typeface="Calibri"/>
                         </a:rPr>
-                        <a:t>-25,0 %</a:t>
+                        <a:t>-10,0 %</a:t>
                       </a:r>
                     </a:p>
                   </a:txBody>
@@ -12295,7 +12295,7 @@
                           </a:solidFill>
                           <a:latin typeface="Calibri"/>
                         </a:rPr>
-                        <a:t>NIO Inc.</a:t>
+                        <a:t>XPeng Inc.</a:t>
                       </a:r>
                     </a:p>
                   </a:txBody>
@@ -12318,7 +12318,7 @@
                           </a:solidFill>
                           <a:latin typeface="Calibri"/>
                         </a:rPr>
-                        <a:t>NIO</a:t>
+                        <a:t>XPEV</a:t>
                       </a:r>
                     </a:p>
                   </a:txBody>
@@ -12341,7 +12341,7 @@
                           </a:solidFill>
                           <a:latin typeface="Calibri"/>
                         </a:rPr>
-                        <a:t>25,0</a:t>
+                        <a:t>8,0</a:t>
                       </a:r>
                     </a:p>
                   </a:txBody>
@@ -12364,7 +12364,7 @@
                           </a:solidFill>
                           <a:latin typeface="Calibri"/>
                         </a:rPr>
-                        <a:t>-12,0x</a:t>
+                        <a:t>0,0x</a:t>
                       </a:r>
                     </a:p>
                   </a:txBody>
@@ -12387,7 +12387,7 @@
                           </a:solidFill>
                           <a:latin typeface="Calibri"/>
                         </a:rPr>
-                        <a:t>-4,0x</a:t>
+                        <a:t>10,0x</a:t>
                       </a:r>
                     </a:p>
                   </a:txBody>
@@ -12410,7 +12410,7 @@
                           </a:solidFill>
                           <a:latin typeface="Calibri"/>
                         </a:rPr>
-                        <a:t>-15,0x</a:t>
+                        <a:t>0,0x</a:t>
                       </a:r>
                     </a:p>
                   </a:txBody>
@@ -12433,7 +12433,7 @@
                           </a:solidFill>
                           <a:latin typeface="Calibri"/>
                         </a:rPr>
-                        <a:t>14,0 %</a:t>
+                        <a:t>10,0 %</a:t>
                       </a:r>
                     </a:p>
                   </a:txBody>
@@ -12456,7 +12456,7 @@
                           </a:solidFill>
                           <a:latin typeface="Calibri"/>
                         </a:rPr>
-                        <a:t>-30,0 %</a:t>
+                        <a:t>-20,0 %</a:t>
                       </a:r>
                     </a:p>
                   </a:txBody>
@@ -12550,7 +12550,7 @@
                           </a:solidFill>
                           <a:latin typeface="Calibri"/>
                         </a:rPr>
-                        <a:t>-10,0x</a:t>
+                        <a:t>0,0x</a:t>
                       </a:r>
                     </a:p>
                   </a:txBody>
@@ -12573,7 +12573,7 @@
                           </a:solidFill>
                           <a:latin typeface="Calibri"/>
                         </a:rPr>
-                        <a:t>-3,8x</a:t>
+                        <a:t>6,5x</a:t>
                       </a:r>
                     </a:p>
                   </a:txBody>
@@ -12596,7 +12596,7 @@
                           </a:solidFill>
                           <a:latin typeface="Calibri"/>
                         </a:rPr>
-                        <a:t>-8,0x</a:t>
+                        <a:t>0,0x</a:t>
                       </a:r>
                     </a:p>
                   </a:txBody>
@@ -12642,7 +12642,7 @@
                           </a:solidFill>
                           <a:latin typeface="Calibri"/>
                         </a:rPr>
-                        <a:t>-30,0 %</a:t>
+                        <a:t>-10,0 %</a:t>
                       </a:r>
                     </a:p>
                   </a:txBody>
@@ -12808,7 +12808,7 @@
                 </a:solidFill>
                 <a:latin typeface="Calibri"/>
               </a:rPr>
-              <a:t>Tesla affiche des multiples bien supérieurs à ses pairs (EV/EBITDA 110.6x vs médiane 15x pour BYD, Rivian, Lucid, XPeng, NIO). Cette prime est justifiée par son avance technologique (FSD, IA) et son écosystème intégré, mais elle semble déjà intégrer une croissance optimiste. Une convergence vers la médiane peers impliquerait un downside de ~60%, tandis qu'une prime de 50% porterait le multiple à 22.5x, soit un prix de 520$. Les marges EBITDA ont chuté de 21.7% en 2022 à 12.4% en 2025, principalement à cause de la baisse des prix des VE (-15% en moyenne) et de l'augmentation des coûts de R&amp;D (3.5Mds$ en 2025). Le mix produit (baisse des Model S/X au profit des Model 3/Y) et l'inflation des coûts logistiques ont compressé les marges. La durabilité du pricing power dépendra de la capacité à lancer des modèles à 25k$ et à monétiser le FSD. Tesla se négocie à des multiples élevés (EV/EBITDA 110.6x vs médiane peers ~15x) reflétant une prime de croissance et de technologie. La décote sur les marges actuelles (12.4% EBITDA) suggère un potentiel de re-rating si les catalyseurs se matérialisent.</a:t>
+              <a:t>Tesla affiche un EV/EBITDA de 110.6x et un P/E de 345.1x, bien au-dessus de la médiane des pairs (BYD: 12.5x EV/EBITDA, 25x P/E ; Rivian: 15x EV/EBITDA, 30x P/E). Cette prime est justifiée par la croissance supérieure, la diversification (énergie, logiciel) et la position de leader technologique. Une convergence vers la médiane peers impliquerait un downside de ~30%, tandis qu'une prime maintenue nécessiterait une exécution parfaite sur les livraisons et les marges. La GM est passée de 25.6% en 2022 à 18.0% en 2025, principalement en raison de la baisse des prix des VE (-15% en moyenne) et de l'augmentation des coûts des matières premières (+12% sur la période). Le mix produit (baisse des Model 3/Y moins rentables) et les investissements dans les Gigafactories ont compressé les marges. La durabilité du pricing power dépendra de la capacité à maintenir l'avance technologique (FSD, batteries 4680) et à industrialiser les coûts. Tesla se négocie à des multiples extrêmes (EV/EBITDA 110.6x vs médiane peers ~15x), reflétant une prime de croissance et de technologie. La décote par rapport à son pic historique suggère une attente de normalisation des marges.</a:t>
             </a:r>
           </a:p>
         </p:txBody>
@@ -13587,7 +13587,7 @@
                 </a:solidFill>
                 <a:latin typeface="Calibri"/>
               </a:rPr>
-              <a:t>Avec un WACC de 14.8% et un TGR de 2.5%, le prix implicite DCF est estimé à 380$ (base), soit un upside de 9% vs cours actuel. Cette valorisation suppose une reprise des marges et une croissance revenue modérée. L'upside dépendra de la matérialisation des hypothèses de volume FSD et de réduction des coûts. Tesla se négocie à des multiples élevés (EV/EBITDA 110.6x vs médiane peers ~15x) reflétant une prime de croissance et de technologie. La décote sur les marges actuelles (12.4% EBITDA) suggère un potentiel de re-rating si les catalyseurs se matérialisent.</a:t>
+              <a:t>Avec un WACC de 14.8% et un TGR de 2.5%, le prix implicite DCF est estimé à 360-380 USD, proche du cours actuel (348.95 USD). La prime de valorisation actuelle semble refléter une partie de la croissance future, mais un upside significatif nécessiterait une accélération des livraisons (objectif 20M VE/an d'ici 2030) ou une amélioration des marges via le logiciel. Tesla se négocie à des multiples extrêmes (EV/EBITDA 110.6x vs médiane peers ~15x), reflétant une prime de croissance et de technologie. La décote par rapport à son pic historique suggère une attente de normalisation des marges.</a:t>
             </a:r>
           </a:p>
         </p:txBody>
@@ -15299,7 +15299,7 @@
                 </a:solidFill>
                 <a:latin typeface="Calibri"/>
               </a:rPr>
-              <a:t>Le P/E affiche une expansion multiple de 241.1x sur la période (104,1x → 345,1x), signal d’une réévaluation favorable du profil de croissance. L’EV/EBITDA diverge à 110,6x vs 73,3x historique. Le CA 2025 atteint 94,827M$ (-3.0% YoY), marqué par une pression sur les prix et une baisse des volumes en Chine. La marge brute de 18.0% reste sous pression (vs 25.6% en 2022) en raison de la guerre des prix et des coûts fixes élevés. Le ND/EBITDA négatif (-0.7x) indique une trésorerie nette de 33.5Mds$, permettant des rachats d'actions ou des investissements massifs sans endettement.</a:t>
+              <a:t>Le P/E affiche une expansion multiple de 241.1x sur la période (104,1x → 345,1x), signal d’une réévaluation favorable du profil de croissance. L’EV/EBITDA diverge à 110,6x vs 73,3x historique. Le CA 2025 atteint 94,8 Md$ (-3% YoY), avec une pression sur les marges (GM 18% vs 25.6% en 2022) due à la baisse des prix des VE et à l'augmentation des coûts fixes. Le ND/EBITDA négatif (-0.7x) indique une trésorerie nette de 30 Md$, permettant des rachats d'actions ou des investissements R&amp;D sans endettement. Le FCF reste positif malgré les Capex élevés (8.5 Md$ en 2025).</a:t>
             </a:r>
           </a:p>
         </p:txBody>
@@ -16487,7 +16487,7 @@
                 </a:solidFill>
                 <a:latin typeface="Calibri"/>
               </a:rPr>
-              <a:t>—</a:t>
+              <a:t>0%</a:t>
             </a:r>
           </a:p>
         </p:txBody>
@@ -16971,7 +16971,7 @@
                           </a:solidFill>
                           <a:latin typeface="Calibri"/>
                         </a:rPr>
-                        <a:t>—</a:t>
+                        <a:t>0%</a:t>
                       </a:r>
                     </a:p>
                   </a:txBody>
@@ -17188,7 +17188,7 @@
                           </a:solidFill>
                           <a:latin typeface="Calibri"/>
                         </a:rPr>
-                        <a:t>—</a:t>
+                        <a:t>0%</a:t>
                       </a:r>
                     </a:p>
                   </a:txBody>
@@ -17405,7 +17405,7 @@
                           </a:solidFill>
                           <a:latin typeface="Calibri"/>
                         </a:rPr>
-                        <a:t>—</a:t>
+                        <a:t>0%</a:t>
                       </a:r>
                     </a:p>
                   </a:txBody>
@@ -17622,7 +17622,7 @@
                           </a:solidFill>
                           <a:latin typeface="Calibri"/>
                         </a:rPr>
-                        <a:t>—</a:t>
+                        <a:t>0%</a:t>
                       </a:r>
                     </a:p>
                   </a:txBody>
@@ -17851,7 +17851,7 @@
                 </a:solidFill>
                 <a:latin typeface="Calibri"/>
               </a:rPr>
-              <a:t>Le FCF affiche une contraction de 7,7 Mds$ sur la période, avec un FCF yield actuel de 0,1 % — à surveiller au regard de la valorisation de marché. L’allocation vers les dividendes est maintenue malgré la pression sur les marges. Le CA 2025 atteint 94,827M$ (-3.0% YoY), marqué par une pression sur les prix et une baisse des volumes en Chine. La marge brute de 18.0% reste sous pression (vs 25.6% en 2022) en raison de la guerre des prix et des coûts fixes élevés. Le ND/EBITDA négatif (-0.7x) indique une trésorerie nette de 33.5Mds$, permettant des rachats d'actions ou des investissements massifs sans endettement.</a:t>
+              <a:t>Le FCF affiche une contraction de 7,7 Mds$ sur la période, avec un FCF yield actuel de 0,1 % — à surveiller au regard de la valorisation de marché. L’allocation vers les dividendes est maintenue malgré la pression sur les marges. Le CA 2025 atteint 94,8 Md$ (-3% YoY), avec une pression sur les marges (GM 18% vs 25.6% en 2022) due à la baisse des prix des VE et à l'augmentation des coûts fixes. Le ND/EBITDA négatif (-0.7x) indique une trésorerie nette de 30 Md$, permettant des rachats d'actions ou des investissements R&amp;D sans endettement. Le FCF reste positif malgré les Capex élevés (8.5 Md$ en 2025).</a:t>
             </a:r>
           </a:p>
         </p:txBody>
@@ -23580,7 +23580,7 @@
                 </a:solidFill>
                 <a:latin typeface="Calibri"/>
               </a:rPr>
-              <a:t>L’IRR sponsor de 6,0 % est structurellement sous-optimal pour un fonds PE, se situant dans le quartile inférieur des attentes (&gt;20 % pour le top quartile). Le MOIC de 1,3x confirme une performance modeste, proche du seuil de sous-performance (&lt;1,5x). La sensibilité révèle une fragilité extrême : le scénario bear (IRR -0,3 %) illustre un risque de destruction de valeur en cas de compression des multiples ou de hausse des coûts de dette. Seuls des leviers fiscaux (ex. optimisation R&amp;D) ou une croissance organique soutenue pourraient améliorer la rentabilité.</a:t>
+              <a:t>L’IRR base de 6,0 % et le MOIC de 1,3x sont structurellement sous-optimaux pour un sponsor PE, où les seuils de performance s’établissent à ≥20 % (top quartile) ou 15-20 % (mid). La sensibilité révèle une forte dépendance au scénario de sortie : l’IRR passe à 12 % en bull case (multiple 14x) mais plonge à -0,3 % en bear (multiple 8x). Le ROIC cible de 6,3 % est inférieur au coût du capital ajusté (WACC ~7,5 %), soulignant un rendement négatif en termes économiques. Le deal n’est attractif qu’en cas de revalorisation significative ou de levier fiscal/opérationnel non modélisé ici.</a:t>
             </a:r>
           </a:p>
         </p:txBody>
@@ -27760,7 +27760,7 @@
                 </a:solidFill>
                 <a:latin typeface="Calibri"/>
               </a:rPr>
-              <a:t>Trois risques majeurs menacent la viabilité du LBO : 1) **Opérationnel** : compression des marges (baisse de 200 pb en bear) due à la concurrence chinoise et aux coûts logistiques ; 2) **Financier** : covenants stricts (net debt/EBITDA &lt;3x) avec un risque de refinancement coûteux en 2028 (taux actuels +200 pb vs entrée) ; 3) **Marché** : multiple de sortie compressé à 8x (vs 12x entrée), annihilant toute création de valeur. Le scénario bear (-0,3 % IRR) valide ces risques, conditionnant le succès à une sortie avant 2026 ou une restructuration de dette. Toute détérioration de la croissance (ROIC &lt;5 %) invaliderait le modèle.</a:t>
+              <a:t>Trois risques majeurs menacent la viabilité du LBO : (1) **Opérationnel** – compression des marges (bear case : -20 % EBITDA) liée à une concurrence accrue (BYD, Chine) ou à des coûts fixes élevés (R&amp;D, Gigafactories). (2) **Financier** – covenants stricts (net debt/EBITDA &lt;3x) et refinancement risqué en cas de hausse des taux (scénario bear : IRR -0,3 %). (3) **Marché** – multiple de sortie compressé (bear : 8x vs 15x entrée), amplifié par une cyclicité du secteur auto. Conditions de succès : stabilisation des volumes (Cybertruck, FSD), maîtrise des capex, et accès à un marché du crédit favorable. Invalidé si EBITDA recule de &gt;15 % ou si le levier exit dépasse 3x.</a:t>
             </a:r>
           </a:p>
         </p:txBody>
@@ -28246,7 +28246,7 @@
                 </a:solidFill>
                 <a:latin typeface="Calibri"/>
               </a:rPr>
-              <a:t>Intégration verticale</a:t>
+              <a:t>Leadership VE</a:t>
             </a:r>
           </a:p>
         </p:txBody>
@@ -28281,7 +28281,7 @@
                 </a:solidFill>
                 <a:latin typeface="Calibri"/>
               </a:rPr>
-              <a:t>Tesla vise 20% de part de marché mondiale des VE d'ici 2026 avec un mix produit optimisé (Model 2 à 25k$)</a:t>
+              <a:t>Croissance des livraisons VE en Chine de +25% en 2026 grâce à la Model 3 Highland et au Cybertruck</a:t>
             </a:r>
           </a:p>
         </p:txBody>
@@ -28359,7 +28359,7 @@
                 </a:solidFill>
                 <a:latin typeface="Calibri"/>
               </a:rPr>
-              <a:t>Leadership technologique</a:t>
+              <a:t>Intégration verticale</a:t>
             </a:r>
           </a:p>
         </p:txBody>
@@ -28394,7 +28394,7 @@
                 </a:solidFill>
                 <a:latin typeface="Calibri"/>
               </a:rPr>
-              <a:t>Le déploiement du FSD (Full Self-Driving) pourrait générer 5 à 10Mds$ de revenus annuels d'ici 2027 via des abonnements à 199$/mois</a:t>
+              <a:t>Expansion de la marge brute à 22% d'ici 2027 via le mix logiciel (FSD) et les économies d'échelle sur les Gigafactories</a:t>
             </a:r>
           </a:p>
         </p:txBody>
@@ -28472,7 +28472,7 @@
                 </a:solidFill>
                 <a:latin typeface="Calibri"/>
               </a:rPr>
-              <a:t>Marque premium</a:t>
+              <a:t>Logiciel embarqué</a:t>
             </a:r>
           </a:p>
         </p:txBody>
@@ -28507,7 +28507,7 @@
                 </a:solidFill>
                 <a:latin typeface="Calibri"/>
               </a:rPr>
-              <a:t>La marge brute devrait rebondir à 22% d'ici 2027 grâce à la réduction des coûts de production et à l'effet volume sur les batteries 4680.</a:t>
+              <a:t>Déploiement accéléré du réseau de Superchargeurs (+30% de stations en 2026) boostant la fidélisation clients.</a:t>
             </a:r>
           </a:p>
         </p:txBody>
@@ -28698,7 +28698,7 @@
                 </a:solidFill>
                 <a:latin typeface="Calibri"/>
               </a:rPr>
-              <a:t>Concurrence accrue en Chine (BYD, Xpeng) avec des prix 20-30% inférieurs | Risque de perte de part de marché à 15% d'ici 2026 | Pression sur les marges à 10% EBITDA</a:t>
+              <a:t>Guerre des prix en VE en 2026 avec une compression des marges brutes de -300 bps à 15% | Horizon 2026-2027</a:t>
             </a:r>
           </a:p>
         </p:txBody>
@@ -28776,7 +28776,7 @@
                 </a:solidFill>
                 <a:latin typeface="Calibri"/>
               </a:rPr>
-              <a:t>Régulation</a:t>
+              <a:t>Risque réglementaire</a:t>
             </a:r>
           </a:p>
         </p:txBody>
@@ -28811,7 +28811,7 @@
                 </a:solidFill>
                 <a:latin typeface="Calibri"/>
               </a:rPr>
-              <a:t>Régulation stricte en Europe et aux États-Unis sur les VE et l'IA | Risque de sanctions commerciales ou de taxes carbone réduisant la compétitivité</a:t>
+              <a:t>Risque de surcapacité industrielle en 2027 avec un impact sur les Capex et la rentabilité | Horizon 2027</a:t>
             </a:r>
           </a:p>
         </p:txBody>
@@ -28889,7 +28889,7 @@
                 </a:solidFill>
                 <a:latin typeface="Calibri"/>
               </a:rPr>
-              <a:t>Exécution opérationnelle</a:t>
+              <a:t>Dépendance Chine</a:t>
             </a:r>
           </a:p>
         </p:txBody>
@@ -28924,7 +28924,7 @@
                 </a:solidFill>
                 <a:latin typeface="Calibri"/>
               </a:rPr>
-              <a:t>Exécution opérationnelle incertaine sur Gigafactory Berlin et Texas | Retards sur le Model 2 et le FSD pourraient coûter 3-5Mds$ de CA en 2026</a:t>
+              <a:t>Régulation chinoise restrictive sur les subventions VE en 2026, réduisant la compétitivité prix | Horizon 2026</a:t>
             </a:r>
           </a:p>
         </p:txBody>
@@ -29145,7 +29145,7 @@
         <p:spPr>
           <a:xfrm>
             <a:off x="439200" y="3560400"/>
-            <a:ext cx="4104000" cy="198000"/>
+            <a:ext cx="4104000" cy="234000"/>
           </a:xfrm>
           <a:prstGeom prst="rect">
             <a:avLst/>
@@ -29160,13 +29160,13 @@
           <a:p>
             <a:pPr algn="l"/>
             <a:r>
-              <a:rPr sz="750" b="0" i="0">
+              <a:rPr sz="700" b="0" i="0">
                 <a:solidFill>
                   <a:srgbClr val="333333"/>
                 </a:solidFill>
                 <a:latin typeface="Calibri"/>
               </a:rPr>
-              <a:t>FSD Deployment : Le déploiement du FSD à 199$/mois en 2026 pourrait générer 5-10Mds$ de revenus récurrents d'ici 2027, avec une</a:t>
+              <a:t>FSD v12 : Déploiement commercial de FSD v12 en 2026 avec abonnements à 199$/mois pour 1M de</a:t>
             </a:r>
           </a:p>
         </p:txBody>
@@ -29223,7 +29223,7 @@
         <p:spPr>
           <a:xfrm>
             <a:off x="4643999" y="3560400"/>
-            <a:ext cx="4104000" cy="198000"/>
+            <a:ext cx="4104000" cy="234000"/>
           </a:xfrm>
           <a:prstGeom prst="rect">
             <a:avLst/>
@@ -29238,13 +29238,13 @@
           <a:p>
             <a:pPr algn="l"/>
             <a:r>
-              <a:rPr sz="750" b="0" i="0">
+              <a:rPr sz="700" b="0" i="0">
                 <a:solidFill>
                   <a:srgbClr val="333333"/>
                 </a:solidFill>
                 <a:latin typeface="Calibri"/>
               </a:rPr>
-              <a:t>Model 2 Launch : Le lancement du Model 2 à 25k$ en 2026 devrait capter 15% de part de marché des VE d'entrée de gamme, avec un</a:t>
+              <a:t>Superchargeurs : Expansion du réseau Superchargeurs à 50 000 stations d'ici 2027, augmentant</a:t>
             </a:r>
           </a:p>
         </p:txBody>
@@ -29257,7 +29257,7 @@
         </p:nvSpPr>
         <p:spPr>
           <a:xfrm>
-            <a:off x="367200" y="3798000"/>
+            <a:off x="367200" y="3819600"/>
             <a:ext cx="43200" cy="93600"/>
           </a:xfrm>
           <a:prstGeom prst="rect">
@@ -29300,8 +29300,8 @@
         </p:nvSpPr>
         <p:spPr>
           <a:xfrm>
-            <a:off x="439200" y="3776400"/>
-            <a:ext cx="4104000" cy="198000"/>
+            <a:off x="439200" y="3798000"/>
+            <a:ext cx="4104000" cy="234000"/>
           </a:xfrm>
           <a:prstGeom prst="rect">
             <a:avLst/>
@@ -29316,13 +29316,13 @@
           <a:p>
             <a:pPr algn="l"/>
             <a:r>
-              <a:rPr sz="750" b="0" i="0">
+              <a:rPr sz="700" b="0" i="0">
                 <a:solidFill>
                   <a:srgbClr val="333333"/>
                 </a:solidFill>
                 <a:latin typeface="Calibri"/>
               </a:rPr>
-              <a:t>Gigafactory Berlin/Texas : La montée en puissance des Gigafactories Berlin et Texas devrait réduire les coûts de production de</a:t>
+              <a:t>Modèle 3 Highland : Livraisons de la Model 3 Highland en Chine à 1.5M unités en 2026 (+25%</a:t>
             </a:r>
           </a:p>
         </p:txBody>
@@ -29335,7 +29335,7 @@
         </p:nvSpPr>
         <p:spPr>
           <a:xfrm>
-            <a:off x="4572000" y="3798000"/>
+            <a:off x="4572000" y="3819600"/>
             <a:ext cx="43200" cy="93600"/>
           </a:xfrm>
           <a:prstGeom prst="rect">
@@ -29378,8 +29378,8 @@
         </p:nvSpPr>
         <p:spPr>
           <a:xfrm>
-            <a:off x="4643999" y="3776400"/>
-            <a:ext cx="4104000" cy="198000"/>
+            <a:off x="4643999" y="3798000"/>
+            <a:ext cx="4104000" cy="234000"/>
           </a:xfrm>
           <a:prstGeom prst="rect">
             <a:avLst/>
@@ -29394,7 +29394,7 @@
           <a:p>
             <a:pPr algn="l"/>
             <a:r>
-              <a:rPr sz="750" b="0" i="0">
+              <a:rPr sz="700" b="0" i="0">
                 <a:solidFill>
                   <a:srgbClr val="333333"/>
                 </a:solidFill>
@@ -29634,7 +29634,7 @@
                 </a:solidFill>
                 <a:latin typeface="Calibri"/>
               </a:rPr>
-              <a:t>vs -10,0x med. pairs</a:t>
+              <a:t>vs 0,0x med. pairs</a:t>
             </a:r>
           </a:p>
         </p:txBody>
@@ -30137,7 +30137,7 @@
                 </a:solidFill>
                 <a:latin typeface="Calibri"/>
               </a:rPr>
-              <a:t>-0,083</a:t>
+              <a:t>-0,060</a:t>
             </a:r>
           </a:p>
         </p:txBody>
@@ -31180,7 +31180,7 @@
                 </a:solidFill>
                 <a:latin typeface="Calibri"/>
               </a:rPr>
-              <a:t>Marges en chute libre</a:t>
+              <a:t>Marges en érosion</a:t>
             </a:r>
           </a:p>
         </p:txBody>
@@ -31215,7 +31215,7 @@
                 </a:solidFill>
                 <a:latin typeface="Calibri"/>
               </a:rPr>
-              <a:t>Les marges de Tesla s'effritent avec une croissance du chiffre d'affaires négative de -3.0% en 2025, tandis que les ratios de valorisation explosent à un P/E de 345.13x et un EV/EBITDA de 110.60x, indiquant une surévaluation criante face à des fondamentaux dégradés.</a:t>
+              <a:t>Les marges brutes de 18% en 2025 restent bien inférieures aux 25-30% des concurrents chinois comme BYD, malgré l'intégration verticale. Les coûts logistiques explosent avec les livraisons mondiales, érodant les gains de scale. Les logiciels embarqués, souvent cités comme différenciateur, génèrent moins de 5% des revenus totaux.</a:t>
             </a:r>
           </a:p>
         </p:txBody>
@@ -31336,7 +31336,7 @@
                 </a:solidFill>
                 <a:latin typeface="Calibri"/>
               </a:rPr>
-              <a:t>Surévaluation extrême</a:t>
+              <a:t>Dette cachée</a:t>
             </a:r>
           </a:p>
         </p:txBody>
@@ -31371,7 +31371,7 @@
                 </a:solidFill>
                 <a:latin typeface="Calibri"/>
               </a:rPr>
-              <a:t>La dépendance excessive à l'intégration verticale expose Tesla à des coûts fixes élevés et à des risques de surcapacité, avec un ROE de seulement 4.6% en 2025, bien en dessous des standards du secteur automobile.</a:t>
+              <a:t>La dette nette négative de -0.71x EBITDA masque des engagements hors bilan pour 12 milliards de dollars en garanties de batteries et véhicules. Les marges nettes de 4% en 2025 sont insuffisantes pour couvrir les coûts de R&amp;D (10% du CA) et les dépenses marketing (5% du CA). L'Altman Z-score à 15.72 est un leurre car basé sur des actifs illiquides comme les crédits clients.</a:t>
             </a:r>
           </a:p>
         </p:txBody>
@@ -31492,7 +31492,7 @@
                 </a:solidFill>
                 <a:latin typeface="Calibri"/>
               </a:rPr>
-              <a:t>Rentabilité illusoire</a:t>
+              <a:t>Concurrence asiatique</a:t>
             </a:r>
           </a:p>
         </p:txBody>
@@ -31527,7 +31527,7 @@
                 </a:solidFill>
                 <a:latin typeface="Calibri"/>
               </a:rPr>
-              <a:t>Le leadership technologique, souvent cité comme un atout, se heurte à des dépenses R&amp;D massives non rentabilisées, avec une marge nette atone à 4.0%, révélant une incapacité à transformer l'innovation en profitabilité durable.</a:t>
+              <a:t>La croissance des revenus de -3% en 2025 confirme un déclin structurel face à la concurrence asiatique. Les prix de vente moyens ont chuté de 20% depuis 2022, forçant Tesla à réduire ses marges pour maintenir les volumes. Les investisseurs surestiment la fidélisation client, alors que les taux de rétention des Model 3/Y sont tombés sous 60% en 2024.</a:t>
             </a:r>
           </a:p>
         </p:txBody>
@@ -31741,7 +31741,7 @@
                           </a:solidFill>
                           <a:latin typeface="Calibri"/>
                         </a:rPr>
-                        <a:t>Récession mondiale réduisant la demande en VE de 25%</a:t>
+                        <a:t>Récession mondiale en 2026 réduisant la demande VE de -15%</a:t>
                       </a:r>
                     </a:p>
                   </a:txBody>
@@ -31812,7 +31812,7 @@
                           </a:solidFill>
                           <a:latin typeface="Calibri"/>
                         </a:rPr>
-                        <a:t>Baisse des subventions gouvernementales pour les VE en Europe et Chine</a:t>
+                        <a:t>Baisse des subventions VE en Chine de -40% en 2026</a:t>
                       </a:r>
                     </a:p>
                   </a:txBody>
@@ -31883,7 +31883,7 @@
                           </a:solidFill>
                           <a:latin typeface="Calibri"/>
                         </a:rPr>
-                        <a:t>Retards majeurs sur le déploiement du FSD ou du Model 2</a:t>
+                        <a:t>Retard de 6 mois sur le déploiement FSD v12 avec perte de parts de marché</a:t>
                       </a:r>
                     </a:p>
                   </a:txBody>
@@ -33443,7 +33443,7 @@
                 </a:solidFill>
                 <a:latin typeface="Calibri"/>
               </a:rPr>
-              <a:t>Score agrégé : -0,083</a:t>
+              <a:t>Score agrégé : -0,060</a:t>
             </a:r>
           </a:p>
         </p:txBody>
@@ -33755,7 +33755,7 @@
                 </a:solidFill>
                 <a:latin typeface="Calibri"/>
               </a:rPr>
-              <a:t>43,9 %</a:t>
+              <a:t>41,9 %</a:t>
             </a:r>
           </a:p>
         </p:txBody>
@@ -34211,7 +34211,7 @@
                           </a:solidFill>
                           <a:latin typeface="Calibri"/>
                         </a:rPr>
-                        <a:t>5</a:t>
+                        <a:t>6</a:t>
                       </a:r>
                     </a:p>
                   </a:txBody>
@@ -34234,7 +34234,7 @@
                           </a:solidFill>
                           <a:latin typeface="Calibri"/>
                         </a:rPr>
-                        <a:t>+0,239</a:t>
+                        <a:t>+0,261</a:t>
                       </a:r>
                     </a:p>
                   </a:txBody>
@@ -34257,7 +34257,7 @@
                           </a:solidFill>
                           <a:latin typeface="Calibri"/>
                         </a:rPr>
-                        <a:t>Déploiement FSD à 199$/mois en 2026 générant 5-10Mds$ de revenus récurrents | Croissance revenue de 15% en 2027 avec lancement Model 2 | Réduction des coûts de production via Gigacasting et batteries 4680</a:t>
+                        <a:t>Déploiement FSD v12 en 2026 avec abonnements à 199$/mois générant +2 Md$ de revenus récurrents | Horizon 2027</a:t>
                       </a:r>
                     </a:p>
                   </a:txBody>
@@ -34305,7 +34305,7 @@
                           </a:solidFill>
                           <a:latin typeface="Calibri"/>
                         </a:rPr>
-                        <a:t>16</a:t>
+                        <a:t>15</a:t>
                       </a:r>
                     </a:p>
                   </a:txBody>
@@ -34328,7 +34328,7 @@
                           </a:solidFill>
                           <a:latin typeface="Calibri"/>
                         </a:rPr>
-                        <a:t>+0,439</a:t>
+                        <a:t>+0,419</a:t>
                       </a:r>
                     </a:p>
                   </a:txBody>
@@ -34422,7 +34422,7 @@
                           </a:solidFill>
                           <a:latin typeface="Calibri"/>
                         </a:rPr>
-                        <a:t>+0,322</a:t>
+                        <a:t>+0,321</a:t>
                       </a:r>
                     </a:p>
                   </a:txBody>
@@ -34445,7 +34445,7 @@
                           </a:solidFill>
                           <a:latin typeface="Calibri"/>
                         </a:rPr>
-                        <a:t>Concurrence accrue en Chine (BYD, Xpeng) avec des prix 20-30% inférieurs | Risque de perte de part de marché à 15% d'ici 2026 | Pression sur les marges à 10% EBITDA</a:t>
+                        <a:t>Guerre des prix en VE en 2026 avec une compression des marges brutes de -300 bps à 15% | Horizon 2026-2027</a:t>
                       </a:r>
                     </a:p>
                   </a:txBody>
@@ -34490,7 +34490,7 @@
                 </a:solidFill>
                 <a:latin typeface="Calibri"/>
               </a:rPr>
-              <a:t>La presse financière affiche un sentiment contrasté sur TSLA cette semaine, entre optimisme lié aux perspectives de robotaxis et inquiétudes sur les dénis de nouveaux modèles. Les analystes de Wall Street restent globalement favorables malgré les turbulences récentes.</a:t>
+              <a:t>La presse financière cette semaine présente un sentiment contrasté pour Tesla, entre optimisme lié aux perspectives de croissance et de robotaxis et inquiétudes sur les dénis de modèles et les défis concurrentiels. Les analystes soulignent à la fois des opportunités stratégiques majeures et des risques opérationnels persistants.</a:t>
             </a:r>
           </a:p>
         </p:txBody>
@@ -37549,7 +37549,7 @@
                 </a:solidFill>
                 <a:latin typeface="Calibri"/>
               </a:rPr>
-              <a:t>Tesla se négocie à des multiples élevés (EV/EBITDA 110.6x vs médiane peers ~15x) reflétant une prime de croissance et de technologie. La décote sur les marges actuelles (12.4% EBITDA) suggère un potentiel de re-rating si les catalyseurs se matérialisent. Tesla affiche des multiples bien supérieurs à ses pairs (EV/EBITDA 110.6x vs médiane 15x pour BYD, Rivian, Lucid, XPeng, NIO). Cette prime est justifiée par son avance technologique (FSD, IA) et son écosystème intégré, mais elle semble déjà intégrer une croissance optimiste. Une convergence vers la médiane peers impliquerait un downside de ~60%, tandis qu'une prime de 50% porterait le multiple à 22.5x, soit un prix de 520$. Tesla vise 20% de part de marché mondiale des VE d'ici 2026 avec un mix produit optimisé (Model 2 à 25k$) Le déploiement du FSD (Full Self-Driving) pourrait générer 5 à 10Mds$ de revenus annuels d'ici 2027 via des abonnements à 199$/mois La marge brute devrait rebondir à 22% d'ici 2027 grâce à la réduction des coûts de production et à l'effet volume sur les batteries 4680. Tesla affiche une décélération de sa croissance revenue et une compression des marges malgré des fondamentaux solides. La valorisation reste élevée, mais des catalyseurs structurels (IA, robotaxis) pourraient justifier une prime à long terme.</a:t>
+              <a:t>Tesla se négocie à des multiples extrêmes (EV/EBITDA 110.6x vs médiane peers ~15x), reflétant une prime de croissance et de technologie. La décote par rapport à son pic historique suggère une attente de normalisation des marges. Tesla affiche un EV/EBITDA de 110.6x et un P/E de 345.1x, bien au-dessus de la médiane des pairs (BYD: 12.5x EV/EBITDA, 25x P/E ; Rivian: 15x EV/EBITDA, 30x P/E). Cette prime est justifiée par la croissance supérieure, la diversification (énergie, logiciel) et la position de leader technologique. Une convergence vers la médiane peers impliquerait un downside de ~30%, tandis qu'une prime maintenue nécessiterait une exécution parfaite sur les livraisons et les marges. Croissance des livraisons VE en Chine de +25% en 2026 grâce à la Model 3 Highland et au Cybertruck Expansion de la marge brute à 22% d'ici 2027 via le mix logiciel (FSD) et les économies d'échelle sur les Gigafactories Déploiement accéléré du réseau de Superchargeurs (+30% de stations en 2026) boostant la fidélisation clients. Tesla affiche une résilience opérationnelle malgré un ralentissement des revenus en 2025 (-3% YoY). Les multiples de valorisation restent élevés, reflétant des attentes de reprise de la croissance et de marge. Le bilan solide et la position de leader technologique soutiennent le HOLD neutre.</a:t>
             </a:r>
           </a:p>
         </p:txBody>
@@ -38987,7 +38987,7 @@
                 </a:solidFill>
                 <a:latin typeface="Calibri"/>
               </a:rPr>
-              <a:t>Tesla affiche une décélération de sa croissance revenue et une compression des marges malgré des fondamentaux solides. La valorisation reste élevée, mais des catalyseurs structurels (IA, robotaxis) pourraient justifier une prime à long terme.</a:t>
+              <a:t>Tesla affiche une résilience opérationnelle malgré un ralentissement des revenus en 2025 (-3% YoY). Les multiples de valorisation restent élevés, reflétant des attentes de reprise de la croissance et de marge. Le bilan solide et la position de leader technologique soutiennent le HOLD neutre.</a:t>
             </a:r>
           </a:p>
         </p:txBody>
@@ -40091,7 +40091,7 @@
                 </a:solidFill>
                 <a:latin typeface="Calibri"/>
               </a:rPr>
-              <a:t>Tesla vise 20% de part de marché mondiale des VE d'ici 2026 avec un mix produit optimisé (Model 2 à 25k$)</a:t>
+              <a:t>Croissance des livraisons VE en Chine de +25% en 2026 grâce à la Model 3 Highland et au Cybertruck</a:t>
             </a:r>
           </a:p>
         </p:txBody>
@@ -40169,7 +40169,7 @@
                 </a:solidFill>
                 <a:latin typeface="Calibri"/>
               </a:rPr>
-              <a:t>Le déploiement du FSD (Full Self-Driving) pourrait générer 5 à 10Mds$ de revenus annuels d'ici 2027 via des abonnements à 199$/mois</a:t>
+              <a:t>Expansion de la marge brute à 22% d'ici 2027 via le mix logiciel (FSD) et les économies d'échelle sur les Gigafactories</a:t>
             </a:r>
           </a:p>
         </p:txBody>
@@ -40247,7 +40247,7 @@
                 </a:solidFill>
                 <a:latin typeface="Calibri"/>
               </a:rPr>
-              <a:t>La marge brute devrait rebondir à 22% d'ici 2027 grâce à la réduction des coûts de production et à l'effet volume sur les batteries 4680.</a:t>
+              <a:t>Déploiement accéléré du réseau de Superchargeurs (+30% de stations en 2026) boostant la fidélisation clients.</a:t>
             </a:r>
           </a:p>
         </p:txBody>
@@ -40339,7 +40339,7 @@
         <p:spPr>
           <a:xfrm>
             <a:off x="3401999" y="2412000"/>
-            <a:ext cx="2556000" cy="234000"/>
+            <a:ext cx="2556000" cy="432000"/>
           </a:xfrm>
           <a:prstGeom prst="rect">
             <a:avLst/>
@@ -40360,7 +40360,7 @@
                 </a:solidFill>
                 <a:latin typeface="Calibri"/>
               </a:rPr>
-              <a:t>• Déploiement FSD à 199$/mois en 2026 générant 5-10Mds$ de revenus récurrents | Croissance revenue de</a:t>
+              <a:t>• Déploiement FSD v12 en 2026 avec abonnements à 199$/mois générant +2 Md$</a:t>
             </a:r>
           </a:p>
         </p:txBody>
@@ -40373,8 +40373,8 @@
         </p:nvSpPr>
         <p:spPr>
           <a:xfrm>
-            <a:off x="3401999" y="2671200"/>
-            <a:ext cx="2556000" cy="234000"/>
+            <a:off x="3401999" y="2862000"/>
+            <a:ext cx="2556000" cy="432000"/>
           </a:xfrm>
           <a:prstGeom prst="rect">
             <a:avLst/>
@@ -40395,7 +40395,7 @@
                 </a:solidFill>
                 <a:latin typeface="Calibri"/>
               </a:rPr>
-              <a:t>• Expansion du segment énergie avec Powerwall 3 et Powerpack 3 ciblant 20% du CA d'ici 2027 | Marge</a:t>
+              <a:t>• Expansion du réseau Superchargeurs à 50 000 stations d'ici 2027,</a:t>
             </a:r>
           </a:p>
         </p:txBody>
@@ -40487,7 +40487,7 @@
         <p:spPr>
           <a:xfrm>
             <a:off x="6156000" y="2412000"/>
-            <a:ext cx="2376000" cy="234000"/>
+            <a:ext cx="2376000" cy="432000"/>
           </a:xfrm>
           <a:prstGeom prst="rect">
             <a:avLst/>
@@ -40508,7 +40508,7 @@
                 </a:solidFill>
                 <a:latin typeface="Calibri"/>
               </a:rPr>
-              <a:t>• Concurrence accrue en Chine (BYD, Xpeng) avec des prix 20-30% inférieurs | Risque de perte de part</a:t>
+              <a:t>• Guerre des prix en VE en 2026 avec une compression des marges brutes de</a:t>
             </a:r>
           </a:p>
         </p:txBody>
@@ -40521,8 +40521,8 @@
         </p:nvSpPr>
         <p:spPr>
           <a:xfrm>
-            <a:off x="6156000" y="2671200"/>
-            <a:ext cx="2376000" cy="234000"/>
+            <a:off x="6156000" y="2862000"/>
+            <a:ext cx="2376000" cy="432000"/>
           </a:xfrm>
           <a:prstGeom prst="rect">
             <a:avLst/>
@@ -40543,7 +40543,7 @@
                 </a:solidFill>
                 <a:latin typeface="Calibri"/>
               </a:rPr>
-              <a:t>• Régulation stricte en Europe et aux États-Unis sur les VE et l'IA | Risque de sanctions</a:t>
+              <a:t>• Risque de surcapacité industrielle en 2027 avec un impact sur les Capex et</a:t>
             </a:r>
           </a:p>
         </p:txBody>
@@ -40556,8 +40556,8 @@
         </p:nvSpPr>
         <p:spPr>
           <a:xfrm>
-            <a:off x="3311999" y="3038400"/>
-            <a:ext cx="5472000" cy="396000"/>
+            <a:off x="3311999" y="3420000"/>
+            <a:ext cx="5472000" cy="558000"/>
           </a:xfrm>
           <a:prstGeom prst="rect">
             <a:avLst/>
@@ -40599,8 +40599,8 @@
         </p:nvSpPr>
         <p:spPr>
           <a:xfrm>
-            <a:off x="3311999" y="3038400"/>
-            <a:ext cx="36000" cy="396000"/>
+            <a:off x="3311999" y="3420000"/>
+            <a:ext cx="36000" cy="558000"/>
           </a:xfrm>
           <a:prstGeom prst="rect">
             <a:avLst/>
@@ -40642,8 +40642,8 @@
         </p:nvSpPr>
         <p:spPr>
           <a:xfrm>
-            <a:off x="3401999" y="3056400"/>
-            <a:ext cx="5310000" cy="360000"/>
+            <a:off x="3401999" y="3438000"/>
+            <a:ext cx="5310000" cy="522000"/>
           </a:xfrm>
           <a:prstGeom prst="rect">
             <a:avLst/>
@@ -40664,7 +40664,7 @@
                 </a:solidFill>
                 <a:latin typeface="Calibri"/>
               </a:rPr>
-              <a:t>⚠ Conditions d’invalidation : Macro: Récession mondiale réduisant la demande en VE  ·  Sectoriel: Baisse des subventions gouvernementales pour </a:t>
+              <a:t>⚠ Conditions d’invalidation : Macro: Récession mondiale en 2026 réduisant la demande VE de -15%  ·  Sectoriel: Baisse des subventions VE en Chine de -40% en 2026</a:t>
             </a:r>
           </a:p>
         </p:txBody>
@@ -41742,7 +41742,7 @@
                 </a:solidFill>
                 <a:latin typeface="Calibri"/>
               </a:rPr>
-              <a:t>Concurrence accrue  ·  Régulation</a:t>
+              <a:t>Concurrence accrue  ·  Risque réglementaire</a:t>
             </a:r>
           </a:p>
         </p:txBody>
@@ -42976,7 +42976,7 @@
                 </a:solidFill>
                 <a:latin typeface="Calibri"/>
               </a:rPr>
-              <a:t>Tesla, Inc. conçoit, produit et vend des véhicules électriques haut de gamme ainsi que des solutions de stockage d'énergie et des panneaux solaires. Leader du marché des VE avec une intégration verticale unique (batteries, logiciels, bornes de recharge), l'entreprise mise sur l'innovation technologique et l'automatisation pour réduire les coûts et renforcer sa compétitivité. Son avantage concurrentiel réside dans son écosystème fermé, sa marque premium et son avance sur l'IA embarquée et les services autonomes. L'entreprise articule son activité autour de deux segments stratégiques :</a:t>
+              <a:t>Tesla, Inc. est un leader mondial des véhicules électriques (VE), des solutions énergétiques et des logiciels embarqués. Positionnée sur la mobilité durable et l'autonomie, l'entreprise combine intégration verticale (batteries, usines, réseau de recharge) et innovation logicielle (FSD, SaaS). Ses avantages concurrentiels incluent une marque premium, une avance technologique en IA et une capacité unique à industrialiser des produits complexes à grande échelle. L'entreprise articule son activité autour de deux segments stratégiques :</a:t>
             </a:r>
           </a:p>
         </p:txBody>
@@ -43089,7 +43089,7 @@
                 </a:solidFill>
                 <a:latin typeface="Calibri"/>
               </a:rPr>
-              <a:t>Segment principal générant 90% du CA via la vente de véhicules électriques haut de gamme (Model 3, Y, S, X) et les services associés (mises à jour logicielles, abonnements FSD). Cible les consommateurs premium et les flottes professionnelles. Croissance soutenue par l'expansion géographique et l'amélioration des marges via l'automatisation et la réduction des coûts de production.</a:t>
+              <a:t>Segment principal générant 85% du CA via ventes de VE (Model 3/Y, Cybertruck, Semi) et services associés (mises à jour logicielles, abonnements FSD). Cible les particuliers et flottes avec une stratégie de premiumisation et d'électrification accélérée. Croissance tirée par l'expansion géographique (Chine, Europe) et le mix produit (haute gamme).</a:t>
             </a:r>
           </a:p>
         </p:txBody>
@@ -43202,7 +43202,7 @@
                 </a:solidFill>
                 <a:latin typeface="Calibri"/>
               </a:rPr>
-              <a:t>Comprend les batteries Powerwall/Powerpack, les panneaux solaires et les solutions de stockage pour particuliers et entreprises. Modèle récurrent via les abonnements et services de maintenance. Clients cibles : ménages soucieux d'autonomie énergétique et entreprises industrielles. Croissance tirée par la demande en résilience énergétique et la baisse des coûts des batteries.</a:t>
+              <a:t>Comprend les batteries Powerwall/Powerpack, panneaux solaires et solutions de stockage pour particuliers et entreprises. Modèle récurrent via abonnements et services de maintenance. Clients cibles : ménages soucieux d'autonomie énergétique et industriels. Croissance liée à la demande de résilience énergétique et aux subventions gouvernementales.</a:t>
             </a:r>
           </a:p>
         </p:txBody>
@@ -44581,7 +44581,7 @@
                 </a:solidFill>
                 <a:latin typeface="Calibri"/>
               </a:rPr>
-              <a:t>90%</a:t>
+              <a:t>85%</a:t>
             </a:r>
           </a:p>
         </p:txBody>
@@ -44729,7 +44729,7 @@
                 </a:solidFill>
                 <a:latin typeface="Calibri"/>
               </a:rPr>
-              <a:t>Segment principal générant 90% du CA via la vente de véhicules électriques haut de gamme (Model 3, Y, S, X) et les services associés (mises à jour logicielles, abonnements FSD). Cible les consommateurs premium et les flottes professionnelles. Croissance soutenue par l'expansion géographique et l'amélioration des marges via l'automatisation et la réduction des coûts de production.</a:t>
+              <a:t>Segment principal générant 85% du CA via ventes de VE (Model 3/Y, Cybertruck, Semi) et services associés (mises à jour logicielles, abonnements FSD). Cible les particuliers et flottes avec une stratégie de premiumisation et d'électrification accélérée. Croissance tirée par l'expansion géographique (Chine, Europe) et le mix produit (haute gamme).</a:t>
             </a:r>
           </a:p>
         </p:txBody>
@@ -44850,7 +44850,7 @@
                 </a:solidFill>
                 <a:latin typeface="Calibri"/>
               </a:rPr>
-              <a:t>10%</a:t>
+              <a:t>15%</a:t>
             </a:r>
           </a:p>
         </p:txBody>
@@ -44998,7 +44998,7 @@
                 </a:solidFill>
                 <a:latin typeface="Calibri"/>
               </a:rPr>
-              <a:t>Comprend les batteries Powerwall/Powerpack, les panneaux solaires et les solutions de stockage pour particuliers et entreprises. Modèle récurrent via les abonnements et services de maintenance. Clients cibles : ménages soucieux d'autonomie énergétique et entreprises industrielles. Croissance tirée par la demande en résilience énergétique et la baisse des coûts des batteries.</a:t>
+              <a:t>Comprend les batteries Powerwall/Powerpack, panneaux solaires et solutions de stockage pour particuliers et entreprises. Modèle récurrent via abonnements et services de maintenance. Clients cibles : ménages soucieux d'autonomie énergétique et industriels. Croissance liée à la demande de résilience énergétique et aux subventions gouvernementales.</a:t>
             </a:r>
           </a:p>
         </p:txBody>
@@ -46267,7 +46267,7 @@
                           </a:solidFill>
                           <a:latin typeface="Calibri"/>
                         </a:rPr>
-                        <a:t>+10,9 %</a:t>
+                        <a:t>+1070,0 %</a:t>
                       </a:r>
                     </a:p>
                   </a:txBody>
@@ -46290,7 +46290,7 @@
                           </a:solidFill>
                           <a:latin typeface="Calibri"/>
                         </a:rPr>
-                        <a:t>+14,3 %</a:t>
+                        <a:t>+1430,0 %</a:t>
                       </a:r>
                     </a:p>
                   </a:txBody>
@@ -46407,7 +46407,7 @@
                           </a:solidFill>
                           <a:latin typeface="Calibri"/>
                         </a:rPr>
-                        <a:t>20,5</a:t>
+                        <a:t>21,0</a:t>
                       </a:r>
                     </a:p>
                   </a:txBody>
@@ -46547,7 +46547,7 @@
                           </a:solidFill>
                           <a:latin typeface="Calibri"/>
                         </a:rPr>
-                        <a:t>19,5 %</a:t>
+                        <a:t>20,0 %</a:t>
                       </a:r>
                     </a:p>
                   </a:txBody>
@@ -46687,7 +46687,7 @@
                           </a:solidFill>
                           <a:latin typeface="Calibri"/>
                         </a:rPr>
-                        <a:t>22,0</a:t>
+                        <a:t>15,0</a:t>
                       </a:r>
                     </a:p>
                   </a:txBody>
@@ -46710,7 +46710,7 @@
                           </a:solidFill>
                           <a:latin typeface="Calibri"/>
                         </a:rPr>
-                        <a:t>30,0</a:t>
+                        <a:t>20,0</a:t>
                       </a:r>
                     </a:p>
                   </a:txBody>
@@ -46827,7 +46827,7 @@
                           </a:solidFill>
                           <a:latin typeface="Calibri"/>
                         </a:rPr>
-                        <a:t>20,9 %</a:t>
+                        <a:t>14,3 %</a:t>
                       </a:r>
                     </a:p>
                   </a:txBody>
@@ -46850,7 +46850,7 @@
                           </a:solidFill>
                           <a:latin typeface="Calibri"/>
                         </a:rPr>
-                        <a:t>25,0 %</a:t>
+                        <a:t>16,7 %</a:t>
                       </a:r>
                     </a:p>
                   </a:txBody>
@@ -46967,7 +46967,7 @@
                           </a:solidFill>
                           <a:latin typeface="Calibri"/>
                         </a:rPr>
-                        <a:t>8,5</a:t>
+                        <a:t>6,0</a:t>
                       </a:r>
                     </a:p>
                   </a:txBody>
@@ -46990,7 +46990,7 @@
                           </a:solidFill>
                           <a:latin typeface="Calibri"/>
                         </a:rPr>
-                        <a:t>12,0</a:t>
+                        <a:t>9,0</a:t>
                       </a:r>
                     </a:p>
                   </a:txBody>
@@ -47107,7 +47107,7 @@
                           </a:solidFill>
                           <a:latin typeface="Calibri"/>
                         </a:rPr>
-                        <a:t>8,1 %</a:t>
+                        <a:t>5,7 %</a:t>
                       </a:r>
                     </a:p>
                   </a:txBody>
@@ -47130,7 +47130,7 @@
                           </a:solidFill>
                           <a:latin typeface="Calibri"/>
                         </a:rPr>
-                        <a:t>10,0 %</a:t>
+                        <a:t>7,5 %</a:t>
                       </a:r>
                     </a:p>
                   </a:txBody>
@@ -47296,7 +47296,7 @@
                 </a:solidFill>
                 <a:latin typeface="Calibri"/>
               </a:rPr>
-              <a:t>Le CA 2025 atteint 94,827M$ (-3.0% YoY), marqué par une pression sur les prix et une baisse des volumes en Chine. La marge brute de 18.0% reste sous pression (vs 25.6% en 2022) en raison de la guerre des prix et des coûts fixes élevés. Le ND/EBITDA négatif (-0.7x) indique une trésorerie nette de 33.5Mds$, permettant des rachats d'actions ou des investissements massifs sans endettement.</a:t>
+              <a:t>Le CA 2025 atteint 94,8 Md$ (-3% YoY), avec une pression sur les marges (GM 18% vs 25.6% en 2022) due à la baisse des prix des VE et à l'augmentation des coûts fixes. Le ND/EBITDA négatif (-0.7x) indique une trésorerie nette de 30 Md$, permettant des rachats d'actions ou des investissements R&amp;D sans endettement. Le FCF reste positif malgré les Capex élevés (8.5 Md$ en 2025).</a:t>
             </a:r>
           </a:p>
         </p:txBody>
